--- a/docs/Capstone_Presentation.pptx
+++ b/docs/Capstone_Presentation.pptx
@@ -17,6 +17,7 @@
     <p:sldId id="262" r:id="rId33"/>
     <p:sldId id="263" r:id="rId34"/>
     <p:sldId id="264" r:id="rId35"/>
+    <p:sldId id="280" r:id="rId12"/>
     <p:sldId id="265" r:id="rId36"/>
     <p:sldId id="266" r:id="rId26"/>
     <p:sldId id="267" r:id="rId25"/>
@@ -12435,6 +12436,683 @@
                 </a:solidFill>
               </a:rPr>
               <a:t>[Describe corrections made, things that required manual verification, etc.]</a:t>
+            </a:r>
+          </a:p>
+        </p:txBody>
+      </p:sp>
+    </p:spTree>
+  </p:cSld>
+  <p:clrMapOvr>
+    <a:masterClrMapping/>
+  </p:clrMapOvr>
+</p:sld>
+</file>
+
+<file path=ppt/slides/slide25.xml><?xml version="1.0" encoding="utf-8"?>
+<p:sld xmlns:a="http://schemas.openxmlformats.org/drawingml/2006/main" xmlns:p="http://schemas.openxmlformats.org/presentationml/2006/main" xmlns:r="http://schemas.openxmlformats.org/officeDocument/2006/relationships">
+  <p:cSld>
+    <p:spTree>
+      <p:nvGrpSpPr>
+        <p:cNvPr id="1" name=""/>
+        <p:cNvGrpSpPr/>
+        <p:nvPr/>
+      </p:nvGrpSpPr>
+      <p:grpSpPr/>
+      <p:sp>
+        <p:nvSpPr>
+          <p:cNvPr id="2" name="Title 1"/>
+          <p:cNvSpPr>
+            <a:spLocks noGrp="1"/>
+          </p:cNvSpPr>
+          <p:nvPr>
+            <p:ph type="title"/>
+          </p:nvPr>
+        </p:nvSpPr>
+        <p:spPr/>
+        <p:txBody>
+          <a:bodyPr/>
+          <a:lstStyle/>
+          <a:p>
+            <a:r>
+              <a:t>Paths We Explored</a:t>
+            </a:r>
+          </a:p>
+        </p:txBody>
+      </p:sp>
+      <p:sp>
+        <p:nvSpPr>
+          <p:cNvPr id="3" name="Content Placeholder 2"/>
+          <p:cNvSpPr>
+            <a:spLocks noGrp="1"/>
+          </p:cNvSpPr>
+          <p:nvPr>
+            <p:ph idx="1"/>
+          </p:nvPr>
+        </p:nvSpPr>
+        <p:spPr/>
+        <p:txBody>
+          <a:bodyPr/>
+          <a:lstStyle/>
+          <a:p/>
+        </p:txBody>
+      </p:sp>
+      <p:sp>
+        <p:nvSpPr>
+          <p:cNvPr id="4" name="Rectangle 3"/>
+          <p:cNvSpPr/>
+          <p:nvPr/>
+        </p:nvSpPr>
+        <p:spPr>
+          <a:xfrm>
+            <a:off x="0" y="800000"/>
+            <a:ext cx="12192000" cy="80000"/>
+          </a:xfrm>
+          <a:prstGeom prst="rect">
+            <a:avLst/>
+          </a:prstGeom>
+          <a:solidFill>
+            <a:srgbClr val="FE3082"/>
+          </a:solidFill>
+          <a:ln>
+            <a:noFill/>
+          </a:ln>
+        </p:spPr>
+        <p:style>
+          <a:lnRef idx="1">
+            <a:schemeClr val="accent1"/>
+          </a:lnRef>
+          <a:fillRef idx="3">
+            <a:schemeClr val="accent1"/>
+          </a:fillRef>
+          <a:effectRef idx="2">
+            <a:schemeClr val="accent1"/>
+          </a:effectRef>
+          <a:fontRef idx="minor">
+            <a:schemeClr val="lt1"/>
+          </a:fontRef>
+        </p:style>
+        <p:txBody>
+          <a:bodyPr rtlCol="0" anchor="ctr"/>
+          <a:lstStyle/>
+          <a:p>
+            <a:pPr algn="ctr"/>
+          </a:p>
+        </p:txBody>
+      </p:sp>
+      <p:sp>
+        <p:nvSpPr>
+          <p:cNvPr id="5" name="Rounded Rectangle 4"/>
+          <p:cNvSpPr/>
+          <p:nvPr/>
+        </p:nvSpPr>
+        <p:spPr>
+          <a:xfrm>
+            <a:off x="400000" y="1000000"/>
+            <a:ext cx="3500000" cy="2200000"/>
+          </a:xfrm>
+          <a:prstGeom prst="roundRect">
+            <a:avLst/>
+          </a:prstGeom>
+          <a:solidFill>
+            <a:srgbClr val="FFF3E0"/>
+          </a:solidFill>
+          <a:ln>
+            <a:noFill/>
+          </a:ln>
+        </p:spPr>
+        <p:style>
+          <a:lnRef idx="1">
+            <a:schemeClr val="accent1"/>
+          </a:lnRef>
+          <a:fillRef idx="3">
+            <a:schemeClr val="accent1"/>
+          </a:fillRef>
+          <a:effectRef idx="2">
+            <a:schemeClr val="accent1"/>
+          </a:effectRef>
+          <a:fontRef idx="minor">
+            <a:schemeClr val="lt1"/>
+          </a:fontRef>
+        </p:style>
+        <p:txBody>
+          <a:bodyPr rtlCol="0" anchor="ctr" wrap="square"/>
+          <a:lstStyle/>
+          <a:p>
+            <a:pPr algn="ctr"/>
+            <a:r>
+              <a:rPr sz="1600" b="1">
+                <a:solidFill>
+                  <a:srgbClr val="E65100"/>
+                </a:solidFill>
+              </a:rPr>
+              <a:t>Construction Data</a:t>
+            </a:r>
+          </a:p>
+          <a:p>
+            <a:pPr algn="ctr">
+              <a:spcBef>
+                <a:spcPts val="800"/>
+              </a:spcBef>
+            </a:pPr>
+            <a:r>
+              <a:rPr sz="1200" i="1">
+                <a:solidFill>
+                  <a:srgbClr val="555555"/>
+                </a:solidFill>
+              </a:rPr>
+              <a:t>Explored</a:t>
+            </a:r>
+          </a:p>
+          <a:p>
+            <a:pPr>
+              <a:spcBef>
+                <a:spcPts val="1200"/>
+              </a:spcBef>
+            </a:pPr>
+            <a:r>
+              <a:rPr sz="1100">
+                <a:solidFill>
+                  <a:srgbClr val="2D2D2D"/>
+                </a:solidFill>
+              </a:rPr>
+              <a:t>•  Investigated NYC construction data as enrichment</a:t>
+            </a:r>
+          </a:p>
+          <a:p>
+            <a:pPr>
+              <a:spcBef>
+                <a:spcPts val="400"/>
+              </a:spcBef>
+            </a:pPr>
+            <a:r>
+              <a:rPr sz="1100">
+                <a:solidFill>
+                  <a:srgbClr val="2D2D2D"/>
+                </a:solidFill>
+              </a:rPr>
+              <a:t>•  [Why we moved on: data quality, coverage, or relevance]</a:t>
+            </a:r>
+          </a:p>
+        </p:txBody>
+      </p:sp>
+      <p:sp>
+        <p:nvSpPr>
+          <p:cNvPr id="6" name="Rounded Rectangle 5"/>
+          <p:cNvSpPr/>
+          <p:nvPr/>
+        </p:nvSpPr>
+        <p:spPr>
+          <a:xfrm>
+            <a:off x="4200000" y="1000000"/>
+            <a:ext cx="3500000" cy="2200000"/>
+          </a:xfrm>
+          <a:prstGeom prst="roundRect">
+            <a:avLst/>
+          </a:prstGeom>
+          <a:solidFill>
+            <a:srgbClr val="E3F2FD"/>
+          </a:solidFill>
+          <a:ln>
+            <a:noFill/>
+          </a:ln>
+        </p:spPr>
+        <p:style>
+          <a:lnRef idx="1">
+            <a:schemeClr val="accent1"/>
+          </a:lnRef>
+          <a:fillRef idx="3">
+            <a:schemeClr val="accent1"/>
+          </a:fillRef>
+          <a:effectRef idx="2">
+            <a:schemeClr val="accent1"/>
+          </a:effectRef>
+          <a:fontRef idx="minor">
+            <a:schemeClr val="lt1"/>
+          </a:fontRef>
+        </p:style>
+        <p:txBody>
+          <a:bodyPr rtlCol="0" anchor="ctr" wrap="square"/>
+          <a:lstStyle/>
+          <a:p>
+            <a:pPr algn="ctr"/>
+            <a:r>
+              <a:rPr sz="1600" b="1">
+                <a:solidFill>
+                  <a:srgbClr val="0D47A1"/>
+                </a:solidFill>
+              </a:rPr>
+              <a:t>Pattern B (ETL)</a:t>
+            </a:r>
+          </a:p>
+          <a:p>
+            <a:pPr algn="ctr">
+              <a:spcBef>
+                <a:spcPts val="800"/>
+              </a:spcBef>
+            </a:pPr>
+            <a:r>
+              <a:rPr sz="1200" i="1">
+                <a:solidFill>
+                  <a:srgbClr val="555555"/>
+                </a:solidFill>
+              </a:rPr>
+              <a:t>Built and Tested</a:t>
+            </a:r>
+          </a:p>
+          <a:p>
+            <a:pPr>
+              <a:spcBef>
+                <a:spcPts val="1200"/>
+              </a:spcBef>
+            </a:pPr>
+            <a:r>
+              <a:rPr sz="1100">
+                <a:solidFill>
+                  <a:srgbClr val="2D2D2D"/>
+                </a:solidFill>
+              </a:rPr>
+              <a:t>•  AWS Glue + PySpark for Silver layer cleaning</a:t>
+            </a:r>
+          </a:p>
+          <a:p>
+            <a:pPr>
+              <a:spcBef>
+                <a:spcPts val="400"/>
+              </a:spcBef>
+            </a:pPr>
+            <a:r>
+              <a:rPr sz="1100">
+                <a:solidFill>
+                  <a:srgbClr val="2D2D2D"/>
+                </a:solidFill>
+              </a:rPr>
+              <a:t>•  DataFrame transformations for data quality</a:t>
+            </a:r>
+          </a:p>
+          <a:p>
+            <a:pPr>
+              <a:spcBef>
+                <a:spcPts val="400"/>
+              </a:spcBef>
+            </a:pPr>
+            <a:r>
+              <a:rPr sz="1100">
+                <a:solidFill>
+                  <a:srgbClr val="2D2D2D"/>
+                </a:solidFill>
+              </a:rPr>
+              <a:t>•  [Additional Pattern B details]</a:t>
+            </a:r>
+          </a:p>
+        </p:txBody>
+      </p:sp>
+      <p:sp>
+        <p:nvSpPr>
+          <p:cNvPr id="7" name="Rounded Rectangle 6"/>
+          <p:cNvSpPr/>
+          <p:nvPr/>
+        </p:nvSpPr>
+        <p:spPr>
+          <a:xfrm>
+            <a:off x="8000000" y="1000000"/>
+            <a:ext cx="3500000" cy="2200000"/>
+          </a:xfrm>
+          <a:prstGeom prst="roundRect">
+            <a:avLst/>
+          </a:prstGeom>
+          <a:solidFill>
+            <a:srgbClr val="E8F5E9"/>
+          </a:solidFill>
+          <a:ln>
+            <a:noFill/>
+          </a:ln>
+        </p:spPr>
+        <p:style>
+          <a:lnRef idx="1">
+            <a:schemeClr val="accent1"/>
+          </a:lnRef>
+          <a:fillRef idx="3">
+            <a:schemeClr val="accent1"/>
+          </a:fillRef>
+          <a:effectRef idx="2">
+            <a:schemeClr val="accent1"/>
+          </a:effectRef>
+          <a:fontRef idx="minor">
+            <a:schemeClr val="lt1"/>
+          </a:fontRef>
+        </p:style>
+        <p:txBody>
+          <a:bodyPr rtlCol="0" anchor="ctr" wrap="square"/>
+          <a:lstStyle/>
+          <a:p>
+            <a:pPr algn="ctr"/>
+            <a:r>
+              <a:rPr sz="1600" b="1">
+                <a:solidFill>
+                  <a:srgbClr val="2E7D32"/>
+                </a:solidFill>
+              </a:rPr>
+              <a:t>Pattern A (ELT)</a:t>
+            </a:r>
+          </a:p>
+          <a:p>
+            <a:pPr algn="ctr">
+              <a:spcBef>
+                <a:spcPts val="800"/>
+              </a:spcBef>
+            </a:pPr>
+            <a:r>
+              <a:rPr sz="1200" b="1">
+                <a:solidFill>
+                  <a:srgbClr val="2E7D32"/>
+                </a:solidFill>
+              </a:rPr>
+              <a:t>Selected</a:t>
+            </a:r>
+          </a:p>
+          <a:p>
+            <a:pPr>
+              <a:spcBef>
+                <a:spcPts val="1200"/>
+              </a:spcBef>
+            </a:pPr>
+            <a:r>
+              <a:rPr sz="1100">
+                <a:solidFill>
+                  <a:srgbClr val="2D2D2D"/>
+                </a:solidFill>
+              </a:rPr>
+              <a:t>•  Snowflake + dbt, all SQL</a:t>
+            </a:r>
+          </a:p>
+          <a:p>
+            <a:pPr>
+              <a:spcBef>
+                <a:spcPts val="400"/>
+              </a:spcBef>
+            </a:pPr>
+            <a:r>
+              <a:rPr sz="1100">
+                <a:solidFill>
+                  <a:srgbClr val="2D2D2D"/>
+                </a:solidFill>
+              </a:rPr>
+              <a:t>•  Full pipeline in ~6 min, 32 tests passing</a:t>
+            </a:r>
+          </a:p>
+          <a:p>
+            <a:pPr>
+              <a:spcBef>
+                <a:spcPts val="400"/>
+              </a:spcBef>
+            </a:pPr>
+            <a:r>
+              <a:rPr sz="1100">
+                <a:solidFill>
+                  <a:srgbClr val="2D2D2D"/>
+                </a:solidFill>
+              </a:rPr>
+              <a:t>•  Idempotent, reproducible, tested</a:t>
+            </a:r>
+          </a:p>
+        </p:txBody>
+      </p:sp>
+      <p:sp>
+        <p:nvSpPr>
+          <p:cNvPr id="8" name="TextBox 7"/>
+          <p:cNvSpPr txBox="1"/>
+          <p:nvPr/>
+        </p:nvSpPr>
+        <p:spPr>
+          <a:xfrm>
+            <a:off x="3700000" y="1800000"/>
+            <a:ext cx="700000" cy="500000"/>
+          </a:xfrm>
+          <a:prstGeom prst="rect">
+            <a:avLst/>
+          </a:prstGeom>
+          <a:noFill/>
+        </p:spPr>
+        <p:txBody>
+          <a:bodyPr wrap="none">
+            <a:spAutoFit/>
+          </a:bodyPr>
+          <a:lstStyle/>
+          <a:p>
+            <a:pPr algn="ctr"/>
+            <a:r>
+              <a:rPr sz="3200" b="1">
+                <a:solidFill>
+                  <a:srgbClr val="FE3082"/>
+                </a:solidFill>
+              </a:rPr>
+              <a:t>→</a:t>
+            </a:r>
+          </a:p>
+        </p:txBody>
+      </p:sp>
+      <p:sp>
+        <p:nvSpPr>
+          <p:cNvPr id="9" name="TextBox 8"/>
+          <p:cNvSpPr txBox="1"/>
+          <p:nvPr/>
+        </p:nvSpPr>
+        <p:spPr>
+          <a:xfrm>
+            <a:off x="7500000" y="1800000"/>
+            <a:ext cx="700000" cy="500000"/>
+          </a:xfrm>
+          <a:prstGeom prst="rect">
+            <a:avLst/>
+          </a:prstGeom>
+          <a:noFill/>
+        </p:spPr>
+        <p:txBody>
+          <a:bodyPr wrap="none">
+            <a:spAutoFit/>
+          </a:bodyPr>
+          <a:lstStyle/>
+          <a:p>
+            <a:pPr algn="ctr"/>
+            <a:r>
+              <a:rPr sz="3200" b="1">
+                <a:solidFill>
+                  <a:srgbClr val="FE3082"/>
+                </a:solidFill>
+              </a:rPr>
+              <a:t>→</a:t>
+            </a:r>
+          </a:p>
+        </p:txBody>
+      </p:sp>
+      <p:sp>
+        <p:nvSpPr>
+          <p:cNvPr id="10" name="Rounded Rectangle 9"/>
+          <p:cNvSpPr/>
+          <p:nvPr/>
+        </p:nvSpPr>
+        <p:spPr>
+          <a:xfrm>
+            <a:off x="400000" y="3500000"/>
+            <a:ext cx="11400000" cy="1200000"/>
+          </a:xfrm>
+          <a:prstGeom prst="roundRect">
+            <a:avLst/>
+          </a:prstGeom>
+          <a:solidFill>
+            <a:srgbClr val="FCE4EC"/>
+          </a:solidFill>
+          <a:ln>
+            <a:noFill/>
+          </a:ln>
+        </p:spPr>
+        <p:style>
+          <a:lnRef idx="1">
+            <a:schemeClr val="accent1"/>
+          </a:lnRef>
+          <a:fillRef idx="3">
+            <a:schemeClr val="accent1"/>
+          </a:fillRef>
+          <a:effectRef idx="2">
+            <a:schemeClr val="accent1"/>
+          </a:effectRef>
+          <a:fontRef idx="minor">
+            <a:schemeClr val="lt1"/>
+          </a:fontRef>
+        </p:style>
+        <p:txBody>
+          <a:bodyPr rtlCol="0" anchor="ctr" wrap="square"/>
+          <a:lstStyle/>
+          <a:p>
+            <a:pPr algn="ctr"/>
+            <a:r>
+              <a:rPr sz="1400" b="1">
+                <a:solidFill>
+                  <a:srgbClr val="FE3082"/>
+                </a:solidFill>
+              </a:rPr>
+              <a:t>Why We Chose Pattern A</a:t>
+            </a:r>
+          </a:p>
+          <a:p>
+            <a:pPr>
+              <a:spcBef>
+                <a:spcPts val="600"/>
+              </a:spcBef>
+            </a:pPr>
+            <a:r>
+              <a:rPr sz="1200">
+                <a:solidFill>
+                  <a:srgbClr val="2D2D2D"/>
+                </a:solidFill>
+              </a:rPr>
+              <a:t>•  Strongest reliability guarantee within a one-week sprint (fewer moving parts, fewer failure modes)</a:t>
+            </a:r>
+          </a:p>
+          <a:p>
+            <a:pPr>
+              <a:spcBef>
+                <a:spcPts val="400"/>
+              </a:spcBef>
+            </a:pPr>
+            <a:r>
+              <a:rPr sz="1200">
+                <a:solidFill>
+                  <a:srgbClr val="2D2D2D"/>
+                </a:solidFill>
+              </a:rPr>
+              <a:t>•  Team's SQL strength meant faster iteration and easier debugging</a:t>
+            </a:r>
+          </a:p>
+          <a:p>
+            <a:pPr>
+              <a:spcBef>
+                <a:spcPts val="400"/>
+              </a:spcBef>
+            </a:pPr>
+            <a:r>
+              <a:rPr sz="1200">
+                <a:solidFill>
+                  <a:srgbClr val="2D2D2D"/>
+                </a:solidFill>
+              </a:rPr>
+              <a:t>•  All work from Pattern B exploration informed our data quality understanding</a:t>
+            </a:r>
+          </a:p>
+        </p:txBody>
+      </p:sp>
+      <p:sp>
+        <p:nvSpPr>
+          <p:cNvPr id="11" name="Rounded Rectangle 10"/>
+          <p:cNvSpPr/>
+          <p:nvPr/>
+        </p:nvSpPr>
+        <p:spPr>
+          <a:xfrm>
+            <a:off x="400000" y="5000000"/>
+            <a:ext cx="11400000" cy="1200000"/>
+          </a:xfrm>
+          <a:prstGeom prst="roundRect">
+            <a:avLst/>
+          </a:prstGeom>
+          <a:solidFill>
+            <a:srgbClr val="E3F2FD"/>
+          </a:solidFill>
+          <a:ln>
+            <a:noFill/>
+          </a:ln>
+        </p:spPr>
+        <p:style>
+          <a:lnRef idx="1">
+            <a:schemeClr val="accent1"/>
+          </a:lnRef>
+          <a:fillRef idx="3">
+            <a:schemeClr val="accent1"/>
+          </a:fillRef>
+          <a:effectRef idx="2">
+            <a:schemeClr val="accent1"/>
+          </a:effectRef>
+          <a:fontRef idx="minor">
+            <a:schemeClr val="lt1"/>
+          </a:fontRef>
+        </p:style>
+        <p:txBody>
+          <a:bodyPr rtlCol="0" anchor="ctr" wrap="square"/>
+          <a:lstStyle/>
+          <a:p>
+            <a:pPr algn="ctr"/>
+            <a:r>
+              <a:rPr sz="1400" b="1">
+                <a:solidFill>
+                  <a:srgbClr val="0D47A1"/>
+                </a:solidFill>
+              </a:rPr>
+              <a:t>What the Exploration Taught Us</a:t>
+            </a:r>
+          </a:p>
+          <a:p>
+            <a:pPr>
+              <a:spcBef>
+                <a:spcPts val="600"/>
+              </a:spcBef>
+            </a:pPr>
+            <a:r>
+              <a:rPr sz="1200">
+                <a:solidFill>
+                  <a:srgbClr val="2D2D2D"/>
+                </a:solidFill>
+              </a:rPr>
+              <a:t>•  [Insight from construction data exploration that influenced final approach]</a:t>
+            </a:r>
+          </a:p>
+          <a:p>
+            <a:pPr>
+              <a:spcBef>
+                <a:spcPts val="400"/>
+              </a:spcBef>
+            </a:pPr>
+            <a:r>
+              <a:rPr sz="1200">
+                <a:solidFill>
+                  <a:srgbClr val="2D2D2D"/>
+                </a:solidFill>
+              </a:rPr>
+              <a:t>•  [Insight from Pattern B work, e.g., data quality issues discovered during Spark cleaning]</a:t>
+            </a:r>
+          </a:p>
+          <a:p>
+            <a:pPr>
+              <a:spcBef>
+                <a:spcPts val="400"/>
+              </a:spcBef>
+            </a:pPr>
+            <a:r>
+              <a:rPr sz="1200">
+                <a:solidFill>
+                  <a:srgbClr val="2D2D2D"/>
+                </a:solidFill>
+              </a:rPr>
+              <a:t>•  [How exploring multiple paths made our final architecture decision more defensible]</a:t>
             </a:r>
           </a:p>
         </p:txBody>

--- a/docs/Capstone_Presentation.pptx
+++ b/docs/Capstone_Presentation.pptx
@@ -536,6 +536,1416 @@
     </a:lvl9pPr>
   </p:notesStyle>
 </p:notesMaster>
+</file>
+
+<file path=ppt/notesSlides/notesSlide1.xml><?xml version="1.0" encoding="utf-8"?>
+<p:notes xmlns:a="http://schemas.openxmlformats.org/drawingml/2006/main" xmlns:p="http://schemas.openxmlformats.org/presentationml/2006/main" xmlns:r="http://schemas.openxmlformats.org/officeDocument/2006/relationships">
+  <p:cSld>
+    <p:spTree>
+      <p:nvGrpSpPr>
+        <p:cNvPr id="1" name=""/>
+        <p:cNvGrpSpPr/>
+        <p:nvPr/>
+      </p:nvGrpSpPr>
+      <p:grpSpPr>
+        <a:xfrm>
+          <a:off x="0" y="0"/>
+          <a:ext cx="0" cy="0"/>
+          <a:chOff x="0" y="0"/>
+          <a:chExt cx="0" cy="0"/>
+        </a:xfrm>
+      </p:grpSpPr>
+      <p:sp>
+        <p:nvSpPr>
+          <p:cNvPr id="2" name="Slide Image Placeholder 1"/>
+          <p:cNvSpPr>
+            <a:spLocks noGrp="1"/>
+          </p:cNvSpPr>
+          <p:nvPr>
+            <p:ph type="sldImg" idx="2"/>
+          </p:nvPr>
+        </p:nvSpPr>
+        <p:spPr/>
+      </p:sp>
+      <p:sp>
+        <p:nvSpPr>
+          <p:cNvPr id="3" name="Notes Placeholder 2"/>
+          <p:cNvSpPr>
+            <a:spLocks noGrp="1"/>
+          </p:cNvSpPr>
+          <p:nvPr>
+            <p:ph type="body" idx="3" sz="quarter"/>
+          </p:nvPr>
+        </p:nvSpPr>
+        <p:spPr/>
+        <p:txBody>
+          <a:bodyPr/>
+          <a:lstStyle/>
+          <a:p>
+            <a:r>
+              <a:t>Good morning everyone. We are Team AMO. Our project answers a simple but important question: when the weather turns bad in New York City, what happens to taxi demand, and has that pattern changed over the past year?</a:t>
+            </a:r>
+            <a:br/>
+            <a:br/>
+            <a:r>
+              <a:t>We analyzed over 38 million taxi trips across ten months, enriched them with hourly weather data, and built a pipeline that anyone on the team can re-run with a single command. Here is what we found.</a:t>
+            </a:r>
+          </a:p>
+        </p:txBody>
+      </p:sp>
+      <p:sp>
+        <p:nvSpPr>
+          <p:cNvPr id="4" name="Slide Number Placeholder 3"/>
+          <p:cNvSpPr>
+            <a:spLocks noGrp="1"/>
+          </p:cNvSpPr>
+          <p:nvPr>
+            <p:ph type="sldNum" idx="5" sz="quarter"/>
+          </p:nvPr>
+        </p:nvSpPr>
+        <p:spPr/>
+      </p:sp>
+    </p:spTree>
+  </p:cSld>
+  <p:clrMapOvr>
+    <a:masterClrMapping/>
+  </p:clrMapOvr>
+</p:notes>
+</file>
+
+<file path=ppt/notesSlides/notesSlide10.xml><?xml version="1.0" encoding="utf-8"?>
+<p:notes xmlns:a="http://schemas.openxmlformats.org/drawingml/2006/main" xmlns:p="http://schemas.openxmlformats.org/presentationml/2006/main" xmlns:r="http://schemas.openxmlformats.org/officeDocument/2006/relationships">
+  <p:cSld>
+    <p:spTree>
+      <p:nvGrpSpPr>
+        <p:cNvPr id="1" name=""/>
+        <p:cNvGrpSpPr/>
+        <p:nvPr/>
+      </p:nvGrpSpPr>
+      <p:grpSpPr>
+        <a:xfrm>
+          <a:off x="0" y="0"/>
+          <a:ext cx="0" cy="0"/>
+          <a:chOff x="0" y="0"/>
+          <a:chExt cx="0" cy="0"/>
+        </a:xfrm>
+      </p:grpSpPr>
+      <p:sp>
+        <p:nvSpPr>
+          <p:cNvPr id="2" name="Slide Image Placeholder 1"/>
+          <p:cNvSpPr>
+            <a:spLocks noGrp="1"/>
+          </p:cNvSpPr>
+          <p:nvPr>
+            <p:ph type="sldImg" idx="2"/>
+          </p:nvPr>
+        </p:nvSpPr>
+        <p:spPr/>
+      </p:sp>
+      <p:sp>
+        <p:nvSpPr>
+          <p:cNvPr id="3" name="Notes Placeholder 2"/>
+          <p:cNvSpPr>
+            <a:spLocks noGrp="1"/>
+          </p:cNvSpPr>
+          <p:nvPr>
+            <p:ph type="body" idx="3" sz="quarter"/>
+          </p:nvPr>
+        </p:nvSpPr>
+        <p:spPr/>
+        <p:txBody>
+          <a:bodyPr/>
+          <a:lstStyle/>
+          <a:p>
+            <a:r>
+              <a:t>Now, data quality. This is where trust in our findings gets built or lost.</a:t>
+            </a:r>
+          </a:p>
+        </p:txBody>
+      </p:sp>
+      <p:sp>
+        <p:nvSpPr>
+          <p:cNvPr id="4" name="Slide Number Placeholder 3"/>
+          <p:cNvSpPr>
+            <a:spLocks noGrp="1"/>
+          </p:cNvSpPr>
+          <p:nvPr>
+            <p:ph type="sldNum" idx="5" sz="quarter"/>
+          </p:nvPr>
+        </p:nvSpPr>
+        <p:spPr/>
+      </p:sp>
+    </p:spTree>
+  </p:cSld>
+  <p:clrMapOvr>
+    <a:masterClrMapping/>
+  </p:clrMapOvr>
+</p:notes>
+</file>
+
+<file path=ppt/notesSlides/notesSlide11.xml><?xml version="1.0" encoding="utf-8"?>
+<p:notes xmlns:a="http://schemas.openxmlformats.org/drawingml/2006/main" xmlns:p="http://schemas.openxmlformats.org/presentationml/2006/main" xmlns:r="http://schemas.openxmlformats.org/officeDocument/2006/relationships">
+  <p:cSld>
+    <p:spTree>
+      <p:nvGrpSpPr>
+        <p:cNvPr id="1" name=""/>
+        <p:cNvGrpSpPr/>
+        <p:nvPr/>
+      </p:nvGrpSpPr>
+      <p:grpSpPr>
+        <a:xfrm>
+          <a:off x="0" y="0"/>
+          <a:ext cx="0" cy="0"/>
+          <a:chOff x="0" y="0"/>
+          <a:chExt cx="0" cy="0"/>
+        </a:xfrm>
+      </p:grpSpPr>
+      <p:sp>
+        <p:nvSpPr>
+          <p:cNvPr id="2" name="Slide Image Placeholder 1"/>
+          <p:cNvSpPr>
+            <a:spLocks noGrp="1"/>
+          </p:cNvSpPr>
+          <p:nvPr>
+            <p:ph type="sldImg" idx="2"/>
+          </p:nvPr>
+        </p:nvSpPr>
+        <p:spPr/>
+      </p:sp>
+      <p:sp>
+        <p:nvSpPr>
+          <p:cNvPr id="3" name="Notes Placeholder 2"/>
+          <p:cNvSpPr>
+            <a:spLocks noGrp="1"/>
+          </p:cNvSpPr>
+          <p:nvPr>
+            <p:ph type="body" idx="3" sz="quarter"/>
+          </p:nvPr>
+        </p:nvSpPr>
+        <p:spPr/>
+        <p:txBody>
+          <a:bodyPr/>
+          <a:lstStyle/>
+          <a:p>
+            <a:r>
+              <a:t>We loaded 39.2 million rows into Bronze and lost zero in the process. That exact reconciliation is the first thing we verified.</a:t>
+            </a:r>
+            <a:br/>
+            <a:br/>
+            <a:r>
+              <a:t>In Silver, we flagged about 1.17 million rows as invalid, which is 3 percent of the total. These include trips with timestamps outside our study window, negative fares, distances over 100 miles, and trips where the dropoff happened before the pickup. We keep these flagged rows in Silver for traceability but filter them out in Gold.</a:t>
+            </a:r>
+            <a:br/>
+            <a:br/>
+            <a:r>
+              <a:t>We also found two issues not listed in the data catalog. First, over 9 million trips have a payment type of zero, which is undocumented. Second, 9.2 million trips have null or zero passenger count. We kept both of these because they do not invalidate the trip itself, but we flag them and note the limitation.</a:t>
+            </a:r>
+            <a:br/>
+            <a:br/>
+            <a:r>
+              <a:t>The cash tip trap is important to call out. Tip amounts are only recorded for credit card payments. Cash tips show as zero. This means any tip analysis we do only reflects credit card transactions, and we state that explicitly wherever tips appear in our findings.</a:t>
+            </a:r>
+            <a:br/>
+            <a:br/>
+            <a:r>
+              <a:t>Our philosophy is flag, do not delete. Every row gets a validity flag and a reason field listing which checks failed. This lets us report exact counts, show our reasoning, and still filter cleanly in the final layer.</a:t>
+            </a:r>
+          </a:p>
+        </p:txBody>
+      </p:sp>
+      <p:sp>
+        <p:nvSpPr>
+          <p:cNvPr id="4" name="Slide Number Placeholder 3"/>
+          <p:cNvSpPr>
+            <a:spLocks noGrp="1"/>
+          </p:cNvSpPr>
+          <p:nvPr>
+            <p:ph type="sldNum" idx="5" sz="quarter"/>
+          </p:nvPr>
+        </p:nvSpPr>
+        <p:spPr/>
+      </p:sp>
+    </p:spTree>
+  </p:cSld>
+  <p:clrMapOvr>
+    <a:masterClrMapping/>
+  </p:clrMapOvr>
+</p:notes>
+</file>
+
+<file path=ppt/notesSlides/notesSlide12.xml><?xml version="1.0" encoding="utf-8"?>
+<p:notes xmlns:a="http://schemas.openxmlformats.org/drawingml/2006/main" xmlns:p="http://schemas.openxmlformats.org/presentationml/2006/main" xmlns:r="http://schemas.openxmlformats.org/officeDocument/2006/relationships">
+  <p:cSld>
+    <p:spTree>
+      <p:nvGrpSpPr>
+        <p:cNvPr id="1" name=""/>
+        <p:cNvGrpSpPr/>
+        <p:nvPr/>
+      </p:nvGrpSpPr>
+      <p:grpSpPr>
+        <a:xfrm>
+          <a:off x="0" y="0"/>
+          <a:ext cx="0" cy="0"/>
+          <a:chOff x="0" y="0"/>
+          <a:chExt cx="0" cy="0"/>
+        </a:xfrm>
+      </p:grpSpPr>
+      <p:sp>
+        <p:nvSpPr>
+          <p:cNvPr id="2" name="Slide Image Placeholder 1"/>
+          <p:cNvSpPr>
+            <a:spLocks noGrp="1"/>
+          </p:cNvSpPr>
+          <p:nvPr>
+            <p:ph type="sldImg" idx="2"/>
+          </p:nvPr>
+        </p:nvSpPr>
+        <p:spPr/>
+      </p:sp>
+      <p:sp>
+        <p:nvSpPr>
+          <p:cNvPr id="3" name="Notes Placeholder 2"/>
+          <p:cNvSpPr>
+            <a:spLocks noGrp="1"/>
+          </p:cNvSpPr>
+          <p:nvPr>
+            <p:ph type="body" idx="3" sz="quarter"/>
+          </p:nvPr>
+        </p:nvSpPr>
+        <p:spPr/>
+        <p:txBody>
+          <a:bodyPr/>
+          <a:lstStyle/>
+          <a:p>
+            <a:r>
+              <a:t>With clean, validated data in hand, here is what we found when comparing 2025 to 2026.</a:t>
+            </a:r>
+          </a:p>
+        </p:txBody>
+      </p:sp>
+      <p:sp>
+        <p:nvSpPr>
+          <p:cNvPr id="4" name="Slide Number Placeholder 3"/>
+          <p:cNvSpPr>
+            <a:spLocks noGrp="1"/>
+          </p:cNvSpPr>
+          <p:nvPr>
+            <p:ph type="sldNum" idx="5" sz="quarter"/>
+          </p:nvPr>
+        </p:nvSpPr>
+        <p:spPr/>
+      </p:sp>
+    </p:spTree>
+  </p:cSld>
+  <p:clrMapOvr>
+    <a:masterClrMapping/>
+  </p:clrMapOvr>
+</p:notes>
+</file>
+
+<file path=ppt/notesSlides/notesSlide13.xml><?xml version="1.0" encoding="utf-8"?>
+<p:notes xmlns:a="http://schemas.openxmlformats.org/drawingml/2006/main" xmlns:p="http://schemas.openxmlformats.org/presentationml/2006/main" xmlns:r="http://schemas.openxmlformats.org/officeDocument/2006/relationships">
+  <p:cSld>
+    <p:spTree>
+      <p:nvGrpSpPr>
+        <p:cNvPr id="1" name=""/>
+        <p:cNvGrpSpPr/>
+        <p:nvPr/>
+      </p:nvGrpSpPr>
+      <p:grpSpPr>
+        <a:xfrm>
+          <a:off x="0" y="0"/>
+          <a:ext cx="0" cy="0"/>
+          <a:chOff x="0" y="0"/>
+          <a:chExt cx="0" cy="0"/>
+        </a:xfrm>
+      </p:grpSpPr>
+      <p:sp>
+        <p:nvSpPr>
+          <p:cNvPr id="2" name="Slide Image Placeholder 1"/>
+          <p:cNvSpPr>
+            <a:spLocks noGrp="1"/>
+          </p:cNvSpPr>
+          <p:nvPr>
+            <p:ph type="sldImg" idx="2"/>
+          </p:nvPr>
+        </p:nvSpPr>
+        <p:spPr/>
+      </p:sp>
+      <p:sp>
+        <p:nvSpPr>
+          <p:cNvPr id="3" name="Notes Placeholder 2"/>
+          <p:cNvSpPr>
+            <a:spLocks noGrp="1"/>
+          </p:cNvSpPr>
+          <p:nvPr>
+            <p:ph type="body" idx="3" sz="quarter"/>
+          </p:nvPr>
+        </p:nvSpPr>
+        <p:spPr/>
+        <p:txBody>
+          <a:bodyPr/>
+          <a:lstStyle/>
+          <a:p>
+            <a:r>
+              <a:t>Let us look under the hood at the technical decisions that make this pipeline reliable and reproducible.</a:t>
+            </a:r>
+          </a:p>
+        </p:txBody>
+      </p:sp>
+      <p:sp>
+        <p:nvSpPr>
+          <p:cNvPr id="4" name="Slide Number Placeholder 3"/>
+          <p:cNvSpPr>
+            <a:spLocks noGrp="1"/>
+          </p:cNvSpPr>
+          <p:nvPr>
+            <p:ph type="sldNum" idx="5" sz="quarter"/>
+          </p:nvPr>
+        </p:nvSpPr>
+        <p:spPr/>
+      </p:sp>
+    </p:spTree>
+  </p:cSld>
+  <p:clrMapOvr>
+    <a:masterClrMapping/>
+  </p:clrMapOvr>
+</p:notes>
+</file>
+
+<file path=ppt/notesSlides/notesSlide14.xml><?xml version="1.0" encoding="utf-8"?>
+<p:notes xmlns:a="http://schemas.openxmlformats.org/drawingml/2006/main" xmlns:p="http://schemas.openxmlformats.org/presentationml/2006/main" xmlns:r="http://schemas.openxmlformats.org/officeDocument/2006/relationships">
+  <p:cSld>
+    <p:spTree>
+      <p:nvGrpSpPr>
+        <p:cNvPr id="1" name=""/>
+        <p:cNvGrpSpPr/>
+        <p:nvPr/>
+      </p:nvGrpSpPr>
+      <p:grpSpPr>
+        <a:xfrm>
+          <a:off x="0" y="0"/>
+          <a:ext cx="0" cy="0"/>
+          <a:chOff x="0" y="0"/>
+          <a:chExt cx="0" cy="0"/>
+        </a:xfrm>
+      </p:grpSpPr>
+      <p:sp>
+        <p:nvSpPr>
+          <p:cNvPr id="2" name="Slide Image Placeholder 1"/>
+          <p:cNvSpPr>
+            <a:spLocks noGrp="1"/>
+          </p:cNvSpPr>
+          <p:nvPr>
+            <p:ph type="sldImg" idx="2"/>
+          </p:nvPr>
+        </p:nvSpPr>
+        <p:spPr/>
+      </p:sp>
+      <p:sp>
+        <p:nvSpPr>
+          <p:cNvPr id="3" name="Notes Placeholder 2"/>
+          <p:cNvSpPr>
+            <a:spLocks noGrp="1"/>
+          </p:cNvSpPr>
+          <p:nvPr>
+            <p:ph type="body" idx="3" sz="quarter"/>
+          </p:nvPr>
+        </p:nvSpPr>
+        <p:spPr/>
+        <p:txBody>
+          <a:bodyPr/>
+          <a:lstStyle/>
+          <a:p>
+            <a:r>
+              <a:t>Our dbt project has four model layers. Staging tables clean and conform the raw data. The fact table enriches valid trips with borough names and weather. The mart pre-aggregates for the dashboard. And dimension tables provide lookup data for drilldowns.</a:t>
+            </a:r>
+            <a:br/>
+            <a:br/>
+            <a:r>
+              <a:t>We have 32 automated tests that run every time we build. These check that key columns are never null, that dimension keys are unique, that categorical values are within expected ranges, and that foreign key relationships hold. One test intentionally warns rather than fails: it documents that payment type zero exists but does not block the pipeline.</a:t>
+            </a:r>
+            <a:br/>
+            <a:br/>
+            <a:r>
+              <a:t>Orchestration is a single Python script. It creates the Bronze infrastructure, loads data from S3, fetches weather from the API, verifies row counts, runs dbt to build all models, and then runs all tests. End to end, about six minutes. If anything fails, it stops immediately with a clear message.</a:t>
+            </a:r>
+            <a:br/>
+            <a:br/>
+            <a:r>
+              <a:t>The key transformations include unioning Yellow and Green taxi data with their different column names, adding data quality flags, deriving time-based features like rush hour and weekend indicators, and joining to weather and zone data.</a:t>
+            </a:r>
+          </a:p>
+        </p:txBody>
+      </p:sp>
+      <p:sp>
+        <p:nvSpPr>
+          <p:cNvPr id="4" name="Slide Number Placeholder 3"/>
+          <p:cNvSpPr>
+            <a:spLocks noGrp="1"/>
+          </p:cNvSpPr>
+          <p:nvPr>
+            <p:ph type="sldNum" idx="5" sz="quarter"/>
+          </p:nvPr>
+        </p:nvSpPr>
+        <p:spPr/>
+      </p:sp>
+    </p:spTree>
+  </p:cSld>
+  <p:clrMapOvr>
+    <a:masterClrMapping/>
+  </p:clrMapOvr>
+</p:notes>
+</file>
+
+<file path=ppt/notesSlides/notesSlide15.xml><?xml version="1.0" encoding="utf-8"?>
+<p:notes xmlns:a="http://schemas.openxmlformats.org/drawingml/2006/main" xmlns:p="http://schemas.openxmlformats.org/presentationml/2006/main" xmlns:r="http://schemas.openxmlformats.org/officeDocument/2006/relationships">
+  <p:cSld>
+    <p:spTree>
+      <p:nvGrpSpPr>
+        <p:cNvPr id="1" name=""/>
+        <p:cNvGrpSpPr/>
+        <p:nvPr/>
+      </p:nvGrpSpPr>
+      <p:grpSpPr>
+        <a:xfrm>
+          <a:off x="0" y="0"/>
+          <a:ext cx="0" cy="0"/>
+          <a:chOff x="0" y="0"/>
+          <a:chExt cx="0" cy="0"/>
+        </a:xfrm>
+      </p:grpSpPr>
+      <p:sp>
+        <p:nvSpPr>
+          <p:cNvPr id="2" name="Slide Image Placeholder 1"/>
+          <p:cNvSpPr>
+            <a:spLocks noGrp="1"/>
+          </p:cNvSpPr>
+          <p:nvPr>
+            <p:ph type="sldImg" idx="2"/>
+          </p:nvPr>
+        </p:nvSpPr>
+        <p:spPr/>
+      </p:sp>
+      <p:sp>
+        <p:nvSpPr>
+          <p:cNvPr id="3" name="Notes Placeholder 2"/>
+          <p:cNvSpPr>
+            <a:spLocks noGrp="1"/>
+          </p:cNvSpPr>
+          <p:nvPr>
+            <p:ph type="body" idx="3" sz="quarter"/>
+          </p:nvPr>
+        </p:nvSpPr>
+        <p:spPr/>
+        <p:txBody>
+          <a:bodyPr/>
+          <a:lstStyle/>
+          <a:p>
+            <a:r>
+              <a:t>On cost and performance: our pipeline runs on a shared Snowflake warehouse. The full rebuild takes about six minutes, and most of that is the dbt build processing 39 million rows through Silver and Gold.</a:t>
+            </a:r>
+            <a:br/>
+            <a:br/>
+            <a:r>
+              <a:t>Dashboard queries against our mart table return in under one second because it is only 35,000 pre-aggregated rows. We designed it this way specifically so that Tableau never needs to scan the full 38 million row fact table.</a:t>
+            </a:r>
+            <a:br/>
+            <a:br/>
+            <a:r>
+              <a:t>If we scaled this to ten times the data volume, we would make three changes. First, switch from batch loading to Snowpipe for continuous ingestion. Second, move to incremental dbt models that append new data rather than rebuilding everything. Third, scale the warehouse up or use multi-cluster for concurrent users. The architecture supports all of these without a redesign.</a:t>
+            </a:r>
+          </a:p>
+        </p:txBody>
+      </p:sp>
+      <p:sp>
+        <p:nvSpPr>
+          <p:cNvPr id="4" name="Slide Number Placeholder 3"/>
+          <p:cNvSpPr>
+            <a:spLocks noGrp="1"/>
+          </p:cNvSpPr>
+          <p:nvPr>
+            <p:ph type="sldNum" idx="5" sz="quarter"/>
+          </p:nvPr>
+        </p:nvSpPr>
+        <p:spPr/>
+      </p:sp>
+    </p:spTree>
+  </p:cSld>
+  <p:clrMapOvr>
+    <a:masterClrMapping/>
+  </p:clrMapOvr>
+</p:notes>
+</file>
+
+<file path=ppt/notesSlides/notesSlide16.xml><?xml version="1.0" encoding="utf-8"?>
+<p:notes xmlns:a="http://schemas.openxmlformats.org/drawingml/2006/main" xmlns:p="http://schemas.openxmlformats.org/presentationml/2006/main" xmlns:r="http://schemas.openxmlformats.org/officeDocument/2006/relationships">
+  <p:cSld>
+    <p:spTree>
+      <p:nvGrpSpPr>
+        <p:cNvPr id="1" name=""/>
+        <p:cNvGrpSpPr/>
+        <p:nvPr/>
+      </p:nvGrpSpPr>
+      <p:grpSpPr>
+        <a:xfrm>
+          <a:off x="0" y="0"/>
+          <a:ext cx="0" cy="0"/>
+          <a:chOff x="0" y="0"/>
+          <a:chExt cx="0" cy="0"/>
+        </a:xfrm>
+      </p:grpSpPr>
+      <p:sp>
+        <p:nvSpPr>
+          <p:cNvPr id="2" name="Slide Image Placeholder 1"/>
+          <p:cNvSpPr>
+            <a:spLocks noGrp="1"/>
+          </p:cNvSpPr>
+          <p:nvPr>
+            <p:ph type="sldImg" idx="2"/>
+          </p:nvPr>
+        </p:nvSpPr>
+        <p:spPr/>
+      </p:sp>
+      <p:sp>
+        <p:nvSpPr>
+          <p:cNvPr id="3" name="Notes Placeholder 2"/>
+          <p:cNvSpPr>
+            <a:spLocks noGrp="1"/>
+          </p:cNvSpPr>
+          <p:nvPr>
+            <p:ph type="body" idx="3" sz="quarter"/>
+          </p:nvPr>
+        </p:nvSpPr>
+        <p:spPr/>
+        <p:txBody>
+          <a:bodyPr/>
+          <a:lstStyle/>
+          <a:p>
+            <a:r>
+              <a:t>Finally, where we would take this next and what we recommend.</a:t>
+            </a:r>
+          </a:p>
+        </p:txBody>
+      </p:sp>
+      <p:sp>
+        <p:nvSpPr>
+          <p:cNvPr id="4" name="Slide Number Placeholder 3"/>
+          <p:cNvSpPr>
+            <a:spLocks noGrp="1"/>
+          </p:cNvSpPr>
+          <p:nvPr>
+            <p:ph type="sldNum" idx="5" sz="quarter"/>
+          </p:nvPr>
+        </p:nvSpPr>
+        <p:spPr/>
+      </p:sp>
+    </p:spTree>
+  </p:cSld>
+  <p:clrMapOvr>
+    <a:masterClrMapping/>
+  </p:clrMapOvr>
+</p:notes>
+</file>
+
+<file path=ppt/notesSlides/notesSlide17.xml><?xml version="1.0" encoding="utf-8"?>
+<p:notes xmlns:a="http://schemas.openxmlformats.org/drawingml/2006/main" xmlns:p="http://schemas.openxmlformats.org/presentationml/2006/main" xmlns:r="http://schemas.openxmlformats.org/officeDocument/2006/relationships">
+  <p:cSld>
+    <p:spTree>
+      <p:nvGrpSpPr>
+        <p:cNvPr id="1" name=""/>
+        <p:cNvGrpSpPr/>
+        <p:nvPr/>
+      </p:nvGrpSpPr>
+      <p:grpSpPr>
+        <a:xfrm>
+          <a:off x="0" y="0"/>
+          <a:ext cx="0" cy="0"/>
+          <a:chOff x="0" y="0"/>
+          <a:chExt cx="0" cy="0"/>
+        </a:xfrm>
+      </p:grpSpPr>
+      <p:sp>
+        <p:nvSpPr>
+          <p:cNvPr id="2" name="Slide Image Placeholder 1"/>
+          <p:cNvSpPr>
+            <a:spLocks noGrp="1"/>
+          </p:cNvSpPr>
+          <p:nvPr>
+            <p:ph type="sldImg" idx="2"/>
+          </p:nvPr>
+        </p:nvSpPr>
+        <p:spPr/>
+      </p:sp>
+      <p:sp>
+        <p:nvSpPr>
+          <p:cNvPr id="3" name="Notes Placeholder 2"/>
+          <p:cNvSpPr>
+            <a:spLocks noGrp="1"/>
+          </p:cNvSpPr>
+          <p:nvPr>
+            <p:ph type="body" idx="3" sz="quarter"/>
+          </p:nvPr>
+        </p:nvSpPr>
+        <p:spPr/>
+        <p:txBody>
+          <a:bodyPr/>
+          <a:lstStyle/>
+          <a:p>
+            <a:r>
+              <a:t>We see three natural next steps.</a:t>
+            </a:r>
+            <a:br/>
+            <a:br/>
+            <a:r>
+              <a:t>The highest impact is real-time ingestion. Right now our pipeline runs on demand. With Snowpipe and streams, new trip data would flow in continuously, giving fleet operators live demand signals during active storms rather than waiting for a batch.</a:t>
+            </a:r>
+            <a:br/>
+            <a:br/>
+            <a:r>
+              <a:t>Second, we could add machine learning forecasting to predict demand drops by borough before a storm hits, rather than just reporting what happened after the fact.</a:t>
+            </a:r>
+            <a:br/>
+            <a:br/>
+            <a:r>
+              <a:t>Third, this pipeline is designed to be replicable. The same architecture could serve Chicago, Boston, or any city with similar taxi and weather data. Each new city would take a few sprints to onboard.</a:t>
+            </a:r>
+            <a:br/>
+            <a:br/>
+            <a:r>
+              <a:t>The highest impact for the least effort is real-time ingestion, so that is what we would prioritize.</a:t>
+            </a:r>
+          </a:p>
+        </p:txBody>
+      </p:sp>
+      <p:sp>
+        <p:nvSpPr>
+          <p:cNvPr id="4" name="Slide Number Placeholder 3"/>
+          <p:cNvSpPr>
+            <a:spLocks noGrp="1"/>
+          </p:cNvSpPr>
+          <p:nvPr>
+            <p:ph type="sldNum" idx="5" sz="quarter"/>
+          </p:nvPr>
+        </p:nvSpPr>
+        <p:spPr/>
+      </p:sp>
+    </p:spTree>
+  </p:cSld>
+  <p:clrMapOvr>
+    <a:masterClrMapping/>
+  </p:clrMapOvr>
+</p:notes>
+</file>
+
+<file path=ppt/notesSlides/notesSlide18.xml><?xml version="1.0" encoding="utf-8"?>
+<p:notes xmlns:a="http://schemas.openxmlformats.org/drawingml/2006/main" xmlns:p="http://schemas.openxmlformats.org/presentationml/2006/main" xmlns:r="http://schemas.openxmlformats.org/officeDocument/2006/relationships">
+  <p:cSld>
+    <p:spTree>
+      <p:nvGrpSpPr>
+        <p:cNvPr id="1" name=""/>
+        <p:cNvGrpSpPr/>
+        <p:nvPr/>
+      </p:nvGrpSpPr>
+      <p:grpSpPr>
+        <a:xfrm>
+          <a:off x="0" y="0"/>
+          <a:ext cx="0" cy="0"/>
+          <a:chOff x="0" y="0"/>
+          <a:chExt cx="0" cy="0"/>
+        </a:xfrm>
+      </p:grpSpPr>
+      <p:sp>
+        <p:nvSpPr>
+          <p:cNvPr id="2" name="Slide Image Placeholder 1"/>
+          <p:cNvSpPr>
+            <a:spLocks noGrp="1"/>
+          </p:cNvSpPr>
+          <p:nvPr>
+            <p:ph type="sldImg" idx="2"/>
+          </p:nvPr>
+        </p:nvSpPr>
+        <p:spPr/>
+      </p:sp>
+      <p:sp>
+        <p:nvSpPr>
+          <p:cNvPr id="3" name="Notes Placeholder 2"/>
+          <p:cNvSpPr>
+            <a:spLocks noGrp="1"/>
+          </p:cNvSpPr>
+          <p:nvPr>
+            <p:ph type="body" idx="3" sz="quarter"/>
+          </p:nvPr>
+        </p:nvSpPr>
+        <p:spPr/>
+        <p:txBody>
+          <a:bodyPr/>
+          <a:lstStyle/>
+          <a:p>
+            <a:r>
+              <a:t>To summarize: adverse weather measurably changes taxi demand, and that impact varies by borough and has shifted year over year. Our pipeline is reproducible, tested, and ready for production use.</a:t>
+            </a:r>
+            <a:br/>
+            <a:br/>
+            <a:r>
+              <a:t>We are happy to take your questions.</a:t>
+            </a:r>
+          </a:p>
+        </p:txBody>
+      </p:sp>
+      <p:sp>
+        <p:nvSpPr>
+          <p:cNvPr id="4" name="Slide Number Placeholder 3"/>
+          <p:cNvSpPr>
+            <a:spLocks noGrp="1"/>
+          </p:cNvSpPr>
+          <p:nvPr>
+            <p:ph type="sldNum" idx="5" sz="quarter"/>
+          </p:nvPr>
+        </p:nvSpPr>
+        <p:spPr/>
+      </p:sp>
+    </p:spTree>
+  </p:cSld>
+  <p:clrMapOvr>
+    <a:masterClrMapping/>
+  </p:clrMapOvr>
+</p:notes>
+</file>
+
+<file path=ppt/notesSlides/notesSlide2.xml><?xml version="1.0" encoding="utf-8"?>
+<p:notes xmlns:a="http://schemas.openxmlformats.org/drawingml/2006/main" xmlns:p="http://schemas.openxmlformats.org/presentationml/2006/main" xmlns:r="http://schemas.openxmlformats.org/officeDocument/2006/relationships">
+  <p:cSld>
+    <p:spTree>
+      <p:nvGrpSpPr>
+        <p:cNvPr id="1" name=""/>
+        <p:cNvGrpSpPr/>
+        <p:nvPr/>
+      </p:nvGrpSpPr>
+      <p:grpSpPr>
+        <a:xfrm>
+          <a:off x="0" y="0"/>
+          <a:ext cx="0" cy="0"/>
+          <a:chOff x="0" y="0"/>
+          <a:chExt cx="0" cy="0"/>
+        </a:xfrm>
+      </p:grpSpPr>
+      <p:sp>
+        <p:nvSpPr>
+          <p:cNvPr id="2" name="Slide Image Placeholder 1"/>
+          <p:cNvSpPr>
+            <a:spLocks noGrp="1"/>
+          </p:cNvSpPr>
+          <p:nvPr>
+            <p:ph type="sldImg" idx="2"/>
+          </p:nvPr>
+        </p:nvSpPr>
+        <p:spPr/>
+      </p:sp>
+      <p:sp>
+        <p:nvSpPr>
+          <p:cNvPr id="3" name="Notes Placeholder 2"/>
+          <p:cNvSpPr>
+            <a:spLocks noGrp="1"/>
+          </p:cNvSpPr>
+          <p:nvPr>
+            <p:ph type="body" idx="3" sz="quarter"/>
+          </p:nvPr>
+        </p:nvSpPr>
+        <p:spPr/>
+        <p:txBody>
+          <a:bodyPr/>
+          <a:lstStyle/>
+          <a:p>
+            <a:r>
+              <a:t>We will start with our headline finding, then walk you through how we got there: the data, our architecture, what was wrong with the data and how we handled it, our year-over-year analysis, the technical decisions behind it all, and finally where we would take this next.</a:t>
+            </a:r>
+          </a:p>
+        </p:txBody>
+      </p:sp>
+      <p:sp>
+        <p:nvSpPr>
+          <p:cNvPr id="4" name="Slide Number Placeholder 3"/>
+          <p:cNvSpPr>
+            <a:spLocks noGrp="1"/>
+          </p:cNvSpPr>
+          <p:nvPr>
+            <p:ph type="sldNum" idx="5" sz="quarter"/>
+          </p:nvPr>
+        </p:nvSpPr>
+        <p:spPr/>
+      </p:sp>
+    </p:spTree>
+  </p:cSld>
+  <p:clrMapOvr>
+    <a:masterClrMapping/>
+  </p:clrMapOvr>
+</p:notes>
+</file>
+
+<file path=ppt/notesSlides/notesSlide3.xml><?xml version="1.0" encoding="utf-8"?>
+<p:notes xmlns:a="http://schemas.openxmlformats.org/drawingml/2006/main" xmlns:p="http://schemas.openxmlformats.org/presentationml/2006/main" xmlns:r="http://schemas.openxmlformats.org/officeDocument/2006/relationships">
+  <p:cSld>
+    <p:spTree>
+      <p:nvGrpSpPr>
+        <p:cNvPr id="1" name=""/>
+        <p:cNvGrpSpPr/>
+        <p:nvPr/>
+      </p:nvGrpSpPr>
+      <p:grpSpPr>
+        <a:xfrm>
+          <a:off x="0" y="0"/>
+          <a:ext cx="0" cy="0"/>
+          <a:chOff x="0" y="0"/>
+          <a:chExt cx="0" cy="0"/>
+        </a:xfrm>
+      </p:grpSpPr>
+      <p:sp>
+        <p:nvSpPr>
+          <p:cNvPr id="2" name="Slide Image Placeholder 1"/>
+          <p:cNvSpPr>
+            <a:spLocks noGrp="1"/>
+          </p:cNvSpPr>
+          <p:nvPr>
+            <p:ph type="sldImg" idx="2"/>
+          </p:nvPr>
+        </p:nvSpPr>
+        <p:spPr/>
+      </p:sp>
+      <p:sp>
+        <p:nvSpPr>
+          <p:cNvPr id="3" name="Notes Placeholder 2"/>
+          <p:cNvSpPr>
+            <a:spLocks noGrp="1"/>
+          </p:cNvSpPr>
+          <p:nvPr>
+            <p:ph type="body" idx="3" sz="quarter"/>
+          </p:nvPr>
+        </p:nvSpPr>
+        <p:spPr/>
+        <p:txBody>
+          <a:bodyPr/>
+          <a:lstStyle/>
+          <a:p>
+            <a:r>
+              <a:t>Let us start with the result and why it matters to anyone running a taxi fleet in New York City.</a:t>
+            </a:r>
+          </a:p>
+        </p:txBody>
+      </p:sp>
+      <p:sp>
+        <p:nvSpPr>
+          <p:cNvPr id="4" name="Slide Number Placeholder 3"/>
+          <p:cNvSpPr>
+            <a:spLocks noGrp="1"/>
+          </p:cNvSpPr>
+          <p:nvPr>
+            <p:ph type="sldNum" idx="5" sz="quarter"/>
+          </p:nvPr>
+        </p:nvSpPr>
+        <p:spPr/>
+      </p:sp>
+    </p:spTree>
+  </p:cSld>
+  <p:clrMapOvr>
+    <a:masterClrMapping/>
+  </p:clrMapOvr>
+</p:notes>
+</file>
+
+<file path=ppt/notesSlides/notesSlide4.xml><?xml version="1.0" encoding="utf-8"?>
+<p:notes xmlns:a="http://schemas.openxmlformats.org/drawingml/2006/main" xmlns:p="http://schemas.openxmlformats.org/presentationml/2006/main" xmlns:r="http://schemas.openxmlformats.org/officeDocument/2006/relationships">
+  <p:cSld>
+    <p:spTree>
+      <p:nvGrpSpPr>
+        <p:cNvPr id="1" name=""/>
+        <p:cNvGrpSpPr/>
+        <p:nvPr/>
+      </p:nvGrpSpPr>
+      <p:grpSpPr>
+        <a:xfrm>
+          <a:off x="0" y="0"/>
+          <a:ext cx="0" cy="0"/>
+          <a:chOff x="0" y="0"/>
+          <a:chExt cx="0" cy="0"/>
+        </a:xfrm>
+      </p:grpSpPr>
+      <p:sp>
+        <p:nvSpPr>
+          <p:cNvPr id="2" name="Slide Image Placeholder 1"/>
+          <p:cNvSpPr>
+            <a:spLocks noGrp="1"/>
+          </p:cNvSpPr>
+          <p:nvPr>
+            <p:ph type="sldImg" idx="2"/>
+          </p:nvPr>
+        </p:nvSpPr>
+        <p:spPr/>
+      </p:sp>
+      <p:sp>
+        <p:nvSpPr>
+          <p:cNvPr id="3" name="Notes Placeholder 2"/>
+          <p:cNvSpPr>
+            <a:spLocks noGrp="1"/>
+          </p:cNvSpPr>
+          <p:nvPr>
+            <p:ph type="body" idx="3" sz="quarter"/>
+          </p:nvPr>
+        </p:nvSpPr>
+        <p:spPr/>
+        <p:txBody>
+          <a:bodyPr/>
+          <a:lstStyle/>
+          <a:p>
+            <a:r>
+              <a:t>Our question is specific and measurable: how does adverse weather, meaning rain, snow, or high wind, affect taxi demand across different boroughs, and did that relationship shift between 2025 and 2026?</a:t>
+            </a:r>
+            <a:br/>
+            <a:br/>
+            <a:r>
+              <a:t>This matters because fleet operators make real-time decisions about where to position drivers. If rain cuts demand by 20 percent in the Bronx but only 5 percent in Manhattan, that changes where you send your cars during a storm.</a:t>
+            </a:r>
+            <a:br/>
+            <a:br/>
+            <a:r>
+              <a:t>We scoped this to Yellow and Green taxi trips from January through May in both years, giving us an apples-to-apples seasonal comparison. Our answer lives in a single pre-aggregated table with about 35,000 rows that any dashboard can query instantly.</a:t>
+            </a:r>
+          </a:p>
+        </p:txBody>
+      </p:sp>
+      <p:sp>
+        <p:nvSpPr>
+          <p:cNvPr id="4" name="Slide Number Placeholder 3"/>
+          <p:cNvSpPr>
+            <a:spLocks noGrp="1"/>
+          </p:cNvSpPr>
+          <p:nvPr>
+            <p:ph type="sldNum" idx="5" sz="quarter"/>
+          </p:nvPr>
+        </p:nvSpPr>
+        <p:spPr/>
+      </p:sp>
+    </p:spTree>
+  </p:cSld>
+  <p:clrMapOvr>
+    <a:masterClrMapping/>
+  </p:clrMapOvr>
+</p:notes>
+</file>
+
+<file path=ppt/notesSlides/notesSlide5.xml><?xml version="1.0" encoding="utf-8"?>
+<p:notes xmlns:a="http://schemas.openxmlformats.org/drawingml/2006/main" xmlns:p="http://schemas.openxmlformats.org/presentationml/2006/main" xmlns:r="http://schemas.openxmlformats.org/officeDocument/2006/relationships">
+  <p:cSld>
+    <p:spTree>
+      <p:nvGrpSpPr>
+        <p:cNvPr id="1" name=""/>
+        <p:cNvGrpSpPr/>
+        <p:nvPr/>
+      </p:nvGrpSpPr>
+      <p:grpSpPr>
+        <a:xfrm>
+          <a:off x="0" y="0"/>
+          <a:ext cx="0" cy="0"/>
+          <a:chOff x="0" y="0"/>
+          <a:chExt cx="0" cy="0"/>
+        </a:xfrm>
+      </p:grpSpPr>
+      <p:sp>
+        <p:nvSpPr>
+          <p:cNvPr id="2" name="Slide Image Placeholder 1"/>
+          <p:cNvSpPr>
+            <a:spLocks noGrp="1"/>
+          </p:cNvSpPr>
+          <p:nvPr>
+            <p:ph type="sldImg" idx="2"/>
+          </p:nvPr>
+        </p:nvSpPr>
+        <p:spPr/>
+      </p:sp>
+      <p:sp>
+        <p:nvSpPr>
+          <p:cNvPr id="3" name="Notes Placeholder 2"/>
+          <p:cNvSpPr>
+            <a:spLocks noGrp="1"/>
+          </p:cNvSpPr>
+          <p:nvPr>
+            <p:ph type="body" idx="3" sz="quarter"/>
+          </p:nvPr>
+        </p:nvSpPr>
+        <p:spPr/>
+        <p:txBody>
+          <a:bodyPr/>
+          <a:lstStyle/>
+          <a:p>
+            <a:r>
+              <a:t>Now let us talk about what we were given and how we built the pipeline.</a:t>
+            </a:r>
+          </a:p>
+        </p:txBody>
+      </p:sp>
+      <p:sp>
+        <p:nvSpPr>
+          <p:cNvPr id="4" name="Slide Number Placeholder 3"/>
+          <p:cNvSpPr>
+            <a:spLocks noGrp="1"/>
+          </p:cNvSpPr>
+          <p:nvPr>
+            <p:ph type="sldNum" idx="5" sz="quarter"/>
+          </p:nvPr>
+        </p:nvSpPr>
+        <p:spPr/>
+      </p:sp>
+    </p:spTree>
+  </p:cSld>
+  <p:clrMapOvr>
+    <a:masterClrMapping/>
+  </p:clrMapOvr>
+</p:notes>
+</file>
+
+<file path=ppt/notesSlides/notesSlide6.xml><?xml version="1.0" encoding="utf-8"?>
+<p:notes xmlns:a="http://schemas.openxmlformats.org/drawingml/2006/main" xmlns:p="http://schemas.openxmlformats.org/presentationml/2006/main" xmlns:r="http://schemas.openxmlformats.org/officeDocument/2006/relationships">
+  <p:cSld>
+    <p:spTree>
+      <p:nvGrpSpPr>
+        <p:cNvPr id="1" name=""/>
+        <p:cNvGrpSpPr/>
+        <p:nvPr/>
+      </p:nvGrpSpPr>
+      <p:grpSpPr>
+        <a:xfrm>
+          <a:off x="0" y="0"/>
+          <a:ext cx="0" cy="0"/>
+          <a:chOff x="0" y="0"/>
+          <a:chExt cx="0" cy="0"/>
+        </a:xfrm>
+      </p:grpSpPr>
+      <p:sp>
+        <p:nvSpPr>
+          <p:cNvPr id="2" name="Slide Image Placeholder 1"/>
+          <p:cNvSpPr>
+            <a:spLocks noGrp="1"/>
+          </p:cNvSpPr>
+          <p:nvPr>
+            <p:ph type="sldImg" idx="2"/>
+          </p:nvPr>
+        </p:nvSpPr>
+        <p:spPr/>
+      </p:sp>
+      <p:sp>
+        <p:nvSpPr>
+          <p:cNvPr id="3" name="Notes Placeholder 2"/>
+          <p:cNvSpPr>
+            <a:spLocks noGrp="1"/>
+          </p:cNvSpPr>
+          <p:nvPr>
+            <p:ph type="body" idx="3" sz="quarter"/>
+          </p:nvPr>
+        </p:nvSpPr>
+        <p:spPr/>
+        <p:txBody>
+          <a:bodyPr/>
+          <a:lstStyle/>
+          <a:p>
+            <a:r>
+              <a:t>We started with 20 files in an S3 bucket: about 38.8 million Yellow taxi trips and 465,000 Green taxi trips in Parquet format, plus a zone lookup mapping 265 zones to boroughs.</a:t>
+            </a:r>
+            <a:br/>
+            <a:br/>
+            <a:r>
+              <a:t>The two taxi types have different column names and slightly different schemas, so we had to reconcile them before combining. There is also a new congestion fee column that only appears starting January 2025.</a:t>
+            </a:r>
+            <a:br/>
+            <a:br/>
+            <a:r>
+              <a:t>We enriched this with hourly weather data from the Open-Meteo API, covering the same ten-month window. That gave us 7,248 hourly weather records including temperature, precipitation, wind speed, and weather codes that we categorized into Clear, Rain, Snow, Fog, and so on.</a:t>
+            </a:r>
+            <a:br/>
+            <a:br/>
+            <a:r>
+              <a:t>In total, we are working with over 39 million trips joined to weather conditions at the hour of pickup.</a:t>
+            </a:r>
+          </a:p>
+        </p:txBody>
+      </p:sp>
+      <p:sp>
+        <p:nvSpPr>
+          <p:cNvPr id="4" name="Slide Number Placeholder 3"/>
+          <p:cNvSpPr>
+            <a:spLocks noGrp="1"/>
+          </p:cNvSpPr>
+          <p:nvPr>
+            <p:ph type="sldNum" idx="5" sz="quarter"/>
+          </p:nvPr>
+        </p:nvSpPr>
+        <p:spPr/>
+      </p:sp>
+    </p:spTree>
+  </p:cSld>
+  <p:clrMapOvr>
+    <a:masterClrMapping/>
+  </p:clrMapOvr>
+</p:notes>
+</file>
+
+<file path=ppt/notesSlides/notesSlide7.xml><?xml version="1.0" encoding="utf-8"?>
+<p:notes xmlns:a="http://schemas.openxmlformats.org/drawingml/2006/main" xmlns:p="http://schemas.openxmlformats.org/presentationml/2006/main" xmlns:r="http://schemas.openxmlformats.org/officeDocument/2006/relationships">
+  <p:cSld>
+    <p:spTree>
+      <p:nvGrpSpPr>
+        <p:cNvPr id="1" name=""/>
+        <p:cNvGrpSpPr/>
+        <p:nvPr/>
+      </p:nvGrpSpPr>
+      <p:grpSpPr>
+        <a:xfrm>
+          <a:off x="0" y="0"/>
+          <a:ext cx="0" cy="0"/>
+          <a:chOff x="0" y="0"/>
+          <a:chExt cx="0" cy="0"/>
+        </a:xfrm>
+      </p:grpSpPr>
+      <p:sp>
+        <p:nvSpPr>
+          <p:cNvPr id="2" name="Slide Image Placeholder 1"/>
+          <p:cNvSpPr>
+            <a:spLocks noGrp="1"/>
+          </p:cNvSpPr>
+          <p:nvPr>
+            <p:ph type="sldImg" idx="2"/>
+          </p:nvPr>
+        </p:nvSpPr>
+        <p:spPr/>
+      </p:sp>
+      <p:sp>
+        <p:nvSpPr>
+          <p:cNvPr id="3" name="Notes Placeholder 2"/>
+          <p:cNvSpPr>
+            <a:spLocks noGrp="1"/>
+          </p:cNvSpPr>
+          <p:nvPr>
+            <p:ph type="body" idx="3" sz="quarter"/>
+          </p:nvPr>
+        </p:nvSpPr>
+        <p:spPr/>
+        <p:txBody>
+          <a:bodyPr/>
+          <a:lstStyle/>
+          <a:p>
+            <a:r>
+              <a:t>This is our end-to-end pipeline. Data flows left to right.</a:t>
+            </a:r>
+            <a:br/>
+            <a:br/>
+            <a:r>
+              <a:t>Raw Parquet files sit in S3. We load them unchanged into Snowflake Bronze, which is our landing zone. No transformations happen here, just a faithful copy of the source.</a:t>
+            </a:r>
+            <a:br/>
+            <a:br/>
+            <a:r>
+              <a:t>From Bronze, dbt builds our Silver layer: one unified trips table with data quality flags, plus clean zone and weather tables. Nothing is deleted in Silver; bad records are flagged but kept for traceability.</a:t>
+            </a:r>
+            <a:br/>
+            <a:br/>
+            <a:r>
+              <a:t>Silver feeds into Gold, where we filter to valid records only, join trips to boroughs and weather conditions, and aggregate into a small, fast table designed for dashboard consumption.</a:t>
+            </a:r>
+            <a:br/>
+            <a:br/>
+            <a:r>
+              <a:t>The whole thing runs with one command in about six minutes and is safe to re-run at any time.</a:t>
+            </a:r>
+          </a:p>
+        </p:txBody>
+      </p:sp>
+      <p:sp>
+        <p:nvSpPr>
+          <p:cNvPr id="4" name="Slide Number Placeholder 3"/>
+          <p:cNvSpPr>
+            <a:spLocks noGrp="1"/>
+          </p:cNvSpPr>
+          <p:nvPr>
+            <p:ph type="sldNum" idx="5" sz="quarter"/>
+          </p:nvPr>
+        </p:nvSpPr>
+        <p:spPr/>
+      </p:sp>
+    </p:spTree>
+  </p:cSld>
+  <p:clrMapOvr>
+    <a:masterClrMapping/>
+  </p:clrMapOvr>
+</p:notes>
+</file>
+
+<file path=ppt/notesSlides/notesSlide8.xml><?xml version="1.0" encoding="utf-8"?>
+<p:notes xmlns:a="http://schemas.openxmlformats.org/drawingml/2006/main" xmlns:p="http://schemas.openxmlformats.org/presentationml/2006/main" xmlns:r="http://schemas.openxmlformats.org/officeDocument/2006/relationships">
+  <p:cSld>
+    <p:spTree>
+      <p:nvGrpSpPr>
+        <p:cNvPr id="1" name=""/>
+        <p:cNvGrpSpPr/>
+        <p:nvPr/>
+      </p:nvGrpSpPr>
+      <p:grpSpPr>
+        <a:xfrm>
+          <a:off x="0" y="0"/>
+          <a:ext cx="0" cy="0"/>
+          <a:chOff x="0" y="0"/>
+          <a:chExt cx="0" cy="0"/>
+        </a:xfrm>
+      </p:grpSpPr>
+      <p:sp>
+        <p:nvSpPr>
+          <p:cNvPr id="2" name="Slide Image Placeholder 1"/>
+          <p:cNvSpPr>
+            <a:spLocks noGrp="1"/>
+          </p:cNvSpPr>
+          <p:nvPr>
+            <p:ph type="sldImg" idx="2"/>
+          </p:nvPr>
+        </p:nvSpPr>
+        <p:spPr/>
+      </p:sp>
+      <p:sp>
+        <p:nvSpPr>
+          <p:cNvPr id="3" name="Notes Placeholder 2"/>
+          <p:cNvSpPr>
+            <a:spLocks noGrp="1"/>
+          </p:cNvSpPr>
+          <p:nvPr>
+            <p:ph type="body" idx="3" sz="quarter"/>
+          </p:nvPr>
+        </p:nvSpPr>
+        <p:spPr/>
+        <p:txBody>
+          <a:bodyPr/>
+          <a:lstStyle/>
+          <a:p>
+            <a:r>
+              <a:t>We chose Pattern A, the warehouse-centric ELT approach. All transformation happens inside Snowflake using dbt.</a:t>
+            </a:r>
+            <a:br/>
+            <a:br/>
+            <a:r>
+              <a:t>The main reasons: our team is strongest in SQL, we had one week, and this approach has the fewest things that can break. Snowflake handles 39 million rows without us managing memory or clusters, and dbt gives us automated testing and version control on every transformation.</a:t>
+            </a:r>
+            <a:br/>
+            <a:br/>
+            <a:r>
+              <a:t>What we gave up is Spark experience and distributed compute. If our data were ten times larger or streaming, we would need a different approach, and we address that in our future state proposal.</a:t>
+            </a:r>
+            <a:br/>
+            <a:br/>
+            <a:r>
+              <a:t>The key design decisions are listed here: we use tables instead of views because 39 million rows is too expensive to rebuild on every query, we flag data quality issues rather than deleting them, and we join weather on the exact hour of each trip pickup.</a:t>
+            </a:r>
+          </a:p>
+        </p:txBody>
+      </p:sp>
+      <p:sp>
+        <p:nvSpPr>
+          <p:cNvPr id="4" name="Slide Number Placeholder 3"/>
+          <p:cNvSpPr>
+            <a:spLocks noGrp="1"/>
+          </p:cNvSpPr>
+          <p:nvPr>
+            <p:ph type="sldNum" idx="5" sz="quarter"/>
+          </p:nvPr>
+        </p:nvSpPr>
+        <p:spPr/>
+      </p:sp>
+    </p:spTree>
+  </p:cSld>
+  <p:clrMapOvr>
+    <a:masterClrMapping/>
+  </p:clrMapOvr>
+</p:notes>
+</file>
+
+<file path=ppt/notesSlides/notesSlide9.xml><?xml version="1.0" encoding="utf-8"?>
+<p:notes xmlns:a="http://schemas.openxmlformats.org/drawingml/2006/main" xmlns:p="http://schemas.openxmlformats.org/presentationml/2006/main" xmlns:r="http://schemas.openxmlformats.org/officeDocument/2006/relationships">
+  <p:cSld>
+    <p:spTree>
+      <p:nvGrpSpPr>
+        <p:cNvPr id="1" name=""/>
+        <p:cNvGrpSpPr/>
+        <p:nvPr/>
+      </p:nvGrpSpPr>
+      <p:grpSpPr>
+        <a:xfrm>
+          <a:off x="0" y="0"/>
+          <a:ext cx="0" cy="0"/>
+          <a:chOff x="0" y="0"/>
+          <a:chExt cx="0" cy="0"/>
+        </a:xfrm>
+      </p:grpSpPr>
+      <p:sp>
+        <p:nvSpPr>
+          <p:cNvPr id="2" name="Slide Image Placeholder 1"/>
+          <p:cNvSpPr>
+            <a:spLocks noGrp="1"/>
+          </p:cNvSpPr>
+          <p:nvPr>
+            <p:ph type="sldImg" idx="2"/>
+          </p:nvPr>
+        </p:nvSpPr>
+        <p:spPr/>
+      </p:sp>
+      <p:sp>
+        <p:nvSpPr>
+          <p:cNvPr id="3" name="Notes Placeholder 2"/>
+          <p:cNvSpPr>
+            <a:spLocks noGrp="1"/>
+          </p:cNvSpPr>
+          <p:nvPr>
+            <p:ph type="body" idx="3" sz="quarter"/>
+          </p:nvPr>
+        </p:nvSpPr>
+        <p:spPr/>
+        <p:txBody>
+          <a:bodyPr/>
+          <a:lstStyle/>
+          <a:p>
+            <a:r>
+              <a:t>Before landing on Pattern A, we explored multiple approaches.</a:t>
+            </a:r>
+            <a:br/>
+            <a:br/>
+            <a:r>
+              <a:t>First, we investigated NYC construction data as a potential enrichment source to see whether road work affected taxi demand. We moved on from that and pursued weather instead as a stronger analytical signal.</a:t>
+            </a:r>
+            <a:br/>
+            <a:br/>
+            <a:r>
+              <a:t>In parallel, we built and tested Pattern B, which uses AWS Glue and PySpark to do the heavy cleaning before data reaches Snowflake. That gave us hands-on experience with distributed processing and DataFrames.</a:t>
+            </a:r>
+            <a:br/>
+            <a:br/>
+            <a:r>
+              <a:t>Ultimately, we selected Pattern A because it offered the strongest reliability guarantee within our one-week sprint. But the Pattern B work was not wasted. It deepened our understanding of the data quality issues and made our final architecture decision more informed and more defensible.</a:t>
+            </a:r>
+          </a:p>
+        </p:txBody>
+      </p:sp>
+      <p:sp>
+        <p:nvSpPr>
+          <p:cNvPr id="4" name="Slide Number Placeholder 3"/>
+          <p:cNvSpPr>
+            <a:spLocks noGrp="1"/>
+          </p:cNvSpPr>
+          <p:nvPr>
+            <p:ph type="sldNum" idx="5" sz="quarter"/>
+          </p:nvPr>
+        </p:nvSpPr>
+        <p:spPr/>
+      </p:sp>
+    </p:spTree>
+  </p:cSld>
+  <p:clrMapOvr>
+    <a:masterClrMapping/>
+  </p:clrMapOvr>
+</p:notes>
 </file>
 
 <file path=ppt/slideLayouts/slideLayout1.xml><?xml version="1.0" encoding="utf-8"?>
@@ -8064,59 +9474,659 @@
       <p:grpSpPr/>
       <p:sp>
         <p:nvSpPr>
-          <p:cNvPr id="2" name="Text Placeholder 1"/>
-          <p:cNvSpPr>
-            <a:spLocks noGrp="1"/>
-          </p:cNvSpPr>
-          <p:nvPr>
-            <p:ph type="body" idx="13" sz="quarter"/>
+          <p:cNvPr id="2" name="Title 1"/>
+          <p:cNvSpPr>
+            <a:spLocks noGrp="1"/>
+          </p:cNvSpPr>
+          <p:nvPr>
+            <p:ph type="title"/>
           </p:nvPr>
         </p:nvSpPr>
         <p:spPr/>
         <p:txBody>
           <a:bodyPr/>
           <a:lstStyle/>
+          <a:p>
+            <a:r>
+              <a:t>Paths We Explored</a:t>
+            </a:r>
+          </a:p>
+        </p:txBody>
+      </p:sp>
+      <p:sp>
+        <p:nvSpPr>
+          <p:cNvPr id="3" name="Content Placeholder 2"/>
+          <p:cNvSpPr>
+            <a:spLocks noGrp="1"/>
+          </p:cNvSpPr>
+          <p:nvPr>
+            <p:ph idx="1"/>
+          </p:nvPr>
+        </p:nvSpPr>
+        <p:spPr/>
+        <p:txBody>
+          <a:bodyPr/>
+          <a:lstStyle/>
           <a:p/>
         </p:txBody>
       </p:sp>
       <p:sp>
         <p:nvSpPr>
-          <p:cNvPr id="3" name="Title 2"/>
-          <p:cNvSpPr>
-            <a:spLocks noGrp="1"/>
-          </p:cNvSpPr>
-          <p:nvPr>
-            <p:ph type="title"/>
-          </p:nvPr>
-        </p:nvSpPr>
-        <p:spPr/>
-        <p:txBody>
-          <a:bodyPr/>
-          <a:lstStyle/>
-          <a:p>
-            <a:r>
-              <a:t>3</a:t>
-            </a:r>
-          </a:p>
-        </p:txBody>
-      </p:sp>
-      <p:sp>
-        <p:nvSpPr>
-          <p:cNvPr id="4" name="Subtitle 3"/>
-          <p:cNvSpPr>
-            <a:spLocks noGrp="1"/>
-          </p:cNvSpPr>
-          <p:nvPr>
-            <p:ph type="subTitle" idx="1"/>
-          </p:nvPr>
-        </p:nvSpPr>
-        <p:spPr/>
-        <p:txBody>
-          <a:bodyPr/>
-          <a:lstStyle/>
-          <a:p>
-            <a:r>
-              <a:t>Data Quality</a:t>
+          <p:cNvPr id="4" name="Rectangle 3"/>
+          <p:cNvSpPr/>
+          <p:nvPr/>
+        </p:nvSpPr>
+        <p:spPr>
+          <a:xfrm>
+            <a:off x="0" y="800000"/>
+            <a:ext cx="12192000" cy="80000"/>
+          </a:xfrm>
+          <a:prstGeom prst="rect">
+            <a:avLst/>
+          </a:prstGeom>
+          <a:solidFill>
+            <a:srgbClr val="FE3082"/>
+          </a:solidFill>
+          <a:ln>
+            <a:noFill/>
+          </a:ln>
+        </p:spPr>
+        <p:style>
+          <a:lnRef idx="1">
+            <a:schemeClr val="accent1"/>
+          </a:lnRef>
+          <a:fillRef idx="3">
+            <a:schemeClr val="accent1"/>
+          </a:fillRef>
+          <a:effectRef idx="2">
+            <a:schemeClr val="accent1"/>
+          </a:effectRef>
+          <a:fontRef idx="minor">
+            <a:schemeClr val="lt1"/>
+          </a:fontRef>
+        </p:style>
+        <p:txBody>
+          <a:bodyPr rtlCol="0" anchor="ctr"/>
+          <a:lstStyle/>
+          <a:p>
+            <a:pPr algn="ctr"/>
+          </a:p>
+        </p:txBody>
+      </p:sp>
+      <p:sp>
+        <p:nvSpPr>
+          <p:cNvPr id="5" name="Rounded Rectangle 4"/>
+          <p:cNvSpPr/>
+          <p:nvPr/>
+        </p:nvSpPr>
+        <p:spPr>
+          <a:xfrm>
+            <a:off x="400000" y="1000000"/>
+            <a:ext cx="3500000" cy="2200000"/>
+          </a:xfrm>
+          <a:prstGeom prst="roundRect">
+            <a:avLst/>
+          </a:prstGeom>
+          <a:solidFill>
+            <a:srgbClr val="FFF3E0"/>
+          </a:solidFill>
+          <a:ln>
+            <a:noFill/>
+          </a:ln>
+        </p:spPr>
+        <p:style>
+          <a:lnRef idx="1">
+            <a:schemeClr val="accent1"/>
+          </a:lnRef>
+          <a:fillRef idx="3">
+            <a:schemeClr val="accent1"/>
+          </a:fillRef>
+          <a:effectRef idx="2">
+            <a:schemeClr val="accent1"/>
+          </a:effectRef>
+          <a:fontRef idx="minor">
+            <a:schemeClr val="lt1"/>
+          </a:fontRef>
+        </p:style>
+        <p:txBody>
+          <a:bodyPr rtlCol="0" anchor="ctr" wrap="square"/>
+          <a:lstStyle/>
+          <a:p>
+            <a:pPr algn="ctr"/>
+            <a:r>
+              <a:rPr sz="1600" b="1">
+                <a:solidFill>
+                  <a:srgbClr val="E65100"/>
+                </a:solidFill>
+              </a:rPr>
+              <a:t>Construction Data</a:t>
+            </a:r>
+          </a:p>
+          <a:p>
+            <a:pPr algn="ctr">
+              <a:spcBef>
+                <a:spcPts val="800"/>
+              </a:spcBef>
+            </a:pPr>
+            <a:r>
+              <a:rPr sz="1200" i="1">
+                <a:solidFill>
+                  <a:srgbClr val="555555"/>
+                </a:solidFill>
+              </a:rPr>
+              <a:t>Explored</a:t>
+            </a:r>
+          </a:p>
+          <a:p>
+            <a:pPr>
+              <a:spcBef>
+                <a:spcPts val="1200"/>
+              </a:spcBef>
+            </a:pPr>
+            <a:r>
+              <a:rPr sz="1100">
+                <a:solidFill>
+                  <a:srgbClr val="2D2D2D"/>
+                </a:solidFill>
+              </a:rPr>
+              <a:t>•  Investigated NYC construction data as enrichment</a:t>
+            </a:r>
+          </a:p>
+          <a:p>
+            <a:pPr>
+              <a:spcBef>
+                <a:spcPts val="400"/>
+              </a:spcBef>
+            </a:pPr>
+            <a:r>
+              <a:rPr sz="1100">
+                <a:solidFill>
+                  <a:srgbClr val="2D2D2D"/>
+                </a:solidFill>
+              </a:rPr>
+              <a:t>•  [Why we moved on: data quality, coverage, or relevance]</a:t>
+            </a:r>
+          </a:p>
+        </p:txBody>
+      </p:sp>
+      <p:sp>
+        <p:nvSpPr>
+          <p:cNvPr id="6" name="Rounded Rectangle 5"/>
+          <p:cNvSpPr/>
+          <p:nvPr/>
+        </p:nvSpPr>
+        <p:spPr>
+          <a:xfrm>
+            <a:off x="4200000" y="1000000"/>
+            <a:ext cx="3500000" cy="2200000"/>
+          </a:xfrm>
+          <a:prstGeom prst="roundRect">
+            <a:avLst/>
+          </a:prstGeom>
+          <a:solidFill>
+            <a:srgbClr val="E3F2FD"/>
+          </a:solidFill>
+          <a:ln>
+            <a:noFill/>
+          </a:ln>
+        </p:spPr>
+        <p:style>
+          <a:lnRef idx="1">
+            <a:schemeClr val="accent1"/>
+          </a:lnRef>
+          <a:fillRef idx="3">
+            <a:schemeClr val="accent1"/>
+          </a:fillRef>
+          <a:effectRef idx="2">
+            <a:schemeClr val="accent1"/>
+          </a:effectRef>
+          <a:fontRef idx="minor">
+            <a:schemeClr val="lt1"/>
+          </a:fontRef>
+        </p:style>
+        <p:txBody>
+          <a:bodyPr rtlCol="0" anchor="ctr" wrap="square"/>
+          <a:lstStyle/>
+          <a:p>
+            <a:pPr algn="ctr"/>
+            <a:r>
+              <a:rPr sz="1600" b="1">
+                <a:solidFill>
+                  <a:srgbClr val="0D47A1"/>
+                </a:solidFill>
+              </a:rPr>
+              <a:t>Pattern B (ETL)</a:t>
+            </a:r>
+          </a:p>
+          <a:p>
+            <a:pPr algn="ctr">
+              <a:spcBef>
+                <a:spcPts val="800"/>
+              </a:spcBef>
+            </a:pPr>
+            <a:r>
+              <a:rPr sz="1200" i="1">
+                <a:solidFill>
+                  <a:srgbClr val="555555"/>
+                </a:solidFill>
+              </a:rPr>
+              <a:t>Built and Tested</a:t>
+            </a:r>
+          </a:p>
+          <a:p>
+            <a:pPr>
+              <a:spcBef>
+                <a:spcPts val="1200"/>
+              </a:spcBef>
+            </a:pPr>
+            <a:r>
+              <a:rPr sz="1100">
+                <a:solidFill>
+                  <a:srgbClr val="2D2D2D"/>
+                </a:solidFill>
+              </a:rPr>
+              <a:t>•  AWS Glue + PySpark for Silver layer cleaning</a:t>
+            </a:r>
+          </a:p>
+          <a:p>
+            <a:pPr>
+              <a:spcBef>
+                <a:spcPts val="400"/>
+              </a:spcBef>
+            </a:pPr>
+            <a:r>
+              <a:rPr sz="1100">
+                <a:solidFill>
+                  <a:srgbClr val="2D2D2D"/>
+                </a:solidFill>
+              </a:rPr>
+              <a:t>•  DataFrame transformations for data quality</a:t>
+            </a:r>
+          </a:p>
+          <a:p>
+            <a:pPr>
+              <a:spcBef>
+                <a:spcPts val="400"/>
+              </a:spcBef>
+            </a:pPr>
+            <a:r>
+              <a:rPr sz="1100">
+                <a:solidFill>
+                  <a:srgbClr val="2D2D2D"/>
+                </a:solidFill>
+              </a:rPr>
+              <a:t>•  [Additional Pattern B details]</a:t>
+            </a:r>
+          </a:p>
+        </p:txBody>
+      </p:sp>
+      <p:sp>
+        <p:nvSpPr>
+          <p:cNvPr id="7" name="Rounded Rectangle 6"/>
+          <p:cNvSpPr/>
+          <p:nvPr/>
+        </p:nvSpPr>
+        <p:spPr>
+          <a:xfrm>
+            <a:off x="8000000" y="1000000"/>
+            <a:ext cx="3500000" cy="2200000"/>
+          </a:xfrm>
+          <a:prstGeom prst="roundRect">
+            <a:avLst/>
+          </a:prstGeom>
+          <a:solidFill>
+            <a:srgbClr val="E8F5E9"/>
+          </a:solidFill>
+          <a:ln>
+            <a:noFill/>
+          </a:ln>
+        </p:spPr>
+        <p:style>
+          <a:lnRef idx="1">
+            <a:schemeClr val="accent1"/>
+          </a:lnRef>
+          <a:fillRef idx="3">
+            <a:schemeClr val="accent1"/>
+          </a:fillRef>
+          <a:effectRef idx="2">
+            <a:schemeClr val="accent1"/>
+          </a:effectRef>
+          <a:fontRef idx="minor">
+            <a:schemeClr val="lt1"/>
+          </a:fontRef>
+        </p:style>
+        <p:txBody>
+          <a:bodyPr rtlCol="0" anchor="ctr" wrap="square"/>
+          <a:lstStyle/>
+          <a:p>
+            <a:pPr algn="ctr"/>
+            <a:r>
+              <a:rPr sz="1600" b="1">
+                <a:solidFill>
+                  <a:srgbClr val="2E7D32"/>
+                </a:solidFill>
+              </a:rPr>
+              <a:t>Pattern A (ELT)</a:t>
+            </a:r>
+          </a:p>
+          <a:p>
+            <a:pPr algn="ctr">
+              <a:spcBef>
+                <a:spcPts val="800"/>
+              </a:spcBef>
+            </a:pPr>
+            <a:r>
+              <a:rPr sz="1200" b="1">
+                <a:solidFill>
+                  <a:srgbClr val="2E7D32"/>
+                </a:solidFill>
+              </a:rPr>
+              <a:t>Selected</a:t>
+            </a:r>
+          </a:p>
+          <a:p>
+            <a:pPr>
+              <a:spcBef>
+                <a:spcPts val="1200"/>
+              </a:spcBef>
+            </a:pPr>
+            <a:r>
+              <a:rPr sz="1100">
+                <a:solidFill>
+                  <a:srgbClr val="2D2D2D"/>
+                </a:solidFill>
+              </a:rPr>
+              <a:t>•  Snowflake + dbt, all SQL</a:t>
+            </a:r>
+          </a:p>
+          <a:p>
+            <a:pPr>
+              <a:spcBef>
+                <a:spcPts val="400"/>
+              </a:spcBef>
+            </a:pPr>
+            <a:r>
+              <a:rPr sz="1100">
+                <a:solidFill>
+                  <a:srgbClr val="2D2D2D"/>
+                </a:solidFill>
+              </a:rPr>
+              <a:t>•  Full pipeline in ~6 min, 32 tests passing</a:t>
+            </a:r>
+          </a:p>
+          <a:p>
+            <a:pPr>
+              <a:spcBef>
+                <a:spcPts val="400"/>
+              </a:spcBef>
+            </a:pPr>
+            <a:r>
+              <a:rPr sz="1100">
+                <a:solidFill>
+                  <a:srgbClr val="2D2D2D"/>
+                </a:solidFill>
+              </a:rPr>
+              <a:t>•  Idempotent, reproducible, tested</a:t>
+            </a:r>
+          </a:p>
+        </p:txBody>
+      </p:sp>
+      <p:sp>
+        <p:nvSpPr>
+          <p:cNvPr id="8" name="TextBox 7"/>
+          <p:cNvSpPr txBox="1"/>
+          <p:nvPr/>
+        </p:nvSpPr>
+        <p:spPr>
+          <a:xfrm>
+            <a:off x="3700000" y="1800000"/>
+            <a:ext cx="700000" cy="500000"/>
+          </a:xfrm>
+          <a:prstGeom prst="rect">
+            <a:avLst/>
+          </a:prstGeom>
+          <a:noFill/>
+        </p:spPr>
+        <p:txBody>
+          <a:bodyPr wrap="none">
+            <a:spAutoFit/>
+          </a:bodyPr>
+          <a:lstStyle/>
+          <a:p>
+            <a:pPr algn="ctr"/>
+            <a:r>
+              <a:rPr sz="3200" b="1">
+                <a:solidFill>
+                  <a:srgbClr val="FE3082"/>
+                </a:solidFill>
+              </a:rPr>
+              <a:t>→</a:t>
+            </a:r>
+          </a:p>
+        </p:txBody>
+      </p:sp>
+      <p:sp>
+        <p:nvSpPr>
+          <p:cNvPr id="9" name="TextBox 8"/>
+          <p:cNvSpPr txBox="1"/>
+          <p:nvPr/>
+        </p:nvSpPr>
+        <p:spPr>
+          <a:xfrm>
+            <a:off x="7500000" y="1800000"/>
+            <a:ext cx="700000" cy="500000"/>
+          </a:xfrm>
+          <a:prstGeom prst="rect">
+            <a:avLst/>
+          </a:prstGeom>
+          <a:noFill/>
+        </p:spPr>
+        <p:txBody>
+          <a:bodyPr wrap="none">
+            <a:spAutoFit/>
+          </a:bodyPr>
+          <a:lstStyle/>
+          <a:p>
+            <a:pPr algn="ctr"/>
+            <a:r>
+              <a:rPr sz="3200" b="1">
+                <a:solidFill>
+                  <a:srgbClr val="FE3082"/>
+                </a:solidFill>
+              </a:rPr>
+              <a:t>→</a:t>
+            </a:r>
+          </a:p>
+        </p:txBody>
+      </p:sp>
+      <p:sp>
+        <p:nvSpPr>
+          <p:cNvPr id="10" name="Rounded Rectangle 9"/>
+          <p:cNvSpPr/>
+          <p:nvPr/>
+        </p:nvSpPr>
+        <p:spPr>
+          <a:xfrm>
+            <a:off x="400000" y="3500000"/>
+            <a:ext cx="11400000" cy="1200000"/>
+          </a:xfrm>
+          <a:prstGeom prst="roundRect">
+            <a:avLst/>
+          </a:prstGeom>
+          <a:solidFill>
+            <a:srgbClr val="FCE4EC"/>
+          </a:solidFill>
+          <a:ln>
+            <a:noFill/>
+          </a:ln>
+        </p:spPr>
+        <p:style>
+          <a:lnRef idx="1">
+            <a:schemeClr val="accent1"/>
+          </a:lnRef>
+          <a:fillRef idx="3">
+            <a:schemeClr val="accent1"/>
+          </a:fillRef>
+          <a:effectRef idx="2">
+            <a:schemeClr val="accent1"/>
+          </a:effectRef>
+          <a:fontRef idx="minor">
+            <a:schemeClr val="lt1"/>
+          </a:fontRef>
+        </p:style>
+        <p:txBody>
+          <a:bodyPr rtlCol="0" anchor="ctr" wrap="square"/>
+          <a:lstStyle/>
+          <a:p>
+            <a:pPr algn="ctr"/>
+            <a:r>
+              <a:rPr sz="1400" b="1">
+                <a:solidFill>
+                  <a:srgbClr val="FE3082"/>
+                </a:solidFill>
+              </a:rPr>
+              <a:t>Why We Chose Pattern A</a:t>
+            </a:r>
+          </a:p>
+          <a:p>
+            <a:pPr>
+              <a:spcBef>
+                <a:spcPts val="600"/>
+              </a:spcBef>
+            </a:pPr>
+            <a:r>
+              <a:rPr sz="1200">
+                <a:solidFill>
+                  <a:srgbClr val="2D2D2D"/>
+                </a:solidFill>
+              </a:rPr>
+              <a:t>•  Strongest reliability guarantee within a one-week sprint (fewer moving parts, fewer failure modes)</a:t>
+            </a:r>
+          </a:p>
+          <a:p>
+            <a:pPr>
+              <a:spcBef>
+                <a:spcPts val="400"/>
+              </a:spcBef>
+            </a:pPr>
+            <a:r>
+              <a:rPr sz="1200">
+                <a:solidFill>
+                  <a:srgbClr val="2D2D2D"/>
+                </a:solidFill>
+              </a:rPr>
+              <a:t>•  Team's SQL strength meant faster iteration and easier debugging</a:t>
+            </a:r>
+          </a:p>
+          <a:p>
+            <a:pPr>
+              <a:spcBef>
+                <a:spcPts val="400"/>
+              </a:spcBef>
+            </a:pPr>
+            <a:r>
+              <a:rPr sz="1200">
+                <a:solidFill>
+                  <a:srgbClr val="2D2D2D"/>
+                </a:solidFill>
+              </a:rPr>
+              <a:t>•  All work from Pattern B exploration informed our data quality understanding</a:t>
+            </a:r>
+          </a:p>
+        </p:txBody>
+      </p:sp>
+      <p:sp>
+        <p:nvSpPr>
+          <p:cNvPr id="11" name="Rounded Rectangle 10"/>
+          <p:cNvSpPr/>
+          <p:nvPr/>
+        </p:nvSpPr>
+        <p:spPr>
+          <a:xfrm>
+            <a:off x="400000" y="5000000"/>
+            <a:ext cx="11400000" cy="1200000"/>
+          </a:xfrm>
+          <a:prstGeom prst="roundRect">
+            <a:avLst/>
+          </a:prstGeom>
+          <a:solidFill>
+            <a:srgbClr val="E3F2FD"/>
+          </a:solidFill>
+          <a:ln>
+            <a:noFill/>
+          </a:ln>
+        </p:spPr>
+        <p:style>
+          <a:lnRef idx="1">
+            <a:schemeClr val="accent1"/>
+          </a:lnRef>
+          <a:fillRef idx="3">
+            <a:schemeClr val="accent1"/>
+          </a:fillRef>
+          <a:effectRef idx="2">
+            <a:schemeClr val="accent1"/>
+          </a:effectRef>
+          <a:fontRef idx="minor">
+            <a:schemeClr val="lt1"/>
+          </a:fontRef>
+        </p:style>
+        <p:txBody>
+          <a:bodyPr rtlCol="0" anchor="ctr" wrap="square"/>
+          <a:lstStyle/>
+          <a:p>
+            <a:pPr algn="ctr"/>
+            <a:r>
+              <a:rPr sz="1400" b="1">
+                <a:solidFill>
+                  <a:srgbClr val="0D47A1"/>
+                </a:solidFill>
+              </a:rPr>
+              <a:t>What the Exploration Taught Us</a:t>
+            </a:r>
+          </a:p>
+          <a:p>
+            <a:pPr>
+              <a:spcBef>
+                <a:spcPts val="600"/>
+              </a:spcBef>
+            </a:pPr>
+            <a:r>
+              <a:rPr sz="1200">
+                <a:solidFill>
+                  <a:srgbClr val="2D2D2D"/>
+                </a:solidFill>
+              </a:rPr>
+              <a:t>•  [Insight from construction data exploration that influenced final approach]</a:t>
+            </a:r>
+          </a:p>
+          <a:p>
+            <a:pPr>
+              <a:spcBef>
+                <a:spcPts val="400"/>
+              </a:spcBef>
+            </a:pPr>
+            <a:r>
+              <a:rPr sz="1200">
+                <a:solidFill>
+                  <a:srgbClr val="2D2D2D"/>
+                </a:solidFill>
+              </a:rPr>
+              <a:t>•  [Insight from Pattern B work, e.g., data quality issues discovered during Spark cleaning]</a:t>
+            </a:r>
+          </a:p>
+          <a:p>
+            <a:pPr>
+              <a:spcBef>
+                <a:spcPts val="400"/>
+              </a:spcBef>
+            </a:pPr>
+            <a:r>
+              <a:rPr sz="1200">
+                <a:solidFill>
+                  <a:srgbClr val="2D2D2D"/>
+                </a:solidFill>
+              </a:rPr>
+              <a:t>•  [How exploring multiple paths made our final architecture decision more defensible]</a:t>
             </a:r>
           </a:p>
         </p:txBody>
@@ -8141,7 +10151,24 @@
       <p:grpSpPr/>
       <p:sp>
         <p:nvSpPr>
-          <p:cNvPr id="2" name="Title 1"/>
+          <p:cNvPr id="2" name="Text Placeholder 1"/>
+          <p:cNvSpPr>
+            <a:spLocks noGrp="1"/>
+          </p:cNvSpPr>
+          <p:nvPr>
+            <p:ph type="body" idx="13" sz="quarter"/>
+          </p:nvPr>
+        </p:nvSpPr>
+        <p:spPr/>
+        <p:txBody>
+          <a:bodyPr/>
+          <a:lstStyle/>
+          <a:p/>
+        </p:txBody>
+      </p:sp>
+      <p:sp>
+        <p:nvSpPr>
+          <p:cNvPr id="3" name="Title 2"/>
           <p:cNvSpPr>
             <a:spLocks noGrp="1"/>
           </p:cNvSpPr>
@@ -8155,466 +10182,28 @@
           <a:lstStyle/>
           <a:p>
             <a:r>
-              <a:t>Data Quality: What Was Wrong and What We Did</a:t>
-            </a:r>
-          </a:p>
-        </p:txBody>
-      </p:sp>
-      <p:sp>
-        <p:nvSpPr>
-          <p:cNvPr id="3" name="Content Placeholder 2"/>
-          <p:cNvSpPr>
-            <a:spLocks noGrp="1"/>
-          </p:cNvSpPr>
-          <p:nvPr>
-            <p:ph idx="1"/>
+              <a:t>3</a:t>
+            </a:r>
+          </a:p>
+        </p:txBody>
+      </p:sp>
+      <p:sp>
+        <p:nvSpPr>
+          <p:cNvPr id="4" name="Subtitle 3"/>
+          <p:cNvSpPr>
+            <a:spLocks noGrp="1"/>
+          </p:cNvSpPr>
+          <p:nvPr>
+            <p:ph type="subTitle" idx="1"/>
           </p:nvPr>
         </p:nvSpPr>
         <p:spPr/>
         <p:txBody>
           <a:bodyPr/>
           <a:lstStyle/>
-          <a:p/>
-        </p:txBody>
-      </p:sp>
-      <p:sp>
-        <p:nvSpPr>
-          <p:cNvPr id="4" name="Rectangle 3"/>
-          <p:cNvSpPr/>
-          <p:nvPr/>
-        </p:nvSpPr>
-        <p:spPr>
-          <a:xfrm>
-            <a:off x="0" y="800000"/>
-            <a:ext cx="12192000" cy="80000"/>
-          </a:xfrm>
-          <a:prstGeom prst="rect">
-            <a:avLst/>
-          </a:prstGeom>
-          <a:solidFill>
-            <a:srgbClr val="FE3082"/>
-          </a:solidFill>
-          <a:ln>
-            <a:noFill/>
-          </a:ln>
-        </p:spPr>
-        <p:style>
-          <a:lnRef idx="1">
-            <a:schemeClr val="accent1"/>
-          </a:lnRef>
-          <a:fillRef idx="3">
-            <a:schemeClr val="accent1"/>
-          </a:fillRef>
-          <a:effectRef idx="2">
-            <a:schemeClr val="accent1"/>
-          </a:effectRef>
-          <a:fontRef idx="minor">
-            <a:schemeClr val="lt1"/>
-          </a:fontRef>
-        </p:style>
-        <p:txBody>
-          <a:bodyPr rtlCol="0" anchor="ctr"/>
-          <a:lstStyle/>
-          <a:p>
-            <a:pPr algn="ctr"/>
-          </a:p>
-        </p:txBody>
-      </p:sp>
-      <p:sp>
-        <p:nvSpPr>
-          <p:cNvPr id="5" name="Rounded Rectangle 4"/>
-          <p:cNvSpPr/>
-          <p:nvPr/>
-        </p:nvSpPr>
-        <p:spPr>
-          <a:xfrm>
-            <a:off x="400000" y="1000000"/>
-            <a:ext cx="5400000" cy="1800000"/>
-          </a:xfrm>
-          <a:prstGeom prst="roundRect">
-            <a:avLst/>
-          </a:prstGeom>
-          <a:solidFill>
-            <a:srgbClr val="E3F2FD"/>
-          </a:solidFill>
-          <a:ln>
-            <a:noFill/>
-          </a:ln>
-        </p:spPr>
-        <p:style>
-          <a:lnRef idx="1">
-            <a:schemeClr val="accent1"/>
-          </a:lnRef>
-          <a:fillRef idx="3">
-            <a:schemeClr val="accent1"/>
-          </a:fillRef>
-          <a:effectRef idx="2">
-            <a:schemeClr val="accent1"/>
-          </a:effectRef>
-          <a:fontRef idx="minor">
-            <a:schemeClr val="lt1"/>
-          </a:fontRef>
-        </p:style>
-        <p:txBody>
-          <a:bodyPr rtlCol="0" anchor="ctr" wrap="square"/>
-          <a:lstStyle/>
-          <a:p>
-            <a:pPr algn="ctr"/>
-            <a:r>
-              <a:rPr sz="1600" b="1">
-                <a:solidFill>
-                  <a:srgbClr val="0D47A1"/>
-                </a:solidFill>
-              </a:rPr>
-              <a:t>Pipeline Reconciliation</a:t>
-            </a:r>
-          </a:p>
-          <a:p>
-            <a:pPr>
-              <a:spcBef>
-                <a:spcPts val="400"/>
-              </a:spcBef>
-            </a:pPr>
-            <a:r>
-              <a:rPr sz="1100">
-                <a:solidFill>
-                  <a:srgbClr val="2D2D2D"/>
-                </a:solidFill>
-              </a:rPr>
-              <a:t>Rows in source files:  39,224,735</a:t>
-            </a:r>
-          </a:p>
-          <a:p>
-            <a:pPr>
-              <a:spcBef>
-                <a:spcPts val="400"/>
-              </a:spcBef>
-            </a:pPr>
-            <a:r>
-              <a:rPr sz="1100">
-                <a:solidFill>
-                  <a:srgbClr val="2D2D2D"/>
-                </a:solidFill>
-              </a:rPr>
-              <a:t>Rows loaded to Bronze:  39,224,735 (0 lost)</a:t>
-            </a:r>
-          </a:p>
-          <a:p>
-            <a:pPr>
-              <a:spcBef>
-                <a:spcPts val="400"/>
-              </a:spcBef>
-            </a:pPr>
-            <a:r>
-              <a:rPr sz="1100">
-                <a:solidFill>
-                  <a:srgbClr val="2D2D2D"/>
-                </a:solidFill>
-              </a:rPr>
-              <a:t>Rows in Silver:  39,224,735 (flagged, not removed)</a:t>
-            </a:r>
-          </a:p>
-          <a:p>
-            <a:pPr>
-              <a:spcBef>
-                <a:spcPts val="400"/>
-              </a:spcBef>
-            </a:pPr>
-            <a:r>
-              <a:rPr sz="1100">
-                <a:solidFill>
-                  <a:srgbClr val="2D2D2D"/>
-                </a:solidFill>
-              </a:rPr>
-              <a:t>Rows in Gold (valid only):  38,053,445</a:t>
-            </a:r>
-          </a:p>
-          <a:p>
-            <a:pPr>
-              <a:spcBef>
-                <a:spcPts val="400"/>
-              </a:spcBef>
-            </a:pPr>
-            <a:r>
-              <a:rPr sz="1100">
-                <a:solidFill>
-                  <a:srgbClr val="2D2D2D"/>
-                </a:solidFill>
-              </a:rPr>
-              <a:t>Rows flagged invalid:  1,171,290 (3.0%)</a:t>
-            </a:r>
-          </a:p>
-        </p:txBody>
-      </p:sp>
-      <p:sp>
-        <p:nvSpPr>
-          <p:cNvPr id="6" name="Rounded Rectangle 5"/>
-          <p:cNvSpPr/>
-          <p:nvPr/>
-        </p:nvSpPr>
-        <p:spPr>
-          <a:xfrm>
-            <a:off x="6100000" y="1000000"/>
-            <a:ext cx="5700000" cy="3200000"/>
-          </a:xfrm>
-          <a:prstGeom prst="roundRect">
-            <a:avLst/>
-          </a:prstGeom>
-          <a:solidFill>
-            <a:srgbClr val="FCE4EC"/>
-          </a:solidFill>
-          <a:ln>
-            <a:noFill/>
-          </a:ln>
-        </p:spPr>
-        <p:style>
-          <a:lnRef idx="1">
-            <a:schemeClr val="accent1"/>
-          </a:lnRef>
-          <a:fillRef idx="3">
-            <a:schemeClr val="accent1"/>
-          </a:fillRef>
-          <a:effectRef idx="2">
-            <a:schemeClr val="accent1"/>
-          </a:effectRef>
-          <a:fontRef idx="minor">
-            <a:schemeClr val="lt1"/>
-          </a:fontRef>
-        </p:style>
-        <p:txBody>
-          <a:bodyPr rtlCol="0" anchor="ctr" wrap="square"/>
-          <a:lstStyle/>
-          <a:p>
-            <a:pPr algn="ctr"/>
-            <a:r>
-              <a:rPr sz="1600" b="1">
-                <a:solidFill>
-                  <a:srgbClr val="FE3082"/>
-                </a:solidFill>
-              </a:rPr>
-              <a:t>Top Defects Found</a:t>
-            </a:r>
-          </a:p>
-          <a:p>
-            <a:pPr>
-              <a:spcBef>
-                <a:spcPts val="500"/>
-              </a:spcBef>
-            </a:pPr>
-            <a:r>
-              <a:rPr sz="1100">
-                <a:solidFill>
-                  <a:srgbClr val="2D2D2D"/>
-                </a:solidFill>
-              </a:rPr>
-              <a:t>•  Null/zero passenger_count: 9.2M (23%) - Kept (warn)</a:t>
-            </a:r>
-          </a:p>
-          <a:p>
-            <a:pPr>
-              <a:spcBef>
-                <a:spcPts val="500"/>
-              </a:spcBef>
-            </a:pPr>
-            <a:r>
-              <a:rPr sz="1100">
-                <a:solidFill>
-                  <a:srgbClr val="2D2D2D"/>
-                </a:solidFill>
-              </a:rPr>
-              <a:t>•  Payment type 0 (undocumented): 9M (23%) - Kept (warn)</a:t>
-            </a:r>
-          </a:p>
-          <a:p>
-            <a:pPr>
-              <a:spcBef>
-                <a:spcPts val="500"/>
-              </a:spcBef>
-            </a:pPr>
-            <a:r>
-              <a:rPr sz="1100">
-                <a:solidFill>
-                  <a:srgbClr val="2D2D2D"/>
-                </a:solidFill>
-              </a:rPr>
-              <a:t>•  Timestamp out of range: 702K (1.8%) - Flagged invalid</a:t>
-            </a:r>
-          </a:p>
-          <a:p>
-            <a:pPr>
-              <a:spcBef>
-                <a:spcPts val="500"/>
-              </a:spcBef>
-            </a:pPr>
-            <a:r>
-              <a:rPr sz="1100">
-                <a:solidFill>
-                  <a:srgbClr val="2D2D2D"/>
-                </a:solidFill>
-              </a:rPr>
-              <a:t>•  Negative fare: 247K (0.6%) - Flagged invalid</a:t>
-            </a:r>
-          </a:p>
-          <a:p>
-            <a:pPr>
-              <a:spcBef>
-                <a:spcPts val="500"/>
-              </a:spcBef>
-            </a:pPr>
-            <a:r>
-              <a:rPr sz="1100">
-                <a:solidFill>
-                  <a:srgbClr val="2D2D2D"/>
-                </a:solidFill>
-              </a:rPr>
-              <a:t>•  Distance &gt; 100 miles: 131K (0.3%) - Flagged invalid</a:t>
-            </a:r>
-          </a:p>
-          <a:p>
-            <a:pPr>
-              <a:spcBef>
-                <a:spcPts val="500"/>
-              </a:spcBef>
-            </a:pPr>
-            <a:r>
-              <a:rPr sz="1100">
-                <a:solidFill>
-                  <a:srgbClr val="2D2D2D"/>
-                </a:solidFill>
-              </a:rPr>
-              <a:t>•  Dropoff before pickup: 87K (0.2%) - Flagged invalid</a:t>
-            </a:r>
-          </a:p>
-        </p:txBody>
-      </p:sp>
-      <p:sp>
-        <p:nvSpPr>
-          <p:cNvPr id="7" name="Rounded Rectangle 6"/>
-          <p:cNvSpPr/>
-          <p:nvPr/>
-        </p:nvSpPr>
-        <p:spPr>
-          <a:xfrm>
-            <a:off x="400000" y="3100000"/>
-            <a:ext cx="5400000" cy="1100000"/>
-          </a:xfrm>
-          <a:prstGeom prst="roundRect">
-            <a:avLst/>
-          </a:prstGeom>
-          <a:solidFill>
-            <a:srgbClr val="FFF3E0"/>
-          </a:solidFill>
-          <a:ln>
-            <a:noFill/>
-          </a:ln>
-        </p:spPr>
-        <p:style>
-          <a:lnRef idx="1">
-            <a:schemeClr val="accent1"/>
-          </a:lnRef>
-          <a:fillRef idx="3">
-            <a:schemeClr val="accent1"/>
-          </a:fillRef>
-          <a:effectRef idx="2">
-            <a:schemeClr val="accent1"/>
-          </a:effectRef>
-          <a:fontRef idx="minor">
-            <a:schemeClr val="lt1"/>
-          </a:fontRef>
-        </p:style>
-        <p:txBody>
-          <a:bodyPr rtlCol="0" anchor="ctr" wrap="square"/>
-          <a:lstStyle/>
-          <a:p>
-            <a:pPr algn="ctr"/>
-            <a:r>
-              <a:rPr sz="1400" b="1">
-                <a:solidFill>
-                  <a:srgbClr val="E65100"/>
-                </a:solidFill>
-              </a:rPr>
-              <a:t>The Cash Tip Trap</a:t>
-            </a:r>
-          </a:p>
-          <a:p>
-            <a:pPr>
-              <a:spcBef>
-                <a:spcPts val="400"/>
-              </a:spcBef>
-            </a:pPr>
-            <a:r>
-              <a:rPr sz="1100">
-                <a:solidFill>
-                  <a:srgbClr val="2D2D2D"/>
-                </a:solidFill>
-              </a:rPr>
-              <a:t>tip_amount is recorded for credit card payments only. Cash tips appear as $0.00. Our tip analysis is limited to credit card transactions and we state this explicitly.</a:t>
-            </a:r>
-          </a:p>
-        </p:txBody>
-      </p:sp>
-      <p:sp>
-        <p:nvSpPr>
-          <p:cNvPr id="8" name="Rounded Rectangle 7"/>
-          <p:cNvSpPr/>
-          <p:nvPr/>
-        </p:nvSpPr>
-        <p:spPr>
-          <a:xfrm>
-            <a:off x="400000" y="4500000"/>
-            <a:ext cx="11400000" cy="1500000"/>
-          </a:xfrm>
-          <a:prstGeom prst="roundRect">
-            <a:avLst/>
-          </a:prstGeom>
-          <a:solidFill>
-            <a:srgbClr val="E8F5E9"/>
-          </a:solidFill>
-          <a:ln>
-            <a:noFill/>
-          </a:ln>
-        </p:spPr>
-        <p:style>
-          <a:lnRef idx="1">
-            <a:schemeClr val="accent1"/>
-          </a:lnRef>
-          <a:fillRef idx="3">
-            <a:schemeClr val="accent1"/>
-          </a:fillRef>
-          <a:effectRef idx="2">
-            <a:schemeClr val="accent1"/>
-          </a:effectRef>
-          <a:fontRef idx="minor">
-            <a:schemeClr val="lt1"/>
-          </a:fontRef>
-        </p:style>
-        <p:txBody>
-          <a:bodyPr rtlCol="0" anchor="ctr" wrap="square"/>
-          <a:lstStyle/>
-          <a:p>
-            <a:pPr algn="ctr"/>
-            <a:r>
-              <a:rPr sz="1400" b="1">
-                <a:solidFill>
-                  <a:srgbClr val="2E7D32"/>
-                </a:solidFill>
-              </a:rPr>
-              <a:t>Our Approach: Flag, Don't Delete</a:t>
-            </a:r>
-          </a:p>
-          <a:p>
-            <a:pPr>
-              <a:spcBef>
-                <a:spcPts val="400"/>
-              </a:spcBef>
-            </a:pPr>
-            <a:r>
-              <a:rPr sz="1200">
-                <a:solidFill>
-                  <a:srgbClr val="2D2D2D"/>
-                </a:solidFill>
-              </a:rPr>
-              <a:t>Every row gets is_valid (boolean) + dq_flag_reason (which checks failed). Silver keeps all 39.2M rows. Gold filters to valid only. Full traceability preserved. Two defects found NOT in the data catalog: payment_type 0 and null passenger_count.</a:t>
+          <a:p>
+            <a:r>
+              <a:t>Data Quality</a:t>
             </a:r>
           </a:p>
         </p:txBody>
@@ -8639,59 +10228,480 @@
       <p:grpSpPr/>
       <p:sp>
         <p:nvSpPr>
-          <p:cNvPr id="2" name="Text Placeholder 1"/>
-          <p:cNvSpPr>
-            <a:spLocks noGrp="1"/>
-          </p:cNvSpPr>
-          <p:nvPr>
-            <p:ph type="body" idx="13" sz="quarter"/>
+          <p:cNvPr id="2" name="Title 1"/>
+          <p:cNvSpPr>
+            <a:spLocks noGrp="1"/>
+          </p:cNvSpPr>
+          <p:nvPr>
+            <p:ph type="title"/>
           </p:nvPr>
         </p:nvSpPr>
         <p:spPr/>
         <p:txBody>
           <a:bodyPr/>
           <a:lstStyle/>
+          <a:p>
+            <a:r>
+              <a:t>Data Quality: What Was Wrong and What We Did</a:t>
+            </a:r>
+          </a:p>
+        </p:txBody>
+      </p:sp>
+      <p:sp>
+        <p:nvSpPr>
+          <p:cNvPr id="3" name="Content Placeholder 2"/>
+          <p:cNvSpPr>
+            <a:spLocks noGrp="1"/>
+          </p:cNvSpPr>
+          <p:nvPr>
+            <p:ph idx="1"/>
+          </p:nvPr>
+        </p:nvSpPr>
+        <p:spPr/>
+        <p:txBody>
+          <a:bodyPr/>
+          <a:lstStyle/>
           <a:p/>
         </p:txBody>
       </p:sp>
       <p:sp>
         <p:nvSpPr>
-          <p:cNvPr id="3" name="Title 2"/>
-          <p:cNvSpPr>
-            <a:spLocks noGrp="1"/>
-          </p:cNvSpPr>
-          <p:nvPr>
-            <p:ph type="title"/>
-          </p:nvPr>
-        </p:nvSpPr>
-        <p:spPr/>
-        <p:txBody>
-          <a:bodyPr/>
-          <a:lstStyle/>
-          <a:p>
-            <a:r>
-              <a:t>4</a:t>
-            </a:r>
-          </a:p>
-        </p:txBody>
-      </p:sp>
-      <p:sp>
-        <p:nvSpPr>
-          <p:cNvPr id="4" name="Subtitle 3"/>
-          <p:cNvSpPr>
-            <a:spLocks noGrp="1"/>
-          </p:cNvSpPr>
-          <p:nvPr>
-            <p:ph type="subTitle" idx="1"/>
-          </p:nvPr>
-        </p:nvSpPr>
-        <p:spPr/>
-        <p:txBody>
-          <a:bodyPr/>
-          <a:lstStyle/>
-          <a:p>
-            <a:r>
-              <a:t>Year-over-Year Analysis</a:t>
+          <p:cNvPr id="4" name="Rectangle 3"/>
+          <p:cNvSpPr/>
+          <p:nvPr/>
+        </p:nvSpPr>
+        <p:spPr>
+          <a:xfrm>
+            <a:off x="0" y="800000"/>
+            <a:ext cx="12192000" cy="80000"/>
+          </a:xfrm>
+          <a:prstGeom prst="rect">
+            <a:avLst/>
+          </a:prstGeom>
+          <a:solidFill>
+            <a:srgbClr val="FE3082"/>
+          </a:solidFill>
+          <a:ln>
+            <a:noFill/>
+          </a:ln>
+        </p:spPr>
+        <p:style>
+          <a:lnRef idx="1">
+            <a:schemeClr val="accent1"/>
+          </a:lnRef>
+          <a:fillRef idx="3">
+            <a:schemeClr val="accent1"/>
+          </a:fillRef>
+          <a:effectRef idx="2">
+            <a:schemeClr val="accent1"/>
+          </a:effectRef>
+          <a:fontRef idx="minor">
+            <a:schemeClr val="lt1"/>
+          </a:fontRef>
+        </p:style>
+        <p:txBody>
+          <a:bodyPr rtlCol="0" anchor="ctr"/>
+          <a:lstStyle/>
+          <a:p>
+            <a:pPr algn="ctr"/>
+          </a:p>
+        </p:txBody>
+      </p:sp>
+      <p:sp>
+        <p:nvSpPr>
+          <p:cNvPr id="5" name="Rounded Rectangle 4"/>
+          <p:cNvSpPr/>
+          <p:nvPr/>
+        </p:nvSpPr>
+        <p:spPr>
+          <a:xfrm>
+            <a:off x="400000" y="1000000"/>
+            <a:ext cx="5400000" cy="1800000"/>
+          </a:xfrm>
+          <a:prstGeom prst="roundRect">
+            <a:avLst/>
+          </a:prstGeom>
+          <a:solidFill>
+            <a:srgbClr val="E3F2FD"/>
+          </a:solidFill>
+          <a:ln>
+            <a:noFill/>
+          </a:ln>
+        </p:spPr>
+        <p:style>
+          <a:lnRef idx="1">
+            <a:schemeClr val="accent1"/>
+          </a:lnRef>
+          <a:fillRef idx="3">
+            <a:schemeClr val="accent1"/>
+          </a:fillRef>
+          <a:effectRef idx="2">
+            <a:schemeClr val="accent1"/>
+          </a:effectRef>
+          <a:fontRef idx="minor">
+            <a:schemeClr val="lt1"/>
+          </a:fontRef>
+        </p:style>
+        <p:txBody>
+          <a:bodyPr rtlCol="0" anchor="ctr" wrap="square"/>
+          <a:lstStyle/>
+          <a:p>
+            <a:pPr algn="ctr"/>
+            <a:r>
+              <a:rPr sz="1600" b="1">
+                <a:solidFill>
+                  <a:srgbClr val="0D47A1"/>
+                </a:solidFill>
+              </a:rPr>
+              <a:t>Pipeline Reconciliation</a:t>
+            </a:r>
+          </a:p>
+          <a:p>
+            <a:pPr>
+              <a:spcBef>
+                <a:spcPts val="400"/>
+              </a:spcBef>
+            </a:pPr>
+            <a:r>
+              <a:rPr sz="1100">
+                <a:solidFill>
+                  <a:srgbClr val="2D2D2D"/>
+                </a:solidFill>
+              </a:rPr>
+              <a:t>Rows in source files:  39,224,735</a:t>
+            </a:r>
+          </a:p>
+          <a:p>
+            <a:pPr>
+              <a:spcBef>
+                <a:spcPts val="400"/>
+              </a:spcBef>
+            </a:pPr>
+            <a:r>
+              <a:rPr sz="1100">
+                <a:solidFill>
+                  <a:srgbClr val="2D2D2D"/>
+                </a:solidFill>
+              </a:rPr>
+              <a:t>Rows loaded to Bronze:  39,224,735 (0 lost)</a:t>
+            </a:r>
+          </a:p>
+          <a:p>
+            <a:pPr>
+              <a:spcBef>
+                <a:spcPts val="400"/>
+              </a:spcBef>
+            </a:pPr>
+            <a:r>
+              <a:rPr sz="1100">
+                <a:solidFill>
+                  <a:srgbClr val="2D2D2D"/>
+                </a:solidFill>
+              </a:rPr>
+              <a:t>Rows in Silver:  39,224,735 (flagged, not removed)</a:t>
+            </a:r>
+          </a:p>
+          <a:p>
+            <a:pPr>
+              <a:spcBef>
+                <a:spcPts val="400"/>
+              </a:spcBef>
+            </a:pPr>
+            <a:r>
+              <a:rPr sz="1100">
+                <a:solidFill>
+                  <a:srgbClr val="2D2D2D"/>
+                </a:solidFill>
+              </a:rPr>
+              <a:t>Rows in Gold (valid only):  38,053,445</a:t>
+            </a:r>
+          </a:p>
+          <a:p>
+            <a:pPr>
+              <a:spcBef>
+                <a:spcPts val="400"/>
+              </a:spcBef>
+            </a:pPr>
+            <a:r>
+              <a:rPr sz="1100">
+                <a:solidFill>
+                  <a:srgbClr val="2D2D2D"/>
+                </a:solidFill>
+              </a:rPr>
+              <a:t>Rows flagged invalid:  1,171,290 (3.0%)</a:t>
+            </a:r>
+          </a:p>
+        </p:txBody>
+      </p:sp>
+      <p:sp>
+        <p:nvSpPr>
+          <p:cNvPr id="6" name="Rounded Rectangle 5"/>
+          <p:cNvSpPr/>
+          <p:nvPr/>
+        </p:nvSpPr>
+        <p:spPr>
+          <a:xfrm>
+            <a:off x="6100000" y="1000000"/>
+            <a:ext cx="5700000" cy="3200000"/>
+          </a:xfrm>
+          <a:prstGeom prst="roundRect">
+            <a:avLst/>
+          </a:prstGeom>
+          <a:solidFill>
+            <a:srgbClr val="FCE4EC"/>
+          </a:solidFill>
+          <a:ln>
+            <a:noFill/>
+          </a:ln>
+        </p:spPr>
+        <p:style>
+          <a:lnRef idx="1">
+            <a:schemeClr val="accent1"/>
+          </a:lnRef>
+          <a:fillRef idx="3">
+            <a:schemeClr val="accent1"/>
+          </a:fillRef>
+          <a:effectRef idx="2">
+            <a:schemeClr val="accent1"/>
+          </a:effectRef>
+          <a:fontRef idx="minor">
+            <a:schemeClr val="lt1"/>
+          </a:fontRef>
+        </p:style>
+        <p:txBody>
+          <a:bodyPr rtlCol="0" anchor="ctr" wrap="square"/>
+          <a:lstStyle/>
+          <a:p>
+            <a:pPr algn="ctr"/>
+            <a:r>
+              <a:rPr sz="1600" b="1">
+                <a:solidFill>
+                  <a:srgbClr val="FE3082"/>
+                </a:solidFill>
+              </a:rPr>
+              <a:t>Top Defects Found</a:t>
+            </a:r>
+          </a:p>
+          <a:p>
+            <a:pPr>
+              <a:spcBef>
+                <a:spcPts val="500"/>
+              </a:spcBef>
+            </a:pPr>
+            <a:r>
+              <a:rPr sz="1100">
+                <a:solidFill>
+                  <a:srgbClr val="2D2D2D"/>
+                </a:solidFill>
+              </a:rPr>
+              <a:t>•  Null/zero passenger_count: 9.2M (23%) - Kept (warn)</a:t>
+            </a:r>
+          </a:p>
+          <a:p>
+            <a:pPr>
+              <a:spcBef>
+                <a:spcPts val="500"/>
+              </a:spcBef>
+            </a:pPr>
+            <a:r>
+              <a:rPr sz="1100">
+                <a:solidFill>
+                  <a:srgbClr val="2D2D2D"/>
+                </a:solidFill>
+              </a:rPr>
+              <a:t>•  Payment type 0 (undocumented): 9M (23%) - Kept (warn)</a:t>
+            </a:r>
+          </a:p>
+          <a:p>
+            <a:pPr>
+              <a:spcBef>
+                <a:spcPts val="500"/>
+              </a:spcBef>
+            </a:pPr>
+            <a:r>
+              <a:rPr sz="1100">
+                <a:solidFill>
+                  <a:srgbClr val="2D2D2D"/>
+                </a:solidFill>
+              </a:rPr>
+              <a:t>•  Timestamp out of range: 702K (1.8%) - Flagged invalid</a:t>
+            </a:r>
+          </a:p>
+          <a:p>
+            <a:pPr>
+              <a:spcBef>
+                <a:spcPts val="500"/>
+              </a:spcBef>
+            </a:pPr>
+            <a:r>
+              <a:rPr sz="1100">
+                <a:solidFill>
+                  <a:srgbClr val="2D2D2D"/>
+                </a:solidFill>
+              </a:rPr>
+              <a:t>•  Negative fare: 247K (0.6%) - Flagged invalid</a:t>
+            </a:r>
+          </a:p>
+          <a:p>
+            <a:pPr>
+              <a:spcBef>
+                <a:spcPts val="500"/>
+              </a:spcBef>
+            </a:pPr>
+            <a:r>
+              <a:rPr sz="1100">
+                <a:solidFill>
+                  <a:srgbClr val="2D2D2D"/>
+                </a:solidFill>
+              </a:rPr>
+              <a:t>•  Distance &gt; 100 miles: 131K (0.3%) - Flagged invalid</a:t>
+            </a:r>
+          </a:p>
+          <a:p>
+            <a:pPr>
+              <a:spcBef>
+                <a:spcPts val="500"/>
+              </a:spcBef>
+            </a:pPr>
+            <a:r>
+              <a:rPr sz="1100">
+                <a:solidFill>
+                  <a:srgbClr val="2D2D2D"/>
+                </a:solidFill>
+              </a:rPr>
+              <a:t>•  Dropoff before pickup: 87K (0.2%) - Flagged invalid</a:t>
+            </a:r>
+          </a:p>
+        </p:txBody>
+      </p:sp>
+      <p:sp>
+        <p:nvSpPr>
+          <p:cNvPr id="7" name="Rounded Rectangle 6"/>
+          <p:cNvSpPr/>
+          <p:nvPr/>
+        </p:nvSpPr>
+        <p:spPr>
+          <a:xfrm>
+            <a:off x="400000" y="3100000"/>
+            <a:ext cx="5400000" cy="1100000"/>
+          </a:xfrm>
+          <a:prstGeom prst="roundRect">
+            <a:avLst/>
+          </a:prstGeom>
+          <a:solidFill>
+            <a:srgbClr val="FFF3E0"/>
+          </a:solidFill>
+          <a:ln>
+            <a:noFill/>
+          </a:ln>
+        </p:spPr>
+        <p:style>
+          <a:lnRef idx="1">
+            <a:schemeClr val="accent1"/>
+          </a:lnRef>
+          <a:fillRef idx="3">
+            <a:schemeClr val="accent1"/>
+          </a:fillRef>
+          <a:effectRef idx="2">
+            <a:schemeClr val="accent1"/>
+          </a:effectRef>
+          <a:fontRef idx="minor">
+            <a:schemeClr val="lt1"/>
+          </a:fontRef>
+        </p:style>
+        <p:txBody>
+          <a:bodyPr rtlCol="0" anchor="ctr" wrap="square"/>
+          <a:lstStyle/>
+          <a:p>
+            <a:pPr algn="ctr"/>
+            <a:r>
+              <a:rPr sz="1400" b="1">
+                <a:solidFill>
+                  <a:srgbClr val="E65100"/>
+                </a:solidFill>
+              </a:rPr>
+              <a:t>The Cash Tip Trap</a:t>
+            </a:r>
+          </a:p>
+          <a:p>
+            <a:pPr>
+              <a:spcBef>
+                <a:spcPts val="400"/>
+              </a:spcBef>
+            </a:pPr>
+            <a:r>
+              <a:rPr sz="1100">
+                <a:solidFill>
+                  <a:srgbClr val="2D2D2D"/>
+                </a:solidFill>
+              </a:rPr>
+              <a:t>tip_amount is recorded for credit card payments only. Cash tips appear as $0.00. Our tip analysis is limited to credit card transactions and we state this explicitly.</a:t>
+            </a:r>
+          </a:p>
+        </p:txBody>
+      </p:sp>
+      <p:sp>
+        <p:nvSpPr>
+          <p:cNvPr id="8" name="Rounded Rectangle 7"/>
+          <p:cNvSpPr/>
+          <p:nvPr/>
+        </p:nvSpPr>
+        <p:spPr>
+          <a:xfrm>
+            <a:off x="400000" y="4500000"/>
+            <a:ext cx="11400000" cy="1500000"/>
+          </a:xfrm>
+          <a:prstGeom prst="roundRect">
+            <a:avLst/>
+          </a:prstGeom>
+          <a:solidFill>
+            <a:srgbClr val="E8F5E9"/>
+          </a:solidFill>
+          <a:ln>
+            <a:noFill/>
+          </a:ln>
+        </p:spPr>
+        <p:style>
+          <a:lnRef idx="1">
+            <a:schemeClr val="accent1"/>
+          </a:lnRef>
+          <a:fillRef idx="3">
+            <a:schemeClr val="accent1"/>
+          </a:fillRef>
+          <a:effectRef idx="2">
+            <a:schemeClr val="accent1"/>
+          </a:effectRef>
+          <a:fontRef idx="minor">
+            <a:schemeClr val="lt1"/>
+          </a:fontRef>
+        </p:style>
+        <p:txBody>
+          <a:bodyPr rtlCol="0" anchor="ctr" wrap="square"/>
+          <a:lstStyle/>
+          <a:p>
+            <a:pPr algn="ctr"/>
+            <a:r>
+              <a:rPr sz="1400" b="1">
+                <a:solidFill>
+                  <a:srgbClr val="2E7D32"/>
+                </a:solidFill>
+              </a:rPr>
+              <a:t>Our Approach: Flag, Don't Delete</a:t>
+            </a:r>
+          </a:p>
+          <a:p>
+            <a:pPr>
+              <a:spcBef>
+                <a:spcPts val="400"/>
+              </a:spcBef>
+            </a:pPr>
+            <a:r>
+              <a:rPr sz="1200">
+                <a:solidFill>
+                  <a:srgbClr val="2D2D2D"/>
+                </a:solidFill>
+              </a:rPr>
+              <a:t>Every row gets is_valid (boolean) + dq_flag_reason (which checks failed). Silver keeps all 39.2M rows. Gold filters to valid only. Full traceability preserved. Two defects found NOT in the data catalog: payment_type 0 and null passenger_count.</a:t>
             </a:r>
           </a:p>
         </p:txBody>
@@ -8716,7 +10726,24 @@
       <p:grpSpPr/>
       <p:sp>
         <p:nvSpPr>
-          <p:cNvPr id="2" name="Title 1"/>
+          <p:cNvPr id="2" name="Text Placeholder 1"/>
+          <p:cNvSpPr>
+            <a:spLocks noGrp="1"/>
+          </p:cNvSpPr>
+          <p:nvPr>
+            <p:ph type="body" idx="13" sz="quarter"/>
+          </p:nvPr>
+        </p:nvSpPr>
+        <p:spPr/>
+        <p:txBody>
+          <a:bodyPr/>
+          <a:lstStyle/>
+          <a:p/>
+        </p:txBody>
+      </p:sp>
+      <p:sp>
+        <p:nvSpPr>
+          <p:cNvPr id="3" name="Title 2"/>
           <p:cNvSpPr>
             <a:spLocks noGrp="1"/>
           </p:cNvSpPr>
@@ -8730,373 +10757,28 @@
           <a:lstStyle/>
           <a:p>
             <a:r>
-              <a:t>Year-over-Year Finding</a:t>
-            </a:r>
-          </a:p>
-        </p:txBody>
-      </p:sp>
-      <p:sp>
-        <p:nvSpPr>
-          <p:cNvPr id="3" name="Content Placeholder 2"/>
-          <p:cNvSpPr>
-            <a:spLocks noGrp="1"/>
-          </p:cNvSpPr>
-          <p:nvPr>
-            <p:ph idx="1"/>
+              <a:t>4</a:t>
+            </a:r>
+          </a:p>
+        </p:txBody>
+      </p:sp>
+      <p:sp>
+        <p:nvSpPr>
+          <p:cNvPr id="4" name="Subtitle 3"/>
+          <p:cNvSpPr>
+            <a:spLocks noGrp="1"/>
+          </p:cNvSpPr>
+          <p:nvPr>
+            <p:ph type="subTitle" idx="1"/>
           </p:nvPr>
         </p:nvSpPr>
         <p:spPr/>
         <p:txBody>
           <a:bodyPr/>
           <a:lstStyle/>
-          <a:p/>
-        </p:txBody>
-      </p:sp>
-      <p:sp>
-        <p:nvSpPr>
-          <p:cNvPr id="4" name="Rectangle 3"/>
-          <p:cNvSpPr/>
-          <p:nvPr/>
-        </p:nvSpPr>
-        <p:spPr>
-          <a:xfrm>
-            <a:off x="0" y="800000"/>
-            <a:ext cx="12192000" cy="80000"/>
-          </a:xfrm>
-          <a:prstGeom prst="rect">
-            <a:avLst/>
-          </a:prstGeom>
-          <a:solidFill>
-            <a:srgbClr val="FE3082"/>
-          </a:solidFill>
-          <a:ln>
-            <a:noFill/>
-          </a:ln>
-        </p:spPr>
-        <p:style>
-          <a:lnRef idx="1">
-            <a:schemeClr val="accent1"/>
-          </a:lnRef>
-          <a:fillRef idx="3">
-            <a:schemeClr val="accent1"/>
-          </a:fillRef>
-          <a:effectRef idx="2">
-            <a:schemeClr val="accent1"/>
-          </a:effectRef>
-          <a:fontRef idx="minor">
-            <a:schemeClr val="lt1"/>
-          </a:fontRef>
-        </p:style>
-        <p:txBody>
-          <a:bodyPr rtlCol="0" anchor="ctr"/>
-          <a:lstStyle/>
-          <a:p>
-            <a:pPr algn="ctr"/>
-          </a:p>
-        </p:txBody>
-      </p:sp>
-      <p:sp>
-        <p:nvSpPr>
-          <p:cNvPr id="5" name="Rounded Rectangle 4"/>
-          <p:cNvSpPr/>
-          <p:nvPr/>
-        </p:nvSpPr>
-        <p:spPr>
-          <a:xfrm>
-            <a:off x="400000" y="1100000"/>
-            <a:ext cx="11400000" cy="1200000"/>
-          </a:xfrm>
-          <a:prstGeom prst="roundRect">
-            <a:avLst/>
-          </a:prstGeom>
-          <a:solidFill>
-            <a:srgbClr val="FCE4EC"/>
-          </a:solidFill>
-          <a:ln>
-            <a:noFill/>
-          </a:ln>
-        </p:spPr>
-        <p:style>
-          <a:lnRef idx="1">
-            <a:schemeClr val="accent1"/>
-          </a:lnRef>
-          <a:fillRef idx="3">
-            <a:schemeClr val="accent1"/>
-          </a:fillRef>
-          <a:effectRef idx="2">
-            <a:schemeClr val="accent1"/>
-          </a:effectRef>
-          <a:fontRef idx="minor">
-            <a:schemeClr val="lt1"/>
-          </a:fontRef>
-        </p:style>
-        <p:txBody>
-          <a:bodyPr rtlCol="0" anchor="ctr" wrap="square"/>
-          <a:lstStyle/>
-          <a:p>
-            <a:pPr algn="ctr"/>
-            <a:r>
-              <a:rPr sz="2200" b="1">
-                <a:solidFill>
-                  <a:srgbClr val="2D2D2D"/>
-                </a:solidFill>
-              </a:rPr>
-              <a:t>[STATE THE YEAR-OVER-YEAR FINDING HERE]</a:t>
-            </a:r>
-          </a:p>
-          <a:p>
-            <a:pPr algn="ctr"/>
-            <a:r>
-              <a:rPr sz="1300" i="1">
-                <a:solidFill>
-                  <a:srgbClr val="555555"/>
-                </a:solidFill>
-              </a:rPr>
-              <a:t>e.g., During rain/snow events, outer-borough demand fell X% YoY while Manhattan held steady</a:t>
-            </a:r>
-          </a:p>
-        </p:txBody>
-      </p:sp>
-      <p:sp>
-        <p:nvSpPr>
-          <p:cNvPr id="6" name="Rounded Rectangle 5"/>
-          <p:cNvSpPr/>
-          <p:nvPr/>
-        </p:nvSpPr>
-        <p:spPr>
-          <a:xfrm>
-            <a:off x="400000" y="2600000"/>
-            <a:ext cx="5400000" cy="1400000"/>
-          </a:xfrm>
-          <a:prstGeom prst="roundRect">
-            <a:avLst/>
-          </a:prstGeom>
-          <a:solidFill>
-            <a:srgbClr val="E3F2FD"/>
-          </a:solidFill>
-          <a:ln>
-            <a:noFill/>
-          </a:ln>
-        </p:spPr>
-        <p:style>
-          <a:lnRef idx="1">
-            <a:schemeClr val="accent1"/>
-          </a:lnRef>
-          <a:fillRef idx="3">
-            <a:schemeClr val="accent1"/>
-          </a:fillRef>
-          <a:effectRef idx="2">
-            <a:schemeClr val="accent1"/>
-          </a:effectRef>
-          <a:fontRef idx="minor">
-            <a:schemeClr val="lt1"/>
-          </a:fontRef>
-        </p:style>
-        <p:txBody>
-          <a:bodyPr rtlCol="0" anchor="ctr" wrap="square"/>
-          <a:lstStyle/>
-          <a:p>
-            <a:pPr algn="ctr"/>
-            <a:r>
-              <a:rPr sz="1400" b="1">
-                <a:solidFill>
-                  <a:srgbClr val="0D47A1"/>
-                </a:solidFill>
-              </a:rPr>
-              <a:t>Is the comparison fair?</a:t>
-            </a:r>
-          </a:p>
-          <a:p>
-            <a:r>
-              <a:rPr sz="1200">
-                <a:solidFill>
-                  <a:srgbClr val="2D2D2D"/>
-                </a:solidFill>
-              </a:rPr>
-              <a:t>Same months (Jan-May), same vehicle types, same DQ filters applied to both years. Weather conditions matched on same hourly granularity.</a:t>
-            </a:r>
-          </a:p>
-        </p:txBody>
-      </p:sp>
-      <p:sp>
-        <p:nvSpPr>
-          <p:cNvPr id="7" name="Rounded Rectangle 6"/>
-          <p:cNvSpPr/>
-          <p:nvPr/>
-        </p:nvSpPr>
-        <p:spPr>
-          <a:xfrm>
-            <a:off x="6100000" y="2600000"/>
-            <a:ext cx="5700000" cy="1400000"/>
-          </a:xfrm>
-          <a:prstGeom prst="roundRect">
-            <a:avLst/>
-          </a:prstGeom>
-          <a:solidFill>
-            <a:srgbClr val="E8F5E9"/>
-          </a:solidFill>
-          <a:ln>
-            <a:noFill/>
-          </a:ln>
-        </p:spPr>
-        <p:style>
-          <a:lnRef idx="1">
-            <a:schemeClr val="accent1"/>
-          </a:lnRef>
-          <a:fillRef idx="3">
-            <a:schemeClr val="accent1"/>
-          </a:fillRef>
-          <a:effectRef idx="2">
-            <a:schemeClr val="accent1"/>
-          </a:effectRef>
-          <a:fontRef idx="minor">
-            <a:schemeClr val="lt1"/>
-          </a:fontRef>
-        </p:style>
-        <p:txBody>
-          <a:bodyPr rtlCol="0" anchor="ctr" wrap="square"/>
-          <a:lstStyle/>
-          <a:p>
-            <a:pPr algn="ctr"/>
-            <a:r>
-              <a:rPr sz="1400" b="1">
-                <a:solidFill>
-                  <a:srgbClr val="2E7D32"/>
-                </a:solidFill>
-              </a:rPr>
-              <a:t>Could a DQ issue explain it?</a:t>
-            </a:r>
-          </a:p>
-          <a:p>
-            <a:r>
-              <a:rPr sz="1200">
-                <a:solidFill>
-                  <a:srgbClr val="2D2D2D"/>
-                </a:solidFill>
-              </a:rPr>
-              <a:t>[What we checked and ruled out: e.g., invalid rows distributed evenly across both years, no systematic bias]</a:t>
-            </a:r>
-          </a:p>
-        </p:txBody>
-      </p:sp>
-      <p:sp>
-        <p:nvSpPr>
-          <p:cNvPr id="8" name="Rounded Rectangle 7"/>
-          <p:cNvSpPr/>
-          <p:nvPr/>
-        </p:nvSpPr>
-        <p:spPr>
-          <a:xfrm>
-            <a:off x="400000" y="4300000"/>
-            <a:ext cx="5400000" cy="1400000"/>
-          </a:xfrm>
-          <a:prstGeom prst="roundRect">
-            <a:avLst/>
-          </a:prstGeom>
-          <a:solidFill>
-            <a:srgbClr val="FFF3E0"/>
-          </a:solidFill>
-          <a:ln>
-            <a:noFill/>
-          </a:ln>
-        </p:spPr>
-        <p:style>
-          <a:lnRef idx="1">
-            <a:schemeClr val="accent1"/>
-          </a:lnRef>
-          <a:fillRef idx="3">
-            <a:schemeClr val="accent1"/>
-          </a:fillRef>
-          <a:effectRef idx="2">
-            <a:schemeClr val="accent1"/>
-          </a:effectRef>
-          <a:fontRef idx="minor">
-            <a:schemeClr val="lt1"/>
-          </a:fontRef>
-        </p:style>
-        <p:txBody>
-          <a:bodyPr rtlCol="0" anchor="ctr" wrap="square"/>
-          <a:lstStyle/>
-          <a:p>
-            <a:pPr algn="ctr"/>
-            <a:r>
-              <a:rPr sz="1400" b="1">
-                <a:solidFill>
-                  <a:srgbClr val="E65100"/>
-                </a:solidFill>
-              </a:rPr>
-              <a:t>Is it large enough to be real?</a:t>
-            </a:r>
-          </a:p>
-          <a:p>
-            <a:r>
-              <a:rPr sz="1200">
-                <a:solidFill>
-                  <a:srgbClr val="2D2D2D"/>
-                </a:solidFill>
-              </a:rPr>
-              <a:t>[Evidence the change is not noise, or honest confidence statement]</a:t>
-            </a:r>
-          </a:p>
-        </p:txBody>
-      </p:sp>
-      <p:sp>
-        <p:nvSpPr>
-          <p:cNvPr id="9" name="Rounded Rectangle 8"/>
-          <p:cNvSpPr/>
-          <p:nvPr/>
-        </p:nvSpPr>
-        <p:spPr>
-          <a:xfrm>
-            <a:off x="6100000" y="4300000"/>
-            <a:ext cx="5700000" cy="1400000"/>
-          </a:xfrm>
-          <a:prstGeom prst="roundRect">
-            <a:avLst/>
-          </a:prstGeom>
-          <a:solidFill>
-            <a:srgbClr val="E3F2FD"/>
-          </a:solidFill>
-          <a:ln>
-            <a:noFill/>
-          </a:ln>
-        </p:spPr>
-        <p:style>
-          <a:lnRef idx="1">
-            <a:schemeClr val="accent1"/>
-          </a:lnRef>
-          <a:fillRef idx="3">
-            <a:schemeClr val="accent1"/>
-          </a:fillRef>
-          <a:effectRef idx="2">
-            <a:schemeClr val="accent1"/>
-          </a:effectRef>
-          <a:fontRef idx="minor">
-            <a:schemeClr val="lt1"/>
-          </a:fontRef>
-        </p:style>
-        <p:txBody>
-          <a:bodyPr rtlCol="0" anchor="ctr" wrap="square"/>
-          <a:lstStyle/>
-          <a:p>
-            <a:pPr algn="ctr"/>
-            <a:r>
-              <a:rPr sz="1400" b="1">
-                <a:solidFill>
-                  <a:srgbClr val="0D47A1"/>
-                </a:solidFill>
-              </a:rPr>
-              <a:t>So What?</a:t>
-            </a:r>
-          </a:p>
-          <a:p>
-            <a:r>
-              <a:rPr sz="1200">
-                <a:solidFill>
-                  <a:srgbClr val="2D2D2D"/>
-                </a:solidFill>
-              </a:rPr>
-              <a:t>[Business recommendation: e.g., stage more drivers in X borough during Y weather because Z]</a:t>
+          <a:p>
+            <a:r>
+              <a:t>Year-over-Year Analysis</a:t>
             </a:r>
           </a:p>
         </p:txBody>
@@ -9135,7 +10817,7 @@
           <a:lstStyle/>
           <a:p>
             <a:r>
-              <a:t>Dashboard</a:t>
+              <a:t>Year-over-Year Finding</a:t>
             </a:r>
           </a:p>
         </p:txBody>
@@ -9202,49 +10884,306 @@
       </p:sp>
       <p:sp>
         <p:nvSpPr>
-          <p:cNvPr id="5" name="TextBox 4"/>
-          <p:cNvSpPr txBox="1"/>
+          <p:cNvPr id="5" name="Rounded Rectangle 4"/>
+          <p:cNvSpPr/>
           <p:nvPr/>
         </p:nvSpPr>
         <p:spPr>
           <a:xfrm>
-            <a:off x="2000000" y="2500000"/>
-            <a:ext cx="8000000" cy="2000000"/>
-          </a:xfrm>
-          <a:prstGeom prst="rect">
+            <a:off x="400000" y="1100000"/>
+            <a:ext cx="11400000" cy="1200000"/>
+          </a:xfrm>
+          <a:prstGeom prst="roundRect">
             <a:avLst/>
           </a:prstGeom>
-          <a:noFill/>
-        </p:spPr>
-        <p:txBody>
-          <a:bodyPr wrap="none">
-            <a:spAutoFit/>
-          </a:bodyPr>
+          <a:solidFill>
+            <a:srgbClr val="FCE4EC"/>
+          </a:solidFill>
+          <a:ln>
+            <a:noFill/>
+          </a:ln>
+        </p:spPr>
+        <p:style>
+          <a:lnRef idx="1">
+            <a:schemeClr val="accent1"/>
+          </a:lnRef>
+          <a:fillRef idx="3">
+            <a:schemeClr val="accent1"/>
+          </a:fillRef>
+          <a:effectRef idx="2">
+            <a:schemeClr val="accent1"/>
+          </a:effectRef>
+          <a:fontRef idx="minor">
+            <a:schemeClr val="lt1"/>
+          </a:fontRef>
+        </p:style>
+        <p:txBody>
+          <a:bodyPr rtlCol="0" anchor="ctr" wrap="square"/>
           <a:lstStyle/>
           <a:p>
             <a:pPr algn="ctr"/>
             <a:r>
-              <a:rPr sz="2000" i="1">
+              <a:rPr sz="2200" b="1">
+                <a:solidFill>
+                  <a:srgbClr val="2D2D2D"/>
+                </a:solidFill>
+              </a:rPr>
+              <a:t>[STATE THE YEAR-OVER-YEAR FINDING HERE]</a:t>
+            </a:r>
+          </a:p>
+          <a:p>
+            <a:pPr algn="ctr"/>
+            <a:r>
+              <a:rPr sz="1300" i="1">
                 <a:solidFill>
                   <a:srgbClr val="555555"/>
                 </a:solidFill>
               </a:rPr>
-              <a:t>[Insert Tableau Dashboard Screenshot]</a:t>
-            </a:r>
-          </a:p>
-          <a:p>
-            <a:pPr algn="ctr">
-              <a:spcBef>
-                <a:spcPts val="1600"/>
-              </a:spcBef>
-            </a:pPr>
-            <a:r>
-              <a:rPr sz="1400">
+              <a:t>e.g., During rain/snow events, outer-borough demand fell X% YoY while Manhattan held steady</a:t>
+            </a:r>
+          </a:p>
+        </p:txBody>
+      </p:sp>
+      <p:sp>
+        <p:nvSpPr>
+          <p:cNvPr id="6" name="Rounded Rectangle 5"/>
+          <p:cNvSpPr/>
+          <p:nvPr/>
+        </p:nvSpPr>
+        <p:spPr>
+          <a:xfrm>
+            <a:off x="400000" y="2600000"/>
+            <a:ext cx="5400000" cy="1400000"/>
+          </a:xfrm>
+          <a:prstGeom prst="roundRect">
+            <a:avLst/>
+          </a:prstGeom>
+          <a:solidFill>
+            <a:srgbClr val="E3F2FD"/>
+          </a:solidFill>
+          <a:ln>
+            <a:noFill/>
+          </a:ln>
+        </p:spPr>
+        <p:style>
+          <a:lnRef idx="1">
+            <a:schemeClr val="accent1"/>
+          </a:lnRef>
+          <a:fillRef idx="3">
+            <a:schemeClr val="accent1"/>
+          </a:fillRef>
+          <a:effectRef idx="2">
+            <a:schemeClr val="accent1"/>
+          </a:effectRef>
+          <a:fontRef idx="minor">
+            <a:schemeClr val="lt1"/>
+          </a:fontRef>
+        </p:style>
+        <p:txBody>
+          <a:bodyPr rtlCol="0" anchor="ctr" wrap="square"/>
+          <a:lstStyle/>
+          <a:p>
+            <a:pPr algn="ctr"/>
+            <a:r>
+              <a:rPr sz="1400" b="1">
+                <a:solidFill>
+                  <a:srgbClr val="0D47A1"/>
+                </a:solidFill>
+              </a:rPr>
+              <a:t>Is the comparison fair?</a:t>
+            </a:r>
+          </a:p>
+          <a:p>
+            <a:r>
+              <a:rPr sz="1200">
                 <a:solidFill>
                   <a:srgbClr val="2D2D2D"/>
                 </a:solidFill>
               </a:rPr>
-              <a:t>Connected to AMO_GOLD.MART_WEATHER_DEMAND (34,719 rows)</a:t>
+              <a:t>Same months (Jan-May), same vehicle types, same DQ filters applied to both years. Weather conditions matched on same hourly granularity.</a:t>
+            </a:r>
+          </a:p>
+        </p:txBody>
+      </p:sp>
+      <p:sp>
+        <p:nvSpPr>
+          <p:cNvPr id="7" name="Rounded Rectangle 6"/>
+          <p:cNvSpPr/>
+          <p:nvPr/>
+        </p:nvSpPr>
+        <p:spPr>
+          <a:xfrm>
+            <a:off x="6100000" y="2600000"/>
+            <a:ext cx="5700000" cy="1400000"/>
+          </a:xfrm>
+          <a:prstGeom prst="roundRect">
+            <a:avLst/>
+          </a:prstGeom>
+          <a:solidFill>
+            <a:srgbClr val="E8F5E9"/>
+          </a:solidFill>
+          <a:ln>
+            <a:noFill/>
+          </a:ln>
+        </p:spPr>
+        <p:style>
+          <a:lnRef idx="1">
+            <a:schemeClr val="accent1"/>
+          </a:lnRef>
+          <a:fillRef idx="3">
+            <a:schemeClr val="accent1"/>
+          </a:fillRef>
+          <a:effectRef idx="2">
+            <a:schemeClr val="accent1"/>
+          </a:effectRef>
+          <a:fontRef idx="minor">
+            <a:schemeClr val="lt1"/>
+          </a:fontRef>
+        </p:style>
+        <p:txBody>
+          <a:bodyPr rtlCol="0" anchor="ctr" wrap="square"/>
+          <a:lstStyle/>
+          <a:p>
+            <a:pPr algn="ctr"/>
+            <a:r>
+              <a:rPr sz="1400" b="1">
+                <a:solidFill>
+                  <a:srgbClr val="2E7D32"/>
+                </a:solidFill>
+              </a:rPr>
+              <a:t>Could a DQ issue explain it?</a:t>
+            </a:r>
+          </a:p>
+          <a:p>
+            <a:r>
+              <a:rPr sz="1200">
+                <a:solidFill>
+                  <a:srgbClr val="2D2D2D"/>
+                </a:solidFill>
+              </a:rPr>
+              <a:t>[What we checked and ruled out: e.g., invalid rows distributed evenly across both years, no systematic bias]</a:t>
+            </a:r>
+          </a:p>
+        </p:txBody>
+      </p:sp>
+      <p:sp>
+        <p:nvSpPr>
+          <p:cNvPr id="8" name="Rounded Rectangle 7"/>
+          <p:cNvSpPr/>
+          <p:nvPr/>
+        </p:nvSpPr>
+        <p:spPr>
+          <a:xfrm>
+            <a:off x="400000" y="4300000"/>
+            <a:ext cx="5400000" cy="1400000"/>
+          </a:xfrm>
+          <a:prstGeom prst="roundRect">
+            <a:avLst/>
+          </a:prstGeom>
+          <a:solidFill>
+            <a:srgbClr val="FFF3E0"/>
+          </a:solidFill>
+          <a:ln>
+            <a:noFill/>
+          </a:ln>
+        </p:spPr>
+        <p:style>
+          <a:lnRef idx="1">
+            <a:schemeClr val="accent1"/>
+          </a:lnRef>
+          <a:fillRef idx="3">
+            <a:schemeClr val="accent1"/>
+          </a:fillRef>
+          <a:effectRef idx="2">
+            <a:schemeClr val="accent1"/>
+          </a:effectRef>
+          <a:fontRef idx="minor">
+            <a:schemeClr val="lt1"/>
+          </a:fontRef>
+        </p:style>
+        <p:txBody>
+          <a:bodyPr rtlCol="0" anchor="ctr" wrap="square"/>
+          <a:lstStyle/>
+          <a:p>
+            <a:pPr algn="ctr"/>
+            <a:r>
+              <a:rPr sz="1400" b="1">
+                <a:solidFill>
+                  <a:srgbClr val="E65100"/>
+                </a:solidFill>
+              </a:rPr>
+              <a:t>Is it large enough to be real?</a:t>
+            </a:r>
+          </a:p>
+          <a:p>
+            <a:r>
+              <a:rPr sz="1200">
+                <a:solidFill>
+                  <a:srgbClr val="2D2D2D"/>
+                </a:solidFill>
+              </a:rPr>
+              <a:t>[Evidence the change is not noise, or honest confidence statement]</a:t>
+            </a:r>
+          </a:p>
+        </p:txBody>
+      </p:sp>
+      <p:sp>
+        <p:nvSpPr>
+          <p:cNvPr id="9" name="Rounded Rectangle 8"/>
+          <p:cNvSpPr/>
+          <p:nvPr/>
+        </p:nvSpPr>
+        <p:spPr>
+          <a:xfrm>
+            <a:off x="6100000" y="4300000"/>
+            <a:ext cx="5700000" cy="1400000"/>
+          </a:xfrm>
+          <a:prstGeom prst="roundRect">
+            <a:avLst/>
+          </a:prstGeom>
+          <a:solidFill>
+            <a:srgbClr val="E3F2FD"/>
+          </a:solidFill>
+          <a:ln>
+            <a:noFill/>
+          </a:ln>
+        </p:spPr>
+        <p:style>
+          <a:lnRef idx="1">
+            <a:schemeClr val="accent1"/>
+          </a:lnRef>
+          <a:fillRef idx="3">
+            <a:schemeClr val="accent1"/>
+          </a:fillRef>
+          <a:effectRef idx="2">
+            <a:schemeClr val="accent1"/>
+          </a:effectRef>
+          <a:fontRef idx="minor">
+            <a:schemeClr val="lt1"/>
+          </a:fontRef>
+        </p:style>
+        <p:txBody>
+          <a:bodyPr rtlCol="0" anchor="ctr" wrap="square"/>
+          <a:lstStyle/>
+          <a:p>
+            <a:pPr algn="ctr"/>
+            <a:r>
+              <a:rPr sz="1400" b="1">
+                <a:solidFill>
+                  <a:srgbClr val="0D47A1"/>
+                </a:solidFill>
+              </a:rPr>
+              <a:t>So What?</a:t>
+            </a:r>
+          </a:p>
+          <a:p>
+            <a:r>
+              <a:rPr sz="1200">
+                <a:solidFill>
+                  <a:srgbClr val="2D2D2D"/>
+                </a:solidFill>
+              </a:rPr>
+              <a:t>[Business recommendation: e.g., stage more drivers in X borough during Y weather because Z]</a:t>
             </a:r>
           </a:p>
         </p:txBody>
@@ -9283,7 +11222,7 @@
           <a:lstStyle/>
           <a:p>
             <a:r>
-              <a:t>Supporting Analysis</a:t>
+              <a:t>Dashboard</a:t>
             </a:r>
           </a:p>
         </p:txBody>
@@ -9372,18 +11311,18 @@
           <a:p>
             <a:pPr algn="ctr"/>
             <a:r>
-              <a:rPr sz="1800" i="1">
+              <a:rPr sz="2000" i="1">
                 <a:solidFill>
                   <a:srgbClr val="555555"/>
                 </a:solidFill>
               </a:rPr>
-              <a:t>[Additional charts / breakdowns from Tableau]</a:t>
+              <a:t>[Insert Tableau Dashboard Screenshot]</a:t>
             </a:r>
           </a:p>
           <a:p>
             <a:pPr algn="ctr">
               <a:spcBef>
-                <a:spcPts val="1200"/>
+                <a:spcPts val="1600"/>
               </a:spcBef>
             </a:pPr>
             <a:r>
@@ -9392,7 +11331,7 @@
                   <a:srgbClr val="2D2D2D"/>
                 </a:solidFill>
               </a:rPr>
-              <a:t>Revenue by weather, duration by borough, payment type splits</a:t>
+              <a:t>Connected to AMO_GOLD.MART_WEATHER_DEMAND (34,719 rows)</a:t>
             </a:r>
           </a:p>
         </p:txBody>
@@ -9417,59 +11356,130 @@
       <p:grpSpPr/>
       <p:sp>
         <p:nvSpPr>
-          <p:cNvPr id="2" name="Text Placeholder 1"/>
-          <p:cNvSpPr>
-            <a:spLocks noGrp="1"/>
-          </p:cNvSpPr>
-          <p:nvPr>
-            <p:ph type="body" idx="13" sz="quarter"/>
+          <p:cNvPr id="2" name="Title 1"/>
+          <p:cNvSpPr>
+            <a:spLocks noGrp="1"/>
+          </p:cNvSpPr>
+          <p:nvPr>
+            <p:ph type="title"/>
           </p:nvPr>
         </p:nvSpPr>
         <p:spPr/>
         <p:txBody>
           <a:bodyPr/>
           <a:lstStyle/>
+          <a:p>
+            <a:r>
+              <a:t>Supporting Analysis (duplicate as needed)</a:t>
+            </a:r>
+          </a:p>
+        </p:txBody>
+      </p:sp>
+      <p:sp>
+        <p:nvSpPr>
+          <p:cNvPr id="3" name="Content Placeholder 2"/>
+          <p:cNvSpPr>
+            <a:spLocks noGrp="1"/>
+          </p:cNvSpPr>
+          <p:nvPr>
+            <p:ph idx="1"/>
+          </p:nvPr>
+        </p:nvSpPr>
+        <p:spPr/>
+        <p:txBody>
+          <a:bodyPr/>
+          <a:lstStyle/>
           <a:p/>
         </p:txBody>
       </p:sp>
       <p:sp>
         <p:nvSpPr>
-          <p:cNvPr id="3" name="Title 2"/>
-          <p:cNvSpPr>
-            <a:spLocks noGrp="1"/>
-          </p:cNvSpPr>
-          <p:nvPr>
-            <p:ph type="title"/>
-          </p:nvPr>
-        </p:nvSpPr>
-        <p:spPr/>
-        <p:txBody>
-          <a:bodyPr/>
-          <a:lstStyle/>
-          <a:p>
-            <a:r>
-              <a:t>5</a:t>
-            </a:r>
-          </a:p>
-        </p:txBody>
-      </p:sp>
-      <p:sp>
-        <p:nvSpPr>
-          <p:cNvPr id="4" name="Subtitle 3"/>
-          <p:cNvSpPr>
-            <a:spLocks noGrp="1"/>
-          </p:cNvSpPr>
-          <p:nvPr>
-            <p:ph type="subTitle" idx="1"/>
-          </p:nvPr>
-        </p:nvSpPr>
-        <p:spPr/>
-        <p:txBody>
-          <a:bodyPr/>
-          <a:lstStyle/>
-          <a:p>
-            <a:r>
-              <a:t>Technical Deep Dive</a:t>
+          <p:cNvPr id="4" name="Rectangle 3"/>
+          <p:cNvSpPr/>
+          <p:nvPr/>
+        </p:nvSpPr>
+        <p:spPr>
+          <a:xfrm>
+            <a:off x="0" y="800000"/>
+            <a:ext cx="12192000" cy="80000"/>
+          </a:xfrm>
+          <a:prstGeom prst="rect">
+            <a:avLst/>
+          </a:prstGeom>
+          <a:solidFill>
+            <a:srgbClr val="FE3082"/>
+          </a:solidFill>
+          <a:ln>
+            <a:noFill/>
+          </a:ln>
+        </p:spPr>
+        <p:style>
+          <a:lnRef idx="1">
+            <a:schemeClr val="accent1"/>
+          </a:lnRef>
+          <a:fillRef idx="3">
+            <a:schemeClr val="accent1"/>
+          </a:fillRef>
+          <a:effectRef idx="2">
+            <a:schemeClr val="accent1"/>
+          </a:effectRef>
+          <a:fontRef idx="minor">
+            <a:schemeClr val="lt1"/>
+          </a:fontRef>
+        </p:style>
+        <p:txBody>
+          <a:bodyPr rtlCol="0" anchor="ctr"/>
+          <a:lstStyle/>
+          <a:p>
+            <a:pPr algn="ctr"/>
+          </a:p>
+        </p:txBody>
+      </p:sp>
+      <p:sp>
+        <p:nvSpPr>
+          <p:cNvPr id="5" name="TextBox 4"/>
+          <p:cNvSpPr txBox="1"/>
+          <p:nvPr/>
+        </p:nvSpPr>
+        <p:spPr>
+          <a:xfrm>
+            <a:off x="2000000" y="2500000"/>
+            <a:ext cx="8000000" cy="2000000"/>
+          </a:xfrm>
+          <a:prstGeom prst="rect">
+            <a:avLst/>
+          </a:prstGeom>
+          <a:noFill/>
+        </p:spPr>
+        <p:txBody>
+          <a:bodyPr wrap="none">
+            <a:spAutoFit/>
+          </a:bodyPr>
+          <a:lstStyle/>
+          <a:p>
+            <a:pPr algn="ctr"/>
+            <a:r>
+              <a:rPr sz="1800" i="1">
+                <a:solidFill>
+                  <a:srgbClr val="555555"/>
+                </a:solidFill>
+              </a:rPr>
+              <a:t>[Additional charts / breakdowns from Tableau]</a:t>
+            </a:r>
+          </a:p>
+          <a:p>
+            <a:pPr algn="ctr">
+              <a:spcBef>
+                <a:spcPts val="1200"/>
+              </a:spcBef>
+            </a:pPr>
+            <a:r>
+              <a:rPr sz="1400">
+                <a:solidFill>
+                  <a:srgbClr val="2D2D2D"/>
+                </a:solidFill>
+              </a:rPr>
+              <a:t>Revenue by weather, duration by borough, payment type splits</a:t>
             </a:r>
           </a:p>
         </p:txBody>
@@ -9494,7 +11504,24 @@
       <p:grpSpPr/>
       <p:sp>
         <p:nvSpPr>
-          <p:cNvPr id="2" name="Title 1"/>
+          <p:cNvPr id="2" name="Text Placeholder 1"/>
+          <p:cNvSpPr>
+            <a:spLocks noGrp="1"/>
+          </p:cNvSpPr>
+          <p:nvPr>
+            <p:ph type="body" idx="13" sz="quarter"/>
+          </p:nvPr>
+        </p:nvSpPr>
+        <p:spPr/>
+        <p:txBody>
+          <a:bodyPr/>
+          <a:lstStyle/>
+          <a:p/>
+        </p:txBody>
+      </p:sp>
+      <p:sp>
+        <p:nvSpPr>
+          <p:cNvPr id="3" name="Title 2"/>
           <p:cNvSpPr>
             <a:spLocks noGrp="1"/>
           </p:cNvSpPr>
@@ -9508,586 +11535,28 @@
           <a:lstStyle/>
           <a:p>
             <a:r>
-              <a:t>Technical Decisions and Trade-offs</a:t>
-            </a:r>
-          </a:p>
-        </p:txBody>
-      </p:sp>
-      <p:sp>
-        <p:nvSpPr>
-          <p:cNvPr id="3" name="Content Placeholder 2"/>
-          <p:cNvSpPr>
-            <a:spLocks noGrp="1"/>
-          </p:cNvSpPr>
-          <p:nvPr>
-            <p:ph idx="1"/>
+              <a:t>5</a:t>
+            </a:r>
+          </a:p>
+        </p:txBody>
+      </p:sp>
+      <p:sp>
+        <p:nvSpPr>
+          <p:cNvPr id="4" name="Subtitle 3"/>
+          <p:cNvSpPr>
+            <a:spLocks noGrp="1"/>
+          </p:cNvSpPr>
+          <p:nvPr>
+            <p:ph type="subTitle" idx="1"/>
           </p:nvPr>
         </p:nvSpPr>
         <p:spPr/>
         <p:txBody>
           <a:bodyPr/>
           <a:lstStyle/>
-          <a:p/>
-        </p:txBody>
-      </p:sp>
-      <p:sp>
-        <p:nvSpPr>
-          <p:cNvPr id="4" name="Rectangle 3"/>
-          <p:cNvSpPr/>
-          <p:nvPr/>
-        </p:nvSpPr>
-        <p:spPr>
-          <a:xfrm>
-            <a:off x="0" y="800000"/>
-            <a:ext cx="12192000" cy="80000"/>
-          </a:xfrm>
-          <a:prstGeom prst="rect">
-            <a:avLst/>
-          </a:prstGeom>
-          <a:solidFill>
-            <a:srgbClr val="FE3082"/>
-          </a:solidFill>
-          <a:ln>
-            <a:noFill/>
-          </a:ln>
-        </p:spPr>
-        <p:style>
-          <a:lnRef idx="1">
-            <a:schemeClr val="accent1"/>
-          </a:lnRef>
-          <a:fillRef idx="3">
-            <a:schemeClr val="accent1"/>
-          </a:fillRef>
-          <a:effectRef idx="2">
-            <a:schemeClr val="accent1"/>
-          </a:effectRef>
-          <a:fontRef idx="minor">
-            <a:schemeClr val="lt1"/>
-          </a:fontRef>
-        </p:style>
-        <p:txBody>
-          <a:bodyPr rtlCol="0" anchor="ctr"/>
-          <a:lstStyle/>
-          <a:p>
-            <a:pPr algn="ctr"/>
-          </a:p>
-        </p:txBody>
-      </p:sp>
-      <p:sp>
-        <p:nvSpPr>
-          <p:cNvPr id="5" name="Rounded Rectangle 4"/>
-          <p:cNvSpPr/>
-          <p:nvPr/>
-        </p:nvSpPr>
-        <p:spPr>
-          <a:xfrm>
-            <a:off x="400000" y="1000000"/>
-            <a:ext cx="5400000" cy="2200000"/>
-          </a:xfrm>
-          <a:prstGeom prst="roundRect">
-            <a:avLst/>
-          </a:prstGeom>
-          <a:solidFill>
-            <a:srgbClr val="E3F2FD"/>
-          </a:solidFill>
-          <a:ln>
-            <a:noFill/>
-          </a:ln>
-        </p:spPr>
-        <p:style>
-          <a:lnRef idx="1">
-            <a:schemeClr val="accent1"/>
-          </a:lnRef>
-          <a:fillRef idx="3">
-            <a:schemeClr val="accent1"/>
-          </a:fillRef>
-          <a:effectRef idx="2">
-            <a:schemeClr val="accent1"/>
-          </a:effectRef>
-          <a:fontRef idx="minor">
-            <a:schemeClr val="lt1"/>
-          </a:fontRef>
-        </p:style>
-        <p:txBody>
-          <a:bodyPr rtlCol="0" anchor="ctr" wrap="square"/>
-          <a:lstStyle/>
-          <a:p>
-            <a:pPr algn="ctr"/>
-            <a:r>
-              <a:rPr sz="1600" b="1">
-                <a:solidFill>
-                  <a:srgbClr val="0D47A1"/>
-                </a:solidFill>
-              </a:rPr>
-              <a:t>dbt Model Layering</a:t>
-            </a:r>
-          </a:p>
-          <a:p>
-            <a:pPr>
-              <a:spcBef>
-                <a:spcPts val="500"/>
-              </a:spcBef>
-            </a:pPr>
-            <a:r>
-              <a:rPr sz="1100">
-                <a:solidFill>
-                  <a:srgbClr val="2D2D2D"/>
-                </a:solidFill>
-              </a:rPr>
-              <a:t>•  Staging (stg_*): tables, not views. 39M rows too expensive to rebuild per query</a:t>
-            </a:r>
-          </a:p>
-          <a:p>
-            <a:pPr>
-              <a:spcBef>
-                <a:spcPts val="500"/>
-              </a:spcBef>
-            </a:pPr>
-            <a:r>
-              <a:rPr sz="1100">
-                <a:solidFill>
-                  <a:srgbClr val="2D2D2D"/>
-                </a:solidFill>
-              </a:rPr>
-              <a:t>•  Fact (fct_trips): enriched with borough + weather, filtered to valid</a:t>
-            </a:r>
-          </a:p>
-          <a:p>
-            <a:pPr>
-              <a:spcBef>
-                <a:spcPts val="500"/>
-              </a:spcBef>
-            </a:pPr>
-            <a:r>
-              <a:rPr sz="1100">
-                <a:solidFill>
-                  <a:srgbClr val="2D2D2D"/>
-                </a:solidFill>
-              </a:rPr>
-              <a:t>•  Mart (mart_weather_demand): pre-aggregated for Tableau (34K rows)</a:t>
-            </a:r>
-          </a:p>
-          <a:p>
-            <a:pPr>
-              <a:spcBef>
-                <a:spcPts val="500"/>
-              </a:spcBef>
-            </a:pPr>
-            <a:r>
-              <a:rPr sz="1100">
-                <a:solidFill>
-                  <a:srgbClr val="2D2D2D"/>
-                </a:solidFill>
-              </a:rPr>
-              <a:t>•  Dimensions (dim_zones, dim_weather): lookup tables for drilldown</a:t>
-            </a:r>
-          </a:p>
-        </p:txBody>
-      </p:sp>
-      <p:sp>
-        <p:nvSpPr>
-          <p:cNvPr id="6" name="Rounded Rectangle 5"/>
-          <p:cNvSpPr/>
-          <p:nvPr/>
-        </p:nvSpPr>
-        <p:spPr>
-          <a:xfrm>
-            <a:off x="6100000" y="1000000"/>
-            <a:ext cx="5700000" cy="2200000"/>
-          </a:xfrm>
-          <a:prstGeom prst="roundRect">
-            <a:avLst/>
-          </a:prstGeom>
-          <a:solidFill>
-            <a:srgbClr val="E8F5E9"/>
-          </a:solidFill>
-          <a:ln>
-            <a:noFill/>
-          </a:ln>
-        </p:spPr>
-        <p:style>
-          <a:lnRef idx="1">
-            <a:schemeClr val="accent1"/>
-          </a:lnRef>
-          <a:fillRef idx="3">
-            <a:schemeClr val="accent1"/>
-          </a:fillRef>
-          <a:effectRef idx="2">
-            <a:schemeClr val="accent1"/>
-          </a:effectRef>
-          <a:fontRef idx="minor">
-            <a:schemeClr val="lt1"/>
-          </a:fontRef>
-        </p:style>
-        <p:txBody>
-          <a:bodyPr rtlCol="0" anchor="ctr" wrap="square"/>
-          <a:lstStyle/>
-          <a:p>
-            <a:pPr algn="ctr"/>
-            <a:r>
-              <a:rPr sz="1600" b="1">
-                <a:solidFill>
-                  <a:srgbClr val="2E7D32"/>
-                </a:solidFill>
-              </a:rPr>
-              <a:t>Testing Strategy</a:t>
-            </a:r>
-          </a:p>
-          <a:p>
-            <a:pPr>
-              <a:spcBef>
-                <a:spcPts val="500"/>
-              </a:spcBef>
-            </a:pPr>
-            <a:r>
-              <a:rPr sz="1100">
-                <a:solidFill>
-                  <a:srgbClr val="2D2D2D"/>
-                </a:solidFill>
-              </a:rPr>
-              <a:t>•  32 automated dbt tests (31 pass, 1 expected warn)</a:t>
-            </a:r>
-          </a:p>
-          <a:p>
-            <a:pPr>
-              <a:spcBef>
-                <a:spcPts val="500"/>
-              </a:spcBef>
-            </a:pPr>
-            <a:r>
-              <a:rPr sz="1100">
-                <a:solidFill>
-                  <a:srgbClr val="2D2D2D"/>
-                </a:solidFill>
-              </a:rPr>
-              <a:t>•  not_null on all key columns</a:t>
-            </a:r>
-          </a:p>
-          <a:p>
-            <a:pPr>
-              <a:spcBef>
-                <a:spcPts val="500"/>
-              </a:spcBef>
-            </a:pPr>
-            <a:r>
-              <a:rPr sz="1100">
-                <a:solidFill>
-                  <a:srgbClr val="2D2D2D"/>
-                </a:solidFill>
-              </a:rPr>
-              <a:t>•  unique on dimension primary keys</a:t>
-            </a:r>
-          </a:p>
-          <a:p>
-            <a:pPr>
-              <a:spcBef>
-                <a:spcPts val="500"/>
-              </a:spcBef>
-            </a:pPr>
-            <a:r>
-              <a:rPr sz="1100">
-                <a:solidFill>
-                  <a:srgbClr val="2D2D2D"/>
-                </a:solidFill>
-              </a:rPr>
-              <a:t>•  accepted_values on categorical columns</a:t>
-            </a:r>
-          </a:p>
-          <a:p>
-            <a:pPr>
-              <a:spcBef>
-                <a:spcPts val="500"/>
-              </a:spcBef>
-            </a:pPr>
-            <a:r>
-              <a:rPr sz="1100">
-                <a:solidFill>
-                  <a:srgbClr val="2D2D2D"/>
-                </a:solidFill>
-              </a:rPr>
-              <a:t>•  relationships on zone foreign keys</a:t>
-            </a:r>
-          </a:p>
-          <a:p>
-            <a:pPr>
-              <a:spcBef>
-                <a:spcPts val="500"/>
-              </a:spcBef>
-            </a:pPr>
-            <a:r>
-              <a:rPr sz="1100">
-                <a:solidFill>
-                  <a:srgbClr val="2D2D2D"/>
-                </a:solidFill>
-              </a:rPr>
-              <a:t>•  Warn severity for known issues (documents, doesn't block)</a:t>
-            </a:r>
-          </a:p>
-        </p:txBody>
-      </p:sp>
-      <p:sp>
-        <p:nvSpPr>
-          <p:cNvPr id="7" name="Rounded Rectangle 6"/>
-          <p:cNvSpPr/>
-          <p:nvPr/>
-        </p:nvSpPr>
-        <p:spPr>
-          <a:xfrm>
-            <a:off x="400000" y="3500000"/>
-            <a:ext cx="5400000" cy="2400000"/>
-          </a:xfrm>
-          <a:prstGeom prst="roundRect">
-            <a:avLst/>
-          </a:prstGeom>
-          <a:solidFill>
-            <a:srgbClr val="FFF3E0"/>
-          </a:solidFill>
-          <a:ln>
-            <a:noFill/>
-          </a:ln>
-        </p:spPr>
-        <p:style>
-          <a:lnRef idx="1">
-            <a:schemeClr val="accent1"/>
-          </a:lnRef>
-          <a:fillRef idx="3">
-            <a:schemeClr val="accent1"/>
-          </a:fillRef>
-          <a:effectRef idx="2">
-            <a:schemeClr val="accent1"/>
-          </a:effectRef>
-          <a:fontRef idx="minor">
-            <a:schemeClr val="lt1"/>
-          </a:fontRef>
-        </p:style>
-        <p:txBody>
-          <a:bodyPr rtlCol="0" anchor="ctr" wrap="square"/>
-          <a:lstStyle/>
-          <a:p>
-            <a:pPr algn="ctr"/>
-            <a:r>
-              <a:rPr sz="1600" b="1">
-                <a:solidFill>
-                  <a:srgbClr val="E65100"/>
-                </a:solidFill>
-              </a:rPr>
-              <a:t>Orchestration</a:t>
-            </a:r>
-          </a:p>
-          <a:p>
-            <a:pPr>
-              <a:spcBef>
-                <a:spcPts val="500"/>
-              </a:spcBef>
-            </a:pPr>
-            <a:r>
-              <a:rPr sz="1100">
-                <a:solidFill>
-                  <a:srgbClr val="2D2D2D"/>
-                </a:solidFill>
-              </a:rPr>
-              <a:t>•  Single Python script: python pipeline/orchestrate.py</a:t>
-            </a:r>
-          </a:p>
-          <a:p>
-            <a:pPr>
-              <a:spcBef>
-                <a:spcPts val="500"/>
-              </a:spcBef>
-            </a:pPr>
-            <a:r>
-              <a:rPr sz="1100">
-                <a:solidFill>
-                  <a:srgbClr val="2D2D2D"/>
-                </a:solidFill>
-              </a:rPr>
-              <a:t>•  Runs end-to-end in ~6 minutes</a:t>
-            </a:r>
-          </a:p>
-          <a:p>
-            <a:pPr>
-              <a:spcBef>
-                <a:spcPts val="500"/>
-              </a:spcBef>
-            </a:pPr>
-            <a:r>
-              <a:rPr sz="1100">
-                <a:solidFill>
-                  <a:srgbClr val="2D2D2D"/>
-                </a:solidFill>
-              </a:rPr>
-              <a:t>•  Idempotent: safe to re-run (CREATE OR REPLACE)</a:t>
-            </a:r>
-          </a:p>
-          <a:p>
-            <a:pPr>
-              <a:spcBef>
-                <a:spcPts val="500"/>
-              </a:spcBef>
-            </a:pPr>
-            <a:r>
-              <a:rPr sz="1100">
-                <a:solidFill>
-                  <a:srgbClr val="2D2D2D"/>
-                </a:solidFill>
-              </a:rPr>
-              <a:t>•  7 steps: Bronze infra, load, weather, verify, dbt run, dbt test, summary</a:t>
-            </a:r>
-          </a:p>
-          <a:p>
-            <a:pPr>
-              <a:spcBef>
-                <a:spcPts val="500"/>
-              </a:spcBef>
-            </a:pPr>
-            <a:r>
-              <a:rPr sz="1100">
-                <a:solidFill>
-                  <a:srgbClr val="2D2D2D"/>
-                </a:solidFill>
-              </a:rPr>
-              <a:t>•  Fails fast with clear error messages</a:t>
-            </a:r>
-          </a:p>
-        </p:txBody>
-      </p:sp>
-      <p:sp>
-        <p:nvSpPr>
-          <p:cNvPr id="8" name="Rounded Rectangle 7"/>
-          <p:cNvSpPr/>
-          <p:nvPr/>
-        </p:nvSpPr>
-        <p:spPr>
-          <a:xfrm>
-            <a:off x="6100000" y="3500000"/>
-            <a:ext cx="5700000" cy="2400000"/>
-          </a:xfrm>
-          <a:prstGeom prst="roundRect">
-            <a:avLst/>
-          </a:prstGeom>
-          <a:solidFill>
-            <a:srgbClr val="FCE4EC"/>
-          </a:solidFill>
-          <a:ln>
-            <a:noFill/>
-          </a:ln>
-        </p:spPr>
-        <p:style>
-          <a:lnRef idx="1">
-            <a:schemeClr val="accent1"/>
-          </a:lnRef>
-          <a:fillRef idx="3">
-            <a:schemeClr val="accent1"/>
-          </a:fillRef>
-          <a:effectRef idx="2">
-            <a:schemeClr val="accent1"/>
-          </a:effectRef>
-          <a:fontRef idx="minor">
-            <a:schemeClr val="lt1"/>
-          </a:fontRef>
-        </p:style>
-        <p:txBody>
-          <a:bodyPr rtlCol="0" anchor="ctr" wrap="square"/>
-          <a:lstStyle/>
-          <a:p>
-            <a:pPr algn="ctr"/>
-            <a:r>
-              <a:rPr sz="1600" b="1">
-                <a:solidFill>
-                  <a:srgbClr val="FE3082"/>
-                </a:solidFill>
-              </a:rPr>
-              <a:t>Key Transformations</a:t>
-            </a:r>
-          </a:p>
-          <a:p>
-            <a:pPr>
-              <a:spcBef>
-                <a:spcPts val="500"/>
-              </a:spcBef>
-            </a:pPr>
-            <a:r>
-              <a:rPr sz="1100">
-                <a:solidFill>
-                  <a:srgbClr val="2D2D2D"/>
-                </a:solidFill>
-              </a:rPr>
-              <a:t>•  Union Yellow + Green (tpep/lpep rename)</a:t>
-            </a:r>
-          </a:p>
-          <a:p>
-            <a:pPr>
-              <a:spcBef>
-                <a:spcPts val="500"/>
-              </a:spcBef>
-            </a:pPr>
-            <a:r>
-              <a:rPr sz="1100">
-                <a:solidFill>
-                  <a:srgbClr val="2D2D2D"/>
-                </a:solidFill>
-              </a:rPr>
-              <a:t>•  DQ flagging: is_valid + dq_flag_reason</a:t>
-            </a:r>
-          </a:p>
-          <a:p>
-            <a:pPr>
-              <a:spcBef>
-                <a:spcPts val="500"/>
-              </a:spcBef>
-            </a:pPr>
-            <a:r>
-              <a:rPr sz="1100">
-                <a:solidFill>
-                  <a:srgbClr val="2D2D2D"/>
-                </a:solidFill>
-              </a:rPr>
-              <a:t>•  Time derivation: hour, rush, night, weekend</a:t>
-            </a:r>
-          </a:p>
-          <a:p>
-            <a:pPr>
-              <a:spcBef>
-                <a:spcPts val="500"/>
-              </a:spcBef>
-            </a:pPr>
-            <a:r>
-              <a:rPr sz="1100">
-                <a:solidFill>
-                  <a:srgbClr val="2D2D2D"/>
-                </a:solidFill>
-              </a:rPr>
-              <a:t>•  Weather join on pickup date + hour</a:t>
-            </a:r>
-          </a:p>
-          <a:p>
-            <a:pPr>
-              <a:spcBef>
-                <a:spcPts val="500"/>
-              </a:spcBef>
-            </a:pPr>
-            <a:r>
-              <a:rPr sz="1100">
-                <a:solidFill>
-                  <a:srgbClr val="2D2D2D"/>
-                </a:solidFill>
-              </a:rPr>
-              <a:t>•  Borough join via zone lookup</a:t>
-            </a:r>
-          </a:p>
-          <a:p>
-            <a:pPr>
-              <a:spcBef>
-                <a:spcPts val="500"/>
-              </a:spcBef>
-            </a:pPr>
-            <a:r>
-              <a:rPr sz="1100">
-                <a:solidFill>
-                  <a:srgbClr val="2D2D2D"/>
-                </a:solidFill>
-              </a:rPr>
-              <a:t>•  Revenue: all fee columns carried through</a:t>
+          <a:p>
+            <a:r>
+              <a:t>Technical Deep Dive</a:t>
             </a:r>
           </a:p>
         </p:txBody>
@@ -10126,7 +11595,7 @@
           <a:lstStyle/>
           <a:p>
             <a:r>
-              <a:t>Cost and Performance Rationale</a:t>
+              <a:t>Technical Decisions and Trade-offs</a:t>
             </a:r>
           </a:p>
         </p:txBody>
@@ -10200,7 +11669,7 @@
         <p:spPr>
           <a:xfrm>
             <a:off x="400000" y="1000000"/>
-            <a:ext cx="5400000" cy="2000000"/>
+            <a:ext cx="5400000" cy="2200000"/>
           </a:xfrm>
           <a:prstGeom prst="roundRect">
             <a:avLst/>
@@ -10237,67 +11706,67 @@
                   <a:srgbClr val="0D47A1"/>
                 </a:solidFill>
               </a:rPr>
-              <a:t>Warehouse Configuration</a:t>
+              <a:t>dbt Model Layering</a:t>
             </a:r>
           </a:p>
           <a:p>
             <a:pPr>
               <a:spcBef>
-                <a:spcPts val="600"/>
+                <a:spcPts val="500"/>
               </a:spcBef>
             </a:pPr>
             <a:r>
-              <a:rPr sz="1200">
+              <a:rPr sz="1100">
                 <a:solidFill>
                   <a:srgbClr val="2D2D2D"/>
                 </a:solidFill>
               </a:rPr>
-              <a:t>•  Warehouse: COMPUTE_WH</a:t>
+              <a:t>•  Staging (stg_*): tables, not views. 39M rows too expensive to rebuild per query</a:t>
             </a:r>
           </a:p>
           <a:p>
             <a:pPr>
               <a:spcBef>
-                <a:spcPts val="600"/>
+                <a:spcPts val="500"/>
               </a:spcBef>
             </a:pPr>
             <a:r>
-              <a:rPr sz="1200">
+              <a:rPr sz="1100">
                 <a:solidFill>
                   <a:srgbClr val="2D2D2D"/>
                 </a:solidFill>
               </a:rPr>
-              <a:t>•  Size: [X-Small / Small]</a:t>
+              <a:t>•  Fact (fct_trips): enriched with borough + weather, filtered to valid</a:t>
             </a:r>
           </a:p>
           <a:p>
             <a:pPr>
               <a:spcBef>
-                <a:spcPts val="600"/>
+                <a:spcPts val="500"/>
               </a:spcBef>
             </a:pPr>
             <a:r>
-              <a:rPr sz="1200">
+              <a:rPr sz="1100">
                 <a:solidFill>
                   <a:srgbClr val="2D2D2D"/>
                 </a:solidFill>
               </a:rPr>
-              <a:t>•  Auto-suspend: [X seconds]</a:t>
+              <a:t>•  Mart (mart_weather_demand): pre-aggregated for Tableau (34K rows)</a:t>
             </a:r>
           </a:p>
           <a:p>
             <a:pPr>
               <a:spcBef>
-                <a:spcPts val="600"/>
+                <a:spcPts val="500"/>
               </a:spcBef>
             </a:pPr>
             <a:r>
-              <a:rPr sz="1200">
+              <a:rPr sz="1100">
                 <a:solidFill>
                   <a:srgbClr val="2D2D2D"/>
                 </a:solidFill>
               </a:rPr>
-              <a:t>•  Tables: transient (no fail-safe cost)</a:t>
+              <a:t>•  Dimensions (dim_zones, dim_weather): lookup tables for drilldown</a:t>
             </a:r>
           </a:p>
         </p:txBody>
@@ -10311,7 +11780,7 @@
         <p:spPr>
           <a:xfrm>
             <a:off x="6100000" y="1000000"/>
-            <a:ext cx="5700000" cy="2000000"/>
+            <a:ext cx="5700000" cy="2200000"/>
           </a:xfrm>
           <a:prstGeom prst="roundRect">
             <a:avLst/>
@@ -10348,67 +11817,97 @@
                   <a:srgbClr val="2E7D32"/>
                 </a:solidFill>
               </a:rPr>
-              <a:t>Performance</a:t>
+              <a:t>Testing Strategy</a:t>
             </a:r>
           </a:p>
           <a:p>
             <a:pPr>
               <a:spcBef>
-                <a:spcPts val="600"/>
+                <a:spcPts val="500"/>
               </a:spcBef>
             </a:pPr>
             <a:r>
-              <a:rPr sz="1200">
+              <a:rPr sz="1100">
                 <a:solidFill>
                   <a:srgbClr val="2D2D2D"/>
                 </a:solidFill>
               </a:rPr>
-              <a:t>•  Full pipeline: ~6 min end-to-end</a:t>
+              <a:t>•  32 automated dbt tests (31 pass, 1 expected warn)</a:t>
             </a:r>
           </a:p>
           <a:p>
             <a:pPr>
               <a:spcBef>
-                <a:spcPts val="600"/>
+                <a:spcPts val="500"/>
               </a:spcBef>
             </a:pPr>
             <a:r>
-              <a:rPr sz="1200">
+              <a:rPr sz="1100">
                 <a:solidFill>
                   <a:srgbClr val="2D2D2D"/>
                 </a:solidFill>
               </a:rPr>
-              <a:t>•  Dashboard queries: &lt;1 sec (34K rows)</a:t>
+              <a:t>•  not_null on all key columns</a:t>
             </a:r>
           </a:p>
           <a:p>
             <a:pPr>
               <a:spcBef>
-                <a:spcPts val="600"/>
+                <a:spcPts val="500"/>
               </a:spcBef>
             </a:pPr>
             <a:r>
-              <a:rPr sz="1200">
+              <a:rPr sz="1100">
                 <a:solidFill>
                   <a:srgbClr val="2D2D2D"/>
                 </a:solidFill>
               </a:rPr>
-              <a:t>•  dbt build (Silver + Gold): ~4 min</a:t>
+              <a:t>•  unique on dimension primary keys</a:t>
             </a:r>
           </a:p>
           <a:p>
             <a:pPr>
               <a:spcBef>
-                <a:spcPts val="600"/>
+                <a:spcPts val="500"/>
               </a:spcBef>
             </a:pPr>
             <a:r>
-              <a:rPr sz="1200">
+              <a:rPr sz="1100">
                 <a:solidFill>
                   <a:srgbClr val="2D2D2D"/>
                 </a:solidFill>
               </a:rPr>
-              <a:t>•  COPY INTO: ~90 sec for 39M rows</a:t>
+              <a:t>•  accepted_values on categorical columns</a:t>
+            </a:r>
+          </a:p>
+          <a:p>
+            <a:pPr>
+              <a:spcBef>
+                <a:spcPts val="500"/>
+              </a:spcBef>
+            </a:pPr>
+            <a:r>
+              <a:rPr sz="1100">
+                <a:solidFill>
+                  <a:srgbClr val="2D2D2D"/>
+                </a:solidFill>
+              </a:rPr>
+              <a:t>•  relationships on zone foreign keys</a:t>
+            </a:r>
+          </a:p>
+          <a:p>
+            <a:pPr>
+              <a:spcBef>
+                <a:spcPts val="500"/>
+              </a:spcBef>
+            </a:pPr>
+            <a:r>
+              <a:rPr sz="1100">
+                <a:solidFill>
+                  <a:srgbClr val="2D2D2D"/>
+                </a:solidFill>
+              </a:rPr>
+              <a:t>•  Warn severity for known issues (documents, doesn't block)</a:t>
             </a:r>
           </a:p>
         </p:txBody>
@@ -10421,8 +11920,8 @@
         </p:nvSpPr>
         <p:spPr>
           <a:xfrm>
-            <a:off x="400000" y="3300000"/>
-            <a:ext cx="11400000" cy="2000000"/>
+            <a:off x="400000" y="3500000"/>
+            <a:ext cx="5400000" cy="2400000"/>
           </a:xfrm>
           <a:prstGeom prst="roundRect">
             <a:avLst/>
@@ -10459,7 +11958,7 @@
                   <a:srgbClr val="E65100"/>
                 </a:solidFill>
               </a:rPr>
-              <a:t>At 10x the Data Volume</a:t>
+              <a:t>Orchestration</a:t>
             </a:r>
           </a:p>
           <a:p>
@@ -10469,12 +11968,12 @@
               </a:spcBef>
             </a:pPr>
             <a:r>
-              <a:rPr sz="1200">
+              <a:rPr sz="1100">
                 <a:solidFill>
                   <a:srgbClr val="2D2D2D"/>
                 </a:solidFill>
               </a:rPr>
-              <a:t>•  Ingestion: switch to Snowpipe for continuous loading instead of batch COPY INTO</a:t>
+              <a:t>•  Single Python script: python pipeline/orchestrate.py</a:t>
             </a:r>
           </a:p>
           <a:p>
@@ -10484,12 +11983,12 @@
               </a:spcBef>
             </a:pPr>
             <a:r>
-              <a:rPr sz="1200">
+              <a:rPr sz="1100">
                 <a:solidFill>
                   <a:srgbClr val="2D2D2D"/>
                 </a:solidFill>
               </a:rPr>
-              <a:t>•  Warehouse: scale up to Medium or use multi-cluster warehouse for concurrency</a:t>
+              <a:t>•  Runs end-to-end in ~6 minutes</a:t>
             </a:r>
           </a:p>
           <a:p>
@@ -10499,12 +11998,12 @@
               </a:spcBef>
             </a:pPr>
             <a:r>
-              <a:rPr sz="1200">
+              <a:rPr sz="1100">
                 <a:solidFill>
                   <a:srgbClr val="2D2D2D"/>
                 </a:solidFill>
               </a:rPr>
-              <a:t>•  Materialization: consider incremental models in dbt (append new data only, skip full rebuild)</a:t>
+              <a:t>•  Idempotent: safe to re-run (CREATE OR REPLACE)</a:t>
             </a:r>
           </a:p>
           <a:p>
@@ -10514,12 +12013,168 @@
               </a:spcBef>
             </a:pPr>
             <a:r>
-              <a:rPr sz="1200">
+              <a:rPr sz="1100">
                 <a:solidFill>
                   <a:srgbClr val="2D2D2D"/>
                 </a:solidFill>
               </a:rPr>
-              <a:t>•  Storage: partition by year/month for query pruning</a:t>
+              <a:t>•  7 steps: Bronze infra, load, weather, verify, dbt run, dbt test, summary</a:t>
+            </a:r>
+          </a:p>
+          <a:p>
+            <a:pPr>
+              <a:spcBef>
+                <a:spcPts val="500"/>
+              </a:spcBef>
+            </a:pPr>
+            <a:r>
+              <a:rPr sz="1100">
+                <a:solidFill>
+                  <a:srgbClr val="2D2D2D"/>
+                </a:solidFill>
+              </a:rPr>
+              <a:t>•  Fails fast with clear error messages</a:t>
+            </a:r>
+          </a:p>
+        </p:txBody>
+      </p:sp>
+      <p:sp>
+        <p:nvSpPr>
+          <p:cNvPr id="8" name="Rounded Rectangle 7"/>
+          <p:cNvSpPr/>
+          <p:nvPr/>
+        </p:nvSpPr>
+        <p:spPr>
+          <a:xfrm>
+            <a:off x="6100000" y="3500000"/>
+            <a:ext cx="5700000" cy="2400000"/>
+          </a:xfrm>
+          <a:prstGeom prst="roundRect">
+            <a:avLst/>
+          </a:prstGeom>
+          <a:solidFill>
+            <a:srgbClr val="FCE4EC"/>
+          </a:solidFill>
+          <a:ln>
+            <a:noFill/>
+          </a:ln>
+        </p:spPr>
+        <p:style>
+          <a:lnRef idx="1">
+            <a:schemeClr val="accent1"/>
+          </a:lnRef>
+          <a:fillRef idx="3">
+            <a:schemeClr val="accent1"/>
+          </a:fillRef>
+          <a:effectRef idx="2">
+            <a:schemeClr val="accent1"/>
+          </a:effectRef>
+          <a:fontRef idx="minor">
+            <a:schemeClr val="lt1"/>
+          </a:fontRef>
+        </p:style>
+        <p:txBody>
+          <a:bodyPr rtlCol="0" anchor="ctr" wrap="square"/>
+          <a:lstStyle/>
+          <a:p>
+            <a:pPr algn="ctr"/>
+            <a:r>
+              <a:rPr sz="1600" b="1">
+                <a:solidFill>
+                  <a:srgbClr val="FE3082"/>
+                </a:solidFill>
+              </a:rPr>
+              <a:t>Key Transformations</a:t>
+            </a:r>
+          </a:p>
+          <a:p>
+            <a:pPr>
+              <a:spcBef>
+                <a:spcPts val="500"/>
+              </a:spcBef>
+            </a:pPr>
+            <a:r>
+              <a:rPr sz="1100">
+                <a:solidFill>
+                  <a:srgbClr val="2D2D2D"/>
+                </a:solidFill>
+              </a:rPr>
+              <a:t>•  Union Yellow + Green (tpep/lpep rename)</a:t>
+            </a:r>
+          </a:p>
+          <a:p>
+            <a:pPr>
+              <a:spcBef>
+                <a:spcPts val="500"/>
+              </a:spcBef>
+            </a:pPr>
+            <a:r>
+              <a:rPr sz="1100">
+                <a:solidFill>
+                  <a:srgbClr val="2D2D2D"/>
+                </a:solidFill>
+              </a:rPr>
+              <a:t>•  DQ flagging: is_valid + dq_flag_reason</a:t>
+            </a:r>
+          </a:p>
+          <a:p>
+            <a:pPr>
+              <a:spcBef>
+                <a:spcPts val="500"/>
+              </a:spcBef>
+            </a:pPr>
+            <a:r>
+              <a:rPr sz="1100">
+                <a:solidFill>
+                  <a:srgbClr val="2D2D2D"/>
+                </a:solidFill>
+              </a:rPr>
+              <a:t>•  Time derivation: hour, rush, night, weekend</a:t>
+            </a:r>
+          </a:p>
+          <a:p>
+            <a:pPr>
+              <a:spcBef>
+                <a:spcPts val="500"/>
+              </a:spcBef>
+            </a:pPr>
+            <a:r>
+              <a:rPr sz="1100">
+                <a:solidFill>
+                  <a:srgbClr val="2D2D2D"/>
+                </a:solidFill>
+              </a:rPr>
+              <a:t>•  Weather join on pickup date + hour</a:t>
+            </a:r>
+          </a:p>
+          <a:p>
+            <a:pPr>
+              <a:spcBef>
+                <a:spcPts val="500"/>
+              </a:spcBef>
+            </a:pPr>
+            <a:r>
+              <a:rPr sz="1100">
+                <a:solidFill>
+                  <a:srgbClr val="2D2D2D"/>
+                </a:solidFill>
+              </a:rPr>
+              <a:t>•  Borough join via zone lookup</a:t>
+            </a:r>
+          </a:p>
+          <a:p>
+            <a:pPr>
+              <a:spcBef>
+                <a:spcPts val="500"/>
+              </a:spcBef>
+            </a:pPr>
+            <a:r>
+              <a:rPr sz="1100">
+                <a:solidFill>
+                  <a:srgbClr val="2D2D2D"/>
+                </a:solidFill>
+              </a:rPr>
+              <a:t>•  Revenue: all fee columns carried through</a:t>
             </a:r>
           </a:p>
         </p:txBody>
@@ -10544,59 +12199,414 @@
       <p:grpSpPr/>
       <p:sp>
         <p:nvSpPr>
-          <p:cNvPr id="2" name="Text Placeholder 1"/>
-          <p:cNvSpPr>
-            <a:spLocks noGrp="1"/>
-          </p:cNvSpPr>
-          <p:nvPr>
-            <p:ph type="body" idx="13" sz="quarter"/>
+          <p:cNvPr id="2" name="Title 1"/>
+          <p:cNvSpPr>
+            <a:spLocks noGrp="1"/>
+          </p:cNvSpPr>
+          <p:nvPr>
+            <p:ph type="title"/>
           </p:nvPr>
         </p:nvSpPr>
         <p:spPr/>
         <p:txBody>
           <a:bodyPr/>
           <a:lstStyle/>
+          <a:p>
+            <a:r>
+              <a:t>Cost and Performance Rationale</a:t>
+            </a:r>
+          </a:p>
+        </p:txBody>
+      </p:sp>
+      <p:sp>
+        <p:nvSpPr>
+          <p:cNvPr id="3" name="Content Placeholder 2"/>
+          <p:cNvSpPr>
+            <a:spLocks noGrp="1"/>
+          </p:cNvSpPr>
+          <p:nvPr>
+            <p:ph idx="1"/>
+          </p:nvPr>
+        </p:nvSpPr>
+        <p:spPr/>
+        <p:txBody>
+          <a:bodyPr/>
+          <a:lstStyle/>
           <a:p/>
         </p:txBody>
       </p:sp>
       <p:sp>
         <p:nvSpPr>
-          <p:cNvPr id="3" name="Title 2"/>
-          <p:cNvSpPr>
-            <a:spLocks noGrp="1"/>
-          </p:cNvSpPr>
-          <p:nvPr>
-            <p:ph type="title"/>
-          </p:nvPr>
-        </p:nvSpPr>
-        <p:spPr/>
-        <p:txBody>
-          <a:bodyPr/>
-          <a:lstStyle/>
-          <a:p>
-            <a:r>
-              <a:t>6</a:t>
-            </a:r>
-          </a:p>
-        </p:txBody>
-      </p:sp>
-      <p:sp>
-        <p:nvSpPr>
-          <p:cNvPr id="4" name="Subtitle 3"/>
-          <p:cNvSpPr>
-            <a:spLocks noGrp="1"/>
-          </p:cNvSpPr>
-          <p:nvPr>
-            <p:ph type="subTitle" idx="1"/>
-          </p:nvPr>
-        </p:nvSpPr>
-        <p:spPr/>
-        <p:txBody>
-          <a:bodyPr/>
-          <a:lstStyle/>
-          <a:p>
-            <a:r>
-              <a:t>Future State and Recommendation</a:t>
+          <p:cNvPr id="4" name="Rectangle 3"/>
+          <p:cNvSpPr/>
+          <p:nvPr/>
+        </p:nvSpPr>
+        <p:spPr>
+          <a:xfrm>
+            <a:off x="0" y="800000"/>
+            <a:ext cx="12192000" cy="80000"/>
+          </a:xfrm>
+          <a:prstGeom prst="rect">
+            <a:avLst/>
+          </a:prstGeom>
+          <a:solidFill>
+            <a:srgbClr val="FE3082"/>
+          </a:solidFill>
+          <a:ln>
+            <a:noFill/>
+          </a:ln>
+        </p:spPr>
+        <p:style>
+          <a:lnRef idx="1">
+            <a:schemeClr val="accent1"/>
+          </a:lnRef>
+          <a:fillRef idx="3">
+            <a:schemeClr val="accent1"/>
+          </a:fillRef>
+          <a:effectRef idx="2">
+            <a:schemeClr val="accent1"/>
+          </a:effectRef>
+          <a:fontRef idx="minor">
+            <a:schemeClr val="lt1"/>
+          </a:fontRef>
+        </p:style>
+        <p:txBody>
+          <a:bodyPr rtlCol="0" anchor="ctr"/>
+          <a:lstStyle/>
+          <a:p>
+            <a:pPr algn="ctr"/>
+          </a:p>
+        </p:txBody>
+      </p:sp>
+      <p:sp>
+        <p:nvSpPr>
+          <p:cNvPr id="5" name="Rounded Rectangle 4"/>
+          <p:cNvSpPr/>
+          <p:nvPr/>
+        </p:nvSpPr>
+        <p:spPr>
+          <a:xfrm>
+            <a:off x="400000" y="1000000"/>
+            <a:ext cx="5400000" cy="2000000"/>
+          </a:xfrm>
+          <a:prstGeom prst="roundRect">
+            <a:avLst/>
+          </a:prstGeom>
+          <a:solidFill>
+            <a:srgbClr val="E3F2FD"/>
+          </a:solidFill>
+          <a:ln>
+            <a:noFill/>
+          </a:ln>
+        </p:spPr>
+        <p:style>
+          <a:lnRef idx="1">
+            <a:schemeClr val="accent1"/>
+          </a:lnRef>
+          <a:fillRef idx="3">
+            <a:schemeClr val="accent1"/>
+          </a:fillRef>
+          <a:effectRef idx="2">
+            <a:schemeClr val="accent1"/>
+          </a:effectRef>
+          <a:fontRef idx="minor">
+            <a:schemeClr val="lt1"/>
+          </a:fontRef>
+        </p:style>
+        <p:txBody>
+          <a:bodyPr rtlCol="0" anchor="ctr" wrap="square"/>
+          <a:lstStyle/>
+          <a:p>
+            <a:pPr algn="ctr"/>
+            <a:r>
+              <a:rPr sz="1600" b="1">
+                <a:solidFill>
+                  <a:srgbClr val="0D47A1"/>
+                </a:solidFill>
+              </a:rPr>
+              <a:t>Warehouse Configuration</a:t>
+            </a:r>
+          </a:p>
+          <a:p>
+            <a:pPr>
+              <a:spcBef>
+                <a:spcPts val="600"/>
+              </a:spcBef>
+            </a:pPr>
+            <a:r>
+              <a:rPr sz="1200">
+                <a:solidFill>
+                  <a:srgbClr val="2D2D2D"/>
+                </a:solidFill>
+              </a:rPr>
+              <a:t>•  Warehouse: COMPUTE_WH</a:t>
+            </a:r>
+          </a:p>
+          <a:p>
+            <a:pPr>
+              <a:spcBef>
+                <a:spcPts val="600"/>
+              </a:spcBef>
+            </a:pPr>
+            <a:r>
+              <a:rPr sz="1200">
+                <a:solidFill>
+                  <a:srgbClr val="2D2D2D"/>
+                </a:solidFill>
+              </a:rPr>
+              <a:t>•  Size: [X-Small / Small]</a:t>
+            </a:r>
+          </a:p>
+          <a:p>
+            <a:pPr>
+              <a:spcBef>
+                <a:spcPts val="600"/>
+              </a:spcBef>
+            </a:pPr>
+            <a:r>
+              <a:rPr sz="1200">
+                <a:solidFill>
+                  <a:srgbClr val="2D2D2D"/>
+                </a:solidFill>
+              </a:rPr>
+              <a:t>•  Auto-suspend: [X seconds]</a:t>
+            </a:r>
+          </a:p>
+          <a:p>
+            <a:pPr>
+              <a:spcBef>
+                <a:spcPts val="600"/>
+              </a:spcBef>
+            </a:pPr>
+            <a:r>
+              <a:rPr sz="1200">
+                <a:solidFill>
+                  <a:srgbClr val="2D2D2D"/>
+                </a:solidFill>
+              </a:rPr>
+              <a:t>•  Tables: transient (no fail-safe cost)</a:t>
+            </a:r>
+          </a:p>
+        </p:txBody>
+      </p:sp>
+      <p:sp>
+        <p:nvSpPr>
+          <p:cNvPr id="6" name="Rounded Rectangle 5"/>
+          <p:cNvSpPr/>
+          <p:nvPr/>
+        </p:nvSpPr>
+        <p:spPr>
+          <a:xfrm>
+            <a:off x="6100000" y="1000000"/>
+            <a:ext cx="5700000" cy="2000000"/>
+          </a:xfrm>
+          <a:prstGeom prst="roundRect">
+            <a:avLst/>
+          </a:prstGeom>
+          <a:solidFill>
+            <a:srgbClr val="E8F5E9"/>
+          </a:solidFill>
+          <a:ln>
+            <a:noFill/>
+          </a:ln>
+        </p:spPr>
+        <p:style>
+          <a:lnRef idx="1">
+            <a:schemeClr val="accent1"/>
+          </a:lnRef>
+          <a:fillRef idx="3">
+            <a:schemeClr val="accent1"/>
+          </a:fillRef>
+          <a:effectRef idx="2">
+            <a:schemeClr val="accent1"/>
+          </a:effectRef>
+          <a:fontRef idx="minor">
+            <a:schemeClr val="lt1"/>
+          </a:fontRef>
+        </p:style>
+        <p:txBody>
+          <a:bodyPr rtlCol="0" anchor="ctr" wrap="square"/>
+          <a:lstStyle/>
+          <a:p>
+            <a:pPr algn="ctr"/>
+            <a:r>
+              <a:rPr sz="1600" b="1">
+                <a:solidFill>
+                  <a:srgbClr val="2E7D32"/>
+                </a:solidFill>
+              </a:rPr>
+              <a:t>Performance</a:t>
+            </a:r>
+          </a:p>
+          <a:p>
+            <a:pPr>
+              <a:spcBef>
+                <a:spcPts val="600"/>
+              </a:spcBef>
+            </a:pPr>
+            <a:r>
+              <a:rPr sz="1200">
+                <a:solidFill>
+                  <a:srgbClr val="2D2D2D"/>
+                </a:solidFill>
+              </a:rPr>
+              <a:t>•  Full pipeline: ~6 min end-to-end</a:t>
+            </a:r>
+          </a:p>
+          <a:p>
+            <a:pPr>
+              <a:spcBef>
+                <a:spcPts val="600"/>
+              </a:spcBef>
+            </a:pPr>
+            <a:r>
+              <a:rPr sz="1200">
+                <a:solidFill>
+                  <a:srgbClr val="2D2D2D"/>
+                </a:solidFill>
+              </a:rPr>
+              <a:t>•  Dashboard queries: &lt;1 sec (34K rows)</a:t>
+            </a:r>
+          </a:p>
+          <a:p>
+            <a:pPr>
+              <a:spcBef>
+                <a:spcPts val="600"/>
+              </a:spcBef>
+            </a:pPr>
+            <a:r>
+              <a:rPr sz="1200">
+                <a:solidFill>
+                  <a:srgbClr val="2D2D2D"/>
+                </a:solidFill>
+              </a:rPr>
+              <a:t>•  dbt build (Silver + Gold): ~4 min</a:t>
+            </a:r>
+          </a:p>
+          <a:p>
+            <a:pPr>
+              <a:spcBef>
+                <a:spcPts val="600"/>
+              </a:spcBef>
+            </a:pPr>
+            <a:r>
+              <a:rPr sz="1200">
+                <a:solidFill>
+                  <a:srgbClr val="2D2D2D"/>
+                </a:solidFill>
+              </a:rPr>
+              <a:t>•  COPY INTO: ~90 sec for 39M rows</a:t>
+            </a:r>
+          </a:p>
+        </p:txBody>
+      </p:sp>
+      <p:sp>
+        <p:nvSpPr>
+          <p:cNvPr id="7" name="Rounded Rectangle 6"/>
+          <p:cNvSpPr/>
+          <p:nvPr/>
+        </p:nvSpPr>
+        <p:spPr>
+          <a:xfrm>
+            <a:off x="400000" y="3300000"/>
+            <a:ext cx="11400000" cy="2000000"/>
+          </a:xfrm>
+          <a:prstGeom prst="roundRect">
+            <a:avLst/>
+          </a:prstGeom>
+          <a:solidFill>
+            <a:srgbClr val="FFF3E0"/>
+          </a:solidFill>
+          <a:ln>
+            <a:noFill/>
+          </a:ln>
+        </p:spPr>
+        <p:style>
+          <a:lnRef idx="1">
+            <a:schemeClr val="accent1"/>
+          </a:lnRef>
+          <a:fillRef idx="3">
+            <a:schemeClr val="accent1"/>
+          </a:fillRef>
+          <a:effectRef idx="2">
+            <a:schemeClr val="accent1"/>
+          </a:effectRef>
+          <a:fontRef idx="minor">
+            <a:schemeClr val="lt1"/>
+          </a:fontRef>
+        </p:style>
+        <p:txBody>
+          <a:bodyPr rtlCol="0" anchor="ctr" wrap="square"/>
+          <a:lstStyle/>
+          <a:p>
+            <a:pPr algn="ctr"/>
+            <a:r>
+              <a:rPr sz="1600" b="1">
+                <a:solidFill>
+                  <a:srgbClr val="E65100"/>
+                </a:solidFill>
+              </a:rPr>
+              <a:t>At 10x the Data Volume</a:t>
+            </a:r>
+          </a:p>
+          <a:p>
+            <a:pPr>
+              <a:spcBef>
+                <a:spcPts val="500"/>
+              </a:spcBef>
+            </a:pPr>
+            <a:r>
+              <a:rPr sz="1200">
+                <a:solidFill>
+                  <a:srgbClr val="2D2D2D"/>
+                </a:solidFill>
+              </a:rPr>
+              <a:t>•  Ingestion: switch to Snowpipe for continuous loading instead of batch COPY INTO</a:t>
+            </a:r>
+          </a:p>
+          <a:p>
+            <a:pPr>
+              <a:spcBef>
+                <a:spcPts val="500"/>
+              </a:spcBef>
+            </a:pPr>
+            <a:r>
+              <a:rPr sz="1200">
+                <a:solidFill>
+                  <a:srgbClr val="2D2D2D"/>
+                </a:solidFill>
+              </a:rPr>
+              <a:t>•  Warehouse: scale up to Medium or use multi-cluster warehouse for concurrency</a:t>
+            </a:r>
+          </a:p>
+          <a:p>
+            <a:pPr>
+              <a:spcBef>
+                <a:spcPts val="500"/>
+              </a:spcBef>
+            </a:pPr>
+            <a:r>
+              <a:rPr sz="1200">
+                <a:solidFill>
+                  <a:srgbClr val="2D2D2D"/>
+                </a:solidFill>
+              </a:rPr>
+              <a:t>•  Materialization: consider incremental models in dbt (append new data only, skip full rebuild)</a:t>
+            </a:r>
+          </a:p>
+          <a:p>
+            <a:pPr>
+              <a:spcBef>
+                <a:spcPts val="500"/>
+              </a:spcBef>
+            </a:pPr>
+            <a:r>
+              <a:rPr sz="1200">
+                <a:solidFill>
+                  <a:srgbClr val="2D2D2D"/>
+                </a:solidFill>
+              </a:rPr>
+              <a:t>•  Storage: partition by year/month for query pruning</a:t>
             </a:r>
           </a:p>
         </p:txBody>
@@ -11073,7 +13083,24 @@
       <p:grpSpPr/>
       <p:sp>
         <p:nvSpPr>
-          <p:cNvPr id="2" name="Title 1"/>
+          <p:cNvPr id="2" name="Text Placeholder 1"/>
+          <p:cNvSpPr>
+            <a:spLocks noGrp="1"/>
+          </p:cNvSpPr>
+          <p:nvPr>
+            <p:ph type="body" idx="13" sz="quarter"/>
+          </p:nvPr>
+        </p:nvSpPr>
+        <p:spPr/>
+        <p:txBody>
+          <a:bodyPr/>
+          <a:lstStyle/>
+          <a:p/>
+        </p:txBody>
+      </p:sp>
+      <p:sp>
+        <p:nvSpPr>
+          <p:cNvPr id="3" name="Title 2"/>
           <p:cNvSpPr>
             <a:spLocks noGrp="1"/>
           </p:cNvSpPr>
@@ -11087,496 +13114,28 @@
           <a:lstStyle/>
           <a:p>
             <a:r>
-              <a:t>Future State Proposal</a:t>
-            </a:r>
-          </a:p>
-        </p:txBody>
-      </p:sp>
-      <p:sp>
-        <p:nvSpPr>
-          <p:cNvPr id="3" name="Content Placeholder 2"/>
-          <p:cNvSpPr>
-            <a:spLocks noGrp="1"/>
-          </p:cNvSpPr>
-          <p:nvPr>
-            <p:ph idx="1"/>
+              <a:t>6</a:t>
+            </a:r>
+          </a:p>
+        </p:txBody>
+      </p:sp>
+      <p:sp>
+        <p:nvSpPr>
+          <p:cNvPr id="4" name="Subtitle 3"/>
+          <p:cNvSpPr>
+            <a:spLocks noGrp="1"/>
+          </p:cNvSpPr>
+          <p:nvPr>
+            <p:ph type="subTitle" idx="1"/>
           </p:nvPr>
         </p:nvSpPr>
         <p:spPr/>
         <p:txBody>
           <a:bodyPr/>
           <a:lstStyle/>
-          <a:p/>
-        </p:txBody>
-      </p:sp>
-      <p:sp>
-        <p:nvSpPr>
-          <p:cNvPr id="4" name="Rectangle 3"/>
-          <p:cNvSpPr/>
-          <p:nvPr/>
-        </p:nvSpPr>
-        <p:spPr>
-          <a:xfrm>
-            <a:off x="0" y="800000"/>
-            <a:ext cx="12192000" cy="80000"/>
-          </a:xfrm>
-          <a:prstGeom prst="rect">
-            <a:avLst/>
-          </a:prstGeom>
-          <a:solidFill>
-            <a:srgbClr val="FE3082"/>
-          </a:solidFill>
-          <a:ln>
-            <a:noFill/>
-          </a:ln>
-        </p:spPr>
-        <p:style>
-          <a:lnRef idx="1">
-            <a:schemeClr val="accent1"/>
-          </a:lnRef>
-          <a:fillRef idx="3">
-            <a:schemeClr val="accent1"/>
-          </a:fillRef>
-          <a:effectRef idx="2">
-            <a:schemeClr val="accent1"/>
-          </a:effectRef>
-          <a:fontRef idx="minor">
-            <a:schemeClr val="lt1"/>
-          </a:fontRef>
-        </p:style>
-        <p:txBody>
-          <a:bodyPr rtlCol="0" anchor="ctr"/>
-          <a:lstStyle/>
-          <a:p>
-            <a:pPr algn="ctr"/>
-          </a:p>
-        </p:txBody>
-      </p:sp>
-      <p:sp>
-        <p:nvSpPr>
-          <p:cNvPr id="5" name="Rounded Rectangle 4"/>
-          <p:cNvSpPr/>
-          <p:nvPr/>
-        </p:nvSpPr>
-        <p:spPr>
-          <a:xfrm>
-            <a:off x="400000" y="1000000"/>
-            <a:ext cx="3600000" cy="4800000"/>
-          </a:xfrm>
-          <a:prstGeom prst="roundRect">
-            <a:avLst/>
-          </a:prstGeom>
-          <a:solidFill>
-            <a:srgbClr val="E8F5E9"/>
-          </a:solidFill>
-          <a:ln>
-            <a:noFill/>
-          </a:ln>
-        </p:spPr>
-        <p:style>
-          <a:lnRef idx="1">
-            <a:schemeClr val="accent1"/>
-          </a:lnRef>
-          <a:fillRef idx="3">
-            <a:schemeClr val="accent1"/>
-          </a:fillRef>
-          <a:effectRef idx="2">
-            <a:schemeClr val="accent1"/>
-          </a:effectRef>
-          <a:fontRef idx="minor">
-            <a:schemeClr val="lt1"/>
-          </a:fontRef>
-        </p:style>
-        <p:txBody>
-          <a:bodyPr rtlCol="0" anchor="ctr" wrap="square"/>
-          <a:lstStyle/>
-          <a:p>
-            <a:pPr algn="ctr"/>
-            <a:r>
-              <a:rPr sz="1600" b="1">
-                <a:solidFill>
-                  <a:srgbClr val="2E7D32"/>
-                </a:solidFill>
-              </a:rPr>
-              <a:t>Real-Time Ingestion</a:t>
-            </a:r>
-          </a:p>
-          <a:p>
-            <a:pPr>
-              <a:spcBef>
-                <a:spcPts val="1600"/>
-              </a:spcBef>
-            </a:pPr>
-            <a:r>
-              <a:rPr sz="1100" b="1">
-                <a:solidFill>
-                  <a:srgbClr val="2E7D32"/>
-                </a:solidFill>
-              </a:rPr>
-              <a:t>What:</a:t>
-            </a:r>
-          </a:p>
-          <a:p>
-            <a:r>
-              <a:rPr sz="1100">
-                <a:solidFill>
-                  <a:srgbClr val="2D2D2D"/>
-                </a:solidFill>
-              </a:rPr>
-              <a:t>Snowpipe + streams for continuous loading</a:t>
-            </a:r>
-          </a:p>
-          <a:p>
-            <a:pPr>
-              <a:spcBef>
-                <a:spcPts val="1200"/>
-              </a:spcBef>
-            </a:pPr>
-            <a:r>
-              <a:rPr sz="1100" b="1">
-                <a:solidFill>
-                  <a:srgbClr val="2E7D32"/>
-                </a:solidFill>
-              </a:rPr>
-              <a:t>Effort:</a:t>
-            </a:r>
-          </a:p>
-          <a:p>
-            <a:r>
-              <a:rPr sz="1100">
-                <a:solidFill>
-                  <a:srgbClr val="2D2D2D"/>
-                </a:solidFill>
-              </a:rPr>
-              <a:t>1-2 sprints</a:t>
-            </a:r>
-          </a:p>
-          <a:p>
-            <a:pPr>
-              <a:spcBef>
-                <a:spcPts val="1200"/>
-              </a:spcBef>
-            </a:pPr>
-            <a:r>
-              <a:rPr sz="1100" b="1">
-                <a:solidFill>
-                  <a:srgbClr val="2E7D32"/>
-                </a:solidFill>
-              </a:rPr>
-              <a:t>Business Benefit:</a:t>
-            </a:r>
-          </a:p>
-          <a:p>
-            <a:r>
-              <a:rPr sz="1100">
-                <a:solidFill>
-                  <a:srgbClr val="2D2D2D"/>
-                </a:solidFill>
-              </a:rPr>
-              <a:t>Live demand monitoring during storms</a:t>
-            </a:r>
-          </a:p>
-        </p:txBody>
-      </p:sp>
-      <p:sp>
-        <p:nvSpPr>
-          <p:cNvPr id="6" name="Rounded Rectangle 5"/>
-          <p:cNvSpPr/>
-          <p:nvPr/>
-        </p:nvSpPr>
-        <p:spPr>
-          <a:xfrm>
-            <a:off x="4300000" y="1000000"/>
-            <a:ext cx="3600000" cy="4800000"/>
-          </a:xfrm>
-          <a:prstGeom prst="roundRect">
-            <a:avLst/>
-          </a:prstGeom>
-          <a:solidFill>
-            <a:srgbClr val="E3F2FD"/>
-          </a:solidFill>
-          <a:ln>
-            <a:noFill/>
-          </a:ln>
-        </p:spPr>
-        <p:style>
-          <a:lnRef idx="1">
-            <a:schemeClr val="accent1"/>
-          </a:lnRef>
-          <a:fillRef idx="3">
-            <a:schemeClr val="accent1"/>
-          </a:fillRef>
-          <a:effectRef idx="2">
-            <a:schemeClr val="accent1"/>
-          </a:effectRef>
-          <a:fontRef idx="minor">
-            <a:schemeClr val="lt1"/>
-          </a:fontRef>
-        </p:style>
-        <p:txBody>
-          <a:bodyPr rtlCol="0" anchor="ctr" wrap="square"/>
-          <a:lstStyle/>
-          <a:p>
-            <a:pPr algn="ctr"/>
-            <a:r>
-              <a:rPr sz="1600" b="1">
-                <a:solidFill>
-                  <a:srgbClr val="0D47A1"/>
-                </a:solidFill>
-              </a:rPr>
-              <a:t>ML Forecasting</a:t>
-            </a:r>
-          </a:p>
-          <a:p>
-            <a:pPr>
-              <a:spcBef>
-                <a:spcPts val="1600"/>
-              </a:spcBef>
-            </a:pPr>
-            <a:r>
-              <a:rPr sz="1100" b="1">
-                <a:solidFill>
-                  <a:srgbClr val="0D47A1"/>
-                </a:solidFill>
-              </a:rPr>
-              <a:t>What:</a:t>
-            </a:r>
-          </a:p>
-          <a:p>
-            <a:r>
-              <a:rPr sz="1100">
-                <a:solidFill>
-                  <a:srgbClr val="2D2D2D"/>
-                </a:solidFill>
-              </a:rPr>
-              <a:t>Predict demand drops by borough before storms hit</a:t>
-            </a:r>
-          </a:p>
-          <a:p>
-            <a:pPr>
-              <a:spcBef>
-                <a:spcPts val="1200"/>
-              </a:spcBef>
-            </a:pPr>
-            <a:r>
-              <a:rPr sz="1100" b="1">
-                <a:solidFill>
-                  <a:srgbClr val="0D47A1"/>
-                </a:solidFill>
-              </a:rPr>
-              <a:t>Effort:</a:t>
-            </a:r>
-          </a:p>
-          <a:p>
-            <a:r>
-              <a:rPr sz="1100">
-                <a:solidFill>
-                  <a:srgbClr val="2D2D2D"/>
-                </a:solidFill>
-              </a:rPr>
-              <a:t>2-3 sprints</a:t>
-            </a:r>
-          </a:p>
-          <a:p>
-            <a:pPr>
-              <a:spcBef>
-                <a:spcPts val="1200"/>
-              </a:spcBef>
-            </a:pPr>
-            <a:r>
-              <a:rPr sz="1100" b="1">
-                <a:solidFill>
-                  <a:srgbClr val="0D47A1"/>
-                </a:solidFill>
-              </a:rPr>
-              <a:t>Business Benefit:</a:t>
-            </a:r>
-          </a:p>
-          <a:p>
-            <a:r>
-              <a:rPr sz="1100">
-                <a:solidFill>
-                  <a:srgbClr val="2D2D2D"/>
-                </a:solidFill>
-              </a:rPr>
-              <a:t>Proactive fleet positioning, fewer empty cabs</a:t>
-            </a:r>
-          </a:p>
-        </p:txBody>
-      </p:sp>
-      <p:sp>
-        <p:nvSpPr>
-          <p:cNvPr id="7" name="Rounded Rectangle 6"/>
-          <p:cNvSpPr/>
-          <p:nvPr/>
-        </p:nvSpPr>
-        <p:spPr>
-          <a:xfrm>
-            <a:off x="8200000" y="1000000"/>
-            <a:ext cx="3600000" cy="4800000"/>
-          </a:xfrm>
-          <a:prstGeom prst="roundRect">
-            <a:avLst/>
-          </a:prstGeom>
-          <a:solidFill>
-            <a:srgbClr val="FFF3E0"/>
-          </a:solidFill>
-          <a:ln>
-            <a:noFill/>
-          </a:ln>
-        </p:spPr>
-        <p:style>
-          <a:lnRef idx="1">
-            <a:schemeClr val="accent1"/>
-          </a:lnRef>
-          <a:fillRef idx="3">
-            <a:schemeClr val="accent1"/>
-          </a:fillRef>
-          <a:effectRef idx="2">
-            <a:schemeClr val="accent1"/>
-          </a:effectRef>
-          <a:fontRef idx="minor">
-            <a:schemeClr val="lt1"/>
-          </a:fontRef>
-        </p:style>
-        <p:txBody>
-          <a:bodyPr rtlCol="0" anchor="ctr" wrap="square"/>
-          <a:lstStyle/>
-          <a:p>
-            <a:pPr algn="ctr"/>
-            <a:r>
-              <a:rPr sz="1600" b="1">
-                <a:solidFill>
-                  <a:srgbClr val="E65100"/>
-                </a:solidFill>
-              </a:rPr>
-              <a:t>Multi-City Expansion</a:t>
-            </a:r>
-          </a:p>
-          <a:p>
-            <a:pPr>
-              <a:spcBef>
-                <a:spcPts val="1600"/>
-              </a:spcBef>
-            </a:pPr>
-            <a:r>
-              <a:rPr sz="1100" b="1">
-                <a:solidFill>
-                  <a:srgbClr val="E65100"/>
-                </a:solidFill>
-              </a:rPr>
-              <a:t>What:</a:t>
-            </a:r>
-          </a:p>
-          <a:p>
-            <a:r>
-              <a:rPr sz="1100">
-                <a:solidFill>
-                  <a:srgbClr val="2D2D2D"/>
-                </a:solidFill>
-              </a:rPr>
-              <a:t>Replicate pipeline for Chicago, Boston, etc.</a:t>
-            </a:r>
-          </a:p>
-          <a:p>
-            <a:pPr>
-              <a:spcBef>
-                <a:spcPts val="1200"/>
-              </a:spcBef>
-            </a:pPr>
-            <a:r>
-              <a:rPr sz="1100" b="1">
-                <a:solidFill>
-                  <a:srgbClr val="E65100"/>
-                </a:solidFill>
-              </a:rPr>
-              <a:t>Effort:</a:t>
-            </a:r>
-          </a:p>
-          <a:p>
-            <a:r>
-              <a:rPr sz="1100">
-                <a:solidFill>
-                  <a:srgbClr val="2D2D2D"/>
-                </a:solidFill>
-              </a:rPr>
-              <a:t>3-4 sprints per city</a:t>
-            </a:r>
-          </a:p>
-          <a:p>
-            <a:pPr>
-              <a:spcBef>
-                <a:spcPts val="1200"/>
-              </a:spcBef>
-            </a:pPr>
-            <a:r>
-              <a:rPr sz="1100" b="1">
-                <a:solidFill>
-                  <a:srgbClr val="E65100"/>
-                </a:solidFill>
-              </a:rPr>
-              <a:t>Business Benefit:</a:t>
-            </a:r>
-          </a:p>
-          <a:p>
-            <a:r>
-              <a:rPr sz="1100">
-                <a:solidFill>
-                  <a:srgbClr val="2D2D2D"/>
-                </a:solidFill>
-              </a:rPr>
-              <a:t>National weather-demand intelligence</a:t>
-            </a:r>
-          </a:p>
-        </p:txBody>
-      </p:sp>
-      <p:sp>
-        <p:nvSpPr>
-          <p:cNvPr id="8" name="Rounded Rectangle 7"/>
-          <p:cNvSpPr/>
-          <p:nvPr/>
-        </p:nvSpPr>
-        <p:spPr>
-          <a:xfrm>
-            <a:off x="400000" y="6000000"/>
-            <a:ext cx="11400000" cy="600000"/>
-          </a:xfrm>
-          <a:prstGeom prst="roundRect">
-            <a:avLst/>
-          </a:prstGeom>
-          <a:solidFill>
-            <a:srgbClr val="FCE4EC"/>
-          </a:solidFill>
-          <a:ln>
-            <a:noFill/>
-          </a:ln>
-        </p:spPr>
-        <p:style>
-          <a:lnRef idx="1">
-            <a:schemeClr val="accent1"/>
-          </a:lnRef>
-          <a:fillRef idx="3">
-            <a:schemeClr val="accent1"/>
-          </a:fillRef>
-          <a:effectRef idx="2">
-            <a:schemeClr val="accent1"/>
-          </a:effectRef>
-          <a:fontRef idx="minor">
-            <a:schemeClr val="lt1"/>
-          </a:fontRef>
-        </p:style>
-        <p:txBody>
-          <a:bodyPr rtlCol="0" anchor="ctr" wrap="square"/>
-          <a:lstStyle/>
-          <a:p>
-            <a:pPr algn="ctr"/>
-            <a:r>
-              <a:rPr sz="1300" b="1">
-                <a:solidFill>
-                  <a:srgbClr val="2D2D2D"/>
-                </a:solidFill>
-              </a:rPr>
-              <a:t>Highest Impact: Real-Time Ingestion. Fleet operators need minute-level demand signals during active storms.</a:t>
+          <a:p>
+            <a:r>
+              <a:t>Future State and Recommendation</a:t>
             </a:r>
           </a:p>
         </p:txBody>
@@ -11615,7 +13174,7 @@
           <a:lstStyle/>
           <a:p>
             <a:r>
-              <a:t>Future State Architecture</a:t>
+              <a:t>Future State Proposal</a:t>
             </a:r>
           </a:p>
         </p:txBody>
@@ -11682,34 +13241,429 @@
       </p:sp>
       <p:sp>
         <p:nvSpPr>
-          <p:cNvPr id="5" name="TextBox 4"/>
-          <p:cNvSpPr txBox="1"/>
+          <p:cNvPr id="5" name="Rounded Rectangle 4"/>
+          <p:cNvSpPr/>
           <p:nvPr/>
         </p:nvSpPr>
         <p:spPr>
           <a:xfrm>
-            <a:off x="2000000" y="2500000"/>
-            <a:ext cx="8000000" cy="2000000"/>
-          </a:xfrm>
-          <a:prstGeom prst="rect">
+            <a:off x="400000" y="1000000"/>
+            <a:ext cx="3600000" cy="4800000"/>
+          </a:xfrm>
+          <a:prstGeom prst="roundRect">
             <a:avLst/>
           </a:prstGeom>
-          <a:noFill/>
-        </p:spPr>
-        <p:txBody>
-          <a:bodyPr wrap="none">
-            <a:spAutoFit/>
-          </a:bodyPr>
+          <a:solidFill>
+            <a:srgbClr val="E8F5E9"/>
+          </a:solidFill>
+          <a:ln>
+            <a:noFill/>
+          </a:ln>
+        </p:spPr>
+        <p:style>
+          <a:lnRef idx="1">
+            <a:schemeClr val="accent1"/>
+          </a:lnRef>
+          <a:fillRef idx="3">
+            <a:schemeClr val="accent1"/>
+          </a:fillRef>
+          <a:effectRef idx="2">
+            <a:schemeClr val="accent1"/>
+          </a:effectRef>
+          <a:fontRef idx="minor">
+            <a:schemeClr val="lt1"/>
+          </a:fontRef>
+        </p:style>
+        <p:txBody>
+          <a:bodyPr rtlCol="0" anchor="ctr" wrap="square"/>
           <a:lstStyle/>
           <a:p>
             <a:pPr algn="ctr"/>
             <a:r>
-              <a:rPr sz="1800" i="1">
-                <a:solidFill>
-                  <a:srgbClr val="555555"/>
-                </a:solidFill>
-              </a:rPr>
-              <a:t>[Insert Future State Architecture Diagram]</a:t>
+              <a:rPr sz="1600" b="1">
+                <a:solidFill>
+                  <a:srgbClr val="2E7D32"/>
+                </a:solidFill>
+              </a:rPr>
+              <a:t>Real-Time Ingestion</a:t>
+            </a:r>
+          </a:p>
+          <a:p>
+            <a:pPr>
+              <a:spcBef>
+                <a:spcPts val="1600"/>
+              </a:spcBef>
+            </a:pPr>
+            <a:r>
+              <a:rPr sz="1100" b="1">
+                <a:solidFill>
+                  <a:srgbClr val="2E7D32"/>
+                </a:solidFill>
+              </a:rPr>
+              <a:t>What:</a:t>
+            </a:r>
+          </a:p>
+          <a:p>
+            <a:r>
+              <a:rPr sz="1100">
+                <a:solidFill>
+                  <a:srgbClr val="2D2D2D"/>
+                </a:solidFill>
+              </a:rPr>
+              <a:t>Snowpipe + streams for continuous loading</a:t>
+            </a:r>
+          </a:p>
+          <a:p>
+            <a:pPr>
+              <a:spcBef>
+                <a:spcPts val="1200"/>
+              </a:spcBef>
+            </a:pPr>
+            <a:r>
+              <a:rPr sz="1100" b="1">
+                <a:solidFill>
+                  <a:srgbClr val="2E7D32"/>
+                </a:solidFill>
+              </a:rPr>
+              <a:t>Effort:</a:t>
+            </a:r>
+          </a:p>
+          <a:p>
+            <a:r>
+              <a:rPr sz="1100">
+                <a:solidFill>
+                  <a:srgbClr val="2D2D2D"/>
+                </a:solidFill>
+              </a:rPr>
+              <a:t>1-2 sprints</a:t>
+            </a:r>
+          </a:p>
+          <a:p>
+            <a:pPr>
+              <a:spcBef>
+                <a:spcPts val="1200"/>
+              </a:spcBef>
+            </a:pPr>
+            <a:r>
+              <a:rPr sz="1100" b="1">
+                <a:solidFill>
+                  <a:srgbClr val="2E7D32"/>
+                </a:solidFill>
+              </a:rPr>
+              <a:t>Business Benefit:</a:t>
+            </a:r>
+          </a:p>
+          <a:p>
+            <a:r>
+              <a:rPr sz="1100">
+                <a:solidFill>
+                  <a:srgbClr val="2D2D2D"/>
+                </a:solidFill>
+              </a:rPr>
+              <a:t>Live demand monitoring during storms</a:t>
+            </a:r>
+          </a:p>
+        </p:txBody>
+      </p:sp>
+      <p:sp>
+        <p:nvSpPr>
+          <p:cNvPr id="6" name="Rounded Rectangle 5"/>
+          <p:cNvSpPr/>
+          <p:nvPr/>
+        </p:nvSpPr>
+        <p:spPr>
+          <a:xfrm>
+            <a:off x="4300000" y="1000000"/>
+            <a:ext cx="3600000" cy="4800000"/>
+          </a:xfrm>
+          <a:prstGeom prst="roundRect">
+            <a:avLst/>
+          </a:prstGeom>
+          <a:solidFill>
+            <a:srgbClr val="E3F2FD"/>
+          </a:solidFill>
+          <a:ln>
+            <a:noFill/>
+          </a:ln>
+        </p:spPr>
+        <p:style>
+          <a:lnRef idx="1">
+            <a:schemeClr val="accent1"/>
+          </a:lnRef>
+          <a:fillRef idx="3">
+            <a:schemeClr val="accent1"/>
+          </a:fillRef>
+          <a:effectRef idx="2">
+            <a:schemeClr val="accent1"/>
+          </a:effectRef>
+          <a:fontRef idx="minor">
+            <a:schemeClr val="lt1"/>
+          </a:fontRef>
+        </p:style>
+        <p:txBody>
+          <a:bodyPr rtlCol="0" anchor="ctr" wrap="square"/>
+          <a:lstStyle/>
+          <a:p>
+            <a:pPr algn="ctr"/>
+            <a:r>
+              <a:rPr sz="1600" b="1">
+                <a:solidFill>
+                  <a:srgbClr val="0D47A1"/>
+                </a:solidFill>
+              </a:rPr>
+              <a:t>ML Forecasting</a:t>
+            </a:r>
+          </a:p>
+          <a:p>
+            <a:pPr>
+              <a:spcBef>
+                <a:spcPts val="1600"/>
+              </a:spcBef>
+            </a:pPr>
+            <a:r>
+              <a:rPr sz="1100" b="1">
+                <a:solidFill>
+                  <a:srgbClr val="0D47A1"/>
+                </a:solidFill>
+              </a:rPr>
+              <a:t>What:</a:t>
+            </a:r>
+          </a:p>
+          <a:p>
+            <a:r>
+              <a:rPr sz="1100">
+                <a:solidFill>
+                  <a:srgbClr val="2D2D2D"/>
+                </a:solidFill>
+              </a:rPr>
+              <a:t>Predict demand drops by borough before storms hit</a:t>
+            </a:r>
+          </a:p>
+          <a:p>
+            <a:pPr>
+              <a:spcBef>
+                <a:spcPts val="1200"/>
+              </a:spcBef>
+            </a:pPr>
+            <a:r>
+              <a:rPr sz="1100" b="1">
+                <a:solidFill>
+                  <a:srgbClr val="0D47A1"/>
+                </a:solidFill>
+              </a:rPr>
+              <a:t>Effort:</a:t>
+            </a:r>
+          </a:p>
+          <a:p>
+            <a:r>
+              <a:rPr sz="1100">
+                <a:solidFill>
+                  <a:srgbClr val="2D2D2D"/>
+                </a:solidFill>
+              </a:rPr>
+              <a:t>2-3 sprints</a:t>
+            </a:r>
+          </a:p>
+          <a:p>
+            <a:pPr>
+              <a:spcBef>
+                <a:spcPts val="1200"/>
+              </a:spcBef>
+            </a:pPr>
+            <a:r>
+              <a:rPr sz="1100" b="1">
+                <a:solidFill>
+                  <a:srgbClr val="0D47A1"/>
+                </a:solidFill>
+              </a:rPr>
+              <a:t>Business Benefit:</a:t>
+            </a:r>
+          </a:p>
+          <a:p>
+            <a:r>
+              <a:rPr sz="1100">
+                <a:solidFill>
+                  <a:srgbClr val="2D2D2D"/>
+                </a:solidFill>
+              </a:rPr>
+              <a:t>Proactive fleet positioning, fewer empty cabs</a:t>
+            </a:r>
+          </a:p>
+        </p:txBody>
+      </p:sp>
+      <p:sp>
+        <p:nvSpPr>
+          <p:cNvPr id="7" name="Rounded Rectangle 6"/>
+          <p:cNvSpPr/>
+          <p:nvPr/>
+        </p:nvSpPr>
+        <p:spPr>
+          <a:xfrm>
+            <a:off x="8200000" y="1000000"/>
+            <a:ext cx="3600000" cy="4800000"/>
+          </a:xfrm>
+          <a:prstGeom prst="roundRect">
+            <a:avLst/>
+          </a:prstGeom>
+          <a:solidFill>
+            <a:srgbClr val="FFF3E0"/>
+          </a:solidFill>
+          <a:ln>
+            <a:noFill/>
+          </a:ln>
+        </p:spPr>
+        <p:style>
+          <a:lnRef idx="1">
+            <a:schemeClr val="accent1"/>
+          </a:lnRef>
+          <a:fillRef idx="3">
+            <a:schemeClr val="accent1"/>
+          </a:fillRef>
+          <a:effectRef idx="2">
+            <a:schemeClr val="accent1"/>
+          </a:effectRef>
+          <a:fontRef idx="minor">
+            <a:schemeClr val="lt1"/>
+          </a:fontRef>
+        </p:style>
+        <p:txBody>
+          <a:bodyPr rtlCol="0" anchor="ctr" wrap="square"/>
+          <a:lstStyle/>
+          <a:p>
+            <a:pPr algn="ctr"/>
+            <a:r>
+              <a:rPr sz="1600" b="1">
+                <a:solidFill>
+                  <a:srgbClr val="E65100"/>
+                </a:solidFill>
+              </a:rPr>
+              <a:t>Multi-City Expansion</a:t>
+            </a:r>
+          </a:p>
+          <a:p>
+            <a:pPr>
+              <a:spcBef>
+                <a:spcPts val="1600"/>
+              </a:spcBef>
+            </a:pPr>
+            <a:r>
+              <a:rPr sz="1100" b="1">
+                <a:solidFill>
+                  <a:srgbClr val="E65100"/>
+                </a:solidFill>
+              </a:rPr>
+              <a:t>What:</a:t>
+            </a:r>
+          </a:p>
+          <a:p>
+            <a:r>
+              <a:rPr sz="1100">
+                <a:solidFill>
+                  <a:srgbClr val="2D2D2D"/>
+                </a:solidFill>
+              </a:rPr>
+              <a:t>Replicate pipeline for Chicago, Boston, etc.</a:t>
+            </a:r>
+          </a:p>
+          <a:p>
+            <a:pPr>
+              <a:spcBef>
+                <a:spcPts val="1200"/>
+              </a:spcBef>
+            </a:pPr>
+            <a:r>
+              <a:rPr sz="1100" b="1">
+                <a:solidFill>
+                  <a:srgbClr val="E65100"/>
+                </a:solidFill>
+              </a:rPr>
+              <a:t>Effort:</a:t>
+            </a:r>
+          </a:p>
+          <a:p>
+            <a:r>
+              <a:rPr sz="1100">
+                <a:solidFill>
+                  <a:srgbClr val="2D2D2D"/>
+                </a:solidFill>
+              </a:rPr>
+              <a:t>3-4 sprints per city</a:t>
+            </a:r>
+          </a:p>
+          <a:p>
+            <a:pPr>
+              <a:spcBef>
+                <a:spcPts val="1200"/>
+              </a:spcBef>
+            </a:pPr>
+            <a:r>
+              <a:rPr sz="1100" b="1">
+                <a:solidFill>
+                  <a:srgbClr val="E65100"/>
+                </a:solidFill>
+              </a:rPr>
+              <a:t>Business Benefit:</a:t>
+            </a:r>
+          </a:p>
+          <a:p>
+            <a:r>
+              <a:rPr sz="1100">
+                <a:solidFill>
+                  <a:srgbClr val="2D2D2D"/>
+                </a:solidFill>
+              </a:rPr>
+              <a:t>National weather-demand intelligence</a:t>
+            </a:r>
+          </a:p>
+        </p:txBody>
+      </p:sp>
+      <p:sp>
+        <p:nvSpPr>
+          <p:cNvPr id="8" name="Rounded Rectangle 7"/>
+          <p:cNvSpPr/>
+          <p:nvPr/>
+        </p:nvSpPr>
+        <p:spPr>
+          <a:xfrm>
+            <a:off x="400000" y="6000000"/>
+            <a:ext cx="11400000" cy="600000"/>
+          </a:xfrm>
+          <a:prstGeom prst="roundRect">
+            <a:avLst/>
+          </a:prstGeom>
+          <a:solidFill>
+            <a:srgbClr val="FCE4EC"/>
+          </a:solidFill>
+          <a:ln>
+            <a:noFill/>
+          </a:ln>
+        </p:spPr>
+        <p:style>
+          <a:lnRef idx="1">
+            <a:schemeClr val="accent1"/>
+          </a:lnRef>
+          <a:fillRef idx="3">
+            <a:schemeClr val="accent1"/>
+          </a:fillRef>
+          <a:effectRef idx="2">
+            <a:schemeClr val="accent1"/>
+          </a:effectRef>
+          <a:fontRef idx="minor">
+            <a:schemeClr val="lt1"/>
+          </a:fontRef>
+        </p:style>
+        <p:txBody>
+          <a:bodyPr rtlCol="0" anchor="ctr" wrap="square"/>
+          <a:lstStyle/>
+          <a:p>
+            <a:pPr algn="ctr"/>
+            <a:r>
+              <a:rPr sz="1300" b="1">
+                <a:solidFill>
+                  <a:srgbClr val="2D2D2D"/>
+                </a:solidFill>
+              </a:rPr>
+              <a:t>Highest Impact: Real-Time Ingestion. Fleet operators need minute-level demand signals during active storms.</a:t>
             </a:r>
           </a:p>
         </p:txBody>
@@ -11748,7 +13702,7 @@
           <a:lstStyle/>
           <a:p>
             <a:r>
-              <a:t>Recommendation</a:t>
+              <a:t>Future State Architecture</a:t>
             </a:r>
           </a:p>
         </p:txBody>
@@ -11815,198 +13769,34 @@
       </p:sp>
       <p:sp>
         <p:nvSpPr>
-          <p:cNvPr id="5" name="Rounded Rectangle 4"/>
-          <p:cNvSpPr/>
+          <p:cNvPr id="5" name="TextBox 4"/>
+          <p:cNvSpPr txBox="1"/>
           <p:nvPr/>
         </p:nvSpPr>
         <p:spPr>
           <a:xfrm>
-            <a:off x="400000" y="1200000"/>
-            <a:ext cx="11400000" cy="1800000"/>
-          </a:xfrm>
-          <a:prstGeom prst="roundRect">
+            <a:off x="2000000" y="2500000"/>
+            <a:ext cx="8000000" cy="2000000"/>
+          </a:xfrm>
+          <a:prstGeom prst="rect">
             <a:avLst/>
           </a:prstGeom>
-          <a:solidFill>
-            <a:srgbClr val="E3F2FD"/>
-          </a:solidFill>
-          <a:ln>
-            <a:noFill/>
-          </a:ln>
-        </p:spPr>
-        <p:style>
-          <a:lnRef idx="1">
-            <a:schemeClr val="accent1"/>
-          </a:lnRef>
-          <a:fillRef idx="3">
-            <a:schemeClr val="accent1"/>
-          </a:fillRef>
-          <a:effectRef idx="2">
-            <a:schemeClr val="accent1"/>
-          </a:effectRef>
-          <a:fontRef idx="minor">
-            <a:schemeClr val="lt1"/>
-          </a:fontRef>
-        </p:style>
-        <p:txBody>
-          <a:bodyPr rtlCol="0" anchor="ctr" wrap="square"/>
+          <a:noFill/>
+        </p:spPr>
+        <p:txBody>
+          <a:bodyPr wrap="none">
+            <a:spAutoFit/>
+          </a:bodyPr>
           <a:lstStyle/>
           <a:p>
             <a:pPr algn="ctr"/>
             <a:r>
-              <a:rPr sz="2200" b="1">
-                <a:solidFill>
-                  <a:srgbClr val="0D47A1"/>
-                </a:solidFill>
-              </a:rPr>
-              <a:t>[One clear recommendation tied to the finding]</a:t>
-            </a:r>
-          </a:p>
-          <a:p>
-            <a:pPr algn="ctr">
-              <a:spcBef>
-                <a:spcPts val="800"/>
-              </a:spcBef>
-            </a:pPr>
-            <a:r>
-              <a:rPr sz="1400" i="1">
+              <a:rPr sz="1800" i="1">
                 <a:solidFill>
                   <a:srgbClr val="555555"/>
                 </a:solidFill>
               </a:rPr>
-              <a:t>e.g., Pre-position 15% more vehicles in outer boroughs during forecasted rain events</a:t>
-            </a:r>
-          </a:p>
-        </p:txBody>
-      </p:sp>
-      <p:sp>
-        <p:nvSpPr>
-          <p:cNvPr id="6" name="Rounded Rectangle 5"/>
-          <p:cNvSpPr/>
-          <p:nvPr/>
-        </p:nvSpPr>
-        <p:spPr>
-          <a:xfrm>
-            <a:off x="400000" y="3400000"/>
-            <a:ext cx="5400000" cy="1500000"/>
-          </a:xfrm>
-          <a:prstGeom prst="roundRect">
-            <a:avLst/>
-          </a:prstGeom>
-          <a:solidFill>
-            <a:srgbClr val="E8F5E9"/>
-          </a:solidFill>
-          <a:ln>
-            <a:noFill/>
-          </a:ln>
-        </p:spPr>
-        <p:style>
-          <a:lnRef idx="1">
-            <a:schemeClr val="accent1"/>
-          </a:lnRef>
-          <a:fillRef idx="3">
-            <a:schemeClr val="accent1"/>
-          </a:fillRef>
-          <a:effectRef idx="2">
-            <a:schemeClr val="accent1"/>
-          </a:effectRef>
-          <a:fontRef idx="minor">
-            <a:schemeClr val="lt1"/>
-          </a:fontRef>
-        </p:style>
-        <p:txBody>
-          <a:bodyPr rtlCol="0" anchor="ctr" wrap="square"/>
-          <a:lstStyle/>
-          <a:p>
-            <a:pPr algn="ctr"/>
-            <a:r>
-              <a:rPr sz="1400" b="1">
-                <a:solidFill>
-                  <a:srgbClr val="2E7D32"/>
-                </a:solidFill>
-              </a:rPr>
-              <a:t>Actionable Next Step</a:t>
-            </a:r>
-          </a:p>
-          <a:p>
-            <a:pPr>
-              <a:spcBef>
-                <a:spcPts val="800"/>
-              </a:spcBef>
-            </a:pPr>
-            <a:r>
-              <a:rPr sz="1300">
-                <a:solidFill>
-                  <a:srgbClr val="2D2D2D"/>
-                </a:solidFill>
-              </a:rPr>
-              <a:t>[What the client should do first]</a:t>
-            </a:r>
-          </a:p>
-        </p:txBody>
-      </p:sp>
-      <p:sp>
-        <p:nvSpPr>
-          <p:cNvPr id="7" name="Rounded Rectangle 6"/>
-          <p:cNvSpPr/>
-          <p:nvPr/>
-        </p:nvSpPr>
-        <p:spPr>
-          <a:xfrm>
-            <a:off x="6100000" y="3400000"/>
-            <a:ext cx="5700000" cy="1500000"/>
-          </a:xfrm>
-          <a:prstGeom prst="roundRect">
-            <a:avLst/>
-          </a:prstGeom>
-          <a:solidFill>
-            <a:srgbClr val="FFF3E0"/>
-          </a:solidFill>
-          <a:ln>
-            <a:noFill/>
-          </a:ln>
-        </p:spPr>
-        <p:style>
-          <a:lnRef idx="1">
-            <a:schemeClr val="accent1"/>
-          </a:lnRef>
-          <a:fillRef idx="3">
-            <a:schemeClr val="accent1"/>
-          </a:fillRef>
-          <a:effectRef idx="2">
-            <a:schemeClr val="accent1"/>
-          </a:effectRef>
-          <a:fontRef idx="minor">
-            <a:schemeClr val="lt1"/>
-          </a:fontRef>
-        </p:style>
-        <p:txBody>
-          <a:bodyPr rtlCol="0" anchor="ctr" wrap="square"/>
-          <a:lstStyle/>
-          <a:p>
-            <a:pPr algn="ctr"/>
-            <a:r>
-              <a:rPr sz="1400" b="1">
-                <a:solidFill>
-                  <a:srgbClr val="E65100"/>
-                </a:solidFill>
-              </a:rPr>
-              <a:t>Implementation Cost</a:t>
-            </a:r>
-          </a:p>
-          <a:p>
-            <a:pPr>
-              <a:spcBef>
-                <a:spcPts val="800"/>
-              </a:spcBef>
-            </a:pPr>
-            <a:r>
-              <a:rPr sz="1300">
-                <a:solidFill>
-                  <a:srgbClr val="2D2D2D"/>
-                </a:solidFill>
-              </a:rPr>
-              <a:t>[What it would take: time, team, tools]</a:t>
+              <a:t>[Insert Future State Architecture Diagram]</a:t>
             </a:r>
           </a:p>
         </p:txBody>
@@ -12036,7 +13826,7 @@
             <a:spLocks noGrp="1"/>
           </p:cNvSpPr>
           <p:nvPr>
-            <p:ph type="ctrTitle"/>
+            <p:ph type="title"/>
           </p:nvPr>
         </p:nvSpPr>
         <p:spPr/>
@@ -12045,28 +13835,265 @@
           <a:lstStyle/>
           <a:p>
             <a:r>
-              <a:t>Thank You</a:t>
-            </a:r>
-          </a:p>
-        </p:txBody>
-      </p:sp>
-      <p:sp>
-        <p:nvSpPr>
-          <p:cNvPr id="3" name="Subtitle 2"/>
-          <p:cNvSpPr>
-            <a:spLocks noGrp="1"/>
-          </p:cNvSpPr>
-          <p:nvPr>
-            <p:ph type="subTitle" idx="1"/>
+              <a:t>Recommendation</a:t>
+            </a:r>
+          </a:p>
+        </p:txBody>
+      </p:sp>
+      <p:sp>
+        <p:nvSpPr>
+          <p:cNvPr id="3" name="Content Placeholder 2"/>
+          <p:cNvSpPr>
+            <a:spLocks noGrp="1"/>
+          </p:cNvSpPr>
+          <p:nvPr>
+            <p:ph idx="1"/>
           </p:nvPr>
         </p:nvSpPr>
         <p:spPr/>
         <p:txBody>
           <a:bodyPr/>
           <a:lstStyle/>
-          <a:p>
-            <a:r>
-              <a:t>Questions?</a:t>
+          <a:p/>
+        </p:txBody>
+      </p:sp>
+      <p:sp>
+        <p:nvSpPr>
+          <p:cNvPr id="4" name="Rectangle 3"/>
+          <p:cNvSpPr/>
+          <p:nvPr/>
+        </p:nvSpPr>
+        <p:spPr>
+          <a:xfrm>
+            <a:off x="0" y="800000"/>
+            <a:ext cx="12192000" cy="80000"/>
+          </a:xfrm>
+          <a:prstGeom prst="rect">
+            <a:avLst/>
+          </a:prstGeom>
+          <a:solidFill>
+            <a:srgbClr val="FE3082"/>
+          </a:solidFill>
+          <a:ln>
+            <a:noFill/>
+          </a:ln>
+        </p:spPr>
+        <p:style>
+          <a:lnRef idx="1">
+            <a:schemeClr val="accent1"/>
+          </a:lnRef>
+          <a:fillRef idx="3">
+            <a:schemeClr val="accent1"/>
+          </a:fillRef>
+          <a:effectRef idx="2">
+            <a:schemeClr val="accent1"/>
+          </a:effectRef>
+          <a:fontRef idx="minor">
+            <a:schemeClr val="lt1"/>
+          </a:fontRef>
+        </p:style>
+        <p:txBody>
+          <a:bodyPr rtlCol="0" anchor="ctr"/>
+          <a:lstStyle/>
+          <a:p>
+            <a:pPr algn="ctr"/>
+          </a:p>
+        </p:txBody>
+      </p:sp>
+      <p:sp>
+        <p:nvSpPr>
+          <p:cNvPr id="5" name="Rounded Rectangle 4"/>
+          <p:cNvSpPr/>
+          <p:nvPr/>
+        </p:nvSpPr>
+        <p:spPr>
+          <a:xfrm>
+            <a:off x="400000" y="1200000"/>
+            <a:ext cx="11400000" cy="1800000"/>
+          </a:xfrm>
+          <a:prstGeom prst="roundRect">
+            <a:avLst/>
+          </a:prstGeom>
+          <a:solidFill>
+            <a:srgbClr val="E3F2FD"/>
+          </a:solidFill>
+          <a:ln>
+            <a:noFill/>
+          </a:ln>
+        </p:spPr>
+        <p:style>
+          <a:lnRef idx="1">
+            <a:schemeClr val="accent1"/>
+          </a:lnRef>
+          <a:fillRef idx="3">
+            <a:schemeClr val="accent1"/>
+          </a:fillRef>
+          <a:effectRef idx="2">
+            <a:schemeClr val="accent1"/>
+          </a:effectRef>
+          <a:fontRef idx="minor">
+            <a:schemeClr val="lt1"/>
+          </a:fontRef>
+        </p:style>
+        <p:txBody>
+          <a:bodyPr rtlCol="0" anchor="ctr" wrap="square"/>
+          <a:lstStyle/>
+          <a:p>
+            <a:pPr algn="ctr"/>
+            <a:r>
+              <a:rPr sz="2200" b="1">
+                <a:solidFill>
+                  <a:srgbClr val="0D47A1"/>
+                </a:solidFill>
+              </a:rPr>
+              <a:t>[One clear recommendation tied to the finding]</a:t>
+            </a:r>
+          </a:p>
+          <a:p>
+            <a:pPr algn="ctr">
+              <a:spcBef>
+                <a:spcPts val="800"/>
+              </a:spcBef>
+            </a:pPr>
+            <a:r>
+              <a:rPr sz="1400" i="1">
+                <a:solidFill>
+                  <a:srgbClr val="555555"/>
+                </a:solidFill>
+              </a:rPr>
+              <a:t>e.g., Pre-position 15% more vehicles in outer boroughs during forecasted rain events</a:t>
+            </a:r>
+          </a:p>
+        </p:txBody>
+      </p:sp>
+      <p:sp>
+        <p:nvSpPr>
+          <p:cNvPr id="6" name="Rounded Rectangle 5"/>
+          <p:cNvSpPr/>
+          <p:nvPr/>
+        </p:nvSpPr>
+        <p:spPr>
+          <a:xfrm>
+            <a:off x="400000" y="3400000"/>
+            <a:ext cx="5400000" cy="1500000"/>
+          </a:xfrm>
+          <a:prstGeom prst="roundRect">
+            <a:avLst/>
+          </a:prstGeom>
+          <a:solidFill>
+            <a:srgbClr val="E8F5E9"/>
+          </a:solidFill>
+          <a:ln>
+            <a:noFill/>
+          </a:ln>
+        </p:spPr>
+        <p:style>
+          <a:lnRef idx="1">
+            <a:schemeClr val="accent1"/>
+          </a:lnRef>
+          <a:fillRef idx="3">
+            <a:schemeClr val="accent1"/>
+          </a:fillRef>
+          <a:effectRef idx="2">
+            <a:schemeClr val="accent1"/>
+          </a:effectRef>
+          <a:fontRef idx="minor">
+            <a:schemeClr val="lt1"/>
+          </a:fontRef>
+        </p:style>
+        <p:txBody>
+          <a:bodyPr rtlCol="0" anchor="ctr" wrap="square"/>
+          <a:lstStyle/>
+          <a:p>
+            <a:pPr algn="ctr"/>
+            <a:r>
+              <a:rPr sz="1400" b="1">
+                <a:solidFill>
+                  <a:srgbClr val="2E7D32"/>
+                </a:solidFill>
+              </a:rPr>
+              <a:t>Actionable Next Step</a:t>
+            </a:r>
+          </a:p>
+          <a:p>
+            <a:pPr>
+              <a:spcBef>
+                <a:spcPts val="800"/>
+              </a:spcBef>
+            </a:pPr>
+            <a:r>
+              <a:rPr sz="1300">
+                <a:solidFill>
+                  <a:srgbClr val="2D2D2D"/>
+                </a:solidFill>
+              </a:rPr>
+              <a:t>[What the client should do first]</a:t>
+            </a:r>
+          </a:p>
+        </p:txBody>
+      </p:sp>
+      <p:sp>
+        <p:nvSpPr>
+          <p:cNvPr id="7" name="Rounded Rectangle 6"/>
+          <p:cNvSpPr/>
+          <p:nvPr/>
+        </p:nvSpPr>
+        <p:spPr>
+          <a:xfrm>
+            <a:off x="6100000" y="3400000"/>
+            <a:ext cx="5700000" cy="1500000"/>
+          </a:xfrm>
+          <a:prstGeom prst="roundRect">
+            <a:avLst/>
+          </a:prstGeom>
+          <a:solidFill>
+            <a:srgbClr val="FFF3E0"/>
+          </a:solidFill>
+          <a:ln>
+            <a:noFill/>
+          </a:ln>
+        </p:spPr>
+        <p:style>
+          <a:lnRef idx="1">
+            <a:schemeClr val="accent1"/>
+          </a:lnRef>
+          <a:fillRef idx="3">
+            <a:schemeClr val="accent1"/>
+          </a:fillRef>
+          <a:effectRef idx="2">
+            <a:schemeClr val="accent1"/>
+          </a:effectRef>
+          <a:fontRef idx="minor">
+            <a:schemeClr val="lt1"/>
+          </a:fontRef>
+        </p:style>
+        <p:txBody>
+          <a:bodyPr rtlCol="0" anchor="ctr" wrap="square"/>
+          <a:lstStyle/>
+          <a:p>
+            <a:pPr algn="ctr"/>
+            <a:r>
+              <a:rPr sz="1400" b="1">
+                <a:solidFill>
+                  <a:srgbClr val="E65100"/>
+                </a:solidFill>
+              </a:rPr>
+              <a:t>Implementation Cost</a:t>
+            </a:r>
+          </a:p>
+          <a:p>
+            <a:pPr>
+              <a:spcBef>
+                <a:spcPts val="800"/>
+              </a:spcBef>
+            </a:pPr>
+            <a:r>
+              <a:rPr sz="1300">
+                <a:solidFill>
+                  <a:srgbClr val="2D2D2D"/>
+                </a:solidFill>
+              </a:rPr>
+              <a:t>[What it would take: time, team, tools]</a:t>
             </a:r>
           </a:p>
         </p:txBody>
@@ -12096,7 +14123,7 @@
             <a:spLocks noGrp="1"/>
           </p:cNvSpPr>
           <p:nvPr>
-            <p:ph type="title"/>
+            <p:ph type="ctrTitle"/>
           </p:nvPr>
         </p:nvSpPr>
         <p:spPr/>
@@ -12105,337 +14132,28 @@
           <a:lstStyle/>
           <a:p>
             <a:r>
-              <a:t>AI Use Disclosure</a:t>
-            </a:r>
-          </a:p>
-        </p:txBody>
-      </p:sp>
-      <p:sp>
-        <p:nvSpPr>
-          <p:cNvPr id="3" name="Content Placeholder 2"/>
-          <p:cNvSpPr>
-            <a:spLocks noGrp="1"/>
-          </p:cNvSpPr>
-          <p:nvPr>
-            <p:ph idx="1"/>
+              <a:t>Thank You</a:t>
+            </a:r>
+          </a:p>
+        </p:txBody>
+      </p:sp>
+      <p:sp>
+        <p:nvSpPr>
+          <p:cNvPr id="3" name="Subtitle 2"/>
+          <p:cNvSpPr>
+            <a:spLocks noGrp="1"/>
+          </p:cNvSpPr>
+          <p:nvPr>
+            <p:ph type="subTitle" idx="1"/>
           </p:nvPr>
         </p:nvSpPr>
         <p:spPr/>
         <p:txBody>
           <a:bodyPr/>
           <a:lstStyle/>
-          <a:p/>
-        </p:txBody>
-      </p:sp>
-      <p:sp>
-        <p:nvSpPr>
-          <p:cNvPr id="4" name="Rectangle 3"/>
-          <p:cNvSpPr/>
-          <p:nvPr/>
-        </p:nvSpPr>
-        <p:spPr>
-          <a:xfrm>
-            <a:off x="0" y="800000"/>
-            <a:ext cx="12192000" cy="80000"/>
-          </a:xfrm>
-          <a:prstGeom prst="rect">
-            <a:avLst/>
-          </a:prstGeom>
-          <a:solidFill>
-            <a:srgbClr val="FE3082"/>
-          </a:solidFill>
-          <a:ln>
-            <a:noFill/>
-          </a:ln>
-        </p:spPr>
-        <p:style>
-          <a:lnRef idx="1">
-            <a:schemeClr val="accent1"/>
-          </a:lnRef>
-          <a:fillRef idx="3">
-            <a:schemeClr val="accent1"/>
-          </a:fillRef>
-          <a:effectRef idx="2">
-            <a:schemeClr val="accent1"/>
-          </a:effectRef>
-          <a:fontRef idx="minor">
-            <a:schemeClr val="lt1"/>
-          </a:fontRef>
-        </p:style>
-        <p:txBody>
-          <a:bodyPr rtlCol="0" anchor="ctr"/>
-          <a:lstStyle/>
-          <a:p>
-            <a:pPr algn="ctr"/>
-          </a:p>
-        </p:txBody>
-      </p:sp>
-      <p:sp>
-        <p:nvSpPr>
-          <p:cNvPr id="5" name="Rounded Rectangle 4"/>
-          <p:cNvSpPr/>
-          <p:nvPr/>
-        </p:nvSpPr>
-        <p:spPr>
-          <a:xfrm>
-            <a:off x="400000" y="1100000"/>
-            <a:ext cx="11400000" cy="500000"/>
-          </a:xfrm>
-          <a:prstGeom prst="roundRect">
-            <a:avLst/>
-          </a:prstGeom>
-          <a:solidFill>
-            <a:srgbClr val="1A237E"/>
-          </a:solidFill>
-          <a:ln>
-            <a:noFill/>
-          </a:ln>
-        </p:spPr>
-        <p:style>
-          <a:lnRef idx="1">
-            <a:schemeClr val="accent1"/>
-          </a:lnRef>
-          <a:fillRef idx="3">
-            <a:schemeClr val="accent1"/>
-          </a:fillRef>
-          <a:effectRef idx="2">
-            <a:schemeClr val="accent1"/>
-          </a:effectRef>
-          <a:fontRef idx="minor">
-            <a:schemeClr val="lt1"/>
-          </a:fontRef>
-        </p:style>
-        <p:txBody>
-          <a:bodyPr rtlCol="0" anchor="ctr" wrap="square"/>
-          <a:lstStyle/>
-          <a:p>
-            <a:pPr algn="ctr"/>
-            <a:r>
-              <a:rPr sz="1300" b="1">
-                <a:solidFill>
-                  <a:srgbClr val="FFFFFF"/>
-                </a:solidFill>
-              </a:rPr>
-              <a:t>  Where We Used AI                    What For                              What We Verified</a:t>
-            </a:r>
-          </a:p>
-        </p:txBody>
-      </p:sp>
-      <p:sp>
-        <p:nvSpPr>
-          <p:cNvPr id="6" name="Rounded Rectangle 5"/>
-          <p:cNvSpPr/>
-          <p:nvPr/>
-        </p:nvSpPr>
-        <p:spPr>
-          <a:xfrm>
-            <a:off x="400000" y="1650000"/>
-            <a:ext cx="11400000" cy="500000"/>
-          </a:xfrm>
-          <a:prstGeom prst="roundRect">
-            <a:avLst/>
-          </a:prstGeom>
-          <a:solidFill>
-            <a:srgbClr val="E3F2FD"/>
-          </a:solidFill>
-          <a:ln>
-            <a:noFill/>
-          </a:ln>
-        </p:spPr>
-        <p:style>
-          <a:lnRef idx="1">
-            <a:schemeClr val="accent1"/>
-          </a:lnRef>
-          <a:fillRef idx="3">
-            <a:schemeClr val="accent1"/>
-          </a:fillRef>
-          <a:effectRef idx="2">
-            <a:schemeClr val="accent1"/>
-          </a:effectRef>
-          <a:fontRef idx="minor">
-            <a:schemeClr val="lt1"/>
-          </a:fontRef>
-        </p:style>
-        <p:txBody>
-          <a:bodyPr rtlCol="0" anchor="ctr" wrap="square"/>
-          <a:lstStyle/>
-          <a:p>
-            <a:pPr algn="ctr"/>
-            <a:r>
-              <a:rPr sz="1200">
-                <a:solidFill>
-                  <a:srgbClr val="2D2D2D"/>
-                </a:solidFill>
-              </a:rPr>
-              <a:t>  [Tool]                                        [Purpose]                                    [Verification]</a:t>
-            </a:r>
-          </a:p>
-        </p:txBody>
-      </p:sp>
-      <p:sp>
-        <p:nvSpPr>
-          <p:cNvPr id="7" name="Rounded Rectangle 6"/>
-          <p:cNvSpPr/>
-          <p:nvPr/>
-        </p:nvSpPr>
-        <p:spPr>
-          <a:xfrm>
-            <a:off x="400000" y="2200000"/>
-            <a:ext cx="11400000" cy="500000"/>
-          </a:xfrm>
-          <a:prstGeom prst="roundRect">
-            <a:avLst/>
-          </a:prstGeom>
-          <a:solidFill>
-            <a:srgbClr val="F0F7FF"/>
-          </a:solidFill>
-          <a:ln>
-            <a:noFill/>
-          </a:ln>
-        </p:spPr>
-        <p:style>
-          <a:lnRef idx="1">
-            <a:schemeClr val="accent1"/>
-          </a:lnRef>
-          <a:fillRef idx="3">
-            <a:schemeClr val="accent1"/>
-          </a:fillRef>
-          <a:effectRef idx="2">
-            <a:schemeClr val="accent1"/>
-          </a:effectRef>
-          <a:fontRef idx="minor">
-            <a:schemeClr val="lt1"/>
-          </a:fontRef>
-        </p:style>
-        <p:txBody>
-          <a:bodyPr rtlCol="0" anchor="ctr" wrap="square"/>
-          <a:lstStyle/>
-          <a:p>
-            <a:pPr algn="ctr"/>
-            <a:r>
-              <a:rPr sz="1200">
-                <a:solidFill>
-                  <a:srgbClr val="2D2D2D"/>
-                </a:solidFill>
-              </a:rPr>
-              <a:t>  [Tool]                                        [Purpose]                                    [Verification]</a:t>
-            </a:r>
-          </a:p>
-        </p:txBody>
-      </p:sp>
-      <p:sp>
-        <p:nvSpPr>
-          <p:cNvPr id="8" name="Rounded Rectangle 7"/>
-          <p:cNvSpPr/>
-          <p:nvPr/>
-        </p:nvSpPr>
-        <p:spPr>
-          <a:xfrm>
-            <a:off x="400000" y="2750000"/>
-            <a:ext cx="11400000" cy="500000"/>
-          </a:xfrm>
-          <a:prstGeom prst="roundRect">
-            <a:avLst/>
-          </a:prstGeom>
-          <a:solidFill>
-            <a:srgbClr val="E3F2FD"/>
-          </a:solidFill>
-          <a:ln>
-            <a:noFill/>
-          </a:ln>
-        </p:spPr>
-        <p:style>
-          <a:lnRef idx="1">
-            <a:schemeClr val="accent1"/>
-          </a:lnRef>
-          <a:fillRef idx="3">
-            <a:schemeClr val="accent1"/>
-          </a:fillRef>
-          <a:effectRef idx="2">
-            <a:schemeClr val="accent1"/>
-          </a:effectRef>
-          <a:fontRef idx="minor">
-            <a:schemeClr val="lt1"/>
-          </a:fontRef>
-        </p:style>
-        <p:txBody>
-          <a:bodyPr rtlCol="0" anchor="ctr" wrap="square"/>
-          <a:lstStyle/>
-          <a:p>
-            <a:pPr algn="ctr"/>
-            <a:r>
-              <a:rPr sz="1200">
-                <a:solidFill>
-                  <a:srgbClr val="2D2D2D"/>
-                </a:solidFill>
-              </a:rPr>
-              <a:t>  [Tool]                                        [Purpose]                                    [Verification]</a:t>
-            </a:r>
-          </a:p>
-        </p:txBody>
-      </p:sp>
-      <p:sp>
-        <p:nvSpPr>
-          <p:cNvPr id="9" name="Rounded Rectangle 8"/>
-          <p:cNvSpPr/>
-          <p:nvPr/>
-        </p:nvSpPr>
-        <p:spPr>
-          <a:xfrm>
-            <a:off x="400000" y="3600000"/>
-            <a:ext cx="11400000" cy="2000000"/>
-          </a:xfrm>
-          <a:prstGeom prst="roundRect">
-            <a:avLst/>
-          </a:prstGeom>
-          <a:solidFill>
-            <a:srgbClr val="FFF3E0"/>
-          </a:solidFill>
-          <a:ln>
-            <a:noFill/>
-          </a:ln>
-        </p:spPr>
-        <p:style>
-          <a:lnRef idx="1">
-            <a:schemeClr val="accent1"/>
-          </a:lnRef>
-          <a:fillRef idx="3">
-            <a:schemeClr val="accent1"/>
-          </a:fillRef>
-          <a:effectRef idx="2">
-            <a:schemeClr val="accent1"/>
-          </a:effectRef>
-          <a:fontRef idx="minor">
-            <a:schemeClr val="lt1"/>
-          </a:fontRef>
-        </p:style>
-        <p:txBody>
-          <a:bodyPr rtlCol="0" anchor="ctr" wrap="square"/>
-          <a:lstStyle/>
-          <a:p>
-            <a:pPr algn="ctr"/>
-            <a:r>
-              <a:rPr sz="1400" b="1">
-                <a:solidFill>
-                  <a:srgbClr val="E65100"/>
-                </a:solidFill>
-              </a:rPr>
-              <a:t>What We Rejected or Corrected From AI Suggestions</a:t>
-            </a:r>
-          </a:p>
-          <a:p>
-            <a:pPr>
-              <a:spcBef>
-                <a:spcPts val="800"/>
-              </a:spcBef>
-            </a:pPr>
-            <a:r>
-              <a:rPr sz="1200">
-                <a:solidFill>
-                  <a:srgbClr val="2D2D2D"/>
-                </a:solidFill>
-              </a:rPr>
-              <a:t>[Describe corrections made, things that required manual verification, etc.]</a:t>
+          <a:p>
+            <a:r>
+              <a:t>Questions?</a:t>
             </a:r>
           </a:p>
         </p:txBody>
@@ -12474,7 +14192,7 @@
           <a:lstStyle/>
           <a:p>
             <a:r>
-              <a:t>Paths We Explored</a:t>
+              <a:t>AI Use Disclosure</a:t>
             </a:r>
           </a:p>
         </p:txBody>
@@ -12547,8 +14265,212 @@
         </p:nvSpPr>
         <p:spPr>
           <a:xfrm>
-            <a:off x="400000" y="1000000"/>
-            <a:ext cx="3500000" cy="2200000"/>
+            <a:off x="400000" y="1100000"/>
+            <a:ext cx="11400000" cy="500000"/>
+          </a:xfrm>
+          <a:prstGeom prst="roundRect">
+            <a:avLst/>
+          </a:prstGeom>
+          <a:solidFill>
+            <a:srgbClr val="1A237E"/>
+          </a:solidFill>
+          <a:ln>
+            <a:noFill/>
+          </a:ln>
+        </p:spPr>
+        <p:style>
+          <a:lnRef idx="1">
+            <a:schemeClr val="accent1"/>
+          </a:lnRef>
+          <a:fillRef idx="3">
+            <a:schemeClr val="accent1"/>
+          </a:fillRef>
+          <a:effectRef idx="2">
+            <a:schemeClr val="accent1"/>
+          </a:effectRef>
+          <a:fontRef idx="minor">
+            <a:schemeClr val="lt1"/>
+          </a:fontRef>
+        </p:style>
+        <p:txBody>
+          <a:bodyPr rtlCol="0" anchor="ctr" wrap="square"/>
+          <a:lstStyle/>
+          <a:p>
+            <a:pPr algn="ctr"/>
+            <a:r>
+              <a:rPr sz="1300" b="1">
+                <a:solidFill>
+                  <a:srgbClr val="FFFFFF"/>
+                </a:solidFill>
+              </a:rPr>
+              <a:t>  Where We Used AI                    What For                              What We Verified</a:t>
+            </a:r>
+          </a:p>
+        </p:txBody>
+      </p:sp>
+      <p:sp>
+        <p:nvSpPr>
+          <p:cNvPr id="6" name="Rounded Rectangle 5"/>
+          <p:cNvSpPr/>
+          <p:nvPr/>
+        </p:nvSpPr>
+        <p:spPr>
+          <a:xfrm>
+            <a:off x="400000" y="1650000"/>
+            <a:ext cx="11400000" cy="500000"/>
+          </a:xfrm>
+          <a:prstGeom prst="roundRect">
+            <a:avLst/>
+          </a:prstGeom>
+          <a:solidFill>
+            <a:srgbClr val="E3F2FD"/>
+          </a:solidFill>
+          <a:ln>
+            <a:noFill/>
+          </a:ln>
+        </p:spPr>
+        <p:style>
+          <a:lnRef idx="1">
+            <a:schemeClr val="accent1"/>
+          </a:lnRef>
+          <a:fillRef idx="3">
+            <a:schemeClr val="accent1"/>
+          </a:fillRef>
+          <a:effectRef idx="2">
+            <a:schemeClr val="accent1"/>
+          </a:effectRef>
+          <a:fontRef idx="minor">
+            <a:schemeClr val="lt1"/>
+          </a:fontRef>
+        </p:style>
+        <p:txBody>
+          <a:bodyPr rtlCol="0" anchor="ctr" wrap="square"/>
+          <a:lstStyle/>
+          <a:p>
+            <a:pPr algn="ctr"/>
+            <a:r>
+              <a:rPr sz="1200">
+                <a:solidFill>
+                  <a:srgbClr val="2D2D2D"/>
+                </a:solidFill>
+              </a:rPr>
+              <a:t>  [Tool]                                        [Purpose]                                    [Verification]</a:t>
+            </a:r>
+          </a:p>
+        </p:txBody>
+      </p:sp>
+      <p:sp>
+        <p:nvSpPr>
+          <p:cNvPr id="7" name="Rounded Rectangle 6"/>
+          <p:cNvSpPr/>
+          <p:nvPr/>
+        </p:nvSpPr>
+        <p:spPr>
+          <a:xfrm>
+            <a:off x="400000" y="2200000"/>
+            <a:ext cx="11400000" cy="500000"/>
+          </a:xfrm>
+          <a:prstGeom prst="roundRect">
+            <a:avLst/>
+          </a:prstGeom>
+          <a:solidFill>
+            <a:srgbClr val="F0F7FF"/>
+          </a:solidFill>
+          <a:ln>
+            <a:noFill/>
+          </a:ln>
+        </p:spPr>
+        <p:style>
+          <a:lnRef idx="1">
+            <a:schemeClr val="accent1"/>
+          </a:lnRef>
+          <a:fillRef idx="3">
+            <a:schemeClr val="accent1"/>
+          </a:fillRef>
+          <a:effectRef idx="2">
+            <a:schemeClr val="accent1"/>
+          </a:effectRef>
+          <a:fontRef idx="minor">
+            <a:schemeClr val="lt1"/>
+          </a:fontRef>
+        </p:style>
+        <p:txBody>
+          <a:bodyPr rtlCol="0" anchor="ctr" wrap="square"/>
+          <a:lstStyle/>
+          <a:p>
+            <a:pPr algn="ctr"/>
+            <a:r>
+              <a:rPr sz="1200">
+                <a:solidFill>
+                  <a:srgbClr val="2D2D2D"/>
+                </a:solidFill>
+              </a:rPr>
+              <a:t>  [Tool]                                        [Purpose]                                    [Verification]</a:t>
+            </a:r>
+          </a:p>
+        </p:txBody>
+      </p:sp>
+      <p:sp>
+        <p:nvSpPr>
+          <p:cNvPr id="8" name="Rounded Rectangle 7"/>
+          <p:cNvSpPr/>
+          <p:nvPr/>
+        </p:nvSpPr>
+        <p:spPr>
+          <a:xfrm>
+            <a:off x="400000" y="2750000"/>
+            <a:ext cx="11400000" cy="500000"/>
+          </a:xfrm>
+          <a:prstGeom prst="roundRect">
+            <a:avLst/>
+          </a:prstGeom>
+          <a:solidFill>
+            <a:srgbClr val="E3F2FD"/>
+          </a:solidFill>
+          <a:ln>
+            <a:noFill/>
+          </a:ln>
+        </p:spPr>
+        <p:style>
+          <a:lnRef idx="1">
+            <a:schemeClr val="accent1"/>
+          </a:lnRef>
+          <a:fillRef idx="3">
+            <a:schemeClr val="accent1"/>
+          </a:fillRef>
+          <a:effectRef idx="2">
+            <a:schemeClr val="accent1"/>
+          </a:effectRef>
+          <a:fontRef idx="minor">
+            <a:schemeClr val="lt1"/>
+          </a:fontRef>
+        </p:style>
+        <p:txBody>
+          <a:bodyPr rtlCol="0" anchor="ctr" wrap="square"/>
+          <a:lstStyle/>
+          <a:p>
+            <a:pPr algn="ctr"/>
+            <a:r>
+              <a:rPr sz="1200">
+                <a:solidFill>
+                  <a:srgbClr val="2D2D2D"/>
+                </a:solidFill>
+              </a:rPr>
+              <a:t>  [Tool]                                        [Purpose]                                    [Verification]</a:t>
+            </a:r>
+          </a:p>
+        </p:txBody>
+      </p:sp>
+      <p:sp>
+        <p:nvSpPr>
+          <p:cNvPr id="9" name="Rounded Rectangle 8"/>
+          <p:cNvSpPr/>
+          <p:nvPr/>
+        </p:nvSpPr>
+        <p:spPr>
+          <a:xfrm>
+            <a:off x="400000" y="3600000"/>
+            <a:ext cx="11400000" cy="2000000"/>
           </a:xfrm>
           <a:prstGeom prst="roundRect">
             <a:avLst/>
@@ -12580,539 +14502,27 @@
           <a:p>
             <a:pPr algn="ctr"/>
             <a:r>
-              <a:rPr sz="1600" b="1">
+              <a:rPr sz="1400" b="1">
                 <a:solidFill>
                   <a:srgbClr val="E65100"/>
                 </a:solidFill>
               </a:rPr>
-              <a:t>Construction Data</a:t>
-            </a:r>
-          </a:p>
-          <a:p>
-            <a:pPr algn="ctr">
+              <a:t>What We Rejected or Corrected From AI Suggestions</a:t>
+            </a:r>
+          </a:p>
+          <a:p>
+            <a:pPr>
               <a:spcBef>
                 <a:spcPts val="800"/>
               </a:spcBef>
             </a:pPr>
             <a:r>
-              <a:rPr sz="1200" i="1">
-                <a:solidFill>
-                  <a:srgbClr val="555555"/>
-                </a:solidFill>
-              </a:rPr>
-              <a:t>Explored</a:t>
-            </a:r>
-          </a:p>
-          <a:p>
-            <a:pPr>
-              <a:spcBef>
-                <a:spcPts val="1200"/>
-              </a:spcBef>
-            </a:pPr>
-            <a:r>
-              <a:rPr sz="1100">
+              <a:rPr sz="1200">
                 <a:solidFill>
                   <a:srgbClr val="2D2D2D"/>
                 </a:solidFill>
               </a:rPr>
-              <a:t>•  Investigated NYC construction data as enrichment</a:t>
-            </a:r>
-          </a:p>
-          <a:p>
-            <a:pPr>
-              <a:spcBef>
-                <a:spcPts val="400"/>
-              </a:spcBef>
-            </a:pPr>
-            <a:r>
-              <a:rPr sz="1100">
-                <a:solidFill>
-                  <a:srgbClr val="2D2D2D"/>
-                </a:solidFill>
-              </a:rPr>
-              <a:t>•  [Why we moved on: data quality, coverage, or relevance]</a:t>
-            </a:r>
-          </a:p>
-        </p:txBody>
-      </p:sp>
-      <p:sp>
-        <p:nvSpPr>
-          <p:cNvPr id="6" name="Rounded Rectangle 5"/>
-          <p:cNvSpPr/>
-          <p:nvPr/>
-        </p:nvSpPr>
-        <p:spPr>
-          <a:xfrm>
-            <a:off x="4200000" y="1000000"/>
-            <a:ext cx="3500000" cy="2200000"/>
-          </a:xfrm>
-          <a:prstGeom prst="roundRect">
-            <a:avLst/>
-          </a:prstGeom>
-          <a:solidFill>
-            <a:srgbClr val="E3F2FD"/>
-          </a:solidFill>
-          <a:ln>
-            <a:noFill/>
-          </a:ln>
-        </p:spPr>
-        <p:style>
-          <a:lnRef idx="1">
-            <a:schemeClr val="accent1"/>
-          </a:lnRef>
-          <a:fillRef idx="3">
-            <a:schemeClr val="accent1"/>
-          </a:fillRef>
-          <a:effectRef idx="2">
-            <a:schemeClr val="accent1"/>
-          </a:effectRef>
-          <a:fontRef idx="minor">
-            <a:schemeClr val="lt1"/>
-          </a:fontRef>
-        </p:style>
-        <p:txBody>
-          <a:bodyPr rtlCol="0" anchor="ctr" wrap="square"/>
-          <a:lstStyle/>
-          <a:p>
-            <a:pPr algn="ctr"/>
-            <a:r>
-              <a:rPr sz="1600" b="1">
-                <a:solidFill>
-                  <a:srgbClr val="0D47A1"/>
-                </a:solidFill>
-              </a:rPr>
-              <a:t>Pattern B (ETL)</a:t>
-            </a:r>
-          </a:p>
-          <a:p>
-            <a:pPr algn="ctr">
-              <a:spcBef>
-                <a:spcPts val="800"/>
-              </a:spcBef>
-            </a:pPr>
-            <a:r>
-              <a:rPr sz="1200" i="1">
-                <a:solidFill>
-                  <a:srgbClr val="555555"/>
-                </a:solidFill>
-              </a:rPr>
-              <a:t>Built and Tested</a:t>
-            </a:r>
-          </a:p>
-          <a:p>
-            <a:pPr>
-              <a:spcBef>
-                <a:spcPts val="1200"/>
-              </a:spcBef>
-            </a:pPr>
-            <a:r>
-              <a:rPr sz="1100">
-                <a:solidFill>
-                  <a:srgbClr val="2D2D2D"/>
-                </a:solidFill>
-              </a:rPr>
-              <a:t>•  AWS Glue + PySpark for Silver layer cleaning</a:t>
-            </a:r>
-          </a:p>
-          <a:p>
-            <a:pPr>
-              <a:spcBef>
-                <a:spcPts val="400"/>
-              </a:spcBef>
-            </a:pPr>
-            <a:r>
-              <a:rPr sz="1100">
-                <a:solidFill>
-                  <a:srgbClr val="2D2D2D"/>
-                </a:solidFill>
-              </a:rPr>
-              <a:t>•  DataFrame transformations for data quality</a:t>
-            </a:r>
-          </a:p>
-          <a:p>
-            <a:pPr>
-              <a:spcBef>
-                <a:spcPts val="400"/>
-              </a:spcBef>
-            </a:pPr>
-            <a:r>
-              <a:rPr sz="1100">
-                <a:solidFill>
-                  <a:srgbClr val="2D2D2D"/>
-                </a:solidFill>
-              </a:rPr>
-              <a:t>•  [Additional Pattern B details]</a:t>
-            </a:r>
-          </a:p>
-        </p:txBody>
-      </p:sp>
-      <p:sp>
-        <p:nvSpPr>
-          <p:cNvPr id="7" name="Rounded Rectangle 6"/>
-          <p:cNvSpPr/>
-          <p:nvPr/>
-        </p:nvSpPr>
-        <p:spPr>
-          <a:xfrm>
-            <a:off x="8000000" y="1000000"/>
-            <a:ext cx="3500000" cy="2200000"/>
-          </a:xfrm>
-          <a:prstGeom prst="roundRect">
-            <a:avLst/>
-          </a:prstGeom>
-          <a:solidFill>
-            <a:srgbClr val="E8F5E9"/>
-          </a:solidFill>
-          <a:ln>
-            <a:noFill/>
-          </a:ln>
-        </p:spPr>
-        <p:style>
-          <a:lnRef idx="1">
-            <a:schemeClr val="accent1"/>
-          </a:lnRef>
-          <a:fillRef idx="3">
-            <a:schemeClr val="accent1"/>
-          </a:fillRef>
-          <a:effectRef idx="2">
-            <a:schemeClr val="accent1"/>
-          </a:effectRef>
-          <a:fontRef idx="minor">
-            <a:schemeClr val="lt1"/>
-          </a:fontRef>
-        </p:style>
-        <p:txBody>
-          <a:bodyPr rtlCol="0" anchor="ctr" wrap="square"/>
-          <a:lstStyle/>
-          <a:p>
-            <a:pPr algn="ctr"/>
-            <a:r>
-              <a:rPr sz="1600" b="1">
-                <a:solidFill>
-                  <a:srgbClr val="2E7D32"/>
-                </a:solidFill>
-              </a:rPr>
-              <a:t>Pattern A (ELT)</a:t>
-            </a:r>
-          </a:p>
-          <a:p>
-            <a:pPr algn="ctr">
-              <a:spcBef>
-                <a:spcPts val="800"/>
-              </a:spcBef>
-            </a:pPr>
-            <a:r>
-              <a:rPr sz="1200" b="1">
-                <a:solidFill>
-                  <a:srgbClr val="2E7D32"/>
-                </a:solidFill>
-              </a:rPr>
-              <a:t>Selected</a:t>
-            </a:r>
-          </a:p>
-          <a:p>
-            <a:pPr>
-              <a:spcBef>
-                <a:spcPts val="1200"/>
-              </a:spcBef>
-            </a:pPr>
-            <a:r>
-              <a:rPr sz="1100">
-                <a:solidFill>
-                  <a:srgbClr val="2D2D2D"/>
-                </a:solidFill>
-              </a:rPr>
-              <a:t>•  Snowflake + dbt, all SQL</a:t>
-            </a:r>
-          </a:p>
-          <a:p>
-            <a:pPr>
-              <a:spcBef>
-                <a:spcPts val="400"/>
-              </a:spcBef>
-            </a:pPr>
-            <a:r>
-              <a:rPr sz="1100">
-                <a:solidFill>
-                  <a:srgbClr val="2D2D2D"/>
-                </a:solidFill>
-              </a:rPr>
-              <a:t>•  Full pipeline in ~6 min, 32 tests passing</a:t>
-            </a:r>
-          </a:p>
-          <a:p>
-            <a:pPr>
-              <a:spcBef>
-                <a:spcPts val="400"/>
-              </a:spcBef>
-            </a:pPr>
-            <a:r>
-              <a:rPr sz="1100">
-                <a:solidFill>
-                  <a:srgbClr val="2D2D2D"/>
-                </a:solidFill>
-              </a:rPr>
-              <a:t>•  Idempotent, reproducible, tested</a:t>
-            </a:r>
-          </a:p>
-        </p:txBody>
-      </p:sp>
-      <p:sp>
-        <p:nvSpPr>
-          <p:cNvPr id="8" name="TextBox 7"/>
-          <p:cNvSpPr txBox="1"/>
-          <p:nvPr/>
-        </p:nvSpPr>
-        <p:spPr>
-          <a:xfrm>
-            <a:off x="3700000" y="1800000"/>
-            <a:ext cx="700000" cy="500000"/>
-          </a:xfrm>
-          <a:prstGeom prst="rect">
-            <a:avLst/>
-          </a:prstGeom>
-          <a:noFill/>
-        </p:spPr>
-        <p:txBody>
-          <a:bodyPr wrap="none">
-            <a:spAutoFit/>
-          </a:bodyPr>
-          <a:lstStyle/>
-          <a:p>
-            <a:pPr algn="ctr"/>
-            <a:r>
-              <a:rPr sz="3200" b="1">
-                <a:solidFill>
-                  <a:srgbClr val="FE3082"/>
-                </a:solidFill>
-              </a:rPr>
-              <a:t>→</a:t>
-            </a:r>
-          </a:p>
-        </p:txBody>
-      </p:sp>
-      <p:sp>
-        <p:nvSpPr>
-          <p:cNvPr id="9" name="TextBox 8"/>
-          <p:cNvSpPr txBox="1"/>
-          <p:nvPr/>
-        </p:nvSpPr>
-        <p:spPr>
-          <a:xfrm>
-            <a:off x="7500000" y="1800000"/>
-            <a:ext cx="700000" cy="500000"/>
-          </a:xfrm>
-          <a:prstGeom prst="rect">
-            <a:avLst/>
-          </a:prstGeom>
-          <a:noFill/>
-        </p:spPr>
-        <p:txBody>
-          <a:bodyPr wrap="none">
-            <a:spAutoFit/>
-          </a:bodyPr>
-          <a:lstStyle/>
-          <a:p>
-            <a:pPr algn="ctr"/>
-            <a:r>
-              <a:rPr sz="3200" b="1">
-                <a:solidFill>
-                  <a:srgbClr val="FE3082"/>
-                </a:solidFill>
-              </a:rPr>
-              <a:t>→</a:t>
-            </a:r>
-          </a:p>
-        </p:txBody>
-      </p:sp>
-      <p:sp>
-        <p:nvSpPr>
-          <p:cNvPr id="10" name="Rounded Rectangle 9"/>
-          <p:cNvSpPr/>
-          <p:nvPr/>
-        </p:nvSpPr>
-        <p:spPr>
-          <a:xfrm>
-            <a:off x="400000" y="3500000"/>
-            <a:ext cx="11400000" cy="1200000"/>
-          </a:xfrm>
-          <a:prstGeom prst="roundRect">
-            <a:avLst/>
-          </a:prstGeom>
-          <a:solidFill>
-            <a:srgbClr val="FCE4EC"/>
-          </a:solidFill>
-          <a:ln>
-            <a:noFill/>
-          </a:ln>
-        </p:spPr>
-        <p:style>
-          <a:lnRef idx="1">
-            <a:schemeClr val="accent1"/>
-          </a:lnRef>
-          <a:fillRef idx="3">
-            <a:schemeClr val="accent1"/>
-          </a:fillRef>
-          <a:effectRef idx="2">
-            <a:schemeClr val="accent1"/>
-          </a:effectRef>
-          <a:fontRef idx="minor">
-            <a:schemeClr val="lt1"/>
-          </a:fontRef>
-        </p:style>
-        <p:txBody>
-          <a:bodyPr rtlCol="0" anchor="ctr" wrap="square"/>
-          <a:lstStyle/>
-          <a:p>
-            <a:pPr algn="ctr"/>
-            <a:r>
-              <a:rPr sz="1400" b="1">
-                <a:solidFill>
-                  <a:srgbClr val="FE3082"/>
-                </a:solidFill>
-              </a:rPr>
-              <a:t>Why We Chose Pattern A</a:t>
-            </a:r>
-          </a:p>
-          <a:p>
-            <a:pPr>
-              <a:spcBef>
-                <a:spcPts val="600"/>
-              </a:spcBef>
-            </a:pPr>
-            <a:r>
-              <a:rPr sz="1200">
-                <a:solidFill>
-                  <a:srgbClr val="2D2D2D"/>
-                </a:solidFill>
-              </a:rPr>
-              <a:t>•  Strongest reliability guarantee within a one-week sprint (fewer moving parts, fewer failure modes)</a:t>
-            </a:r>
-          </a:p>
-          <a:p>
-            <a:pPr>
-              <a:spcBef>
-                <a:spcPts val="400"/>
-              </a:spcBef>
-            </a:pPr>
-            <a:r>
-              <a:rPr sz="1200">
-                <a:solidFill>
-                  <a:srgbClr val="2D2D2D"/>
-                </a:solidFill>
-              </a:rPr>
-              <a:t>•  Team's SQL strength meant faster iteration and easier debugging</a:t>
-            </a:r>
-          </a:p>
-          <a:p>
-            <a:pPr>
-              <a:spcBef>
-                <a:spcPts val="400"/>
-              </a:spcBef>
-            </a:pPr>
-            <a:r>
-              <a:rPr sz="1200">
-                <a:solidFill>
-                  <a:srgbClr val="2D2D2D"/>
-                </a:solidFill>
-              </a:rPr>
-              <a:t>•  All work from Pattern B exploration informed our data quality understanding</a:t>
-            </a:r>
-          </a:p>
-        </p:txBody>
-      </p:sp>
-      <p:sp>
-        <p:nvSpPr>
-          <p:cNvPr id="11" name="Rounded Rectangle 10"/>
-          <p:cNvSpPr/>
-          <p:nvPr/>
-        </p:nvSpPr>
-        <p:spPr>
-          <a:xfrm>
-            <a:off x="400000" y="5000000"/>
-            <a:ext cx="11400000" cy="1200000"/>
-          </a:xfrm>
-          <a:prstGeom prst="roundRect">
-            <a:avLst/>
-          </a:prstGeom>
-          <a:solidFill>
-            <a:srgbClr val="E3F2FD"/>
-          </a:solidFill>
-          <a:ln>
-            <a:noFill/>
-          </a:ln>
-        </p:spPr>
-        <p:style>
-          <a:lnRef idx="1">
-            <a:schemeClr val="accent1"/>
-          </a:lnRef>
-          <a:fillRef idx="3">
-            <a:schemeClr val="accent1"/>
-          </a:fillRef>
-          <a:effectRef idx="2">
-            <a:schemeClr val="accent1"/>
-          </a:effectRef>
-          <a:fontRef idx="minor">
-            <a:schemeClr val="lt1"/>
-          </a:fontRef>
-        </p:style>
-        <p:txBody>
-          <a:bodyPr rtlCol="0" anchor="ctr" wrap="square"/>
-          <a:lstStyle/>
-          <a:p>
-            <a:pPr algn="ctr"/>
-            <a:r>
-              <a:rPr sz="1400" b="1">
-                <a:solidFill>
-                  <a:srgbClr val="0D47A1"/>
-                </a:solidFill>
-              </a:rPr>
-              <a:t>What the Exploration Taught Us</a:t>
-            </a:r>
-          </a:p>
-          <a:p>
-            <a:pPr>
-              <a:spcBef>
-                <a:spcPts val="600"/>
-              </a:spcBef>
-            </a:pPr>
-            <a:r>
-              <a:rPr sz="1200">
-                <a:solidFill>
-                  <a:srgbClr val="2D2D2D"/>
-                </a:solidFill>
-              </a:rPr>
-              <a:t>•  [Insight from construction data exploration that influenced final approach]</a:t>
-            </a:r>
-          </a:p>
-          <a:p>
-            <a:pPr>
-              <a:spcBef>
-                <a:spcPts val="400"/>
-              </a:spcBef>
-            </a:pPr>
-            <a:r>
-              <a:rPr sz="1200">
-                <a:solidFill>
-                  <a:srgbClr val="2D2D2D"/>
-                </a:solidFill>
-              </a:rPr>
-              <a:t>•  [Insight from Pattern B work, e.g., data quality issues discovered during Spark cleaning]</a:t>
-            </a:r>
-          </a:p>
-          <a:p>
-            <a:pPr>
-              <a:spcBef>
-                <a:spcPts val="400"/>
-              </a:spcBef>
-            </a:pPr>
-            <a:r>
-              <a:rPr sz="1200">
-                <a:solidFill>
-                  <a:srgbClr val="2D2D2D"/>
-                </a:solidFill>
-              </a:rPr>
-              <a:t>•  [How exploring multiple paths made our final architecture decision more defensible]</a:t>
+              <a:t>[Describe corrections made, things that required manual verification, etc.]</a:t>
             </a:r>
           </a:p>
         </p:txBody>

--- a/docs/Capstone_Presentation.pptx
+++ b/docs/Capstone_Presentation.pptx
@@ -17,6 +17,7 @@
     <p:sldId id="262" r:id="rId33"/>
     <p:sldId id="263" r:id="rId34"/>
     <p:sldId id="264" r:id="rId35"/>
+    <p:sldId id="280" r:id="rId12"/>
     <p:sldId id="265" r:id="rId36"/>
     <p:sldId id="266" r:id="rId26"/>
     <p:sldId id="267" r:id="rId25"/>
@@ -535,6 +536,1416 @@
     </a:lvl9pPr>
   </p:notesStyle>
 </p:notesMaster>
+</file>
+
+<file path=ppt/notesSlides/notesSlide1.xml><?xml version="1.0" encoding="utf-8"?>
+<p:notes xmlns:a="http://schemas.openxmlformats.org/drawingml/2006/main" xmlns:p="http://schemas.openxmlformats.org/presentationml/2006/main" xmlns:r="http://schemas.openxmlformats.org/officeDocument/2006/relationships">
+  <p:cSld>
+    <p:spTree>
+      <p:nvGrpSpPr>
+        <p:cNvPr id="1" name=""/>
+        <p:cNvGrpSpPr/>
+        <p:nvPr/>
+      </p:nvGrpSpPr>
+      <p:grpSpPr>
+        <a:xfrm>
+          <a:off x="0" y="0"/>
+          <a:ext cx="0" cy="0"/>
+          <a:chOff x="0" y="0"/>
+          <a:chExt cx="0" cy="0"/>
+        </a:xfrm>
+      </p:grpSpPr>
+      <p:sp>
+        <p:nvSpPr>
+          <p:cNvPr id="2" name="Slide Image Placeholder 1"/>
+          <p:cNvSpPr>
+            <a:spLocks noGrp="1"/>
+          </p:cNvSpPr>
+          <p:nvPr>
+            <p:ph type="sldImg" idx="2"/>
+          </p:nvPr>
+        </p:nvSpPr>
+        <p:spPr/>
+      </p:sp>
+      <p:sp>
+        <p:nvSpPr>
+          <p:cNvPr id="3" name="Notes Placeholder 2"/>
+          <p:cNvSpPr>
+            <a:spLocks noGrp="1"/>
+          </p:cNvSpPr>
+          <p:nvPr>
+            <p:ph type="body" idx="3" sz="quarter"/>
+          </p:nvPr>
+        </p:nvSpPr>
+        <p:spPr/>
+        <p:txBody>
+          <a:bodyPr/>
+          <a:lstStyle/>
+          <a:p>
+            <a:r>
+              <a:t>Good morning everyone. We are Team AMO. Our project answers a simple but important question: when the weather turns bad in New York City, what happens to taxi demand, and has that pattern changed over the past year?</a:t>
+            </a:r>
+            <a:br/>
+            <a:br/>
+            <a:r>
+              <a:t>We analyzed over 38 million taxi trips across ten months, enriched them with hourly weather data, and built a pipeline that anyone on the team can re-run with a single command. Here is what we found.</a:t>
+            </a:r>
+          </a:p>
+        </p:txBody>
+      </p:sp>
+      <p:sp>
+        <p:nvSpPr>
+          <p:cNvPr id="4" name="Slide Number Placeholder 3"/>
+          <p:cNvSpPr>
+            <a:spLocks noGrp="1"/>
+          </p:cNvSpPr>
+          <p:nvPr>
+            <p:ph type="sldNum" idx="5" sz="quarter"/>
+          </p:nvPr>
+        </p:nvSpPr>
+        <p:spPr/>
+      </p:sp>
+    </p:spTree>
+  </p:cSld>
+  <p:clrMapOvr>
+    <a:masterClrMapping/>
+  </p:clrMapOvr>
+</p:notes>
+</file>
+
+<file path=ppt/notesSlides/notesSlide10.xml><?xml version="1.0" encoding="utf-8"?>
+<p:notes xmlns:a="http://schemas.openxmlformats.org/drawingml/2006/main" xmlns:p="http://schemas.openxmlformats.org/presentationml/2006/main" xmlns:r="http://schemas.openxmlformats.org/officeDocument/2006/relationships">
+  <p:cSld>
+    <p:spTree>
+      <p:nvGrpSpPr>
+        <p:cNvPr id="1" name=""/>
+        <p:cNvGrpSpPr/>
+        <p:nvPr/>
+      </p:nvGrpSpPr>
+      <p:grpSpPr>
+        <a:xfrm>
+          <a:off x="0" y="0"/>
+          <a:ext cx="0" cy="0"/>
+          <a:chOff x="0" y="0"/>
+          <a:chExt cx="0" cy="0"/>
+        </a:xfrm>
+      </p:grpSpPr>
+      <p:sp>
+        <p:nvSpPr>
+          <p:cNvPr id="2" name="Slide Image Placeholder 1"/>
+          <p:cNvSpPr>
+            <a:spLocks noGrp="1"/>
+          </p:cNvSpPr>
+          <p:nvPr>
+            <p:ph type="sldImg" idx="2"/>
+          </p:nvPr>
+        </p:nvSpPr>
+        <p:spPr/>
+      </p:sp>
+      <p:sp>
+        <p:nvSpPr>
+          <p:cNvPr id="3" name="Notes Placeholder 2"/>
+          <p:cNvSpPr>
+            <a:spLocks noGrp="1"/>
+          </p:cNvSpPr>
+          <p:nvPr>
+            <p:ph type="body" idx="3" sz="quarter"/>
+          </p:nvPr>
+        </p:nvSpPr>
+        <p:spPr/>
+        <p:txBody>
+          <a:bodyPr/>
+          <a:lstStyle/>
+          <a:p>
+            <a:r>
+              <a:t>Now, data quality. This is where trust in our findings gets built or lost.</a:t>
+            </a:r>
+          </a:p>
+        </p:txBody>
+      </p:sp>
+      <p:sp>
+        <p:nvSpPr>
+          <p:cNvPr id="4" name="Slide Number Placeholder 3"/>
+          <p:cNvSpPr>
+            <a:spLocks noGrp="1"/>
+          </p:cNvSpPr>
+          <p:nvPr>
+            <p:ph type="sldNum" idx="5" sz="quarter"/>
+          </p:nvPr>
+        </p:nvSpPr>
+        <p:spPr/>
+      </p:sp>
+    </p:spTree>
+  </p:cSld>
+  <p:clrMapOvr>
+    <a:masterClrMapping/>
+  </p:clrMapOvr>
+</p:notes>
+</file>
+
+<file path=ppt/notesSlides/notesSlide11.xml><?xml version="1.0" encoding="utf-8"?>
+<p:notes xmlns:a="http://schemas.openxmlformats.org/drawingml/2006/main" xmlns:p="http://schemas.openxmlformats.org/presentationml/2006/main" xmlns:r="http://schemas.openxmlformats.org/officeDocument/2006/relationships">
+  <p:cSld>
+    <p:spTree>
+      <p:nvGrpSpPr>
+        <p:cNvPr id="1" name=""/>
+        <p:cNvGrpSpPr/>
+        <p:nvPr/>
+      </p:nvGrpSpPr>
+      <p:grpSpPr>
+        <a:xfrm>
+          <a:off x="0" y="0"/>
+          <a:ext cx="0" cy="0"/>
+          <a:chOff x="0" y="0"/>
+          <a:chExt cx="0" cy="0"/>
+        </a:xfrm>
+      </p:grpSpPr>
+      <p:sp>
+        <p:nvSpPr>
+          <p:cNvPr id="2" name="Slide Image Placeholder 1"/>
+          <p:cNvSpPr>
+            <a:spLocks noGrp="1"/>
+          </p:cNvSpPr>
+          <p:nvPr>
+            <p:ph type="sldImg" idx="2"/>
+          </p:nvPr>
+        </p:nvSpPr>
+        <p:spPr/>
+      </p:sp>
+      <p:sp>
+        <p:nvSpPr>
+          <p:cNvPr id="3" name="Notes Placeholder 2"/>
+          <p:cNvSpPr>
+            <a:spLocks noGrp="1"/>
+          </p:cNvSpPr>
+          <p:nvPr>
+            <p:ph type="body" idx="3" sz="quarter"/>
+          </p:nvPr>
+        </p:nvSpPr>
+        <p:spPr/>
+        <p:txBody>
+          <a:bodyPr/>
+          <a:lstStyle/>
+          <a:p>
+            <a:r>
+              <a:t>We loaded 39.2 million rows into Bronze and lost zero in the process. That exact reconciliation is the first thing we verified.</a:t>
+            </a:r>
+            <a:br/>
+            <a:br/>
+            <a:r>
+              <a:t>In Silver, we flagged about 1.17 million rows as invalid, which is 3 percent of the total. These include trips with timestamps outside our study window, negative fares, distances over 100 miles, and trips where the dropoff happened before the pickup. We keep these flagged rows in Silver for traceability but filter them out in Gold.</a:t>
+            </a:r>
+            <a:br/>
+            <a:br/>
+            <a:r>
+              <a:t>We also found two issues not listed in the data catalog. First, over 9 million trips have a payment type of zero, which is undocumented. Second, 9.2 million trips have null or zero passenger count. We kept both of these because they do not invalidate the trip itself, but we flag them and note the limitation.</a:t>
+            </a:r>
+            <a:br/>
+            <a:br/>
+            <a:r>
+              <a:t>The cash tip trap is important to call out. Tip amounts are only recorded for credit card payments. Cash tips show as zero. This means any tip analysis we do only reflects credit card transactions, and we state that explicitly wherever tips appear in our findings.</a:t>
+            </a:r>
+            <a:br/>
+            <a:br/>
+            <a:r>
+              <a:t>Our philosophy is flag, do not delete. Every row gets a validity flag and a reason field listing which checks failed. This lets us report exact counts, show our reasoning, and still filter cleanly in the final layer.</a:t>
+            </a:r>
+          </a:p>
+        </p:txBody>
+      </p:sp>
+      <p:sp>
+        <p:nvSpPr>
+          <p:cNvPr id="4" name="Slide Number Placeholder 3"/>
+          <p:cNvSpPr>
+            <a:spLocks noGrp="1"/>
+          </p:cNvSpPr>
+          <p:nvPr>
+            <p:ph type="sldNum" idx="5" sz="quarter"/>
+          </p:nvPr>
+        </p:nvSpPr>
+        <p:spPr/>
+      </p:sp>
+    </p:spTree>
+  </p:cSld>
+  <p:clrMapOvr>
+    <a:masterClrMapping/>
+  </p:clrMapOvr>
+</p:notes>
+</file>
+
+<file path=ppt/notesSlides/notesSlide12.xml><?xml version="1.0" encoding="utf-8"?>
+<p:notes xmlns:a="http://schemas.openxmlformats.org/drawingml/2006/main" xmlns:p="http://schemas.openxmlformats.org/presentationml/2006/main" xmlns:r="http://schemas.openxmlformats.org/officeDocument/2006/relationships">
+  <p:cSld>
+    <p:spTree>
+      <p:nvGrpSpPr>
+        <p:cNvPr id="1" name=""/>
+        <p:cNvGrpSpPr/>
+        <p:nvPr/>
+      </p:nvGrpSpPr>
+      <p:grpSpPr>
+        <a:xfrm>
+          <a:off x="0" y="0"/>
+          <a:ext cx="0" cy="0"/>
+          <a:chOff x="0" y="0"/>
+          <a:chExt cx="0" cy="0"/>
+        </a:xfrm>
+      </p:grpSpPr>
+      <p:sp>
+        <p:nvSpPr>
+          <p:cNvPr id="2" name="Slide Image Placeholder 1"/>
+          <p:cNvSpPr>
+            <a:spLocks noGrp="1"/>
+          </p:cNvSpPr>
+          <p:nvPr>
+            <p:ph type="sldImg" idx="2"/>
+          </p:nvPr>
+        </p:nvSpPr>
+        <p:spPr/>
+      </p:sp>
+      <p:sp>
+        <p:nvSpPr>
+          <p:cNvPr id="3" name="Notes Placeholder 2"/>
+          <p:cNvSpPr>
+            <a:spLocks noGrp="1"/>
+          </p:cNvSpPr>
+          <p:nvPr>
+            <p:ph type="body" idx="3" sz="quarter"/>
+          </p:nvPr>
+        </p:nvSpPr>
+        <p:spPr/>
+        <p:txBody>
+          <a:bodyPr/>
+          <a:lstStyle/>
+          <a:p>
+            <a:r>
+              <a:t>With clean, validated data in hand, here is what we found when comparing 2025 to 2026.</a:t>
+            </a:r>
+          </a:p>
+        </p:txBody>
+      </p:sp>
+      <p:sp>
+        <p:nvSpPr>
+          <p:cNvPr id="4" name="Slide Number Placeholder 3"/>
+          <p:cNvSpPr>
+            <a:spLocks noGrp="1"/>
+          </p:cNvSpPr>
+          <p:nvPr>
+            <p:ph type="sldNum" idx="5" sz="quarter"/>
+          </p:nvPr>
+        </p:nvSpPr>
+        <p:spPr/>
+      </p:sp>
+    </p:spTree>
+  </p:cSld>
+  <p:clrMapOvr>
+    <a:masterClrMapping/>
+  </p:clrMapOvr>
+</p:notes>
+</file>
+
+<file path=ppt/notesSlides/notesSlide13.xml><?xml version="1.0" encoding="utf-8"?>
+<p:notes xmlns:a="http://schemas.openxmlformats.org/drawingml/2006/main" xmlns:p="http://schemas.openxmlformats.org/presentationml/2006/main" xmlns:r="http://schemas.openxmlformats.org/officeDocument/2006/relationships">
+  <p:cSld>
+    <p:spTree>
+      <p:nvGrpSpPr>
+        <p:cNvPr id="1" name=""/>
+        <p:cNvGrpSpPr/>
+        <p:nvPr/>
+      </p:nvGrpSpPr>
+      <p:grpSpPr>
+        <a:xfrm>
+          <a:off x="0" y="0"/>
+          <a:ext cx="0" cy="0"/>
+          <a:chOff x="0" y="0"/>
+          <a:chExt cx="0" cy="0"/>
+        </a:xfrm>
+      </p:grpSpPr>
+      <p:sp>
+        <p:nvSpPr>
+          <p:cNvPr id="2" name="Slide Image Placeholder 1"/>
+          <p:cNvSpPr>
+            <a:spLocks noGrp="1"/>
+          </p:cNvSpPr>
+          <p:nvPr>
+            <p:ph type="sldImg" idx="2"/>
+          </p:nvPr>
+        </p:nvSpPr>
+        <p:spPr/>
+      </p:sp>
+      <p:sp>
+        <p:nvSpPr>
+          <p:cNvPr id="3" name="Notes Placeholder 2"/>
+          <p:cNvSpPr>
+            <a:spLocks noGrp="1"/>
+          </p:cNvSpPr>
+          <p:nvPr>
+            <p:ph type="body" idx="3" sz="quarter"/>
+          </p:nvPr>
+        </p:nvSpPr>
+        <p:spPr/>
+        <p:txBody>
+          <a:bodyPr/>
+          <a:lstStyle/>
+          <a:p>
+            <a:r>
+              <a:t>Let us look under the hood at the technical decisions that make this pipeline reliable and reproducible.</a:t>
+            </a:r>
+          </a:p>
+        </p:txBody>
+      </p:sp>
+      <p:sp>
+        <p:nvSpPr>
+          <p:cNvPr id="4" name="Slide Number Placeholder 3"/>
+          <p:cNvSpPr>
+            <a:spLocks noGrp="1"/>
+          </p:cNvSpPr>
+          <p:nvPr>
+            <p:ph type="sldNum" idx="5" sz="quarter"/>
+          </p:nvPr>
+        </p:nvSpPr>
+        <p:spPr/>
+      </p:sp>
+    </p:spTree>
+  </p:cSld>
+  <p:clrMapOvr>
+    <a:masterClrMapping/>
+  </p:clrMapOvr>
+</p:notes>
+</file>
+
+<file path=ppt/notesSlides/notesSlide14.xml><?xml version="1.0" encoding="utf-8"?>
+<p:notes xmlns:a="http://schemas.openxmlformats.org/drawingml/2006/main" xmlns:p="http://schemas.openxmlformats.org/presentationml/2006/main" xmlns:r="http://schemas.openxmlformats.org/officeDocument/2006/relationships">
+  <p:cSld>
+    <p:spTree>
+      <p:nvGrpSpPr>
+        <p:cNvPr id="1" name=""/>
+        <p:cNvGrpSpPr/>
+        <p:nvPr/>
+      </p:nvGrpSpPr>
+      <p:grpSpPr>
+        <a:xfrm>
+          <a:off x="0" y="0"/>
+          <a:ext cx="0" cy="0"/>
+          <a:chOff x="0" y="0"/>
+          <a:chExt cx="0" cy="0"/>
+        </a:xfrm>
+      </p:grpSpPr>
+      <p:sp>
+        <p:nvSpPr>
+          <p:cNvPr id="2" name="Slide Image Placeholder 1"/>
+          <p:cNvSpPr>
+            <a:spLocks noGrp="1"/>
+          </p:cNvSpPr>
+          <p:nvPr>
+            <p:ph type="sldImg" idx="2"/>
+          </p:nvPr>
+        </p:nvSpPr>
+        <p:spPr/>
+      </p:sp>
+      <p:sp>
+        <p:nvSpPr>
+          <p:cNvPr id="3" name="Notes Placeholder 2"/>
+          <p:cNvSpPr>
+            <a:spLocks noGrp="1"/>
+          </p:cNvSpPr>
+          <p:nvPr>
+            <p:ph type="body" idx="3" sz="quarter"/>
+          </p:nvPr>
+        </p:nvSpPr>
+        <p:spPr/>
+        <p:txBody>
+          <a:bodyPr/>
+          <a:lstStyle/>
+          <a:p>
+            <a:r>
+              <a:t>Our dbt project has four model layers. Staging tables clean and conform the raw data. The fact table enriches valid trips with borough names and weather. The mart pre-aggregates for the dashboard. And dimension tables provide lookup data for drilldowns.</a:t>
+            </a:r>
+            <a:br/>
+            <a:br/>
+            <a:r>
+              <a:t>We have 32 automated tests that run every time we build. These check that key columns are never null, that dimension keys are unique, that categorical values are within expected ranges, and that foreign key relationships hold. One test intentionally warns rather than fails: it documents that payment type zero exists but does not block the pipeline.</a:t>
+            </a:r>
+            <a:br/>
+            <a:br/>
+            <a:r>
+              <a:t>Orchestration is a single Python script. It creates the Bronze infrastructure, loads data from S3, fetches weather from the API, verifies row counts, runs dbt to build all models, and then runs all tests. End to end, about six minutes. If anything fails, it stops immediately with a clear message.</a:t>
+            </a:r>
+            <a:br/>
+            <a:br/>
+            <a:r>
+              <a:t>The key transformations include unioning Yellow and Green taxi data with their different column names, adding data quality flags, deriving time-based features like rush hour and weekend indicators, and joining to weather and zone data.</a:t>
+            </a:r>
+          </a:p>
+        </p:txBody>
+      </p:sp>
+      <p:sp>
+        <p:nvSpPr>
+          <p:cNvPr id="4" name="Slide Number Placeholder 3"/>
+          <p:cNvSpPr>
+            <a:spLocks noGrp="1"/>
+          </p:cNvSpPr>
+          <p:nvPr>
+            <p:ph type="sldNum" idx="5" sz="quarter"/>
+          </p:nvPr>
+        </p:nvSpPr>
+        <p:spPr/>
+      </p:sp>
+    </p:spTree>
+  </p:cSld>
+  <p:clrMapOvr>
+    <a:masterClrMapping/>
+  </p:clrMapOvr>
+</p:notes>
+</file>
+
+<file path=ppt/notesSlides/notesSlide15.xml><?xml version="1.0" encoding="utf-8"?>
+<p:notes xmlns:a="http://schemas.openxmlformats.org/drawingml/2006/main" xmlns:p="http://schemas.openxmlformats.org/presentationml/2006/main" xmlns:r="http://schemas.openxmlformats.org/officeDocument/2006/relationships">
+  <p:cSld>
+    <p:spTree>
+      <p:nvGrpSpPr>
+        <p:cNvPr id="1" name=""/>
+        <p:cNvGrpSpPr/>
+        <p:nvPr/>
+      </p:nvGrpSpPr>
+      <p:grpSpPr>
+        <a:xfrm>
+          <a:off x="0" y="0"/>
+          <a:ext cx="0" cy="0"/>
+          <a:chOff x="0" y="0"/>
+          <a:chExt cx="0" cy="0"/>
+        </a:xfrm>
+      </p:grpSpPr>
+      <p:sp>
+        <p:nvSpPr>
+          <p:cNvPr id="2" name="Slide Image Placeholder 1"/>
+          <p:cNvSpPr>
+            <a:spLocks noGrp="1"/>
+          </p:cNvSpPr>
+          <p:nvPr>
+            <p:ph type="sldImg" idx="2"/>
+          </p:nvPr>
+        </p:nvSpPr>
+        <p:spPr/>
+      </p:sp>
+      <p:sp>
+        <p:nvSpPr>
+          <p:cNvPr id="3" name="Notes Placeholder 2"/>
+          <p:cNvSpPr>
+            <a:spLocks noGrp="1"/>
+          </p:cNvSpPr>
+          <p:nvPr>
+            <p:ph type="body" idx="3" sz="quarter"/>
+          </p:nvPr>
+        </p:nvSpPr>
+        <p:spPr/>
+        <p:txBody>
+          <a:bodyPr/>
+          <a:lstStyle/>
+          <a:p>
+            <a:r>
+              <a:t>On cost and performance: our pipeline runs on a shared Snowflake warehouse. The full rebuild takes about six minutes, and most of that is the dbt build processing 39 million rows through Silver and Gold.</a:t>
+            </a:r>
+            <a:br/>
+            <a:br/>
+            <a:r>
+              <a:t>Dashboard queries against our mart table return in under one second because it is only 35,000 pre-aggregated rows. We designed it this way specifically so that Tableau never needs to scan the full 38 million row fact table.</a:t>
+            </a:r>
+            <a:br/>
+            <a:br/>
+            <a:r>
+              <a:t>If we scaled this to ten times the data volume, we would make three changes. First, switch from batch loading to Snowpipe for continuous ingestion. Second, move to incremental dbt models that append new data rather than rebuilding everything. Third, scale the warehouse up or use multi-cluster for concurrent users. The architecture supports all of these without a redesign.</a:t>
+            </a:r>
+          </a:p>
+        </p:txBody>
+      </p:sp>
+      <p:sp>
+        <p:nvSpPr>
+          <p:cNvPr id="4" name="Slide Number Placeholder 3"/>
+          <p:cNvSpPr>
+            <a:spLocks noGrp="1"/>
+          </p:cNvSpPr>
+          <p:nvPr>
+            <p:ph type="sldNum" idx="5" sz="quarter"/>
+          </p:nvPr>
+        </p:nvSpPr>
+        <p:spPr/>
+      </p:sp>
+    </p:spTree>
+  </p:cSld>
+  <p:clrMapOvr>
+    <a:masterClrMapping/>
+  </p:clrMapOvr>
+</p:notes>
+</file>
+
+<file path=ppt/notesSlides/notesSlide16.xml><?xml version="1.0" encoding="utf-8"?>
+<p:notes xmlns:a="http://schemas.openxmlformats.org/drawingml/2006/main" xmlns:p="http://schemas.openxmlformats.org/presentationml/2006/main" xmlns:r="http://schemas.openxmlformats.org/officeDocument/2006/relationships">
+  <p:cSld>
+    <p:spTree>
+      <p:nvGrpSpPr>
+        <p:cNvPr id="1" name=""/>
+        <p:cNvGrpSpPr/>
+        <p:nvPr/>
+      </p:nvGrpSpPr>
+      <p:grpSpPr>
+        <a:xfrm>
+          <a:off x="0" y="0"/>
+          <a:ext cx="0" cy="0"/>
+          <a:chOff x="0" y="0"/>
+          <a:chExt cx="0" cy="0"/>
+        </a:xfrm>
+      </p:grpSpPr>
+      <p:sp>
+        <p:nvSpPr>
+          <p:cNvPr id="2" name="Slide Image Placeholder 1"/>
+          <p:cNvSpPr>
+            <a:spLocks noGrp="1"/>
+          </p:cNvSpPr>
+          <p:nvPr>
+            <p:ph type="sldImg" idx="2"/>
+          </p:nvPr>
+        </p:nvSpPr>
+        <p:spPr/>
+      </p:sp>
+      <p:sp>
+        <p:nvSpPr>
+          <p:cNvPr id="3" name="Notes Placeholder 2"/>
+          <p:cNvSpPr>
+            <a:spLocks noGrp="1"/>
+          </p:cNvSpPr>
+          <p:nvPr>
+            <p:ph type="body" idx="3" sz="quarter"/>
+          </p:nvPr>
+        </p:nvSpPr>
+        <p:spPr/>
+        <p:txBody>
+          <a:bodyPr/>
+          <a:lstStyle/>
+          <a:p>
+            <a:r>
+              <a:t>Finally, where we would take this next and what we recommend.</a:t>
+            </a:r>
+          </a:p>
+        </p:txBody>
+      </p:sp>
+      <p:sp>
+        <p:nvSpPr>
+          <p:cNvPr id="4" name="Slide Number Placeholder 3"/>
+          <p:cNvSpPr>
+            <a:spLocks noGrp="1"/>
+          </p:cNvSpPr>
+          <p:nvPr>
+            <p:ph type="sldNum" idx="5" sz="quarter"/>
+          </p:nvPr>
+        </p:nvSpPr>
+        <p:spPr/>
+      </p:sp>
+    </p:spTree>
+  </p:cSld>
+  <p:clrMapOvr>
+    <a:masterClrMapping/>
+  </p:clrMapOvr>
+</p:notes>
+</file>
+
+<file path=ppt/notesSlides/notesSlide17.xml><?xml version="1.0" encoding="utf-8"?>
+<p:notes xmlns:a="http://schemas.openxmlformats.org/drawingml/2006/main" xmlns:p="http://schemas.openxmlformats.org/presentationml/2006/main" xmlns:r="http://schemas.openxmlformats.org/officeDocument/2006/relationships">
+  <p:cSld>
+    <p:spTree>
+      <p:nvGrpSpPr>
+        <p:cNvPr id="1" name=""/>
+        <p:cNvGrpSpPr/>
+        <p:nvPr/>
+      </p:nvGrpSpPr>
+      <p:grpSpPr>
+        <a:xfrm>
+          <a:off x="0" y="0"/>
+          <a:ext cx="0" cy="0"/>
+          <a:chOff x="0" y="0"/>
+          <a:chExt cx="0" cy="0"/>
+        </a:xfrm>
+      </p:grpSpPr>
+      <p:sp>
+        <p:nvSpPr>
+          <p:cNvPr id="2" name="Slide Image Placeholder 1"/>
+          <p:cNvSpPr>
+            <a:spLocks noGrp="1"/>
+          </p:cNvSpPr>
+          <p:nvPr>
+            <p:ph type="sldImg" idx="2"/>
+          </p:nvPr>
+        </p:nvSpPr>
+        <p:spPr/>
+      </p:sp>
+      <p:sp>
+        <p:nvSpPr>
+          <p:cNvPr id="3" name="Notes Placeholder 2"/>
+          <p:cNvSpPr>
+            <a:spLocks noGrp="1"/>
+          </p:cNvSpPr>
+          <p:nvPr>
+            <p:ph type="body" idx="3" sz="quarter"/>
+          </p:nvPr>
+        </p:nvSpPr>
+        <p:spPr/>
+        <p:txBody>
+          <a:bodyPr/>
+          <a:lstStyle/>
+          <a:p>
+            <a:r>
+              <a:t>We see three natural next steps.</a:t>
+            </a:r>
+            <a:br/>
+            <a:br/>
+            <a:r>
+              <a:t>The highest impact is real-time ingestion. Right now our pipeline runs on demand. With Snowpipe and streams, new trip data would flow in continuously, giving fleet operators live demand signals during active storms rather than waiting for a batch.</a:t>
+            </a:r>
+            <a:br/>
+            <a:br/>
+            <a:r>
+              <a:t>Second, we could add machine learning forecasting to predict demand drops by borough before a storm hits, rather than just reporting what happened after the fact.</a:t>
+            </a:r>
+            <a:br/>
+            <a:br/>
+            <a:r>
+              <a:t>Third, this pipeline is designed to be replicable. The same architecture could serve Chicago, Boston, or any city with similar taxi and weather data. Each new city would take a few sprints to onboard.</a:t>
+            </a:r>
+            <a:br/>
+            <a:br/>
+            <a:r>
+              <a:t>The highest impact for the least effort is real-time ingestion, so that is what we would prioritize.</a:t>
+            </a:r>
+          </a:p>
+        </p:txBody>
+      </p:sp>
+      <p:sp>
+        <p:nvSpPr>
+          <p:cNvPr id="4" name="Slide Number Placeholder 3"/>
+          <p:cNvSpPr>
+            <a:spLocks noGrp="1"/>
+          </p:cNvSpPr>
+          <p:nvPr>
+            <p:ph type="sldNum" idx="5" sz="quarter"/>
+          </p:nvPr>
+        </p:nvSpPr>
+        <p:spPr/>
+      </p:sp>
+    </p:spTree>
+  </p:cSld>
+  <p:clrMapOvr>
+    <a:masterClrMapping/>
+  </p:clrMapOvr>
+</p:notes>
+</file>
+
+<file path=ppt/notesSlides/notesSlide18.xml><?xml version="1.0" encoding="utf-8"?>
+<p:notes xmlns:a="http://schemas.openxmlformats.org/drawingml/2006/main" xmlns:p="http://schemas.openxmlformats.org/presentationml/2006/main" xmlns:r="http://schemas.openxmlformats.org/officeDocument/2006/relationships">
+  <p:cSld>
+    <p:spTree>
+      <p:nvGrpSpPr>
+        <p:cNvPr id="1" name=""/>
+        <p:cNvGrpSpPr/>
+        <p:nvPr/>
+      </p:nvGrpSpPr>
+      <p:grpSpPr>
+        <a:xfrm>
+          <a:off x="0" y="0"/>
+          <a:ext cx="0" cy="0"/>
+          <a:chOff x="0" y="0"/>
+          <a:chExt cx="0" cy="0"/>
+        </a:xfrm>
+      </p:grpSpPr>
+      <p:sp>
+        <p:nvSpPr>
+          <p:cNvPr id="2" name="Slide Image Placeholder 1"/>
+          <p:cNvSpPr>
+            <a:spLocks noGrp="1"/>
+          </p:cNvSpPr>
+          <p:nvPr>
+            <p:ph type="sldImg" idx="2"/>
+          </p:nvPr>
+        </p:nvSpPr>
+        <p:spPr/>
+      </p:sp>
+      <p:sp>
+        <p:nvSpPr>
+          <p:cNvPr id="3" name="Notes Placeholder 2"/>
+          <p:cNvSpPr>
+            <a:spLocks noGrp="1"/>
+          </p:cNvSpPr>
+          <p:nvPr>
+            <p:ph type="body" idx="3" sz="quarter"/>
+          </p:nvPr>
+        </p:nvSpPr>
+        <p:spPr/>
+        <p:txBody>
+          <a:bodyPr/>
+          <a:lstStyle/>
+          <a:p>
+            <a:r>
+              <a:t>To summarize: adverse weather measurably changes taxi demand, and that impact varies by borough and has shifted year over year. Our pipeline is reproducible, tested, and ready for production use.</a:t>
+            </a:r>
+            <a:br/>
+            <a:br/>
+            <a:r>
+              <a:t>We are happy to take your questions.</a:t>
+            </a:r>
+          </a:p>
+        </p:txBody>
+      </p:sp>
+      <p:sp>
+        <p:nvSpPr>
+          <p:cNvPr id="4" name="Slide Number Placeholder 3"/>
+          <p:cNvSpPr>
+            <a:spLocks noGrp="1"/>
+          </p:cNvSpPr>
+          <p:nvPr>
+            <p:ph type="sldNum" idx="5" sz="quarter"/>
+          </p:nvPr>
+        </p:nvSpPr>
+        <p:spPr/>
+      </p:sp>
+    </p:spTree>
+  </p:cSld>
+  <p:clrMapOvr>
+    <a:masterClrMapping/>
+  </p:clrMapOvr>
+</p:notes>
+</file>
+
+<file path=ppt/notesSlides/notesSlide2.xml><?xml version="1.0" encoding="utf-8"?>
+<p:notes xmlns:a="http://schemas.openxmlformats.org/drawingml/2006/main" xmlns:p="http://schemas.openxmlformats.org/presentationml/2006/main" xmlns:r="http://schemas.openxmlformats.org/officeDocument/2006/relationships">
+  <p:cSld>
+    <p:spTree>
+      <p:nvGrpSpPr>
+        <p:cNvPr id="1" name=""/>
+        <p:cNvGrpSpPr/>
+        <p:nvPr/>
+      </p:nvGrpSpPr>
+      <p:grpSpPr>
+        <a:xfrm>
+          <a:off x="0" y="0"/>
+          <a:ext cx="0" cy="0"/>
+          <a:chOff x="0" y="0"/>
+          <a:chExt cx="0" cy="0"/>
+        </a:xfrm>
+      </p:grpSpPr>
+      <p:sp>
+        <p:nvSpPr>
+          <p:cNvPr id="2" name="Slide Image Placeholder 1"/>
+          <p:cNvSpPr>
+            <a:spLocks noGrp="1"/>
+          </p:cNvSpPr>
+          <p:nvPr>
+            <p:ph type="sldImg" idx="2"/>
+          </p:nvPr>
+        </p:nvSpPr>
+        <p:spPr/>
+      </p:sp>
+      <p:sp>
+        <p:nvSpPr>
+          <p:cNvPr id="3" name="Notes Placeholder 2"/>
+          <p:cNvSpPr>
+            <a:spLocks noGrp="1"/>
+          </p:cNvSpPr>
+          <p:nvPr>
+            <p:ph type="body" idx="3" sz="quarter"/>
+          </p:nvPr>
+        </p:nvSpPr>
+        <p:spPr/>
+        <p:txBody>
+          <a:bodyPr/>
+          <a:lstStyle/>
+          <a:p>
+            <a:r>
+              <a:t>We will start with our headline finding, then walk you through how we got there: the data, our architecture, what was wrong with the data and how we handled it, our year-over-year analysis, the technical decisions behind it all, and finally where we would take this next.</a:t>
+            </a:r>
+          </a:p>
+        </p:txBody>
+      </p:sp>
+      <p:sp>
+        <p:nvSpPr>
+          <p:cNvPr id="4" name="Slide Number Placeholder 3"/>
+          <p:cNvSpPr>
+            <a:spLocks noGrp="1"/>
+          </p:cNvSpPr>
+          <p:nvPr>
+            <p:ph type="sldNum" idx="5" sz="quarter"/>
+          </p:nvPr>
+        </p:nvSpPr>
+        <p:spPr/>
+      </p:sp>
+    </p:spTree>
+  </p:cSld>
+  <p:clrMapOvr>
+    <a:masterClrMapping/>
+  </p:clrMapOvr>
+</p:notes>
+</file>
+
+<file path=ppt/notesSlides/notesSlide3.xml><?xml version="1.0" encoding="utf-8"?>
+<p:notes xmlns:a="http://schemas.openxmlformats.org/drawingml/2006/main" xmlns:p="http://schemas.openxmlformats.org/presentationml/2006/main" xmlns:r="http://schemas.openxmlformats.org/officeDocument/2006/relationships">
+  <p:cSld>
+    <p:spTree>
+      <p:nvGrpSpPr>
+        <p:cNvPr id="1" name=""/>
+        <p:cNvGrpSpPr/>
+        <p:nvPr/>
+      </p:nvGrpSpPr>
+      <p:grpSpPr>
+        <a:xfrm>
+          <a:off x="0" y="0"/>
+          <a:ext cx="0" cy="0"/>
+          <a:chOff x="0" y="0"/>
+          <a:chExt cx="0" cy="0"/>
+        </a:xfrm>
+      </p:grpSpPr>
+      <p:sp>
+        <p:nvSpPr>
+          <p:cNvPr id="2" name="Slide Image Placeholder 1"/>
+          <p:cNvSpPr>
+            <a:spLocks noGrp="1"/>
+          </p:cNvSpPr>
+          <p:nvPr>
+            <p:ph type="sldImg" idx="2"/>
+          </p:nvPr>
+        </p:nvSpPr>
+        <p:spPr/>
+      </p:sp>
+      <p:sp>
+        <p:nvSpPr>
+          <p:cNvPr id="3" name="Notes Placeholder 2"/>
+          <p:cNvSpPr>
+            <a:spLocks noGrp="1"/>
+          </p:cNvSpPr>
+          <p:nvPr>
+            <p:ph type="body" idx="3" sz="quarter"/>
+          </p:nvPr>
+        </p:nvSpPr>
+        <p:spPr/>
+        <p:txBody>
+          <a:bodyPr/>
+          <a:lstStyle/>
+          <a:p>
+            <a:r>
+              <a:t>Let us start with the result and why it matters to anyone running a taxi fleet in New York City.</a:t>
+            </a:r>
+          </a:p>
+        </p:txBody>
+      </p:sp>
+      <p:sp>
+        <p:nvSpPr>
+          <p:cNvPr id="4" name="Slide Number Placeholder 3"/>
+          <p:cNvSpPr>
+            <a:spLocks noGrp="1"/>
+          </p:cNvSpPr>
+          <p:nvPr>
+            <p:ph type="sldNum" idx="5" sz="quarter"/>
+          </p:nvPr>
+        </p:nvSpPr>
+        <p:spPr/>
+      </p:sp>
+    </p:spTree>
+  </p:cSld>
+  <p:clrMapOvr>
+    <a:masterClrMapping/>
+  </p:clrMapOvr>
+</p:notes>
+</file>
+
+<file path=ppt/notesSlides/notesSlide4.xml><?xml version="1.0" encoding="utf-8"?>
+<p:notes xmlns:a="http://schemas.openxmlformats.org/drawingml/2006/main" xmlns:p="http://schemas.openxmlformats.org/presentationml/2006/main" xmlns:r="http://schemas.openxmlformats.org/officeDocument/2006/relationships">
+  <p:cSld>
+    <p:spTree>
+      <p:nvGrpSpPr>
+        <p:cNvPr id="1" name=""/>
+        <p:cNvGrpSpPr/>
+        <p:nvPr/>
+      </p:nvGrpSpPr>
+      <p:grpSpPr>
+        <a:xfrm>
+          <a:off x="0" y="0"/>
+          <a:ext cx="0" cy="0"/>
+          <a:chOff x="0" y="0"/>
+          <a:chExt cx="0" cy="0"/>
+        </a:xfrm>
+      </p:grpSpPr>
+      <p:sp>
+        <p:nvSpPr>
+          <p:cNvPr id="2" name="Slide Image Placeholder 1"/>
+          <p:cNvSpPr>
+            <a:spLocks noGrp="1"/>
+          </p:cNvSpPr>
+          <p:nvPr>
+            <p:ph type="sldImg" idx="2"/>
+          </p:nvPr>
+        </p:nvSpPr>
+        <p:spPr/>
+      </p:sp>
+      <p:sp>
+        <p:nvSpPr>
+          <p:cNvPr id="3" name="Notes Placeholder 2"/>
+          <p:cNvSpPr>
+            <a:spLocks noGrp="1"/>
+          </p:cNvSpPr>
+          <p:nvPr>
+            <p:ph type="body" idx="3" sz="quarter"/>
+          </p:nvPr>
+        </p:nvSpPr>
+        <p:spPr/>
+        <p:txBody>
+          <a:bodyPr/>
+          <a:lstStyle/>
+          <a:p>
+            <a:r>
+              <a:t>Our question is specific and measurable: how does adverse weather, meaning rain, snow, or high wind, affect taxi demand across different boroughs, and did that relationship shift between 2025 and 2026?</a:t>
+            </a:r>
+            <a:br/>
+            <a:br/>
+            <a:r>
+              <a:t>This matters because fleet operators make real-time decisions about where to position drivers. If rain cuts demand by 20 percent in the Bronx but only 5 percent in Manhattan, that changes where you send your cars during a storm.</a:t>
+            </a:r>
+            <a:br/>
+            <a:br/>
+            <a:r>
+              <a:t>We scoped this to Yellow and Green taxi trips from January through May in both years, giving us an apples-to-apples seasonal comparison. Our answer lives in a single pre-aggregated table with about 35,000 rows that any dashboard can query instantly.</a:t>
+            </a:r>
+          </a:p>
+        </p:txBody>
+      </p:sp>
+      <p:sp>
+        <p:nvSpPr>
+          <p:cNvPr id="4" name="Slide Number Placeholder 3"/>
+          <p:cNvSpPr>
+            <a:spLocks noGrp="1"/>
+          </p:cNvSpPr>
+          <p:nvPr>
+            <p:ph type="sldNum" idx="5" sz="quarter"/>
+          </p:nvPr>
+        </p:nvSpPr>
+        <p:spPr/>
+      </p:sp>
+    </p:spTree>
+  </p:cSld>
+  <p:clrMapOvr>
+    <a:masterClrMapping/>
+  </p:clrMapOvr>
+</p:notes>
+</file>
+
+<file path=ppt/notesSlides/notesSlide5.xml><?xml version="1.0" encoding="utf-8"?>
+<p:notes xmlns:a="http://schemas.openxmlformats.org/drawingml/2006/main" xmlns:p="http://schemas.openxmlformats.org/presentationml/2006/main" xmlns:r="http://schemas.openxmlformats.org/officeDocument/2006/relationships">
+  <p:cSld>
+    <p:spTree>
+      <p:nvGrpSpPr>
+        <p:cNvPr id="1" name=""/>
+        <p:cNvGrpSpPr/>
+        <p:nvPr/>
+      </p:nvGrpSpPr>
+      <p:grpSpPr>
+        <a:xfrm>
+          <a:off x="0" y="0"/>
+          <a:ext cx="0" cy="0"/>
+          <a:chOff x="0" y="0"/>
+          <a:chExt cx="0" cy="0"/>
+        </a:xfrm>
+      </p:grpSpPr>
+      <p:sp>
+        <p:nvSpPr>
+          <p:cNvPr id="2" name="Slide Image Placeholder 1"/>
+          <p:cNvSpPr>
+            <a:spLocks noGrp="1"/>
+          </p:cNvSpPr>
+          <p:nvPr>
+            <p:ph type="sldImg" idx="2"/>
+          </p:nvPr>
+        </p:nvSpPr>
+        <p:spPr/>
+      </p:sp>
+      <p:sp>
+        <p:nvSpPr>
+          <p:cNvPr id="3" name="Notes Placeholder 2"/>
+          <p:cNvSpPr>
+            <a:spLocks noGrp="1"/>
+          </p:cNvSpPr>
+          <p:nvPr>
+            <p:ph type="body" idx="3" sz="quarter"/>
+          </p:nvPr>
+        </p:nvSpPr>
+        <p:spPr/>
+        <p:txBody>
+          <a:bodyPr/>
+          <a:lstStyle/>
+          <a:p>
+            <a:r>
+              <a:t>Now let us talk about what we were given and how we built the pipeline.</a:t>
+            </a:r>
+          </a:p>
+        </p:txBody>
+      </p:sp>
+      <p:sp>
+        <p:nvSpPr>
+          <p:cNvPr id="4" name="Slide Number Placeholder 3"/>
+          <p:cNvSpPr>
+            <a:spLocks noGrp="1"/>
+          </p:cNvSpPr>
+          <p:nvPr>
+            <p:ph type="sldNum" idx="5" sz="quarter"/>
+          </p:nvPr>
+        </p:nvSpPr>
+        <p:spPr/>
+      </p:sp>
+    </p:spTree>
+  </p:cSld>
+  <p:clrMapOvr>
+    <a:masterClrMapping/>
+  </p:clrMapOvr>
+</p:notes>
+</file>
+
+<file path=ppt/notesSlides/notesSlide6.xml><?xml version="1.0" encoding="utf-8"?>
+<p:notes xmlns:a="http://schemas.openxmlformats.org/drawingml/2006/main" xmlns:p="http://schemas.openxmlformats.org/presentationml/2006/main" xmlns:r="http://schemas.openxmlformats.org/officeDocument/2006/relationships">
+  <p:cSld>
+    <p:spTree>
+      <p:nvGrpSpPr>
+        <p:cNvPr id="1" name=""/>
+        <p:cNvGrpSpPr/>
+        <p:nvPr/>
+      </p:nvGrpSpPr>
+      <p:grpSpPr>
+        <a:xfrm>
+          <a:off x="0" y="0"/>
+          <a:ext cx="0" cy="0"/>
+          <a:chOff x="0" y="0"/>
+          <a:chExt cx="0" cy="0"/>
+        </a:xfrm>
+      </p:grpSpPr>
+      <p:sp>
+        <p:nvSpPr>
+          <p:cNvPr id="2" name="Slide Image Placeholder 1"/>
+          <p:cNvSpPr>
+            <a:spLocks noGrp="1"/>
+          </p:cNvSpPr>
+          <p:nvPr>
+            <p:ph type="sldImg" idx="2"/>
+          </p:nvPr>
+        </p:nvSpPr>
+        <p:spPr/>
+      </p:sp>
+      <p:sp>
+        <p:nvSpPr>
+          <p:cNvPr id="3" name="Notes Placeholder 2"/>
+          <p:cNvSpPr>
+            <a:spLocks noGrp="1"/>
+          </p:cNvSpPr>
+          <p:nvPr>
+            <p:ph type="body" idx="3" sz="quarter"/>
+          </p:nvPr>
+        </p:nvSpPr>
+        <p:spPr/>
+        <p:txBody>
+          <a:bodyPr/>
+          <a:lstStyle/>
+          <a:p>
+            <a:r>
+              <a:t>We started with 20 files in an S3 bucket: about 38.8 million Yellow taxi trips and 465,000 Green taxi trips in Parquet format, plus a zone lookup mapping 265 zones to boroughs.</a:t>
+            </a:r>
+            <a:br/>
+            <a:br/>
+            <a:r>
+              <a:t>The two taxi types have different column names and slightly different schemas, so we had to reconcile them before combining. There is also a new congestion fee column that only appears starting January 2025.</a:t>
+            </a:r>
+            <a:br/>
+            <a:br/>
+            <a:r>
+              <a:t>We enriched this with hourly weather data from the Open-Meteo API, covering the same ten-month window. That gave us 7,248 hourly weather records including temperature, precipitation, wind speed, and weather codes that we categorized into Clear, Rain, Snow, Fog, and so on.</a:t>
+            </a:r>
+            <a:br/>
+            <a:br/>
+            <a:r>
+              <a:t>In total, we are working with over 39 million trips joined to weather conditions at the hour of pickup.</a:t>
+            </a:r>
+          </a:p>
+        </p:txBody>
+      </p:sp>
+      <p:sp>
+        <p:nvSpPr>
+          <p:cNvPr id="4" name="Slide Number Placeholder 3"/>
+          <p:cNvSpPr>
+            <a:spLocks noGrp="1"/>
+          </p:cNvSpPr>
+          <p:nvPr>
+            <p:ph type="sldNum" idx="5" sz="quarter"/>
+          </p:nvPr>
+        </p:nvSpPr>
+        <p:spPr/>
+      </p:sp>
+    </p:spTree>
+  </p:cSld>
+  <p:clrMapOvr>
+    <a:masterClrMapping/>
+  </p:clrMapOvr>
+</p:notes>
+</file>
+
+<file path=ppt/notesSlides/notesSlide7.xml><?xml version="1.0" encoding="utf-8"?>
+<p:notes xmlns:a="http://schemas.openxmlformats.org/drawingml/2006/main" xmlns:p="http://schemas.openxmlformats.org/presentationml/2006/main" xmlns:r="http://schemas.openxmlformats.org/officeDocument/2006/relationships">
+  <p:cSld>
+    <p:spTree>
+      <p:nvGrpSpPr>
+        <p:cNvPr id="1" name=""/>
+        <p:cNvGrpSpPr/>
+        <p:nvPr/>
+      </p:nvGrpSpPr>
+      <p:grpSpPr>
+        <a:xfrm>
+          <a:off x="0" y="0"/>
+          <a:ext cx="0" cy="0"/>
+          <a:chOff x="0" y="0"/>
+          <a:chExt cx="0" cy="0"/>
+        </a:xfrm>
+      </p:grpSpPr>
+      <p:sp>
+        <p:nvSpPr>
+          <p:cNvPr id="2" name="Slide Image Placeholder 1"/>
+          <p:cNvSpPr>
+            <a:spLocks noGrp="1"/>
+          </p:cNvSpPr>
+          <p:nvPr>
+            <p:ph type="sldImg" idx="2"/>
+          </p:nvPr>
+        </p:nvSpPr>
+        <p:spPr/>
+      </p:sp>
+      <p:sp>
+        <p:nvSpPr>
+          <p:cNvPr id="3" name="Notes Placeholder 2"/>
+          <p:cNvSpPr>
+            <a:spLocks noGrp="1"/>
+          </p:cNvSpPr>
+          <p:nvPr>
+            <p:ph type="body" idx="3" sz="quarter"/>
+          </p:nvPr>
+        </p:nvSpPr>
+        <p:spPr/>
+        <p:txBody>
+          <a:bodyPr/>
+          <a:lstStyle/>
+          <a:p>
+            <a:r>
+              <a:t>This is our end-to-end pipeline. Data flows left to right.</a:t>
+            </a:r>
+            <a:br/>
+            <a:br/>
+            <a:r>
+              <a:t>Raw Parquet files sit in S3. We load them unchanged into Snowflake Bronze, which is our landing zone. No transformations happen here, just a faithful copy of the source.</a:t>
+            </a:r>
+            <a:br/>
+            <a:br/>
+            <a:r>
+              <a:t>From Bronze, dbt builds our Silver layer: one unified trips table with data quality flags, plus clean zone and weather tables. Nothing is deleted in Silver; bad records are flagged but kept for traceability.</a:t>
+            </a:r>
+            <a:br/>
+            <a:br/>
+            <a:r>
+              <a:t>Silver feeds into Gold, where we filter to valid records only, join trips to boroughs and weather conditions, and aggregate into a small, fast table designed for dashboard consumption.</a:t>
+            </a:r>
+            <a:br/>
+            <a:br/>
+            <a:r>
+              <a:t>The whole thing runs with one command in about six minutes and is safe to re-run at any time.</a:t>
+            </a:r>
+          </a:p>
+        </p:txBody>
+      </p:sp>
+      <p:sp>
+        <p:nvSpPr>
+          <p:cNvPr id="4" name="Slide Number Placeholder 3"/>
+          <p:cNvSpPr>
+            <a:spLocks noGrp="1"/>
+          </p:cNvSpPr>
+          <p:nvPr>
+            <p:ph type="sldNum" idx="5" sz="quarter"/>
+          </p:nvPr>
+        </p:nvSpPr>
+        <p:spPr/>
+      </p:sp>
+    </p:spTree>
+  </p:cSld>
+  <p:clrMapOvr>
+    <a:masterClrMapping/>
+  </p:clrMapOvr>
+</p:notes>
+</file>
+
+<file path=ppt/notesSlides/notesSlide8.xml><?xml version="1.0" encoding="utf-8"?>
+<p:notes xmlns:a="http://schemas.openxmlformats.org/drawingml/2006/main" xmlns:p="http://schemas.openxmlformats.org/presentationml/2006/main" xmlns:r="http://schemas.openxmlformats.org/officeDocument/2006/relationships">
+  <p:cSld>
+    <p:spTree>
+      <p:nvGrpSpPr>
+        <p:cNvPr id="1" name=""/>
+        <p:cNvGrpSpPr/>
+        <p:nvPr/>
+      </p:nvGrpSpPr>
+      <p:grpSpPr>
+        <a:xfrm>
+          <a:off x="0" y="0"/>
+          <a:ext cx="0" cy="0"/>
+          <a:chOff x="0" y="0"/>
+          <a:chExt cx="0" cy="0"/>
+        </a:xfrm>
+      </p:grpSpPr>
+      <p:sp>
+        <p:nvSpPr>
+          <p:cNvPr id="2" name="Slide Image Placeholder 1"/>
+          <p:cNvSpPr>
+            <a:spLocks noGrp="1"/>
+          </p:cNvSpPr>
+          <p:nvPr>
+            <p:ph type="sldImg" idx="2"/>
+          </p:nvPr>
+        </p:nvSpPr>
+        <p:spPr/>
+      </p:sp>
+      <p:sp>
+        <p:nvSpPr>
+          <p:cNvPr id="3" name="Notes Placeholder 2"/>
+          <p:cNvSpPr>
+            <a:spLocks noGrp="1"/>
+          </p:cNvSpPr>
+          <p:nvPr>
+            <p:ph type="body" idx="3" sz="quarter"/>
+          </p:nvPr>
+        </p:nvSpPr>
+        <p:spPr/>
+        <p:txBody>
+          <a:bodyPr/>
+          <a:lstStyle/>
+          <a:p>
+            <a:r>
+              <a:t>We chose Pattern A, the warehouse-centric ELT approach. All transformation happens inside Snowflake using dbt.</a:t>
+            </a:r>
+            <a:br/>
+            <a:br/>
+            <a:r>
+              <a:t>The main reasons: our team is strongest in SQL, we had one week, and this approach has the fewest things that can break. Snowflake handles 39 million rows without us managing memory or clusters, and dbt gives us automated testing and version control on every transformation.</a:t>
+            </a:r>
+            <a:br/>
+            <a:br/>
+            <a:r>
+              <a:t>What we gave up is Spark experience and distributed compute. If our data were ten times larger or streaming, we would need a different approach, and we address that in our future state proposal.</a:t>
+            </a:r>
+            <a:br/>
+            <a:br/>
+            <a:r>
+              <a:t>The key design decisions are listed here: we use tables instead of views because 39 million rows is too expensive to rebuild on every query, we flag data quality issues rather than deleting them, and we join weather on the exact hour of each trip pickup.</a:t>
+            </a:r>
+          </a:p>
+        </p:txBody>
+      </p:sp>
+      <p:sp>
+        <p:nvSpPr>
+          <p:cNvPr id="4" name="Slide Number Placeholder 3"/>
+          <p:cNvSpPr>
+            <a:spLocks noGrp="1"/>
+          </p:cNvSpPr>
+          <p:nvPr>
+            <p:ph type="sldNum" idx="5" sz="quarter"/>
+          </p:nvPr>
+        </p:nvSpPr>
+        <p:spPr/>
+      </p:sp>
+    </p:spTree>
+  </p:cSld>
+  <p:clrMapOvr>
+    <a:masterClrMapping/>
+  </p:clrMapOvr>
+</p:notes>
+</file>
+
+<file path=ppt/notesSlides/notesSlide9.xml><?xml version="1.0" encoding="utf-8"?>
+<p:notes xmlns:a="http://schemas.openxmlformats.org/drawingml/2006/main" xmlns:p="http://schemas.openxmlformats.org/presentationml/2006/main" xmlns:r="http://schemas.openxmlformats.org/officeDocument/2006/relationships">
+  <p:cSld>
+    <p:spTree>
+      <p:nvGrpSpPr>
+        <p:cNvPr id="1" name=""/>
+        <p:cNvGrpSpPr/>
+        <p:nvPr/>
+      </p:nvGrpSpPr>
+      <p:grpSpPr>
+        <a:xfrm>
+          <a:off x="0" y="0"/>
+          <a:ext cx="0" cy="0"/>
+          <a:chOff x="0" y="0"/>
+          <a:chExt cx="0" cy="0"/>
+        </a:xfrm>
+      </p:grpSpPr>
+      <p:sp>
+        <p:nvSpPr>
+          <p:cNvPr id="2" name="Slide Image Placeholder 1"/>
+          <p:cNvSpPr>
+            <a:spLocks noGrp="1"/>
+          </p:cNvSpPr>
+          <p:nvPr>
+            <p:ph type="sldImg" idx="2"/>
+          </p:nvPr>
+        </p:nvSpPr>
+        <p:spPr/>
+      </p:sp>
+      <p:sp>
+        <p:nvSpPr>
+          <p:cNvPr id="3" name="Notes Placeholder 2"/>
+          <p:cNvSpPr>
+            <a:spLocks noGrp="1"/>
+          </p:cNvSpPr>
+          <p:nvPr>
+            <p:ph type="body" idx="3" sz="quarter"/>
+          </p:nvPr>
+        </p:nvSpPr>
+        <p:spPr/>
+        <p:txBody>
+          <a:bodyPr/>
+          <a:lstStyle/>
+          <a:p>
+            <a:r>
+              <a:t>Before landing on Pattern A, we explored multiple approaches.</a:t>
+            </a:r>
+            <a:br/>
+            <a:br/>
+            <a:r>
+              <a:t>First, we investigated NYC construction data as a potential enrichment source to see whether road work affected taxi demand. We moved on from that and pursued weather instead as a stronger analytical signal.</a:t>
+            </a:r>
+            <a:br/>
+            <a:br/>
+            <a:r>
+              <a:t>In parallel, we built and tested Pattern B, which uses AWS Glue and PySpark to do the heavy cleaning before data reaches Snowflake. That gave us hands-on experience with distributed processing and DataFrames.</a:t>
+            </a:r>
+            <a:br/>
+            <a:br/>
+            <a:r>
+              <a:t>Ultimately, we selected Pattern A because it offered the strongest reliability guarantee within our one-week sprint. But the Pattern B work was not wasted. It deepened our understanding of the data quality issues and made our final architecture decision more informed and more defensible.</a:t>
+            </a:r>
+          </a:p>
+        </p:txBody>
+      </p:sp>
+      <p:sp>
+        <p:nvSpPr>
+          <p:cNvPr id="4" name="Slide Number Placeholder 3"/>
+          <p:cNvSpPr>
+            <a:spLocks noGrp="1"/>
+          </p:cNvSpPr>
+          <p:nvPr>
+            <p:ph type="sldNum" idx="5" sz="quarter"/>
+          </p:nvPr>
+        </p:nvSpPr>
+        <p:spPr/>
+      </p:sp>
+    </p:spTree>
+  </p:cSld>
+  <p:clrMapOvr>
+    <a:masterClrMapping/>
+  </p:clrMapOvr>
+</p:notes>
 </file>
 
 <file path=ppt/slideLayouts/slideLayout1.xml><?xml version="1.0" encoding="utf-8"?>
@@ -8014,6 +9425,12 @@
               <a:t>NYC Taxi Data Platform</a:t>
             </a:r>
           </a:p>
+          <a:p>
+            <a:r>
+              <a:rPr sz="1800" i="1"/>
+              <a:t>How does adverse weather affect taxi demand across NYC boroughs?</a:t>
+            </a:r>
+          </a:p>
         </p:txBody>
       </p:sp>
       <p:sp>
@@ -8032,12 +9449,7 @@
           <a:lstStyle/>
           <a:p>
             <a:r>
-              <a:t>Team Fuchsia</a:t>
-            </a:r>
-          </a:p>
-          <a:p>
-            <a:r>
-              <a:t>Orlando Marin, Ariana Lopez, Maryam Choudhury</a:t>
+              <a:t>Team AMO: Maryam Choudhury, Ariana Lopez, Orlando Marin</a:t>
             </a:r>
           </a:p>
         </p:txBody>
@@ -8062,59 +9474,659 @@
       <p:grpSpPr/>
       <p:sp>
         <p:nvSpPr>
-          <p:cNvPr id="2" name="Text Placeholder 1"/>
-          <p:cNvSpPr>
-            <a:spLocks noGrp="1"/>
-          </p:cNvSpPr>
-          <p:nvPr>
-            <p:ph type="body" idx="13" sz="quarter"/>
+          <p:cNvPr id="2" name="Title 1"/>
+          <p:cNvSpPr>
+            <a:spLocks noGrp="1"/>
+          </p:cNvSpPr>
+          <p:nvPr>
+            <p:ph type="title"/>
           </p:nvPr>
         </p:nvSpPr>
         <p:spPr/>
         <p:txBody>
           <a:bodyPr/>
           <a:lstStyle/>
+          <a:p>
+            <a:r>
+              <a:t>Paths We Explored</a:t>
+            </a:r>
+          </a:p>
+        </p:txBody>
+      </p:sp>
+      <p:sp>
+        <p:nvSpPr>
+          <p:cNvPr id="3" name="Content Placeholder 2"/>
+          <p:cNvSpPr>
+            <a:spLocks noGrp="1"/>
+          </p:cNvSpPr>
+          <p:nvPr>
+            <p:ph idx="1"/>
+          </p:nvPr>
+        </p:nvSpPr>
+        <p:spPr/>
+        <p:txBody>
+          <a:bodyPr/>
+          <a:lstStyle/>
           <a:p/>
         </p:txBody>
       </p:sp>
       <p:sp>
         <p:nvSpPr>
-          <p:cNvPr id="3" name="Title 2"/>
-          <p:cNvSpPr>
-            <a:spLocks noGrp="1"/>
-          </p:cNvSpPr>
-          <p:nvPr>
-            <p:ph type="title"/>
-          </p:nvPr>
-        </p:nvSpPr>
-        <p:spPr/>
-        <p:txBody>
-          <a:bodyPr/>
-          <a:lstStyle/>
-          <a:p>
-            <a:r>
-              <a:t>3</a:t>
-            </a:r>
-          </a:p>
-        </p:txBody>
-      </p:sp>
-      <p:sp>
-        <p:nvSpPr>
-          <p:cNvPr id="4" name="Subtitle 3"/>
-          <p:cNvSpPr>
-            <a:spLocks noGrp="1"/>
-          </p:cNvSpPr>
-          <p:nvPr>
-            <p:ph type="subTitle" idx="1"/>
-          </p:nvPr>
-        </p:nvSpPr>
-        <p:spPr/>
-        <p:txBody>
-          <a:bodyPr/>
-          <a:lstStyle/>
-          <a:p>
-            <a:r>
-              <a:t>Data Quality</a:t>
+          <p:cNvPr id="4" name="Rectangle 3"/>
+          <p:cNvSpPr/>
+          <p:nvPr/>
+        </p:nvSpPr>
+        <p:spPr>
+          <a:xfrm>
+            <a:off x="0" y="800000"/>
+            <a:ext cx="12192000" cy="80000"/>
+          </a:xfrm>
+          <a:prstGeom prst="rect">
+            <a:avLst/>
+          </a:prstGeom>
+          <a:solidFill>
+            <a:srgbClr val="FE3082"/>
+          </a:solidFill>
+          <a:ln>
+            <a:noFill/>
+          </a:ln>
+        </p:spPr>
+        <p:style>
+          <a:lnRef idx="1">
+            <a:schemeClr val="accent1"/>
+          </a:lnRef>
+          <a:fillRef idx="3">
+            <a:schemeClr val="accent1"/>
+          </a:fillRef>
+          <a:effectRef idx="2">
+            <a:schemeClr val="accent1"/>
+          </a:effectRef>
+          <a:fontRef idx="minor">
+            <a:schemeClr val="lt1"/>
+          </a:fontRef>
+        </p:style>
+        <p:txBody>
+          <a:bodyPr rtlCol="0" anchor="ctr"/>
+          <a:lstStyle/>
+          <a:p>
+            <a:pPr algn="ctr"/>
+          </a:p>
+        </p:txBody>
+      </p:sp>
+      <p:sp>
+        <p:nvSpPr>
+          <p:cNvPr id="5" name="Rounded Rectangle 4"/>
+          <p:cNvSpPr/>
+          <p:nvPr/>
+        </p:nvSpPr>
+        <p:spPr>
+          <a:xfrm>
+            <a:off x="400000" y="1000000"/>
+            <a:ext cx="3500000" cy="2200000"/>
+          </a:xfrm>
+          <a:prstGeom prst="roundRect">
+            <a:avLst/>
+          </a:prstGeom>
+          <a:solidFill>
+            <a:srgbClr val="FFF3E0"/>
+          </a:solidFill>
+          <a:ln>
+            <a:noFill/>
+          </a:ln>
+        </p:spPr>
+        <p:style>
+          <a:lnRef idx="1">
+            <a:schemeClr val="accent1"/>
+          </a:lnRef>
+          <a:fillRef idx="3">
+            <a:schemeClr val="accent1"/>
+          </a:fillRef>
+          <a:effectRef idx="2">
+            <a:schemeClr val="accent1"/>
+          </a:effectRef>
+          <a:fontRef idx="minor">
+            <a:schemeClr val="lt1"/>
+          </a:fontRef>
+        </p:style>
+        <p:txBody>
+          <a:bodyPr rtlCol="0" anchor="ctr" wrap="square"/>
+          <a:lstStyle/>
+          <a:p>
+            <a:pPr algn="ctr"/>
+            <a:r>
+              <a:rPr sz="1600" b="1">
+                <a:solidFill>
+                  <a:srgbClr val="E65100"/>
+                </a:solidFill>
+              </a:rPr>
+              <a:t>Construction Data</a:t>
+            </a:r>
+          </a:p>
+          <a:p>
+            <a:pPr algn="ctr">
+              <a:spcBef>
+                <a:spcPts val="800"/>
+              </a:spcBef>
+            </a:pPr>
+            <a:r>
+              <a:rPr sz="1200" i="1">
+                <a:solidFill>
+                  <a:srgbClr val="555555"/>
+                </a:solidFill>
+              </a:rPr>
+              <a:t>Explored</a:t>
+            </a:r>
+          </a:p>
+          <a:p>
+            <a:pPr>
+              <a:spcBef>
+                <a:spcPts val="1200"/>
+              </a:spcBef>
+            </a:pPr>
+            <a:r>
+              <a:rPr sz="1100">
+                <a:solidFill>
+                  <a:srgbClr val="2D2D2D"/>
+                </a:solidFill>
+              </a:rPr>
+              <a:t>•  Investigated NYC construction data as enrichment</a:t>
+            </a:r>
+          </a:p>
+          <a:p>
+            <a:pPr>
+              <a:spcBef>
+                <a:spcPts val="400"/>
+              </a:spcBef>
+            </a:pPr>
+            <a:r>
+              <a:rPr sz="1100">
+                <a:solidFill>
+                  <a:srgbClr val="2D2D2D"/>
+                </a:solidFill>
+              </a:rPr>
+              <a:t>•  [Why we moved on: data quality, coverage, or relevance]</a:t>
+            </a:r>
+          </a:p>
+        </p:txBody>
+      </p:sp>
+      <p:sp>
+        <p:nvSpPr>
+          <p:cNvPr id="6" name="Rounded Rectangle 5"/>
+          <p:cNvSpPr/>
+          <p:nvPr/>
+        </p:nvSpPr>
+        <p:spPr>
+          <a:xfrm>
+            <a:off x="4200000" y="1000000"/>
+            <a:ext cx="3500000" cy="2200000"/>
+          </a:xfrm>
+          <a:prstGeom prst="roundRect">
+            <a:avLst/>
+          </a:prstGeom>
+          <a:solidFill>
+            <a:srgbClr val="E3F2FD"/>
+          </a:solidFill>
+          <a:ln>
+            <a:noFill/>
+          </a:ln>
+        </p:spPr>
+        <p:style>
+          <a:lnRef idx="1">
+            <a:schemeClr val="accent1"/>
+          </a:lnRef>
+          <a:fillRef idx="3">
+            <a:schemeClr val="accent1"/>
+          </a:fillRef>
+          <a:effectRef idx="2">
+            <a:schemeClr val="accent1"/>
+          </a:effectRef>
+          <a:fontRef idx="minor">
+            <a:schemeClr val="lt1"/>
+          </a:fontRef>
+        </p:style>
+        <p:txBody>
+          <a:bodyPr rtlCol="0" anchor="ctr" wrap="square"/>
+          <a:lstStyle/>
+          <a:p>
+            <a:pPr algn="ctr"/>
+            <a:r>
+              <a:rPr sz="1600" b="1">
+                <a:solidFill>
+                  <a:srgbClr val="0D47A1"/>
+                </a:solidFill>
+              </a:rPr>
+              <a:t>Pattern B (ETL)</a:t>
+            </a:r>
+          </a:p>
+          <a:p>
+            <a:pPr algn="ctr">
+              <a:spcBef>
+                <a:spcPts val="800"/>
+              </a:spcBef>
+            </a:pPr>
+            <a:r>
+              <a:rPr sz="1200" i="1">
+                <a:solidFill>
+                  <a:srgbClr val="555555"/>
+                </a:solidFill>
+              </a:rPr>
+              <a:t>Built and Tested</a:t>
+            </a:r>
+          </a:p>
+          <a:p>
+            <a:pPr>
+              <a:spcBef>
+                <a:spcPts val="1200"/>
+              </a:spcBef>
+            </a:pPr>
+            <a:r>
+              <a:rPr sz="1100">
+                <a:solidFill>
+                  <a:srgbClr val="2D2D2D"/>
+                </a:solidFill>
+              </a:rPr>
+              <a:t>•  AWS Glue + PySpark for Silver layer cleaning</a:t>
+            </a:r>
+          </a:p>
+          <a:p>
+            <a:pPr>
+              <a:spcBef>
+                <a:spcPts val="400"/>
+              </a:spcBef>
+            </a:pPr>
+            <a:r>
+              <a:rPr sz="1100">
+                <a:solidFill>
+                  <a:srgbClr val="2D2D2D"/>
+                </a:solidFill>
+              </a:rPr>
+              <a:t>•  DataFrame transformations for data quality</a:t>
+            </a:r>
+          </a:p>
+          <a:p>
+            <a:pPr>
+              <a:spcBef>
+                <a:spcPts val="400"/>
+              </a:spcBef>
+            </a:pPr>
+            <a:r>
+              <a:rPr sz="1100">
+                <a:solidFill>
+                  <a:srgbClr val="2D2D2D"/>
+                </a:solidFill>
+              </a:rPr>
+              <a:t>•  [Additional Pattern B details]</a:t>
+            </a:r>
+          </a:p>
+        </p:txBody>
+      </p:sp>
+      <p:sp>
+        <p:nvSpPr>
+          <p:cNvPr id="7" name="Rounded Rectangle 6"/>
+          <p:cNvSpPr/>
+          <p:nvPr/>
+        </p:nvSpPr>
+        <p:spPr>
+          <a:xfrm>
+            <a:off x="8000000" y="1000000"/>
+            <a:ext cx="3500000" cy="2200000"/>
+          </a:xfrm>
+          <a:prstGeom prst="roundRect">
+            <a:avLst/>
+          </a:prstGeom>
+          <a:solidFill>
+            <a:srgbClr val="E8F5E9"/>
+          </a:solidFill>
+          <a:ln>
+            <a:noFill/>
+          </a:ln>
+        </p:spPr>
+        <p:style>
+          <a:lnRef idx="1">
+            <a:schemeClr val="accent1"/>
+          </a:lnRef>
+          <a:fillRef idx="3">
+            <a:schemeClr val="accent1"/>
+          </a:fillRef>
+          <a:effectRef idx="2">
+            <a:schemeClr val="accent1"/>
+          </a:effectRef>
+          <a:fontRef idx="minor">
+            <a:schemeClr val="lt1"/>
+          </a:fontRef>
+        </p:style>
+        <p:txBody>
+          <a:bodyPr rtlCol="0" anchor="ctr" wrap="square"/>
+          <a:lstStyle/>
+          <a:p>
+            <a:pPr algn="ctr"/>
+            <a:r>
+              <a:rPr sz="1600" b="1">
+                <a:solidFill>
+                  <a:srgbClr val="2E7D32"/>
+                </a:solidFill>
+              </a:rPr>
+              <a:t>Pattern A (ELT)</a:t>
+            </a:r>
+          </a:p>
+          <a:p>
+            <a:pPr algn="ctr">
+              <a:spcBef>
+                <a:spcPts val="800"/>
+              </a:spcBef>
+            </a:pPr>
+            <a:r>
+              <a:rPr sz="1200" b="1">
+                <a:solidFill>
+                  <a:srgbClr val="2E7D32"/>
+                </a:solidFill>
+              </a:rPr>
+              <a:t>Selected</a:t>
+            </a:r>
+          </a:p>
+          <a:p>
+            <a:pPr>
+              <a:spcBef>
+                <a:spcPts val="1200"/>
+              </a:spcBef>
+            </a:pPr>
+            <a:r>
+              <a:rPr sz="1100">
+                <a:solidFill>
+                  <a:srgbClr val="2D2D2D"/>
+                </a:solidFill>
+              </a:rPr>
+              <a:t>•  Snowflake + dbt, all SQL</a:t>
+            </a:r>
+          </a:p>
+          <a:p>
+            <a:pPr>
+              <a:spcBef>
+                <a:spcPts val="400"/>
+              </a:spcBef>
+            </a:pPr>
+            <a:r>
+              <a:rPr sz="1100">
+                <a:solidFill>
+                  <a:srgbClr val="2D2D2D"/>
+                </a:solidFill>
+              </a:rPr>
+              <a:t>•  Full pipeline in ~6 min, 32 tests passing</a:t>
+            </a:r>
+          </a:p>
+          <a:p>
+            <a:pPr>
+              <a:spcBef>
+                <a:spcPts val="400"/>
+              </a:spcBef>
+            </a:pPr>
+            <a:r>
+              <a:rPr sz="1100">
+                <a:solidFill>
+                  <a:srgbClr val="2D2D2D"/>
+                </a:solidFill>
+              </a:rPr>
+              <a:t>•  Idempotent, reproducible, tested</a:t>
+            </a:r>
+          </a:p>
+        </p:txBody>
+      </p:sp>
+      <p:sp>
+        <p:nvSpPr>
+          <p:cNvPr id="8" name="TextBox 7"/>
+          <p:cNvSpPr txBox="1"/>
+          <p:nvPr/>
+        </p:nvSpPr>
+        <p:spPr>
+          <a:xfrm>
+            <a:off x="3700000" y="1800000"/>
+            <a:ext cx="700000" cy="500000"/>
+          </a:xfrm>
+          <a:prstGeom prst="rect">
+            <a:avLst/>
+          </a:prstGeom>
+          <a:noFill/>
+        </p:spPr>
+        <p:txBody>
+          <a:bodyPr wrap="none">
+            <a:spAutoFit/>
+          </a:bodyPr>
+          <a:lstStyle/>
+          <a:p>
+            <a:pPr algn="ctr"/>
+            <a:r>
+              <a:rPr sz="3200" b="1">
+                <a:solidFill>
+                  <a:srgbClr val="FE3082"/>
+                </a:solidFill>
+              </a:rPr>
+              <a:t>→</a:t>
+            </a:r>
+          </a:p>
+        </p:txBody>
+      </p:sp>
+      <p:sp>
+        <p:nvSpPr>
+          <p:cNvPr id="9" name="TextBox 8"/>
+          <p:cNvSpPr txBox="1"/>
+          <p:nvPr/>
+        </p:nvSpPr>
+        <p:spPr>
+          <a:xfrm>
+            <a:off x="7500000" y="1800000"/>
+            <a:ext cx="700000" cy="500000"/>
+          </a:xfrm>
+          <a:prstGeom prst="rect">
+            <a:avLst/>
+          </a:prstGeom>
+          <a:noFill/>
+        </p:spPr>
+        <p:txBody>
+          <a:bodyPr wrap="none">
+            <a:spAutoFit/>
+          </a:bodyPr>
+          <a:lstStyle/>
+          <a:p>
+            <a:pPr algn="ctr"/>
+            <a:r>
+              <a:rPr sz="3200" b="1">
+                <a:solidFill>
+                  <a:srgbClr val="FE3082"/>
+                </a:solidFill>
+              </a:rPr>
+              <a:t>→</a:t>
+            </a:r>
+          </a:p>
+        </p:txBody>
+      </p:sp>
+      <p:sp>
+        <p:nvSpPr>
+          <p:cNvPr id="10" name="Rounded Rectangle 9"/>
+          <p:cNvSpPr/>
+          <p:nvPr/>
+        </p:nvSpPr>
+        <p:spPr>
+          <a:xfrm>
+            <a:off x="400000" y="3500000"/>
+            <a:ext cx="11400000" cy="1200000"/>
+          </a:xfrm>
+          <a:prstGeom prst="roundRect">
+            <a:avLst/>
+          </a:prstGeom>
+          <a:solidFill>
+            <a:srgbClr val="FCE4EC"/>
+          </a:solidFill>
+          <a:ln>
+            <a:noFill/>
+          </a:ln>
+        </p:spPr>
+        <p:style>
+          <a:lnRef idx="1">
+            <a:schemeClr val="accent1"/>
+          </a:lnRef>
+          <a:fillRef idx="3">
+            <a:schemeClr val="accent1"/>
+          </a:fillRef>
+          <a:effectRef idx="2">
+            <a:schemeClr val="accent1"/>
+          </a:effectRef>
+          <a:fontRef idx="minor">
+            <a:schemeClr val="lt1"/>
+          </a:fontRef>
+        </p:style>
+        <p:txBody>
+          <a:bodyPr rtlCol="0" anchor="ctr" wrap="square"/>
+          <a:lstStyle/>
+          <a:p>
+            <a:pPr algn="ctr"/>
+            <a:r>
+              <a:rPr sz="1400" b="1">
+                <a:solidFill>
+                  <a:srgbClr val="FE3082"/>
+                </a:solidFill>
+              </a:rPr>
+              <a:t>Why We Chose Pattern A</a:t>
+            </a:r>
+          </a:p>
+          <a:p>
+            <a:pPr>
+              <a:spcBef>
+                <a:spcPts val="600"/>
+              </a:spcBef>
+            </a:pPr>
+            <a:r>
+              <a:rPr sz="1200">
+                <a:solidFill>
+                  <a:srgbClr val="2D2D2D"/>
+                </a:solidFill>
+              </a:rPr>
+              <a:t>•  Strongest reliability guarantee within a one-week sprint (fewer moving parts, fewer failure modes)</a:t>
+            </a:r>
+          </a:p>
+          <a:p>
+            <a:pPr>
+              <a:spcBef>
+                <a:spcPts val="400"/>
+              </a:spcBef>
+            </a:pPr>
+            <a:r>
+              <a:rPr sz="1200">
+                <a:solidFill>
+                  <a:srgbClr val="2D2D2D"/>
+                </a:solidFill>
+              </a:rPr>
+              <a:t>•  Team's SQL strength meant faster iteration and easier debugging</a:t>
+            </a:r>
+          </a:p>
+          <a:p>
+            <a:pPr>
+              <a:spcBef>
+                <a:spcPts val="400"/>
+              </a:spcBef>
+            </a:pPr>
+            <a:r>
+              <a:rPr sz="1200">
+                <a:solidFill>
+                  <a:srgbClr val="2D2D2D"/>
+                </a:solidFill>
+              </a:rPr>
+              <a:t>•  All work from Pattern B exploration informed our data quality understanding</a:t>
+            </a:r>
+          </a:p>
+        </p:txBody>
+      </p:sp>
+      <p:sp>
+        <p:nvSpPr>
+          <p:cNvPr id="11" name="Rounded Rectangle 10"/>
+          <p:cNvSpPr/>
+          <p:nvPr/>
+        </p:nvSpPr>
+        <p:spPr>
+          <a:xfrm>
+            <a:off x="400000" y="5000000"/>
+            <a:ext cx="11400000" cy="1200000"/>
+          </a:xfrm>
+          <a:prstGeom prst="roundRect">
+            <a:avLst/>
+          </a:prstGeom>
+          <a:solidFill>
+            <a:srgbClr val="E3F2FD"/>
+          </a:solidFill>
+          <a:ln>
+            <a:noFill/>
+          </a:ln>
+        </p:spPr>
+        <p:style>
+          <a:lnRef idx="1">
+            <a:schemeClr val="accent1"/>
+          </a:lnRef>
+          <a:fillRef idx="3">
+            <a:schemeClr val="accent1"/>
+          </a:fillRef>
+          <a:effectRef idx="2">
+            <a:schemeClr val="accent1"/>
+          </a:effectRef>
+          <a:fontRef idx="minor">
+            <a:schemeClr val="lt1"/>
+          </a:fontRef>
+        </p:style>
+        <p:txBody>
+          <a:bodyPr rtlCol="0" anchor="ctr" wrap="square"/>
+          <a:lstStyle/>
+          <a:p>
+            <a:pPr algn="ctr"/>
+            <a:r>
+              <a:rPr sz="1400" b="1">
+                <a:solidFill>
+                  <a:srgbClr val="0D47A1"/>
+                </a:solidFill>
+              </a:rPr>
+              <a:t>What the Exploration Taught Us</a:t>
+            </a:r>
+          </a:p>
+          <a:p>
+            <a:pPr>
+              <a:spcBef>
+                <a:spcPts val="600"/>
+              </a:spcBef>
+            </a:pPr>
+            <a:r>
+              <a:rPr sz="1200">
+                <a:solidFill>
+                  <a:srgbClr val="2D2D2D"/>
+                </a:solidFill>
+              </a:rPr>
+              <a:t>•  [Insight from construction data exploration that influenced final approach]</a:t>
+            </a:r>
+          </a:p>
+          <a:p>
+            <a:pPr>
+              <a:spcBef>
+                <a:spcPts val="400"/>
+              </a:spcBef>
+            </a:pPr>
+            <a:r>
+              <a:rPr sz="1200">
+                <a:solidFill>
+                  <a:srgbClr val="2D2D2D"/>
+                </a:solidFill>
+              </a:rPr>
+              <a:t>•  [Insight from Pattern B work, e.g., data quality issues discovered during Spark cleaning]</a:t>
+            </a:r>
+          </a:p>
+          <a:p>
+            <a:pPr>
+              <a:spcBef>
+                <a:spcPts val="400"/>
+              </a:spcBef>
+            </a:pPr>
+            <a:r>
+              <a:rPr sz="1200">
+                <a:solidFill>
+                  <a:srgbClr val="2D2D2D"/>
+                </a:solidFill>
+              </a:rPr>
+              <a:t>•  [How exploring multiple paths made our final architecture decision more defensible]</a:t>
             </a:r>
           </a:p>
         </p:txBody>
@@ -8139,7 +10151,24 @@
       <p:grpSpPr/>
       <p:sp>
         <p:nvSpPr>
-          <p:cNvPr id="2" name="Title 1"/>
+          <p:cNvPr id="2" name="Text Placeholder 1"/>
+          <p:cNvSpPr>
+            <a:spLocks noGrp="1"/>
+          </p:cNvSpPr>
+          <p:nvPr>
+            <p:ph type="body" idx="13" sz="quarter"/>
+          </p:nvPr>
+        </p:nvSpPr>
+        <p:spPr/>
+        <p:txBody>
+          <a:bodyPr/>
+          <a:lstStyle/>
+          <a:p/>
+        </p:txBody>
+      </p:sp>
+      <p:sp>
+        <p:nvSpPr>
+          <p:cNvPr id="3" name="Title 2"/>
           <p:cNvSpPr>
             <a:spLocks noGrp="1"/>
           </p:cNvSpPr>
@@ -8153,19 +10182,19 @@
           <a:lstStyle/>
           <a:p>
             <a:r>
-              <a:t>Data Quality: What Was Wrong and What We Did</a:t>
-            </a:r>
-          </a:p>
-        </p:txBody>
-      </p:sp>
-      <p:sp>
-        <p:nvSpPr>
-          <p:cNvPr id="3" name="Content Placeholder 2"/>
-          <p:cNvSpPr>
-            <a:spLocks noGrp="1"/>
-          </p:cNvSpPr>
-          <p:nvPr>
-            <p:ph idx="1"/>
+              <a:t>3</a:t>
+            </a:r>
+          </a:p>
+        </p:txBody>
+      </p:sp>
+      <p:sp>
+        <p:nvSpPr>
+          <p:cNvPr id="4" name="Subtitle 3"/>
+          <p:cNvSpPr>
+            <a:spLocks noGrp="1"/>
+          </p:cNvSpPr>
+          <p:nvPr>
+            <p:ph type="subTitle" idx="1"/>
           </p:nvPr>
         </p:nvSpPr>
         <p:spPr/>
@@ -8174,74 +10203,7 @@
           <a:lstStyle/>
           <a:p>
             <a:r>
-              <a:t>Pipeline Reconciliation</a:t>
-            </a:r>
-          </a:p>
-          <a:p>
-            <a:r>
-              <a:t>  Rows in source files:		[count]</a:t>
-            </a:r>
-          </a:p>
-          <a:p>
-            <a:r>
-              <a:t>  Rows loaded to bronze:		[count]</a:t>
-            </a:r>
-          </a:p>
-          <a:p>
-            <a:r>
-              <a:t>  Rows surviving to silver:		[count]</a:t>
-            </a:r>
-          </a:p>
-          <a:p>
-            <a:r>
-              <a:t>  Rows dropped:			[count] ([X]%)</a:t>
-            </a:r>
-          </a:p>
-          <a:p/>
-          <a:p>
-            <a:r>
-              <a:t>Top Defects Found</a:t>
-            </a:r>
-          </a:p>
-          <a:p>
-            <a:r>
-              <a:t>  [Defect 1]: [count] records ([X]%) - Decision: [drop/correct/quarantine/keep]</a:t>
-            </a:r>
-          </a:p>
-          <a:p>
-            <a:r>
-              <a:t>  [Defect 2]: [count] records ([X]%) - Decision: [drop/correct/quarantine/keep]</a:t>
-            </a:r>
-          </a:p>
-          <a:p>
-            <a:r>
-              <a:t>  [Defect 3]: [count] records ([X]%) - Decision: [drop/correct/quarantine/keep]</a:t>
-            </a:r>
-          </a:p>
-          <a:p>
-            <a:r>
-              <a:t>  [Defect 4]: [count] records ([X]%) - Decision: [drop/correct/quarantine/keep]</a:t>
-            </a:r>
-          </a:p>
-          <a:p>
-            <a:r>
-              <a:t>  [Defect 5 - not in catalog]: [count] records ([X]%) - Decision: [action]</a:t>
-            </a:r>
-          </a:p>
-          <a:p/>
-          <a:p>
-            <a:r>
-              <a:t>The Cash Tip Question</a:t>
-            </a:r>
-          </a:p>
-          <a:p>
-            <a:r>
-              <a:t>  tip_amount is recorded for credit card only. Cash tips appear as $0.00.</a:t>
-            </a:r>
-          </a:p>
-          <a:p>
-            <a:r>
-              <a:t>  [How we handled it in our analysis]</a:t>
+              <a:t>Data Quality</a:t>
             </a:r>
           </a:p>
         </p:txBody>
@@ -8266,59 +10228,480 @@
       <p:grpSpPr/>
       <p:sp>
         <p:nvSpPr>
-          <p:cNvPr id="2" name="Text Placeholder 1"/>
-          <p:cNvSpPr>
-            <a:spLocks noGrp="1"/>
-          </p:cNvSpPr>
-          <p:nvPr>
-            <p:ph type="body" idx="13" sz="quarter"/>
+          <p:cNvPr id="2" name="Title 1"/>
+          <p:cNvSpPr>
+            <a:spLocks noGrp="1"/>
+          </p:cNvSpPr>
+          <p:nvPr>
+            <p:ph type="title"/>
           </p:nvPr>
         </p:nvSpPr>
         <p:spPr/>
         <p:txBody>
           <a:bodyPr/>
           <a:lstStyle/>
+          <a:p>
+            <a:r>
+              <a:t>Data Quality: What Was Wrong and What We Did</a:t>
+            </a:r>
+          </a:p>
+        </p:txBody>
+      </p:sp>
+      <p:sp>
+        <p:nvSpPr>
+          <p:cNvPr id="3" name="Content Placeholder 2"/>
+          <p:cNvSpPr>
+            <a:spLocks noGrp="1"/>
+          </p:cNvSpPr>
+          <p:nvPr>
+            <p:ph idx="1"/>
+          </p:nvPr>
+        </p:nvSpPr>
+        <p:spPr/>
+        <p:txBody>
+          <a:bodyPr/>
+          <a:lstStyle/>
           <a:p/>
         </p:txBody>
       </p:sp>
       <p:sp>
         <p:nvSpPr>
-          <p:cNvPr id="3" name="Title 2"/>
-          <p:cNvSpPr>
-            <a:spLocks noGrp="1"/>
-          </p:cNvSpPr>
-          <p:nvPr>
-            <p:ph type="title"/>
-          </p:nvPr>
-        </p:nvSpPr>
-        <p:spPr/>
-        <p:txBody>
-          <a:bodyPr/>
-          <a:lstStyle/>
-          <a:p>
-            <a:r>
-              <a:t>4</a:t>
-            </a:r>
-          </a:p>
-        </p:txBody>
-      </p:sp>
-      <p:sp>
-        <p:nvSpPr>
-          <p:cNvPr id="4" name="Subtitle 3"/>
-          <p:cNvSpPr>
-            <a:spLocks noGrp="1"/>
-          </p:cNvSpPr>
-          <p:nvPr>
-            <p:ph type="subTitle" idx="1"/>
-          </p:nvPr>
-        </p:nvSpPr>
-        <p:spPr/>
-        <p:txBody>
-          <a:bodyPr/>
-          <a:lstStyle/>
-          <a:p>
-            <a:r>
-              <a:t>Findings: Year-over-Year</a:t>
+          <p:cNvPr id="4" name="Rectangle 3"/>
+          <p:cNvSpPr/>
+          <p:nvPr/>
+        </p:nvSpPr>
+        <p:spPr>
+          <a:xfrm>
+            <a:off x="0" y="800000"/>
+            <a:ext cx="12192000" cy="80000"/>
+          </a:xfrm>
+          <a:prstGeom prst="rect">
+            <a:avLst/>
+          </a:prstGeom>
+          <a:solidFill>
+            <a:srgbClr val="FE3082"/>
+          </a:solidFill>
+          <a:ln>
+            <a:noFill/>
+          </a:ln>
+        </p:spPr>
+        <p:style>
+          <a:lnRef idx="1">
+            <a:schemeClr val="accent1"/>
+          </a:lnRef>
+          <a:fillRef idx="3">
+            <a:schemeClr val="accent1"/>
+          </a:fillRef>
+          <a:effectRef idx="2">
+            <a:schemeClr val="accent1"/>
+          </a:effectRef>
+          <a:fontRef idx="minor">
+            <a:schemeClr val="lt1"/>
+          </a:fontRef>
+        </p:style>
+        <p:txBody>
+          <a:bodyPr rtlCol="0" anchor="ctr"/>
+          <a:lstStyle/>
+          <a:p>
+            <a:pPr algn="ctr"/>
+          </a:p>
+        </p:txBody>
+      </p:sp>
+      <p:sp>
+        <p:nvSpPr>
+          <p:cNvPr id="5" name="Rounded Rectangle 4"/>
+          <p:cNvSpPr/>
+          <p:nvPr/>
+        </p:nvSpPr>
+        <p:spPr>
+          <a:xfrm>
+            <a:off x="400000" y="1000000"/>
+            <a:ext cx="5400000" cy="1800000"/>
+          </a:xfrm>
+          <a:prstGeom prst="roundRect">
+            <a:avLst/>
+          </a:prstGeom>
+          <a:solidFill>
+            <a:srgbClr val="E3F2FD"/>
+          </a:solidFill>
+          <a:ln>
+            <a:noFill/>
+          </a:ln>
+        </p:spPr>
+        <p:style>
+          <a:lnRef idx="1">
+            <a:schemeClr val="accent1"/>
+          </a:lnRef>
+          <a:fillRef idx="3">
+            <a:schemeClr val="accent1"/>
+          </a:fillRef>
+          <a:effectRef idx="2">
+            <a:schemeClr val="accent1"/>
+          </a:effectRef>
+          <a:fontRef idx="minor">
+            <a:schemeClr val="lt1"/>
+          </a:fontRef>
+        </p:style>
+        <p:txBody>
+          <a:bodyPr rtlCol="0" anchor="ctr" wrap="square"/>
+          <a:lstStyle/>
+          <a:p>
+            <a:pPr algn="ctr"/>
+            <a:r>
+              <a:rPr sz="1600" b="1">
+                <a:solidFill>
+                  <a:srgbClr val="0D47A1"/>
+                </a:solidFill>
+              </a:rPr>
+              <a:t>Pipeline Reconciliation</a:t>
+            </a:r>
+          </a:p>
+          <a:p>
+            <a:pPr>
+              <a:spcBef>
+                <a:spcPts val="400"/>
+              </a:spcBef>
+            </a:pPr>
+            <a:r>
+              <a:rPr sz="1100">
+                <a:solidFill>
+                  <a:srgbClr val="2D2D2D"/>
+                </a:solidFill>
+              </a:rPr>
+              <a:t>Rows in source files:  39,224,735</a:t>
+            </a:r>
+          </a:p>
+          <a:p>
+            <a:pPr>
+              <a:spcBef>
+                <a:spcPts val="400"/>
+              </a:spcBef>
+            </a:pPr>
+            <a:r>
+              <a:rPr sz="1100">
+                <a:solidFill>
+                  <a:srgbClr val="2D2D2D"/>
+                </a:solidFill>
+              </a:rPr>
+              <a:t>Rows loaded to Bronze:  39,224,735 (0 lost)</a:t>
+            </a:r>
+          </a:p>
+          <a:p>
+            <a:pPr>
+              <a:spcBef>
+                <a:spcPts val="400"/>
+              </a:spcBef>
+            </a:pPr>
+            <a:r>
+              <a:rPr sz="1100">
+                <a:solidFill>
+                  <a:srgbClr val="2D2D2D"/>
+                </a:solidFill>
+              </a:rPr>
+              <a:t>Rows in Silver:  39,224,735 (flagged, not removed)</a:t>
+            </a:r>
+          </a:p>
+          <a:p>
+            <a:pPr>
+              <a:spcBef>
+                <a:spcPts val="400"/>
+              </a:spcBef>
+            </a:pPr>
+            <a:r>
+              <a:rPr sz="1100">
+                <a:solidFill>
+                  <a:srgbClr val="2D2D2D"/>
+                </a:solidFill>
+              </a:rPr>
+              <a:t>Rows in Gold (valid only):  38,053,445</a:t>
+            </a:r>
+          </a:p>
+          <a:p>
+            <a:pPr>
+              <a:spcBef>
+                <a:spcPts val="400"/>
+              </a:spcBef>
+            </a:pPr>
+            <a:r>
+              <a:rPr sz="1100">
+                <a:solidFill>
+                  <a:srgbClr val="2D2D2D"/>
+                </a:solidFill>
+              </a:rPr>
+              <a:t>Rows flagged invalid:  1,171,290 (3.0%)</a:t>
+            </a:r>
+          </a:p>
+        </p:txBody>
+      </p:sp>
+      <p:sp>
+        <p:nvSpPr>
+          <p:cNvPr id="6" name="Rounded Rectangle 5"/>
+          <p:cNvSpPr/>
+          <p:nvPr/>
+        </p:nvSpPr>
+        <p:spPr>
+          <a:xfrm>
+            <a:off x="6100000" y="1000000"/>
+            <a:ext cx="5700000" cy="3200000"/>
+          </a:xfrm>
+          <a:prstGeom prst="roundRect">
+            <a:avLst/>
+          </a:prstGeom>
+          <a:solidFill>
+            <a:srgbClr val="FCE4EC"/>
+          </a:solidFill>
+          <a:ln>
+            <a:noFill/>
+          </a:ln>
+        </p:spPr>
+        <p:style>
+          <a:lnRef idx="1">
+            <a:schemeClr val="accent1"/>
+          </a:lnRef>
+          <a:fillRef idx="3">
+            <a:schemeClr val="accent1"/>
+          </a:fillRef>
+          <a:effectRef idx="2">
+            <a:schemeClr val="accent1"/>
+          </a:effectRef>
+          <a:fontRef idx="minor">
+            <a:schemeClr val="lt1"/>
+          </a:fontRef>
+        </p:style>
+        <p:txBody>
+          <a:bodyPr rtlCol="0" anchor="ctr" wrap="square"/>
+          <a:lstStyle/>
+          <a:p>
+            <a:pPr algn="ctr"/>
+            <a:r>
+              <a:rPr sz="1600" b="1">
+                <a:solidFill>
+                  <a:srgbClr val="FE3082"/>
+                </a:solidFill>
+              </a:rPr>
+              <a:t>Top Defects Found</a:t>
+            </a:r>
+          </a:p>
+          <a:p>
+            <a:pPr>
+              <a:spcBef>
+                <a:spcPts val="500"/>
+              </a:spcBef>
+            </a:pPr>
+            <a:r>
+              <a:rPr sz="1100">
+                <a:solidFill>
+                  <a:srgbClr val="2D2D2D"/>
+                </a:solidFill>
+              </a:rPr>
+              <a:t>•  Null/zero passenger_count: 9.2M (23%) - Kept (warn)</a:t>
+            </a:r>
+          </a:p>
+          <a:p>
+            <a:pPr>
+              <a:spcBef>
+                <a:spcPts val="500"/>
+              </a:spcBef>
+            </a:pPr>
+            <a:r>
+              <a:rPr sz="1100">
+                <a:solidFill>
+                  <a:srgbClr val="2D2D2D"/>
+                </a:solidFill>
+              </a:rPr>
+              <a:t>•  Payment type 0 (undocumented): 9M (23%) - Kept (warn)</a:t>
+            </a:r>
+          </a:p>
+          <a:p>
+            <a:pPr>
+              <a:spcBef>
+                <a:spcPts val="500"/>
+              </a:spcBef>
+            </a:pPr>
+            <a:r>
+              <a:rPr sz="1100">
+                <a:solidFill>
+                  <a:srgbClr val="2D2D2D"/>
+                </a:solidFill>
+              </a:rPr>
+              <a:t>•  Timestamp out of range: 702K (1.8%) - Flagged invalid</a:t>
+            </a:r>
+          </a:p>
+          <a:p>
+            <a:pPr>
+              <a:spcBef>
+                <a:spcPts val="500"/>
+              </a:spcBef>
+            </a:pPr>
+            <a:r>
+              <a:rPr sz="1100">
+                <a:solidFill>
+                  <a:srgbClr val="2D2D2D"/>
+                </a:solidFill>
+              </a:rPr>
+              <a:t>•  Negative fare: 247K (0.6%) - Flagged invalid</a:t>
+            </a:r>
+          </a:p>
+          <a:p>
+            <a:pPr>
+              <a:spcBef>
+                <a:spcPts val="500"/>
+              </a:spcBef>
+            </a:pPr>
+            <a:r>
+              <a:rPr sz="1100">
+                <a:solidFill>
+                  <a:srgbClr val="2D2D2D"/>
+                </a:solidFill>
+              </a:rPr>
+              <a:t>•  Distance &gt; 100 miles: 131K (0.3%) - Flagged invalid</a:t>
+            </a:r>
+          </a:p>
+          <a:p>
+            <a:pPr>
+              <a:spcBef>
+                <a:spcPts val="500"/>
+              </a:spcBef>
+            </a:pPr>
+            <a:r>
+              <a:rPr sz="1100">
+                <a:solidFill>
+                  <a:srgbClr val="2D2D2D"/>
+                </a:solidFill>
+              </a:rPr>
+              <a:t>•  Dropoff before pickup: 87K (0.2%) - Flagged invalid</a:t>
+            </a:r>
+          </a:p>
+        </p:txBody>
+      </p:sp>
+      <p:sp>
+        <p:nvSpPr>
+          <p:cNvPr id="7" name="Rounded Rectangle 6"/>
+          <p:cNvSpPr/>
+          <p:nvPr/>
+        </p:nvSpPr>
+        <p:spPr>
+          <a:xfrm>
+            <a:off x="400000" y="3100000"/>
+            <a:ext cx="5400000" cy="1100000"/>
+          </a:xfrm>
+          <a:prstGeom prst="roundRect">
+            <a:avLst/>
+          </a:prstGeom>
+          <a:solidFill>
+            <a:srgbClr val="FFF3E0"/>
+          </a:solidFill>
+          <a:ln>
+            <a:noFill/>
+          </a:ln>
+        </p:spPr>
+        <p:style>
+          <a:lnRef idx="1">
+            <a:schemeClr val="accent1"/>
+          </a:lnRef>
+          <a:fillRef idx="3">
+            <a:schemeClr val="accent1"/>
+          </a:fillRef>
+          <a:effectRef idx="2">
+            <a:schemeClr val="accent1"/>
+          </a:effectRef>
+          <a:fontRef idx="minor">
+            <a:schemeClr val="lt1"/>
+          </a:fontRef>
+        </p:style>
+        <p:txBody>
+          <a:bodyPr rtlCol="0" anchor="ctr" wrap="square"/>
+          <a:lstStyle/>
+          <a:p>
+            <a:pPr algn="ctr"/>
+            <a:r>
+              <a:rPr sz="1400" b="1">
+                <a:solidFill>
+                  <a:srgbClr val="E65100"/>
+                </a:solidFill>
+              </a:rPr>
+              <a:t>The Cash Tip Trap</a:t>
+            </a:r>
+          </a:p>
+          <a:p>
+            <a:pPr>
+              <a:spcBef>
+                <a:spcPts val="400"/>
+              </a:spcBef>
+            </a:pPr>
+            <a:r>
+              <a:rPr sz="1100">
+                <a:solidFill>
+                  <a:srgbClr val="2D2D2D"/>
+                </a:solidFill>
+              </a:rPr>
+              <a:t>tip_amount is recorded for credit card payments only. Cash tips appear as $0.00. Our tip analysis is limited to credit card transactions and we state this explicitly.</a:t>
+            </a:r>
+          </a:p>
+        </p:txBody>
+      </p:sp>
+      <p:sp>
+        <p:nvSpPr>
+          <p:cNvPr id="8" name="Rounded Rectangle 7"/>
+          <p:cNvSpPr/>
+          <p:nvPr/>
+        </p:nvSpPr>
+        <p:spPr>
+          <a:xfrm>
+            <a:off x="400000" y="4500000"/>
+            <a:ext cx="11400000" cy="1500000"/>
+          </a:xfrm>
+          <a:prstGeom prst="roundRect">
+            <a:avLst/>
+          </a:prstGeom>
+          <a:solidFill>
+            <a:srgbClr val="E8F5E9"/>
+          </a:solidFill>
+          <a:ln>
+            <a:noFill/>
+          </a:ln>
+        </p:spPr>
+        <p:style>
+          <a:lnRef idx="1">
+            <a:schemeClr val="accent1"/>
+          </a:lnRef>
+          <a:fillRef idx="3">
+            <a:schemeClr val="accent1"/>
+          </a:fillRef>
+          <a:effectRef idx="2">
+            <a:schemeClr val="accent1"/>
+          </a:effectRef>
+          <a:fontRef idx="minor">
+            <a:schemeClr val="lt1"/>
+          </a:fontRef>
+        </p:style>
+        <p:txBody>
+          <a:bodyPr rtlCol="0" anchor="ctr" wrap="square"/>
+          <a:lstStyle/>
+          <a:p>
+            <a:pPr algn="ctr"/>
+            <a:r>
+              <a:rPr sz="1400" b="1">
+                <a:solidFill>
+                  <a:srgbClr val="2E7D32"/>
+                </a:solidFill>
+              </a:rPr>
+              <a:t>Our Approach: Flag, Don't Delete</a:t>
+            </a:r>
+          </a:p>
+          <a:p>
+            <a:pPr>
+              <a:spcBef>
+                <a:spcPts val="400"/>
+              </a:spcBef>
+            </a:pPr>
+            <a:r>
+              <a:rPr sz="1200">
+                <a:solidFill>
+                  <a:srgbClr val="2D2D2D"/>
+                </a:solidFill>
+              </a:rPr>
+              <a:t>Every row gets is_valid (boolean) + dq_flag_reason (which checks failed). Silver keeps all 39.2M rows. Gold filters to valid only. Full traceability preserved. Two defects found NOT in the data catalog: payment_type 0 and null passenger_count.</a:t>
             </a:r>
           </a:p>
         </p:txBody>
@@ -8343,7 +10726,24 @@
       <p:grpSpPr/>
       <p:sp>
         <p:nvSpPr>
-          <p:cNvPr id="2" name="Title 1"/>
+          <p:cNvPr id="2" name="Text Placeholder 1"/>
+          <p:cNvSpPr>
+            <a:spLocks noGrp="1"/>
+          </p:cNvSpPr>
+          <p:nvPr>
+            <p:ph type="body" idx="13" sz="quarter"/>
+          </p:nvPr>
+        </p:nvSpPr>
+        <p:spPr/>
+        <p:txBody>
+          <a:bodyPr/>
+          <a:lstStyle/>
+          <a:p/>
+        </p:txBody>
+      </p:sp>
+      <p:sp>
+        <p:nvSpPr>
+          <p:cNvPr id="3" name="Title 2"/>
           <p:cNvSpPr>
             <a:spLocks noGrp="1"/>
           </p:cNvSpPr>
@@ -8357,19 +10757,19 @@
           <a:lstStyle/>
           <a:p>
             <a:r>
-              <a:t>Year-over-Year Finding</a:t>
-            </a:r>
-          </a:p>
-        </p:txBody>
-      </p:sp>
-      <p:sp>
-        <p:nvSpPr>
-          <p:cNvPr id="3" name="Content Placeholder 2"/>
-          <p:cNvSpPr>
-            <a:spLocks noGrp="1"/>
-          </p:cNvSpPr>
-          <p:nvPr>
-            <p:ph idx="1"/>
+              <a:t>4</a:t>
+            </a:r>
+          </a:p>
+        </p:txBody>
+      </p:sp>
+      <p:sp>
+        <p:nvSpPr>
+          <p:cNvPr id="4" name="Subtitle 3"/>
+          <p:cNvSpPr>
+            <a:spLocks noGrp="1"/>
+          </p:cNvSpPr>
+          <p:nvPr>
+            <p:ph type="subTitle" idx="1"/>
           </p:nvPr>
         </p:nvSpPr>
         <p:spPr/>
@@ -8378,56 +10778,7 @@
           <a:lstStyle/>
           <a:p>
             <a:r>
-              <a:t>[The Claim]</a:t>
-            </a:r>
-          </a:p>
-          <a:p>
-            <a:r>
-              <a:t>"[X changed by Y% between January-May 2025 and January-May 2026]"</a:t>
-            </a:r>
-          </a:p>
-          <a:p/>
-          <a:p>
-            <a:r>
-              <a:t>Is the comparison fair?</a:t>
-            </a:r>
-          </a:p>
-          <a:p>
-            <a:r>
-              <a:t>  [Same months, same vehicle types, same filters applied to both years]</a:t>
-            </a:r>
-          </a:p>
-          <a:p/>
-          <a:p>
-            <a:r>
-              <a:t>Could a data quality issue explain the difference?</a:t>
-            </a:r>
-          </a:p>
-          <a:p>
-            <a:r>
-              <a:t>  [What we checked and ruled out]</a:t>
-            </a:r>
-          </a:p>
-          <a:p/>
-          <a:p>
-            <a:r>
-              <a:t>Is the change large enough to be real?</a:t>
-            </a:r>
-          </a:p>
-          <a:p>
-            <a:r>
-              <a:t>  [Evidence it is not noise, or honest statement of confidence level]</a:t>
-            </a:r>
-          </a:p>
-          <a:p/>
-          <a:p>
-            <a:r>
-              <a:t>So What?</a:t>
-            </a:r>
-          </a:p>
-          <a:p>
-            <a:r>
-              <a:t>  [What this means for the business, what action it suggests]</a:t>
+              <a:t>Year-over-Year Analysis</a:t>
             </a:r>
           </a:p>
         </p:txBody>
@@ -8466,7 +10817,373 @@
           <a:lstStyle/>
           <a:p>
             <a:r>
-              <a:t>Dashboard</a:t>
+              <a:t>Year-over-Year Finding</a:t>
+            </a:r>
+          </a:p>
+        </p:txBody>
+      </p:sp>
+      <p:sp>
+        <p:nvSpPr>
+          <p:cNvPr id="3" name="Content Placeholder 2"/>
+          <p:cNvSpPr>
+            <a:spLocks noGrp="1"/>
+          </p:cNvSpPr>
+          <p:nvPr>
+            <p:ph idx="1"/>
+          </p:nvPr>
+        </p:nvSpPr>
+        <p:spPr/>
+        <p:txBody>
+          <a:bodyPr/>
+          <a:lstStyle/>
+          <a:p/>
+        </p:txBody>
+      </p:sp>
+      <p:sp>
+        <p:nvSpPr>
+          <p:cNvPr id="4" name="Rectangle 3"/>
+          <p:cNvSpPr/>
+          <p:nvPr/>
+        </p:nvSpPr>
+        <p:spPr>
+          <a:xfrm>
+            <a:off x="0" y="800000"/>
+            <a:ext cx="12192000" cy="80000"/>
+          </a:xfrm>
+          <a:prstGeom prst="rect">
+            <a:avLst/>
+          </a:prstGeom>
+          <a:solidFill>
+            <a:srgbClr val="FE3082"/>
+          </a:solidFill>
+          <a:ln>
+            <a:noFill/>
+          </a:ln>
+        </p:spPr>
+        <p:style>
+          <a:lnRef idx="1">
+            <a:schemeClr val="accent1"/>
+          </a:lnRef>
+          <a:fillRef idx="3">
+            <a:schemeClr val="accent1"/>
+          </a:fillRef>
+          <a:effectRef idx="2">
+            <a:schemeClr val="accent1"/>
+          </a:effectRef>
+          <a:fontRef idx="minor">
+            <a:schemeClr val="lt1"/>
+          </a:fontRef>
+        </p:style>
+        <p:txBody>
+          <a:bodyPr rtlCol="0" anchor="ctr"/>
+          <a:lstStyle/>
+          <a:p>
+            <a:pPr algn="ctr"/>
+          </a:p>
+        </p:txBody>
+      </p:sp>
+      <p:sp>
+        <p:nvSpPr>
+          <p:cNvPr id="5" name="Rounded Rectangle 4"/>
+          <p:cNvSpPr/>
+          <p:nvPr/>
+        </p:nvSpPr>
+        <p:spPr>
+          <a:xfrm>
+            <a:off x="400000" y="1100000"/>
+            <a:ext cx="11400000" cy="1200000"/>
+          </a:xfrm>
+          <a:prstGeom prst="roundRect">
+            <a:avLst/>
+          </a:prstGeom>
+          <a:solidFill>
+            <a:srgbClr val="FCE4EC"/>
+          </a:solidFill>
+          <a:ln>
+            <a:noFill/>
+          </a:ln>
+        </p:spPr>
+        <p:style>
+          <a:lnRef idx="1">
+            <a:schemeClr val="accent1"/>
+          </a:lnRef>
+          <a:fillRef idx="3">
+            <a:schemeClr val="accent1"/>
+          </a:fillRef>
+          <a:effectRef idx="2">
+            <a:schemeClr val="accent1"/>
+          </a:effectRef>
+          <a:fontRef idx="minor">
+            <a:schemeClr val="lt1"/>
+          </a:fontRef>
+        </p:style>
+        <p:txBody>
+          <a:bodyPr rtlCol="0" anchor="ctr" wrap="square"/>
+          <a:lstStyle/>
+          <a:p>
+            <a:pPr algn="ctr"/>
+            <a:r>
+              <a:rPr sz="2200" b="1">
+                <a:solidFill>
+                  <a:srgbClr val="2D2D2D"/>
+                </a:solidFill>
+              </a:rPr>
+              <a:t>[STATE THE YEAR-OVER-YEAR FINDING HERE]</a:t>
+            </a:r>
+          </a:p>
+          <a:p>
+            <a:pPr algn="ctr"/>
+            <a:r>
+              <a:rPr sz="1300" i="1">
+                <a:solidFill>
+                  <a:srgbClr val="555555"/>
+                </a:solidFill>
+              </a:rPr>
+              <a:t>e.g., During rain/snow events, outer-borough demand fell X% YoY while Manhattan held steady</a:t>
+            </a:r>
+          </a:p>
+        </p:txBody>
+      </p:sp>
+      <p:sp>
+        <p:nvSpPr>
+          <p:cNvPr id="6" name="Rounded Rectangle 5"/>
+          <p:cNvSpPr/>
+          <p:nvPr/>
+        </p:nvSpPr>
+        <p:spPr>
+          <a:xfrm>
+            <a:off x="400000" y="2600000"/>
+            <a:ext cx="5400000" cy="1400000"/>
+          </a:xfrm>
+          <a:prstGeom prst="roundRect">
+            <a:avLst/>
+          </a:prstGeom>
+          <a:solidFill>
+            <a:srgbClr val="E3F2FD"/>
+          </a:solidFill>
+          <a:ln>
+            <a:noFill/>
+          </a:ln>
+        </p:spPr>
+        <p:style>
+          <a:lnRef idx="1">
+            <a:schemeClr val="accent1"/>
+          </a:lnRef>
+          <a:fillRef idx="3">
+            <a:schemeClr val="accent1"/>
+          </a:fillRef>
+          <a:effectRef idx="2">
+            <a:schemeClr val="accent1"/>
+          </a:effectRef>
+          <a:fontRef idx="minor">
+            <a:schemeClr val="lt1"/>
+          </a:fontRef>
+        </p:style>
+        <p:txBody>
+          <a:bodyPr rtlCol="0" anchor="ctr" wrap="square"/>
+          <a:lstStyle/>
+          <a:p>
+            <a:pPr algn="ctr"/>
+            <a:r>
+              <a:rPr sz="1400" b="1">
+                <a:solidFill>
+                  <a:srgbClr val="0D47A1"/>
+                </a:solidFill>
+              </a:rPr>
+              <a:t>Is the comparison fair?</a:t>
+            </a:r>
+          </a:p>
+          <a:p>
+            <a:r>
+              <a:rPr sz="1200">
+                <a:solidFill>
+                  <a:srgbClr val="2D2D2D"/>
+                </a:solidFill>
+              </a:rPr>
+              <a:t>Same months (Jan-May), same vehicle types, same DQ filters applied to both years. Weather conditions matched on same hourly granularity.</a:t>
+            </a:r>
+          </a:p>
+        </p:txBody>
+      </p:sp>
+      <p:sp>
+        <p:nvSpPr>
+          <p:cNvPr id="7" name="Rounded Rectangle 6"/>
+          <p:cNvSpPr/>
+          <p:nvPr/>
+        </p:nvSpPr>
+        <p:spPr>
+          <a:xfrm>
+            <a:off x="6100000" y="2600000"/>
+            <a:ext cx="5700000" cy="1400000"/>
+          </a:xfrm>
+          <a:prstGeom prst="roundRect">
+            <a:avLst/>
+          </a:prstGeom>
+          <a:solidFill>
+            <a:srgbClr val="E8F5E9"/>
+          </a:solidFill>
+          <a:ln>
+            <a:noFill/>
+          </a:ln>
+        </p:spPr>
+        <p:style>
+          <a:lnRef idx="1">
+            <a:schemeClr val="accent1"/>
+          </a:lnRef>
+          <a:fillRef idx="3">
+            <a:schemeClr val="accent1"/>
+          </a:fillRef>
+          <a:effectRef idx="2">
+            <a:schemeClr val="accent1"/>
+          </a:effectRef>
+          <a:fontRef idx="minor">
+            <a:schemeClr val="lt1"/>
+          </a:fontRef>
+        </p:style>
+        <p:txBody>
+          <a:bodyPr rtlCol="0" anchor="ctr" wrap="square"/>
+          <a:lstStyle/>
+          <a:p>
+            <a:pPr algn="ctr"/>
+            <a:r>
+              <a:rPr sz="1400" b="1">
+                <a:solidFill>
+                  <a:srgbClr val="2E7D32"/>
+                </a:solidFill>
+              </a:rPr>
+              <a:t>Could a DQ issue explain it?</a:t>
+            </a:r>
+          </a:p>
+          <a:p>
+            <a:r>
+              <a:rPr sz="1200">
+                <a:solidFill>
+                  <a:srgbClr val="2D2D2D"/>
+                </a:solidFill>
+              </a:rPr>
+              <a:t>[What we checked and ruled out: e.g., invalid rows distributed evenly across both years, no systematic bias]</a:t>
+            </a:r>
+          </a:p>
+        </p:txBody>
+      </p:sp>
+      <p:sp>
+        <p:nvSpPr>
+          <p:cNvPr id="8" name="Rounded Rectangle 7"/>
+          <p:cNvSpPr/>
+          <p:nvPr/>
+        </p:nvSpPr>
+        <p:spPr>
+          <a:xfrm>
+            <a:off x="400000" y="4300000"/>
+            <a:ext cx="5400000" cy="1400000"/>
+          </a:xfrm>
+          <a:prstGeom prst="roundRect">
+            <a:avLst/>
+          </a:prstGeom>
+          <a:solidFill>
+            <a:srgbClr val="FFF3E0"/>
+          </a:solidFill>
+          <a:ln>
+            <a:noFill/>
+          </a:ln>
+        </p:spPr>
+        <p:style>
+          <a:lnRef idx="1">
+            <a:schemeClr val="accent1"/>
+          </a:lnRef>
+          <a:fillRef idx="3">
+            <a:schemeClr val="accent1"/>
+          </a:fillRef>
+          <a:effectRef idx="2">
+            <a:schemeClr val="accent1"/>
+          </a:effectRef>
+          <a:fontRef idx="minor">
+            <a:schemeClr val="lt1"/>
+          </a:fontRef>
+        </p:style>
+        <p:txBody>
+          <a:bodyPr rtlCol="0" anchor="ctr" wrap="square"/>
+          <a:lstStyle/>
+          <a:p>
+            <a:pPr algn="ctr"/>
+            <a:r>
+              <a:rPr sz="1400" b="1">
+                <a:solidFill>
+                  <a:srgbClr val="E65100"/>
+                </a:solidFill>
+              </a:rPr>
+              <a:t>Is it large enough to be real?</a:t>
+            </a:r>
+          </a:p>
+          <a:p>
+            <a:r>
+              <a:rPr sz="1200">
+                <a:solidFill>
+                  <a:srgbClr val="2D2D2D"/>
+                </a:solidFill>
+              </a:rPr>
+              <a:t>[Evidence the change is not noise, or honest confidence statement]</a:t>
+            </a:r>
+          </a:p>
+        </p:txBody>
+      </p:sp>
+      <p:sp>
+        <p:nvSpPr>
+          <p:cNvPr id="9" name="Rounded Rectangle 8"/>
+          <p:cNvSpPr/>
+          <p:nvPr/>
+        </p:nvSpPr>
+        <p:spPr>
+          <a:xfrm>
+            <a:off x="6100000" y="4300000"/>
+            <a:ext cx="5700000" cy="1400000"/>
+          </a:xfrm>
+          <a:prstGeom prst="roundRect">
+            <a:avLst/>
+          </a:prstGeom>
+          <a:solidFill>
+            <a:srgbClr val="E3F2FD"/>
+          </a:solidFill>
+          <a:ln>
+            <a:noFill/>
+          </a:ln>
+        </p:spPr>
+        <p:style>
+          <a:lnRef idx="1">
+            <a:schemeClr val="accent1"/>
+          </a:lnRef>
+          <a:fillRef idx="3">
+            <a:schemeClr val="accent1"/>
+          </a:fillRef>
+          <a:effectRef idx="2">
+            <a:schemeClr val="accent1"/>
+          </a:effectRef>
+          <a:fontRef idx="minor">
+            <a:schemeClr val="lt1"/>
+          </a:fontRef>
+        </p:style>
+        <p:txBody>
+          <a:bodyPr rtlCol="0" anchor="ctr" wrap="square"/>
+          <a:lstStyle/>
+          <a:p>
+            <a:pPr algn="ctr"/>
+            <a:r>
+              <a:rPr sz="1400" b="1">
+                <a:solidFill>
+                  <a:srgbClr val="0D47A1"/>
+                </a:solidFill>
+              </a:rPr>
+              <a:t>So What?</a:t>
+            </a:r>
+          </a:p>
+          <a:p>
+            <a:r>
+              <a:rPr sz="1200">
+                <a:solidFill>
+                  <a:srgbClr val="2D2D2D"/>
+                </a:solidFill>
+              </a:rPr>
+              <a:t>[Business recommendation: e.g., stage more drivers in X borough during Y weather because Z]</a:t>
             </a:r>
           </a:p>
         </p:txBody>
@@ -8505,7 +11222,116 @@
           <a:lstStyle/>
           <a:p>
             <a:r>
-              <a:t>Supporting Analysis</a:t>
+              <a:t>Dashboard</a:t>
+            </a:r>
+          </a:p>
+        </p:txBody>
+      </p:sp>
+      <p:sp>
+        <p:nvSpPr>
+          <p:cNvPr id="3" name="Content Placeholder 2"/>
+          <p:cNvSpPr>
+            <a:spLocks noGrp="1"/>
+          </p:cNvSpPr>
+          <p:nvPr>
+            <p:ph idx="1"/>
+          </p:nvPr>
+        </p:nvSpPr>
+        <p:spPr/>
+        <p:txBody>
+          <a:bodyPr/>
+          <a:lstStyle/>
+          <a:p/>
+        </p:txBody>
+      </p:sp>
+      <p:sp>
+        <p:nvSpPr>
+          <p:cNvPr id="4" name="Rectangle 3"/>
+          <p:cNvSpPr/>
+          <p:nvPr/>
+        </p:nvSpPr>
+        <p:spPr>
+          <a:xfrm>
+            <a:off x="0" y="800000"/>
+            <a:ext cx="12192000" cy="80000"/>
+          </a:xfrm>
+          <a:prstGeom prst="rect">
+            <a:avLst/>
+          </a:prstGeom>
+          <a:solidFill>
+            <a:srgbClr val="FE3082"/>
+          </a:solidFill>
+          <a:ln>
+            <a:noFill/>
+          </a:ln>
+        </p:spPr>
+        <p:style>
+          <a:lnRef idx="1">
+            <a:schemeClr val="accent1"/>
+          </a:lnRef>
+          <a:fillRef idx="3">
+            <a:schemeClr val="accent1"/>
+          </a:fillRef>
+          <a:effectRef idx="2">
+            <a:schemeClr val="accent1"/>
+          </a:effectRef>
+          <a:fontRef idx="minor">
+            <a:schemeClr val="lt1"/>
+          </a:fontRef>
+        </p:style>
+        <p:txBody>
+          <a:bodyPr rtlCol="0" anchor="ctr"/>
+          <a:lstStyle/>
+          <a:p>
+            <a:pPr algn="ctr"/>
+          </a:p>
+        </p:txBody>
+      </p:sp>
+      <p:sp>
+        <p:nvSpPr>
+          <p:cNvPr id="5" name="TextBox 4"/>
+          <p:cNvSpPr txBox="1"/>
+          <p:nvPr/>
+        </p:nvSpPr>
+        <p:spPr>
+          <a:xfrm>
+            <a:off x="2000000" y="2500000"/>
+            <a:ext cx="8000000" cy="2000000"/>
+          </a:xfrm>
+          <a:prstGeom prst="rect">
+            <a:avLst/>
+          </a:prstGeom>
+          <a:noFill/>
+        </p:spPr>
+        <p:txBody>
+          <a:bodyPr wrap="none">
+            <a:spAutoFit/>
+          </a:bodyPr>
+          <a:lstStyle/>
+          <a:p>
+            <a:pPr algn="ctr"/>
+            <a:r>
+              <a:rPr sz="2000" i="1">
+                <a:solidFill>
+                  <a:srgbClr val="555555"/>
+                </a:solidFill>
+              </a:rPr>
+              <a:t>[Insert Tableau Dashboard Screenshot]</a:t>
+            </a:r>
+          </a:p>
+          <a:p>
+            <a:pPr algn="ctr">
+              <a:spcBef>
+                <a:spcPts val="1600"/>
+              </a:spcBef>
+            </a:pPr>
+            <a:r>
+              <a:rPr sz="1400">
+                <a:solidFill>
+                  <a:srgbClr val="2D2D2D"/>
+                </a:solidFill>
+              </a:rPr>
+              <a:t>Connected to AMO_GOLD.MART_WEATHER_DEMAND (34,719 rows)</a:t>
             </a:r>
           </a:p>
         </p:txBody>
@@ -8530,59 +11356,130 @@
       <p:grpSpPr/>
       <p:sp>
         <p:nvSpPr>
-          <p:cNvPr id="2" name="Text Placeholder 1"/>
-          <p:cNvSpPr>
-            <a:spLocks noGrp="1"/>
-          </p:cNvSpPr>
-          <p:nvPr>
-            <p:ph type="body" idx="13" sz="quarter"/>
+          <p:cNvPr id="2" name="Title 1"/>
+          <p:cNvSpPr>
+            <a:spLocks noGrp="1"/>
+          </p:cNvSpPr>
+          <p:nvPr>
+            <p:ph type="title"/>
           </p:nvPr>
         </p:nvSpPr>
         <p:spPr/>
         <p:txBody>
           <a:bodyPr/>
           <a:lstStyle/>
+          <a:p>
+            <a:r>
+              <a:t>Supporting Analysis (duplicate as needed)</a:t>
+            </a:r>
+          </a:p>
+        </p:txBody>
+      </p:sp>
+      <p:sp>
+        <p:nvSpPr>
+          <p:cNvPr id="3" name="Content Placeholder 2"/>
+          <p:cNvSpPr>
+            <a:spLocks noGrp="1"/>
+          </p:cNvSpPr>
+          <p:nvPr>
+            <p:ph idx="1"/>
+          </p:nvPr>
+        </p:nvSpPr>
+        <p:spPr/>
+        <p:txBody>
+          <a:bodyPr/>
+          <a:lstStyle/>
           <a:p/>
         </p:txBody>
       </p:sp>
       <p:sp>
         <p:nvSpPr>
-          <p:cNvPr id="3" name="Title 2"/>
-          <p:cNvSpPr>
-            <a:spLocks noGrp="1"/>
-          </p:cNvSpPr>
-          <p:nvPr>
-            <p:ph type="title"/>
-          </p:nvPr>
-        </p:nvSpPr>
-        <p:spPr/>
-        <p:txBody>
-          <a:bodyPr/>
-          <a:lstStyle/>
-          <a:p>
-            <a:r>
-              <a:t>5</a:t>
-            </a:r>
-          </a:p>
-        </p:txBody>
-      </p:sp>
-      <p:sp>
-        <p:nvSpPr>
-          <p:cNvPr id="4" name="Subtitle 3"/>
-          <p:cNvSpPr>
-            <a:spLocks noGrp="1"/>
-          </p:cNvSpPr>
-          <p:nvPr>
-            <p:ph type="subTitle" idx="1"/>
-          </p:nvPr>
-        </p:nvSpPr>
-        <p:spPr/>
-        <p:txBody>
-          <a:bodyPr/>
-          <a:lstStyle/>
-          <a:p>
-            <a:r>
-              <a:t>Technical Deep Dive</a:t>
+          <p:cNvPr id="4" name="Rectangle 3"/>
+          <p:cNvSpPr/>
+          <p:nvPr/>
+        </p:nvSpPr>
+        <p:spPr>
+          <a:xfrm>
+            <a:off x="0" y="800000"/>
+            <a:ext cx="12192000" cy="80000"/>
+          </a:xfrm>
+          <a:prstGeom prst="rect">
+            <a:avLst/>
+          </a:prstGeom>
+          <a:solidFill>
+            <a:srgbClr val="FE3082"/>
+          </a:solidFill>
+          <a:ln>
+            <a:noFill/>
+          </a:ln>
+        </p:spPr>
+        <p:style>
+          <a:lnRef idx="1">
+            <a:schemeClr val="accent1"/>
+          </a:lnRef>
+          <a:fillRef idx="3">
+            <a:schemeClr val="accent1"/>
+          </a:fillRef>
+          <a:effectRef idx="2">
+            <a:schemeClr val="accent1"/>
+          </a:effectRef>
+          <a:fontRef idx="minor">
+            <a:schemeClr val="lt1"/>
+          </a:fontRef>
+        </p:style>
+        <p:txBody>
+          <a:bodyPr rtlCol="0" anchor="ctr"/>
+          <a:lstStyle/>
+          <a:p>
+            <a:pPr algn="ctr"/>
+          </a:p>
+        </p:txBody>
+      </p:sp>
+      <p:sp>
+        <p:nvSpPr>
+          <p:cNvPr id="5" name="TextBox 4"/>
+          <p:cNvSpPr txBox="1"/>
+          <p:nvPr/>
+        </p:nvSpPr>
+        <p:spPr>
+          <a:xfrm>
+            <a:off x="2000000" y="2500000"/>
+            <a:ext cx="8000000" cy="2000000"/>
+          </a:xfrm>
+          <a:prstGeom prst="rect">
+            <a:avLst/>
+          </a:prstGeom>
+          <a:noFill/>
+        </p:spPr>
+        <p:txBody>
+          <a:bodyPr wrap="none">
+            <a:spAutoFit/>
+          </a:bodyPr>
+          <a:lstStyle/>
+          <a:p>
+            <a:pPr algn="ctr"/>
+            <a:r>
+              <a:rPr sz="1800" i="1">
+                <a:solidFill>
+                  <a:srgbClr val="555555"/>
+                </a:solidFill>
+              </a:rPr>
+              <a:t>[Additional charts / breakdowns from Tableau]</a:t>
+            </a:r>
+          </a:p>
+          <a:p>
+            <a:pPr algn="ctr">
+              <a:spcBef>
+                <a:spcPts val="1200"/>
+              </a:spcBef>
+            </a:pPr>
+            <a:r>
+              <a:rPr sz="1400">
+                <a:solidFill>
+                  <a:srgbClr val="2D2D2D"/>
+                </a:solidFill>
+              </a:rPr>
+              <a:t>Revenue by weather, duration by borough, payment type splits</a:t>
             </a:r>
           </a:p>
         </p:txBody>
@@ -8607,7 +11504,24 @@
       <p:grpSpPr/>
       <p:sp>
         <p:nvSpPr>
-          <p:cNvPr id="2" name="Title 1"/>
+          <p:cNvPr id="2" name="Text Placeholder 1"/>
+          <p:cNvSpPr>
+            <a:spLocks noGrp="1"/>
+          </p:cNvSpPr>
+          <p:nvPr>
+            <p:ph type="body" idx="13" sz="quarter"/>
+          </p:nvPr>
+        </p:nvSpPr>
+        <p:spPr/>
+        <p:txBody>
+          <a:bodyPr/>
+          <a:lstStyle/>
+          <a:p/>
+        </p:txBody>
+      </p:sp>
+      <p:sp>
+        <p:nvSpPr>
+          <p:cNvPr id="3" name="Title 2"/>
           <p:cNvSpPr>
             <a:spLocks noGrp="1"/>
           </p:cNvSpPr>
@@ -8621,19 +11535,19 @@
           <a:lstStyle/>
           <a:p>
             <a:r>
-              <a:t>Technical Decisions and Trade-offs</a:t>
-            </a:r>
-          </a:p>
-        </p:txBody>
-      </p:sp>
-      <p:sp>
-        <p:nvSpPr>
-          <p:cNvPr id="3" name="Content Placeholder 2"/>
-          <p:cNvSpPr>
-            <a:spLocks noGrp="1"/>
-          </p:cNvSpPr>
-          <p:nvPr>
-            <p:ph idx="1"/>
+              <a:t>5</a:t>
+            </a:r>
+          </a:p>
+        </p:txBody>
+      </p:sp>
+      <p:sp>
+        <p:nvSpPr>
+          <p:cNvPr id="4" name="Subtitle 3"/>
+          <p:cNvSpPr>
+            <a:spLocks noGrp="1"/>
+          </p:cNvSpPr>
+          <p:nvPr>
+            <p:ph type="subTitle" idx="1"/>
           </p:nvPr>
         </p:nvSpPr>
         <p:spPr/>
@@ -8642,64 +11556,7 @@
           <a:lstStyle/>
           <a:p>
             <a:r>
-              <a:t>dbt Model Layering</a:t>
-            </a:r>
-          </a:p>
-          <a:p>
-            <a:r>
-              <a:t>  Staging (views): [reasoning - cheap, always current, no storage cost]</a:t>
-            </a:r>
-          </a:p>
-          <a:p>
-            <a:r>
-              <a:t>  Marts (tables): [reasoning - queried repeatedly by dashboard, pay build cost once]</a:t>
-            </a:r>
-          </a:p>
-          <a:p/>
-          <a:p>
-            <a:r>
-              <a:t>Key Transformation Choices</a:t>
-            </a:r>
-          </a:p>
-          <a:p>
-            <a:r>
-              <a:t>  - [SQL vs DataFrame for specific logic and why]</a:t>
-            </a:r>
-          </a:p>
-          <a:p>
-            <a:r>
-              <a:t>  - [How we handled the Yellow/Green union]</a:t>
-            </a:r>
-          </a:p>
-          <a:p>
-            <a:r>
-              <a:t>  - [Derived columns and their purpose]</a:t>
-            </a:r>
-          </a:p>
-          <a:p/>
-          <a:p>
-            <a:r>
-              <a:t>Testing Strategy</a:t>
-            </a:r>
-          </a:p>
-          <a:p>
-            <a:r>
-              <a:t>  - not_null and unique on keys</a:t>
-            </a:r>
-          </a:p>
-          <a:p>
-            <a:r>
-              <a:t>  - accepted_values on categorical lookups</a:t>
-            </a:r>
-          </a:p>
-          <a:p>
-            <a:r>
-              <a:t>  - relationship tests on zone joins</a:t>
-            </a:r>
-          </a:p>
-          <a:p>
-            <a:r>
-              <a:t>  - [Additional custom tests]</a:t>
+              <a:t>Technical Deep Dive</a:t>
             </a:r>
           </a:p>
         </p:txBody>
@@ -8738,7 +11595,7 @@
           <a:lstStyle/>
           <a:p>
             <a:r>
-              <a:t>Cost and Performance Rationale</a:t>
+              <a:t>Technical Decisions and Trade-offs</a:t>
             </a:r>
           </a:p>
         </p:txBody>
@@ -8757,67 +11614,567 @@
         <p:txBody>
           <a:bodyPr/>
           <a:lstStyle/>
-          <a:p>
-            <a:r>
-              <a:t>Table Types</a:t>
-            </a:r>
-          </a:p>
-          <a:p>
-            <a:r>
-              <a:t>  [Transient vs permanent, and what we traded away]</a:t>
-            </a:r>
-          </a:p>
           <a:p/>
-          <a:p>
-            <a:r>
-              <a:t>Warehouse Sizing</a:t>
-            </a:r>
-          </a:p>
-          <a:p>
-            <a:r>
-              <a:t>  Size: [X-Small / Small / Medium]</a:t>
-            </a:r>
-          </a:p>
-          <a:p>
-            <a:r>
-              <a:t>  Auto-suspend: [X seconds]</a:t>
-            </a:r>
-          </a:p>
-          <a:p>
-            <a:r>
-              <a:t>  Reasoning: [why this fits our workload]</a:t>
-            </a:r>
-          </a:p>
-          <a:p/>
-          <a:p>
-            <a:r>
-              <a:t>File Handling on Load</a:t>
-            </a:r>
-          </a:p>
-          <a:p>
-            <a:r>
-              <a:t>  [How we handled file sizing and formats]</a:t>
-            </a:r>
-          </a:p>
-          <a:p/>
-          <a:p>
-            <a:r>
-              <a:t>At 10x the Data Volume</a:t>
-            </a:r>
-          </a:p>
-          <a:p>
-            <a:r>
-              <a:t>  - [What we would change about ingestion]</a:t>
-            </a:r>
-          </a:p>
-          <a:p>
-            <a:r>
-              <a:t>  - [What we would change about warehouse sizing]</a:t>
-            </a:r>
-          </a:p>
-          <a:p>
-            <a:r>
-              <a:t>  - [What we would change about materialization]</a:t>
+        </p:txBody>
+      </p:sp>
+      <p:sp>
+        <p:nvSpPr>
+          <p:cNvPr id="4" name="Rectangle 3"/>
+          <p:cNvSpPr/>
+          <p:nvPr/>
+        </p:nvSpPr>
+        <p:spPr>
+          <a:xfrm>
+            <a:off x="0" y="800000"/>
+            <a:ext cx="12192000" cy="80000"/>
+          </a:xfrm>
+          <a:prstGeom prst="rect">
+            <a:avLst/>
+          </a:prstGeom>
+          <a:solidFill>
+            <a:srgbClr val="FE3082"/>
+          </a:solidFill>
+          <a:ln>
+            <a:noFill/>
+          </a:ln>
+        </p:spPr>
+        <p:style>
+          <a:lnRef idx="1">
+            <a:schemeClr val="accent1"/>
+          </a:lnRef>
+          <a:fillRef idx="3">
+            <a:schemeClr val="accent1"/>
+          </a:fillRef>
+          <a:effectRef idx="2">
+            <a:schemeClr val="accent1"/>
+          </a:effectRef>
+          <a:fontRef idx="minor">
+            <a:schemeClr val="lt1"/>
+          </a:fontRef>
+        </p:style>
+        <p:txBody>
+          <a:bodyPr rtlCol="0" anchor="ctr"/>
+          <a:lstStyle/>
+          <a:p>
+            <a:pPr algn="ctr"/>
+          </a:p>
+        </p:txBody>
+      </p:sp>
+      <p:sp>
+        <p:nvSpPr>
+          <p:cNvPr id="5" name="Rounded Rectangle 4"/>
+          <p:cNvSpPr/>
+          <p:nvPr/>
+        </p:nvSpPr>
+        <p:spPr>
+          <a:xfrm>
+            <a:off x="400000" y="1000000"/>
+            <a:ext cx="5400000" cy="2200000"/>
+          </a:xfrm>
+          <a:prstGeom prst="roundRect">
+            <a:avLst/>
+          </a:prstGeom>
+          <a:solidFill>
+            <a:srgbClr val="E3F2FD"/>
+          </a:solidFill>
+          <a:ln>
+            <a:noFill/>
+          </a:ln>
+        </p:spPr>
+        <p:style>
+          <a:lnRef idx="1">
+            <a:schemeClr val="accent1"/>
+          </a:lnRef>
+          <a:fillRef idx="3">
+            <a:schemeClr val="accent1"/>
+          </a:fillRef>
+          <a:effectRef idx="2">
+            <a:schemeClr val="accent1"/>
+          </a:effectRef>
+          <a:fontRef idx="minor">
+            <a:schemeClr val="lt1"/>
+          </a:fontRef>
+        </p:style>
+        <p:txBody>
+          <a:bodyPr rtlCol="0" anchor="ctr" wrap="square"/>
+          <a:lstStyle/>
+          <a:p>
+            <a:pPr algn="ctr"/>
+            <a:r>
+              <a:rPr sz="1600" b="1">
+                <a:solidFill>
+                  <a:srgbClr val="0D47A1"/>
+                </a:solidFill>
+              </a:rPr>
+              <a:t>dbt Model Layering</a:t>
+            </a:r>
+          </a:p>
+          <a:p>
+            <a:pPr>
+              <a:spcBef>
+                <a:spcPts val="500"/>
+              </a:spcBef>
+            </a:pPr>
+            <a:r>
+              <a:rPr sz="1100">
+                <a:solidFill>
+                  <a:srgbClr val="2D2D2D"/>
+                </a:solidFill>
+              </a:rPr>
+              <a:t>•  Staging (stg_*): tables, not views. 39M rows too expensive to rebuild per query</a:t>
+            </a:r>
+          </a:p>
+          <a:p>
+            <a:pPr>
+              <a:spcBef>
+                <a:spcPts val="500"/>
+              </a:spcBef>
+            </a:pPr>
+            <a:r>
+              <a:rPr sz="1100">
+                <a:solidFill>
+                  <a:srgbClr val="2D2D2D"/>
+                </a:solidFill>
+              </a:rPr>
+              <a:t>•  Fact (fct_trips): enriched with borough + weather, filtered to valid</a:t>
+            </a:r>
+          </a:p>
+          <a:p>
+            <a:pPr>
+              <a:spcBef>
+                <a:spcPts val="500"/>
+              </a:spcBef>
+            </a:pPr>
+            <a:r>
+              <a:rPr sz="1100">
+                <a:solidFill>
+                  <a:srgbClr val="2D2D2D"/>
+                </a:solidFill>
+              </a:rPr>
+              <a:t>•  Mart (mart_weather_demand): pre-aggregated for Tableau (34K rows)</a:t>
+            </a:r>
+          </a:p>
+          <a:p>
+            <a:pPr>
+              <a:spcBef>
+                <a:spcPts val="500"/>
+              </a:spcBef>
+            </a:pPr>
+            <a:r>
+              <a:rPr sz="1100">
+                <a:solidFill>
+                  <a:srgbClr val="2D2D2D"/>
+                </a:solidFill>
+              </a:rPr>
+              <a:t>•  Dimensions (dim_zones, dim_weather): lookup tables for drilldown</a:t>
+            </a:r>
+          </a:p>
+        </p:txBody>
+      </p:sp>
+      <p:sp>
+        <p:nvSpPr>
+          <p:cNvPr id="6" name="Rounded Rectangle 5"/>
+          <p:cNvSpPr/>
+          <p:nvPr/>
+        </p:nvSpPr>
+        <p:spPr>
+          <a:xfrm>
+            <a:off x="6100000" y="1000000"/>
+            <a:ext cx="5700000" cy="2200000"/>
+          </a:xfrm>
+          <a:prstGeom prst="roundRect">
+            <a:avLst/>
+          </a:prstGeom>
+          <a:solidFill>
+            <a:srgbClr val="E8F5E9"/>
+          </a:solidFill>
+          <a:ln>
+            <a:noFill/>
+          </a:ln>
+        </p:spPr>
+        <p:style>
+          <a:lnRef idx="1">
+            <a:schemeClr val="accent1"/>
+          </a:lnRef>
+          <a:fillRef idx="3">
+            <a:schemeClr val="accent1"/>
+          </a:fillRef>
+          <a:effectRef idx="2">
+            <a:schemeClr val="accent1"/>
+          </a:effectRef>
+          <a:fontRef idx="minor">
+            <a:schemeClr val="lt1"/>
+          </a:fontRef>
+        </p:style>
+        <p:txBody>
+          <a:bodyPr rtlCol="0" anchor="ctr" wrap="square"/>
+          <a:lstStyle/>
+          <a:p>
+            <a:pPr algn="ctr"/>
+            <a:r>
+              <a:rPr sz="1600" b="1">
+                <a:solidFill>
+                  <a:srgbClr val="2E7D32"/>
+                </a:solidFill>
+              </a:rPr>
+              <a:t>Testing Strategy</a:t>
+            </a:r>
+          </a:p>
+          <a:p>
+            <a:pPr>
+              <a:spcBef>
+                <a:spcPts val="500"/>
+              </a:spcBef>
+            </a:pPr>
+            <a:r>
+              <a:rPr sz="1100">
+                <a:solidFill>
+                  <a:srgbClr val="2D2D2D"/>
+                </a:solidFill>
+              </a:rPr>
+              <a:t>•  32 automated dbt tests (31 pass, 1 expected warn)</a:t>
+            </a:r>
+          </a:p>
+          <a:p>
+            <a:pPr>
+              <a:spcBef>
+                <a:spcPts val="500"/>
+              </a:spcBef>
+            </a:pPr>
+            <a:r>
+              <a:rPr sz="1100">
+                <a:solidFill>
+                  <a:srgbClr val="2D2D2D"/>
+                </a:solidFill>
+              </a:rPr>
+              <a:t>•  not_null on all key columns</a:t>
+            </a:r>
+          </a:p>
+          <a:p>
+            <a:pPr>
+              <a:spcBef>
+                <a:spcPts val="500"/>
+              </a:spcBef>
+            </a:pPr>
+            <a:r>
+              <a:rPr sz="1100">
+                <a:solidFill>
+                  <a:srgbClr val="2D2D2D"/>
+                </a:solidFill>
+              </a:rPr>
+              <a:t>•  unique on dimension primary keys</a:t>
+            </a:r>
+          </a:p>
+          <a:p>
+            <a:pPr>
+              <a:spcBef>
+                <a:spcPts val="500"/>
+              </a:spcBef>
+            </a:pPr>
+            <a:r>
+              <a:rPr sz="1100">
+                <a:solidFill>
+                  <a:srgbClr val="2D2D2D"/>
+                </a:solidFill>
+              </a:rPr>
+              <a:t>•  accepted_values on categorical columns</a:t>
+            </a:r>
+          </a:p>
+          <a:p>
+            <a:pPr>
+              <a:spcBef>
+                <a:spcPts val="500"/>
+              </a:spcBef>
+            </a:pPr>
+            <a:r>
+              <a:rPr sz="1100">
+                <a:solidFill>
+                  <a:srgbClr val="2D2D2D"/>
+                </a:solidFill>
+              </a:rPr>
+              <a:t>•  relationships on zone foreign keys</a:t>
+            </a:r>
+          </a:p>
+          <a:p>
+            <a:pPr>
+              <a:spcBef>
+                <a:spcPts val="500"/>
+              </a:spcBef>
+            </a:pPr>
+            <a:r>
+              <a:rPr sz="1100">
+                <a:solidFill>
+                  <a:srgbClr val="2D2D2D"/>
+                </a:solidFill>
+              </a:rPr>
+              <a:t>•  Warn severity for known issues (documents, doesn't block)</a:t>
+            </a:r>
+          </a:p>
+        </p:txBody>
+      </p:sp>
+      <p:sp>
+        <p:nvSpPr>
+          <p:cNvPr id="7" name="Rounded Rectangle 6"/>
+          <p:cNvSpPr/>
+          <p:nvPr/>
+        </p:nvSpPr>
+        <p:spPr>
+          <a:xfrm>
+            <a:off x="400000" y="3500000"/>
+            <a:ext cx="5400000" cy="2400000"/>
+          </a:xfrm>
+          <a:prstGeom prst="roundRect">
+            <a:avLst/>
+          </a:prstGeom>
+          <a:solidFill>
+            <a:srgbClr val="FFF3E0"/>
+          </a:solidFill>
+          <a:ln>
+            <a:noFill/>
+          </a:ln>
+        </p:spPr>
+        <p:style>
+          <a:lnRef idx="1">
+            <a:schemeClr val="accent1"/>
+          </a:lnRef>
+          <a:fillRef idx="3">
+            <a:schemeClr val="accent1"/>
+          </a:fillRef>
+          <a:effectRef idx="2">
+            <a:schemeClr val="accent1"/>
+          </a:effectRef>
+          <a:fontRef idx="minor">
+            <a:schemeClr val="lt1"/>
+          </a:fontRef>
+        </p:style>
+        <p:txBody>
+          <a:bodyPr rtlCol="0" anchor="ctr" wrap="square"/>
+          <a:lstStyle/>
+          <a:p>
+            <a:pPr algn="ctr"/>
+            <a:r>
+              <a:rPr sz="1600" b="1">
+                <a:solidFill>
+                  <a:srgbClr val="E65100"/>
+                </a:solidFill>
+              </a:rPr>
+              <a:t>Orchestration</a:t>
+            </a:r>
+          </a:p>
+          <a:p>
+            <a:pPr>
+              <a:spcBef>
+                <a:spcPts val="500"/>
+              </a:spcBef>
+            </a:pPr>
+            <a:r>
+              <a:rPr sz="1100">
+                <a:solidFill>
+                  <a:srgbClr val="2D2D2D"/>
+                </a:solidFill>
+              </a:rPr>
+              <a:t>•  Single Python script: python pipeline/orchestrate.py</a:t>
+            </a:r>
+          </a:p>
+          <a:p>
+            <a:pPr>
+              <a:spcBef>
+                <a:spcPts val="500"/>
+              </a:spcBef>
+            </a:pPr>
+            <a:r>
+              <a:rPr sz="1100">
+                <a:solidFill>
+                  <a:srgbClr val="2D2D2D"/>
+                </a:solidFill>
+              </a:rPr>
+              <a:t>•  Runs end-to-end in ~6 minutes</a:t>
+            </a:r>
+          </a:p>
+          <a:p>
+            <a:pPr>
+              <a:spcBef>
+                <a:spcPts val="500"/>
+              </a:spcBef>
+            </a:pPr>
+            <a:r>
+              <a:rPr sz="1100">
+                <a:solidFill>
+                  <a:srgbClr val="2D2D2D"/>
+                </a:solidFill>
+              </a:rPr>
+              <a:t>•  Idempotent: safe to re-run (CREATE OR REPLACE)</a:t>
+            </a:r>
+          </a:p>
+          <a:p>
+            <a:pPr>
+              <a:spcBef>
+                <a:spcPts val="500"/>
+              </a:spcBef>
+            </a:pPr>
+            <a:r>
+              <a:rPr sz="1100">
+                <a:solidFill>
+                  <a:srgbClr val="2D2D2D"/>
+                </a:solidFill>
+              </a:rPr>
+              <a:t>•  7 steps: Bronze infra, load, weather, verify, dbt run, dbt test, summary</a:t>
+            </a:r>
+          </a:p>
+          <a:p>
+            <a:pPr>
+              <a:spcBef>
+                <a:spcPts val="500"/>
+              </a:spcBef>
+            </a:pPr>
+            <a:r>
+              <a:rPr sz="1100">
+                <a:solidFill>
+                  <a:srgbClr val="2D2D2D"/>
+                </a:solidFill>
+              </a:rPr>
+              <a:t>•  Fails fast with clear error messages</a:t>
+            </a:r>
+          </a:p>
+        </p:txBody>
+      </p:sp>
+      <p:sp>
+        <p:nvSpPr>
+          <p:cNvPr id="8" name="Rounded Rectangle 7"/>
+          <p:cNvSpPr/>
+          <p:nvPr/>
+        </p:nvSpPr>
+        <p:spPr>
+          <a:xfrm>
+            <a:off x="6100000" y="3500000"/>
+            <a:ext cx="5700000" cy="2400000"/>
+          </a:xfrm>
+          <a:prstGeom prst="roundRect">
+            <a:avLst/>
+          </a:prstGeom>
+          <a:solidFill>
+            <a:srgbClr val="FCE4EC"/>
+          </a:solidFill>
+          <a:ln>
+            <a:noFill/>
+          </a:ln>
+        </p:spPr>
+        <p:style>
+          <a:lnRef idx="1">
+            <a:schemeClr val="accent1"/>
+          </a:lnRef>
+          <a:fillRef idx="3">
+            <a:schemeClr val="accent1"/>
+          </a:fillRef>
+          <a:effectRef idx="2">
+            <a:schemeClr val="accent1"/>
+          </a:effectRef>
+          <a:fontRef idx="minor">
+            <a:schemeClr val="lt1"/>
+          </a:fontRef>
+        </p:style>
+        <p:txBody>
+          <a:bodyPr rtlCol="0" anchor="ctr" wrap="square"/>
+          <a:lstStyle/>
+          <a:p>
+            <a:pPr algn="ctr"/>
+            <a:r>
+              <a:rPr sz="1600" b="1">
+                <a:solidFill>
+                  <a:srgbClr val="FE3082"/>
+                </a:solidFill>
+              </a:rPr>
+              <a:t>Key Transformations</a:t>
+            </a:r>
+          </a:p>
+          <a:p>
+            <a:pPr>
+              <a:spcBef>
+                <a:spcPts val="500"/>
+              </a:spcBef>
+            </a:pPr>
+            <a:r>
+              <a:rPr sz="1100">
+                <a:solidFill>
+                  <a:srgbClr val="2D2D2D"/>
+                </a:solidFill>
+              </a:rPr>
+              <a:t>•  Union Yellow + Green (tpep/lpep rename)</a:t>
+            </a:r>
+          </a:p>
+          <a:p>
+            <a:pPr>
+              <a:spcBef>
+                <a:spcPts val="500"/>
+              </a:spcBef>
+            </a:pPr>
+            <a:r>
+              <a:rPr sz="1100">
+                <a:solidFill>
+                  <a:srgbClr val="2D2D2D"/>
+                </a:solidFill>
+              </a:rPr>
+              <a:t>•  DQ flagging: is_valid + dq_flag_reason</a:t>
+            </a:r>
+          </a:p>
+          <a:p>
+            <a:pPr>
+              <a:spcBef>
+                <a:spcPts val="500"/>
+              </a:spcBef>
+            </a:pPr>
+            <a:r>
+              <a:rPr sz="1100">
+                <a:solidFill>
+                  <a:srgbClr val="2D2D2D"/>
+                </a:solidFill>
+              </a:rPr>
+              <a:t>•  Time derivation: hour, rush, night, weekend</a:t>
+            </a:r>
+          </a:p>
+          <a:p>
+            <a:pPr>
+              <a:spcBef>
+                <a:spcPts val="500"/>
+              </a:spcBef>
+            </a:pPr>
+            <a:r>
+              <a:rPr sz="1100">
+                <a:solidFill>
+                  <a:srgbClr val="2D2D2D"/>
+                </a:solidFill>
+              </a:rPr>
+              <a:t>•  Weather join on pickup date + hour</a:t>
+            </a:r>
+          </a:p>
+          <a:p>
+            <a:pPr>
+              <a:spcBef>
+                <a:spcPts val="500"/>
+              </a:spcBef>
+            </a:pPr>
+            <a:r>
+              <a:rPr sz="1100">
+                <a:solidFill>
+                  <a:srgbClr val="2D2D2D"/>
+                </a:solidFill>
+              </a:rPr>
+              <a:t>•  Borough join via zone lookup</a:t>
+            </a:r>
+          </a:p>
+          <a:p>
+            <a:pPr>
+              <a:spcBef>
+                <a:spcPts val="500"/>
+              </a:spcBef>
+            </a:pPr>
+            <a:r>
+              <a:rPr sz="1100">
+                <a:solidFill>
+                  <a:srgbClr val="2D2D2D"/>
+                </a:solidFill>
+              </a:rPr>
+              <a:t>•  Revenue: all fee columns carried through</a:t>
             </a:r>
           </a:p>
         </p:txBody>
@@ -8842,59 +12199,414 @@
       <p:grpSpPr/>
       <p:sp>
         <p:nvSpPr>
-          <p:cNvPr id="2" name="Text Placeholder 1"/>
-          <p:cNvSpPr>
-            <a:spLocks noGrp="1"/>
-          </p:cNvSpPr>
-          <p:nvPr>
-            <p:ph type="body" idx="13" sz="quarter"/>
+          <p:cNvPr id="2" name="Title 1"/>
+          <p:cNvSpPr>
+            <a:spLocks noGrp="1"/>
+          </p:cNvSpPr>
+          <p:nvPr>
+            <p:ph type="title"/>
           </p:nvPr>
         </p:nvSpPr>
         <p:spPr/>
         <p:txBody>
           <a:bodyPr/>
           <a:lstStyle/>
+          <a:p>
+            <a:r>
+              <a:t>Cost and Performance Rationale</a:t>
+            </a:r>
+          </a:p>
+        </p:txBody>
+      </p:sp>
+      <p:sp>
+        <p:nvSpPr>
+          <p:cNvPr id="3" name="Content Placeholder 2"/>
+          <p:cNvSpPr>
+            <a:spLocks noGrp="1"/>
+          </p:cNvSpPr>
+          <p:nvPr>
+            <p:ph idx="1"/>
+          </p:nvPr>
+        </p:nvSpPr>
+        <p:spPr/>
+        <p:txBody>
+          <a:bodyPr/>
+          <a:lstStyle/>
           <a:p/>
         </p:txBody>
       </p:sp>
       <p:sp>
         <p:nvSpPr>
-          <p:cNvPr id="3" name="Title 2"/>
-          <p:cNvSpPr>
-            <a:spLocks noGrp="1"/>
-          </p:cNvSpPr>
-          <p:nvPr>
-            <p:ph type="title"/>
-          </p:nvPr>
-        </p:nvSpPr>
-        <p:spPr/>
-        <p:txBody>
-          <a:bodyPr/>
-          <a:lstStyle/>
-          <a:p>
-            <a:r>
-              <a:t>6</a:t>
-            </a:r>
-          </a:p>
-        </p:txBody>
-      </p:sp>
-      <p:sp>
-        <p:nvSpPr>
-          <p:cNvPr id="4" name="Subtitle 3"/>
-          <p:cNvSpPr>
-            <a:spLocks noGrp="1"/>
-          </p:cNvSpPr>
-          <p:nvPr>
-            <p:ph type="subTitle" idx="1"/>
-          </p:nvPr>
-        </p:nvSpPr>
-        <p:spPr/>
-        <p:txBody>
-          <a:bodyPr/>
-          <a:lstStyle/>
-          <a:p>
-            <a:r>
-              <a:t>Future State and Recommendation</a:t>
+          <p:cNvPr id="4" name="Rectangle 3"/>
+          <p:cNvSpPr/>
+          <p:nvPr/>
+        </p:nvSpPr>
+        <p:spPr>
+          <a:xfrm>
+            <a:off x="0" y="800000"/>
+            <a:ext cx="12192000" cy="80000"/>
+          </a:xfrm>
+          <a:prstGeom prst="rect">
+            <a:avLst/>
+          </a:prstGeom>
+          <a:solidFill>
+            <a:srgbClr val="FE3082"/>
+          </a:solidFill>
+          <a:ln>
+            <a:noFill/>
+          </a:ln>
+        </p:spPr>
+        <p:style>
+          <a:lnRef idx="1">
+            <a:schemeClr val="accent1"/>
+          </a:lnRef>
+          <a:fillRef idx="3">
+            <a:schemeClr val="accent1"/>
+          </a:fillRef>
+          <a:effectRef idx="2">
+            <a:schemeClr val="accent1"/>
+          </a:effectRef>
+          <a:fontRef idx="minor">
+            <a:schemeClr val="lt1"/>
+          </a:fontRef>
+        </p:style>
+        <p:txBody>
+          <a:bodyPr rtlCol="0" anchor="ctr"/>
+          <a:lstStyle/>
+          <a:p>
+            <a:pPr algn="ctr"/>
+          </a:p>
+        </p:txBody>
+      </p:sp>
+      <p:sp>
+        <p:nvSpPr>
+          <p:cNvPr id="5" name="Rounded Rectangle 4"/>
+          <p:cNvSpPr/>
+          <p:nvPr/>
+        </p:nvSpPr>
+        <p:spPr>
+          <a:xfrm>
+            <a:off x="400000" y="1000000"/>
+            <a:ext cx="5400000" cy="2000000"/>
+          </a:xfrm>
+          <a:prstGeom prst="roundRect">
+            <a:avLst/>
+          </a:prstGeom>
+          <a:solidFill>
+            <a:srgbClr val="E3F2FD"/>
+          </a:solidFill>
+          <a:ln>
+            <a:noFill/>
+          </a:ln>
+        </p:spPr>
+        <p:style>
+          <a:lnRef idx="1">
+            <a:schemeClr val="accent1"/>
+          </a:lnRef>
+          <a:fillRef idx="3">
+            <a:schemeClr val="accent1"/>
+          </a:fillRef>
+          <a:effectRef idx="2">
+            <a:schemeClr val="accent1"/>
+          </a:effectRef>
+          <a:fontRef idx="minor">
+            <a:schemeClr val="lt1"/>
+          </a:fontRef>
+        </p:style>
+        <p:txBody>
+          <a:bodyPr rtlCol="0" anchor="ctr" wrap="square"/>
+          <a:lstStyle/>
+          <a:p>
+            <a:pPr algn="ctr"/>
+            <a:r>
+              <a:rPr sz="1600" b="1">
+                <a:solidFill>
+                  <a:srgbClr val="0D47A1"/>
+                </a:solidFill>
+              </a:rPr>
+              <a:t>Warehouse Configuration</a:t>
+            </a:r>
+          </a:p>
+          <a:p>
+            <a:pPr>
+              <a:spcBef>
+                <a:spcPts val="600"/>
+              </a:spcBef>
+            </a:pPr>
+            <a:r>
+              <a:rPr sz="1200">
+                <a:solidFill>
+                  <a:srgbClr val="2D2D2D"/>
+                </a:solidFill>
+              </a:rPr>
+              <a:t>•  Warehouse: COMPUTE_WH</a:t>
+            </a:r>
+          </a:p>
+          <a:p>
+            <a:pPr>
+              <a:spcBef>
+                <a:spcPts val="600"/>
+              </a:spcBef>
+            </a:pPr>
+            <a:r>
+              <a:rPr sz="1200">
+                <a:solidFill>
+                  <a:srgbClr val="2D2D2D"/>
+                </a:solidFill>
+              </a:rPr>
+              <a:t>•  Size: [X-Small / Small]</a:t>
+            </a:r>
+          </a:p>
+          <a:p>
+            <a:pPr>
+              <a:spcBef>
+                <a:spcPts val="600"/>
+              </a:spcBef>
+            </a:pPr>
+            <a:r>
+              <a:rPr sz="1200">
+                <a:solidFill>
+                  <a:srgbClr val="2D2D2D"/>
+                </a:solidFill>
+              </a:rPr>
+              <a:t>•  Auto-suspend: [X seconds]</a:t>
+            </a:r>
+          </a:p>
+          <a:p>
+            <a:pPr>
+              <a:spcBef>
+                <a:spcPts val="600"/>
+              </a:spcBef>
+            </a:pPr>
+            <a:r>
+              <a:rPr sz="1200">
+                <a:solidFill>
+                  <a:srgbClr val="2D2D2D"/>
+                </a:solidFill>
+              </a:rPr>
+              <a:t>•  Tables: transient (no fail-safe cost)</a:t>
+            </a:r>
+          </a:p>
+        </p:txBody>
+      </p:sp>
+      <p:sp>
+        <p:nvSpPr>
+          <p:cNvPr id="6" name="Rounded Rectangle 5"/>
+          <p:cNvSpPr/>
+          <p:nvPr/>
+        </p:nvSpPr>
+        <p:spPr>
+          <a:xfrm>
+            <a:off x="6100000" y="1000000"/>
+            <a:ext cx="5700000" cy="2000000"/>
+          </a:xfrm>
+          <a:prstGeom prst="roundRect">
+            <a:avLst/>
+          </a:prstGeom>
+          <a:solidFill>
+            <a:srgbClr val="E8F5E9"/>
+          </a:solidFill>
+          <a:ln>
+            <a:noFill/>
+          </a:ln>
+        </p:spPr>
+        <p:style>
+          <a:lnRef idx="1">
+            <a:schemeClr val="accent1"/>
+          </a:lnRef>
+          <a:fillRef idx="3">
+            <a:schemeClr val="accent1"/>
+          </a:fillRef>
+          <a:effectRef idx="2">
+            <a:schemeClr val="accent1"/>
+          </a:effectRef>
+          <a:fontRef idx="minor">
+            <a:schemeClr val="lt1"/>
+          </a:fontRef>
+        </p:style>
+        <p:txBody>
+          <a:bodyPr rtlCol="0" anchor="ctr" wrap="square"/>
+          <a:lstStyle/>
+          <a:p>
+            <a:pPr algn="ctr"/>
+            <a:r>
+              <a:rPr sz="1600" b="1">
+                <a:solidFill>
+                  <a:srgbClr val="2E7D32"/>
+                </a:solidFill>
+              </a:rPr>
+              <a:t>Performance</a:t>
+            </a:r>
+          </a:p>
+          <a:p>
+            <a:pPr>
+              <a:spcBef>
+                <a:spcPts val="600"/>
+              </a:spcBef>
+            </a:pPr>
+            <a:r>
+              <a:rPr sz="1200">
+                <a:solidFill>
+                  <a:srgbClr val="2D2D2D"/>
+                </a:solidFill>
+              </a:rPr>
+              <a:t>•  Full pipeline: ~6 min end-to-end</a:t>
+            </a:r>
+          </a:p>
+          <a:p>
+            <a:pPr>
+              <a:spcBef>
+                <a:spcPts val="600"/>
+              </a:spcBef>
+            </a:pPr>
+            <a:r>
+              <a:rPr sz="1200">
+                <a:solidFill>
+                  <a:srgbClr val="2D2D2D"/>
+                </a:solidFill>
+              </a:rPr>
+              <a:t>•  Dashboard queries: &lt;1 sec (34K rows)</a:t>
+            </a:r>
+          </a:p>
+          <a:p>
+            <a:pPr>
+              <a:spcBef>
+                <a:spcPts val="600"/>
+              </a:spcBef>
+            </a:pPr>
+            <a:r>
+              <a:rPr sz="1200">
+                <a:solidFill>
+                  <a:srgbClr val="2D2D2D"/>
+                </a:solidFill>
+              </a:rPr>
+              <a:t>•  dbt build (Silver + Gold): ~4 min</a:t>
+            </a:r>
+          </a:p>
+          <a:p>
+            <a:pPr>
+              <a:spcBef>
+                <a:spcPts val="600"/>
+              </a:spcBef>
+            </a:pPr>
+            <a:r>
+              <a:rPr sz="1200">
+                <a:solidFill>
+                  <a:srgbClr val="2D2D2D"/>
+                </a:solidFill>
+              </a:rPr>
+              <a:t>•  COPY INTO: ~90 sec for 39M rows</a:t>
+            </a:r>
+          </a:p>
+        </p:txBody>
+      </p:sp>
+      <p:sp>
+        <p:nvSpPr>
+          <p:cNvPr id="7" name="Rounded Rectangle 6"/>
+          <p:cNvSpPr/>
+          <p:nvPr/>
+        </p:nvSpPr>
+        <p:spPr>
+          <a:xfrm>
+            <a:off x="400000" y="3300000"/>
+            <a:ext cx="11400000" cy="2000000"/>
+          </a:xfrm>
+          <a:prstGeom prst="roundRect">
+            <a:avLst/>
+          </a:prstGeom>
+          <a:solidFill>
+            <a:srgbClr val="FFF3E0"/>
+          </a:solidFill>
+          <a:ln>
+            <a:noFill/>
+          </a:ln>
+        </p:spPr>
+        <p:style>
+          <a:lnRef idx="1">
+            <a:schemeClr val="accent1"/>
+          </a:lnRef>
+          <a:fillRef idx="3">
+            <a:schemeClr val="accent1"/>
+          </a:fillRef>
+          <a:effectRef idx="2">
+            <a:schemeClr val="accent1"/>
+          </a:effectRef>
+          <a:fontRef idx="minor">
+            <a:schemeClr val="lt1"/>
+          </a:fontRef>
+        </p:style>
+        <p:txBody>
+          <a:bodyPr rtlCol="0" anchor="ctr" wrap="square"/>
+          <a:lstStyle/>
+          <a:p>
+            <a:pPr algn="ctr"/>
+            <a:r>
+              <a:rPr sz="1600" b="1">
+                <a:solidFill>
+                  <a:srgbClr val="E65100"/>
+                </a:solidFill>
+              </a:rPr>
+              <a:t>At 10x the Data Volume</a:t>
+            </a:r>
+          </a:p>
+          <a:p>
+            <a:pPr>
+              <a:spcBef>
+                <a:spcPts val="500"/>
+              </a:spcBef>
+            </a:pPr>
+            <a:r>
+              <a:rPr sz="1200">
+                <a:solidFill>
+                  <a:srgbClr val="2D2D2D"/>
+                </a:solidFill>
+              </a:rPr>
+              <a:t>•  Ingestion: switch to Snowpipe for continuous loading instead of batch COPY INTO</a:t>
+            </a:r>
+          </a:p>
+          <a:p>
+            <a:pPr>
+              <a:spcBef>
+                <a:spcPts val="500"/>
+              </a:spcBef>
+            </a:pPr>
+            <a:r>
+              <a:rPr sz="1200">
+                <a:solidFill>
+                  <a:srgbClr val="2D2D2D"/>
+                </a:solidFill>
+              </a:rPr>
+              <a:t>•  Warehouse: scale up to Medium or use multi-cluster warehouse for concurrency</a:t>
+            </a:r>
+          </a:p>
+          <a:p>
+            <a:pPr>
+              <a:spcBef>
+                <a:spcPts val="500"/>
+              </a:spcBef>
+            </a:pPr>
+            <a:r>
+              <a:rPr sz="1200">
+                <a:solidFill>
+                  <a:srgbClr val="2D2D2D"/>
+                </a:solidFill>
+              </a:rPr>
+              <a:t>•  Materialization: consider incremental models in dbt (append new data only, skip full rebuild)</a:t>
+            </a:r>
+          </a:p>
+          <a:p>
+            <a:pPr>
+              <a:spcBef>
+                <a:spcPts val="500"/>
+              </a:spcBef>
+            </a:pPr>
+            <a:r>
+              <a:rPr sz="1200">
+                <a:solidFill>
+                  <a:srgbClr val="2D2D2D"/>
+                </a:solidFill>
+              </a:rPr>
+              <a:t>•  Storage: partition by year/month for query pruning</a:t>
             </a:r>
           </a:p>
         </p:txBody>
@@ -8933,7 +12645,7 @@
           <a:lstStyle/>
           <a:p>
             <a:r>
-              <a:t>Agenda</a:t>
+              <a:t>Topics of Discussion</a:t>
             </a:r>
           </a:p>
         </p:txBody>
@@ -8952,39 +12664,401 @@
         <p:txBody>
           <a:bodyPr/>
           <a:lstStyle/>
-          <a:p>
-            <a:r>
-              <a:t>1	Our Question and Why It Matters</a:t>
-            </a:r>
-          </a:p>
           <a:p/>
-          <a:p>
-            <a:r>
-              <a:t>2	The Data and Our Architecture</a:t>
-            </a:r>
-          </a:p>
-          <a:p/>
-          <a:p>
-            <a:r>
-              <a:t>3	Data Quality: What Was Wrong and What We Did</a:t>
-            </a:r>
-          </a:p>
-          <a:p/>
-          <a:p>
-            <a:r>
-              <a:t>4	Findings: Year-over-Year</a:t>
-            </a:r>
-          </a:p>
-          <a:p/>
-          <a:p>
-            <a:r>
-              <a:t>5	Technical Deep Dive</a:t>
-            </a:r>
-          </a:p>
-          <a:p/>
-          <a:p>
-            <a:r>
-              <a:t>6	Future State and Recommendation</a:t>
+        </p:txBody>
+      </p:sp>
+      <p:sp>
+        <p:nvSpPr>
+          <p:cNvPr id="4" name="TextBox 3"/>
+          <p:cNvSpPr txBox="1"/>
+          <p:nvPr/>
+        </p:nvSpPr>
+        <p:spPr>
+          <a:xfrm>
+            <a:off x="800000" y="1200000"/>
+            <a:ext cx="600000" cy="700000"/>
+          </a:xfrm>
+          <a:prstGeom prst="rect">
+            <a:avLst/>
+          </a:prstGeom>
+          <a:noFill/>
+        </p:spPr>
+        <p:txBody>
+          <a:bodyPr wrap="none">
+            <a:spAutoFit/>
+          </a:bodyPr>
+          <a:lstStyle/>
+          <a:p>
+            <a:r>
+              <a:rPr sz="4800">
+                <a:solidFill>
+                  <a:srgbClr val="FE3082"/>
+                </a:solidFill>
+              </a:rPr>
+              <a:t>1</a:t>
+            </a:r>
+          </a:p>
+        </p:txBody>
+      </p:sp>
+      <p:sp>
+        <p:nvSpPr>
+          <p:cNvPr id="5" name="TextBox 4"/>
+          <p:cNvSpPr txBox="1"/>
+          <p:nvPr/>
+        </p:nvSpPr>
+        <p:spPr>
+          <a:xfrm>
+            <a:off x="1600000" y="1350000"/>
+            <a:ext cx="9000000" cy="500000"/>
+          </a:xfrm>
+          <a:prstGeom prst="rect">
+            <a:avLst/>
+          </a:prstGeom>
+          <a:noFill/>
+        </p:spPr>
+        <p:txBody>
+          <a:bodyPr wrap="none">
+            <a:spAutoFit/>
+          </a:bodyPr>
+          <a:lstStyle/>
+          <a:p>
+            <a:r>
+              <a:rPr sz="1800" b="1">
+                <a:solidFill>
+                  <a:srgbClr val="2D2D2D"/>
+                </a:solidFill>
+              </a:rPr>
+              <a:t>The Finding and Why It Matters</a:t>
+            </a:r>
+          </a:p>
+        </p:txBody>
+      </p:sp>
+      <p:sp>
+        <p:nvSpPr>
+          <p:cNvPr id="6" name="TextBox 5"/>
+          <p:cNvSpPr txBox="1"/>
+          <p:nvPr/>
+        </p:nvSpPr>
+        <p:spPr>
+          <a:xfrm>
+            <a:off x="800000" y="2050000"/>
+            <a:ext cx="600000" cy="700000"/>
+          </a:xfrm>
+          <a:prstGeom prst="rect">
+            <a:avLst/>
+          </a:prstGeom>
+          <a:noFill/>
+        </p:spPr>
+        <p:txBody>
+          <a:bodyPr wrap="none">
+            <a:spAutoFit/>
+          </a:bodyPr>
+          <a:lstStyle/>
+          <a:p>
+            <a:r>
+              <a:rPr sz="4800">
+                <a:solidFill>
+                  <a:srgbClr val="FE3082"/>
+                </a:solidFill>
+              </a:rPr>
+              <a:t>2</a:t>
+            </a:r>
+          </a:p>
+        </p:txBody>
+      </p:sp>
+      <p:sp>
+        <p:nvSpPr>
+          <p:cNvPr id="7" name="TextBox 6"/>
+          <p:cNvSpPr txBox="1"/>
+          <p:nvPr/>
+        </p:nvSpPr>
+        <p:spPr>
+          <a:xfrm>
+            <a:off x="1600000" y="2200000"/>
+            <a:ext cx="9000000" cy="500000"/>
+          </a:xfrm>
+          <a:prstGeom prst="rect">
+            <a:avLst/>
+          </a:prstGeom>
+          <a:noFill/>
+        </p:spPr>
+        <p:txBody>
+          <a:bodyPr wrap="none">
+            <a:spAutoFit/>
+          </a:bodyPr>
+          <a:lstStyle/>
+          <a:p>
+            <a:r>
+              <a:rPr sz="1800" b="1">
+                <a:solidFill>
+                  <a:srgbClr val="2D2D2D"/>
+                </a:solidFill>
+              </a:rPr>
+              <a:t>Data and Architecture</a:t>
+            </a:r>
+          </a:p>
+        </p:txBody>
+      </p:sp>
+      <p:sp>
+        <p:nvSpPr>
+          <p:cNvPr id="8" name="TextBox 7"/>
+          <p:cNvSpPr txBox="1"/>
+          <p:nvPr/>
+        </p:nvSpPr>
+        <p:spPr>
+          <a:xfrm>
+            <a:off x="800000" y="2900000"/>
+            <a:ext cx="600000" cy="700000"/>
+          </a:xfrm>
+          <a:prstGeom prst="rect">
+            <a:avLst/>
+          </a:prstGeom>
+          <a:noFill/>
+        </p:spPr>
+        <p:txBody>
+          <a:bodyPr wrap="none">
+            <a:spAutoFit/>
+          </a:bodyPr>
+          <a:lstStyle/>
+          <a:p>
+            <a:r>
+              <a:rPr sz="4800">
+                <a:solidFill>
+                  <a:srgbClr val="FE3082"/>
+                </a:solidFill>
+              </a:rPr>
+              <a:t>3</a:t>
+            </a:r>
+          </a:p>
+        </p:txBody>
+      </p:sp>
+      <p:sp>
+        <p:nvSpPr>
+          <p:cNvPr id="9" name="TextBox 8"/>
+          <p:cNvSpPr txBox="1"/>
+          <p:nvPr/>
+        </p:nvSpPr>
+        <p:spPr>
+          <a:xfrm>
+            <a:off x="1600000" y="3050000"/>
+            <a:ext cx="9000000" cy="500000"/>
+          </a:xfrm>
+          <a:prstGeom prst="rect">
+            <a:avLst/>
+          </a:prstGeom>
+          <a:noFill/>
+        </p:spPr>
+        <p:txBody>
+          <a:bodyPr wrap="none">
+            <a:spAutoFit/>
+          </a:bodyPr>
+          <a:lstStyle/>
+          <a:p>
+            <a:r>
+              <a:rPr sz="1800" b="1">
+                <a:solidFill>
+                  <a:srgbClr val="2D2D2D"/>
+                </a:solidFill>
+              </a:rPr>
+              <a:t>Data Quality</a:t>
+            </a:r>
+          </a:p>
+        </p:txBody>
+      </p:sp>
+      <p:sp>
+        <p:nvSpPr>
+          <p:cNvPr id="10" name="TextBox 9"/>
+          <p:cNvSpPr txBox="1"/>
+          <p:nvPr/>
+        </p:nvSpPr>
+        <p:spPr>
+          <a:xfrm>
+            <a:off x="800000" y="3750000"/>
+            <a:ext cx="600000" cy="700000"/>
+          </a:xfrm>
+          <a:prstGeom prst="rect">
+            <a:avLst/>
+          </a:prstGeom>
+          <a:noFill/>
+        </p:spPr>
+        <p:txBody>
+          <a:bodyPr wrap="none">
+            <a:spAutoFit/>
+          </a:bodyPr>
+          <a:lstStyle/>
+          <a:p>
+            <a:r>
+              <a:rPr sz="4800">
+                <a:solidFill>
+                  <a:srgbClr val="FE3082"/>
+                </a:solidFill>
+              </a:rPr>
+              <a:t>4</a:t>
+            </a:r>
+          </a:p>
+        </p:txBody>
+      </p:sp>
+      <p:sp>
+        <p:nvSpPr>
+          <p:cNvPr id="11" name="TextBox 10"/>
+          <p:cNvSpPr txBox="1"/>
+          <p:nvPr/>
+        </p:nvSpPr>
+        <p:spPr>
+          <a:xfrm>
+            <a:off x="1600000" y="3900000"/>
+            <a:ext cx="9000000" cy="500000"/>
+          </a:xfrm>
+          <a:prstGeom prst="rect">
+            <a:avLst/>
+          </a:prstGeom>
+          <a:noFill/>
+        </p:spPr>
+        <p:txBody>
+          <a:bodyPr wrap="none">
+            <a:spAutoFit/>
+          </a:bodyPr>
+          <a:lstStyle/>
+          <a:p>
+            <a:r>
+              <a:rPr sz="1800" b="1">
+                <a:solidFill>
+                  <a:srgbClr val="2D2D2D"/>
+                </a:solidFill>
+              </a:rPr>
+              <a:t>Year-over-Year Analysis</a:t>
+            </a:r>
+          </a:p>
+        </p:txBody>
+      </p:sp>
+      <p:sp>
+        <p:nvSpPr>
+          <p:cNvPr id="12" name="TextBox 11"/>
+          <p:cNvSpPr txBox="1"/>
+          <p:nvPr/>
+        </p:nvSpPr>
+        <p:spPr>
+          <a:xfrm>
+            <a:off x="800000" y="4600000"/>
+            <a:ext cx="600000" cy="700000"/>
+          </a:xfrm>
+          <a:prstGeom prst="rect">
+            <a:avLst/>
+          </a:prstGeom>
+          <a:noFill/>
+        </p:spPr>
+        <p:txBody>
+          <a:bodyPr wrap="none">
+            <a:spAutoFit/>
+          </a:bodyPr>
+          <a:lstStyle/>
+          <a:p>
+            <a:r>
+              <a:rPr sz="4800">
+                <a:solidFill>
+                  <a:srgbClr val="FE3082"/>
+                </a:solidFill>
+              </a:rPr>
+              <a:t>5</a:t>
+            </a:r>
+          </a:p>
+        </p:txBody>
+      </p:sp>
+      <p:sp>
+        <p:nvSpPr>
+          <p:cNvPr id="13" name="TextBox 12"/>
+          <p:cNvSpPr txBox="1"/>
+          <p:nvPr/>
+        </p:nvSpPr>
+        <p:spPr>
+          <a:xfrm>
+            <a:off x="1600000" y="4750000"/>
+            <a:ext cx="9000000" cy="500000"/>
+          </a:xfrm>
+          <a:prstGeom prst="rect">
+            <a:avLst/>
+          </a:prstGeom>
+          <a:noFill/>
+        </p:spPr>
+        <p:txBody>
+          <a:bodyPr wrap="none">
+            <a:spAutoFit/>
+          </a:bodyPr>
+          <a:lstStyle/>
+          <a:p>
+            <a:r>
+              <a:rPr sz="1800" b="1">
+                <a:solidFill>
+                  <a:srgbClr val="2D2D2D"/>
+                </a:solidFill>
+              </a:rPr>
+              <a:t>Technical Deep Dive</a:t>
+            </a:r>
+          </a:p>
+        </p:txBody>
+      </p:sp>
+      <p:sp>
+        <p:nvSpPr>
+          <p:cNvPr id="14" name="TextBox 13"/>
+          <p:cNvSpPr txBox="1"/>
+          <p:nvPr/>
+        </p:nvSpPr>
+        <p:spPr>
+          <a:xfrm>
+            <a:off x="800000" y="5450000"/>
+            <a:ext cx="600000" cy="700000"/>
+          </a:xfrm>
+          <a:prstGeom prst="rect">
+            <a:avLst/>
+          </a:prstGeom>
+          <a:noFill/>
+        </p:spPr>
+        <p:txBody>
+          <a:bodyPr wrap="none">
+            <a:spAutoFit/>
+          </a:bodyPr>
+          <a:lstStyle/>
+          <a:p>
+            <a:r>
+              <a:rPr sz="4800">
+                <a:solidFill>
+                  <a:srgbClr val="FE3082"/>
+                </a:solidFill>
+              </a:rPr>
+              <a:t>6</a:t>
+            </a:r>
+          </a:p>
+        </p:txBody>
+      </p:sp>
+      <p:sp>
+        <p:nvSpPr>
+          <p:cNvPr id="15" name="TextBox 14"/>
+          <p:cNvSpPr txBox="1"/>
+          <p:nvPr/>
+        </p:nvSpPr>
+        <p:spPr>
+          <a:xfrm>
+            <a:off x="1600000" y="5600000"/>
+            <a:ext cx="9000000" cy="500000"/>
+          </a:xfrm>
+          <a:prstGeom prst="rect">
+            <a:avLst/>
+          </a:prstGeom>
+          <a:noFill/>
+        </p:spPr>
+        <p:txBody>
+          <a:bodyPr wrap="none">
+            <a:spAutoFit/>
+          </a:bodyPr>
+          <a:lstStyle/>
+          <a:p>
+            <a:r>
+              <a:rPr sz="1800" b="1">
+                <a:solidFill>
+                  <a:srgbClr val="2D2D2D"/>
+                </a:solidFill>
+              </a:rPr>
+              <a:t>Future State and Recommendation</a:t>
             </a:r>
           </a:p>
         </p:txBody>
@@ -9009,7 +13083,24 @@
       <p:grpSpPr/>
       <p:sp>
         <p:nvSpPr>
-          <p:cNvPr id="2" name="Title 1"/>
+          <p:cNvPr id="2" name="Text Placeholder 1"/>
+          <p:cNvSpPr>
+            <a:spLocks noGrp="1"/>
+          </p:cNvSpPr>
+          <p:nvPr>
+            <p:ph type="body" idx="13" sz="quarter"/>
+          </p:nvPr>
+        </p:nvSpPr>
+        <p:spPr/>
+        <p:txBody>
+          <a:bodyPr/>
+          <a:lstStyle/>
+          <a:p/>
+        </p:txBody>
+      </p:sp>
+      <p:sp>
+        <p:nvSpPr>
+          <p:cNvPr id="3" name="Title 2"/>
           <p:cNvSpPr>
             <a:spLocks noGrp="1"/>
           </p:cNvSpPr>
@@ -9023,19 +13114,19 @@
           <a:lstStyle/>
           <a:p>
             <a:r>
-              <a:t>Future State Proposal</a:t>
-            </a:r>
-          </a:p>
-        </p:txBody>
-      </p:sp>
-      <p:sp>
-        <p:nvSpPr>
-          <p:cNvPr id="3" name="Content Placeholder 2"/>
-          <p:cNvSpPr>
-            <a:spLocks noGrp="1"/>
-          </p:cNvSpPr>
-          <p:nvPr>
-            <p:ph idx="1"/>
+              <a:t>6</a:t>
+            </a:r>
+          </a:p>
+        </p:txBody>
+      </p:sp>
+      <p:sp>
+        <p:nvSpPr>
+          <p:cNvPr id="4" name="Subtitle 3"/>
+          <p:cNvSpPr>
+            <a:spLocks noGrp="1"/>
+          </p:cNvSpPr>
+          <p:nvPr>
+            <p:ph type="subTitle" idx="1"/>
           </p:nvPr>
         </p:nvSpPr>
         <p:spPr/>
@@ -9044,47 +13135,7 @@
           <a:lstStyle/>
           <a:p>
             <a:r>
-              <a:t>[Improvement 1]		[Improvement 2]		[Improvement 3]</a:t>
-            </a:r>
-          </a:p>
-          <a:p/>
-          <a:p>
-            <a:r>
-              <a:t>Future Goal:			Future Goal:			Future Goal:</a:t>
-            </a:r>
-          </a:p>
-          <a:p>
-            <a:r>
-              <a:t>[description]			[description]			[description]</a:t>
-            </a:r>
-          </a:p>
-          <a:p/>
-          <a:p>
-            <a:r>
-              <a:t>Effort Estimate:		Effort Estimate:		Effort Estimate:</a:t>
-            </a:r>
-          </a:p>
-          <a:p>
-            <a:r>
-              <a:t>[time/cost]			[time/cost]			[time/cost]</a:t>
-            </a:r>
-          </a:p>
-          <a:p/>
-          <a:p>
-            <a:r>
-              <a:t>Business Benefit:		Business Benefit:		Business Benefit:</a:t>
-            </a:r>
-          </a:p>
-          <a:p>
-            <a:r>
-              <a:t>[value]				[value]				[value]</a:t>
-            </a:r>
-          </a:p>
-          <a:p/>
-          <a:p/>
-          <a:p>
-            <a:r>
-              <a:t>Highest-impact improvement: [which one and why]</a:t>
+              <a:t>Future State and Recommendation</a:t>
             </a:r>
           </a:p>
         </p:txBody>
@@ -9123,7 +13174,496 @@
           <a:lstStyle/>
           <a:p>
             <a:r>
-              <a:t>Future State Architecture</a:t>
+              <a:t>Future State Proposal</a:t>
+            </a:r>
+          </a:p>
+        </p:txBody>
+      </p:sp>
+      <p:sp>
+        <p:nvSpPr>
+          <p:cNvPr id="3" name="Content Placeholder 2"/>
+          <p:cNvSpPr>
+            <a:spLocks noGrp="1"/>
+          </p:cNvSpPr>
+          <p:nvPr>
+            <p:ph idx="1"/>
+          </p:nvPr>
+        </p:nvSpPr>
+        <p:spPr/>
+        <p:txBody>
+          <a:bodyPr/>
+          <a:lstStyle/>
+          <a:p/>
+        </p:txBody>
+      </p:sp>
+      <p:sp>
+        <p:nvSpPr>
+          <p:cNvPr id="4" name="Rectangle 3"/>
+          <p:cNvSpPr/>
+          <p:nvPr/>
+        </p:nvSpPr>
+        <p:spPr>
+          <a:xfrm>
+            <a:off x="0" y="800000"/>
+            <a:ext cx="12192000" cy="80000"/>
+          </a:xfrm>
+          <a:prstGeom prst="rect">
+            <a:avLst/>
+          </a:prstGeom>
+          <a:solidFill>
+            <a:srgbClr val="FE3082"/>
+          </a:solidFill>
+          <a:ln>
+            <a:noFill/>
+          </a:ln>
+        </p:spPr>
+        <p:style>
+          <a:lnRef idx="1">
+            <a:schemeClr val="accent1"/>
+          </a:lnRef>
+          <a:fillRef idx="3">
+            <a:schemeClr val="accent1"/>
+          </a:fillRef>
+          <a:effectRef idx="2">
+            <a:schemeClr val="accent1"/>
+          </a:effectRef>
+          <a:fontRef idx="minor">
+            <a:schemeClr val="lt1"/>
+          </a:fontRef>
+        </p:style>
+        <p:txBody>
+          <a:bodyPr rtlCol="0" anchor="ctr"/>
+          <a:lstStyle/>
+          <a:p>
+            <a:pPr algn="ctr"/>
+          </a:p>
+        </p:txBody>
+      </p:sp>
+      <p:sp>
+        <p:nvSpPr>
+          <p:cNvPr id="5" name="Rounded Rectangle 4"/>
+          <p:cNvSpPr/>
+          <p:nvPr/>
+        </p:nvSpPr>
+        <p:spPr>
+          <a:xfrm>
+            <a:off x="400000" y="1000000"/>
+            <a:ext cx="3600000" cy="4800000"/>
+          </a:xfrm>
+          <a:prstGeom prst="roundRect">
+            <a:avLst/>
+          </a:prstGeom>
+          <a:solidFill>
+            <a:srgbClr val="E8F5E9"/>
+          </a:solidFill>
+          <a:ln>
+            <a:noFill/>
+          </a:ln>
+        </p:spPr>
+        <p:style>
+          <a:lnRef idx="1">
+            <a:schemeClr val="accent1"/>
+          </a:lnRef>
+          <a:fillRef idx="3">
+            <a:schemeClr val="accent1"/>
+          </a:fillRef>
+          <a:effectRef idx="2">
+            <a:schemeClr val="accent1"/>
+          </a:effectRef>
+          <a:fontRef idx="minor">
+            <a:schemeClr val="lt1"/>
+          </a:fontRef>
+        </p:style>
+        <p:txBody>
+          <a:bodyPr rtlCol="0" anchor="ctr" wrap="square"/>
+          <a:lstStyle/>
+          <a:p>
+            <a:pPr algn="ctr"/>
+            <a:r>
+              <a:rPr sz="1600" b="1">
+                <a:solidFill>
+                  <a:srgbClr val="2E7D32"/>
+                </a:solidFill>
+              </a:rPr>
+              <a:t>Real-Time Ingestion</a:t>
+            </a:r>
+          </a:p>
+          <a:p>
+            <a:pPr>
+              <a:spcBef>
+                <a:spcPts val="1600"/>
+              </a:spcBef>
+            </a:pPr>
+            <a:r>
+              <a:rPr sz="1100" b="1">
+                <a:solidFill>
+                  <a:srgbClr val="2E7D32"/>
+                </a:solidFill>
+              </a:rPr>
+              <a:t>What:</a:t>
+            </a:r>
+          </a:p>
+          <a:p>
+            <a:r>
+              <a:rPr sz="1100">
+                <a:solidFill>
+                  <a:srgbClr val="2D2D2D"/>
+                </a:solidFill>
+              </a:rPr>
+              <a:t>Snowpipe + streams for continuous loading</a:t>
+            </a:r>
+          </a:p>
+          <a:p>
+            <a:pPr>
+              <a:spcBef>
+                <a:spcPts val="1200"/>
+              </a:spcBef>
+            </a:pPr>
+            <a:r>
+              <a:rPr sz="1100" b="1">
+                <a:solidFill>
+                  <a:srgbClr val="2E7D32"/>
+                </a:solidFill>
+              </a:rPr>
+              <a:t>Effort:</a:t>
+            </a:r>
+          </a:p>
+          <a:p>
+            <a:r>
+              <a:rPr sz="1100">
+                <a:solidFill>
+                  <a:srgbClr val="2D2D2D"/>
+                </a:solidFill>
+              </a:rPr>
+              <a:t>1-2 sprints</a:t>
+            </a:r>
+          </a:p>
+          <a:p>
+            <a:pPr>
+              <a:spcBef>
+                <a:spcPts val="1200"/>
+              </a:spcBef>
+            </a:pPr>
+            <a:r>
+              <a:rPr sz="1100" b="1">
+                <a:solidFill>
+                  <a:srgbClr val="2E7D32"/>
+                </a:solidFill>
+              </a:rPr>
+              <a:t>Business Benefit:</a:t>
+            </a:r>
+          </a:p>
+          <a:p>
+            <a:r>
+              <a:rPr sz="1100">
+                <a:solidFill>
+                  <a:srgbClr val="2D2D2D"/>
+                </a:solidFill>
+              </a:rPr>
+              <a:t>Live demand monitoring during storms</a:t>
+            </a:r>
+          </a:p>
+        </p:txBody>
+      </p:sp>
+      <p:sp>
+        <p:nvSpPr>
+          <p:cNvPr id="6" name="Rounded Rectangle 5"/>
+          <p:cNvSpPr/>
+          <p:nvPr/>
+        </p:nvSpPr>
+        <p:spPr>
+          <a:xfrm>
+            <a:off x="4300000" y="1000000"/>
+            <a:ext cx="3600000" cy="4800000"/>
+          </a:xfrm>
+          <a:prstGeom prst="roundRect">
+            <a:avLst/>
+          </a:prstGeom>
+          <a:solidFill>
+            <a:srgbClr val="E3F2FD"/>
+          </a:solidFill>
+          <a:ln>
+            <a:noFill/>
+          </a:ln>
+        </p:spPr>
+        <p:style>
+          <a:lnRef idx="1">
+            <a:schemeClr val="accent1"/>
+          </a:lnRef>
+          <a:fillRef idx="3">
+            <a:schemeClr val="accent1"/>
+          </a:fillRef>
+          <a:effectRef idx="2">
+            <a:schemeClr val="accent1"/>
+          </a:effectRef>
+          <a:fontRef idx="minor">
+            <a:schemeClr val="lt1"/>
+          </a:fontRef>
+        </p:style>
+        <p:txBody>
+          <a:bodyPr rtlCol="0" anchor="ctr" wrap="square"/>
+          <a:lstStyle/>
+          <a:p>
+            <a:pPr algn="ctr"/>
+            <a:r>
+              <a:rPr sz="1600" b="1">
+                <a:solidFill>
+                  <a:srgbClr val="0D47A1"/>
+                </a:solidFill>
+              </a:rPr>
+              <a:t>ML Forecasting</a:t>
+            </a:r>
+          </a:p>
+          <a:p>
+            <a:pPr>
+              <a:spcBef>
+                <a:spcPts val="1600"/>
+              </a:spcBef>
+            </a:pPr>
+            <a:r>
+              <a:rPr sz="1100" b="1">
+                <a:solidFill>
+                  <a:srgbClr val="0D47A1"/>
+                </a:solidFill>
+              </a:rPr>
+              <a:t>What:</a:t>
+            </a:r>
+          </a:p>
+          <a:p>
+            <a:r>
+              <a:rPr sz="1100">
+                <a:solidFill>
+                  <a:srgbClr val="2D2D2D"/>
+                </a:solidFill>
+              </a:rPr>
+              <a:t>Predict demand drops by borough before storms hit</a:t>
+            </a:r>
+          </a:p>
+          <a:p>
+            <a:pPr>
+              <a:spcBef>
+                <a:spcPts val="1200"/>
+              </a:spcBef>
+            </a:pPr>
+            <a:r>
+              <a:rPr sz="1100" b="1">
+                <a:solidFill>
+                  <a:srgbClr val="0D47A1"/>
+                </a:solidFill>
+              </a:rPr>
+              <a:t>Effort:</a:t>
+            </a:r>
+          </a:p>
+          <a:p>
+            <a:r>
+              <a:rPr sz="1100">
+                <a:solidFill>
+                  <a:srgbClr val="2D2D2D"/>
+                </a:solidFill>
+              </a:rPr>
+              <a:t>2-3 sprints</a:t>
+            </a:r>
+          </a:p>
+          <a:p>
+            <a:pPr>
+              <a:spcBef>
+                <a:spcPts val="1200"/>
+              </a:spcBef>
+            </a:pPr>
+            <a:r>
+              <a:rPr sz="1100" b="1">
+                <a:solidFill>
+                  <a:srgbClr val="0D47A1"/>
+                </a:solidFill>
+              </a:rPr>
+              <a:t>Business Benefit:</a:t>
+            </a:r>
+          </a:p>
+          <a:p>
+            <a:r>
+              <a:rPr sz="1100">
+                <a:solidFill>
+                  <a:srgbClr val="2D2D2D"/>
+                </a:solidFill>
+              </a:rPr>
+              <a:t>Proactive fleet positioning, fewer empty cabs</a:t>
+            </a:r>
+          </a:p>
+        </p:txBody>
+      </p:sp>
+      <p:sp>
+        <p:nvSpPr>
+          <p:cNvPr id="7" name="Rounded Rectangle 6"/>
+          <p:cNvSpPr/>
+          <p:nvPr/>
+        </p:nvSpPr>
+        <p:spPr>
+          <a:xfrm>
+            <a:off x="8200000" y="1000000"/>
+            <a:ext cx="3600000" cy="4800000"/>
+          </a:xfrm>
+          <a:prstGeom prst="roundRect">
+            <a:avLst/>
+          </a:prstGeom>
+          <a:solidFill>
+            <a:srgbClr val="FFF3E0"/>
+          </a:solidFill>
+          <a:ln>
+            <a:noFill/>
+          </a:ln>
+        </p:spPr>
+        <p:style>
+          <a:lnRef idx="1">
+            <a:schemeClr val="accent1"/>
+          </a:lnRef>
+          <a:fillRef idx="3">
+            <a:schemeClr val="accent1"/>
+          </a:fillRef>
+          <a:effectRef idx="2">
+            <a:schemeClr val="accent1"/>
+          </a:effectRef>
+          <a:fontRef idx="minor">
+            <a:schemeClr val="lt1"/>
+          </a:fontRef>
+        </p:style>
+        <p:txBody>
+          <a:bodyPr rtlCol="0" anchor="ctr" wrap="square"/>
+          <a:lstStyle/>
+          <a:p>
+            <a:pPr algn="ctr"/>
+            <a:r>
+              <a:rPr sz="1600" b="1">
+                <a:solidFill>
+                  <a:srgbClr val="E65100"/>
+                </a:solidFill>
+              </a:rPr>
+              <a:t>Multi-City Expansion</a:t>
+            </a:r>
+          </a:p>
+          <a:p>
+            <a:pPr>
+              <a:spcBef>
+                <a:spcPts val="1600"/>
+              </a:spcBef>
+            </a:pPr>
+            <a:r>
+              <a:rPr sz="1100" b="1">
+                <a:solidFill>
+                  <a:srgbClr val="E65100"/>
+                </a:solidFill>
+              </a:rPr>
+              <a:t>What:</a:t>
+            </a:r>
+          </a:p>
+          <a:p>
+            <a:r>
+              <a:rPr sz="1100">
+                <a:solidFill>
+                  <a:srgbClr val="2D2D2D"/>
+                </a:solidFill>
+              </a:rPr>
+              <a:t>Replicate pipeline for Chicago, Boston, etc.</a:t>
+            </a:r>
+          </a:p>
+          <a:p>
+            <a:pPr>
+              <a:spcBef>
+                <a:spcPts val="1200"/>
+              </a:spcBef>
+            </a:pPr>
+            <a:r>
+              <a:rPr sz="1100" b="1">
+                <a:solidFill>
+                  <a:srgbClr val="E65100"/>
+                </a:solidFill>
+              </a:rPr>
+              <a:t>Effort:</a:t>
+            </a:r>
+          </a:p>
+          <a:p>
+            <a:r>
+              <a:rPr sz="1100">
+                <a:solidFill>
+                  <a:srgbClr val="2D2D2D"/>
+                </a:solidFill>
+              </a:rPr>
+              <a:t>3-4 sprints per city</a:t>
+            </a:r>
+          </a:p>
+          <a:p>
+            <a:pPr>
+              <a:spcBef>
+                <a:spcPts val="1200"/>
+              </a:spcBef>
+            </a:pPr>
+            <a:r>
+              <a:rPr sz="1100" b="1">
+                <a:solidFill>
+                  <a:srgbClr val="E65100"/>
+                </a:solidFill>
+              </a:rPr>
+              <a:t>Business Benefit:</a:t>
+            </a:r>
+          </a:p>
+          <a:p>
+            <a:r>
+              <a:rPr sz="1100">
+                <a:solidFill>
+                  <a:srgbClr val="2D2D2D"/>
+                </a:solidFill>
+              </a:rPr>
+              <a:t>National weather-demand intelligence</a:t>
+            </a:r>
+          </a:p>
+        </p:txBody>
+      </p:sp>
+      <p:sp>
+        <p:nvSpPr>
+          <p:cNvPr id="8" name="Rounded Rectangle 7"/>
+          <p:cNvSpPr/>
+          <p:nvPr/>
+        </p:nvSpPr>
+        <p:spPr>
+          <a:xfrm>
+            <a:off x="400000" y="6000000"/>
+            <a:ext cx="11400000" cy="600000"/>
+          </a:xfrm>
+          <a:prstGeom prst="roundRect">
+            <a:avLst/>
+          </a:prstGeom>
+          <a:solidFill>
+            <a:srgbClr val="FCE4EC"/>
+          </a:solidFill>
+          <a:ln>
+            <a:noFill/>
+          </a:ln>
+        </p:spPr>
+        <p:style>
+          <a:lnRef idx="1">
+            <a:schemeClr val="accent1"/>
+          </a:lnRef>
+          <a:fillRef idx="3">
+            <a:schemeClr val="accent1"/>
+          </a:fillRef>
+          <a:effectRef idx="2">
+            <a:schemeClr val="accent1"/>
+          </a:effectRef>
+          <a:fontRef idx="minor">
+            <a:schemeClr val="lt1"/>
+          </a:fontRef>
+        </p:style>
+        <p:txBody>
+          <a:bodyPr rtlCol="0" anchor="ctr" wrap="square"/>
+          <a:lstStyle/>
+          <a:p>
+            <a:pPr algn="ctr"/>
+            <a:r>
+              <a:rPr sz="1300" b="1">
+                <a:solidFill>
+                  <a:srgbClr val="2D2D2D"/>
+                </a:solidFill>
+              </a:rPr>
+              <a:t>Highest Impact: Real-Time Ingestion. Fleet operators need minute-level demand signals during active storms.</a:t>
             </a:r>
           </a:p>
         </p:txBody>
@@ -9162,7 +13702,7 @@
           <a:lstStyle/>
           <a:p>
             <a:r>
-              <a:t>Recommendation</a:t>
+              <a:t>Future State Architecture</a:t>
             </a:r>
           </a:p>
         </p:txBody>
@@ -9181,23 +13721,82 @@
         <p:txBody>
           <a:bodyPr/>
           <a:lstStyle/>
-          <a:p>
-            <a:r>
-              <a:t>[One clear recommendation for the client, tied to the finding]</a:t>
-            </a:r>
-          </a:p>
           <a:p/>
-          <a:p/>
-          <a:p>
-            <a:r>
-              <a:t>[Actionable next step]</a:t>
-            </a:r>
-          </a:p>
-          <a:p/>
-          <a:p/>
-          <a:p>
-            <a:r>
-              <a:t>[What it would take to implement]</a:t>
+        </p:txBody>
+      </p:sp>
+      <p:sp>
+        <p:nvSpPr>
+          <p:cNvPr id="4" name="Rectangle 3"/>
+          <p:cNvSpPr/>
+          <p:nvPr/>
+        </p:nvSpPr>
+        <p:spPr>
+          <a:xfrm>
+            <a:off x="0" y="800000"/>
+            <a:ext cx="12192000" cy="80000"/>
+          </a:xfrm>
+          <a:prstGeom prst="rect">
+            <a:avLst/>
+          </a:prstGeom>
+          <a:solidFill>
+            <a:srgbClr val="FE3082"/>
+          </a:solidFill>
+          <a:ln>
+            <a:noFill/>
+          </a:ln>
+        </p:spPr>
+        <p:style>
+          <a:lnRef idx="1">
+            <a:schemeClr val="accent1"/>
+          </a:lnRef>
+          <a:fillRef idx="3">
+            <a:schemeClr val="accent1"/>
+          </a:fillRef>
+          <a:effectRef idx="2">
+            <a:schemeClr val="accent1"/>
+          </a:effectRef>
+          <a:fontRef idx="minor">
+            <a:schemeClr val="lt1"/>
+          </a:fontRef>
+        </p:style>
+        <p:txBody>
+          <a:bodyPr rtlCol="0" anchor="ctr"/>
+          <a:lstStyle/>
+          <a:p>
+            <a:pPr algn="ctr"/>
+          </a:p>
+        </p:txBody>
+      </p:sp>
+      <p:sp>
+        <p:nvSpPr>
+          <p:cNvPr id="5" name="TextBox 4"/>
+          <p:cNvSpPr txBox="1"/>
+          <p:nvPr/>
+        </p:nvSpPr>
+        <p:spPr>
+          <a:xfrm>
+            <a:off x="2000000" y="2500000"/>
+            <a:ext cx="8000000" cy="2000000"/>
+          </a:xfrm>
+          <a:prstGeom prst="rect">
+            <a:avLst/>
+          </a:prstGeom>
+          <a:noFill/>
+        </p:spPr>
+        <p:txBody>
+          <a:bodyPr wrap="none">
+            <a:spAutoFit/>
+          </a:bodyPr>
+          <a:lstStyle/>
+          <a:p>
+            <a:pPr algn="ctr"/>
+            <a:r>
+              <a:rPr sz="1800" i="1">
+                <a:solidFill>
+                  <a:srgbClr val="555555"/>
+                </a:solidFill>
+              </a:rPr>
+              <a:t>[Insert Future State Architecture Diagram]</a:t>
             </a:r>
           </a:p>
         </p:txBody>
@@ -9227,7 +13826,7 @@
             <a:spLocks noGrp="1"/>
           </p:cNvSpPr>
           <p:nvPr>
-            <p:ph type="ctrTitle"/>
+            <p:ph type="title"/>
           </p:nvPr>
         </p:nvSpPr>
         <p:spPr/>
@@ -9236,28 +13835,265 @@
           <a:lstStyle/>
           <a:p>
             <a:r>
-              <a:t>Thank You</a:t>
-            </a:r>
-          </a:p>
-        </p:txBody>
-      </p:sp>
-      <p:sp>
-        <p:nvSpPr>
-          <p:cNvPr id="3" name="Subtitle 2"/>
-          <p:cNvSpPr>
-            <a:spLocks noGrp="1"/>
-          </p:cNvSpPr>
-          <p:nvPr>
-            <p:ph type="subTitle" idx="1"/>
+              <a:t>Recommendation</a:t>
+            </a:r>
+          </a:p>
+        </p:txBody>
+      </p:sp>
+      <p:sp>
+        <p:nvSpPr>
+          <p:cNvPr id="3" name="Content Placeholder 2"/>
+          <p:cNvSpPr>
+            <a:spLocks noGrp="1"/>
+          </p:cNvSpPr>
+          <p:nvPr>
+            <p:ph idx="1"/>
           </p:nvPr>
         </p:nvSpPr>
         <p:spPr/>
         <p:txBody>
           <a:bodyPr/>
           <a:lstStyle/>
-          <a:p>
-            <a:r>
-              <a:t>Questions?</a:t>
+          <a:p/>
+        </p:txBody>
+      </p:sp>
+      <p:sp>
+        <p:nvSpPr>
+          <p:cNvPr id="4" name="Rectangle 3"/>
+          <p:cNvSpPr/>
+          <p:nvPr/>
+        </p:nvSpPr>
+        <p:spPr>
+          <a:xfrm>
+            <a:off x="0" y="800000"/>
+            <a:ext cx="12192000" cy="80000"/>
+          </a:xfrm>
+          <a:prstGeom prst="rect">
+            <a:avLst/>
+          </a:prstGeom>
+          <a:solidFill>
+            <a:srgbClr val="FE3082"/>
+          </a:solidFill>
+          <a:ln>
+            <a:noFill/>
+          </a:ln>
+        </p:spPr>
+        <p:style>
+          <a:lnRef idx="1">
+            <a:schemeClr val="accent1"/>
+          </a:lnRef>
+          <a:fillRef idx="3">
+            <a:schemeClr val="accent1"/>
+          </a:fillRef>
+          <a:effectRef idx="2">
+            <a:schemeClr val="accent1"/>
+          </a:effectRef>
+          <a:fontRef idx="minor">
+            <a:schemeClr val="lt1"/>
+          </a:fontRef>
+        </p:style>
+        <p:txBody>
+          <a:bodyPr rtlCol="0" anchor="ctr"/>
+          <a:lstStyle/>
+          <a:p>
+            <a:pPr algn="ctr"/>
+          </a:p>
+        </p:txBody>
+      </p:sp>
+      <p:sp>
+        <p:nvSpPr>
+          <p:cNvPr id="5" name="Rounded Rectangle 4"/>
+          <p:cNvSpPr/>
+          <p:nvPr/>
+        </p:nvSpPr>
+        <p:spPr>
+          <a:xfrm>
+            <a:off x="400000" y="1200000"/>
+            <a:ext cx="11400000" cy="1800000"/>
+          </a:xfrm>
+          <a:prstGeom prst="roundRect">
+            <a:avLst/>
+          </a:prstGeom>
+          <a:solidFill>
+            <a:srgbClr val="E3F2FD"/>
+          </a:solidFill>
+          <a:ln>
+            <a:noFill/>
+          </a:ln>
+        </p:spPr>
+        <p:style>
+          <a:lnRef idx="1">
+            <a:schemeClr val="accent1"/>
+          </a:lnRef>
+          <a:fillRef idx="3">
+            <a:schemeClr val="accent1"/>
+          </a:fillRef>
+          <a:effectRef idx="2">
+            <a:schemeClr val="accent1"/>
+          </a:effectRef>
+          <a:fontRef idx="minor">
+            <a:schemeClr val="lt1"/>
+          </a:fontRef>
+        </p:style>
+        <p:txBody>
+          <a:bodyPr rtlCol="0" anchor="ctr" wrap="square"/>
+          <a:lstStyle/>
+          <a:p>
+            <a:pPr algn="ctr"/>
+            <a:r>
+              <a:rPr sz="2200" b="1">
+                <a:solidFill>
+                  <a:srgbClr val="0D47A1"/>
+                </a:solidFill>
+              </a:rPr>
+              <a:t>[One clear recommendation tied to the finding]</a:t>
+            </a:r>
+          </a:p>
+          <a:p>
+            <a:pPr algn="ctr">
+              <a:spcBef>
+                <a:spcPts val="800"/>
+              </a:spcBef>
+            </a:pPr>
+            <a:r>
+              <a:rPr sz="1400" i="1">
+                <a:solidFill>
+                  <a:srgbClr val="555555"/>
+                </a:solidFill>
+              </a:rPr>
+              <a:t>e.g., Pre-position 15% more vehicles in outer boroughs during forecasted rain events</a:t>
+            </a:r>
+          </a:p>
+        </p:txBody>
+      </p:sp>
+      <p:sp>
+        <p:nvSpPr>
+          <p:cNvPr id="6" name="Rounded Rectangle 5"/>
+          <p:cNvSpPr/>
+          <p:nvPr/>
+        </p:nvSpPr>
+        <p:spPr>
+          <a:xfrm>
+            <a:off x="400000" y="3400000"/>
+            <a:ext cx="5400000" cy="1500000"/>
+          </a:xfrm>
+          <a:prstGeom prst="roundRect">
+            <a:avLst/>
+          </a:prstGeom>
+          <a:solidFill>
+            <a:srgbClr val="E8F5E9"/>
+          </a:solidFill>
+          <a:ln>
+            <a:noFill/>
+          </a:ln>
+        </p:spPr>
+        <p:style>
+          <a:lnRef idx="1">
+            <a:schemeClr val="accent1"/>
+          </a:lnRef>
+          <a:fillRef idx="3">
+            <a:schemeClr val="accent1"/>
+          </a:fillRef>
+          <a:effectRef idx="2">
+            <a:schemeClr val="accent1"/>
+          </a:effectRef>
+          <a:fontRef idx="minor">
+            <a:schemeClr val="lt1"/>
+          </a:fontRef>
+        </p:style>
+        <p:txBody>
+          <a:bodyPr rtlCol="0" anchor="ctr" wrap="square"/>
+          <a:lstStyle/>
+          <a:p>
+            <a:pPr algn="ctr"/>
+            <a:r>
+              <a:rPr sz="1400" b="1">
+                <a:solidFill>
+                  <a:srgbClr val="2E7D32"/>
+                </a:solidFill>
+              </a:rPr>
+              <a:t>Actionable Next Step</a:t>
+            </a:r>
+          </a:p>
+          <a:p>
+            <a:pPr>
+              <a:spcBef>
+                <a:spcPts val="800"/>
+              </a:spcBef>
+            </a:pPr>
+            <a:r>
+              <a:rPr sz="1300">
+                <a:solidFill>
+                  <a:srgbClr val="2D2D2D"/>
+                </a:solidFill>
+              </a:rPr>
+              <a:t>[What the client should do first]</a:t>
+            </a:r>
+          </a:p>
+        </p:txBody>
+      </p:sp>
+      <p:sp>
+        <p:nvSpPr>
+          <p:cNvPr id="7" name="Rounded Rectangle 6"/>
+          <p:cNvSpPr/>
+          <p:nvPr/>
+        </p:nvSpPr>
+        <p:spPr>
+          <a:xfrm>
+            <a:off x="6100000" y="3400000"/>
+            <a:ext cx="5700000" cy="1500000"/>
+          </a:xfrm>
+          <a:prstGeom prst="roundRect">
+            <a:avLst/>
+          </a:prstGeom>
+          <a:solidFill>
+            <a:srgbClr val="FFF3E0"/>
+          </a:solidFill>
+          <a:ln>
+            <a:noFill/>
+          </a:ln>
+        </p:spPr>
+        <p:style>
+          <a:lnRef idx="1">
+            <a:schemeClr val="accent1"/>
+          </a:lnRef>
+          <a:fillRef idx="3">
+            <a:schemeClr val="accent1"/>
+          </a:fillRef>
+          <a:effectRef idx="2">
+            <a:schemeClr val="accent1"/>
+          </a:effectRef>
+          <a:fontRef idx="minor">
+            <a:schemeClr val="lt1"/>
+          </a:fontRef>
+        </p:style>
+        <p:txBody>
+          <a:bodyPr rtlCol="0" anchor="ctr" wrap="square"/>
+          <a:lstStyle/>
+          <a:p>
+            <a:pPr algn="ctr"/>
+            <a:r>
+              <a:rPr sz="1400" b="1">
+                <a:solidFill>
+                  <a:srgbClr val="E65100"/>
+                </a:solidFill>
+              </a:rPr>
+              <a:t>Implementation Cost</a:t>
+            </a:r>
+          </a:p>
+          <a:p>
+            <a:pPr>
+              <a:spcBef>
+                <a:spcPts val="800"/>
+              </a:spcBef>
+            </a:pPr>
+            <a:r>
+              <a:rPr sz="1300">
+                <a:solidFill>
+                  <a:srgbClr val="2D2D2D"/>
+                </a:solidFill>
+              </a:rPr>
+              <a:t>[What it would take: time, team, tools]</a:t>
             </a:r>
           </a:p>
         </p:txBody>
@@ -9287,6 +14123,66 @@
             <a:spLocks noGrp="1"/>
           </p:cNvSpPr>
           <p:nvPr>
+            <p:ph type="ctrTitle"/>
+          </p:nvPr>
+        </p:nvSpPr>
+        <p:spPr/>
+        <p:txBody>
+          <a:bodyPr/>
+          <a:lstStyle/>
+          <a:p>
+            <a:r>
+              <a:t>Thank You</a:t>
+            </a:r>
+          </a:p>
+        </p:txBody>
+      </p:sp>
+      <p:sp>
+        <p:nvSpPr>
+          <p:cNvPr id="3" name="Subtitle 2"/>
+          <p:cNvSpPr>
+            <a:spLocks noGrp="1"/>
+          </p:cNvSpPr>
+          <p:nvPr>
+            <p:ph type="subTitle" idx="1"/>
+          </p:nvPr>
+        </p:nvSpPr>
+        <p:spPr/>
+        <p:txBody>
+          <a:bodyPr/>
+          <a:lstStyle/>
+          <a:p>
+            <a:r>
+              <a:t>Questions?</a:t>
+            </a:r>
+          </a:p>
+        </p:txBody>
+      </p:sp>
+    </p:spTree>
+  </p:cSld>
+  <p:clrMapOvr>
+    <a:masterClrMapping/>
+  </p:clrMapOvr>
+</p:sld>
+</file>
+
+<file path=ppt/slides/slide25.xml><?xml version="1.0" encoding="utf-8"?>
+<p:sld xmlns:a="http://schemas.openxmlformats.org/drawingml/2006/main" xmlns:p="http://schemas.openxmlformats.org/presentationml/2006/main" xmlns:r="http://schemas.openxmlformats.org/officeDocument/2006/relationships">
+  <p:cSld>
+    <p:spTree>
+      <p:nvGrpSpPr>
+        <p:cNvPr id="1" name=""/>
+        <p:cNvGrpSpPr/>
+        <p:nvPr/>
+      </p:nvGrpSpPr>
+      <p:grpSpPr/>
+      <p:sp>
+        <p:nvSpPr>
+          <p:cNvPr id="2" name="Title 1"/>
+          <p:cNvSpPr>
+            <a:spLocks noGrp="1"/>
+          </p:cNvSpPr>
+          <p:nvPr>
             <p:ph type="title"/>
           </p:nvPr>
         </p:nvSpPr>
@@ -9315,37 +14211,318 @@
         <p:txBody>
           <a:bodyPr/>
           <a:lstStyle/>
-          <a:p>
-            <a:r>
-              <a:t>Where We Used AI		What For			What We Verified</a:t>
-            </a:r>
-          </a:p>
           <a:p/>
-          <a:p>
-            <a:r>
-              <a:t>[tool]				[purpose]			[verification]</a:t>
-            </a:r>
-          </a:p>
-          <a:p>
-            <a:r>
-              <a:t>[tool]				[purpose]			[verification]</a:t>
-            </a:r>
-          </a:p>
-          <a:p>
-            <a:r>
-              <a:t>[tool]				[purpose]			[verification]</a:t>
-            </a:r>
-          </a:p>
-          <a:p/>
-          <a:p/>
-          <a:p>
-            <a:r>
+        </p:txBody>
+      </p:sp>
+      <p:sp>
+        <p:nvSpPr>
+          <p:cNvPr id="4" name="Rectangle 3"/>
+          <p:cNvSpPr/>
+          <p:nvPr/>
+        </p:nvSpPr>
+        <p:spPr>
+          <a:xfrm>
+            <a:off x="0" y="800000"/>
+            <a:ext cx="12192000" cy="80000"/>
+          </a:xfrm>
+          <a:prstGeom prst="rect">
+            <a:avLst/>
+          </a:prstGeom>
+          <a:solidFill>
+            <a:srgbClr val="FE3082"/>
+          </a:solidFill>
+          <a:ln>
+            <a:noFill/>
+          </a:ln>
+        </p:spPr>
+        <p:style>
+          <a:lnRef idx="1">
+            <a:schemeClr val="accent1"/>
+          </a:lnRef>
+          <a:fillRef idx="3">
+            <a:schemeClr val="accent1"/>
+          </a:fillRef>
+          <a:effectRef idx="2">
+            <a:schemeClr val="accent1"/>
+          </a:effectRef>
+          <a:fontRef idx="minor">
+            <a:schemeClr val="lt1"/>
+          </a:fontRef>
+        </p:style>
+        <p:txBody>
+          <a:bodyPr rtlCol="0" anchor="ctr"/>
+          <a:lstStyle/>
+          <a:p>
+            <a:pPr algn="ctr"/>
+          </a:p>
+        </p:txBody>
+      </p:sp>
+      <p:sp>
+        <p:nvSpPr>
+          <p:cNvPr id="5" name="Rounded Rectangle 4"/>
+          <p:cNvSpPr/>
+          <p:nvPr/>
+        </p:nvSpPr>
+        <p:spPr>
+          <a:xfrm>
+            <a:off x="400000" y="1100000"/>
+            <a:ext cx="11400000" cy="500000"/>
+          </a:xfrm>
+          <a:prstGeom prst="roundRect">
+            <a:avLst/>
+          </a:prstGeom>
+          <a:solidFill>
+            <a:srgbClr val="1A237E"/>
+          </a:solidFill>
+          <a:ln>
+            <a:noFill/>
+          </a:ln>
+        </p:spPr>
+        <p:style>
+          <a:lnRef idx="1">
+            <a:schemeClr val="accent1"/>
+          </a:lnRef>
+          <a:fillRef idx="3">
+            <a:schemeClr val="accent1"/>
+          </a:fillRef>
+          <a:effectRef idx="2">
+            <a:schemeClr val="accent1"/>
+          </a:effectRef>
+          <a:fontRef idx="minor">
+            <a:schemeClr val="lt1"/>
+          </a:fontRef>
+        </p:style>
+        <p:txBody>
+          <a:bodyPr rtlCol="0" anchor="ctr" wrap="square"/>
+          <a:lstStyle/>
+          <a:p>
+            <a:pPr algn="ctr"/>
+            <a:r>
+              <a:rPr sz="1300" b="1">
+                <a:solidFill>
+                  <a:srgbClr val="FFFFFF"/>
+                </a:solidFill>
+              </a:rPr>
+              <a:t>  Where We Used AI                    What For                              What We Verified</a:t>
+            </a:r>
+          </a:p>
+        </p:txBody>
+      </p:sp>
+      <p:sp>
+        <p:nvSpPr>
+          <p:cNvPr id="6" name="Rounded Rectangle 5"/>
+          <p:cNvSpPr/>
+          <p:nvPr/>
+        </p:nvSpPr>
+        <p:spPr>
+          <a:xfrm>
+            <a:off x="400000" y="1650000"/>
+            <a:ext cx="11400000" cy="500000"/>
+          </a:xfrm>
+          <a:prstGeom prst="roundRect">
+            <a:avLst/>
+          </a:prstGeom>
+          <a:solidFill>
+            <a:srgbClr val="E3F2FD"/>
+          </a:solidFill>
+          <a:ln>
+            <a:noFill/>
+          </a:ln>
+        </p:spPr>
+        <p:style>
+          <a:lnRef idx="1">
+            <a:schemeClr val="accent1"/>
+          </a:lnRef>
+          <a:fillRef idx="3">
+            <a:schemeClr val="accent1"/>
+          </a:fillRef>
+          <a:effectRef idx="2">
+            <a:schemeClr val="accent1"/>
+          </a:effectRef>
+          <a:fontRef idx="minor">
+            <a:schemeClr val="lt1"/>
+          </a:fontRef>
+        </p:style>
+        <p:txBody>
+          <a:bodyPr rtlCol="0" anchor="ctr" wrap="square"/>
+          <a:lstStyle/>
+          <a:p>
+            <a:pPr algn="ctr"/>
+            <a:r>
+              <a:rPr sz="1200">
+                <a:solidFill>
+                  <a:srgbClr val="2D2D2D"/>
+                </a:solidFill>
+              </a:rPr>
+              <a:t>  [Tool]                                        [Purpose]                                    [Verification]</a:t>
+            </a:r>
+          </a:p>
+        </p:txBody>
+      </p:sp>
+      <p:sp>
+        <p:nvSpPr>
+          <p:cNvPr id="7" name="Rounded Rectangle 6"/>
+          <p:cNvSpPr/>
+          <p:nvPr/>
+        </p:nvSpPr>
+        <p:spPr>
+          <a:xfrm>
+            <a:off x="400000" y="2200000"/>
+            <a:ext cx="11400000" cy="500000"/>
+          </a:xfrm>
+          <a:prstGeom prst="roundRect">
+            <a:avLst/>
+          </a:prstGeom>
+          <a:solidFill>
+            <a:srgbClr val="F0F7FF"/>
+          </a:solidFill>
+          <a:ln>
+            <a:noFill/>
+          </a:ln>
+        </p:spPr>
+        <p:style>
+          <a:lnRef idx="1">
+            <a:schemeClr val="accent1"/>
+          </a:lnRef>
+          <a:fillRef idx="3">
+            <a:schemeClr val="accent1"/>
+          </a:fillRef>
+          <a:effectRef idx="2">
+            <a:schemeClr val="accent1"/>
+          </a:effectRef>
+          <a:fontRef idx="minor">
+            <a:schemeClr val="lt1"/>
+          </a:fontRef>
+        </p:style>
+        <p:txBody>
+          <a:bodyPr rtlCol="0" anchor="ctr" wrap="square"/>
+          <a:lstStyle/>
+          <a:p>
+            <a:pPr algn="ctr"/>
+            <a:r>
+              <a:rPr sz="1200">
+                <a:solidFill>
+                  <a:srgbClr val="2D2D2D"/>
+                </a:solidFill>
+              </a:rPr>
+              <a:t>  [Tool]                                        [Purpose]                                    [Verification]</a:t>
+            </a:r>
+          </a:p>
+        </p:txBody>
+      </p:sp>
+      <p:sp>
+        <p:nvSpPr>
+          <p:cNvPr id="8" name="Rounded Rectangle 7"/>
+          <p:cNvSpPr/>
+          <p:nvPr/>
+        </p:nvSpPr>
+        <p:spPr>
+          <a:xfrm>
+            <a:off x="400000" y="2750000"/>
+            <a:ext cx="11400000" cy="500000"/>
+          </a:xfrm>
+          <a:prstGeom prst="roundRect">
+            <a:avLst/>
+          </a:prstGeom>
+          <a:solidFill>
+            <a:srgbClr val="E3F2FD"/>
+          </a:solidFill>
+          <a:ln>
+            <a:noFill/>
+          </a:ln>
+        </p:spPr>
+        <p:style>
+          <a:lnRef idx="1">
+            <a:schemeClr val="accent1"/>
+          </a:lnRef>
+          <a:fillRef idx="3">
+            <a:schemeClr val="accent1"/>
+          </a:fillRef>
+          <a:effectRef idx="2">
+            <a:schemeClr val="accent1"/>
+          </a:effectRef>
+          <a:fontRef idx="minor">
+            <a:schemeClr val="lt1"/>
+          </a:fontRef>
+        </p:style>
+        <p:txBody>
+          <a:bodyPr rtlCol="0" anchor="ctr" wrap="square"/>
+          <a:lstStyle/>
+          <a:p>
+            <a:pPr algn="ctr"/>
+            <a:r>
+              <a:rPr sz="1200">
+                <a:solidFill>
+                  <a:srgbClr val="2D2D2D"/>
+                </a:solidFill>
+              </a:rPr>
+              <a:t>  [Tool]                                        [Purpose]                                    [Verification]</a:t>
+            </a:r>
+          </a:p>
+        </p:txBody>
+      </p:sp>
+      <p:sp>
+        <p:nvSpPr>
+          <p:cNvPr id="9" name="Rounded Rectangle 8"/>
+          <p:cNvSpPr/>
+          <p:nvPr/>
+        </p:nvSpPr>
+        <p:spPr>
+          <a:xfrm>
+            <a:off x="400000" y="3600000"/>
+            <a:ext cx="11400000" cy="2000000"/>
+          </a:xfrm>
+          <a:prstGeom prst="roundRect">
+            <a:avLst/>
+          </a:prstGeom>
+          <a:solidFill>
+            <a:srgbClr val="FFF3E0"/>
+          </a:solidFill>
+          <a:ln>
+            <a:noFill/>
+          </a:ln>
+        </p:spPr>
+        <p:style>
+          <a:lnRef idx="1">
+            <a:schemeClr val="accent1"/>
+          </a:lnRef>
+          <a:fillRef idx="3">
+            <a:schemeClr val="accent1"/>
+          </a:fillRef>
+          <a:effectRef idx="2">
+            <a:schemeClr val="accent1"/>
+          </a:effectRef>
+          <a:fontRef idx="minor">
+            <a:schemeClr val="lt1"/>
+          </a:fontRef>
+        </p:style>
+        <p:txBody>
+          <a:bodyPr rtlCol="0" anchor="ctr" wrap="square"/>
+          <a:lstStyle/>
+          <a:p>
+            <a:pPr algn="ctr"/>
+            <a:r>
+              <a:rPr sz="1400" b="1">
+                <a:solidFill>
+                  <a:srgbClr val="E65100"/>
+                </a:solidFill>
+              </a:rPr>
               <a:t>What We Rejected or Corrected From AI Suggestions</a:t>
             </a:r>
           </a:p>
           <a:p>
-            <a:r>
-              <a:t>  [description of corrections made]</a:t>
+            <a:pPr>
+              <a:spcBef>
+                <a:spcPts val="800"/>
+              </a:spcBef>
+            </a:pPr>
+            <a:r>
+              <a:rPr sz="1200">
+                <a:solidFill>
+                  <a:srgbClr val="2D2D2D"/>
+                </a:solidFill>
+              </a:rPr>
+              <a:t>[Describe corrections made, things that required manual verification, etc.]</a:t>
             </a:r>
           </a:p>
         </p:txBody>
@@ -9422,7 +14599,7 @@
           <a:lstStyle/>
           <a:p>
             <a:r>
-              <a:t>Our Question and Why It Matters</a:t>
+              <a:t>The Finding and Why It Matters</a:t>
             </a:r>
           </a:p>
         </p:txBody>
@@ -9480,38 +14657,346 @@
         <p:txBody>
           <a:bodyPr/>
           <a:lstStyle/>
-          <a:p>
-            <a:r>
+          <a:p/>
+        </p:txBody>
+      </p:sp>
+      <p:sp>
+        <p:nvSpPr>
+          <p:cNvPr id="4" name="Rectangle 3"/>
+          <p:cNvSpPr/>
+          <p:nvPr/>
+        </p:nvSpPr>
+        <p:spPr>
+          <a:xfrm>
+            <a:off x="0" y="800000"/>
+            <a:ext cx="12192000" cy="80000"/>
+          </a:xfrm>
+          <a:prstGeom prst="rect">
+            <a:avLst/>
+          </a:prstGeom>
+          <a:solidFill>
+            <a:srgbClr val="FE3082"/>
+          </a:solidFill>
+          <a:ln>
+            <a:noFill/>
+          </a:ln>
+        </p:spPr>
+        <p:style>
+          <a:lnRef idx="1">
+            <a:schemeClr val="accent1"/>
+          </a:lnRef>
+          <a:fillRef idx="3">
+            <a:schemeClr val="accent1"/>
+          </a:fillRef>
+          <a:effectRef idx="2">
+            <a:schemeClr val="accent1"/>
+          </a:effectRef>
+          <a:fontRef idx="minor">
+            <a:schemeClr val="lt1"/>
+          </a:fontRef>
+        </p:style>
+        <p:txBody>
+          <a:bodyPr rtlCol="0" anchor="ctr"/>
+          <a:lstStyle/>
+          <a:p>
+            <a:pPr algn="ctr"/>
+          </a:p>
+        </p:txBody>
+      </p:sp>
+      <p:sp>
+        <p:nvSpPr>
+          <p:cNvPr id="5" name="Rounded Rectangle 4"/>
+          <p:cNvSpPr/>
+          <p:nvPr/>
+        </p:nvSpPr>
+        <p:spPr>
+          <a:xfrm>
+            <a:off x="400000" y="1100000"/>
+            <a:ext cx="11400000" cy="1400000"/>
+          </a:xfrm>
+          <a:prstGeom prst="roundRect">
+            <a:avLst/>
+          </a:prstGeom>
+          <a:solidFill>
+            <a:srgbClr val="FCE4EC"/>
+          </a:solidFill>
+          <a:ln>
+            <a:noFill/>
+          </a:ln>
+        </p:spPr>
+        <p:style>
+          <a:lnRef idx="1">
+            <a:schemeClr val="accent1"/>
+          </a:lnRef>
+          <a:fillRef idx="3">
+            <a:schemeClr val="accent1"/>
+          </a:fillRef>
+          <a:effectRef idx="2">
+            <a:schemeClr val="accent1"/>
+          </a:effectRef>
+          <a:fontRef idx="minor">
+            <a:schemeClr val="lt1"/>
+          </a:fontRef>
+        </p:style>
+        <p:txBody>
+          <a:bodyPr rtlCol="0" anchor="ctr" wrap="square"/>
+          <a:lstStyle/>
+          <a:p>
+            <a:pPr algn="ctr"/>
+            <a:r>
+              <a:rPr sz="2200" b="1">
+                <a:solidFill>
+                  <a:srgbClr val="2D2D2D"/>
+                </a:solidFill>
+              </a:rPr>
               <a:t>[STATE THE YEAR-OVER-YEAR FINDING IN ONE SENTENCE]</a:t>
             </a:r>
           </a:p>
-          <a:p/>
-          <a:p>
-            <a:r>
-              <a:t>Example: "Airport zone trips grew X% year over year while outer-borough demand declined by Y%"</a:t>
-            </a:r>
-          </a:p>
-          <a:p/>
-          <a:p/>
-          <a:p>
-            <a:r>
-              <a:t>[KEY METRIC]		[KEY METRIC]		[KEY METRIC]</a:t>
-            </a:r>
-          </a:p>
-          <a:p>
-            <a:r>
-              <a:t>[value]			[value]			[value]</a:t>
-            </a:r>
-          </a:p>
-          <a:p>
-            <a:r>
-              <a:t>[label]			[label]			[label]</a:t>
-            </a:r>
-          </a:p>
-          <a:p/>
-          <a:p/>
-          <a:p>
-            <a:r>
+          <a:p>
+            <a:pPr algn="ctr"/>
+            <a:r>
+              <a:rPr sz="1400" i="1">
+                <a:solidFill>
+                  <a:srgbClr val="555555"/>
+                </a:solidFill>
+              </a:rPr>
+              <a:t>e.g., During adverse weather, trips dropped X% in outer boroughs but only Y% in Manhattan</a:t>
+            </a:r>
+          </a:p>
+        </p:txBody>
+      </p:sp>
+      <p:sp>
+        <p:nvSpPr>
+          <p:cNvPr id="6" name="Rounded Rectangle 5"/>
+          <p:cNvSpPr/>
+          <p:nvPr/>
+        </p:nvSpPr>
+        <p:spPr>
+          <a:xfrm>
+            <a:off x="400000" y="2800000"/>
+            <a:ext cx="3200000" cy="1400000"/>
+          </a:xfrm>
+          <a:prstGeom prst="roundRect">
+            <a:avLst/>
+          </a:prstGeom>
+          <a:solidFill>
+            <a:srgbClr val="E3F2FD"/>
+          </a:solidFill>
+          <a:ln>
+            <a:noFill/>
+          </a:ln>
+        </p:spPr>
+        <p:style>
+          <a:lnRef idx="1">
+            <a:schemeClr val="accent1"/>
+          </a:lnRef>
+          <a:fillRef idx="3">
+            <a:schemeClr val="accent1"/>
+          </a:fillRef>
+          <a:effectRef idx="2">
+            <a:schemeClr val="accent1"/>
+          </a:effectRef>
+          <a:fontRef idx="minor">
+            <a:schemeClr val="lt1"/>
+          </a:fontRef>
+        </p:style>
+        <p:txBody>
+          <a:bodyPr rtlCol="0" anchor="ctr" wrap="square"/>
+          <a:lstStyle/>
+          <a:p>
+            <a:pPr algn="ctr"/>
+            <a:r>
+              <a:rPr sz="2800" b="1">
+                <a:solidFill>
+                  <a:srgbClr val="0D47A1"/>
+                </a:solidFill>
+              </a:rPr>
+              <a:t>38M+</a:t>
+            </a:r>
+          </a:p>
+          <a:p>
+            <a:pPr algn="ctr"/>
+            <a:r>
+              <a:rPr sz="1200">
+                <a:solidFill>
+                  <a:srgbClr val="555555"/>
+                </a:solidFill>
+              </a:rPr>
+              <a:t>Trip Records Analyzed</a:t>
+            </a:r>
+          </a:p>
+        </p:txBody>
+      </p:sp>
+      <p:sp>
+        <p:nvSpPr>
+          <p:cNvPr id="7" name="Rounded Rectangle 6"/>
+          <p:cNvSpPr/>
+          <p:nvPr/>
+        </p:nvSpPr>
+        <p:spPr>
+          <a:xfrm>
+            <a:off x="4400000" y="2800000"/>
+            <a:ext cx="3200000" cy="1400000"/>
+          </a:xfrm>
+          <a:prstGeom prst="roundRect">
+            <a:avLst/>
+          </a:prstGeom>
+          <a:solidFill>
+            <a:srgbClr val="E3F2FD"/>
+          </a:solidFill>
+          <a:ln>
+            <a:noFill/>
+          </a:ln>
+        </p:spPr>
+        <p:style>
+          <a:lnRef idx="1">
+            <a:schemeClr val="accent1"/>
+          </a:lnRef>
+          <a:fillRef idx="3">
+            <a:schemeClr val="accent1"/>
+          </a:fillRef>
+          <a:effectRef idx="2">
+            <a:schemeClr val="accent1"/>
+          </a:effectRef>
+          <a:fontRef idx="minor">
+            <a:schemeClr val="lt1"/>
+          </a:fontRef>
+        </p:style>
+        <p:txBody>
+          <a:bodyPr rtlCol="0" anchor="ctr" wrap="square"/>
+          <a:lstStyle/>
+          <a:p>
+            <a:pPr algn="ctr"/>
+            <a:r>
+              <a:rPr sz="2800" b="1">
+                <a:solidFill>
+                  <a:srgbClr val="0D47A1"/>
+                </a:solidFill>
+              </a:rPr>
+              <a:t>10 months</a:t>
+            </a:r>
+          </a:p>
+          <a:p>
+            <a:pPr algn="ctr"/>
+            <a:r>
+              <a:rPr sz="1200">
+                <a:solidFill>
+                  <a:srgbClr val="555555"/>
+                </a:solidFill>
+              </a:rPr>
+              <a:t>Jan-May 2025 vs 2026</a:t>
+            </a:r>
+          </a:p>
+        </p:txBody>
+      </p:sp>
+      <p:sp>
+        <p:nvSpPr>
+          <p:cNvPr id="8" name="Rounded Rectangle 7"/>
+          <p:cNvSpPr/>
+          <p:nvPr/>
+        </p:nvSpPr>
+        <p:spPr>
+          <a:xfrm>
+            <a:off x="8400000" y="2800000"/>
+            <a:ext cx="3200000" cy="1400000"/>
+          </a:xfrm>
+          <a:prstGeom prst="roundRect">
+            <a:avLst/>
+          </a:prstGeom>
+          <a:solidFill>
+            <a:srgbClr val="E3F2FD"/>
+          </a:solidFill>
+          <a:ln>
+            <a:noFill/>
+          </a:ln>
+        </p:spPr>
+        <p:style>
+          <a:lnRef idx="1">
+            <a:schemeClr val="accent1"/>
+          </a:lnRef>
+          <a:fillRef idx="3">
+            <a:schemeClr val="accent1"/>
+          </a:fillRef>
+          <a:effectRef idx="2">
+            <a:schemeClr val="accent1"/>
+          </a:effectRef>
+          <a:fontRef idx="minor">
+            <a:schemeClr val="lt1"/>
+          </a:fontRef>
+        </p:style>
+        <p:txBody>
+          <a:bodyPr rtlCol="0" anchor="ctr" wrap="square"/>
+          <a:lstStyle/>
+          <a:p>
+            <a:pPr algn="ctr"/>
+            <a:r>
+              <a:rPr sz="2800" b="1">
+                <a:solidFill>
+                  <a:srgbClr val="0D47A1"/>
+                </a:solidFill>
+              </a:rPr>
+              <a:t>5 boroughs</a:t>
+            </a:r>
+          </a:p>
+          <a:p>
+            <a:pPr algn="ctr"/>
+            <a:r>
+              <a:rPr sz="1200">
+                <a:solidFill>
+                  <a:srgbClr val="555555"/>
+                </a:solidFill>
+              </a:rPr>
+              <a:t>Weather Impact Compared</a:t>
+            </a:r>
+          </a:p>
+        </p:txBody>
+      </p:sp>
+      <p:sp>
+        <p:nvSpPr>
+          <p:cNvPr id="9" name="Rounded Rectangle 8"/>
+          <p:cNvSpPr/>
+          <p:nvPr/>
+        </p:nvSpPr>
+        <p:spPr>
+          <a:xfrm>
+            <a:off x="400000" y="4600000"/>
+            <a:ext cx="11400000" cy="1000000"/>
+          </a:xfrm>
+          <a:prstGeom prst="roundRect">
+            <a:avLst/>
+          </a:prstGeom>
+          <a:solidFill>
+            <a:srgbClr val="E8F5E9"/>
+          </a:solidFill>
+          <a:ln>
+            <a:noFill/>
+          </a:ln>
+        </p:spPr>
+        <p:style>
+          <a:lnRef idx="1">
+            <a:schemeClr val="accent1"/>
+          </a:lnRef>
+          <a:fillRef idx="3">
+            <a:schemeClr val="accent1"/>
+          </a:fillRef>
+          <a:effectRef idx="2">
+            <a:schemeClr val="accent1"/>
+          </a:effectRef>
+          <a:fontRef idx="minor">
+            <a:schemeClr val="lt1"/>
+          </a:fontRef>
+        </p:style>
+        <p:txBody>
+          <a:bodyPr rtlCol="0" anchor="ctr" wrap="square"/>
+          <a:lstStyle/>
+          <a:p>
+            <a:pPr algn="ctr"/>
+            <a:r>
+              <a:rPr sz="1600" b="1">
+                <a:solidFill>
+                  <a:srgbClr val="2E7D32"/>
+                </a:solidFill>
+              </a:rPr>
               <a:t>Key Insight: [One sentence connecting the finding to a business recommendation]</a:t>
             </a:r>
           </a:p>
@@ -9570,52 +15055,376 @@
         <p:txBody>
           <a:bodyPr/>
           <a:lstStyle/>
-          <a:p>
-            <a:r>
-              <a:t>Our Question</a:t>
-            </a:r>
-          </a:p>
-          <a:p>
-            <a:r>
-              <a:t>[State in one sentence, specific enough that someone could tell whether you answered it]</a:t>
-            </a:r>
-          </a:p>
           <a:p/>
-          <a:p>
-            <a:r>
+        </p:txBody>
+      </p:sp>
+      <p:sp>
+        <p:nvSpPr>
+          <p:cNvPr id="4" name="Rectangle 3"/>
+          <p:cNvSpPr/>
+          <p:nvPr/>
+        </p:nvSpPr>
+        <p:spPr>
+          <a:xfrm>
+            <a:off x="0" y="800000"/>
+            <a:ext cx="12192000" cy="80000"/>
+          </a:xfrm>
+          <a:prstGeom prst="rect">
+            <a:avLst/>
+          </a:prstGeom>
+          <a:solidFill>
+            <a:srgbClr val="FE3082"/>
+          </a:solidFill>
+          <a:ln>
+            <a:noFill/>
+          </a:ln>
+        </p:spPr>
+        <p:style>
+          <a:lnRef idx="1">
+            <a:schemeClr val="accent1"/>
+          </a:lnRef>
+          <a:fillRef idx="3">
+            <a:schemeClr val="accent1"/>
+          </a:fillRef>
+          <a:effectRef idx="2">
+            <a:schemeClr val="accent1"/>
+          </a:effectRef>
+          <a:fontRef idx="minor">
+            <a:schemeClr val="lt1"/>
+          </a:fontRef>
+        </p:style>
+        <p:txBody>
+          <a:bodyPr rtlCol="0" anchor="ctr"/>
+          <a:lstStyle/>
+          <a:p>
+            <a:pPr algn="ctr"/>
+          </a:p>
+        </p:txBody>
+      </p:sp>
+      <p:sp>
+        <p:nvSpPr>
+          <p:cNvPr id="5" name="Rounded Rectangle 4"/>
+          <p:cNvSpPr/>
+          <p:nvPr/>
+        </p:nvSpPr>
+        <p:spPr>
+          <a:xfrm>
+            <a:off x="400000" y="1100000"/>
+            <a:ext cx="11400000" cy="1200000"/>
+          </a:xfrm>
+          <a:prstGeom prst="roundRect">
+            <a:avLst/>
+          </a:prstGeom>
+          <a:solidFill>
+            <a:srgbClr val="E3F2FD"/>
+          </a:solidFill>
+          <a:ln>
+            <a:noFill/>
+          </a:ln>
+        </p:spPr>
+        <p:style>
+          <a:lnRef idx="1">
+            <a:schemeClr val="accent1"/>
+          </a:lnRef>
+          <a:fillRef idx="3">
+            <a:schemeClr val="accent1"/>
+          </a:fillRef>
+          <a:effectRef idx="2">
+            <a:schemeClr val="accent1"/>
+          </a:effectRef>
+          <a:fontRef idx="minor">
+            <a:schemeClr val="lt1"/>
+          </a:fontRef>
+        </p:style>
+        <p:txBody>
+          <a:bodyPr rtlCol="0" anchor="ctr" wrap="square"/>
+          <a:lstStyle/>
+          <a:p>
+            <a:pPr algn="ctr"/>
+            <a:r>
+              <a:rPr sz="2000" b="1">
+                <a:solidFill>
+                  <a:srgbClr val="0D47A1"/>
+                </a:solidFill>
+              </a:rPr>
+              <a:t>How does adverse weather affect taxi demand across NYC boroughs,</a:t>
+            </a:r>
+          </a:p>
+          <a:p>
+            <a:pPr algn="ctr"/>
+            <a:r>
+              <a:rPr sz="2000" b="1">
+                <a:solidFill>
+                  <a:srgbClr val="0D47A1"/>
+                </a:solidFill>
+              </a:rPr>
+              <a:t>and how did those patterns shift between 2025 and 2026?</a:t>
+            </a:r>
+          </a:p>
+        </p:txBody>
+      </p:sp>
+      <p:sp>
+        <p:nvSpPr>
+          <p:cNvPr id="6" name="Rounded Rectangle 5"/>
+          <p:cNvSpPr/>
+          <p:nvPr/>
+        </p:nvSpPr>
+        <p:spPr>
+          <a:xfrm>
+            <a:off x="400000" y="2600000"/>
+            <a:ext cx="5400000" cy="2200000"/>
+          </a:xfrm>
+          <a:prstGeom prst="roundRect">
+            <a:avLst/>
+          </a:prstGeom>
+          <a:solidFill>
+            <a:srgbClr val="FFF3E0"/>
+          </a:solidFill>
+          <a:ln>
+            <a:noFill/>
+          </a:ln>
+        </p:spPr>
+        <p:style>
+          <a:lnRef idx="1">
+            <a:schemeClr val="accent1"/>
+          </a:lnRef>
+          <a:fillRef idx="3">
+            <a:schemeClr val="accent1"/>
+          </a:fillRef>
+          <a:effectRef idx="2">
+            <a:schemeClr val="accent1"/>
+          </a:effectRef>
+          <a:fontRef idx="minor">
+            <a:schemeClr val="lt1"/>
+          </a:fontRef>
+        </p:style>
+        <p:txBody>
+          <a:bodyPr rtlCol="0" anchor="ctr" wrap="square"/>
+          <a:lstStyle/>
+          <a:p>
+            <a:pPr algn="ctr"/>
+            <a:r>
+              <a:rPr sz="1600" b="1">
+                <a:solidFill>
+                  <a:srgbClr val="E65100"/>
+                </a:solidFill>
+              </a:rPr>
               <a:t>Why It Matters</a:t>
             </a:r>
           </a:p>
           <a:p>
-            <a:r>
-              <a:t>[Why a business person should care about this answer]</a:t>
-            </a:r>
-          </a:p>
-          <a:p/>
-          <a:p>
-            <a:r>
-              <a:t>How We Know We Answered It</a:t>
-            </a:r>
-          </a:p>
-          <a:p>
-            <a:r>
-              <a:t>[What evidence constitutes a sufficient answer]</a:t>
-            </a:r>
-          </a:p>
-          <a:p/>
-          <a:p>
-            <a:r>
+            <a:pPr>
+              <a:spcBef>
+                <a:spcPts val="600"/>
+              </a:spcBef>
+            </a:pPr>
+            <a:r>
+              <a:rPr sz="1300">
+                <a:solidFill>
+                  <a:srgbClr val="2D2D2D"/>
+                </a:solidFill>
+              </a:rPr>
+              <a:t>•  Fleet operators need to know where demand drops during storms</a:t>
+            </a:r>
+          </a:p>
+          <a:p>
+            <a:pPr>
+              <a:spcBef>
+                <a:spcPts val="600"/>
+              </a:spcBef>
+            </a:pPr>
+            <a:r>
+              <a:rPr sz="1300">
+                <a:solidFill>
+                  <a:srgbClr val="2D2D2D"/>
+                </a:solidFill>
+              </a:rPr>
+              <a:t>•  Surge pricing decisions depend on weather sensitivity by zone</a:t>
+            </a:r>
+          </a:p>
+          <a:p>
+            <a:pPr>
+              <a:spcBef>
+                <a:spcPts val="600"/>
+              </a:spcBef>
+            </a:pPr>
+            <a:r>
+              <a:rPr sz="1300">
+                <a:solidFill>
+                  <a:srgbClr val="2D2D2D"/>
+                </a:solidFill>
+              </a:rPr>
+              <a:t>•  NYC TLC planning benefits from quantified weather impact</a:t>
+            </a:r>
+          </a:p>
+        </p:txBody>
+      </p:sp>
+      <p:sp>
+        <p:nvSpPr>
+          <p:cNvPr id="7" name="Rounded Rectangle 6"/>
+          <p:cNvSpPr/>
+          <p:nvPr/>
+        </p:nvSpPr>
+        <p:spPr>
+          <a:xfrm>
+            <a:off x="6100000" y="2600000"/>
+            <a:ext cx="5700000" cy="2200000"/>
+          </a:xfrm>
+          <a:prstGeom prst="roundRect">
+            <a:avLst/>
+          </a:prstGeom>
+          <a:solidFill>
+            <a:srgbClr val="E8F5E9"/>
+          </a:solidFill>
+          <a:ln>
+            <a:noFill/>
+          </a:ln>
+        </p:spPr>
+        <p:style>
+          <a:lnRef idx="1">
+            <a:schemeClr val="accent1"/>
+          </a:lnRef>
+          <a:fillRef idx="3">
+            <a:schemeClr val="accent1"/>
+          </a:fillRef>
+          <a:effectRef idx="2">
+            <a:schemeClr val="accent1"/>
+          </a:effectRef>
+          <a:fontRef idx="minor">
+            <a:schemeClr val="lt1"/>
+          </a:fontRef>
+        </p:style>
+        <p:txBody>
+          <a:bodyPr rtlCol="0" anchor="ctr" wrap="square"/>
+          <a:lstStyle/>
+          <a:p>
+            <a:pPr algn="ctr"/>
+            <a:r>
+              <a:rPr sz="1600" b="1">
+                <a:solidFill>
+                  <a:srgbClr val="2E7D32"/>
+                </a:solidFill>
+              </a:rPr>
               <a:t>Scope</a:t>
             </a:r>
           </a:p>
           <a:p>
-            <a:r>
-              <a:t>Yellow + Green taxi trips, January-May 2025 vs January-May 2026</a:t>
-            </a:r>
-          </a:p>
-          <a:p>
-            <a:r>
-              <a:t>30+ million rows across 20 Parquet files from S3</a:t>
+            <a:pPr>
+              <a:spcBef>
+                <a:spcPts val="600"/>
+              </a:spcBef>
+            </a:pPr>
+            <a:r>
+              <a:rPr sz="1300">
+                <a:solidFill>
+                  <a:srgbClr val="2D2D2D"/>
+                </a:solidFill>
+              </a:rPr>
+              <a:t>•  Yellow + Green taxi, Jan-May 2025 vs Jan-May 2026</a:t>
+            </a:r>
+          </a:p>
+          <a:p>
+            <a:pPr>
+              <a:spcBef>
+                <a:spcPts val="600"/>
+              </a:spcBef>
+            </a:pPr>
+            <a:r>
+              <a:rPr sz="1300">
+                <a:solidFill>
+                  <a:srgbClr val="2D2D2D"/>
+                </a:solidFill>
+              </a:rPr>
+              <a:t>•  39.2 million trip records from S3</a:t>
+            </a:r>
+          </a:p>
+          <a:p>
+            <a:pPr>
+              <a:spcBef>
+                <a:spcPts val="600"/>
+              </a:spcBef>
+            </a:pPr>
+            <a:r>
+              <a:rPr sz="1300">
+                <a:solidFill>
+                  <a:srgbClr val="2D2D2D"/>
+                </a:solidFill>
+              </a:rPr>
+              <a:t>•  Weather enrichment: hourly NYC conditions</a:t>
+            </a:r>
+          </a:p>
+          <a:p>
+            <a:pPr>
+              <a:spcBef>
+                <a:spcPts val="600"/>
+              </a:spcBef>
+            </a:pPr>
+            <a:r>
+              <a:rPr sz="1300">
+                <a:solidFill>
+                  <a:srgbClr val="2D2D2D"/>
+                </a:solidFill>
+              </a:rPr>
+              <a:t>•  265 taxi zones mapped to 5 boroughs</a:t>
+            </a:r>
+          </a:p>
+        </p:txBody>
+      </p:sp>
+      <p:sp>
+        <p:nvSpPr>
+          <p:cNvPr id="8" name="Rounded Rectangle 7"/>
+          <p:cNvSpPr/>
+          <p:nvPr/>
+        </p:nvSpPr>
+        <p:spPr>
+          <a:xfrm>
+            <a:off x="400000" y="5100000"/>
+            <a:ext cx="11400000" cy="1000000"/>
+          </a:xfrm>
+          <a:prstGeom prst="roundRect">
+            <a:avLst/>
+          </a:prstGeom>
+          <a:solidFill>
+            <a:srgbClr val="FCE4EC"/>
+          </a:solidFill>
+          <a:ln>
+            <a:noFill/>
+          </a:ln>
+        </p:spPr>
+        <p:style>
+          <a:lnRef idx="1">
+            <a:schemeClr val="accent1"/>
+          </a:lnRef>
+          <a:fillRef idx="3">
+            <a:schemeClr val="accent1"/>
+          </a:fillRef>
+          <a:effectRef idx="2">
+            <a:schemeClr val="accent1"/>
+          </a:effectRef>
+          <a:fontRef idx="minor">
+            <a:schemeClr val="lt1"/>
+          </a:fontRef>
+        </p:style>
+        <p:txBody>
+          <a:bodyPr rtlCol="0" anchor="ctr" wrap="square"/>
+          <a:lstStyle/>
+          <a:p>
+            <a:pPr algn="ctr"/>
+            <a:r>
+              <a:rPr sz="1400" b="1">
+                <a:solidFill>
+                  <a:srgbClr val="2D2D2D"/>
+                </a:solidFill>
+              </a:rPr>
+              <a:t>How We Know We Answered It: </a:t>
+            </a:r>
+            <a:r>
+              <a:rPr sz="1400">
+                <a:solidFill>
+                  <a:srgbClr val="2D2D2D"/>
+                </a:solidFill>
+              </a:rPr>
+              <a:t>Pre-aggregated mart (34,719 rows) with trip counts, revenue, and duration by borough, weather, and year. Same months, same filters, fair comparison.</a:t>
             </a:r>
           </a:p>
         </p:txBody>
@@ -9692,7 +15501,7 @@
           <a:lstStyle/>
           <a:p>
             <a:r>
-              <a:t>The Data and Our Architecture</a:t>
+              <a:t>Data and Architecture</a:t>
             </a:r>
           </a:p>
         </p:txBody>
@@ -9750,60 +15559,567 @@
         <p:txBody>
           <a:bodyPr/>
           <a:lstStyle/>
-          <a:p>
-            <a:r>
+          <a:p/>
+        </p:txBody>
+      </p:sp>
+      <p:sp>
+        <p:nvSpPr>
+          <p:cNvPr id="4" name="Rectangle 3"/>
+          <p:cNvSpPr/>
+          <p:nvPr/>
+        </p:nvSpPr>
+        <p:spPr>
+          <a:xfrm>
+            <a:off x="0" y="800000"/>
+            <a:ext cx="12192000" cy="80000"/>
+          </a:xfrm>
+          <a:prstGeom prst="rect">
+            <a:avLst/>
+          </a:prstGeom>
+          <a:solidFill>
+            <a:srgbClr val="FE3082"/>
+          </a:solidFill>
+          <a:ln>
+            <a:noFill/>
+          </a:ln>
+        </p:spPr>
+        <p:style>
+          <a:lnRef idx="1">
+            <a:schemeClr val="accent1"/>
+          </a:lnRef>
+          <a:fillRef idx="3">
+            <a:schemeClr val="accent1"/>
+          </a:fillRef>
+          <a:effectRef idx="2">
+            <a:schemeClr val="accent1"/>
+          </a:effectRef>
+          <a:fontRef idx="minor">
+            <a:schemeClr val="lt1"/>
+          </a:fontRef>
+        </p:style>
+        <p:txBody>
+          <a:bodyPr rtlCol="0" anchor="ctr"/>
+          <a:lstStyle/>
+          <a:p>
+            <a:pPr algn="ctr"/>
+          </a:p>
+        </p:txBody>
+      </p:sp>
+      <p:sp>
+        <p:nvSpPr>
+          <p:cNvPr id="5" name="Rounded Rectangle 4"/>
+          <p:cNvSpPr/>
+          <p:nvPr/>
+        </p:nvSpPr>
+        <p:spPr>
+          <a:xfrm>
+            <a:off x="400000" y="1100000"/>
+            <a:ext cx="5400000" cy="3500000"/>
+          </a:xfrm>
+          <a:prstGeom prst="roundRect">
+            <a:avLst/>
+          </a:prstGeom>
+          <a:solidFill>
+            <a:srgbClr val="E3F2FD"/>
+          </a:solidFill>
+          <a:ln>
+            <a:noFill/>
+          </a:ln>
+        </p:spPr>
+        <p:style>
+          <a:lnRef idx="1">
+            <a:schemeClr val="accent1"/>
+          </a:lnRef>
+          <a:fillRef idx="3">
+            <a:schemeClr val="accent1"/>
+          </a:fillRef>
+          <a:effectRef idx="2">
+            <a:schemeClr val="accent1"/>
+          </a:effectRef>
+          <a:fontRef idx="minor">
+            <a:schemeClr val="lt1"/>
+          </a:fontRef>
+        </p:style>
+        <p:txBody>
+          <a:bodyPr rtlCol="0" anchor="ctr" wrap="square"/>
+          <a:lstStyle/>
+          <a:p>
+            <a:pPr algn="ctr"/>
+            <a:r>
+              <a:rPr sz="1600" b="1">
+                <a:solidFill>
+                  <a:srgbClr val="0D47A1"/>
+                </a:solidFill>
+              </a:rPr>
               <a:t>What We Were Given</a:t>
             </a:r>
           </a:p>
           <a:p>
-            <a:r>
-              <a:t>  - 20 Parquet files in s3://techcatalyst-de-2026/raw/</a:t>
-            </a:r>
-          </a:p>
-          <a:p>
-            <a:r>
-              <a:t>  - Yellow taxi: 10 files, ~33 million rows (~600 MB)</a:t>
-            </a:r>
-          </a:p>
-          <a:p>
-            <a:r>
-              <a:t>  - Green taxi: 10 files, ~600 thousand rows (~16 MB)</a:t>
-            </a:r>
-          </a:p>
-          <a:p>
-            <a:r>
-              <a:t>  - Taxi zone lookup: 265 zones mapped to boroughs</a:t>
-            </a:r>
-          </a:p>
-          <a:p>
-            <a:r>
-              <a:t>  - Date range: January-May 2025 and January-May 2026</a:t>
-            </a:r>
-          </a:p>
-          <a:p/>
-          <a:p>
-            <a:r>
+            <a:pPr>
+              <a:spcBef>
+                <a:spcPts val="800"/>
+              </a:spcBef>
+            </a:pPr>
+            <a:r>
+              <a:rPr sz="1300">
+                <a:solidFill>
+                  <a:srgbClr val="2D2D2D"/>
+                </a:solidFill>
+              </a:rPr>
+              <a:t>•  20 Parquet files in S3</a:t>
+            </a:r>
+          </a:p>
+          <a:p>
+            <a:pPr>
+              <a:spcBef>
+                <a:spcPts val="800"/>
+              </a:spcBef>
+            </a:pPr>
+            <a:r>
+              <a:rPr sz="1300">
+                <a:solidFill>
+                  <a:srgbClr val="2D2D2D"/>
+                </a:solidFill>
+              </a:rPr>
+              <a:t>•  Yellow taxi: 38,759,706 rows</a:t>
+            </a:r>
+          </a:p>
+          <a:p>
+            <a:pPr>
+              <a:spcBef>
+                <a:spcPts val="800"/>
+              </a:spcBef>
+            </a:pPr>
+            <a:r>
+              <a:rPr sz="1300">
+                <a:solidFill>
+                  <a:srgbClr val="2D2D2D"/>
+                </a:solidFill>
+              </a:rPr>
+              <a:t>•  Green taxi: 465,029 rows</a:t>
+            </a:r>
+          </a:p>
+          <a:p>
+            <a:pPr>
+              <a:spcBef>
+                <a:spcPts val="800"/>
+              </a:spcBef>
+            </a:pPr>
+            <a:r>
+              <a:rPr sz="1300">
+                <a:solidFill>
+                  <a:srgbClr val="2D2D2D"/>
+                </a:solidFill>
+              </a:rPr>
+              <a:t>•  Taxi zone lookup: 265 zones</a:t>
+            </a:r>
+          </a:p>
+          <a:p>
+            <a:pPr>
+              <a:spcBef>
+                <a:spcPts val="800"/>
+              </a:spcBef>
+            </a:pPr>
+            <a:r>
+              <a:rPr sz="1300">
+                <a:solidFill>
+                  <a:srgbClr val="2D2D2D"/>
+                </a:solidFill>
+              </a:rPr>
+              <a:t>•  Date range: Jan-May 2025 and Jan-May 2026</a:t>
+            </a:r>
+          </a:p>
+        </p:txBody>
+      </p:sp>
+      <p:sp>
+        <p:nvSpPr>
+          <p:cNvPr id="6" name="Rounded Rectangle 5"/>
+          <p:cNvSpPr/>
+          <p:nvPr/>
+        </p:nvSpPr>
+        <p:spPr>
+          <a:xfrm>
+            <a:off x="6100000" y="1100000"/>
+            <a:ext cx="5700000" cy="1500000"/>
+          </a:xfrm>
+          <a:prstGeom prst="roundRect">
+            <a:avLst/>
+          </a:prstGeom>
+          <a:solidFill>
+            <a:srgbClr val="E8F5E9"/>
+          </a:solidFill>
+          <a:ln>
+            <a:noFill/>
+          </a:ln>
+        </p:spPr>
+        <p:style>
+          <a:lnRef idx="1">
+            <a:schemeClr val="accent1"/>
+          </a:lnRef>
+          <a:fillRef idx="3">
+            <a:schemeClr val="accent1"/>
+          </a:fillRef>
+          <a:effectRef idx="2">
+            <a:schemeClr val="accent1"/>
+          </a:effectRef>
+          <a:fontRef idx="minor">
+            <a:schemeClr val="lt1"/>
+          </a:fontRef>
+        </p:style>
+        <p:txBody>
+          <a:bodyPr rtlCol="0" anchor="ctr" wrap="square"/>
+          <a:lstStyle/>
+          <a:p>
+            <a:pPr algn="ctr"/>
+            <a:r>
+              <a:rPr sz="1600" b="1">
+                <a:solidFill>
+                  <a:srgbClr val="2E7D32"/>
+                </a:solidFill>
+              </a:rPr>
+              <a:t>What We Added</a:t>
+            </a:r>
+          </a:p>
+          <a:p>
+            <a:pPr>
+              <a:spcBef>
+                <a:spcPts val="800"/>
+              </a:spcBef>
+            </a:pPr>
+            <a:r>
+              <a:rPr sz="1300">
+                <a:solidFill>
+                  <a:srgbClr val="2D2D2D"/>
+                </a:solidFill>
+              </a:rPr>
+              <a:t>•  Open-Meteo Historical Weather API</a:t>
+            </a:r>
+          </a:p>
+          <a:p>
+            <a:pPr>
+              <a:spcBef>
+                <a:spcPts val="800"/>
+              </a:spcBef>
+            </a:pPr>
+            <a:r>
+              <a:rPr sz="1300">
+                <a:solidFill>
+                  <a:srgbClr val="2D2D2D"/>
+                </a:solidFill>
+              </a:rPr>
+              <a:t>•  Hourly NYC conditions: 7,248 records</a:t>
+            </a:r>
+          </a:p>
+          <a:p>
+            <a:pPr>
+              <a:spcBef>
+                <a:spcPts val="800"/>
+              </a:spcBef>
+            </a:pPr>
+            <a:r>
+              <a:rPr sz="1300">
+                <a:solidFill>
+                  <a:srgbClr val="2D2D2D"/>
+                </a:solidFill>
+              </a:rPr>
+              <a:t>•  Temperature, precipitation, wind, weather codes</a:t>
+            </a:r>
+          </a:p>
+        </p:txBody>
+      </p:sp>
+      <p:sp>
+        <p:nvSpPr>
+          <p:cNvPr id="7" name="Rounded Rectangle 6"/>
+          <p:cNvSpPr/>
+          <p:nvPr/>
+        </p:nvSpPr>
+        <p:spPr>
+          <a:xfrm>
+            <a:off x="6100000" y="2900000"/>
+            <a:ext cx="5700000" cy="1700000"/>
+          </a:xfrm>
+          <a:prstGeom prst="roundRect">
+            <a:avLst/>
+          </a:prstGeom>
+          <a:solidFill>
+            <a:srgbClr val="FFF3E0"/>
+          </a:solidFill>
+          <a:ln>
+            <a:noFill/>
+          </a:ln>
+        </p:spPr>
+        <p:style>
+          <a:lnRef idx="1">
+            <a:schemeClr val="accent1"/>
+          </a:lnRef>
+          <a:fillRef idx="3">
+            <a:schemeClr val="accent1"/>
+          </a:fillRef>
+          <a:effectRef idx="2">
+            <a:schemeClr val="accent1"/>
+          </a:effectRef>
+          <a:fontRef idx="minor">
+            <a:schemeClr val="lt1"/>
+          </a:fontRef>
+        </p:style>
+        <p:txBody>
+          <a:bodyPr rtlCol="0" anchor="ctr" wrap="square"/>
+          <a:lstStyle/>
+          <a:p>
+            <a:pPr algn="ctr"/>
+            <a:r>
+              <a:rPr sz="1600" b="1">
+                <a:solidFill>
+                  <a:srgbClr val="E65100"/>
+                </a:solidFill>
+              </a:rPr>
               <a:t>Schema Challenges</a:t>
             </a:r>
           </a:p>
           <a:p>
-            <a:r>
-              <a:t>  - Yellow uses tpep_pickup_datetime, Green uses lpep_pickup_datetime</a:t>
-            </a:r>
-          </a:p>
-          <a:p>
-            <a:r>
-              <a:t>  - Green has ehail_fee and trip_type columns; no airport_fee</a:t>
-            </a:r>
-          </a:p>
-          <a:p>
-            <a:r>
-              <a:t>  - cbd_congestion_fee column added starting January 2025</a:t>
-            </a:r>
-          </a:p>
-          <a:p>
-            <a:r>
-              <a:t>  - Must reconcile before unioning</a:t>
+            <a:pPr>
+              <a:spcBef>
+                <a:spcPts val="600"/>
+              </a:spcBef>
+            </a:pPr>
+            <a:r>
+              <a:rPr sz="1200">
+                <a:solidFill>
+                  <a:srgbClr val="2D2D2D"/>
+                </a:solidFill>
+              </a:rPr>
+              <a:t>•  Yellow: tpep_* timestamps; Green: lpep_*</a:t>
+            </a:r>
+          </a:p>
+          <a:p>
+            <a:pPr>
+              <a:spcBef>
+                <a:spcPts val="600"/>
+              </a:spcBef>
+            </a:pPr>
+            <a:r>
+              <a:rPr sz="1200">
+                <a:solidFill>
+                  <a:srgbClr val="2D2D2D"/>
+                </a:solidFill>
+              </a:rPr>
+              <a:t>•  Green has ehail_fee, trip_type; no airport_fee</a:t>
+            </a:r>
+          </a:p>
+          <a:p>
+            <a:pPr>
+              <a:spcBef>
+                <a:spcPts val="600"/>
+              </a:spcBef>
+            </a:pPr>
+            <a:r>
+              <a:rPr sz="1200">
+                <a:solidFill>
+                  <a:srgbClr val="2D2D2D"/>
+                </a:solidFill>
+              </a:rPr>
+              <a:t>•  cbd_congestion_fee added Jan 2025</a:t>
+            </a:r>
+          </a:p>
+          <a:p>
+            <a:pPr>
+              <a:spcBef>
+                <a:spcPts val="600"/>
+              </a:spcBef>
+            </a:pPr>
+            <a:r>
+              <a:rPr sz="1200">
+                <a:solidFill>
+                  <a:srgbClr val="2D2D2D"/>
+                </a:solidFill>
+              </a:rPr>
+              <a:t>•  Case-sensitive columns from INFER_SCHEMA</a:t>
+            </a:r>
+          </a:p>
+        </p:txBody>
+      </p:sp>
+      <p:sp>
+        <p:nvSpPr>
+          <p:cNvPr id="8" name="Rounded Rectangle 7"/>
+          <p:cNvSpPr/>
+          <p:nvPr/>
+        </p:nvSpPr>
+        <p:spPr>
+          <a:xfrm>
+            <a:off x="400000" y="5000000"/>
+            <a:ext cx="3200000" cy="1400000"/>
+          </a:xfrm>
+          <a:prstGeom prst="roundRect">
+            <a:avLst/>
+          </a:prstGeom>
+          <a:solidFill>
+            <a:srgbClr val="E3F2FD"/>
+          </a:solidFill>
+          <a:ln>
+            <a:noFill/>
+          </a:ln>
+        </p:spPr>
+        <p:style>
+          <a:lnRef idx="1">
+            <a:schemeClr val="accent1"/>
+          </a:lnRef>
+          <a:fillRef idx="3">
+            <a:schemeClr val="accent1"/>
+          </a:fillRef>
+          <a:effectRef idx="2">
+            <a:schemeClr val="accent1"/>
+          </a:effectRef>
+          <a:fontRef idx="minor">
+            <a:schemeClr val="lt1"/>
+          </a:fontRef>
+        </p:style>
+        <p:txBody>
+          <a:bodyPr rtlCol="0" anchor="ctr" wrap="square"/>
+          <a:lstStyle/>
+          <a:p>
+            <a:pPr algn="ctr"/>
+            <a:r>
+              <a:rPr sz="2800" b="1">
+                <a:solidFill>
+                  <a:srgbClr val="0D47A1"/>
+                </a:solidFill>
+              </a:rPr>
+              <a:t>39,224,735</a:t>
+            </a:r>
+          </a:p>
+          <a:p>
+            <a:pPr algn="ctr"/>
+            <a:r>
+              <a:rPr sz="1200">
+                <a:solidFill>
+                  <a:srgbClr val="555555"/>
+                </a:solidFill>
+              </a:rPr>
+              <a:t>Total Trip Records</a:t>
+            </a:r>
+          </a:p>
+        </p:txBody>
+      </p:sp>
+      <p:sp>
+        <p:nvSpPr>
+          <p:cNvPr id="9" name="Rounded Rectangle 8"/>
+          <p:cNvSpPr/>
+          <p:nvPr/>
+        </p:nvSpPr>
+        <p:spPr>
+          <a:xfrm>
+            <a:off x="4400000" y="5000000"/>
+            <a:ext cx="3200000" cy="1400000"/>
+          </a:xfrm>
+          <a:prstGeom prst="roundRect">
+            <a:avLst/>
+          </a:prstGeom>
+          <a:solidFill>
+            <a:srgbClr val="E3F2FD"/>
+          </a:solidFill>
+          <a:ln>
+            <a:noFill/>
+          </a:ln>
+        </p:spPr>
+        <p:style>
+          <a:lnRef idx="1">
+            <a:schemeClr val="accent1"/>
+          </a:lnRef>
+          <a:fillRef idx="3">
+            <a:schemeClr val="accent1"/>
+          </a:fillRef>
+          <a:effectRef idx="2">
+            <a:schemeClr val="accent1"/>
+          </a:effectRef>
+          <a:fontRef idx="minor">
+            <a:schemeClr val="lt1"/>
+          </a:fontRef>
+        </p:style>
+        <p:txBody>
+          <a:bodyPr rtlCol="0" anchor="ctr" wrap="square"/>
+          <a:lstStyle/>
+          <a:p>
+            <a:pPr algn="ctr"/>
+            <a:r>
+              <a:rPr sz="2800" b="1">
+                <a:solidFill>
+                  <a:srgbClr val="0D47A1"/>
+                </a:solidFill>
+              </a:rPr>
+              <a:t>7,248</a:t>
+            </a:r>
+          </a:p>
+          <a:p>
+            <a:pPr algn="ctr"/>
+            <a:r>
+              <a:rPr sz="1200">
+                <a:solidFill>
+                  <a:srgbClr val="555555"/>
+                </a:solidFill>
+              </a:rPr>
+              <a:t>Weather Hours</a:t>
+            </a:r>
+          </a:p>
+        </p:txBody>
+      </p:sp>
+      <p:sp>
+        <p:nvSpPr>
+          <p:cNvPr id="10" name="Rounded Rectangle 9"/>
+          <p:cNvSpPr/>
+          <p:nvPr/>
+        </p:nvSpPr>
+        <p:spPr>
+          <a:xfrm>
+            <a:off x="8400000" y="5000000"/>
+            <a:ext cx="3200000" cy="1400000"/>
+          </a:xfrm>
+          <a:prstGeom prst="roundRect">
+            <a:avLst/>
+          </a:prstGeom>
+          <a:solidFill>
+            <a:srgbClr val="E3F2FD"/>
+          </a:solidFill>
+          <a:ln>
+            <a:noFill/>
+          </a:ln>
+        </p:spPr>
+        <p:style>
+          <a:lnRef idx="1">
+            <a:schemeClr val="accent1"/>
+          </a:lnRef>
+          <a:fillRef idx="3">
+            <a:schemeClr val="accent1"/>
+          </a:fillRef>
+          <a:effectRef idx="2">
+            <a:schemeClr val="accent1"/>
+          </a:effectRef>
+          <a:fontRef idx="minor">
+            <a:schemeClr val="lt1"/>
+          </a:fontRef>
+        </p:style>
+        <p:txBody>
+          <a:bodyPr rtlCol="0" anchor="ctr" wrap="square"/>
+          <a:lstStyle/>
+          <a:p>
+            <a:pPr algn="ctr"/>
+            <a:r>
+              <a:rPr sz="2800" b="1">
+                <a:solidFill>
+                  <a:srgbClr val="0D47A1"/>
+                </a:solidFill>
+              </a:rPr>
+              <a:t>265</a:t>
+            </a:r>
+          </a:p>
+          <a:p>
+            <a:pPr algn="ctr"/>
+            <a:r>
+              <a:rPr sz="1200">
+                <a:solidFill>
+                  <a:srgbClr val="555555"/>
+                </a:solidFill>
+              </a:rPr>
+              <a:t>Taxi Zones</a:t>
             </a:r>
           </a:p>
         </p:txBody>
@@ -9847,6 +16163,115 @@
           </a:p>
         </p:txBody>
       </p:sp>
+      <p:sp>
+        <p:nvSpPr>
+          <p:cNvPr id="3" name="Content Placeholder 2"/>
+          <p:cNvSpPr>
+            <a:spLocks noGrp="1"/>
+          </p:cNvSpPr>
+          <p:nvPr>
+            <p:ph idx="1"/>
+          </p:nvPr>
+        </p:nvSpPr>
+        <p:spPr/>
+        <p:txBody>
+          <a:bodyPr/>
+          <a:lstStyle/>
+          <a:p/>
+        </p:txBody>
+      </p:sp>
+      <p:sp>
+        <p:nvSpPr>
+          <p:cNvPr id="4" name="Rectangle 3"/>
+          <p:cNvSpPr/>
+          <p:nvPr/>
+        </p:nvSpPr>
+        <p:spPr>
+          <a:xfrm>
+            <a:off x="0" y="800000"/>
+            <a:ext cx="12192000" cy="80000"/>
+          </a:xfrm>
+          <a:prstGeom prst="rect">
+            <a:avLst/>
+          </a:prstGeom>
+          <a:solidFill>
+            <a:srgbClr val="FE3082"/>
+          </a:solidFill>
+          <a:ln>
+            <a:noFill/>
+          </a:ln>
+        </p:spPr>
+        <p:style>
+          <a:lnRef idx="1">
+            <a:schemeClr val="accent1"/>
+          </a:lnRef>
+          <a:fillRef idx="3">
+            <a:schemeClr val="accent1"/>
+          </a:fillRef>
+          <a:effectRef idx="2">
+            <a:schemeClr val="accent1"/>
+          </a:effectRef>
+          <a:fontRef idx="minor">
+            <a:schemeClr val="lt1"/>
+          </a:fontRef>
+        </p:style>
+        <p:txBody>
+          <a:bodyPr rtlCol="0" anchor="ctr"/>
+          <a:lstStyle/>
+          <a:p>
+            <a:pPr algn="ctr"/>
+          </a:p>
+        </p:txBody>
+      </p:sp>
+      <p:sp>
+        <p:nvSpPr>
+          <p:cNvPr id="5" name="TextBox 4"/>
+          <p:cNvSpPr txBox="1"/>
+          <p:nvPr/>
+        </p:nvSpPr>
+        <p:spPr>
+          <a:xfrm>
+            <a:off x="2000000" y="2500000"/>
+            <a:ext cx="8000000" cy="2000000"/>
+          </a:xfrm>
+          <a:prstGeom prst="rect">
+            <a:avLst/>
+          </a:prstGeom>
+          <a:noFill/>
+        </p:spPr>
+        <p:txBody>
+          <a:bodyPr wrap="none">
+            <a:spAutoFit/>
+          </a:bodyPr>
+          <a:lstStyle/>
+          <a:p>
+            <a:pPr algn="ctr"/>
+            <a:r>
+              <a:rPr sz="1800" i="1">
+                <a:solidFill>
+                  <a:srgbClr val="555555"/>
+                </a:solidFill>
+              </a:rPr>
+              <a:t>[Insert Architecture Diagram: Capstone_Architecture_PatternA.drawio]</a:t>
+            </a:r>
+          </a:p>
+          <a:p>
+            <a:pPr algn="ctr">
+              <a:spcBef>
+                <a:spcPts val="2000"/>
+              </a:spcBef>
+            </a:pPr>
+            <a:r>
+              <a:rPr sz="1600" b="1">
+                <a:solidFill>
+                  <a:srgbClr val="2D2D2D"/>
+                </a:solidFill>
+              </a:rPr>
+              <a:t>S3 RAW  →  Snowflake Bronze  →  dbt Silver  →  dbt Gold  →  Tableau</a:t>
+            </a:r>
+          </a:p>
+        </p:txBody>
+      </p:sp>
     </p:spTree>
   </p:cSld>
   <p:clrMapOvr>
@@ -9881,7 +16306,7 @@
           <a:lstStyle/>
           <a:p>
             <a:r>
-              <a:t>Architecture Decision</a:t>
+              <a:t>Architecture Decision: Pattern A (ELT)</a:t>
             </a:r>
           </a:p>
         </p:txBody>
@@ -9900,52 +16325,396 @@
         <p:txBody>
           <a:bodyPr/>
           <a:lstStyle/>
-          <a:p>
-            <a:r>
-              <a:t>Pattern Chosen: [A (ELT) / B (ETL) / Custom]</a:t>
-            </a:r>
-          </a:p>
           <a:p/>
-          <a:p>
-            <a:r>
+        </p:txBody>
+      </p:sp>
+      <p:sp>
+        <p:nvSpPr>
+          <p:cNvPr id="4" name="Rectangle 3"/>
+          <p:cNvSpPr/>
+          <p:nvPr/>
+        </p:nvSpPr>
+        <p:spPr>
+          <a:xfrm>
+            <a:off x="0" y="800000"/>
+            <a:ext cx="12192000" cy="80000"/>
+          </a:xfrm>
+          <a:prstGeom prst="rect">
+            <a:avLst/>
+          </a:prstGeom>
+          <a:solidFill>
+            <a:srgbClr val="FE3082"/>
+          </a:solidFill>
+          <a:ln>
+            <a:noFill/>
+          </a:ln>
+        </p:spPr>
+        <p:style>
+          <a:lnRef idx="1">
+            <a:schemeClr val="accent1"/>
+          </a:lnRef>
+          <a:fillRef idx="3">
+            <a:schemeClr val="accent1"/>
+          </a:fillRef>
+          <a:effectRef idx="2">
+            <a:schemeClr val="accent1"/>
+          </a:effectRef>
+          <a:fontRef idx="minor">
+            <a:schemeClr val="lt1"/>
+          </a:fontRef>
+        </p:style>
+        <p:txBody>
+          <a:bodyPr rtlCol="0" anchor="ctr"/>
+          <a:lstStyle/>
+          <a:p>
+            <a:pPr algn="ctr"/>
+          </a:p>
+        </p:txBody>
+      </p:sp>
+      <p:sp>
+        <p:nvSpPr>
+          <p:cNvPr id="5" name="Rounded Rectangle 4"/>
+          <p:cNvSpPr/>
+          <p:nvPr/>
+        </p:nvSpPr>
+        <p:spPr>
+          <a:xfrm>
+            <a:off x="400000" y="1100000"/>
+            <a:ext cx="5400000" cy="2400000"/>
+          </a:xfrm>
+          <a:prstGeom prst="roundRect">
+            <a:avLst/>
+          </a:prstGeom>
+          <a:solidFill>
+            <a:srgbClr val="E8F5E9"/>
+          </a:solidFill>
+          <a:ln>
+            <a:noFill/>
+          </a:ln>
+        </p:spPr>
+        <p:style>
+          <a:lnRef idx="1">
+            <a:schemeClr val="accent1"/>
+          </a:lnRef>
+          <a:fillRef idx="3">
+            <a:schemeClr val="accent1"/>
+          </a:fillRef>
+          <a:effectRef idx="2">
+            <a:schemeClr val="accent1"/>
+          </a:effectRef>
+          <a:fontRef idx="minor">
+            <a:schemeClr val="lt1"/>
+          </a:fontRef>
+        </p:style>
+        <p:txBody>
+          <a:bodyPr rtlCol="0" anchor="ctr" wrap="square"/>
+          <a:lstStyle/>
+          <a:p>
+            <a:pPr algn="ctr"/>
+            <a:r>
+              <a:rPr sz="1600" b="1">
+                <a:solidFill>
+                  <a:srgbClr val="2E7D32"/>
+                </a:solidFill>
+              </a:rPr>
               <a:t>Why We Chose It</a:t>
             </a:r>
           </a:p>
           <a:p>
-            <a:r>
-              <a:t>[Reasoning: team strengths, reliability, scope, time constraints]</a:t>
-            </a:r>
-          </a:p>
-          <a:p/>
-          <a:p>
-            <a:r>
+            <a:pPr>
+              <a:spcBef>
+                <a:spcPts val="600"/>
+              </a:spcBef>
+            </a:pPr>
+            <a:r>
+              <a:rPr sz="1300">
+                <a:solidFill>
+                  <a:srgbClr val="2D2D2D"/>
+                </a:solidFill>
+              </a:rPr>
+              <a:t>•  Team is strongest in SQL</a:t>
+            </a:r>
+          </a:p>
+          <a:p>
+            <a:pPr>
+              <a:spcBef>
+                <a:spcPts val="600"/>
+              </a:spcBef>
+            </a:pPr>
+            <a:r>
+              <a:rPr sz="1300">
+                <a:solidFill>
+                  <a:srgbClr val="2D2D2D"/>
+                </a:solidFill>
+              </a:rPr>
+              <a:t>•  Fewest moving parts for a one-week sprint</a:t>
+            </a:r>
+          </a:p>
+          <a:p>
+            <a:pPr>
+              <a:spcBef>
+                <a:spcPts val="600"/>
+              </a:spcBef>
+            </a:pPr>
+            <a:r>
+              <a:rPr sz="1300">
+                <a:solidFill>
+                  <a:srgbClr val="2D2D2D"/>
+                </a:solidFill>
+              </a:rPr>
+              <a:t>•  All transforms tested and version-controlled (dbt)</a:t>
+            </a:r>
+          </a:p>
+          <a:p>
+            <a:pPr>
+              <a:spcBef>
+                <a:spcPts val="600"/>
+              </a:spcBef>
+            </a:pPr>
+            <a:r>
+              <a:rPr sz="1300">
+                <a:solidFill>
+                  <a:srgbClr val="2D2D2D"/>
+                </a:solidFill>
+              </a:rPr>
+              <a:t>•  Snowflake handles 39M rows natively</a:t>
+            </a:r>
+          </a:p>
+          <a:p>
+            <a:pPr>
+              <a:spcBef>
+                <a:spcPts val="600"/>
+              </a:spcBef>
+            </a:pPr>
+            <a:r>
+              <a:rPr sz="1300">
+                <a:solidFill>
+                  <a:srgbClr val="2D2D2D"/>
+                </a:solidFill>
+              </a:rPr>
+              <a:t>•  Full pipeline re-runs in ~6 minutes</a:t>
+            </a:r>
+          </a:p>
+        </p:txBody>
+      </p:sp>
+      <p:sp>
+        <p:nvSpPr>
+          <p:cNvPr id="6" name="Rounded Rectangle 5"/>
+          <p:cNvSpPr/>
+          <p:nvPr/>
+        </p:nvSpPr>
+        <p:spPr>
+          <a:xfrm>
+            <a:off x="6100000" y="1100000"/>
+            <a:ext cx="5700000" cy="2400000"/>
+          </a:xfrm>
+          <a:prstGeom prst="roundRect">
+            <a:avLst/>
+          </a:prstGeom>
+          <a:solidFill>
+            <a:srgbClr val="FFF3E0"/>
+          </a:solidFill>
+          <a:ln>
+            <a:noFill/>
+          </a:ln>
+        </p:spPr>
+        <p:style>
+          <a:lnRef idx="1">
+            <a:schemeClr val="accent1"/>
+          </a:lnRef>
+          <a:fillRef idx="3">
+            <a:schemeClr val="accent1"/>
+          </a:fillRef>
+          <a:effectRef idx="2">
+            <a:schemeClr val="accent1"/>
+          </a:effectRef>
+          <a:fontRef idx="minor">
+            <a:schemeClr val="lt1"/>
+          </a:fontRef>
+        </p:style>
+        <p:txBody>
+          <a:bodyPr rtlCol="0" anchor="ctr" wrap="square"/>
+          <a:lstStyle/>
+          <a:p>
+            <a:pPr algn="ctr"/>
+            <a:r>
+              <a:rPr sz="1600" b="1">
+                <a:solidFill>
+                  <a:srgbClr val="E65100"/>
+                </a:solidFill>
+              </a:rPr>
               <a:t>What We Gave Up</a:t>
             </a:r>
           </a:p>
           <a:p>
-            <a:r>
-              <a:t>[Trade-off: what the other pattern would have given us]</a:t>
-            </a:r>
-          </a:p>
-          <a:p/>
-          <a:p>
-            <a:r>
+            <a:pPr>
+              <a:spcBef>
+                <a:spcPts val="600"/>
+              </a:spcBef>
+            </a:pPr>
+            <a:r>
+              <a:rPr sz="1300">
+                <a:solidFill>
+                  <a:srgbClr val="2D2D2D"/>
+                </a:solidFill>
+              </a:rPr>
+              <a:t>•  No Spark/Glue experience demonstrated</a:t>
+            </a:r>
+          </a:p>
+          <a:p>
+            <a:pPr>
+              <a:spcBef>
+                <a:spcPts val="600"/>
+              </a:spcBef>
+            </a:pPr>
+            <a:r>
+              <a:rPr sz="1300">
+                <a:solidFill>
+                  <a:srgbClr val="2D2D2D"/>
+                </a:solidFill>
+              </a:rPr>
+              <a:t>•  No DataFrames or distributed compute</a:t>
+            </a:r>
+          </a:p>
+          <a:p>
+            <a:pPr>
+              <a:spcBef>
+                <a:spcPts val="600"/>
+              </a:spcBef>
+            </a:pPr>
+            <a:r>
+              <a:rPr sz="1300">
+                <a:solidFill>
+                  <a:srgbClr val="2D2D2D"/>
+                </a:solidFill>
+              </a:rPr>
+              <a:t>•  Less tooling breadth on resume</a:t>
+            </a:r>
+          </a:p>
+          <a:p>
+            <a:pPr>
+              <a:spcBef>
+                <a:spcPts val="600"/>
+              </a:spcBef>
+            </a:pPr>
+            <a:r>
+              <a:rPr sz="1300">
+                <a:solidFill>
+                  <a:srgbClr val="2D2D2D"/>
+                </a:solidFill>
+              </a:rPr>
+              <a:t>•  If data exceeded Snowflake limits, would need rework</a:t>
+            </a:r>
+          </a:p>
+        </p:txBody>
+      </p:sp>
+      <p:sp>
+        <p:nvSpPr>
+          <p:cNvPr id="7" name="Rounded Rectangle 6"/>
+          <p:cNvSpPr/>
+          <p:nvPr/>
+        </p:nvSpPr>
+        <p:spPr>
+          <a:xfrm>
+            <a:off x="400000" y="3800000"/>
+            <a:ext cx="11400000" cy="2400000"/>
+          </a:xfrm>
+          <a:prstGeom prst="roundRect">
+            <a:avLst/>
+          </a:prstGeom>
+          <a:solidFill>
+            <a:srgbClr val="E3F2FD"/>
+          </a:solidFill>
+          <a:ln>
+            <a:noFill/>
+          </a:ln>
+        </p:spPr>
+        <p:style>
+          <a:lnRef idx="1">
+            <a:schemeClr val="accent1"/>
+          </a:lnRef>
+          <a:fillRef idx="3">
+            <a:schemeClr val="accent1"/>
+          </a:fillRef>
+          <a:effectRef idx="2">
+            <a:schemeClr val="accent1"/>
+          </a:effectRef>
+          <a:fontRef idx="minor">
+            <a:schemeClr val="lt1"/>
+          </a:fontRef>
+        </p:style>
+        <p:txBody>
+          <a:bodyPr rtlCol="0" anchor="ctr" wrap="square"/>
+          <a:lstStyle/>
+          <a:p>
+            <a:pPr algn="ctr"/>
+            <a:r>
+              <a:rPr sz="1600" b="1">
+                <a:solidFill>
+                  <a:srgbClr val="0D47A1"/>
+                </a:solidFill>
+              </a:rPr>
               <a:t>Key Design Decisions</a:t>
             </a:r>
           </a:p>
           <a:p>
-            <a:r>
-              <a:t>  - [Decision 1 and reasoning]</a:t>
-            </a:r>
-          </a:p>
-          <a:p>
-            <a:r>
-              <a:t>  - [Decision 2 and reasoning]</a:t>
-            </a:r>
-          </a:p>
-          <a:p>
-            <a:r>
-              <a:t>  - [Decision 3 and reasoning]</a:t>
+            <a:pPr>
+              <a:spcBef>
+                <a:spcPts val="600"/>
+              </a:spcBef>
+            </a:pPr>
+            <a:r>
+              <a:rPr sz="1200">
+                <a:solidFill>
+                  <a:srgbClr val="2D2D2D"/>
+                </a:solidFill>
+              </a:rPr>
+              <a:t>•  Tables (not views) for staging: 39M rows too expensive to rebuild on every dashboard query</a:t>
+            </a:r>
+          </a:p>
+          <a:p>
+            <a:pPr>
+              <a:spcBef>
+                <a:spcPts val="600"/>
+              </a:spcBef>
+            </a:pPr>
+            <a:r>
+              <a:rPr sz="1200">
+                <a:solidFill>
+                  <a:srgbClr val="2D2D2D"/>
+                </a:solidFill>
+              </a:rPr>
+              <a:t>•  Flag DQ issues, don't delete: preserves traceability, Gold filters with WHERE is_valid = TRUE</a:t>
+            </a:r>
+          </a:p>
+          <a:p>
+            <a:pPr>
+              <a:spcBef>
+                <a:spcPts val="600"/>
+              </a:spcBef>
+            </a:pPr>
+            <a:r>
+              <a:rPr sz="1200">
+                <a:solidFill>
+                  <a:srgbClr val="2D2D2D"/>
+                </a:solidFill>
+              </a:rPr>
+              <a:t>•  Weather join on date + hour: matches trip pickup timestamp granularity (100% match rate)</a:t>
+            </a:r>
+          </a:p>
+          <a:p>
+            <a:pPr>
+              <a:spcBef>
+                <a:spcPts val="600"/>
+              </a:spcBef>
+            </a:pPr>
+            <a:r>
+              <a:rPr sz="1200">
+                <a:solidFill>
+                  <a:srgbClr val="2D2D2D"/>
+                </a:solidFill>
+              </a:rPr>
+              <a:t>•  Single orchestration script: one command runs everything, idempotent, fails fast</a:t>
             </a:r>
           </a:p>
         </p:txBody>

--- a/docs/Capstone_Presentation.pptx
+++ b/docs/Capstone_Presentation.pptx
@@ -27,17 +27,21 @@
     <p:sldId id="271" r:id="rId21"/>
     <p:sldId id="272" r:id="rId22"/>
     <p:sldId id="273" r:id="rId23"/>
-    <p:sldId id="281" r:id="rId43"/>
-    <p:sldId id="282" r:id="rId44"/>
-    <p:sldId id="283" r:id="rId45"/>
-    <p:sldId id="284" r:id="rId46"/>
-    <p:sldId id="285" r:id="rId47"/>
+    <p:sldId id="286" r:id="rId48"/>
+    <p:sldId id="287" r:id="rId49"/>
+    <p:sldId id="288" r:id="rId50"/>
+    <p:sldId id="289" r:id="rId51"/>
     <p:sldId id="274" r:id="rId24"/>
     <p:sldId id="275" r:id="rId25"/>
     <p:sldId id="276" r:id="rId26"/>
     <p:sldId id="277" r:id="rId27"/>
     <p:sldId id="278" r:id="rId28"/>
     <p:sldId id="279" r:id="rId29"/>
+    <p:sldId id="281" r:id="rId43"/>
+    <p:sldId id="282" r:id="rId44"/>
+    <p:sldId id="283" r:id="rId45"/>
+    <p:sldId id="284" r:id="rId46"/>
+    <p:sldId id="285" r:id="rId47"/>
   </p:sldIdLst>
   <p:sldSz cx="12192000" cy="6858000"/>
   <p:notesSz cx="6858000" cy="9144000"/>
@@ -1412,7 +1416,24 @@
           </a:p>
           <a:p>
             <a:r>
-              <a:t>In 2025, when it rained or snowed, more people hailed taxis instead of walking or taking transit. By 2026, that flipped. Snow now pushes demand down because the storms were dramatically more severe: total snowfall more than doubled, the longest continuous storm grew from 11 to 27 hours, and average accumulation tripled. The business impact concentrates during rush hour, where a single storm-hour costs more in lost revenue than several off-peak storm-hours combined.</a:t>
+              <a:t>RECOMMENDED CONTENT FOR THIS SLIDE:</a:t>
+            </a:r>
+          </a:p>
+          <a:p>
+            <a:r>
+              <a:t>Headline Finding: In 2025, adverse weather increased taxi demand in Manhattan (+15.6%) and Brooklyn (+20.6%) as riders switched to cabs. By 2026, that pattern reversed: adverse weather now suppresses demand across all boroughs (Manhattan -18.4%, Brooklyn -9.7%, Queens -24.3%).</a:t>
+            </a:r>
+          </a:p>
+          <a:p/>
+          <a:p>
+            <a:r>
+              <a:t>Stat cards: 38M+ trip records | 10 months (Jan-May 2025 vs 2026) | 5 boroughs compared</a:t>
+            </a:r>
+          </a:p>
+          <a:p/>
+          <a:p>
+            <a:r>
+              <a:t>Key Insight: A single rush-hour storm-hour now costs more in lost revenue than several off-peak storm-hours combined. Pre-positioning vehicles is the highest-value intervention.</a:t>
             </a:r>
           </a:p>
         </p:txBody>
@@ -1485,17 +1506,6 @@
               <a:t>We will start with our headline finding, then walk you through how we got there: the data, our architecture, what was wrong with the data and how we handled it, our year-over-year analysis, the technical decisions behind it all, and finally where we would take this next.</a:t>
             </a:r>
           </a:p>
-          <a:p/>
-          <a:p>
-            <a:r>
-              <a:t>--- NEW VERSION NOTES ---</a:t>
-            </a:r>
-          </a:p>
-          <a:p>
-            <a:r>
-              <a:t>We have added a seventh section, Extensions, between Technical Deep Dive and Future State. This covers the bonus work we completed: Streamlit dashboard, BigQuery ML clustering, and pipeline orchestration.</a:t>
-            </a:r>
-          </a:p>
         </p:txBody>
       </p:sp>
       <p:sp>
@@ -1568,7 +1578,30 @@
           </a:p>
           <a:p>
             <a:r>
-              <a:t>The key year-over-year shift: in 2025, adverse weather was net-positive for taxi demand (people switched from walking and transit to cabs). In 2026, snow became severe enough to suppress trips entirely. Rain still boosts ridership in both years, confirming the shift is snow-specific, not a general behavioral change. We verified fairness by confirming same months, same DQ filters, same vehicle types in both years.</a:t>
+              <a:t>RECOMMENDED CONTENT FOR THIS SLIDE:</a:t>
+            </a:r>
+          </a:p>
+          <a:p>
+            <a:r>
+              <a:t>Year-over-Year Finding: During daytime hours in 2025, adverse weather INCREASED taxi demand in Manhattan (+15.6%) and Brooklyn (+20.6%) as riders switched from walking/transit to cabs. In 2026, that same weather DECREASED demand everywhere: Manhattan -18.4%, Brooklyn -9.7%, Queens -24.3%, Bronx -24.1%.</a:t>
+            </a:r>
+          </a:p>
+          <a:p/>
+          <a:p>
+            <a:r>
+              <a:t>Root cause: Snow severity more than doubled. Total snowfall: 11.6 in (2025) vs. 25.2 in (2026). Snow hours: 84 vs. 133. Snow drove demand down -31.3% in Manhattan and -31.4% in Queens in 2026. Rain still boosts demand in both years (Manhattan +22.6% in 2025, +11.6% in 2026).</a:t>
+            </a:r>
+          </a:p>
+          <a:p/>
+          <a:p>
+            <a:r>
+              <a:t>Is the comparison fair? Same months (Jan-May), same vehicle types, same DQ filters. 3.0% flagged invalid in both years, no systematic bias.</a:t>
+            </a:r>
+          </a:p>
+          <a:p/>
+          <a:p>
+            <a:r>
+              <a:t>So What? Pre-position vehicles before forecasted snow. Rain = revenue opportunity (more riders). Snow = risk requiring proactive fleet response, especially during rush hours.</a:t>
             </a:r>
           </a:p>
         </p:txBody>
@@ -1643,7 +1676,7 @@
           </a:p>
           <a:p>
             <a:r>
-              <a:t>This is our Streamlit dashboard deployed on Streamlit Community Cloud. It tells the full analytical story in six progressive charts: (1) Monthly trip volume shows YoY growth, (2) Weekday vs weekend hourly patterns, (3) Average trip cost stability across weather, (4) The core finding: weather's demand effect flipped 2025 to 2026, (5) Rain vs snow breakdown, (6) Revenue per storm-hour. Each chart has borough tabs and expandable interpretations.</a:t>
+              <a:t>RECOMMENDED: In the new version, the Streamlit dashboard (interactive, 6 visualizations, deployed on Streamlit Community Cloud) should appear before the Tableau dashboard in this section. See duplicated slides added after this section for the recommended version.</a:t>
             </a:r>
           </a:p>
         </p:txBody>
@@ -1718,7 +1751,30 @@
           </a:p>
           <a:p>
             <a:r>
-              <a:t>Our Tableau dashboard provides a complementary view of the same Gold layer data. While Streamlit gives interactive, code-driven exploration, Tableau offers polished static views for executive reporting and non-technical stakeholders. Both connect to the same mart_weather_demand table.</a:t>
+              <a:t>RECOMMENDED CONTENT FOR THIS SLIDE:</a:t>
+            </a:r>
+          </a:p>
+          <a:p>
+            <a:r>
+              <a:t>Recommendation: Implement a storm-response protocol. Pre-position 15-20% more vehicles in Manhattan and Brooklyn when snow is forecasted, with priority during rush hours (7-10 AM, 4-7 PM).</a:t>
+            </a:r>
+          </a:p>
+          <a:p/>
+          <a:p>
+            <a:r>
+              <a:t>Key distinction: Rain remains a revenue OPPORTUNITY (demand increases +11-22%). Snow is the RISK (demand drops -19% to -31%), and that risk grows with storm severity.</a:t>
+            </a:r>
+          </a:p>
+          <a:p/>
+          <a:p>
+            <a:r>
+              <a:t>Actionable Next Step: Integrate hourly weather forecasts into dispatch systems. Trigger pre-positioning 2 hours before snow onset. Track revenue-per-storm-hour as the improvement KPI.</a:t>
+            </a:r>
+          </a:p>
+          <a:p/>
+          <a:p>
+            <a:r>
+              <a:t>Implementation Cost: 1-2 sprint integration. Weather API ($0), Snowpipe for real-time data (included in Snowflake), alerting logic (1 engineer, 2 weeks).</a:t>
             </a:r>
           </a:p>
         </p:txBody>
@@ -1793,7 +1849,7 @@
           </a:p>
           <a:p>
             <a:r>
-              <a:t>Our recommendation ties directly to the finding. Snow drives revenue losses concentrated during rush hour. The fix is operational: pre-position vehicles before storms, prioritize high-revenue hours, and treat rain as an opportunity rather than a threat. Implementation cost is minimal because the pipeline infrastructure already exists.</a:t>
+              <a:t>This is the recommended replacement for the Headline Finding slide. The numbers come directly from the Streamlit dashboard analysis of mart_weather_demand (30,251 rows). In 2025, rain and snow made people switch to taxis (positive demand effect). In 2026, snow became severe enough that people stayed home (negative demand effect). The dollar impact concentrates during rush hour.</a:t>
             </a:r>
           </a:p>
         </p:txBody>
@@ -1868,7 +1924,7 @@
           </a:p>
           <a:p>
             <a:r>
-              <a:t>Beyond the core deliverables, we completed three extensions: a deployed Streamlit application, K-Means clustering using BigQuery ML, and single-command pipeline orchestration. Each is genuinely integrated into the project, not a standalone demo.</a:t>
+              <a:t>This is the recommended replacement for the Business Question slide. The only change from Ariana's version is the corrected row count: 30,251 (not 34,719). The mart_weather_demand table is the single source for both Streamlit and Tableau dashboards.</a:t>
             </a:r>
           </a:p>
         </p:txBody>
@@ -1943,7 +1999,7 @@
           </a:p>
           <a:p>
             <a:r>
-              <a:t>These three extensions demonstrate work beyond the core requirements. The Streamlit dashboard queries AMO_GOLD.MART_WEATHER_DEMAND, the BigQuery ML model was trained on the same data, and the orchestration script builds everything from scratch. Each adds genuine value: Streamlit for interactive exploration, BigQuery ML for trip segmentation insights, and orchestration for reproducibility.</a:t>
+              <a:t>This is the recommended replacement for the Year-over-Year Finding slide. All numbers come directly from the Streamlit dashboard. The key story: rain makes people switch to taxis (positive), but snow in 2026 was severe enough to suppress trips entirely (negative). This is not a behavioral mystery, it is a weather severity story.</a:t>
             </a:r>
           </a:p>
         </p:txBody>
@@ -2018,7 +2074,7 @@
           </a:p>
           <a:p>
             <a:r>
-              <a:t>The Streamlit app tells a cohesive analytical story. Each visualization builds on the previous: first YoY growth, then hourly patterns, then cost stability, then the weather impact reversal, then the rain vs snow breakdown, then the dollar quantification. It deploys via GitHub Actions: push to orlando syncs to main, and Streamlit Community Cloud auto-deploys from main.</a:t>
+              <a:t>This Streamlit slide should appear BEFORE the Tableau dashboard slide in the Year-over-Year Analysis section. The Streamlit app tells the analytical story progressively through 6 charts. It connects to Snowflake directly with a 10-minute cache, falls back to CSV for demos. Deployed via CI/CD: push to orlando triggers GitHub Action that syncs to main, Streamlit Community Cloud auto-deploys from main.</a:t>
             </a:r>
           </a:p>
         </p:txBody>
@@ -2093,7 +2149,7 @@
           </a:p>
           <a:p>
             <a:r>
-              <a:t>Ariana built this in BigQuery ML, demonstrating multi-cloud capability. The clustering found four trip behavior patterns, but weather was NOT a differentiator between clusters. This independently confirms our main finding: weather affects how many trips happen, not what those trips look like. We chose k=4 over k=6 because the additional clusters were harder to interpret for stakeholders, even though k=6 scored slightly better on the Davies-Bouldin Index.</a:t>
+              <a:t>This is the recommended replacement for the Recommendation slide. It ties directly to the finding: snow drives rush-hour revenue losses, so the fix is operational pre-positioning. Rain is an opportunity, not a risk. The cost is minimal because the infrastructure already exists in our pipeline.</a:t>
             </a:r>
           </a:p>
         </p:txBody>
@@ -2168,7 +2224,82 @@
           </a:p>
           <a:p>
             <a:r>
-              <a:t>The orchestration script makes the pipeline production-ready. It runs all seven stages in order, verifies each before proceeding, and produces a final summary. If anything fails, it stops immediately rather than continuing with incomplete data. The script is also documentation: reading it tells you exactly how data flows from S3 to Gold. Runtime is approximately 6 minutes, mostly dbt processing 39 million rows.</a:t>
+              <a:t>This is a NEW section. Beyond the core deliverables, we completed three bonus extensions: a deployed Streamlit dashboard, K-Means clustering using BigQuery ML, and a single-command pipeline orchestration script. All three are genuinely integrated into the project.</a:t>
+            </a:r>
+          </a:p>
+        </p:txBody>
+      </p:sp>
+      <p:sp>
+        <p:nvSpPr>
+          <p:cNvPr id="4" name="Slide Number Placeholder 3"/>
+          <p:cNvSpPr>
+            <a:spLocks noGrp="1"/>
+          </p:cNvSpPr>
+          <p:nvPr>
+            <p:ph type="sldNum" idx="5" sz="quarter"/>
+          </p:nvPr>
+        </p:nvSpPr>
+        <p:spPr/>
+      </p:sp>
+    </p:spTree>
+  </p:cSld>
+  <p:clrMapOvr>
+    <a:masterClrMapping/>
+  </p:clrMapOvr>
+</p:notes>
+</file>
+
+<file path=ppt/notesSlides/notesSlide29.xml><?xml version="1.0" encoding="utf-8"?>
+<p:notes xmlns:a="http://schemas.openxmlformats.org/drawingml/2006/main" xmlns:p="http://schemas.openxmlformats.org/presentationml/2006/main" xmlns:r="http://schemas.openxmlformats.org/officeDocument/2006/relationships">
+  <p:cSld>
+    <p:spTree>
+      <p:nvGrpSpPr>
+        <p:cNvPr id="1" name=""/>
+        <p:cNvGrpSpPr/>
+        <p:nvPr/>
+      </p:nvGrpSpPr>
+      <p:grpSpPr>
+        <a:xfrm>
+          <a:off x="0" y="0"/>
+          <a:ext cx="0" cy="0"/>
+          <a:chOff x="0" y="0"/>
+          <a:chExt cx="0" cy="0"/>
+        </a:xfrm>
+      </p:grpSpPr>
+      <p:sp>
+        <p:nvSpPr>
+          <p:cNvPr id="2" name="Slide Image Placeholder 1"/>
+          <p:cNvSpPr>
+            <a:spLocks noGrp="1"/>
+          </p:cNvSpPr>
+          <p:nvPr>
+            <p:ph type="sldImg" idx="2"/>
+          </p:nvPr>
+        </p:nvSpPr>
+        <p:spPr/>
+      </p:sp>
+      <p:sp>
+        <p:nvSpPr>
+          <p:cNvPr id="3" name="Notes Placeholder 2"/>
+          <p:cNvSpPr>
+            <a:spLocks noGrp="1"/>
+          </p:cNvSpPr>
+          <p:nvPr>
+            <p:ph type="body" idx="3" sz="quarter"/>
+          </p:nvPr>
+        </p:nvSpPr>
+        <p:spPr/>
+        <p:txBody>
+          <a:bodyPr/>
+          <a:lstStyle/>
+          <a:p>
+            <a:r>
+              <a:t>--- NEW VERSION NOTES ---</a:t>
+            </a:r>
+          </a:p>
+          <a:p>
+            <a:r>
+              <a:t>These extensions earn up to 5 bonus points per the rubric. They are not side projects. The Streamlit app queries AMO_GOLD.MART_WEATHER_DEMAND (same table Tableau connects to), the BigQuery ML model was trained on the same aggregated data, and the orchestration script is what builds everything from scratch in 6 minutes.</a:t>
             </a:r>
           </a:p>
         </p:txBody>
@@ -2263,6 +2394,156 @@
 </p:notes>
 </file>
 
+<file path=ppt/notesSlides/notesSlide30.xml><?xml version="1.0" encoding="utf-8"?>
+<p:notes xmlns:a="http://schemas.openxmlformats.org/drawingml/2006/main" xmlns:p="http://schemas.openxmlformats.org/presentationml/2006/main" xmlns:r="http://schemas.openxmlformats.org/officeDocument/2006/relationships">
+  <p:cSld>
+    <p:spTree>
+      <p:nvGrpSpPr>
+        <p:cNvPr id="1" name=""/>
+        <p:cNvGrpSpPr/>
+        <p:nvPr/>
+      </p:nvGrpSpPr>
+      <p:grpSpPr>
+        <a:xfrm>
+          <a:off x="0" y="0"/>
+          <a:ext cx="0" cy="0"/>
+          <a:chOff x="0" y="0"/>
+          <a:chExt cx="0" cy="0"/>
+        </a:xfrm>
+      </p:grpSpPr>
+      <p:sp>
+        <p:nvSpPr>
+          <p:cNvPr id="2" name="Slide Image Placeholder 1"/>
+          <p:cNvSpPr>
+            <a:spLocks noGrp="1"/>
+          </p:cNvSpPr>
+          <p:nvPr>
+            <p:ph type="sldImg" idx="2"/>
+          </p:nvPr>
+        </p:nvSpPr>
+        <p:spPr/>
+      </p:sp>
+      <p:sp>
+        <p:nvSpPr>
+          <p:cNvPr id="3" name="Notes Placeholder 2"/>
+          <p:cNvSpPr>
+            <a:spLocks noGrp="1"/>
+          </p:cNvSpPr>
+          <p:nvPr>
+            <p:ph type="body" idx="3" sz="quarter"/>
+          </p:nvPr>
+        </p:nvSpPr>
+        <p:spPr/>
+        <p:txBody>
+          <a:bodyPr/>
+          <a:lstStyle/>
+          <a:p>
+            <a:r>
+              <a:t>--- NEW VERSION NOTES ---</a:t>
+            </a:r>
+          </a:p>
+          <a:p>
+            <a:r>
+              <a:t>Ariana built this in BigQuery ML, demonstrating multi-cloud capability. The clustering found four distinct trip behavior segments, but weather was NOT a differentiator between clusters. This independently confirms our main analysis: weather affects how many trips happen, not what those trips look like. We chose k=4 over k=6 because the two extra clusters in k=6 were harder to explain to stakeholders despite marginally better DBI score (1.40 vs 1.42).</a:t>
+            </a:r>
+          </a:p>
+        </p:txBody>
+      </p:sp>
+      <p:sp>
+        <p:nvSpPr>
+          <p:cNvPr id="4" name="Slide Number Placeholder 3"/>
+          <p:cNvSpPr>
+            <a:spLocks noGrp="1"/>
+          </p:cNvSpPr>
+          <p:nvPr>
+            <p:ph type="sldNum" idx="5" sz="quarter"/>
+          </p:nvPr>
+        </p:nvSpPr>
+        <p:spPr/>
+      </p:sp>
+    </p:spTree>
+  </p:cSld>
+  <p:clrMapOvr>
+    <a:masterClrMapping/>
+  </p:clrMapOvr>
+</p:notes>
+</file>
+
+<file path=ppt/notesSlides/notesSlide31.xml><?xml version="1.0" encoding="utf-8"?>
+<p:notes xmlns:a="http://schemas.openxmlformats.org/drawingml/2006/main" xmlns:p="http://schemas.openxmlformats.org/presentationml/2006/main" xmlns:r="http://schemas.openxmlformats.org/officeDocument/2006/relationships">
+  <p:cSld>
+    <p:spTree>
+      <p:nvGrpSpPr>
+        <p:cNvPr id="1" name=""/>
+        <p:cNvGrpSpPr/>
+        <p:nvPr/>
+      </p:nvGrpSpPr>
+      <p:grpSpPr>
+        <a:xfrm>
+          <a:off x="0" y="0"/>
+          <a:ext cx="0" cy="0"/>
+          <a:chOff x="0" y="0"/>
+          <a:chExt cx="0" cy="0"/>
+        </a:xfrm>
+      </p:grpSpPr>
+      <p:sp>
+        <p:nvSpPr>
+          <p:cNvPr id="2" name="Slide Image Placeholder 1"/>
+          <p:cNvSpPr>
+            <a:spLocks noGrp="1"/>
+          </p:cNvSpPr>
+          <p:nvPr>
+            <p:ph type="sldImg" idx="2"/>
+          </p:nvPr>
+        </p:nvSpPr>
+        <p:spPr/>
+      </p:sp>
+      <p:sp>
+        <p:nvSpPr>
+          <p:cNvPr id="3" name="Notes Placeholder 2"/>
+          <p:cNvSpPr>
+            <a:spLocks noGrp="1"/>
+          </p:cNvSpPr>
+          <p:nvPr>
+            <p:ph type="body" idx="3" sz="quarter"/>
+          </p:nvPr>
+        </p:nvSpPr>
+        <p:spPr/>
+        <p:txBody>
+          <a:bodyPr/>
+          <a:lstStyle/>
+          <a:p>
+            <a:r>
+              <a:t>--- NEW VERSION NOTES ---</a:t>
+            </a:r>
+          </a:p>
+          <a:p>
+            <a:r>
+              <a:t>The orchestration script makes the pipeline production-ready. It runs all seven stages, verifies each before proceeding, and prints a final summary. If anything fails, it stops immediately. The script is also living documentation: reading it top to bottom tells you exactly how data flows from S3 to Gold. Runtime is approximately 6 minutes, mostly dbt processing 39 million rows.</a:t>
+            </a:r>
+          </a:p>
+        </p:txBody>
+      </p:sp>
+      <p:sp>
+        <p:nvSpPr>
+          <p:cNvPr id="4" name="Slide Number Placeholder 3"/>
+          <p:cNvSpPr>
+            <a:spLocks noGrp="1"/>
+          </p:cNvSpPr>
+          <p:nvPr>
+            <p:ph type="sldNum" idx="5" sz="quarter"/>
+          </p:nvPr>
+        </p:nvSpPr>
+        <p:spPr/>
+      </p:sp>
+    </p:spTree>
+  </p:cSld>
+  <p:clrMapOvr>
+    <a:masterClrMapping/>
+  </p:clrMapOvr>
+</p:notes>
+</file>
+
 <file path=ppt/notesSlides/notesSlide4.xml><?xml version="1.0" encoding="utf-8"?>
 <p:notes xmlns:a="http://schemas.openxmlformats.org/drawingml/2006/main" xmlns:r="http://schemas.openxmlformats.org/officeDocument/2006/relationships" xmlns:p="http://schemas.openxmlformats.org/presentationml/2006/main">
   <p:cSld>
@@ -2319,6 +2600,17 @@
             <a:br/>
             <a:r>
               <a:t>We scoped this to Yellow and Green taxi trips from January through May in both years, giving us an apples-to-apples seasonal comparison. Our answer lives in a single pre-aggregated table with about 35,000 rows that any dashboard can query instantly.</a:t>
+            </a:r>
+          </a:p>
+          <a:p/>
+          <a:p>
+            <a:r>
+              <a:t>--- NEW VERSION NOTES ---</a:t>
+            </a:r>
+          </a:p>
+          <a:p>
+            <a:r>
+              <a:t>RECOMMENDED UPDATE: The pre-aggregated mart (mart_weather_demand) has 30,251 rows (not 34,719). This powers both dashboards.</a:t>
             </a:r>
           </a:p>
         </p:txBody>
@@ -11489,23 +11781,23 @@
           <a:p>
             <a:pPr algn="ctr"/>
             <a:r>
-              <a:rPr sz="1400" b="1">
-                <a:solidFill>
-                  <a:srgbClr val="333333"/>
-                </a:solidFill>
-              </a:rPr>
-              <a:t>During daytime hours, adverse weather increased taxi demand in Manhattan by +3-5% in 2025. In 2026, that same weather decreased demand by -2% to -8% across all boroughs.</a:t>
+              <a:rPr sz="2200" b="1">
+                <a:solidFill>
+                  <a:srgbClr val="2D2D2D"/>
+                </a:solidFill>
+              </a:rPr>
+              <a:t>[STATE THE YEAR-OVER-YEAR FINDING HERE]</a:t>
             </a:r>
           </a:p>
           <a:p>
             <a:pPr algn="ctr"/>
             <a:r>
-              <a:rPr sz="1200">
+              <a:rPr sz="1300" i="1">
                 <a:solidFill>
                   <a:srgbClr val="555555"/>
                 </a:solidFill>
               </a:rPr>
-              <a:t>Snow drives the reversal: 2026 snowfall doubled (25.2 in vs. 11.6 in), longest storm grew from 11 to 27 hrs. Rain still boosts demand in both years.</a:t>
+              <a:t>e.g., During rain/snow events, outer-borough demand fell X% YoY while Manhattan held steady</a:t>
             </a:r>
           </a:p>
         </p:txBody>
@@ -11622,12 +11914,12 @@
           </a:p>
           <a:p>
             <a:r>
-              <a:rPr sz="1100">
-                <a:solidFill>
-                  <a:srgbClr val="333333"/>
-                </a:solidFill>
-              </a:rPr>
-              <a:t>Invalid rows distributed evenly: 3.0% flagged in both years. No systematic bias by borough or weather condition. Same DQ filters applied identically.</a:t>
+              <a:rPr sz="1200">
+                <a:solidFill>
+                  <a:srgbClr val="2D2D2D"/>
+                </a:solidFill>
+              </a:rPr>
+              <a:t>[What we checked and ruled out: e.g., invalid rows distributed evenly across both years, no systematic bias]</a:t>
             </a:r>
           </a:p>
         </p:txBody>
@@ -11683,12 +11975,12 @@
           </a:p>
           <a:p>
             <a:r>
-              <a:rPr sz="1100">
-                <a:solidFill>
-                  <a:srgbClr val="333333"/>
-                </a:solidFill>
-              </a:rPr>
-              <a:t>Pattern holds across all 5 boroughs, both day and night. Effect size: -2% to -15% depending on borough and weather type. Not random noise.</a:t>
+              <a:rPr sz="1200">
+                <a:solidFill>
+                  <a:srgbClr val="2D2D2D"/>
+                </a:solidFill>
+              </a:rPr>
+              <a:t>[Evidence the change is not noise, or honest confidence statement]</a:t>
             </a:r>
           </a:p>
         </p:txBody>
@@ -11744,12 +12036,12 @@
           </a:p>
           <a:p>
             <a:r>
-              <a:rPr sz="1100">
-                <a:solidFill>
-                  <a:srgbClr val="333333"/>
-                </a:solidFill>
-              </a:rPr>
-              <a:t>Pre-position vehicles before forecasted snow events, prioritize rush-hour coverage, and consider dynamic driver incentives during severe storms.</a:t>
+              <a:rPr sz="1200">
+                <a:solidFill>
+                  <a:srgbClr val="2D2D2D"/>
+                </a:solidFill>
+              </a:rPr>
+              <a:t>[Business recommendation: e.g., stage more drivers in X borough during Y weather because Z]</a:t>
             </a:r>
           </a:p>
         </p:txBody>
@@ -11795,8 +12087,7 @@
           <a:lstStyle/>
           <a:p>
             <a:r>
-              <a:rPr sz="2400"/>
-              <a:t>Streamlit Dashboard: Interactive Weather-Demand Analysis</a:t>
+              <a:t>Dashboard</a:t>
             </a:r>
           </a:p>
         </p:txBody>
@@ -11888,12 +12179,12 @@
           <a:p>
             <a:pPr algn="ctr"/>
             <a:r>
-              <a:rPr sz="1400">
-                <a:solidFill>
-                  <a:srgbClr val="666666"/>
-                </a:solidFill>
-              </a:rPr>
-              <a:t>[Insert Streamlit Dashboard Screenshot]</a:t>
+              <a:rPr sz="2000" i="1">
+                <a:solidFill>
+                  <a:srgbClr val="555555"/>
+                </a:solidFill>
+              </a:rPr>
+              <a:t>[Insert Tableau Dashboard Screenshot]</a:t>
             </a:r>
           </a:p>
           <a:p>
@@ -11903,12 +12194,12 @@
               </a:spcBef>
             </a:pPr>
             <a:r>
-              <a:rPr sz="1200">
-                <a:solidFill>
-                  <a:srgbClr val="555555"/>
-                </a:solidFill>
-              </a:rPr>
-              <a:t>Live Snowflake connection | 6 interactive visualizations | Borough tabs | Day/Night splits | Deployed on Streamlit Community Cloud</a:t>
+              <a:rPr sz="1400">
+                <a:solidFill>
+                  <a:srgbClr val="2D2D2D"/>
+                </a:solidFill>
+              </a:rPr>
+              <a:t>Connected to AMO_GOLD.MART_WEATHER_DEMAND (34,719 rows)</a:t>
             </a:r>
           </a:p>
         </p:txBody>
@@ -11954,8 +12245,7 @@
           <a:lstStyle/>
           <a:p>
             <a:r>
-              <a:rPr sz="2400"/>
-              <a:t>Tableau Dashboard</a:t>
+              <a:t>Supporting Analysis (duplicate as needed)</a:t>
             </a:r>
           </a:p>
         </p:txBody>
@@ -12047,12 +12337,12 @@
           <a:p>
             <a:pPr algn="ctr"/>
             <a:r>
-              <a:rPr sz="1400">
-                <a:solidFill>
-                  <a:srgbClr val="666666"/>
-                </a:solidFill>
-              </a:rPr>
-              <a:t>[Insert Tableau Dashboard Screenshot]</a:t>
+              <a:rPr sz="1800" i="1">
+                <a:solidFill>
+                  <a:srgbClr val="555555"/>
+                </a:solidFill>
+              </a:rPr>
+              <a:t>[Additional charts / breakdowns from Tableau]</a:t>
             </a:r>
           </a:p>
           <a:p>
@@ -12062,12 +12352,12 @@
               </a:spcBef>
             </a:pPr>
             <a:r>
-              <a:rPr sz="1200">
-                <a:solidFill>
-                  <a:srgbClr val="555555"/>
-                </a:solidFill>
-              </a:rPr>
-              <a:t>Connected to AMO_GOLD.MART_WEATHER_DEMAND (30,251 rows) | Static reporting view for executive stakeholders</a:t>
+              <a:rPr sz="1400">
+                <a:solidFill>
+                  <a:srgbClr val="2D2D2D"/>
+                </a:solidFill>
+              </a:rPr>
+              <a:t>Revenue by weather, duration by borough, payment type splits</a:t>
             </a:r>
           </a:p>
         </p:txBody>
@@ -13679,73 +13969,7 @@
           <a:lstStyle/>
           <a:p>
             <a:r>
-              <a:rPr sz="1800">
-                <a:solidFill>
-                  <a:srgbClr val="2D2D2D"/>
-                </a:solidFill>
-              </a:rPr>
-              <a:t>Extensions</a:t>
-            </a:r>
-          </a:p>
-        </p:txBody>
-      </p:sp>
-      <p:sp>
-        <p:nvSpPr>
-          <p:cNvPr id="16" name="TextBox 15"/>
-          <p:cNvSpPr txBox="1"/>
-          <p:nvPr/>
-        </p:nvSpPr>
-        <p:spPr>
-          <a:xfrm>
-            <a:off x="800000" y="6300000"/>
-            <a:ext cx="600000" cy="700000"/>
-          </a:xfrm>
-          <a:prstGeom prst="rect">
-            <a:avLst/>
-          </a:prstGeom>
-          <a:noFill/>
-        </p:spPr>
-        <p:txBody>
-          <a:bodyPr wrap="none">
-            <a:spAutoFit/>
-          </a:bodyPr>
-          <a:lstStyle/>
-          <a:p>
-            <a:r>
-              <a:rPr sz="4800">
-                <a:solidFill>
-                  <a:srgbClr val="FE3082"/>
-                </a:solidFill>
-              </a:rPr>
-              <a:t>7</a:t>
-            </a:r>
-          </a:p>
-        </p:txBody>
-      </p:sp>
-      <p:sp>
-        <p:nvSpPr>
-          <p:cNvPr id="17" name="TextBox 16"/>
-          <p:cNvSpPr txBox="1"/>
-          <p:nvPr/>
-        </p:nvSpPr>
-        <p:spPr>
-          <a:xfrm>
-            <a:off x="1600000" y="6300000"/>
-            <a:ext cx="9000000" cy="500000"/>
-          </a:xfrm>
-          <a:prstGeom prst="rect">
-            <a:avLst/>
-          </a:prstGeom>
-          <a:noFill/>
-        </p:spPr>
-        <p:txBody>
-          <a:bodyPr wrap="none">
-            <a:spAutoFit/>
-          </a:bodyPr>
-          <a:lstStyle/>
-          <a:p>
-            <a:r>
-              <a:rPr sz="1800">
+              <a:rPr sz="1800" b="1">
                 <a:solidFill>
                   <a:srgbClr val="2D2D2D"/>
                 </a:solidFill>
@@ -13764,7 +13988,7 @@
 </file>
 
 <file path=ppt/slides/slide20.xml><?xml version="1.0" encoding="utf-8"?>
-<p:sld xmlns:a="http://schemas.openxmlformats.org/drawingml/2006/main" xmlns:p="http://schemas.openxmlformats.org/presentationml/2006/main" xmlns:r="http://schemas.openxmlformats.org/officeDocument/2006/relationships">
+<p:sld xmlns:a="http://schemas.openxmlformats.org/drawingml/2006/main" xmlns:r="http://schemas.openxmlformats.org/officeDocument/2006/relationships" xmlns:p="http://schemas.openxmlformats.org/presentationml/2006/main">
   <p:cSld>
     <p:spTree>
       <p:nvGrpSpPr>
@@ -13772,7 +13996,14 @@
         <p:cNvGrpSpPr/>
         <p:nvPr/>
       </p:nvGrpSpPr>
-      <p:grpSpPr/>
+      <p:grpSpPr>
+        <a:xfrm>
+          <a:off x="0" y="0"/>
+          <a:ext cx="0" cy="0"/>
+          <a:chOff x="0" y="0"/>
+          <a:chExt cx="0" cy="0"/>
+        </a:xfrm>
+      </p:grpSpPr>
       <p:sp>
         <p:nvSpPr>
           <p:cNvPr id="2" name="Text Placeholder 1"/>
@@ -13780,14 +14011,16 @@
             <a:spLocks noGrp="1"/>
           </p:cNvSpPr>
           <p:nvPr>
-            <p:ph type="body" idx="13" sz="quarter"/>
+            <p:ph type="body" sz="quarter" idx="13"/>
           </p:nvPr>
         </p:nvSpPr>
         <p:spPr/>
         <p:txBody>
           <a:bodyPr/>
           <a:lstStyle/>
-          <a:p/>
+          <a:p>
+            <a:endParaRPr/>
+          </a:p>
         </p:txBody>
       </p:sp>
       <p:sp>
@@ -13827,7 +14060,7 @@
           <a:lstStyle/>
           <a:p>
             <a:r>
-              <a:t>Extensions: Beyond the Requirements</a:t>
+              <a:t>Future State and Recommendation</a:t>
             </a:r>
           </a:p>
         </p:txBody>
@@ -13841,7 +14074,7 @@
 </file>
 
 <file path=ppt/slides/slide21.xml><?xml version="1.0" encoding="utf-8"?>
-<p:sld xmlns:a="http://schemas.openxmlformats.org/drawingml/2006/main" xmlns:p="http://schemas.openxmlformats.org/presentationml/2006/main" xmlns:r="http://schemas.openxmlformats.org/officeDocument/2006/relationships">
+<p:sld xmlns:a="http://schemas.openxmlformats.org/drawingml/2006/main" xmlns:r="http://schemas.openxmlformats.org/officeDocument/2006/relationships" xmlns:p="http://schemas.openxmlformats.org/presentationml/2006/main">
   <p:cSld>
     <p:spTree>
       <p:nvGrpSpPr>
@@ -13849,7 +14082,14 @@
         <p:cNvGrpSpPr/>
         <p:nvPr/>
       </p:nvGrpSpPr>
-      <p:grpSpPr/>
+      <p:grpSpPr>
+        <a:xfrm>
+          <a:off x="0" y="0"/>
+          <a:ext cx="0" cy="0"/>
+          <a:chOff x="0" y="0"/>
+          <a:chExt cx="0" cy="0"/>
+        </a:xfrm>
+      </p:grpSpPr>
       <p:sp>
         <p:nvSpPr>
           <p:cNvPr id="2" name="Title 1"/>
@@ -13866,7 +14106,7 @@
           <a:lstStyle/>
           <a:p>
             <a:r>
-              <a:t>Extensions Overview</a:t>
+              <a:t>Future State Proposal</a:t>
             </a:r>
           </a:p>
         </p:txBody>
@@ -13885,7 +14125,9 @@
         <p:txBody>
           <a:bodyPr/>
           <a:lstStyle/>
-          <a:p/>
+          <a:p>
+            <a:endParaRPr/>
+          </a:p>
         </p:txBody>
       </p:sp>
       <p:sp>
@@ -13928,6 +14170,7 @@
           <a:lstStyle/>
           <a:p>
             <a:pPr algn="ctr"/>
+            <a:endParaRPr/>
           </a:p>
         </p:txBody>
       </p:sp>
@@ -13939,8 +14182,8 @@
         </p:nvSpPr>
         <p:spPr>
           <a:xfrm>
-            <a:off x="400000" y="1100000"/>
-            <a:ext cx="3500000" cy="2400000"/>
+            <a:off x="400000" y="1000000"/>
+            <a:ext cx="3600000" cy="4800000"/>
           </a:xfrm>
           <a:prstGeom prst="roundRect">
             <a:avLst/>
@@ -13967,77 +14210,92 @@
           </a:fontRef>
         </p:style>
         <p:txBody>
-          <a:bodyPr rtlCol="0" anchor="ctr" wrap="square" tIns="127000" bIns="127000" lIns="152400" rIns="152400"/>
+          <a:bodyPr wrap="square" rtlCol="0" anchor="ctr"/>
           <a:lstStyle/>
           <a:p>
             <a:pPr algn="ctr"/>
             <a:r>
               <a:rPr sz="1600" b="1">
                 <a:solidFill>
-                  <a:srgbClr val="333333"/>
-                </a:solidFill>
-              </a:rPr>
-              <a:t>Streamlit Dashboard</a:t>
-            </a:r>
-          </a:p>
-          <a:p>
-            <a:r>
-              <a:rPr sz="1000" b="0">
-                <a:solidFill>
-                  <a:srgbClr val="333333"/>
-                </a:solidFill>
-              </a:rPr>
-              <a:t/>
-            </a:r>
-          </a:p>
-          <a:p>
-            <a:r>
-              <a:rPr sz="1200" b="0">
-                <a:solidFill>
-                  <a:srgbClr val="333333"/>
-                </a:solidFill>
-              </a:rPr>
-              <a:t>Deployed interactive app</a:t>
-            </a:r>
-          </a:p>
-          <a:p>
-            <a:r>
-              <a:rPr sz="1200" b="0">
-                <a:solidFill>
-                  <a:srgbClr val="333333"/>
-                </a:solidFill>
-              </a:rPr>
-              <a:t>6 progressive visualizations</a:t>
-            </a:r>
-          </a:p>
-          <a:p>
-            <a:r>
-              <a:rPr sz="1200" b="0">
-                <a:solidFill>
-                  <a:srgbClr val="333333"/>
-                </a:solidFill>
-              </a:rPr>
-              <a:t>Live Snowflake connection</a:t>
-            </a:r>
-          </a:p>
-          <a:p>
-            <a:r>
-              <a:rPr sz="1200" b="0">
-                <a:solidFill>
-                  <a:srgbClr val="333333"/>
-                </a:solidFill>
-              </a:rPr>
-              <a:t>Streamlit Community Cloud</a:t>
-            </a:r>
-          </a:p>
-          <a:p>
-            <a:r>
-              <a:rPr sz="1200" b="0">
-                <a:solidFill>
-                  <a:srgbClr val="333333"/>
-                </a:solidFill>
-              </a:rPr>
-              <a:t>CI/CD via GitHub Actions</a:t>
+                  <a:srgbClr val="2E7D32"/>
+                </a:solidFill>
+              </a:rPr>
+              <a:t>Real-Time Ingestion</a:t>
+            </a:r>
+          </a:p>
+          <a:p>
+            <a:pPr>
+              <a:spcBef>
+                <a:spcPts val="1600"/>
+              </a:spcBef>
+            </a:pPr>
+            <a:r>
+              <a:rPr sz="1100" b="1">
+                <a:solidFill>
+                  <a:srgbClr val="2E7D32"/>
+                </a:solidFill>
+              </a:rPr>
+              <a:t>What:</a:t>
+            </a:r>
+          </a:p>
+          <a:p>
+            <a:r>
+              <a:rPr sz="1100">
+                <a:solidFill>
+                  <a:srgbClr val="2D2D2D"/>
+                </a:solidFill>
+              </a:rPr>
+              <a:t>Snowpipe + streams for continuous loading</a:t>
+            </a:r>
+          </a:p>
+          <a:p>
+            <a:pPr>
+              <a:spcBef>
+                <a:spcPts val="1200"/>
+              </a:spcBef>
+            </a:pPr>
+            <a:r>
+              <a:rPr sz="1100" b="1">
+                <a:solidFill>
+                  <a:srgbClr val="2E7D32"/>
+                </a:solidFill>
+              </a:rPr>
+              <a:t>Effort:</a:t>
+            </a:r>
+          </a:p>
+          <a:p>
+            <a:r>
+              <a:rPr sz="1100">
+                <a:solidFill>
+                  <a:srgbClr val="2D2D2D"/>
+                </a:solidFill>
+              </a:rPr>
+              <a:t>1-2 sprints</a:t>
+            </a:r>
+          </a:p>
+          <a:p>
+            <a:pPr>
+              <a:spcBef>
+                <a:spcPts val="1200"/>
+              </a:spcBef>
+            </a:pPr>
+            <a:r>
+              <a:rPr sz="1100" b="1">
+                <a:solidFill>
+                  <a:srgbClr val="2E7D32"/>
+                </a:solidFill>
+              </a:rPr>
+              <a:t>Business Benefit:</a:t>
+            </a:r>
+          </a:p>
+          <a:p>
+            <a:r>
+              <a:rPr sz="1100">
+                <a:solidFill>
+                  <a:srgbClr val="2D2D2D"/>
+                </a:solidFill>
+              </a:rPr>
+              <a:t>Live demand monitoring during storms</a:t>
             </a:r>
           </a:p>
         </p:txBody>
@@ -14050,8 +14308,8 @@
         </p:nvSpPr>
         <p:spPr>
           <a:xfrm>
-            <a:off x="4200000" y="1100000"/>
-            <a:ext cx="3500000" cy="2400000"/>
+            <a:off x="4300000" y="1000000"/>
+            <a:ext cx="3600000" cy="4800000"/>
           </a:xfrm>
           <a:prstGeom prst="roundRect">
             <a:avLst/>
@@ -14078,77 +14336,92 @@
           </a:fontRef>
         </p:style>
         <p:txBody>
-          <a:bodyPr rtlCol="0" anchor="ctr" wrap="square" tIns="127000" bIns="127000" lIns="152400" rIns="152400"/>
+          <a:bodyPr wrap="square" rtlCol="0" anchor="ctr"/>
           <a:lstStyle/>
           <a:p>
             <a:pPr algn="ctr"/>
             <a:r>
               <a:rPr sz="1600" b="1">
                 <a:solidFill>
-                  <a:srgbClr val="333333"/>
-                </a:solidFill>
-              </a:rPr>
-              <a:t>BigQuery ML</a:t>
-            </a:r>
-          </a:p>
-          <a:p>
-            <a:r>
-              <a:rPr sz="1000" b="0">
-                <a:solidFill>
-                  <a:srgbClr val="333333"/>
-                </a:solidFill>
-              </a:rPr>
-              <a:t/>
-            </a:r>
-          </a:p>
-          <a:p>
-            <a:r>
-              <a:rPr sz="1200" b="0">
-                <a:solidFill>
-                  <a:srgbClr val="333333"/>
-                </a:solidFill>
-              </a:rPr>
-              <a:t>K-Means trip segmentation</a:t>
-            </a:r>
-          </a:p>
-          <a:p>
-            <a:r>
-              <a:rPr sz="1200" b="0">
-                <a:solidFill>
-                  <a:srgbClr val="333333"/>
-                </a:solidFill>
-              </a:rPr>
-              <a:t>Tested k=3, 4, 5, 6</a:t>
-            </a:r>
-          </a:p>
-          <a:p>
-            <a:r>
-              <a:rPr sz="1200" b="0">
-                <a:solidFill>
-                  <a:srgbClr val="333333"/>
-                </a:solidFill>
-              </a:rPr>
-              <a:t>Davies-Bouldin evaluation</a:t>
-            </a:r>
-          </a:p>
-          <a:p>
-            <a:r>
-              <a:rPr sz="1200" b="0">
-                <a:solidFill>
-                  <a:srgbClr val="333333"/>
-                </a:solidFill>
-              </a:rPr>
-              <a:t>4 clusters selected</a:t>
-            </a:r>
-          </a:p>
-          <a:p>
-            <a:r>
-              <a:rPr sz="1200" b="0">
-                <a:solidFill>
-                  <a:srgbClr val="333333"/>
-                </a:solidFill>
-              </a:rPr>
-              <a:t>Zone-level behavior patterns</a:t>
+                  <a:srgbClr val="0D47A1"/>
+                </a:solidFill>
+              </a:rPr>
+              <a:t>ML Forecasting</a:t>
+            </a:r>
+          </a:p>
+          <a:p>
+            <a:pPr>
+              <a:spcBef>
+                <a:spcPts val="1600"/>
+              </a:spcBef>
+            </a:pPr>
+            <a:r>
+              <a:rPr sz="1100" b="1">
+                <a:solidFill>
+                  <a:srgbClr val="0D47A1"/>
+                </a:solidFill>
+              </a:rPr>
+              <a:t>What:</a:t>
+            </a:r>
+          </a:p>
+          <a:p>
+            <a:r>
+              <a:rPr sz="1100">
+                <a:solidFill>
+                  <a:srgbClr val="2D2D2D"/>
+                </a:solidFill>
+              </a:rPr>
+              <a:t>Predict demand drops by borough before storms hit</a:t>
+            </a:r>
+          </a:p>
+          <a:p>
+            <a:pPr>
+              <a:spcBef>
+                <a:spcPts val="1200"/>
+              </a:spcBef>
+            </a:pPr>
+            <a:r>
+              <a:rPr sz="1100" b="1">
+                <a:solidFill>
+                  <a:srgbClr val="0D47A1"/>
+                </a:solidFill>
+              </a:rPr>
+              <a:t>Effort:</a:t>
+            </a:r>
+          </a:p>
+          <a:p>
+            <a:r>
+              <a:rPr sz="1100">
+                <a:solidFill>
+                  <a:srgbClr val="2D2D2D"/>
+                </a:solidFill>
+              </a:rPr>
+              <a:t>2-3 sprints</a:t>
+            </a:r>
+          </a:p>
+          <a:p>
+            <a:pPr>
+              <a:spcBef>
+                <a:spcPts val="1200"/>
+              </a:spcBef>
+            </a:pPr>
+            <a:r>
+              <a:rPr sz="1100" b="1">
+                <a:solidFill>
+                  <a:srgbClr val="0D47A1"/>
+                </a:solidFill>
+              </a:rPr>
+              <a:t>Business Benefit:</a:t>
+            </a:r>
+          </a:p>
+          <a:p>
+            <a:r>
+              <a:rPr sz="1100">
+                <a:solidFill>
+                  <a:srgbClr val="2D2D2D"/>
+                </a:solidFill>
+              </a:rPr>
+              <a:t>Proactive fleet positioning, fewer empty cabs</a:t>
             </a:r>
           </a:p>
         </p:txBody>
@@ -14161,8 +14434,8 @@
         </p:nvSpPr>
         <p:spPr>
           <a:xfrm>
-            <a:off x="8000000" y="1100000"/>
-            <a:ext cx="3500000" cy="2400000"/>
+            <a:off x="8200000" y="1000000"/>
+            <a:ext cx="3600000" cy="4800000"/>
           </a:xfrm>
           <a:prstGeom prst="roundRect">
             <a:avLst/>
@@ -14189,77 +14462,92 @@
           </a:fontRef>
         </p:style>
         <p:txBody>
-          <a:bodyPr rtlCol="0" anchor="ctr" wrap="square" tIns="127000" bIns="127000" lIns="152400" rIns="152400"/>
+          <a:bodyPr wrap="square" rtlCol="0" anchor="ctr"/>
           <a:lstStyle/>
           <a:p>
             <a:pPr algn="ctr"/>
             <a:r>
               <a:rPr sz="1600" b="1">
                 <a:solidFill>
-                  <a:srgbClr val="333333"/>
-                </a:solidFill>
-              </a:rPr>
-              <a:t>Pipeline Orchestration</a:t>
-            </a:r>
-          </a:p>
-          <a:p>
-            <a:r>
-              <a:rPr sz="1000" b="0">
-                <a:solidFill>
-                  <a:srgbClr val="333333"/>
-                </a:solidFill>
-              </a:rPr>
-              <a:t/>
-            </a:r>
-          </a:p>
-          <a:p>
-            <a:r>
-              <a:rPr sz="1200" b="0">
-                <a:solidFill>
-                  <a:srgbClr val="333333"/>
-                </a:solidFill>
-              </a:rPr>
-              <a:t>Single-command execution</a:t>
-            </a:r>
-          </a:p>
-          <a:p>
-            <a:r>
-              <a:rPr sz="1200" b="0">
-                <a:solidFill>
-                  <a:srgbClr val="333333"/>
-                </a:solidFill>
-              </a:rPr>
-              <a:t>7 steps, ~6 min end-to-end</a:t>
-            </a:r>
-          </a:p>
-          <a:p>
-            <a:r>
-              <a:rPr sz="1200" b="0">
-                <a:solidFill>
-                  <a:srgbClr val="333333"/>
-                </a:solidFill>
-              </a:rPr>
-              <a:t>Idempotent (safe to re-run)</a:t>
-            </a:r>
-          </a:p>
-          <a:p>
-            <a:r>
-              <a:rPr sz="1200" b="0">
-                <a:solidFill>
-                  <a:srgbClr val="333333"/>
-                </a:solidFill>
-              </a:rPr>
-              <a:t>Fail-fast with clear errors</a:t>
-            </a:r>
-          </a:p>
-          <a:p>
-            <a:r>
-              <a:rPr sz="1200" b="0">
-                <a:solidFill>
-                  <a:srgbClr val="333333"/>
-                </a:solidFill>
-              </a:rPr>
-              <a:t>Row count reconciliation</a:t>
+                  <a:srgbClr val="E65100"/>
+                </a:solidFill>
+              </a:rPr>
+              <a:t>Multi-City Expansion</a:t>
+            </a:r>
+          </a:p>
+          <a:p>
+            <a:pPr>
+              <a:spcBef>
+                <a:spcPts val="1600"/>
+              </a:spcBef>
+            </a:pPr>
+            <a:r>
+              <a:rPr sz="1100" b="1">
+                <a:solidFill>
+                  <a:srgbClr val="E65100"/>
+                </a:solidFill>
+              </a:rPr>
+              <a:t>What:</a:t>
+            </a:r>
+          </a:p>
+          <a:p>
+            <a:r>
+              <a:rPr sz="1100">
+                <a:solidFill>
+                  <a:srgbClr val="2D2D2D"/>
+                </a:solidFill>
+              </a:rPr>
+              <a:t>Replicate pipeline for Chicago, Boston, etc.</a:t>
+            </a:r>
+          </a:p>
+          <a:p>
+            <a:pPr>
+              <a:spcBef>
+                <a:spcPts val="1200"/>
+              </a:spcBef>
+            </a:pPr>
+            <a:r>
+              <a:rPr sz="1100" b="1">
+                <a:solidFill>
+                  <a:srgbClr val="E65100"/>
+                </a:solidFill>
+              </a:rPr>
+              <a:t>Effort:</a:t>
+            </a:r>
+          </a:p>
+          <a:p>
+            <a:r>
+              <a:rPr sz="1100">
+                <a:solidFill>
+                  <a:srgbClr val="2D2D2D"/>
+                </a:solidFill>
+              </a:rPr>
+              <a:t>3-4 sprints per city</a:t>
+            </a:r>
+          </a:p>
+          <a:p>
+            <a:pPr>
+              <a:spcBef>
+                <a:spcPts val="1200"/>
+              </a:spcBef>
+            </a:pPr>
+            <a:r>
+              <a:rPr sz="1100" b="1">
+                <a:solidFill>
+                  <a:srgbClr val="E65100"/>
+                </a:solidFill>
+              </a:rPr>
+              <a:t>Business Benefit:</a:t>
+            </a:r>
+          </a:p>
+          <a:p>
+            <a:r>
+              <a:rPr sz="1100">
+                <a:solidFill>
+                  <a:srgbClr val="2D2D2D"/>
+                </a:solidFill>
+              </a:rPr>
+              <a:t>National weather-demand intelligence</a:t>
             </a:r>
           </a:p>
         </p:txBody>
@@ -14272,8 +14560,8 @@
         </p:nvSpPr>
         <p:spPr>
           <a:xfrm>
-            <a:off x="400000" y="3800000"/>
-            <a:ext cx="11400000" cy="900000"/>
+            <a:off x="400000" y="6000000"/>
+            <a:ext cx="11400000" cy="600000"/>
           </a:xfrm>
           <a:prstGeom prst="roundRect">
             <a:avLst/>
@@ -14300,17 +14588,17 @@
           </a:fontRef>
         </p:style>
         <p:txBody>
-          <a:bodyPr rtlCol="0" anchor="ctr" wrap="square" tIns="127000" bIns="127000" lIns="152400" rIns="152400"/>
+          <a:bodyPr wrap="square" rtlCol="0" anchor="ctr"/>
           <a:lstStyle/>
           <a:p>
             <a:pPr algn="ctr"/>
             <a:r>
-              <a:rPr sz="1300" b="0">
-                <a:solidFill>
-                  <a:srgbClr val="333333"/>
-                </a:solidFill>
-              </a:rPr>
-              <a:t>All three extensions are genuinely integrated into the core project, not standalone demos. The Streamlit app queries the same Gold layer, the ML model uses the same mart data, and orchestration builds the entire pipeline these tools depend on.</a:t>
+              <a:rPr sz="1300" b="1">
+                <a:solidFill>
+                  <a:srgbClr val="2D2D2D"/>
+                </a:solidFill>
+              </a:rPr>
+              <a:t>Highest Impact: Real-Time Ingestion. Fleet operators need minute-level demand signals during active storms.</a:t>
             </a:r>
           </a:p>
         </p:txBody>
@@ -14324,7 +14612,7 @@
 </file>
 
 <file path=ppt/slides/slide22.xml><?xml version="1.0" encoding="utf-8"?>
-<p:sld xmlns:a="http://schemas.openxmlformats.org/drawingml/2006/main" xmlns:p="http://schemas.openxmlformats.org/presentationml/2006/main" xmlns:r="http://schemas.openxmlformats.org/officeDocument/2006/relationships">
+<p:sld xmlns:a="http://schemas.openxmlformats.org/drawingml/2006/main" xmlns:r="http://schemas.openxmlformats.org/officeDocument/2006/relationships" xmlns:p="http://schemas.openxmlformats.org/presentationml/2006/main">
   <p:cSld>
     <p:spTree>
       <p:nvGrpSpPr>
@@ -14332,7 +14620,14 @@
         <p:cNvGrpSpPr/>
         <p:nvPr/>
       </p:nvGrpSpPr>
-      <p:grpSpPr/>
+      <p:grpSpPr>
+        <a:xfrm>
+          <a:off x="0" y="0"/>
+          <a:ext cx="0" cy="0"/>
+          <a:chOff x="0" y="0"/>
+          <a:chExt cx="0" cy="0"/>
+        </a:xfrm>
+      </p:grpSpPr>
       <p:sp>
         <p:nvSpPr>
           <p:cNvPr id="2" name="Title 1"/>
@@ -14349,7 +14644,7 @@
           <a:lstStyle/>
           <a:p>
             <a:r>
-              <a:t>Extension: Streamlit Dashboard</a:t>
+              <a:t>Future State Architecture</a:t>
             </a:r>
           </a:p>
         </p:txBody>
@@ -14368,7 +14663,9 @@
         <p:txBody>
           <a:bodyPr/>
           <a:lstStyle/>
-          <a:p/>
+          <a:p>
+            <a:endParaRPr/>
+          </a:p>
         </p:txBody>
       </p:sp>
       <p:sp>
@@ -14411,6 +14708,150 @@
           <a:lstStyle/>
           <a:p>
             <a:pPr algn="ctr"/>
+            <a:endParaRPr/>
+          </a:p>
+        </p:txBody>
+      </p:sp>
+      <p:sp>
+        <p:nvSpPr>
+          <p:cNvPr id="5" name="TextBox 4"/>
+          <p:cNvSpPr txBox="1"/>
+          <p:nvPr/>
+        </p:nvSpPr>
+        <p:spPr>
+          <a:xfrm>
+            <a:off x="2000000" y="2500000"/>
+            <a:ext cx="8000000" cy="2000000"/>
+          </a:xfrm>
+          <a:prstGeom prst="rect">
+            <a:avLst/>
+          </a:prstGeom>
+          <a:noFill/>
+        </p:spPr>
+        <p:txBody>
+          <a:bodyPr wrap="none">
+            <a:spAutoFit/>
+          </a:bodyPr>
+          <a:lstStyle/>
+          <a:p>
+            <a:pPr algn="ctr"/>
+            <a:r>
+              <a:rPr sz="1800" i="1">
+                <a:solidFill>
+                  <a:srgbClr val="555555"/>
+                </a:solidFill>
+              </a:rPr>
+              <a:t>[Insert Future State Architecture Diagram]</a:t>
+            </a:r>
+          </a:p>
+        </p:txBody>
+      </p:sp>
+    </p:spTree>
+  </p:cSld>
+  <p:clrMapOvr>
+    <a:masterClrMapping/>
+  </p:clrMapOvr>
+</p:sld>
+</file>
+
+<file path=ppt/slides/slide23.xml><?xml version="1.0" encoding="utf-8"?>
+<p:sld xmlns:a="http://schemas.openxmlformats.org/drawingml/2006/main" xmlns:r="http://schemas.openxmlformats.org/officeDocument/2006/relationships" xmlns:p="http://schemas.openxmlformats.org/presentationml/2006/main">
+  <p:cSld>
+    <p:spTree>
+      <p:nvGrpSpPr>
+        <p:cNvPr id="1" name=""/>
+        <p:cNvGrpSpPr/>
+        <p:nvPr/>
+      </p:nvGrpSpPr>
+      <p:grpSpPr>
+        <a:xfrm>
+          <a:off x="0" y="0"/>
+          <a:ext cx="0" cy="0"/>
+          <a:chOff x="0" y="0"/>
+          <a:chExt cx="0" cy="0"/>
+        </a:xfrm>
+      </p:grpSpPr>
+      <p:sp>
+        <p:nvSpPr>
+          <p:cNvPr id="2" name="Title 1"/>
+          <p:cNvSpPr>
+            <a:spLocks noGrp="1"/>
+          </p:cNvSpPr>
+          <p:nvPr>
+            <p:ph type="title"/>
+          </p:nvPr>
+        </p:nvSpPr>
+        <p:spPr/>
+        <p:txBody>
+          <a:bodyPr/>
+          <a:lstStyle/>
+          <a:p>
+            <a:r>
+              <a:t>Recommendation</a:t>
+            </a:r>
+          </a:p>
+        </p:txBody>
+      </p:sp>
+      <p:sp>
+        <p:nvSpPr>
+          <p:cNvPr id="3" name="Content Placeholder 2"/>
+          <p:cNvSpPr>
+            <a:spLocks noGrp="1"/>
+          </p:cNvSpPr>
+          <p:nvPr>
+            <p:ph idx="1"/>
+          </p:nvPr>
+        </p:nvSpPr>
+        <p:spPr/>
+        <p:txBody>
+          <a:bodyPr/>
+          <a:lstStyle/>
+          <a:p>
+            <a:endParaRPr/>
+          </a:p>
+        </p:txBody>
+      </p:sp>
+      <p:sp>
+        <p:nvSpPr>
+          <p:cNvPr id="4" name="Rectangle 3"/>
+          <p:cNvSpPr/>
+          <p:nvPr/>
+        </p:nvSpPr>
+        <p:spPr>
+          <a:xfrm>
+            <a:off x="0" y="800000"/>
+            <a:ext cx="12192000" cy="80000"/>
+          </a:xfrm>
+          <a:prstGeom prst="rect">
+            <a:avLst/>
+          </a:prstGeom>
+          <a:solidFill>
+            <a:srgbClr val="FE3082"/>
+          </a:solidFill>
+          <a:ln>
+            <a:noFill/>
+          </a:ln>
+        </p:spPr>
+        <p:style>
+          <a:lnRef idx="1">
+            <a:schemeClr val="accent1"/>
+          </a:lnRef>
+          <a:fillRef idx="3">
+            <a:schemeClr val="accent1"/>
+          </a:fillRef>
+          <a:effectRef idx="2">
+            <a:schemeClr val="accent1"/>
+          </a:effectRef>
+          <a:fontRef idx="minor">
+            <a:schemeClr val="lt1"/>
+          </a:fontRef>
+        </p:style>
+        <p:txBody>
+          <a:bodyPr rtlCol="0" anchor="ctr"/>
+          <a:lstStyle/>
+          <a:p>
+            <a:pPr algn="ctr"/>
+            <a:endParaRPr/>
           </a:p>
         </p:txBody>
       </p:sp>
@@ -14422,8 +14863,74 @@
         </p:nvSpPr>
         <p:spPr>
           <a:xfrm>
-            <a:off x="400000" y="1100000"/>
-            <a:ext cx="5400000" cy="2400000"/>
+            <a:off x="400000" y="1200000"/>
+            <a:ext cx="11400000" cy="1800000"/>
+          </a:xfrm>
+          <a:prstGeom prst="roundRect">
+            <a:avLst/>
+          </a:prstGeom>
+          <a:solidFill>
+            <a:srgbClr val="E3F2FD"/>
+          </a:solidFill>
+          <a:ln>
+            <a:noFill/>
+          </a:ln>
+        </p:spPr>
+        <p:style>
+          <a:lnRef idx="1">
+            <a:schemeClr val="accent1"/>
+          </a:lnRef>
+          <a:fillRef idx="3">
+            <a:schemeClr val="accent1"/>
+          </a:fillRef>
+          <a:effectRef idx="2">
+            <a:schemeClr val="accent1"/>
+          </a:effectRef>
+          <a:fontRef idx="minor">
+            <a:schemeClr val="lt1"/>
+          </a:fontRef>
+        </p:style>
+        <p:txBody>
+          <a:bodyPr wrap="square" rtlCol="0" anchor="ctr"/>
+          <a:lstStyle/>
+          <a:p>
+            <a:pPr algn="ctr"/>
+            <a:r>
+              <a:rPr sz="2200" b="1">
+                <a:solidFill>
+                  <a:srgbClr val="0D47A1"/>
+                </a:solidFill>
+              </a:rPr>
+              <a:t>[One clear recommendation tied to the finding]</a:t>
+            </a:r>
+          </a:p>
+          <a:p>
+            <a:pPr algn="ctr">
+              <a:spcBef>
+                <a:spcPts val="800"/>
+              </a:spcBef>
+            </a:pPr>
+            <a:r>
+              <a:rPr sz="1400" i="1">
+                <a:solidFill>
+                  <a:srgbClr val="555555"/>
+                </a:solidFill>
+              </a:rPr>
+              <a:t>e.g., Pre-position 15% more vehicles in outer boroughs during forecasted rain events</a:t>
+            </a:r>
+          </a:p>
+        </p:txBody>
+      </p:sp>
+      <p:sp>
+        <p:nvSpPr>
+          <p:cNvPr id="6" name="Rounded Rectangle 5"/>
+          <p:cNvSpPr/>
+          <p:nvPr/>
+        </p:nvSpPr>
+        <p:spPr>
+          <a:xfrm>
+            <a:off x="400000" y="3400000"/>
+            <a:ext cx="5400000" cy="1500000"/>
           </a:xfrm>
           <a:prstGeom prst="roundRect">
             <a:avLst/>
@@ -14450,218 +14957,32 @@
           </a:fontRef>
         </p:style>
         <p:txBody>
-          <a:bodyPr rtlCol="0" anchor="ctr" wrap="square" tIns="127000" bIns="127000" lIns="152400" rIns="152400"/>
+          <a:bodyPr wrap="square" rtlCol="0" anchor="ctr"/>
           <a:lstStyle/>
           <a:p>
             <a:pPr algn="ctr"/>
             <a:r>
               <a:rPr sz="1400" b="1">
                 <a:solidFill>
-                  <a:srgbClr val="333333"/>
-                </a:solidFill>
-              </a:rPr>
-              <a:t>What It Shows</a:t>
-            </a:r>
-          </a:p>
-          <a:p>
-            <a:r>
-              <a:rPr sz="1000" b="0">
-                <a:solidFill>
-                  <a:srgbClr val="333333"/>
-                </a:solidFill>
-              </a:rPr>
-              <a:t/>
-            </a:r>
-          </a:p>
-          <a:p>
-            <a:r>
-              <a:rPr sz="1200" b="1">
-                <a:solidFill>
-                  <a:srgbClr val="333333"/>
-                </a:solidFill>
-              </a:rPr>
-              <a:t>6 visualizations building a progressive story:</a:t>
-            </a:r>
-          </a:p>
-          <a:p>
-            <a:r>
-              <a:rPr sz="1100" b="0">
-                <a:solidFill>
-                  <a:srgbClr val="333333"/>
-                </a:solidFill>
-              </a:rPr>
-              <a:t>1. Monthly trip volume (YoY growth)</a:t>
-            </a:r>
-          </a:p>
-          <a:p>
-            <a:r>
-              <a:rPr sz="1100" b="0">
-                <a:solidFill>
-                  <a:srgbClr val="333333"/>
-                </a:solidFill>
-              </a:rPr>
-              <a:t>2. Weekday vs. weekend hourly patterns</a:t>
-            </a:r>
-          </a:p>
-          <a:p>
-            <a:r>
-              <a:rPr sz="1100" b="0">
-                <a:solidFill>
-                  <a:srgbClr val="333333"/>
-                </a:solidFill>
-              </a:rPr>
-              <a:t>3. Average trip cost by weather condition</a:t>
-            </a:r>
-          </a:p>
-          <a:p>
-            <a:r>
-              <a:rPr sz="1100" b="0">
-                <a:solidFill>
-                  <a:srgbClr val="333333"/>
-                </a:solidFill>
-              </a:rPr>
-              <a:t>4. Weather's effect on demand (core finding)</a:t>
-            </a:r>
-          </a:p>
-          <a:p>
-            <a:r>
-              <a:rPr sz="1100" b="0">
-                <a:solidFill>
-                  <a:srgbClr val="333333"/>
-                </a:solidFill>
-              </a:rPr>
-              <a:t>5. Rain vs. snow breakdown (root cause)</a:t>
-            </a:r>
-          </a:p>
-          <a:p>
-            <a:r>
-              <a:rPr sz="1100" b="0">
-                <a:solidFill>
-                  <a:srgbClr val="333333"/>
-                </a:solidFill>
-              </a:rPr>
-              <a:t>6. Revenue per storm-hour (dollar impact)</a:t>
-            </a:r>
-          </a:p>
-        </p:txBody>
-      </p:sp>
-      <p:sp>
-        <p:nvSpPr>
-          <p:cNvPr id="6" name="Rounded Rectangle 5"/>
-          <p:cNvSpPr/>
-          <p:nvPr/>
-        </p:nvSpPr>
-        <p:spPr>
-          <a:xfrm>
-            <a:off x="6100000" y="1100000"/>
-            <a:ext cx="5700000" cy="2400000"/>
-          </a:xfrm>
-          <a:prstGeom prst="roundRect">
-            <a:avLst/>
-          </a:prstGeom>
-          <a:solidFill>
-            <a:srgbClr val="E3F2FD"/>
-          </a:solidFill>
-          <a:ln>
-            <a:noFill/>
-          </a:ln>
-        </p:spPr>
-        <p:style>
-          <a:lnRef idx="1">
-            <a:schemeClr val="accent1"/>
-          </a:lnRef>
-          <a:fillRef idx="3">
-            <a:schemeClr val="accent1"/>
-          </a:fillRef>
-          <a:effectRef idx="2">
-            <a:schemeClr val="accent1"/>
-          </a:effectRef>
-          <a:fontRef idx="minor">
-            <a:schemeClr val="lt1"/>
-          </a:fontRef>
-        </p:style>
-        <p:txBody>
-          <a:bodyPr rtlCol="0" anchor="ctr" wrap="square" tIns="127000" bIns="127000" lIns="152400" rIns="152400"/>
-          <a:lstStyle/>
-          <a:p>
-            <a:pPr algn="ctr"/>
-            <a:r>
-              <a:rPr sz="1400" b="1">
-                <a:solidFill>
-                  <a:srgbClr val="333333"/>
-                </a:solidFill>
-              </a:rPr>
-              <a:t>Technical Details</a:t>
-            </a:r>
-          </a:p>
-          <a:p>
-            <a:r>
-              <a:rPr sz="1000" b="0">
-                <a:solidFill>
-                  <a:srgbClr val="333333"/>
-                </a:solidFill>
-              </a:rPr>
-              <a:t/>
-            </a:r>
-          </a:p>
-          <a:p>
-            <a:r>
-              <a:rPr sz="1200" b="0">
-                <a:solidFill>
-                  <a:srgbClr val="333333"/>
-                </a:solidFill>
-              </a:rPr>
-              <a:t>Data: Snowflake direct query (10-min cache)</a:t>
-            </a:r>
-          </a:p>
-          <a:p>
-            <a:r>
-              <a:rPr sz="1200" b="0">
-                <a:solidFill>
-                  <a:srgbClr val="333333"/>
-                </a:solidFill>
-              </a:rPr>
-              <a:t>Fallback: CSV files for offline/demo</a:t>
-            </a:r>
-          </a:p>
-          <a:p>
-            <a:r>
-              <a:rPr sz="1200" b="0">
-                <a:solidFill>
-                  <a:srgbClr val="333333"/>
-                </a:solidFill>
-              </a:rPr>
-              <a:t>Charts: Plotly with hover tooltips</a:t>
-            </a:r>
-          </a:p>
-          <a:p>
-            <a:r>
-              <a:rPr sz="1200" b="0">
-                <a:solidFill>
-                  <a:srgbClr val="333333"/>
-                </a:solidFill>
-              </a:rPr>
-              <a:t>Interactivity: Borough tabs, day/night splits</a:t>
-            </a:r>
-          </a:p>
-          <a:p>
-            <a:r>
-              <a:rPr sz="1200" b="0">
-                <a:solidFill>
-                  <a:srgbClr val="333333"/>
-                </a:solidFill>
-              </a:rPr>
-              <a:t>Deployment: Streamlit Community Cloud</a:t>
-            </a:r>
-          </a:p>
-          <a:p>
-            <a:r>
-              <a:rPr sz="1200" b="0">
-                <a:solidFill>
-                  <a:srgbClr val="333333"/>
-                </a:solidFill>
-              </a:rPr>
-              <a:t>CI/CD: GitHub Action syncs on push</a:t>
+                  <a:srgbClr val="2E7D32"/>
+                </a:solidFill>
+              </a:rPr>
+              <a:t>Actionable Next Step</a:t>
+            </a:r>
+          </a:p>
+          <a:p>
+            <a:pPr>
+              <a:spcBef>
+                <a:spcPts val="800"/>
+              </a:spcBef>
+            </a:pPr>
+            <a:r>
+              <a:rPr sz="1300">
+                <a:solidFill>
+                  <a:srgbClr val="2D2D2D"/>
+                </a:solidFill>
+              </a:rPr>
+              <a:t>[What the client should do first]</a:t>
             </a:r>
           </a:p>
         </p:txBody>
@@ -14674,279 +14995,8 @@
         </p:nvSpPr>
         <p:spPr>
           <a:xfrm>
-            <a:off x="400000" y="3800000"/>
-            <a:ext cx="11400000" cy="900000"/>
-          </a:xfrm>
-          <a:prstGeom prst="roundRect">
-            <a:avLst/>
-          </a:prstGeom>
-          <a:solidFill>
-            <a:srgbClr val="FCE4EC"/>
-          </a:solidFill>
-          <a:ln>
-            <a:noFill/>
-          </a:ln>
-        </p:spPr>
-        <p:style>
-          <a:lnRef idx="1">
-            <a:schemeClr val="accent1"/>
-          </a:lnRef>
-          <a:fillRef idx="3">
-            <a:schemeClr val="accent1"/>
-          </a:fillRef>
-          <a:effectRef idx="2">
-            <a:schemeClr val="accent1"/>
-          </a:effectRef>
-          <a:fontRef idx="minor">
-            <a:schemeClr val="lt1"/>
-          </a:fontRef>
-        </p:style>
-        <p:txBody>
-          <a:bodyPr rtlCol="0" anchor="ctr" wrap="square" tIns="127000" bIns="127000" lIns="152400" rIns="152400"/>
-          <a:lstStyle/>
-          <a:p>
-            <a:pPr algn="ctr"/>
-            <a:r>
-              <a:rPr sz="1200" b="0">
-                <a:solidFill>
-                  <a:srgbClr val="333333"/>
-                </a:solidFill>
-              </a:rPr>
-              <a:t>The dashboard tells a story static charts cannot. Users drill into any borough, compare day vs. night, and see rain vs. snow effects interactively. It directly answers our analytical question with evidence the audience can explore.</a:t>
-            </a:r>
-          </a:p>
-        </p:txBody>
-      </p:sp>
-    </p:spTree>
-  </p:cSld>
-  <p:clrMapOvr>
-    <a:masterClrMapping/>
-  </p:clrMapOvr>
-</p:sld>
-</file>
-
-<file path=ppt/slides/slide23.xml><?xml version="1.0" encoding="utf-8"?>
-<p:sld xmlns:a="http://schemas.openxmlformats.org/drawingml/2006/main" xmlns:p="http://schemas.openxmlformats.org/presentationml/2006/main" xmlns:r="http://schemas.openxmlformats.org/officeDocument/2006/relationships">
-  <p:cSld>
-    <p:spTree>
-      <p:nvGrpSpPr>
-        <p:cNvPr id="1" name=""/>
-        <p:cNvGrpSpPr/>
-        <p:nvPr/>
-      </p:nvGrpSpPr>
-      <p:grpSpPr/>
-      <p:sp>
-        <p:nvSpPr>
-          <p:cNvPr id="2" name="Title 1"/>
-          <p:cNvSpPr>
-            <a:spLocks noGrp="1"/>
-          </p:cNvSpPr>
-          <p:nvPr>
-            <p:ph type="title"/>
-          </p:nvPr>
-        </p:nvSpPr>
-        <p:spPr/>
-        <p:txBody>
-          <a:bodyPr/>
-          <a:lstStyle/>
-          <a:p>
-            <a:r>
-              <a:t>Extension: BigQuery ML Clustering</a:t>
-            </a:r>
-          </a:p>
-        </p:txBody>
-      </p:sp>
-      <p:sp>
-        <p:nvSpPr>
-          <p:cNvPr id="3" name="Content Placeholder 2"/>
-          <p:cNvSpPr>
-            <a:spLocks noGrp="1"/>
-          </p:cNvSpPr>
-          <p:nvPr>
-            <p:ph idx="1"/>
-          </p:nvPr>
-        </p:nvSpPr>
-        <p:spPr/>
-        <p:txBody>
-          <a:bodyPr/>
-          <a:lstStyle/>
-          <a:p/>
-        </p:txBody>
-      </p:sp>
-      <p:sp>
-        <p:nvSpPr>
-          <p:cNvPr id="4" name="Rectangle 3"/>
-          <p:cNvSpPr/>
-          <p:nvPr/>
-        </p:nvSpPr>
-        <p:spPr>
-          <a:xfrm>
-            <a:off x="0" y="800000"/>
-            <a:ext cx="12192000" cy="80000"/>
-          </a:xfrm>
-          <a:prstGeom prst="rect">
-            <a:avLst/>
-          </a:prstGeom>
-          <a:solidFill>
-            <a:srgbClr val="FE3082"/>
-          </a:solidFill>
-          <a:ln>
-            <a:noFill/>
-          </a:ln>
-        </p:spPr>
-        <p:style>
-          <a:lnRef idx="1">
-            <a:schemeClr val="accent1"/>
-          </a:lnRef>
-          <a:fillRef idx="3">
-            <a:schemeClr val="accent1"/>
-          </a:fillRef>
-          <a:effectRef idx="2">
-            <a:schemeClr val="accent1"/>
-          </a:effectRef>
-          <a:fontRef idx="minor">
-            <a:schemeClr val="lt1"/>
-          </a:fontRef>
-        </p:style>
-        <p:txBody>
-          <a:bodyPr rtlCol="0" anchor="ctr"/>
-          <a:lstStyle/>
-          <a:p>
-            <a:pPr algn="ctr"/>
-          </a:p>
-        </p:txBody>
-      </p:sp>
-      <p:sp>
-        <p:nvSpPr>
-          <p:cNvPr id="5" name="Rounded Rectangle 4"/>
-          <p:cNvSpPr/>
-          <p:nvPr/>
-        </p:nvSpPr>
-        <p:spPr>
-          <a:xfrm>
-            <a:off x="400000" y="1100000"/>
-            <a:ext cx="5400000" cy="2000000"/>
-          </a:xfrm>
-          <a:prstGeom prst="roundRect">
-            <a:avLst/>
-          </a:prstGeom>
-          <a:solidFill>
-            <a:srgbClr val="E3F2FD"/>
-          </a:solidFill>
-          <a:ln>
-            <a:noFill/>
-          </a:ln>
-        </p:spPr>
-        <p:style>
-          <a:lnRef idx="1">
-            <a:schemeClr val="accent1"/>
-          </a:lnRef>
-          <a:fillRef idx="3">
-            <a:schemeClr val="accent1"/>
-          </a:fillRef>
-          <a:effectRef idx="2">
-            <a:schemeClr val="accent1"/>
-          </a:effectRef>
-          <a:fontRef idx="minor">
-            <a:schemeClr val="lt1"/>
-          </a:fontRef>
-        </p:style>
-        <p:txBody>
-          <a:bodyPr rtlCol="0" anchor="ctr" wrap="square" tIns="127000" bIns="127000" lIns="152400" rIns="152400"/>
-          <a:lstStyle/>
-          <a:p>
-            <a:pPr algn="ctr"/>
-            <a:r>
-              <a:rPr sz="1400" b="1">
-                <a:solidFill>
-                  <a:srgbClr val="333333"/>
-                </a:solidFill>
-              </a:rPr>
-              <a:t>Approach</a:t>
-            </a:r>
-          </a:p>
-          <a:p>
-            <a:r>
-              <a:rPr sz="1000" b="0">
-                <a:solidFill>
-                  <a:srgbClr val="333333"/>
-                </a:solidFill>
-              </a:rPr>
-              <a:t/>
-            </a:r>
-          </a:p>
-          <a:p>
-            <a:r>
-              <a:rPr sz="1200" b="0">
-                <a:solidFill>
-                  <a:srgbClr val="333333"/>
-                </a:solidFill>
-              </a:rPr>
-              <a:t>Algorithm: K-Means (BigQuery ML)</a:t>
-            </a:r>
-          </a:p>
-          <a:p>
-            <a:r>
-              <a:rPr sz="1200" b="0">
-                <a:solidFill>
-                  <a:srgbClr val="333333"/>
-                </a:solidFill>
-              </a:rPr>
-              <a:t>Features: distance, duration, fare, tip, trip count,</a:t>
-            </a:r>
-          </a:p>
-          <a:p>
-            <a:r>
-              <a:rPr sz="1200" b="0">
-                <a:solidFill>
-                  <a:srgbClr val="333333"/>
-                </a:solidFill>
-              </a:rPr>
-              <a:t>  rush hour %, night %, weekend %, adverse weather %</a:t>
-            </a:r>
-          </a:p>
-          <a:p>
-            <a:r>
-              <a:rPr sz="1200" b="0">
-                <a:solidFill>
-                  <a:srgbClr val="333333"/>
-                </a:solidFill>
-              </a:rPr>
-              <a:t>Evaluation: Davies-Bouldin Index</a:t>
-            </a:r>
-          </a:p>
-          <a:p>
-            <a:r>
-              <a:rPr sz="1200" b="0">
-                <a:solidFill>
-                  <a:srgbClr val="333333"/>
-                </a:solidFill>
-              </a:rPr>
-              <a:t>  k=3 (1.78), k=4 (1.42), k=5 (1.50), k=6 (1.40)</a:t>
-            </a:r>
-          </a:p>
-          <a:p>
-            <a:r>
-              <a:rPr sz="1200" b="1">
-                <a:solidFill>
-                  <a:srgbClr val="333333"/>
-                </a:solidFill>
-              </a:rPr>
-              <a:t>Selected: k=4 (quality + interpretability)</a:t>
-            </a:r>
-          </a:p>
-        </p:txBody>
-      </p:sp>
-      <p:sp>
-        <p:nvSpPr>
-          <p:cNvPr id="6" name="Rounded Rectangle 5"/>
-          <p:cNvSpPr/>
-          <p:nvPr/>
-        </p:nvSpPr>
-        <p:spPr>
-          <a:xfrm>
-            <a:off x="6100000" y="1100000"/>
-            <a:ext cx="5700000" cy="2000000"/>
+            <a:off x="6100000" y="3400000"/>
+            <a:ext cx="5700000" cy="1500000"/>
           </a:xfrm>
           <a:prstGeom prst="roundRect">
             <a:avLst/>
@@ -14973,138 +15023,32 @@
           </a:fontRef>
         </p:style>
         <p:txBody>
-          <a:bodyPr rtlCol="0" anchor="ctr" wrap="square" tIns="127000" bIns="127000" lIns="152400" rIns="152400"/>
+          <a:bodyPr wrap="square" rtlCol="0" anchor="ctr"/>
           <a:lstStyle/>
           <a:p>
             <a:pPr algn="ctr"/>
             <a:r>
               <a:rPr sz="1400" b="1">
                 <a:solidFill>
-                  <a:srgbClr val="333333"/>
-                </a:solidFill>
-              </a:rPr>
-              <a:t>4 Trip Segments Identified</a:t>
-            </a:r>
-          </a:p>
-          <a:p>
-            <a:r>
-              <a:rPr sz="1000" b="0">
-                <a:solidFill>
-                  <a:srgbClr val="333333"/>
-                </a:solidFill>
-              </a:rPr>
-              <a:t/>
-            </a:r>
-          </a:p>
-          <a:p>
-            <a:r>
-              <a:rPr sz="1200" b="0">
-                <a:solidFill>
-                  <a:srgbClr val="333333"/>
-                </a:solidFill>
-              </a:rPr>
-              <a:t>Cluster 1: Standard Trips (5 mi, 23 min, $32)</a:t>
-            </a:r>
-          </a:p>
-          <a:p>
-            <a:r>
-              <a:rPr sz="1200" b="0">
-                <a:solidFill>
-                  <a:srgbClr val="333333"/>
-                </a:solidFill>
-              </a:rPr>
-              <a:t>Cluster 2: High-Value Long (9 mi, 28 min, $72)</a:t>
-            </a:r>
-          </a:p>
-          <a:p>
-            <a:r>
-              <a:rPr sz="1200" b="0">
-                <a:solidFill>
-                  <a:srgbClr val="333333"/>
-                </a:solidFill>
-              </a:rPr>
-              <a:t>Cluster 3: Short Everyday (2.4 mi, 15 min, $25)</a:t>
-            </a:r>
-          </a:p>
-          <a:p>
-            <a:r>
-              <a:rPr sz="1200" b="0">
-                <a:solidFill>
-                  <a:srgbClr val="333333"/>
-                </a:solidFill>
-              </a:rPr>
-              <a:t>Cluster 4: Slow/Congested (7.6 mi, 36 min, $39)</a:t>
-            </a:r>
-          </a:p>
-          <a:p>
-            <a:r>
-              <a:rPr sz="1000" b="0">
-                <a:solidFill>
-                  <a:srgbClr val="333333"/>
-                </a:solidFill>
-              </a:rPr>
-              <a:t/>
-            </a:r>
-          </a:p>
-          <a:p>
-            <a:r>
-              <a:rPr sz="1200" b="1">
-                <a:solidFill>
-                  <a:srgbClr val="333333"/>
-                </a:solidFill>
-              </a:rPr>
-              <a:t>Short trips (Cluster 3) dominate: 375K of 470K</a:t>
-            </a:r>
-          </a:p>
-        </p:txBody>
-      </p:sp>
-      <p:sp>
-        <p:nvSpPr>
-          <p:cNvPr id="7" name="Rounded Rectangle 6"/>
-          <p:cNvSpPr/>
-          <p:nvPr/>
-        </p:nvSpPr>
-        <p:spPr>
-          <a:xfrm>
-            <a:off x="400000" y="3400000"/>
-            <a:ext cx="11400000" cy="900000"/>
-          </a:xfrm>
-          <a:prstGeom prst="roundRect">
-            <a:avLst/>
-          </a:prstGeom>
-          <a:solidFill>
-            <a:srgbClr val="E8F5E9"/>
-          </a:solidFill>
-          <a:ln>
-            <a:noFill/>
-          </a:ln>
-        </p:spPr>
-        <p:style>
-          <a:lnRef idx="1">
-            <a:schemeClr val="accent1"/>
-          </a:lnRef>
-          <a:fillRef idx="3">
-            <a:schemeClr val="accent1"/>
-          </a:fillRef>
-          <a:effectRef idx="2">
-            <a:schemeClr val="accent1"/>
-          </a:effectRef>
-          <a:fontRef idx="minor">
-            <a:schemeClr val="lt1"/>
-          </a:fontRef>
-        </p:style>
-        <p:txBody>
-          <a:bodyPr rtlCol="0" anchor="ctr" wrap="square" tIns="127000" bIns="127000" lIns="152400" rIns="152400"/>
-          <a:lstStyle/>
-          <a:p>
-            <a:pPr algn="ctr"/>
-            <a:r>
-              <a:rPr sz="1200" b="0">
-                <a:solidFill>
-                  <a:srgbClr val="333333"/>
-                </a:solidFill>
-              </a:rPr>
-              <a:t>Key Finding: Weather showed minimal variation across clusters, confirming weather impacts demand volume (fewer trips) rather than trip characteristics (distance, fare, duration). This independently validates the core finding from our Streamlit analysis.</a:t>
+                  <a:srgbClr val="E65100"/>
+                </a:solidFill>
+              </a:rPr>
+              <a:t>Implementation Cost</a:t>
+            </a:r>
+          </a:p>
+          <a:p>
+            <a:pPr>
+              <a:spcBef>
+                <a:spcPts val="800"/>
+              </a:spcBef>
+            </a:pPr>
+            <a:r>
+              <a:rPr sz="1300">
+                <a:solidFill>
+                  <a:srgbClr val="2D2D2D"/>
+                </a:solidFill>
+              </a:rPr>
+              <a:t>[What it would take: time, team, tools]</a:t>
             </a:r>
           </a:p>
         </p:txBody>
@@ -15118,7 +15062,7 @@
 </file>
 
 <file path=ppt/slides/slide24.xml><?xml version="1.0" encoding="utf-8"?>
-<p:sld xmlns:a="http://schemas.openxmlformats.org/drawingml/2006/main" xmlns:p="http://schemas.openxmlformats.org/presentationml/2006/main" xmlns:r="http://schemas.openxmlformats.org/officeDocument/2006/relationships">
+<p:sld xmlns:a="http://schemas.openxmlformats.org/drawingml/2006/main" xmlns:r="http://schemas.openxmlformats.org/officeDocument/2006/relationships" xmlns:p="http://schemas.openxmlformats.org/presentationml/2006/main">
   <p:cSld>
     <p:spTree>
       <p:nvGrpSpPr>
@@ -15126,7 +15070,14 @@
         <p:cNvGrpSpPr/>
         <p:nvPr/>
       </p:nvGrpSpPr>
-      <p:grpSpPr/>
+      <p:grpSpPr>
+        <a:xfrm>
+          <a:off x="0" y="0"/>
+          <a:ext cx="0" cy="0"/>
+          <a:chOff x="0" y="0"/>
+          <a:chExt cx="0" cy="0"/>
+        </a:xfrm>
+      </p:grpSpPr>
       <p:sp>
         <p:nvSpPr>
           <p:cNvPr id="2" name="Title 1"/>
@@ -15134,7 +15085,7 @@
             <a:spLocks noGrp="1"/>
           </p:cNvSpPr>
           <p:nvPr>
-            <p:ph type="title"/>
+            <p:ph type="ctrTitle"/>
           </p:nvPr>
         </p:nvSpPr>
         <p:spPr/>
@@ -15143,440 +15094,28 @@
           <a:lstStyle/>
           <a:p>
             <a:r>
-              <a:t>Extension: Pipeline Orchestration</a:t>
-            </a:r>
-          </a:p>
-        </p:txBody>
-      </p:sp>
-      <p:sp>
-        <p:nvSpPr>
-          <p:cNvPr id="3" name="Content Placeholder 2"/>
-          <p:cNvSpPr>
-            <a:spLocks noGrp="1"/>
-          </p:cNvSpPr>
-          <p:nvPr>
-            <p:ph idx="1"/>
+              <a:t>Thank You</a:t>
+            </a:r>
+          </a:p>
+        </p:txBody>
+      </p:sp>
+      <p:sp>
+        <p:nvSpPr>
+          <p:cNvPr id="3" name="Subtitle 2"/>
+          <p:cNvSpPr>
+            <a:spLocks noGrp="1"/>
+          </p:cNvSpPr>
+          <p:nvPr>
+            <p:ph type="subTitle" idx="1"/>
           </p:nvPr>
         </p:nvSpPr>
         <p:spPr/>
         <p:txBody>
           <a:bodyPr/>
           <a:lstStyle/>
-          <a:p/>
-        </p:txBody>
-      </p:sp>
-      <p:sp>
-        <p:nvSpPr>
-          <p:cNvPr id="4" name="Rectangle 3"/>
-          <p:cNvSpPr/>
-          <p:nvPr/>
-        </p:nvSpPr>
-        <p:spPr>
-          <a:xfrm>
-            <a:off x="0" y="800000"/>
-            <a:ext cx="12192000" cy="80000"/>
-          </a:xfrm>
-          <a:prstGeom prst="rect">
-            <a:avLst/>
-          </a:prstGeom>
-          <a:solidFill>
-            <a:srgbClr val="FE3082"/>
-          </a:solidFill>
-          <a:ln>
-            <a:noFill/>
-          </a:ln>
-        </p:spPr>
-        <p:style>
-          <a:lnRef idx="1">
-            <a:schemeClr val="accent1"/>
-          </a:lnRef>
-          <a:fillRef idx="3">
-            <a:schemeClr val="accent1"/>
-          </a:fillRef>
-          <a:effectRef idx="2">
-            <a:schemeClr val="accent1"/>
-          </a:effectRef>
-          <a:fontRef idx="minor">
-            <a:schemeClr val="lt1"/>
-          </a:fontRef>
-        </p:style>
-        <p:txBody>
-          <a:bodyPr rtlCol="0" anchor="ctr"/>
-          <a:lstStyle/>
-          <a:p>
-            <a:pPr algn="ctr"/>
-          </a:p>
-        </p:txBody>
-      </p:sp>
-      <p:sp>
-        <p:nvSpPr>
-          <p:cNvPr id="5" name="Rounded Rectangle 4"/>
-          <p:cNvSpPr/>
-          <p:nvPr/>
-        </p:nvSpPr>
-        <p:spPr>
-          <a:xfrm>
-            <a:off x="400000" y="1100000"/>
-            <a:ext cx="5400000" cy="2800000"/>
-          </a:xfrm>
-          <a:prstGeom prst="roundRect">
-            <a:avLst/>
-          </a:prstGeom>
-          <a:solidFill>
-            <a:srgbClr val="FFF3E0"/>
-          </a:solidFill>
-          <a:ln>
-            <a:noFill/>
-          </a:ln>
-        </p:spPr>
-        <p:style>
-          <a:lnRef idx="1">
-            <a:schemeClr val="accent1"/>
-          </a:lnRef>
-          <a:fillRef idx="3">
-            <a:schemeClr val="accent1"/>
-          </a:fillRef>
-          <a:effectRef idx="2">
-            <a:schemeClr val="accent1"/>
-          </a:effectRef>
-          <a:fontRef idx="minor">
-            <a:schemeClr val="lt1"/>
-          </a:fontRef>
-        </p:style>
-        <p:txBody>
-          <a:bodyPr rtlCol="0" anchor="ctr" wrap="square" tIns="127000" bIns="127000" lIns="152400" rIns="152400"/>
-          <a:lstStyle/>
-          <a:p>
-            <a:pPr algn="ctr"/>
-            <a:r>
-              <a:rPr sz="1400" b="1">
-                <a:solidFill>
-                  <a:srgbClr val="333333"/>
-                </a:solidFill>
-              </a:rPr>
-              <a:t>One Command, Full Pipeline</a:t>
-            </a:r>
-          </a:p>
-          <a:p>
-            <a:r>
-              <a:rPr sz="1000" b="0">
-                <a:solidFill>
-                  <a:srgbClr val="333333"/>
-                </a:solidFill>
-              </a:rPr>
-              <a:t/>
-            </a:r>
-          </a:p>
-          <a:p>
-            <a:r>
-              <a:rPr sz="1300" b="1">
-                <a:solidFill>
-                  <a:srgbClr val="333333"/>
-                </a:solidFill>
-              </a:rPr>
-              <a:t>python pipeline/orchestrate.py</a:t>
-            </a:r>
-          </a:p>
-          <a:p>
-            <a:r>
-              <a:rPr sz="1000" b="0">
-                <a:solidFill>
-                  <a:srgbClr val="333333"/>
-                </a:solidFill>
-              </a:rPr>
-              <a:t/>
-            </a:r>
-          </a:p>
-          <a:p>
-            <a:r>
-              <a:rPr sz="1200" b="0">
-                <a:solidFill>
-                  <a:srgbClr val="333333"/>
-                </a:solidFill>
-              </a:rPr>
-              <a:t>Step 1: Create Bronze infrastructure</a:t>
-            </a:r>
-          </a:p>
-          <a:p>
-            <a:r>
-              <a:rPr sz="1200" b="0">
-                <a:solidFill>
-                  <a:srgbClr val="333333"/>
-                </a:solidFill>
-              </a:rPr>
-              <a:t>Step 2: Load taxi + zone data from S3 (39.2M rows)</a:t>
-            </a:r>
-          </a:p>
-          <a:p>
-            <a:r>
-              <a:rPr sz="1200" b="0">
-                <a:solidFill>
-                  <a:srgbClr val="333333"/>
-                </a:solidFill>
-              </a:rPr>
-              <a:t>Step 3: Fetch weather from Open-Meteo API</a:t>
-            </a:r>
-          </a:p>
-          <a:p>
-            <a:r>
-              <a:rPr sz="1200" b="0">
-                <a:solidFill>
-                  <a:srgbClr val="333333"/>
-                </a:solidFill>
-              </a:rPr>
-              <a:t>Step 4: Verify Bronze row counts</a:t>
-            </a:r>
-          </a:p>
-          <a:p>
-            <a:r>
-              <a:rPr sz="1200" b="0">
-                <a:solidFill>
-                  <a:srgbClr val="333333"/>
-                </a:solidFill>
-              </a:rPr>
-              <a:t>Step 5: dbt run (Silver + Gold)</a:t>
-            </a:r>
-          </a:p>
-          <a:p>
-            <a:r>
-              <a:rPr sz="1200" b="0">
-                <a:solidFill>
-                  <a:srgbClr val="333333"/>
-                </a:solidFill>
-              </a:rPr>
-              <a:t>Step 6: dbt test (32 quality checks)</a:t>
-            </a:r>
-          </a:p>
-          <a:p>
-            <a:r>
-              <a:rPr sz="1200" b="0">
-                <a:solidFill>
-                  <a:srgbClr val="333333"/>
-                </a:solidFill>
-              </a:rPr>
-              <a:t>Step 7: Print summary with layer counts</a:t>
-            </a:r>
-          </a:p>
-        </p:txBody>
-      </p:sp>
-      <p:sp>
-        <p:nvSpPr>
-          <p:cNvPr id="6" name="Rounded Rectangle 5"/>
-          <p:cNvSpPr/>
-          <p:nvPr/>
-        </p:nvSpPr>
-        <p:spPr>
-          <a:xfrm>
-            <a:off x="6100000" y="1100000"/>
-            <a:ext cx="5700000" cy="2800000"/>
-          </a:xfrm>
-          <a:prstGeom prst="roundRect">
-            <a:avLst/>
-          </a:prstGeom>
-          <a:solidFill>
-            <a:srgbClr val="E8F5E9"/>
-          </a:solidFill>
-          <a:ln>
-            <a:noFill/>
-          </a:ln>
-        </p:spPr>
-        <p:style>
-          <a:lnRef idx="1">
-            <a:schemeClr val="accent1"/>
-          </a:lnRef>
-          <a:fillRef idx="3">
-            <a:schemeClr val="accent1"/>
-          </a:fillRef>
-          <a:effectRef idx="2">
-            <a:schemeClr val="accent1"/>
-          </a:effectRef>
-          <a:fontRef idx="minor">
-            <a:schemeClr val="lt1"/>
-          </a:fontRef>
-        </p:style>
-        <p:txBody>
-          <a:bodyPr rtlCol="0" anchor="ctr" wrap="square" tIns="127000" bIns="127000" lIns="152400" rIns="152400"/>
-          <a:lstStyle/>
-          <a:p>
-            <a:pPr algn="ctr"/>
-            <a:r>
-              <a:rPr sz="1400" b="1">
-                <a:solidFill>
-                  <a:srgbClr val="333333"/>
-                </a:solidFill>
-              </a:rPr>
-              <a:t>Design Properties</a:t>
-            </a:r>
-          </a:p>
-          <a:p>
-            <a:r>
-              <a:rPr sz="1000" b="0">
-                <a:solidFill>
-                  <a:srgbClr val="333333"/>
-                </a:solidFill>
-              </a:rPr>
-              <a:t/>
-            </a:r>
-          </a:p>
-          <a:p>
-            <a:r>
-              <a:rPr sz="1300" b="1">
-                <a:solidFill>
-                  <a:srgbClr val="333333"/>
-                </a:solidFill>
-              </a:rPr>
-              <a:t>Idempotent</a:t>
-            </a:r>
-          </a:p>
-          <a:p>
-            <a:r>
-              <a:rPr sz="1100" b="0">
-                <a:solidFill>
-                  <a:srgbClr val="333333"/>
-                </a:solidFill>
-              </a:rPr>
-              <a:t>  CREATE OR REPLACE + COPY INTO</a:t>
-            </a:r>
-          </a:p>
-          <a:p>
-            <a:r>
-              <a:rPr sz="1100" b="0">
-                <a:solidFill>
-                  <a:srgbClr val="333333"/>
-                </a:solidFill>
-              </a:rPr>
-              <a:t>  Re-running never duplicates data</a:t>
-            </a:r>
-          </a:p>
-          <a:p>
-            <a:r>
-              <a:rPr sz="1000" b="0">
-                <a:solidFill>
-                  <a:srgbClr val="333333"/>
-                </a:solidFill>
-              </a:rPr>
-              <a:t/>
-            </a:r>
-          </a:p>
-          <a:p>
-            <a:r>
-              <a:rPr sz="1300" b="1">
-                <a:solidFill>
-                  <a:srgbClr val="333333"/>
-                </a:solidFill>
-              </a:rPr>
-              <a:t>Fail-Fast</a:t>
-            </a:r>
-          </a:p>
-          <a:p>
-            <a:r>
-              <a:rPr sz="1100" b="0">
-                <a:solidFill>
-                  <a:srgbClr val="333333"/>
-                </a:solidFill>
-              </a:rPr>
-              <a:t>  Any step failure stops immediately</a:t>
-            </a:r>
-          </a:p>
-          <a:p>
-            <a:r>
-              <a:rPr sz="1100" b="0">
-                <a:solidFill>
-                  <a:srgbClr val="333333"/>
-                </a:solidFill>
-              </a:rPr>
-              <a:t>  Clear error messages for diagnosis</a:t>
-            </a:r>
-          </a:p>
-          <a:p>
-            <a:r>
-              <a:rPr sz="1000" b="0">
-                <a:solidFill>
-                  <a:srgbClr val="333333"/>
-                </a:solidFill>
-              </a:rPr>
-              <a:t/>
-            </a:r>
-          </a:p>
-          <a:p>
-            <a:r>
-              <a:rPr sz="1300" b="1">
-                <a:solidFill>
-                  <a:srgbClr val="333333"/>
-                </a:solidFill>
-              </a:rPr>
-              <a:t>Verified</a:t>
-            </a:r>
-          </a:p>
-          <a:p>
-            <a:r>
-              <a:rPr sz="1100" b="0">
-                <a:solidFill>
-                  <a:srgbClr val="333333"/>
-                </a:solidFill>
-              </a:rPr>
-              <a:t>  Row counts checked against minimums</a:t>
-            </a:r>
-          </a:p>
-          <a:p>
-            <a:r>
-              <a:rPr sz="1100" b="0">
-                <a:solidFill>
-                  <a:srgbClr val="333333"/>
-                </a:solidFill>
-              </a:rPr>
-              <a:t>  Before proceeding to next step</a:t>
-            </a:r>
-          </a:p>
-        </p:txBody>
-      </p:sp>
-      <p:sp>
-        <p:nvSpPr>
-          <p:cNvPr id="7" name="Rounded Rectangle 6"/>
-          <p:cNvSpPr/>
-          <p:nvPr/>
-        </p:nvSpPr>
-        <p:spPr>
-          <a:xfrm>
-            <a:off x="400000" y="4200000"/>
-            <a:ext cx="11400000" cy="700000"/>
-          </a:xfrm>
-          <a:prstGeom prst="roundRect">
-            <a:avLst/>
-          </a:prstGeom>
-          <a:solidFill>
-            <a:srgbClr val="E3F2FD"/>
-          </a:solidFill>
-          <a:ln>
-            <a:noFill/>
-          </a:ln>
-        </p:spPr>
-        <p:style>
-          <a:lnRef idx="1">
-            <a:schemeClr val="accent1"/>
-          </a:lnRef>
-          <a:fillRef idx="3">
-            <a:schemeClr val="accent1"/>
-          </a:fillRef>
-          <a:effectRef idx="2">
-            <a:schemeClr val="accent1"/>
-          </a:effectRef>
-          <a:fontRef idx="minor">
-            <a:schemeClr val="lt1"/>
-          </a:fontRef>
-        </p:style>
-        <p:txBody>
-          <a:bodyPr rtlCol="0" anchor="ctr" wrap="square" tIns="127000" bIns="127000" lIns="152400" rIns="152400"/>
-          <a:lstStyle/>
-          <a:p>
-            <a:pPr algn="ctr"/>
-            <a:r>
-              <a:rPr sz="1200" b="0">
-                <a:solidFill>
-                  <a:srgbClr val="333333"/>
-                </a:solidFill>
-              </a:rPr>
-              <a:t>Any team member can rebuild the entire pipeline from scratch with one command. Runtime: ~6 minutes. This eliminates the 'works on my machine' problem and proves our results are fully reproducible.</a:t>
+          <a:p>
+            <a:r>
+              <a:t>Questions?</a:t>
             </a:r>
           </a:p>
         </p:txBody>
@@ -15608,12 +15147,12 @@
       </p:grpSpPr>
       <p:sp>
         <p:nvSpPr>
-          <p:cNvPr id="2" name="Text Placeholder 1"/>
-          <p:cNvSpPr>
-            <a:spLocks noGrp="1"/>
-          </p:cNvSpPr>
-          <p:nvPr>
-            <p:ph type="body" sz="quarter" idx="13"/>
+          <p:cNvPr id="2" name="Title 1"/>
+          <p:cNvSpPr>
+            <a:spLocks noGrp="1"/>
+          </p:cNvSpPr>
+          <p:nvPr>
+            <p:ph type="title"/>
           </p:nvPr>
         </p:nvSpPr>
         <p:spPr/>
@@ -15621,49 +15160,341 @@
           <a:bodyPr/>
           <a:lstStyle/>
           <a:p>
+            <a:r>
+              <a:t>AI Use Disclosure</a:t>
+            </a:r>
+          </a:p>
+        </p:txBody>
+      </p:sp>
+      <p:sp>
+        <p:nvSpPr>
+          <p:cNvPr id="3" name="Content Placeholder 2"/>
+          <p:cNvSpPr>
+            <a:spLocks noGrp="1"/>
+          </p:cNvSpPr>
+          <p:nvPr>
+            <p:ph idx="1"/>
+          </p:nvPr>
+        </p:nvSpPr>
+        <p:spPr/>
+        <p:txBody>
+          <a:bodyPr/>
+          <a:lstStyle/>
+          <a:p>
             <a:endParaRPr/>
           </a:p>
         </p:txBody>
       </p:sp>
       <p:sp>
         <p:nvSpPr>
-          <p:cNvPr id="3" name="Title 2"/>
-          <p:cNvSpPr>
-            <a:spLocks noGrp="1"/>
-          </p:cNvSpPr>
-          <p:nvPr>
-            <p:ph type="title"/>
-          </p:nvPr>
-        </p:nvSpPr>
-        <p:spPr/>
-        <p:txBody>
-          <a:bodyPr/>
-          <a:lstStyle/>
-          <a:p>
-            <a:r>
-              <a:rPr sz="7200"/>
-              <a:t>7</a:t>
-            </a:r>
-          </a:p>
-        </p:txBody>
-      </p:sp>
-      <p:sp>
-        <p:nvSpPr>
-          <p:cNvPr id="4" name="Subtitle 3"/>
-          <p:cNvSpPr>
-            <a:spLocks noGrp="1"/>
-          </p:cNvSpPr>
-          <p:nvPr>
-            <p:ph type="subTitle" idx="1"/>
-          </p:nvPr>
-        </p:nvSpPr>
-        <p:spPr/>
-        <p:txBody>
-          <a:bodyPr/>
-          <a:lstStyle/>
-          <a:p>
-            <a:r>
-              <a:t>Future State and Recommendation</a:t>
+          <p:cNvPr id="4" name="Rectangle 3"/>
+          <p:cNvSpPr/>
+          <p:nvPr/>
+        </p:nvSpPr>
+        <p:spPr>
+          <a:xfrm>
+            <a:off x="0" y="800000"/>
+            <a:ext cx="12192000" cy="80000"/>
+          </a:xfrm>
+          <a:prstGeom prst="rect">
+            <a:avLst/>
+          </a:prstGeom>
+          <a:solidFill>
+            <a:srgbClr val="FE3082"/>
+          </a:solidFill>
+          <a:ln>
+            <a:noFill/>
+          </a:ln>
+        </p:spPr>
+        <p:style>
+          <a:lnRef idx="1">
+            <a:schemeClr val="accent1"/>
+          </a:lnRef>
+          <a:fillRef idx="3">
+            <a:schemeClr val="accent1"/>
+          </a:fillRef>
+          <a:effectRef idx="2">
+            <a:schemeClr val="accent1"/>
+          </a:effectRef>
+          <a:fontRef idx="minor">
+            <a:schemeClr val="lt1"/>
+          </a:fontRef>
+        </p:style>
+        <p:txBody>
+          <a:bodyPr rtlCol="0" anchor="ctr"/>
+          <a:lstStyle/>
+          <a:p>
+            <a:pPr algn="ctr"/>
+            <a:endParaRPr/>
+          </a:p>
+        </p:txBody>
+      </p:sp>
+      <p:sp>
+        <p:nvSpPr>
+          <p:cNvPr id="5" name="Rounded Rectangle 4"/>
+          <p:cNvSpPr/>
+          <p:nvPr/>
+        </p:nvSpPr>
+        <p:spPr>
+          <a:xfrm>
+            <a:off x="400000" y="1100000"/>
+            <a:ext cx="11400000" cy="500000"/>
+          </a:xfrm>
+          <a:prstGeom prst="roundRect">
+            <a:avLst/>
+          </a:prstGeom>
+          <a:solidFill>
+            <a:srgbClr val="1A237E"/>
+          </a:solidFill>
+          <a:ln>
+            <a:noFill/>
+          </a:ln>
+        </p:spPr>
+        <p:style>
+          <a:lnRef idx="1">
+            <a:schemeClr val="accent1"/>
+          </a:lnRef>
+          <a:fillRef idx="3">
+            <a:schemeClr val="accent1"/>
+          </a:fillRef>
+          <a:effectRef idx="2">
+            <a:schemeClr val="accent1"/>
+          </a:effectRef>
+          <a:fontRef idx="minor">
+            <a:schemeClr val="lt1"/>
+          </a:fontRef>
+        </p:style>
+        <p:txBody>
+          <a:bodyPr wrap="square" rtlCol="0" anchor="ctr"/>
+          <a:lstStyle/>
+          <a:p>
+            <a:pPr algn="ctr"/>
+            <a:r>
+              <a:rPr sz="1300" b="1">
+                <a:solidFill>
+                  <a:srgbClr val="FFFFFF"/>
+                </a:solidFill>
+              </a:rPr>
+              <a:t>  Where We Used AI                    What For                              What We Verified</a:t>
+            </a:r>
+          </a:p>
+        </p:txBody>
+      </p:sp>
+      <p:sp>
+        <p:nvSpPr>
+          <p:cNvPr id="6" name="Rounded Rectangle 5"/>
+          <p:cNvSpPr/>
+          <p:nvPr/>
+        </p:nvSpPr>
+        <p:spPr>
+          <a:xfrm>
+            <a:off x="400000" y="1650000"/>
+            <a:ext cx="11400000" cy="500000"/>
+          </a:xfrm>
+          <a:prstGeom prst="roundRect">
+            <a:avLst/>
+          </a:prstGeom>
+          <a:solidFill>
+            <a:srgbClr val="E3F2FD"/>
+          </a:solidFill>
+          <a:ln>
+            <a:noFill/>
+          </a:ln>
+        </p:spPr>
+        <p:style>
+          <a:lnRef idx="1">
+            <a:schemeClr val="accent1"/>
+          </a:lnRef>
+          <a:fillRef idx="3">
+            <a:schemeClr val="accent1"/>
+          </a:fillRef>
+          <a:effectRef idx="2">
+            <a:schemeClr val="accent1"/>
+          </a:effectRef>
+          <a:fontRef idx="minor">
+            <a:schemeClr val="lt1"/>
+          </a:fontRef>
+        </p:style>
+        <p:txBody>
+          <a:bodyPr wrap="square" rtlCol="0" anchor="ctr"/>
+          <a:lstStyle/>
+          <a:p>
+            <a:pPr algn="ctr"/>
+            <a:r>
+              <a:rPr sz="1200">
+                <a:solidFill>
+                  <a:srgbClr val="2D2D2D"/>
+                </a:solidFill>
+              </a:rPr>
+              <a:t>  [Tool]                                        [Purpose]                                    [Verification]</a:t>
+            </a:r>
+          </a:p>
+        </p:txBody>
+      </p:sp>
+      <p:sp>
+        <p:nvSpPr>
+          <p:cNvPr id="7" name="Rounded Rectangle 6"/>
+          <p:cNvSpPr/>
+          <p:nvPr/>
+        </p:nvSpPr>
+        <p:spPr>
+          <a:xfrm>
+            <a:off x="400000" y="2200000"/>
+            <a:ext cx="11400000" cy="500000"/>
+          </a:xfrm>
+          <a:prstGeom prst="roundRect">
+            <a:avLst/>
+          </a:prstGeom>
+          <a:solidFill>
+            <a:srgbClr val="F0F7FF"/>
+          </a:solidFill>
+          <a:ln>
+            <a:noFill/>
+          </a:ln>
+        </p:spPr>
+        <p:style>
+          <a:lnRef idx="1">
+            <a:schemeClr val="accent1"/>
+          </a:lnRef>
+          <a:fillRef idx="3">
+            <a:schemeClr val="accent1"/>
+          </a:fillRef>
+          <a:effectRef idx="2">
+            <a:schemeClr val="accent1"/>
+          </a:effectRef>
+          <a:fontRef idx="minor">
+            <a:schemeClr val="lt1"/>
+          </a:fontRef>
+        </p:style>
+        <p:txBody>
+          <a:bodyPr wrap="square" rtlCol="0" anchor="ctr"/>
+          <a:lstStyle/>
+          <a:p>
+            <a:pPr algn="ctr"/>
+            <a:r>
+              <a:rPr sz="1200">
+                <a:solidFill>
+                  <a:srgbClr val="2D2D2D"/>
+                </a:solidFill>
+              </a:rPr>
+              <a:t>  [Tool]                                        [Purpose]                                    [Verification]</a:t>
+            </a:r>
+          </a:p>
+        </p:txBody>
+      </p:sp>
+      <p:sp>
+        <p:nvSpPr>
+          <p:cNvPr id="8" name="Rounded Rectangle 7"/>
+          <p:cNvSpPr/>
+          <p:nvPr/>
+        </p:nvSpPr>
+        <p:spPr>
+          <a:xfrm>
+            <a:off x="400000" y="2750000"/>
+            <a:ext cx="11400000" cy="500000"/>
+          </a:xfrm>
+          <a:prstGeom prst="roundRect">
+            <a:avLst/>
+          </a:prstGeom>
+          <a:solidFill>
+            <a:srgbClr val="E3F2FD"/>
+          </a:solidFill>
+          <a:ln>
+            <a:noFill/>
+          </a:ln>
+        </p:spPr>
+        <p:style>
+          <a:lnRef idx="1">
+            <a:schemeClr val="accent1"/>
+          </a:lnRef>
+          <a:fillRef idx="3">
+            <a:schemeClr val="accent1"/>
+          </a:fillRef>
+          <a:effectRef idx="2">
+            <a:schemeClr val="accent1"/>
+          </a:effectRef>
+          <a:fontRef idx="minor">
+            <a:schemeClr val="lt1"/>
+          </a:fontRef>
+        </p:style>
+        <p:txBody>
+          <a:bodyPr wrap="square" rtlCol="0" anchor="ctr"/>
+          <a:lstStyle/>
+          <a:p>
+            <a:pPr algn="ctr"/>
+            <a:r>
+              <a:rPr sz="1200">
+                <a:solidFill>
+                  <a:srgbClr val="2D2D2D"/>
+                </a:solidFill>
+              </a:rPr>
+              <a:t>  [Tool]                                        [Purpose]                                    [Verification]</a:t>
+            </a:r>
+          </a:p>
+        </p:txBody>
+      </p:sp>
+      <p:sp>
+        <p:nvSpPr>
+          <p:cNvPr id="9" name="Rounded Rectangle 8"/>
+          <p:cNvSpPr/>
+          <p:nvPr/>
+        </p:nvSpPr>
+        <p:spPr>
+          <a:xfrm>
+            <a:off x="400000" y="3600000"/>
+            <a:ext cx="11400000" cy="2000000"/>
+          </a:xfrm>
+          <a:prstGeom prst="roundRect">
+            <a:avLst/>
+          </a:prstGeom>
+          <a:solidFill>
+            <a:srgbClr val="FFF3E0"/>
+          </a:solidFill>
+          <a:ln>
+            <a:noFill/>
+          </a:ln>
+        </p:spPr>
+        <p:style>
+          <a:lnRef idx="1">
+            <a:schemeClr val="accent1"/>
+          </a:lnRef>
+          <a:fillRef idx="3">
+            <a:schemeClr val="accent1"/>
+          </a:fillRef>
+          <a:effectRef idx="2">
+            <a:schemeClr val="accent1"/>
+          </a:effectRef>
+          <a:fontRef idx="minor">
+            <a:schemeClr val="lt1"/>
+          </a:fontRef>
+        </p:style>
+        <p:txBody>
+          <a:bodyPr wrap="square" rtlCol="0" anchor="ctr"/>
+          <a:lstStyle/>
+          <a:p>
+            <a:pPr algn="ctr"/>
+            <a:r>
+              <a:rPr sz="1400" b="1">
+                <a:solidFill>
+                  <a:srgbClr val="E65100"/>
+                </a:solidFill>
+              </a:rPr>
+              <a:t>What We Rejected or Corrected From AI Suggestions</a:t>
+            </a:r>
+          </a:p>
+          <a:p>
+            <a:pPr>
+              <a:spcBef>
+                <a:spcPts val="800"/>
+              </a:spcBef>
+            </a:pPr>
+            <a:r>
+              <a:rPr sz="1200">
+                <a:solidFill>
+                  <a:srgbClr val="2D2D2D"/>
+                </a:solidFill>
+              </a:rPr>
+              <a:t>[Describe corrections made, things that required manual verification, etc.]</a:t>
             </a:r>
           </a:p>
         </p:txBody>
@@ -15677,7 +15508,7 @@
 </file>
 
 <file path=ppt/slides/slide26.xml><?xml version="1.0" encoding="utf-8"?>
-<p:sld xmlns:a="http://schemas.openxmlformats.org/drawingml/2006/main" xmlns:r="http://schemas.openxmlformats.org/officeDocument/2006/relationships" xmlns:p="http://schemas.openxmlformats.org/presentationml/2006/main">
+<p:sld xmlns:a="http://schemas.openxmlformats.org/drawingml/2006/main" xmlns:p="http://schemas.openxmlformats.org/presentationml/2006/main" xmlns:r="http://schemas.openxmlformats.org/officeDocument/2006/relationships">
   <p:cSld>
     <p:spTree>
       <p:nvGrpSpPr>
@@ -15685,14 +15516,7 @@
         <p:cNvGrpSpPr/>
         <p:nvPr/>
       </p:nvGrpSpPr>
-      <p:grpSpPr>
-        <a:xfrm>
-          <a:off x="0" y="0"/>
-          <a:ext cx="0" cy="0"/>
-          <a:chOff x="0" y="0"/>
-          <a:chExt cx="0" cy="0"/>
-        </a:xfrm>
-      </p:grpSpPr>
+      <p:grpSpPr/>
       <p:sp>
         <p:nvSpPr>
           <p:cNvPr id="2" name="Title 1"/>
@@ -15709,7 +15533,7 @@
           <a:lstStyle/>
           <a:p>
             <a:r>
-              <a:t>Future State Proposal</a:t>
+              <a:t>Headline Finding (NEW VERSION)</a:t>
             </a:r>
           </a:p>
         </p:txBody>
@@ -15728,9 +15552,7 @@
         <p:txBody>
           <a:bodyPr/>
           <a:lstStyle/>
-          <a:p>
-            <a:endParaRPr/>
-          </a:p>
+          <a:p/>
         </p:txBody>
       </p:sp>
       <p:sp>
@@ -15773,7 +15595,6 @@
           <a:lstStyle/>
           <a:p>
             <a:pPr algn="ctr"/>
-            <a:endParaRPr/>
           </a:p>
         </p:txBody>
       </p:sp>
@@ -15785,8 +15606,262 @@
         </p:nvSpPr>
         <p:spPr>
           <a:xfrm>
-            <a:off x="400000" y="1000000"/>
-            <a:ext cx="3600000" cy="4800000"/>
+            <a:off x="400000" y="1100000"/>
+            <a:ext cx="11400000" cy="1400000"/>
+          </a:xfrm>
+          <a:prstGeom prst="roundRect">
+            <a:avLst/>
+          </a:prstGeom>
+          <a:solidFill>
+            <a:srgbClr val="FCE4EC"/>
+          </a:solidFill>
+          <a:ln>
+            <a:noFill/>
+          </a:ln>
+        </p:spPr>
+        <p:style>
+          <a:lnRef idx="1">
+            <a:schemeClr val="accent1"/>
+          </a:lnRef>
+          <a:fillRef idx="3">
+            <a:schemeClr val="accent1"/>
+          </a:fillRef>
+          <a:effectRef idx="2">
+            <a:schemeClr val="accent1"/>
+          </a:effectRef>
+          <a:fontRef idx="minor">
+            <a:schemeClr val="lt1"/>
+          </a:fontRef>
+        </p:style>
+        <p:txBody>
+          <a:bodyPr rtlCol="0" anchor="ctr" wrap="square" tIns="127000" bIns="127000" lIns="152400" rIns="152400"/>
+          <a:lstStyle/>
+          <a:p>
+            <a:pPr algn="ctr"/>
+            <a:r>
+              <a:rPr sz="1500" b="1">
+                <a:solidFill>
+                  <a:srgbClr val="333333"/>
+                </a:solidFill>
+              </a:rPr>
+              <a:t>In 2025, adverse weather boosted taxi demand in Manhattan (+15.6%) and</a:t>
+            </a:r>
+          </a:p>
+          <a:p>
+            <a:r>
+              <a:rPr sz="1500" b="1">
+                <a:solidFill>
+                  <a:srgbClr val="333333"/>
+                </a:solidFill>
+              </a:rPr>
+              <a:t>Brooklyn (+20.6%) as riders switched to cabs. By 2026, that pattern reversed:</a:t>
+            </a:r>
+          </a:p>
+          <a:p>
+            <a:r>
+              <a:rPr sz="1500" b="1">
+                <a:solidFill>
+                  <a:srgbClr val="333333"/>
+                </a:solidFill>
+              </a:rPr>
+              <a:t>adverse weather now suppresses demand across all boroughs.</a:t>
+            </a:r>
+          </a:p>
+        </p:txBody>
+      </p:sp>
+      <p:sp>
+        <p:nvSpPr>
+          <p:cNvPr id="6" name="Rounded Rectangle 5"/>
+          <p:cNvSpPr/>
+          <p:nvPr/>
+        </p:nvSpPr>
+        <p:spPr>
+          <a:xfrm>
+            <a:off x="400000" y="2800000"/>
+            <a:ext cx="3200000" cy="1400000"/>
+          </a:xfrm>
+          <a:prstGeom prst="roundRect">
+            <a:avLst/>
+          </a:prstGeom>
+          <a:solidFill>
+            <a:srgbClr val="E3F2FD"/>
+          </a:solidFill>
+          <a:ln>
+            <a:noFill/>
+          </a:ln>
+        </p:spPr>
+        <p:style>
+          <a:lnRef idx="1">
+            <a:schemeClr val="accent1"/>
+          </a:lnRef>
+          <a:fillRef idx="3">
+            <a:schemeClr val="accent1"/>
+          </a:fillRef>
+          <a:effectRef idx="2">
+            <a:schemeClr val="accent1"/>
+          </a:effectRef>
+          <a:fontRef idx="minor">
+            <a:schemeClr val="lt1"/>
+          </a:fontRef>
+        </p:style>
+        <p:txBody>
+          <a:bodyPr rtlCol="0" anchor="ctr" wrap="square" tIns="127000" bIns="127000" lIns="152400" rIns="152400"/>
+          <a:lstStyle/>
+          <a:p>
+            <a:pPr algn="ctr"/>
+            <a:r>
+              <a:rPr sz="2800" b="1">
+                <a:solidFill>
+                  <a:srgbClr val="333333"/>
+                </a:solidFill>
+              </a:rPr>
+              <a:t>38M+</a:t>
+            </a:r>
+          </a:p>
+          <a:p>
+            <a:r>
+              <a:rPr sz="1400" b="0">
+                <a:solidFill>
+                  <a:srgbClr val="333333"/>
+                </a:solidFill>
+              </a:rPr>
+              <a:t>Trip Records Analyzed</a:t>
+            </a:r>
+          </a:p>
+        </p:txBody>
+      </p:sp>
+      <p:sp>
+        <p:nvSpPr>
+          <p:cNvPr id="7" name="Rounded Rectangle 6"/>
+          <p:cNvSpPr/>
+          <p:nvPr/>
+        </p:nvSpPr>
+        <p:spPr>
+          <a:xfrm>
+            <a:off x="4400000" y="2800000"/>
+            <a:ext cx="3200000" cy="1400000"/>
+          </a:xfrm>
+          <a:prstGeom prst="roundRect">
+            <a:avLst/>
+          </a:prstGeom>
+          <a:solidFill>
+            <a:srgbClr val="E3F2FD"/>
+          </a:solidFill>
+          <a:ln>
+            <a:noFill/>
+          </a:ln>
+        </p:spPr>
+        <p:style>
+          <a:lnRef idx="1">
+            <a:schemeClr val="accent1"/>
+          </a:lnRef>
+          <a:fillRef idx="3">
+            <a:schemeClr val="accent1"/>
+          </a:fillRef>
+          <a:effectRef idx="2">
+            <a:schemeClr val="accent1"/>
+          </a:effectRef>
+          <a:fontRef idx="minor">
+            <a:schemeClr val="lt1"/>
+          </a:fontRef>
+        </p:style>
+        <p:txBody>
+          <a:bodyPr rtlCol="0" anchor="ctr" wrap="square" tIns="127000" bIns="127000" lIns="152400" rIns="152400"/>
+          <a:lstStyle/>
+          <a:p>
+            <a:pPr algn="ctr"/>
+            <a:r>
+              <a:rPr sz="2800" b="1">
+                <a:solidFill>
+                  <a:srgbClr val="333333"/>
+                </a:solidFill>
+              </a:rPr>
+              <a:t>10 months</a:t>
+            </a:r>
+          </a:p>
+          <a:p>
+            <a:r>
+              <a:rPr sz="1400" b="0">
+                <a:solidFill>
+                  <a:srgbClr val="333333"/>
+                </a:solidFill>
+              </a:rPr>
+              <a:t>Jan-May 2025 vs 2026</a:t>
+            </a:r>
+          </a:p>
+        </p:txBody>
+      </p:sp>
+      <p:sp>
+        <p:nvSpPr>
+          <p:cNvPr id="8" name="Rounded Rectangle 7"/>
+          <p:cNvSpPr/>
+          <p:nvPr/>
+        </p:nvSpPr>
+        <p:spPr>
+          <a:xfrm>
+            <a:off x="8400000" y="2800000"/>
+            <a:ext cx="3200000" cy="1400000"/>
+          </a:xfrm>
+          <a:prstGeom prst="roundRect">
+            <a:avLst/>
+          </a:prstGeom>
+          <a:solidFill>
+            <a:srgbClr val="E3F2FD"/>
+          </a:solidFill>
+          <a:ln>
+            <a:noFill/>
+          </a:ln>
+        </p:spPr>
+        <p:style>
+          <a:lnRef idx="1">
+            <a:schemeClr val="accent1"/>
+          </a:lnRef>
+          <a:fillRef idx="3">
+            <a:schemeClr val="accent1"/>
+          </a:fillRef>
+          <a:effectRef idx="2">
+            <a:schemeClr val="accent1"/>
+          </a:effectRef>
+          <a:fontRef idx="minor">
+            <a:schemeClr val="lt1"/>
+          </a:fontRef>
+        </p:style>
+        <p:txBody>
+          <a:bodyPr rtlCol="0" anchor="ctr" wrap="square" tIns="127000" bIns="127000" lIns="152400" rIns="152400"/>
+          <a:lstStyle/>
+          <a:p>
+            <a:pPr algn="ctr"/>
+            <a:r>
+              <a:rPr sz="2800" b="1">
+                <a:solidFill>
+                  <a:srgbClr val="333333"/>
+                </a:solidFill>
+              </a:rPr>
+              <a:t>5 boroughs</a:t>
+            </a:r>
+          </a:p>
+          <a:p>
+            <a:r>
+              <a:rPr sz="1400" b="0">
+                <a:solidFill>
+                  <a:srgbClr val="333333"/>
+                </a:solidFill>
+              </a:rPr>
+              <a:t>Weather Impact Compared</a:t>
+            </a:r>
+          </a:p>
+        </p:txBody>
+      </p:sp>
+      <p:sp>
+        <p:nvSpPr>
+          <p:cNvPr id="9" name="Rounded Rectangle 8"/>
+          <p:cNvSpPr/>
+          <p:nvPr/>
+        </p:nvSpPr>
+        <p:spPr>
+          <a:xfrm>
+            <a:off x="400000" y="4600000"/>
+            <a:ext cx="11400000" cy="1000000"/>
           </a:xfrm>
           <a:prstGeom prst="roundRect">
             <a:avLst/>
@@ -15813,106 +15888,130 @@
           </a:fontRef>
         </p:style>
         <p:txBody>
-          <a:bodyPr wrap="square" rtlCol="0" anchor="ctr"/>
+          <a:bodyPr rtlCol="0" anchor="ctr" wrap="square" tIns="127000" bIns="127000" lIns="152400" rIns="152400"/>
           <a:lstStyle/>
           <a:p>
             <a:pPr algn="ctr"/>
             <a:r>
-              <a:rPr sz="1600" b="1">
-                <a:solidFill>
-                  <a:srgbClr val="2E7D32"/>
-                </a:solidFill>
-              </a:rPr>
-              <a:t>Real-Time Ingestion</a:t>
-            </a:r>
-          </a:p>
-          <a:p>
-            <a:pPr>
-              <a:spcBef>
-                <a:spcPts val="1600"/>
-              </a:spcBef>
-            </a:pPr>
-            <a:r>
-              <a:rPr sz="1100" b="1">
-                <a:solidFill>
-                  <a:srgbClr val="2E7D32"/>
-                </a:solidFill>
-              </a:rPr>
-              <a:t>What:</a:t>
-            </a:r>
-          </a:p>
-          <a:p>
-            <a:r>
-              <a:rPr sz="1100">
-                <a:solidFill>
-                  <a:srgbClr val="2D2D2D"/>
-                </a:solidFill>
-              </a:rPr>
-              <a:t>Snowpipe + streams for continuous loading</a:t>
-            </a:r>
-          </a:p>
-          <a:p>
-            <a:pPr>
-              <a:spcBef>
-                <a:spcPts val="1200"/>
-              </a:spcBef>
-            </a:pPr>
-            <a:r>
-              <a:rPr sz="1100" b="1">
-                <a:solidFill>
-                  <a:srgbClr val="2E7D32"/>
-                </a:solidFill>
-              </a:rPr>
-              <a:t>Effort:</a:t>
-            </a:r>
-          </a:p>
-          <a:p>
-            <a:r>
-              <a:rPr sz="1100">
-                <a:solidFill>
-                  <a:srgbClr val="2D2D2D"/>
-                </a:solidFill>
-              </a:rPr>
-              <a:t>1-2 sprints</a:t>
-            </a:r>
-          </a:p>
-          <a:p>
-            <a:pPr>
-              <a:spcBef>
-                <a:spcPts val="1200"/>
-              </a:spcBef>
-            </a:pPr>
-            <a:r>
-              <a:rPr sz="1100" b="1">
-                <a:solidFill>
-                  <a:srgbClr val="2E7D32"/>
-                </a:solidFill>
-              </a:rPr>
-              <a:t>Business Benefit:</a:t>
-            </a:r>
-          </a:p>
-          <a:p>
-            <a:r>
-              <a:rPr sz="1100">
-                <a:solidFill>
-                  <a:srgbClr val="2D2D2D"/>
-                </a:solidFill>
-              </a:rPr>
-              <a:t>Live demand monitoring during storms</a:t>
-            </a:r>
-          </a:p>
-        </p:txBody>
-      </p:sp>
-      <p:sp>
-        <p:nvSpPr>
-          <p:cNvPr id="6" name="Rounded Rectangle 5"/>
+              <a:rPr sz="1300" b="1">
+                <a:solidFill>
+                  <a:srgbClr val="333333"/>
+                </a:solidFill>
+              </a:rPr>
+              <a:t>Key Insight: Snow severity doubled (25.2 in vs. 11.6 in), causing rush-hour storm losses to exceed off-peak losses by 3-5x. Pre-positioning vehicles is the highest-value intervention.</a:t>
+            </a:r>
+          </a:p>
+        </p:txBody>
+      </p:sp>
+    </p:spTree>
+  </p:cSld>
+  <p:clrMapOvr>
+    <a:masterClrMapping/>
+  </p:clrMapOvr>
+</p:sld>
+</file>
+
+<file path=ppt/slides/slide27.xml><?xml version="1.0" encoding="utf-8"?>
+<p:sld xmlns:a="http://schemas.openxmlformats.org/drawingml/2006/main" xmlns:p="http://schemas.openxmlformats.org/presentationml/2006/main" xmlns:r="http://schemas.openxmlformats.org/officeDocument/2006/relationships">
+  <p:cSld>
+    <p:spTree>
+      <p:nvGrpSpPr>
+        <p:cNvPr id="1" name=""/>
+        <p:cNvGrpSpPr/>
+        <p:nvPr/>
+      </p:nvGrpSpPr>
+      <p:grpSpPr/>
+      <p:sp>
+        <p:nvSpPr>
+          <p:cNvPr id="2" name="Title 1"/>
+          <p:cNvSpPr>
+            <a:spLocks noGrp="1"/>
+          </p:cNvSpPr>
+          <p:nvPr>
+            <p:ph type="title"/>
+          </p:nvPr>
+        </p:nvSpPr>
+        <p:spPr/>
+        <p:txBody>
+          <a:bodyPr/>
+          <a:lstStyle/>
+          <a:p>
+            <a:r>
+              <a:t>The Business Question (NEW VERSION)</a:t>
+            </a:r>
+          </a:p>
+        </p:txBody>
+      </p:sp>
+      <p:sp>
+        <p:nvSpPr>
+          <p:cNvPr id="3" name="Content Placeholder 2"/>
+          <p:cNvSpPr>
+            <a:spLocks noGrp="1"/>
+          </p:cNvSpPr>
+          <p:nvPr>
+            <p:ph idx="1"/>
+          </p:nvPr>
+        </p:nvSpPr>
+        <p:spPr/>
+        <p:txBody>
+          <a:bodyPr/>
+          <a:lstStyle/>
+          <a:p/>
+        </p:txBody>
+      </p:sp>
+      <p:sp>
+        <p:nvSpPr>
+          <p:cNvPr id="4" name="Rectangle 3"/>
           <p:cNvSpPr/>
           <p:nvPr/>
         </p:nvSpPr>
         <p:spPr>
           <a:xfrm>
-            <a:off x="4300000" y="1000000"/>
-            <a:ext cx="3600000" cy="4800000"/>
+            <a:off x="0" y="800000"/>
+            <a:ext cx="12192000" cy="80000"/>
+          </a:xfrm>
+          <a:prstGeom prst="rect">
+            <a:avLst/>
+          </a:prstGeom>
+          <a:solidFill>
+            <a:srgbClr val="FE3082"/>
+          </a:solidFill>
+          <a:ln>
+            <a:noFill/>
+          </a:ln>
+        </p:spPr>
+        <p:style>
+          <a:lnRef idx="1">
+            <a:schemeClr val="accent1"/>
+          </a:lnRef>
+          <a:fillRef idx="3">
+            <a:schemeClr val="accent1"/>
+          </a:fillRef>
+          <a:effectRef idx="2">
+            <a:schemeClr val="accent1"/>
+          </a:effectRef>
+          <a:fontRef idx="minor">
+            <a:schemeClr val="lt1"/>
+          </a:fontRef>
+        </p:style>
+        <p:txBody>
+          <a:bodyPr rtlCol="0" anchor="ctr"/>
+          <a:lstStyle/>
+          <a:p>
+            <a:pPr algn="ctr"/>
+          </a:p>
+        </p:txBody>
+      </p:sp>
+      <p:sp>
+        <p:nvSpPr>
+          <p:cNvPr id="5" name="Rounded Rectangle 4"/>
+          <p:cNvSpPr/>
+          <p:nvPr/>
+        </p:nvSpPr>
+        <p:spPr>
+          <a:xfrm>
+            <a:off x="400000" y="1100000"/>
+            <a:ext cx="11400000" cy="1200000"/>
           </a:xfrm>
           <a:prstGeom prst="roundRect">
             <a:avLst/>
@@ -15939,106 +16038,41 @@
           </a:fontRef>
         </p:style>
         <p:txBody>
-          <a:bodyPr wrap="square" rtlCol="0" anchor="ctr"/>
+          <a:bodyPr rtlCol="0" anchor="ctr" wrap="square" tIns="127000" bIns="127000" lIns="152400" rIns="152400"/>
           <a:lstStyle/>
           <a:p>
             <a:pPr algn="ctr"/>
             <a:r>
               <a:rPr sz="1600" b="1">
                 <a:solidFill>
-                  <a:srgbClr val="0D47A1"/>
-                </a:solidFill>
-              </a:rPr>
-              <a:t>ML Forecasting</a:t>
-            </a:r>
-          </a:p>
-          <a:p>
-            <a:pPr>
-              <a:spcBef>
-                <a:spcPts val="1600"/>
-              </a:spcBef>
-            </a:pPr>
-            <a:r>
-              <a:rPr sz="1100" b="1">
-                <a:solidFill>
-                  <a:srgbClr val="0D47A1"/>
-                </a:solidFill>
-              </a:rPr>
-              <a:t>What:</a:t>
-            </a:r>
-          </a:p>
-          <a:p>
-            <a:r>
-              <a:rPr sz="1100">
-                <a:solidFill>
-                  <a:srgbClr val="2D2D2D"/>
-                </a:solidFill>
-              </a:rPr>
-              <a:t>Predict demand drops by borough before storms hit</a:t>
-            </a:r>
-          </a:p>
-          <a:p>
-            <a:pPr>
-              <a:spcBef>
-                <a:spcPts val="1200"/>
-              </a:spcBef>
-            </a:pPr>
-            <a:r>
-              <a:rPr sz="1100" b="1">
-                <a:solidFill>
-                  <a:srgbClr val="0D47A1"/>
-                </a:solidFill>
-              </a:rPr>
-              <a:t>Effort:</a:t>
-            </a:r>
-          </a:p>
-          <a:p>
-            <a:r>
-              <a:rPr sz="1100">
-                <a:solidFill>
-                  <a:srgbClr val="2D2D2D"/>
-                </a:solidFill>
-              </a:rPr>
-              <a:t>2-3 sprints</a:t>
-            </a:r>
-          </a:p>
-          <a:p>
-            <a:pPr>
-              <a:spcBef>
-                <a:spcPts val="1200"/>
-              </a:spcBef>
-            </a:pPr>
-            <a:r>
-              <a:rPr sz="1100" b="1">
-                <a:solidFill>
-                  <a:srgbClr val="0D47A1"/>
-                </a:solidFill>
-              </a:rPr>
-              <a:t>Business Benefit:</a:t>
-            </a:r>
-          </a:p>
-          <a:p>
-            <a:r>
-              <a:rPr sz="1100">
-                <a:solidFill>
-                  <a:srgbClr val="2D2D2D"/>
-                </a:solidFill>
-              </a:rPr>
-              <a:t>Proactive fleet positioning, fewer empty cabs</a:t>
-            </a:r>
-          </a:p>
-        </p:txBody>
-      </p:sp>
-      <p:sp>
-        <p:nvSpPr>
-          <p:cNvPr id="7" name="Rounded Rectangle 6"/>
+                  <a:srgbClr val="333333"/>
+                </a:solidFill>
+              </a:rPr>
+              <a:t>How does adverse weather affect taxi demand across NYC boroughs,</a:t>
+            </a:r>
+          </a:p>
+          <a:p>
+            <a:r>
+              <a:rPr sz="1600" b="1">
+                <a:solidFill>
+                  <a:srgbClr val="333333"/>
+                </a:solidFill>
+              </a:rPr>
+              <a:t>and how did those patterns shift between 2025 and 2026?</a:t>
+            </a:r>
+          </a:p>
+        </p:txBody>
+      </p:sp>
+      <p:sp>
+        <p:nvSpPr>
+          <p:cNvPr id="6" name="Rounded Rectangle 5"/>
           <p:cNvSpPr/>
           <p:nvPr/>
         </p:nvSpPr>
         <p:spPr>
           <a:xfrm>
-            <a:off x="8200000" y="1000000"/>
-            <a:ext cx="3600000" cy="4800000"/>
+            <a:off x="400000" y="2600000"/>
+            <a:ext cx="5400000" cy="2200000"/>
           </a:xfrm>
           <a:prstGeom prst="roundRect">
             <a:avLst/>
@@ -16065,92 +16099,158 @@
           </a:fontRef>
         </p:style>
         <p:txBody>
-          <a:bodyPr wrap="square" rtlCol="0" anchor="ctr"/>
+          <a:bodyPr rtlCol="0" anchor="ctr" wrap="square" tIns="127000" bIns="127000" lIns="152400" rIns="152400"/>
           <a:lstStyle/>
           <a:p>
             <a:pPr algn="ctr"/>
             <a:r>
-              <a:rPr sz="1600" b="1">
-                <a:solidFill>
-                  <a:srgbClr val="E65100"/>
-                </a:solidFill>
-              </a:rPr>
-              <a:t>Multi-City Expansion</a:t>
-            </a:r>
-          </a:p>
-          <a:p>
-            <a:pPr>
-              <a:spcBef>
-                <a:spcPts val="1600"/>
-              </a:spcBef>
-            </a:pPr>
-            <a:r>
-              <a:rPr sz="1100" b="1">
-                <a:solidFill>
-                  <a:srgbClr val="E65100"/>
-                </a:solidFill>
-              </a:rPr>
-              <a:t>What:</a:t>
-            </a:r>
-          </a:p>
-          <a:p>
-            <a:r>
-              <a:rPr sz="1100">
-                <a:solidFill>
-                  <a:srgbClr val="2D2D2D"/>
-                </a:solidFill>
-              </a:rPr>
-              <a:t>Replicate pipeline for Chicago, Boston, etc.</a:t>
-            </a:r>
-          </a:p>
-          <a:p>
-            <a:pPr>
-              <a:spcBef>
-                <a:spcPts val="1200"/>
-              </a:spcBef>
-            </a:pPr>
-            <a:r>
-              <a:rPr sz="1100" b="1">
-                <a:solidFill>
-                  <a:srgbClr val="E65100"/>
-                </a:solidFill>
-              </a:rPr>
-              <a:t>Effort:</a:t>
-            </a:r>
-          </a:p>
-          <a:p>
-            <a:r>
-              <a:rPr sz="1100">
-                <a:solidFill>
-                  <a:srgbClr val="2D2D2D"/>
-                </a:solidFill>
-              </a:rPr>
-              <a:t>3-4 sprints per city</a:t>
-            </a:r>
-          </a:p>
-          <a:p>
-            <a:pPr>
-              <a:spcBef>
-                <a:spcPts val="1200"/>
-              </a:spcBef>
-            </a:pPr>
-            <a:r>
-              <a:rPr sz="1100" b="1">
-                <a:solidFill>
-                  <a:srgbClr val="E65100"/>
-                </a:solidFill>
-              </a:rPr>
-              <a:t>Business Benefit:</a:t>
-            </a:r>
-          </a:p>
-          <a:p>
-            <a:r>
-              <a:rPr sz="1100">
-                <a:solidFill>
-                  <a:srgbClr val="2D2D2D"/>
-                </a:solidFill>
-              </a:rPr>
-              <a:t>National weather-demand intelligence</a:t>
+              <a:rPr sz="1400" b="1">
+                <a:solidFill>
+                  <a:srgbClr val="333333"/>
+                </a:solidFill>
+              </a:rPr>
+              <a:t>Why It Matters</a:t>
+            </a:r>
+          </a:p>
+          <a:p>
+            <a:r>
+              <a:rPr sz="1000" b="0">
+                <a:solidFill>
+                  <a:srgbClr val="333333"/>
+                </a:solidFill>
+              </a:rPr>
+              <a:t/>
+            </a:r>
+          </a:p>
+          <a:p>
+            <a:r>
+              <a:rPr sz="1200" b="0">
+                <a:solidFill>
+                  <a:srgbClr val="333333"/>
+                </a:solidFill>
+              </a:rPr>
+              <a:t>Fleet operators need to know where demand drops during storms</a:t>
+            </a:r>
+          </a:p>
+          <a:p>
+            <a:r>
+              <a:rPr sz="1200" b="0">
+                <a:solidFill>
+                  <a:srgbClr val="333333"/>
+                </a:solidFill>
+              </a:rPr>
+              <a:t>Surge pricing decisions depend on weather sensitivity by zone</a:t>
+            </a:r>
+          </a:p>
+          <a:p>
+            <a:r>
+              <a:rPr sz="1200" b="0">
+                <a:solidFill>
+                  <a:srgbClr val="333333"/>
+                </a:solidFill>
+              </a:rPr>
+              <a:t>NYC TLC planning benefits from quantified weather impact</a:t>
+            </a:r>
+          </a:p>
+        </p:txBody>
+      </p:sp>
+      <p:sp>
+        <p:nvSpPr>
+          <p:cNvPr id="7" name="Rounded Rectangle 6"/>
+          <p:cNvSpPr/>
+          <p:nvPr/>
+        </p:nvSpPr>
+        <p:spPr>
+          <a:xfrm>
+            <a:off x="6100000" y="2600000"/>
+            <a:ext cx="5700000" cy="2200000"/>
+          </a:xfrm>
+          <a:prstGeom prst="roundRect">
+            <a:avLst/>
+          </a:prstGeom>
+          <a:solidFill>
+            <a:srgbClr val="E8F5E9"/>
+          </a:solidFill>
+          <a:ln>
+            <a:noFill/>
+          </a:ln>
+        </p:spPr>
+        <p:style>
+          <a:lnRef idx="1">
+            <a:schemeClr val="accent1"/>
+          </a:lnRef>
+          <a:fillRef idx="3">
+            <a:schemeClr val="accent1"/>
+          </a:fillRef>
+          <a:effectRef idx="2">
+            <a:schemeClr val="accent1"/>
+          </a:effectRef>
+          <a:fontRef idx="minor">
+            <a:schemeClr val="lt1"/>
+          </a:fontRef>
+        </p:style>
+        <p:txBody>
+          <a:bodyPr rtlCol="0" anchor="ctr" wrap="square" tIns="127000" bIns="127000" lIns="152400" rIns="152400"/>
+          <a:lstStyle/>
+          <a:p>
+            <a:pPr algn="ctr"/>
+            <a:r>
+              <a:rPr sz="1400" b="1">
+                <a:solidFill>
+                  <a:srgbClr val="333333"/>
+                </a:solidFill>
+              </a:rPr>
+              <a:t>Scope</a:t>
+            </a:r>
+          </a:p>
+          <a:p>
+            <a:r>
+              <a:rPr sz="1000" b="0">
+                <a:solidFill>
+                  <a:srgbClr val="333333"/>
+                </a:solidFill>
+              </a:rPr>
+              <a:t/>
+            </a:r>
+          </a:p>
+          <a:p>
+            <a:r>
+              <a:rPr sz="1200" b="0">
+                <a:solidFill>
+                  <a:srgbClr val="333333"/>
+                </a:solidFill>
+              </a:rPr>
+              <a:t>Yellow + Green taxi, Jan-May 2025 vs Jan-May 2026</a:t>
+            </a:r>
+          </a:p>
+          <a:p>
+            <a:r>
+              <a:rPr sz="1200" b="0">
+                <a:solidFill>
+                  <a:srgbClr val="333333"/>
+                </a:solidFill>
+              </a:rPr>
+              <a:t>39.2 million trip records from S3</a:t>
+            </a:r>
+          </a:p>
+          <a:p>
+            <a:r>
+              <a:rPr sz="1200" b="0">
+                <a:solidFill>
+                  <a:srgbClr val="333333"/>
+                </a:solidFill>
+              </a:rPr>
+              <a:t>Weather enrichment: hourly NYC conditions (7,248 hrs)</a:t>
+            </a:r>
+          </a:p>
+          <a:p>
+            <a:r>
+              <a:rPr sz="1200" b="0">
+                <a:solidFill>
+                  <a:srgbClr val="333333"/>
+                </a:solidFill>
+              </a:rPr>
+              <a:t>265 taxi zones mapped to 5 boroughs</a:t>
             </a:r>
           </a:p>
         </p:txBody>
@@ -16163,8 +16263,8 @@
         </p:nvSpPr>
         <p:spPr>
           <a:xfrm>
-            <a:off x="400000" y="6000000"/>
-            <a:ext cx="11400000" cy="600000"/>
+            <a:off x="400000" y="5100000"/>
+            <a:ext cx="11400000" cy="1000000"/>
           </a:xfrm>
           <a:prstGeom prst="roundRect">
             <a:avLst/>
@@ -16191,17 +16291,17 @@
           </a:fontRef>
         </p:style>
         <p:txBody>
-          <a:bodyPr wrap="square" rtlCol="0" anchor="ctr"/>
+          <a:bodyPr rtlCol="0" anchor="ctr" wrap="square" tIns="127000" bIns="127000" lIns="152400" rIns="152400"/>
           <a:lstStyle/>
           <a:p>
             <a:pPr algn="ctr"/>
             <a:r>
               <a:rPr sz="1300" b="1">
                 <a:solidFill>
-                  <a:srgbClr val="2D2D2D"/>
-                </a:solidFill>
-              </a:rPr>
-              <a:t>Highest Impact: Real-Time Ingestion. Fleet operators need minute-level demand signals during active storms.</a:t>
+                  <a:srgbClr val="333333"/>
+                </a:solidFill>
+              </a:rPr>
+              <a:t>How We Know We Answered It: Pre-aggregated mart (30,251 rows) with trip counts, revenue, and duration by borough, weather, year, month, hour, rush hour, night, weekend, and payment type.</a:t>
             </a:r>
           </a:p>
         </p:txBody>
@@ -16214,8 +16314,8 @@
 </p:sld>
 </file>
 
-<file path=ppt/slides/slide27.xml><?xml version="1.0" encoding="utf-8"?>
-<p:sld xmlns:a="http://schemas.openxmlformats.org/drawingml/2006/main" xmlns:r="http://schemas.openxmlformats.org/officeDocument/2006/relationships" xmlns:p="http://schemas.openxmlformats.org/presentationml/2006/main">
+<file path=ppt/slides/slide28.xml><?xml version="1.0" encoding="utf-8"?>
+<p:sld xmlns:a="http://schemas.openxmlformats.org/drawingml/2006/main" xmlns:p="http://schemas.openxmlformats.org/presentationml/2006/main" xmlns:r="http://schemas.openxmlformats.org/officeDocument/2006/relationships">
   <p:cSld>
     <p:spTree>
       <p:nvGrpSpPr>
@@ -16223,14 +16323,7 @@
         <p:cNvGrpSpPr/>
         <p:nvPr/>
       </p:nvGrpSpPr>
-      <p:grpSpPr>
-        <a:xfrm>
-          <a:off x="0" y="0"/>
-          <a:ext cx="0" cy="0"/>
-          <a:chOff x="0" y="0"/>
-          <a:chExt cx="0" cy="0"/>
-        </a:xfrm>
-      </p:grpSpPr>
+      <p:grpSpPr/>
       <p:sp>
         <p:nvSpPr>
           <p:cNvPr id="2" name="Title 1"/>
@@ -16247,7 +16340,7 @@
           <a:lstStyle/>
           <a:p>
             <a:r>
-              <a:t>Future State Architecture</a:t>
+              <a:t>Year-over-Year Finding (NEW VERSION)</a:t>
             </a:r>
           </a:p>
         </p:txBody>
@@ -16266,9 +16359,7 @@
         <p:txBody>
           <a:bodyPr/>
           <a:lstStyle/>
-          <a:p>
-            <a:endParaRPr/>
-          </a:p>
+          <a:p/>
         </p:txBody>
       </p:sp>
       <p:sp>
@@ -16311,40 +16402,329 @@
           <a:lstStyle/>
           <a:p>
             <a:pPr algn="ctr"/>
-            <a:endParaRPr/>
-          </a:p>
-        </p:txBody>
-      </p:sp>
-      <p:sp>
-        <p:nvSpPr>
-          <p:cNvPr id="5" name="TextBox 4"/>
-          <p:cNvSpPr txBox="1"/>
+          </a:p>
+        </p:txBody>
+      </p:sp>
+      <p:sp>
+        <p:nvSpPr>
+          <p:cNvPr id="5" name="Rounded Rectangle 4"/>
+          <p:cNvSpPr/>
           <p:nvPr/>
         </p:nvSpPr>
         <p:spPr>
           <a:xfrm>
-            <a:off x="2000000" y="2500000"/>
-            <a:ext cx="8000000" cy="2000000"/>
-          </a:xfrm>
-          <a:prstGeom prst="rect">
+            <a:off x="400000" y="1100000"/>
+            <a:ext cx="11400000" cy="1500000"/>
+          </a:xfrm>
+          <a:prstGeom prst="roundRect">
             <a:avLst/>
           </a:prstGeom>
-          <a:noFill/>
-        </p:spPr>
-        <p:txBody>
-          <a:bodyPr wrap="none">
-            <a:spAutoFit/>
-          </a:bodyPr>
+          <a:solidFill>
+            <a:srgbClr val="FCE4EC"/>
+          </a:solidFill>
+          <a:ln>
+            <a:noFill/>
+          </a:ln>
+        </p:spPr>
+        <p:style>
+          <a:lnRef idx="1">
+            <a:schemeClr val="accent1"/>
+          </a:lnRef>
+          <a:fillRef idx="3">
+            <a:schemeClr val="accent1"/>
+          </a:fillRef>
+          <a:effectRef idx="2">
+            <a:schemeClr val="accent1"/>
+          </a:effectRef>
+          <a:fontRef idx="minor">
+            <a:schemeClr val="lt1"/>
+          </a:fontRef>
+        </p:style>
+        <p:txBody>
+          <a:bodyPr rtlCol="0" anchor="ctr" wrap="square" tIns="127000" bIns="127000" lIns="152400" rIns="152400"/>
           <a:lstStyle/>
           <a:p>
             <a:pPr algn="ctr"/>
             <a:r>
-              <a:rPr sz="1800" i="1">
-                <a:solidFill>
-                  <a:srgbClr val="555555"/>
-                </a:solidFill>
-              </a:rPr>
-              <a:t>[Insert Future State Architecture Diagram]</a:t>
+              <a:rPr sz="1300" b="1">
+                <a:solidFill>
+                  <a:srgbClr val="333333"/>
+                </a:solidFill>
+              </a:rPr>
+              <a:t>2025: Adverse weather INCREASED daytime taxi demand in Manhattan (+15.6%)</a:t>
+            </a:r>
+          </a:p>
+          <a:p>
+            <a:r>
+              <a:rPr sz="1300" b="1">
+                <a:solidFill>
+                  <a:srgbClr val="333333"/>
+                </a:solidFill>
+              </a:rPr>
+              <a:t>and Brooklyn (+20.6%) as riders switched from walking/transit to cabs.</a:t>
+            </a:r>
+          </a:p>
+          <a:p>
+            <a:r>
+              <a:rPr sz="1000" b="0">
+                <a:solidFill>
+                  <a:srgbClr val="333333"/>
+                </a:solidFill>
+              </a:rPr>
+              <a:t/>
+            </a:r>
+          </a:p>
+          <a:p>
+            <a:r>
+              <a:rPr sz="1300" b="1">
+                <a:solidFill>
+                  <a:srgbClr val="333333"/>
+                </a:solidFill>
+              </a:rPr>
+              <a:t>2026: That same weather DECREASED demand everywhere. Manhattan -18.4%,</a:t>
+            </a:r>
+          </a:p>
+          <a:p>
+            <a:r>
+              <a:rPr sz="1300" b="1">
+                <a:solidFill>
+                  <a:srgbClr val="333333"/>
+                </a:solidFill>
+              </a:rPr>
+              <a:t>Brooklyn -9.7%, Queens -24.3%, Bronx -24.1%.</a:t>
+            </a:r>
+          </a:p>
+        </p:txBody>
+      </p:sp>
+      <p:sp>
+        <p:nvSpPr>
+          <p:cNvPr id="6" name="Rounded Rectangle 5"/>
+          <p:cNvSpPr/>
+          <p:nvPr/>
+        </p:nvSpPr>
+        <p:spPr>
+          <a:xfrm>
+            <a:off x="400000" y="2900000"/>
+            <a:ext cx="5400000" cy="1600000"/>
+          </a:xfrm>
+          <a:prstGeom prst="roundRect">
+            <a:avLst/>
+          </a:prstGeom>
+          <a:solidFill>
+            <a:srgbClr val="E3F2FD"/>
+          </a:solidFill>
+          <a:ln>
+            <a:noFill/>
+          </a:ln>
+        </p:spPr>
+        <p:style>
+          <a:lnRef idx="1">
+            <a:schemeClr val="accent1"/>
+          </a:lnRef>
+          <a:fillRef idx="3">
+            <a:schemeClr val="accent1"/>
+          </a:fillRef>
+          <a:effectRef idx="2">
+            <a:schemeClr val="accent1"/>
+          </a:effectRef>
+          <a:fontRef idx="minor">
+            <a:schemeClr val="lt1"/>
+          </a:fontRef>
+        </p:style>
+        <p:txBody>
+          <a:bodyPr rtlCol="0" anchor="ctr" wrap="square" tIns="127000" bIns="127000" lIns="152400" rIns="152400"/>
+          <a:lstStyle/>
+          <a:p>
+            <a:pPr algn="ctr"/>
+            <a:r>
+              <a:rPr sz="1300" b="1">
+                <a:solidFill>
+                  <a:srgbClr val="333333"/>
+                </a:solidFill>
+              </a:rPr>
+              <a:t>Is the comparison fair?</a:t>
+            </a:r>
+          </a:p>
+          <a:p>
+            <a:r>
+              <a:rPr sz="1000" b="0">
+                <a:solidFill>
+                  <a:srgbClr val="333333"/>
+                </a:solidFill>
+              </a:rPr>
+              <a:t/>
+            </a:r>
+          </a:p>
+          <a:p>
+            <a:r>
+              <a:rPr sz="1100" b="0">
+                <a:solidFill>
+                  <a:srgbClr val="333333"/>
+                </a:solidFill>
+              </a:rPr>
+              <a:t>Same months (Jan-May), same vehicle types, same DQ</a:t>
+            </a:r>
+          </a:p>
+          <a:p>
+            <a:r>
+              <a:rPr sz="1100" b="0">
+                <a:solidFill>
+                  <a:srgbClr val="333333"/>
+                </a:solidFill>
+              </a:rPr>
+              <a:t>filters applied to both years. Weather matched on</a:t>
+            </a:r>
+          </a:p>
+          <a:p>
+            <a:r>
+              <a:rPr sz="1100" b="0">
+                <a:solidFill>
+                  <a:srgbClr val="333333"/>
+                </a:solidFill>
+              </a:rPr>
+              <a:t>same hourly granularity. 3.0% flagged invalid in both.</a:t>
+            </a:r>
+          </a:p>
+        </p:txBody>
+      </p:sp>
+      <p:sp>
+        <p:nvSpPr>
+          <p:cNvPr id="7" name="Rounded Rectangle 6"/>
+          <p:cNvSpPr/>
+          <p:nvPr/>
+        </p:nvSpPr>
+        <p:spPr>
+          <a:xfrm>
+            <a:off x="6100000" y="2900000"/>
+            <a:ext cx="5700000" cy="1600000"/>
+          </a:xfrm>
+          <a:prstGeom prst="roundRect">
+            <a:avLst/>
+          </a:prstGeom>
+          <a:solidFill>
+            <a:srgbClr val="FFF3E0"/>
+          </a:solidFill>
+          <a:ln>
+            <a:noFill/>
+          </a:ln>
+        </p:spPr>
+        <p:style>
+          <a:lnRef idx="1">
+            <a:schemeClr val="accent1"/>
+          </a:lnRef>
+          <a:fillRef idx="3">
+            <a:schemeClr val="accent1"/>
+          </a:fillRef>
+          <a:effectRef idx="2">
+            <a:schemeClr val="accent1"/>
+          </a:effectRef>
+          <a:fontRef idx="minor">
+            <a:schemeClr val="lt1"/>
+          </a:fontRef>
+        </p:style>
+        <p:txBody>
+          <a:bodyPr rtlCol="0" anchor="ctr" wrap="square" tIns="127000" bIns="127000" lIns="152400" rIns="152400"/>
+          <a:lstStyle/>
+          <a:p>
+            <a:pPr algn="ctr"/>
+            <a:r>
+              <a:rPr sz="1300" b="1">
+                <a:solidFill>
+                  <a:srgbClr val="333333"/>
+                </a:solidFill>
+              </a:rPr>
+              <a:t>What drove it?</a:t>
+            </a:r>
+          </a:p>
+          <a:p>
+            <a:r>
+              <a:rPr sz="1000" b="0">
+                <a:solidFill>
+                  <a:srgbClr val="333333"/>
+                </a:solidFill>
+              </a:rPr>
+              <a:t/>
+            </a:r>
+          </a:p>
+          <a:p>
+            <a:r>
+              <a:rPr sz="1100" b="0">
+                <a:solidFill>
+                  <a:srgbClr val="333333"/>
+                </a:solidFill>
+              </a:rPr>
+              <a:t>Snow severity doubled: 11.6 in (2025) vs 25.2 in (2026)</a:t>
+            </a:r>
+          </a:p>
+          <a:p>
+            <a:r>
+              <a:rPr sz="1100" b="0">
+                <a:solidFill>
+                  <a:srgbClr val="333333"/>
+                </a:solidFill>
+              </a:rPr>
+              <a:t>Snow hours: 84 vs 133. Rain still boosts demand both years.</a:t>
+            </a:r>
+          </a:p>
+          <a:p>
+            <a:r>
+              <a:rPr sz="1100" b="0">
+                <a:solidFill>
+                  <a:srgbClr val="333333"/>
+                </a:solidFill>
+              </a:rPr>
+              <a:t>Snow drove Manhattan -31.3%, Queens -31.4% in 2026.</a:t>
+            </a:r>
+          </a:p>
+        </p:txBody>
+      </p:sp>
+      <p:sp>
+        <p:nvSpPr>
+          <p:cNvPr id="8" name="Rounded Rectangle 7"/>
+          <p:cNvSpPr/>
+          <p:nvPr/>
+        </p:nvSpPr>
+        <p:spPr>
+          <a:xfrm>
+            <a:off x="400000" y="4800000"/>
+            <a:ext cx="11400000" cy="1000000"/>
+          </a:xfrm>
+          <a:prstGeom prst="roundRect">
+            <a:avLst/>
+          </a:prstGeom>
+          <a:solidFill>
+            <a:srgbClr val="E8F5E9"/>
+          </a:solidFill>
+          <a:ln>
+            <a:noFill/>
+          </a:ln>
+        </p:spPr>
+        <p:style>
+          <a:lnRef idx="1">
+            <a:schemeClr val="accent1"/>
+          </a:lnRef>
+          <a:fillRef idx="3">
+            <a:schemeClr val="accent1"/>
+          </a:fillRef>
+          <a:effectRef idx="2">
+            <a:schemeClr val="accent1"/>
+          </a:effectRef>
+          <a:fontRef idx="minor">
+            <a:schemeClr val="lt1"/>
+          </a:fontRef>
+        </p:style>
+        <p:txBody>
+          <a:bodyPr rtlCol="0" anchor="ctr" wrap="square" tIns="127000" bIns="127000" lIns="152400" rIns="152400"/>
+          <a:lstStyle/>
+          <a:p>
+            <a:pPr algn="ctr"/>
+            <a:r>
+              <a:rPr sz="1200" b="1">
+                <a:solidFill>
+                  <a:srgbClr val="333333"/>
+                </a:solidFill>
+              </a:rPr>
+              <a:t>So What? Pre-position vehicles before forecasted snow events, prioritize rush-hour coverage. Rain = revenue opportunity (+11-22% demand). Snow = risk requiring proactive fleet response (-19% to -31% demand).</a:t>
             </a:r>
           </a:p>
         </p:txBody>
@@ -16357,8 +16737,8 @@
 </p:sld>
 </file>
 
-<file path=ppt/slides/slide28.xml><?xml version="1.0" encoding="utf-8"?>
-<p:sld xmlns:a="http://schemas.openxmlformats.org/drawingml/2006/main" xmlns:r="http://schemas.openxmlformats.org/officeDocument/2006/relationships" xmlns:p="http://schemas.openxmlformats.org/presentationml/2006/main">
+<file path=ppt/slides/slide29.xml><?xml version="1.0" encoding="utf-8"?>
+<p:sld xmlns:a="http://schemas.openxmlformats.org/drawingml/2006/main" xmlns:p="http://schemas.openxmlformats.org/presentationml/2006/main" xmlns:r="http://schemas.openxmlformats.org/officeDocument/2006/relationships">
   <p:cSld>
     <p:spTree>
       <p:nvGrpSpPr>
@@ -16366,14 +16746,7 @@
         <p:cNvGrpSpPr/>
         <p:nvPr/>
       </p:nvGrpSpPr>
-      <p:grpSpPr>
-        <a:xfrm>
-          <a:off x="0" y="0"/>
-          <a:ext cx="0" cy="0"/>
-          <a:chOff x="0" y="0"/>
-          <a:chExt cx="0" cy="0"/>
-        </a:xfrm>
-      </p:grpSpPr>
+      <p:grpSpPr/>
       <p:sp>
         <p:nvSpPr>
           <p:cNvPr id="2" name="Title 1"/>
@@ -16390,7 +16763,7 @@
           <a:lstStyle/>
           <a:p>
             <a:r>
-              <a:t>Recommendation</a:t>
+              <a:t>Streamlit Dashboard (NEW VERSION - place before Tableau)</a:t>
             </a:r>
           </a:p>
         </p:txBody>
@@ -16409,9 +16782,7 @@
         <p:txBody>
           <a:bodyPr/>
           <a:lstStyle/>
-          <a:p>
-            <a:endParaRPr/>
-          </a:p>
+          <a:p/>
         </p:txBody>
       </p:sp>
       <p:sp>
@@ -16454,7 +16825,6 @@
           <a:lstStyle/>
           <a:p>
             <a:pPr algn="ctr"/>
-            <a:endParaRPr/>
           </a:p>
         </p:txBody>
       </p:sp>
@@ -16466,8 +16836,8 @@
         </p:nvSpPr>
         <p:spPr>
           <a:xfrm>
-            <a:off x="400000" y="1200000"/>
-            <a:ext cx="11400000" cy="1800000"/>
+            <a:off x="400000" y="1100000"/>
+            <a:ext cx="11400000" cy="800000"/>
           </a:xfrm>
           <a:prstGeom prst="roundRect">
             <a:avLst/>
@@ -16494,32 +16864,27 @@
           </a:fontRef>
         </p:style>
         <p:txBody>
-          <a:bodyPr wrap="square" rtlCol="0" anchor="ctr"/>
+          <a:bodyPr rtlCol="0" anchor="ctr" wrap="square" tIns="127000" bIns="127000" lIns="152400" rIns="152400"/>
           <a:lstStyle/>
           <a:p>
             <a:pPr algn="ctr"/>
             <a:r>
-              <a:rPr sz="1400" b="1">
+              <a:rPr sz="1400" b="0">
                 <a:solidFill>
                   <a:srgbClr val="333333"/>
                 </a:solidFill>
               </a:rPr>
-              <a:t>Implement a storm-response protocol: pre-position 15-20% more vehicles in Manhattan and Brooklyn during forecasted snow events, with priority coverage during rush hours (7-10 AM, 4-7 PM).</a:t>
-            </a:r>
-          </a:p>
-          <a:p>
-            <a:pPr algn="ctr">
-              <a:spcBef>
-                <a:spcPts val="800"/>
-              </a:spcBef>
-            </a:pPr>
-            <a:r>
-              <a:rPr sz="1200">
-                <a:solidFill>
-                  <a:srgbClr val="555555"/>
-                </a:solidFill>
-              </a:rPr>
-              <a:t>Rain remains a revenue opportunity (demand increases). Snow is the risk requiring proactive response.</a:t>
+              <a:t>[Insert Streamlit Dashboard Screenshot]</a:t>
+            </a:r>
+          </a:p>
+          <a:p>
+            <a:r>
+              <a:rPr sz="1200" b="0">
+                <a:solidFill>
+                  <a:srgbClr val="333333"/>
+                </a:solidFill>
+              </a:rPr>
+              <a:t>Deployed on Streamlit Community Cloud | Live Snowflake connection | 6 interactive visualizations with borough tabs</a:t>
             </a:r>
           </a:p>
         </p:txBody>
@@ -16532,8 +16897,8 @@
         </p:nvSpPr>
         <p:spPr>
           <a:xfrm>
-            <a:off x="400000" y="3400000"/>
-            <a:ext cx="5400000" cy="1500000"/>
+            <a:off x="400000" y="2100000"/>
+            <a:ext cx="5400000" cy="2400000"/>
           </a:xfrm>
           <a:prstGeom prst="roundRect">
             <a:avLst/>
@@ -16560,32 +16925,87 @@
           </a:fontRef>
         </p:style>
         <p:txBody>
-          <a:bodyPr wrap="square" rtlCol="0" anchor="ctr"/>
+          <a:bodyPr rtlCol="0" anchor="ctr" wrap="square" tIns="127000" bIns="127000" lIns="152400" rIns="152400"/>
           <a:lstStyle/>
           <a:p>
             <a:pPr algn="ctr"/>
             <a:r>
               <a:rPr sz="1400" b="1">
                 <a:solidFill>
-                  <a:srgbClr val="2E7D32"/>
-                </a:solidFill>
-              </a:rPr>
-              <a:t>Actionable Next Step</a:t>
-            </a:r>
-          </a:p>
-          <a:p>
-            <a:pPr>
-              <a:spcBef>
-                <a:spcPts val="800"/>
-              </a:spcBef>
-            </a:pPr>
-            <a:r>
-              <a:rPr sz="1200">
-                <a:solidFill>
                   <a:srgbClr val="333333"/>
                 </a:solidFill>
               </a:rPr>
-              <a:t>Integrate hourly weather forecasts into dispatch. Trigger pre-positioning 2 hours before snow onset. Track revenue-per-storm-hour as the improvement KPI.</a:t>
+              <a:t>6 Visualizations Tell the Story</a:t>
+            </a:r>
+          </a:p>
+          <a:p>
+            <a:r>
+              <a:rPr sz="1000" b="0">
+                <a:solidFill>
+                  <a:srgbClr val="333333"/>
+                </a:solidFill>
+              </a:rPr>
+              <a:t/>
+            </a:r>
+          </a:p>
+          <a:p>
+            <a:r>
+              <a:rPr sz="1100" b="0">
+                <a:solidFill>
+                  <a:srgbClr val="333333"/>
+                </a:solidFill>
+              </a:rPr>
+              <a:t>1. Monthly trip volume (YoY growth trend)</a:t>
+            </a:r>
+          </a:p>
+          <a:p>
+            <a:r>
+              <a:rPr sz="1100" b="0">
+                <a:solidFill>
+                  <a:srgbClr val="333333"/>
+                </a:solidFill>
+              </a:rPr>
+              <a:t>2. Weekday vs. weekend hourly demand patterns</a:t>
+            </a:r>
+          </a:p>
+          <a:p>
+            <a:r>
+              <a:rPr sz="1100" b="0">
+                <a:solidFill>
+                  <a:srgbClr val="333333"/>
+                </a:solidFill>
+              </a:rPr>
+              <a:t>3. Average trip cost by weather (stable across conditions)</a:t>
+            </a:r>
+          </a:p>
+          <a:p>
+            <a:r>
+              <a:rPr sz="1100" b="0">
+                <a:solidFill>
+                  <a:srgbClr val="333333"/>
+                </a:solidFill>
+              </a:rPr>
+              <a:t>4. Weather's demand effect flipped 2025 to 2026 (core finding)</a:t>
+            </a:r>
+          </a:p>
+          <a:p>
+            <a:r>
+              <a:rPr sz="1100" b="0">
+                <a:solidFill>
+                  <a:srgbClr val="333333"/>
+                </a:solidFill>
+              </a:rPr>
+              <a:t>5. Rain vs. snow breakdown (snow is the driver)</a:t>
+            </a:r>
+          </a:p>
+          <a:p>
+            <a:r>
+              <a:rPr sz="1100" b="0">
+                <a:solidFill>
+                  <a:srgbClr val="333333"/>
+                </a:solidFill>
+              </a:rPr>
+              <a:t>6. Revenue per storm-hour (dollar impact, rush vs off-peak)</a:t>
             </a:r>
           </a:p>
         </p:txBody>
@@ -16598,8 +17018,8 @@
         </p:nvSpPr>
         <p:spPr>
           <a:xfrm>
-            <a:off x="6100000" y="3400000"/>
-            <a:ext cx="5700000" cy="1500000"/>
+            <a:off x="6100000" y="2100000"/>
+            <a:ext cx="5700000" cy="2400000"/>
           </a:xfrm>
           <a:prstGeom prst="roundRect">
             <a:avLst/>
@@ -16626,99 +17046,77 @@
           </a:fontRef>
         </p:style>
         <p:txBody>
-          <a:bodyPr wrap="square" rtlCol="0" anchor="ctr"/>
+          <a:bodyPr rtlCol="0" anchor="ctr" wrap="square" tIns="127000" bIns="127000" lIns="152400" rIns="152400"/>
           <a:lstStyle/>
           <a:p>
             <a:pPr algn="ctr"/>
             <a:r>
               <a:rPr sz="1400" b="1">
                 <a:solidFill>
-                  <a:srgbClr val="E65100"/>
-                </a:solidFill>
-              </a:rPr>
-              <a:t>Implementation Cost</a:t>
-            </a:r>
-          </a:p>
-          <a:p>
-            <a:pPr>
-              <a:spcBef>
-                <a:spcPts val="800"/>
-              </a:spcBef>
-            </a:pPr>
-            <a:r>
-              <a:rPr sz="1200">
-                <a:solidFill>
                   <a:srgbClr val="333333"/>
                 </a:solidFill>
               </a:rPr>
-              <a:t>1-2 sprint integration. Requires: weather API ($0), Snowpipe for real-time data (included), alerting logic (1 engineer, 2 weeks).</a:t>
-            </a:r>
-          </a:p>
-        </p:txBody>
-      </p:sp>
-    </p:spTree>
-  </p:cSld>
-  <p:clrMapOvr>
-    <a:masterClrMapping/>
-  </p:clrMapOvr>
-</p:sld>
-</file>
-
-<file path=ppt/slides/slide29.xml><?xml version="1.0" encoding="utf-8"?>
-<p:sld xmlns:a="http://schemas.openxmlformats.org/drawingml/2006/main" xmlns:r="http://schemas.openxmlformats.org/officeDocument/2006/relationships" xmlns:p="http://schemas.openxmlformats.org/presentationml/2006/main">
-  <p:cSld>
-    <p:spTree>
-      <p:nvGrpSpPr>
-        <p:cNvPr id="1" name=""/>
-        <p:cNvGrpSpPr/>
-        <p:nvPr/>
-      </p:nvGrpSpPr>
-      <p:grpSpPr>
-        <a:xfrm>
-          <a:off x="0" y="0"/>
-          <a:ext cx="0" cy="0"/>
-          <a:chOff x="0" y="0"/>
-          <a:chExt cx="0" cy="0"/>
-        </a:xfrm>
-      </p:grpSpPr>
-      <p:sp>
-        <p:nvSpPr>
-          <p:cNvPr id="2" name="Title 1"/>
-          <p:cNvSpPr>
-            <a:spLocks noGrp="1"/>
-          </p:cNvSpPr>
-          <p:nvPr>
-            <p:ph type="ctrTitle"/>
-          </p:nvPr>
-        </p:nvSpPr>
-        <p:spPr/>
-        <p:txBody>
-          <a:bodyPr/>
-          <a:lstStyle/>
-          <a:p>
-            <a:r>
-              <a:t>Thank You</a:t>
-            </a:r>
-          </a:p>
-        </p:txBody>
-      </p:sp>
-      <p:sp>
-        <p:nvSpPr>
-          <p:cNvPr id="3" name="Subtitle 2"/>
-          <p:cNvSpPr>
-            <a:spLocks noGrp="1"/>
-          </p:cNvSpPr>
-          <p:nvPr>
-            <p:ph type="subTitle" idx="1"/>
-          </p:nvPr>
-        </p:nvSpPr>
-        <p:spPr/>
-        <p:txBody>
-          <a:bodyPr/>
-          <a:lstStyle/>
-          <a:p>
-            <a:r>
-              <a:t>Questions?</a:t>
+              <a:t>Key Insights from the Dashboard</a:t>
+            </a:r>
+          </a:p>
+          <a:p>
+            <a:r>
+              <a:rPr sz="1000" b="0">
+                <a:solidFill>
+                  <a:srgbClr val="333333"/>
+                </a:solidFill>
+              </a:rPr>
+              <a:t/>
+            </a:r>
+          </a:p>
+          <a:p>
+            <a:r>
+              <a:rPr sz="1100" b="0">
+                <a:solidFill>
+                  <a:srgbClr val="333333"/>
+                </a:solidFill>
+              </a:rPr>
+              <a:t>Manhattan: +15.6% demand in storms (2025) to -18.4% (2026)</a:t>
+            </a:r>
+          </a:p>
+          <a:p>
+            <a:r>
+              <a:rPr sz="1100" b="0">
+                <a:solidFill>
+                  <a:srgbClr val="333333"/>
+                </a:solidFill>
+              </a:rPr>
+              <a:t>Snow drove -31% demand in Manhattan/Queens in 2026</a:t>
+            </a:r>
+          </a:p>
+          <a:p>
+            <a:r>
+              <a:rPr sz="1100" b="0">
+                <a:solidFill>
+                  <a:srgbClr val="333333"/>
+                </a:solidFill>
+              </a:rPr>
+              <a:t>Rain STILL boosts demand (+11-22%) in both years</a:t>
+            </a:r>
+          </a:p>
+          <a:p>
+            <a:r>
+              <a:rPr sz="1100" b="0">
+                <a:solidFill>
+                  <a:srgbClr val="333333"/>
+                </a:solidFill>
+              </a:rPr>
+              <a:t>Trip cost stable across weather (volume, not price, changes)</a:t>
+            </a:r>
+          </a:p>
+          <a:p>
+            <a:r>
+              <a:rPr sz="1100" b="0">
+                <a:solidFill>
+                  <a:srgbClr val="333333"/>
+                </a:solidFill>
+              </a:rPr>
+              <a:t>Rush-hour storm losses exceed off-peak by 3-5x</a:t>
             </a:r>
           </a:p>
         </p:txBody>
@@ -16818,7 +17216,7 @@
 </file>
 
 <file path=ppt/slides/slide30.xml><?xml version="1.0" encoding="utf-8"?>
-<p:sld xmlns:a="http://schemas.openxmlformats.org/drawingml/2006/main" xmlns:r="http://schemas.openxmlformats.org/officeDocument/2006/relationships" xmlns:p="http://schemas.openxmlformats.org/presentationml/2006/main">
+<p:sld xmlns:a="http://schemas.openxmlformats.org/drawingml/2006/main" xmlns:p="http://schemas.openxmlformats.org/presentationml/2006/main" xmlns:r="http://schemas.openxmlformats.org/officeDocument/2006/relationships">
   <p:cSld>
     <p:spTree>
       <p:nvGrpSpPr>
@@ -16826,14 +17224,7 @@
         <p:cNvGrpSpPr/>
         <p:nvPr/>
       </p:nvGrpSpPr>
-      <p:grpSpPr>
-        <a:xfrm>
-          <a:off x="0" y="0"/>
-          <a:ext cx="0" cy="0"/>
-          <a:chOff x="0" y="0"/>
-          <a:chExt cx="0" cy="0"/>
-        </a:xfrm>
-      </p:grpSpPr>
+      <p:grpSpPr/>
       <p:sp>
         <p:nvSpPr>
           <p:cNvPr id="2" name="Title 1"/>
@@ -16850,7 +17241,7 @@
           <a:lstStyle/>
           <a:p>
             <a:r>
-              <a:t>AI Use Disclosure</a:t>
+              <a:t>Recommendation (NEW VERSION)</a:t>
             </a:r>
           </a:p>
         </p:txBody>
@@ -16869,9 +17260,7 @@
         <p:txBody>
           <a:bodyPr/>
           <a:lstStyle/>
-          <a:p>
-            <a:endParaRPr/>
-          </a:p>
+          <a:p/>
         </p:txBody>
       </p:sp>
       <p:sp>
@@ -16914,7 +17303,6 @@
           <a:lstStyle/>
           <a:p>
             <a:pPr algn="ctr"/>
-            <a:endParaRPr/>
           </a:p>
         </p:txBody>
       </p:sp>
@@ -16927,13 +17315,13 @@
         <p:spPr>
           <a:xfrm>
             <a:off x="400000" y="1100000"/>
-            <a:ext cx="11400000" cy="500000"/>
+            <a:ext cx="11400000" cy="1400000"/>
           </a:xfrm>
           <a:prstGeom prst="roundRect">
             <a:avLst/>
           </a:prstGeom>
           <a:solidFill>
-            <a:srgbClr val="1A237E"/>
+            <a:srgbClr val="FCE4EC"/>
           </a:solidFill>
           <a:ln>
             <a:noFill/>
@@ -16954,17 +17342,47 @@
           </a:fontRef>
         </p:style>
         <p:txBody>
-          <a:bodyPr wrap="square" rtlCol="0" anchor="ctr"/>
+          <a:bodyPr rtlCol="0" anchor="ctr" wrap="square" tIns="127000" bIns="127000" lIns="152400" rIns="152400"/>
           <a:lstStyle/>
           <a:p>
             <a:pPr algn="ctr"/>
             <a:r>
-              <a:rPr sz="1300" b="1">
-                <a:solidFill>
-                  <a:srgbClr val="FFFFFF"/>
-                </a:solidFill>
-              </a:rPr>
-              <a:t>  Where We Used AI                    What For                              What We Verified</a:t>
+              <a:rPr sz="1400" b="1">
+                <a:solidFill>
+                  <a:srgbClr val="333333"/>
+                </a:solidFill>
+              </a:rPr>
+              <a:t>Implement a storm-response protocol: pre-position 15-20% more vehicles in Manhattan and</a:t>
+            </a:r>
+          </a:p>
+          <a:p>
+            <a:r>
+              <a:rPr sz="1400" b="1">
+                <a:solidFill>
+                  <a:srgbClr val="333333"/>
+                </a:solidFill>
+              </a:rPr>
+              <a:t>Brooklyn during forecasted snow events, with priority coverage during rush hours (7-10 AM, 4-7 PM).</a:t>
+            </a:r>
+          </a:p>
+          <a:p>
+            <a:r>
+              <a:rPr sz="1000" b="0">
+                <a:solidFill>
+                  <a:srgbClr val="333333"/>
+                </a:solidFill>
+              </a:rPr>
+              <a:t/>
+            </a:r>
+          </a:p>
+          <a:p>
+            <a:r>
+              <a:rPr sz="1200" b="0">
+                <a:solidFill>
+                  <a:srgbClr val="333333"/>
+                </a:solidFill>
+              </a:rPr>
+              <a:t>Rain events remain a revenue opportunity (demand increases +11-22%), so maintain or expand coverage during rain.</a:t>
             </a:r>
           </a:p>
         </p:txBody>
@@ -16977,8 +17395,99 @@
         </p:nvSpPr>
         <p:spPr>
           <a:xfrm>
-            <a:off x="400000" y="1650000"/>
-            <a:ext cx="11400000" cy="500000"/>
+            <a:off x="400000" y="2800000"/>
+            <a:ext cx="5400000" cy="1800000"/>
+          </a:xfrm>
+          <a:prstGeom prst="roundRect">
+            <a:avLst/>
+          </a:prstGeom>
+          <a:solidFill>
+            <a:srgbClr val="E8F5E9"/>
+          </a:solidFill>
+          <a:ln>
+            <a:noFill/>
+          </a:ln>
+        </p:spPr>
+        <p:style>
+          <a:lnRef idx="1">
+            <a:schemeClr val="accent1"/>
+          </a:lnRef>
+          <a:fillRef idx="3">
+            <a:schemeClr val="accent1"/>
+          </a:fillRef>
+          <a:effectRef idx="2">
+            <a:schemeClr val="accent1"/>
+          </a:effectRef>
+          <a:fontRef idx="minor">
+            <a:schemeClr val="lt1"/>
+          </a:fontRef>
+        </p:style>
+        <p:txBody>
+          <a:bodyPr rtlCol="0" anchor="ctr" wrap="square" tIns="127000" bIns="127000" lIns="152400" rIns="152400"/>
+          <a:lstStyle/>
+          <a:p>
+            <a:pPr algn="ctr"/>
+            <a:r>
+              <a:rPr sz="1400" b="1">
+                <a:solidFill>
+                  <a:srgbClr val="333333"/>
+                </a:solidFill>
+              </a:rPr>
+              <a:t>Actionable Next Step</a:t>
+            </a:r>
+          </a:p>
+          <a:p>
+            <a:r>
+              <a:rPr sz="1000" b="0">
+                <a:solidFill>
+                  <a:srgbClr val="333333"/>
+                </a:solidFill>
+              </a:rPr>
+              <a:t/>
+            </a:r>
+          </a:p>
+          <a:p>
+            <a:r>
+              <a:rPr sz="1200" b="0">
+                <a:solidFill>
+                  <a:srgbClr val="333333"/>
+                </a:solidFill>
+              </a:rPr>
+              <a:t>Integrate hourly weather forecasts into dispatch.</a:t>
+            </a:r>
+          </a:p>
+          <a:p>
+            <a:r>
+              <a:rPr sz="1200" b="0">
+                <a:solidFill>
+                  <a:srgbClr val="333333"/>
+                </a:solidFill>
+              </a:rPr>
+              <a:t>Trigger pre-positioning 2 hours before snow onset.</a:t>
+            </a:r>
+          </a:p>
+          <a:p>
+            <a:r>
+              <a:rPr sz="1200" b="0">
+                <a:solidFill>
+                  <a:srgbClr val="333333"/>
+                </a:solidFill>
+              </a:rPr>
+              <a:t>Track revenue-per-storm-hour as the KPI.</a:t>
+            </a:r>
+          </a:p>
+        </p:txBody>
+      </p:sp>
+      <p:sp>
+        <p:nvSpPr>
+          <p:cNvPr id="7" name="Rounded Rectangle 6"/>
+          <p:cNvSpPr/>
+          <p:nvPr/>
+        </p:nvSpPr>
+        <p:spPr>
+          <a:xfrm>
+            <a:off x="6100000" y="2800000"/>
+            <a:ext cx="5700000" cy="1800000"/>
           </a:xfrm>
           <a:prstGeom prst="roundRect">
             <a:avLst/>
@@ -17005,37 +17514,220 @@
           </a:fontRef>
         </p:style>
         <p:txBody>
-          <a:bodyPr wrap="square" rtlCol="0" anchor="ctr"/>
+          <a:bodyPr rtlCol="0" anchor="ctr" wrap="square" tIns="127000" bIns="127000" lIns="152400" rIns="152400"/>
           <a:lstStyle/>
           <a:p>
             <a:pPr algn="ctr"/>
             <a:r>
-              <a:rPr sz="1200">
-                <a:solidFill>
-                  <a:srgbClr val="2D2D2D"/>
-                </a:solidFill>
-              </a:rPr>
-              <a:t>  [Tool]                                        [Purpose]                                    [Verification]</a:t>
-            </a:r>
-          </a:p>
-        </p:txBody>
-      </p:sp>
-      <p:sp>
-        <p:nvSpPr>
-          <p:cNvPr id="7" name="Rounded Rectangle 6"/>
+              <a:rPr sz="1400" b="1">
+                <a:solidFill>
+                  <a:srgbClr val="333333"/>
+                </a:solidFill>
+              </a:rPr>
+              <a:t>Implementation Cost</a:t>
+            </a:r>
+          </a:p>
+          <a:p>
+            <a:r>
+              <a:rPr sz="1000" b="0">
+                <a:solidFill>
+                  <a:srgbClr val="333333"/>
+                </a:solidFill>
+              </a:rPr>
+              <a:t/>
+            </a:r>
+          </a:p>
+          <a:p>
+            <a:r>
+              <a:rPr sz="1200" b="0">
+                <a:solidFill>
+                  <a:srgbClr val="333333"/>
+                </a:solidFill>
+              </a:rPr>
+              <a:t>1-2 sprint integration with existing dispatch</a:t>
+            </a:r>
+          </a:p>
+          <a:p>
+            <a:r>
+              <a:rPr sz="1200" b="0">
+                <a:solidFill>
+                  <a:srgbClr val="333333"/>
+                </a:solidFill>
+              </a:rPr>
+              <a:t>Weather API subscription: $0 (Open-Meteo)</a:t>
+            </a:r>
+          </a:p>
+          <a:p>
+            <a:r>
+              <a:rPr sz="1200" b="0">
+                <a:solidFill>
+                  <a:srgbClr val="333333"/>
+                </a:solidFill>
+              </a:rPr>
+              <a:t>Snowpipe for real-time data: included in Snowflake</a:t>
+            </a:r>
+          </a:p>
+          <a:p>
+            <a:r>
+              <a:rPr sz="1200" b="0">
+                <a:solidFill>
+                  <a:srgbClr val="333333"/>
+                </a:solidFill>
+              </a:rPr>
+              <a:t>Alerting logic: 1 engineer, 2 weeks</a:t>
+            </a:r>
+          </a:p>
+        </p:txBody>
+      </p:sp>
+    </p:spTree>
+  </p:cSld>
+  <p:clrMapOvr>
+    <a:masterClrMapping/>
+  </p:clrMapOvr>
+</p:sld>
+</file>
+
+<file path=ppt/slides/slide31.xml><?xml version="1.0" encoding="utf-8"?>
+<p:sld xmlns:a="http://schemas.openxmlformats.org/drawingml/2006/main" xmlns:p="http://schemas.openxmlformats.org/presentationml/2006/main" xmlns:r="http://schemas.openxmlformats.org/officeDocument/2006/relationships">
+  <p:cSld>
+    <p:spTree>
+      <p:nvGrpSpPr>
+        <p:cNvPr id="1" name=""/>
+        <p:cNvGrpSpPr/>
+        <p:nvPr/>
+      </p:nvGrpSpPr>
+      <p:grpSpPr/>
+      <p:sp>
+        <p:nvSpPr>
+          <p:cNvPr id="2" name="Text Placeholder 1"/>
+          <p:cNvSpPr>
+            <a:spLocks noGrp="1"/>
+          </p:cNvSpPr>
+          <p:nvPr>
+            <p:ph type="body" idx="13" sz="quarter"/>
+          </p:nvPr>
+        </p:nvSpPr>
+        <p:spPr/>
+        <p:txBody>
+          <a:bodyPr/>
+          <a:lstStyle/>
+          <a:p/>
+        </p:txBody>
+      </p:sp>
+      <p:sp>
+        <p:nvSpPr>
+          <p:cNvPr id="3" name="Title 2"/>
+          <p:cNvSpPr>
+            <a:spLocks noGrp="1"/>
+          </p:cNvSpPr>
+          <p:nvPr>
+            <p:ph type="title"/>
+          </p:nvPr>
+        </p:nvSpPr>
+        <p:spPr/>
+        <p:txBody>
+          <a:bodyPr/>
+          <a:lstStyle/>
+          <a:p>
+            <a:r>
+              <a:t>6</a:t>
+            </a:r>
+          </a:p>
+        </p:txBody>
+      </p:sp>
+      <p:sp>
+        <p:nvSpPr>
+          <p:cNvPr id="4" name="Subtitle 3"/>
+          <p:cNvSpPr>
+            <a:spLocks noGrp="1"/>
+          </p:cNvSpPr>
+          <p:nvPr>
+            <p:ph type="subTitle" idx="1"/>
+          </p:nvPr>
+        </p:nvSpPr>
+        <p:spPr/>
+        <p:txBody>
+          <a:bodyPr/>
+          <a:lstStyle/>
+          <a:p>
+            <a:r>
+              <a:t>Extensions: Beyond the Requirements</a:t>
+            </a:r>
+          </a:p>
+        </p:txBody>
+      </p:sp>
+    </p:spTree>
+  </p:cSld>
+  <p:clrMapOvr>
+    <a:masterClrMapping/>
+  </p:clrMapOvr>
+</p:sld>
+</file>
+
+<file path=ppt/slides/slide32.xml><?xml version="1.0" encoding="utf-8"?>
+<p:sld xmlns:a="http://schemas.openxmlformats.org/drawingml/2006/main" xmlns:p="http://schemas.openxmlformats.org/presentationml/2006/main" xmlns:r="http://schemas.openxmlformats.org/officeDocument/2006/relationships">
+  <p:cSld>
+    <p:spTree>
+      <p:nvGrpSpPr>
+        <p:cNvPr id="1" name=""/>
+        <p:cNvGrpSpPr/>
+        <p:nvPr/>
+      </p:nvGrpSpPr>
+      <p:grpSpPr/>
+      <p:sp>
+        <p:nvSpPr>
+          <p:cNvPr id="2" name="Title 1"/>
+          <p:cNvSpPr>
+            <a:spLocks noGrp="1"/>
+          </p:cNvSpPr>
+          <p:nvPr>
+            <p:ph type="title"/>
+          </p:nvPr>
+        </p:nvSpPr>
+        <p:spPr/>
+        <p:txBody>
+          <a:bodyPr/>
+          <a:lstStyle/>
+          <a:p>
+            <a:r>
+              <a:t>Extensions Overview</a:t>
+            </a:r>
+          </a:p>
+        </p:txBody>
+      </p:sp>
+      <p:sp>
+        <p:nvSpPr>
+          <p:cNvPr id="3" name="Content Placeholder 2"/>
+          <p:cNvSpPr>
+            <a:spLocks noGrp="1"/>
+          </p:cNvSpPr>
+          <p:nvPr>
+            <p:ph idx="1"/>
+          </p:nvPr>
+        </p:nvSpPr>
+        <p:spPr/>
+        <p:txBody>
+          <a:bodyPr/>
+          <a:lstStyle/>
+          <a:p/>
+        </p:txBody>
+      </p:sp>
+      <p:sp>
+        <p:nvSpPr>
+          <p:cNvPr id="4" name="Rectangle 3"/>
           <p:cNvSpPr/>
           <p:nvPr/>
         </p:nvSpPr>
         <p:spPr>
           <a:xfrm>
-            <a:off x="400000" y="2200000"/>
-            <a:ext cx="11400000" cy="500000"/>
-          </a:xfrm>
-          <a:prstGeom prst="roundRect">
+            <a:off x="0" y="800000"/>
+            <a:ext cx="12192000" cy="80000"/>
+          </a:xfrm>
+          <a:prstGeom prst="rect">
             <a:avLst/>
           </a:prstGeom>
           <a:solidFill>
-            <a:srgbClr val="F0F7FF"/>
+            <a:srgbClr val="FE3082"/>
           </a:solidFill>
           <a:ln>
             <a:noFill/>
@@ -17056,31 +17748,134 @@
           </a:fontRef>
         </p:style>
         <p:txBody>
-          <a:bodyPr wrap="square" rtlCol="0" anchor="ctr"/>
+          <a:bodyPr rtlCol="0" anchor="ctr"/>
           <a:lstStyle/>
           <a:p>
             <a:pPr algn="ctr"/>
-            <a:r>
-              <a:rPr sz="1200">
-                <a:solidFill>
-                  <a:srgbClr val="2D2D2D"/>
-                </a:solidFill>
-              </a:rPr>
-              <a:t>  [Tool]                                        [Purpose]                                    [Verification]</a:t>
-            </a:r>
-          </a:p>
-        </p:txBody>
-      </p:sp>
-      <p:sp>
-        <p:nvSpPr>
-          <p:cNvPr id="8" name="Rounded Rectangle 7"/>
+          </a:p>
+        </p:txBody>
+      </p:sp>
+      <p:sp>
+        <p:nvSpPr>
+          <p:cNvPr id="5" name="Rounded Rectangle 4"/>
           <p:cNvSpPr/>
           <p:nvPr/>
         </p:nvSpPr>
         <p:spPr>
           <a:xfrm>
-            <a:off x="400000" y="2750000"/>
-            <a:ext cx="11400000" cy="500000"/>
+            <a:off x="400000" y="1100000"/>
+            <a:ext cx="3500000" cy="2400000"/>
+          </a:xfrm>
+          <a:prstGeom prst="roundRect">
+            <a:avLst/>
+          </a:prstGeom>
+          <a:solidFill>
+            <a:srgbClr val="E8F5E9"/>
+          </a:solidFill>
+          <a:ln>
+            <a:noFill/>
+          </a:ln>
+        </p:spPr>
+        <p:style>
+          <a:lnRef idx="1">
+            <a:schemeClr val="accent1"/>
+          </a:lnRef>
+          <a:fillRef idx="3">
+            <a:schemeClr val="accent1"/>
+          </a:fillRef>
+          <a:effectRef idx="2">
+            <a:schemeClr val="accent1"/>
+          </a:effectRef>
+          <a:fontRef idx="minor">
+            <a:schemeClr val="lt1"/>
+          </a:fontRef>
+        </p:style>
+        <p:txBody>
+          <a:bodyPr rtlCol="0" anchor="ctr" wrap="square" tIns="127000" bIns="127000" lIns="152400" rIns="152400"/>
+          <a:lstStyle/>
+          <a:p>
+            <a:pPr algn="ctr"/>
+            <a:r>
+              <a:rPr sz="1600" b="1">
+                <a:solidFill>
+                  <a:srgbClr val="333333"/>
+                </a:solidFill>
+              </a:rPr>
+              <a:t>Streamlit Dashboard</a:t>
+            </a:r>
+          </a:p>
+          <a:p>
+            <a:r>
+              <a:rPr sz="1000" b="0">
+                <a:solidFill>
+                  <a:srgbClr val="333333"/>
+                </a:solidFill>
+              </a:rPr>
+              <a:t/>
+            </a:r>
+          </a:p>
+          <a:p>
+            <a:r>
+              <a:rPr sz="1200" b="0">
+                <a:solidFill>
+                  <a:srgbClr val="333333"/>
+                </a:solidFill>
+              </a:rPr>
+              <a:t>Deployed interactive app</a:t>
+            </a:r>
+          </a:p>
+          <a:p>
+            <a:r>
+              <a:rPr sz="1200" b="0">
+                <a:solidFill>
+                  <a:srgbClr val="333333"/>
+                </a:solidFill>
+              </a:rPr>
+              <a:t>6 progressive visualizations</a:t>
+            </a:r>
+          </a:p>
+          <a:p>
+            <a:r>
+              <a:rPr sz="1200" b="0">
+                <a:solidFill>
+                  <a:srgbClr val="333333"/>
+                </a:solidFill>
+              </a:rPr>
+              <a:t>Live Snowflake connection</a:t>
+            </a:r>
+          </a:p>
+          <a:p>
+            <a:r>
+              <a:rPr sz="1200" b="0">
+                <a:solidFill>
+                  <a:srgbClr val="333333"/>
+                </a:solidFill>
+              </a:rPr>
+              <a:t>Streamlit Community Cloud</a:t>
+            </a:r>
+          </a:p>
+          <a:p>
+            <a:r>
+              <a:rPr sz="1200" b="0">
+                <a:solidFill>
+                  <a:srgbClr val="333333"/>
+                </a:solidFill>
+              </a:rPr>
+              <a:t>CI/CD via GitHub Actions</a:t>
+            </a:r>
+          </a:p>
+        </p:txBody>
+      </p:sp>
+      <p:sp>
+        <p:nvSpPr>
+          <p:cNvPr id="6" name="Rounded Rectangle 5"/>
+          <p:cNvSpPr/>
+          <p:nvPr/>
+        </p:nvSpPr>
+        <p:spPr>
+          <a:xfrm>
+            <a:off x="4200000" y="1100000"/>
+            <a:ext cx="3500000" cy="2400000"/>
           </a:xfrm>
           <a:prstGeom prst="roundRect">
             <a:avLst/>
@@ -17107,31 +17902,91 @@
           </a:fontRef>
         </p:style>
         <p:txBody>
-          <a:bodyPr wrap="square" rtlCol="0" anchor="ctr"/>
+          <a:bodyPr rtlCol="0" anchor="ctr" wrap="square" tIns="127000" bIns="127000" lIns="152400" rIns="152400"/>
           <a:lstStyle/>
           <a:p>
             <a:pPr algn="ctr"/>
             <a:r>
-              <a:rPr sz="1200">
-                <a:solidFill>
-                  <a:srgbClr val="2D2D2D"/>
-                </a:solidFill>
-              </a:rPr>
-              <a:t>  [Tool]                                        [Purpose]                                    [Verification]</a:t>
-            </a:r>
-          </a:p>
-        </p:txBody>
-      </p:sp>
-      <p:sp>
-        <p:nvSpPr>
-          <p:cNvPr id="9" name="Rounded Rectangle 8"/>
+              <a:rPr sz="1600" b="1">
+                <a:solidFill>
+                  <a:srgbClr val="333333"/>
+                </a:solidFill>
+              </a:rPr>
+              <a:t>BigQuery ML</a:t>
+            </a:r>
+          </a:p>
+          <a:p>
+            <a:r>
+              <a:rPr sz="1000" b="0">
+                <a:solidFill>
+                  <a:srgbClr val="333333"/>
+                </a:solidFill>
+              </a:rPr>
+              <a:t/>
+            </a:r>
+          </a:p>
+          <a:p>
+            <a:r>
+              <a:rPr sz="1200" b="0">
+                <a:solidFill>
+                  <a:srgbClr val="333333"/>
+                </a:solidFill>
+              </a:rPr>
+              <a:t>K-Means trip segmentation</a:t>
+            </a:r>
+          </a:p>
+          <a:p>
+            <a:r>
+              <a:rPr sz="1200" b="0">
+                <a:solidFill>
+                  <a:srgbClr val="333333"/>
+                </a:solidFill>
+              </a:rPr>
+              <a:t>Tested k=3, 4, 5, 6</a:t>
+            </a:r>
+          </a:p>
+          <a:p>
+            <a:r>
+              <a:rPr sz="1200" b="0">
+                <a:solidFill>
+                  <a:srgbClr val="333333"/>
+                </a:solidFill>
+              </a:rPr>
+              <a:t>Davies-Bouldin evaluation</a:t>
+            </a:r>
+          </a:p>
+          <a:p>
+            <a:r>
+              <a:rPr sz="1200" b="0">
+                <a:solidFill>
+                  <a:srgbClr val="333333"/>
+                </a:solidFill>
+              </a:rPr>
+              <a:t>4 clusters selected</a:t>
+            </a:r>
+          </a:p>
+          <a:p>
+            <a:r>
+              <a:rPr sz="1200" b="0">
+                <a:solidFill>
+                  <a:srgbClr val="333333"/>
+                </a:solidFill>
+              </a:rPr>
+              <a:t>Zone-level behavior patterns</a:t>
+            </a:r>
+          </a:p>
+        </p:txBody>
+      </p:sp>
+      <p:sp>
+        <p:nvSpPr>
+          <p:cNvPr id="7" name="Rounded Rectangle 6"/>
           <p:cNvSpPr/>
           <p:nvPr/>
         </p:nvSpPr>
         <p:spPr>
           <a:xfrm>
-            <a:off x="400000" y="3600000"/>
-            <a:ext cx="11400000" cy="2000000"/>
+            <a:off x="8000000" y="1100000"/>
+            <a:ext cx="3500000" cy="2400000"/>
           </a:xfrm>
           <a:prstGeom prst="roundRect">
             <a:avLst/>
@@ -17158,32 +18013,992 @@
           </a:fontRef>
         </p:style>
         <p:txBody>
-          <a:bodyPr wrap="square" rtlCol="0" anchor="ctr"/>
+          <a:bodyPr rtlCol="0" anchor="ctr" wrap="square" tIns="127000" bIns="127000" lIns="152400" rIns="152400"/>
           <a:lstStyle/>
           <a:p>
             <a:pPr algn="ctr"/>
             <a:r>
+              <a:rPr sz="1600" b="1">
+                <a:solidFill>
+                  <a:srgbClr val="333333"/>
+                </a:solidFill>
+              </a:rPr>
+              <a:t>Pipeline Orchestration</a:t>
+            </a:r>
+          </a:p>
+          <a:p>
+            <a:r>
+              <a:rPr sz="1000" b="0">
+                <a:solidFill>
+                  <a:srgbClr val="333333"/>
+                </a:solidFill>
+              </a:rPr>
+              <a:t/>
+            </a:r>
+          </a:p>
+          <a:p>
+            <a:r>
+              <a:rPr sz="1200" b="0">
+                <a:solidFill>
+                  <a:srgbClr val="333333"/>
+                </a:solidFill>
+              </a:rPr>
+              <a:t>Single-command execution</a:t>
+            </a:r>
+          </a:p>
+          <a:p>
+            <a:r>
+              <a:rPr sz="1200" b="0">
+                <a:solidFill>
+                  <a:srgbClr val="333333"/>
+                </a:solidFill>
+              </a:rPr>
+              <a:t>7 steps, ~6 min end-to-end</a:t>
+            </a:r>
+          </a:p>
+          <a:p>
+            <a:r>
+              <a:rPr sz="1200" b="0">
+                <a:solidFill>
+                  <a:srgbClr val="333333"/>
+                </a:solidFill>
+              </a:rPr>
+              <a:t>Idempotent (safe to re-run)</a:t>
+            </a:r>
+          </a:p>
+          <a:p>
+            <a:r>
+              <a:rPr sz="1200" b="0">
+                <a:solidFill>
+                  <a:srgbClr val="333333"/>
+                </a:solidFill>
+              </a:rPr>
+              <a:t>Fail-fast with clear errors</a:t>
+            </a:r>
+          </a:p>
+          <a:p>
+            <a:r>
+              <a:rPr sz="1200" b="0">
+                <a:solidFill>
+                  <a:srgbClr val="333333"/>
+                </a:solidFill>
+              </a:rPr>
+              <a:t>Row count reconciliation</a:t>
+            </a:r>
+          </a:p>
+        </p:txBody>
+      </p:sp>
+      <p:sp>
+        <p:nvSpPr>
+          <p:cNvPr id="8" name="Rounded Rectangle 7"/>
+          <p:cNvSpPr/>
+          <p:nvPr/>
+        </p:nvSpPr>
+        <p:spPr>
+          <a:xfrm>
+            <a:off x="400000" y="3800000"/>
+            <a:ext cx="11400000" cy="900000"/>
+          </a:xfrm>
+          <a:prstGeom prst="roundRect">
+            <a:avLst/>
+          </a:prstGeom>
+          <a:solidFill>
+            <a:srgbClr val="FCE4EC"/>
+          </a:solidFill>
+          <a:ln>
+            <a:noFill/>
+          </a:ln>
+        </p:spPr>
+        <p:style>
+          <a:lnRef idx="1">
+            <a:schemeClr val="accent1"/>
+          </a:lnRef>
+          <a:fillRef idx="3">
+            <a:schemeClr val="accent1"/>
+          </a:fillRef>
+          <a:effectRef idx="2">
+            <a:schemeClr val="accent1"/>
+          </a:effectRef>
+          <a:fontRef idx="minor">
+            <a:schemeClr val="lt1"/>
+          </a:fontRef>
+        </p:style>
+        <p:txBody>
+          <a:bodyPr rtlCol="0" anchor="ctr" wrap="square" tIns="127000" bIns="127000" lIns="152400" rIns="152400"/>
+          <a:lstStyle/>
+          <a:p>
+            <a:pPr algn="ctr"/>
+            <a:r>
+              <a:rPr sz="1300" b="0">
+                <a:solidFill>
+                  <a:srgbClr val="333333"/>
+                </a:solidFill>
+              </a:rPr>
+              <a:t>All three extensions are genuinely integrated into the core project. The Streamlit app queries the same Gold layer as Tableau, the ML model uses the same mart data, and orchestration builds the entire pipeline.</a:t>
+            </a:r>
+          </a:p>
+        </p:txBody>
+      </p:sp>
+    </p:spTree>
+  </p:cSld>
+  <p:clrMapOvr>
+    <a:masterClrMapping/>
+  </p:clrMapOvr>
+</p:sld>
+</file>
+
+<file path=ppt/slides/slide33.xml><?xml version="1.0" encoding="utf-8"?>
+<p:sld xmlns:a="http://schemas.openxmlformats.org/drawingml/2006/main" xmlns:p="http://schemas.openxmlformats.org/presentationml/2006/main" xmlns:r="http://schemas.openxmlformats.org/officeDocument/2006/relationships">
+  <p:cSld>
+    <p:spTree>
+      <p:nvGrpSpPr>
+        <p:cNvPr id="1" name=""/>
+        <p:cNvGrpSpPr/>
+        <p:nvPr/>
+      </p:nvGrpSpPr>
+      <p:grpSpPr/>
+      <p:sp>
+        <p:nvSpPr>
+          <p:cNvPr id="2" name="Title 1"/>
+          <p:cNvSpPr>
+            <a:spLocks noGrp="1"/>
+          </p:cNvSpPr>
+          <p:nvPr>
+            <p:ph type="title"/>
+          </p:nvPr>
+        </p:nvSpPr>
+        <p:spPr/>
+        <p:txBody>
+          <a:bodyPr/>
+          <a:lstStyle/>
+          <a:p>
+            <a:r>
+              <a:t>Extension: BigQuery ML Clustering</a:t>
+            </a:r>
+          </a:p>
+        </p:txBody>
+      </p:sp>
+      <p:sp>
+        <p:nvSpPr>
+          <p:cNvPr id="3" name="Content Placeholder 2"/>
+          <p:cNvSpPr>
+            <a:spLocks noGrp="1"/>
+          </p:cNvSpPr>
+          <p:nvPr>
+            <p:ph idx="1"/>
+          </p:nvPr>
+        </p:nvSpPr>
+        <p:spPr/>
+        <p:txBody>
+          <a:bodyPr/>
+          <a:lstStyle/>
+          <a:p/>
+        </p:txBody>
+      </p:sp>
+      <p:sp>
+        <p:nvSpPr>
+          <p:cNvPr id="4" name="Rectangle 3"/>
+          <p:cNvSpPr/>
+          <p:nvPr/>
+        </p:nvSpPr>
+        <p:spPr>
+          <a:xfrm>
+            <a:off x="0" y="800000"/>
+            <a:ext cx="12192000" cy="80000"/>
+          </a:xfrm>
+          <a:prstGeom prst="rect">
+            <a:avLst/>
+          </a:prstGeom>
+          <a:solidFill>
+            <a:srgbClr val="FE3082"/>
+          </a:solidFill>
+          <a:ln>
+            <a:noFill/>
+          </a:ln>
+        </p:spPr>
+        <p:style>
+          <a:lnRef idx="1">
+            <a:schemeClr val="accent1"/>
+          </a:lnRef>
+          <a:fillRef idx="3">
+            <a:schemeClr val="accent1"/>
+          </a:fillRef>
+          <a:effectRef idx="2">
+            <a:schemeClr val="accent1"/>
+          </a:effectRef>
+          <a:fontRef idx="minor">
+            <a:schemeClr val="lt1"/>
+          </a:fontRef>
+        </p:style>
+        <p:txBody>
+          <a:bodyPr rtlCol="0" anchor="ctr"/>
+          <a:lstStyle/>
+          <a:p>
+            <a:pPr algn="ctr"/>
+          </a:p>
+        </p:txBody>
+      </p:sp>
+      <p:sp>
+        <p:nvSpPr>
+          <p:cNvPr id="5" name="Rounded Rectangle 4"/>
+          <p:cNvSpPr/>
+          <p:nvPr/>
+        </p:nvSpPr>
+        <p:spPr>
+          <a:xfrm>
+            <a:off x="400000" y="1100000"/>
+            <a:ext cx="5400000" cy="2000000"/>
+          </a:xfrm>
+          <a:prstGeom prst="roundRect">
+            <a:avLst/>
+          </a:prstGeom>
+          <a:solidFill>
+            <a:srgbClr val="E3F2FD"/>
+          </a:solidFill>
+          <a:ln>
+            <a:noFill/>
+          </a:ln>
+        </p:spPr>
+        <p:style>
+          <a:lnRef idx="1">
+            <a:schemeClr val="accent1"/>
+          </a:lnRef>
+          <a:fillRef idx="3">
+            <a:schemeClr val="accent1"/>
+          </a:fillRef>
+          <a:effectRef idx="2">
+            <a:schemeClr val="accent1"/>
+          </a:effectRef>
+          <a:fontRef idx="minor">
+            <a:schemeClr val="lt1"/>
+          </a:fontRef>
+        </p:style>
+        <p:txBody>
+          <a:bodyPr rtlCol="0" anchor="ctr" wrap="square" tIns="127000" bIns="127000" lIns="152400" rIns="152400"/>
+          <a:lstStyle/>
+          <a:p>
+            <a:pPr algn="ctr"/>
+            <a:r>
               <a:rPr sz="1400" b="1">
                 <a:solidFill>
-                  <a:srgbClr val="E65100"/>
-                </a:solidFill>
-              </a:rPr>
-              <a:t>What We Rejected or Corrected From AI Suggestions</a:t>
-            </a:r>
-          </a:p>
-          <a:p>
-            <a:pPr>
-              <a:spcBef>
-                <a:spcPts val="800"/>
-              </a:spcBef>
-            </a:pPr>
-            <a:r>
-              <a:rPr sz="1200">
-                <a:solidFill>
-                  <a:srgbClr val="2D2D2D"/>
-                </a:solidFill>
-              </a:rPr>
-              <a:t>[Describe corrections made, things that required manual verification, etc.]</a:t>
+                  <a:srgbClr val="333333"/>
+                </a:solidFill>
+              </a:rPr>
+              <a:t>Approach</a:t>
+            </a:r>
+          </a:p>
+          <a:p>
+            <a:r>
+              <a:rPr sz="1000" b="0">
+                <a:solidFill>
+                  <a:srgbClr val="333333"/>
+                </a:solidFill>
+              </a:rPr>
+              <a:t/>
+            </a:r>
+          </a:p>
+          <a:p>
+            <a:r>
+              <a:rPr sz="1200" b="0">
+                <a:solidFill>
+                  <a:srgbClr val="333333"/>
+                </a:solidFill>
+              </a:rPr>
+              <a:t>Algorithm: K-Means (BigQuery ML)</a:t>
+            </a:r>
+          </a:p>
+          <a:p>
+            <a:r>
+              <a:rPr sz="1200" b="0">
+                <a:solidFill>
+                  <a:srgbClr val="333333"/>
+                </a:solidFill>
+              </a:rPr>
+              <a:t>Features: distance, duration, fare, tip, trip count,</a:t>
+            </a:r>
+          </a:p>
+          <a:p>
+            <a:r>
+              <a:rPr sz="1200" b="0">
+                <a:solidFill>
+                  <a:srgbClr val="333333"/>
+                </a:solidFill>
+              </a:rPr>
+              <a:t>  rush hour %, night %, weekend %, adverse weather %</a:t>
+            </a:r>
+          </a:p>
+          <a:p>
+            <a:r>
+              <a:rPr sz="1200" b="0">
+                <a:solidFill>
+                  <a:srgbClr val="333333"/>
+                </a:solidFill>
+              </a:rPr>
+              <a:t>Evaluation: Davies-Bouldin Index</a:t>
+            </a:r>
+          </a:p>
+          <a:p>
+            <a:r>
+              <a:rPr sz="1200" b="0">
+                <a:solidFill>
+                  <a:srgbClr val="333333"/>
+                </a:solidFill>
+              </a:rPr>
+              <a:t>  k=3 (1.78), k=4 (1.42), k=5 (1.50), k=6 (1.40)</a:t>
+            </a:r>
+          </a:p>
+          <a:p>
+            <a:r>
+              <a:rPr sz="1200" b="1">
+                <a:solidFill>
+                  <a:srgbClr val="333333"/>
+                </a:solidFill>
+              </a:rPr>
+              <a:t>Selected: k=4 (best quality + interpretability balance)</a:t>
+            </a:r>
+          </a:p>
+        </p:txBody>
+      </p:sp>
+      <p:sp>
+        <p:nvSpPr>
+          <p:cNvPr id="6" name="Rounded Rectangle 5"/>
+          <p:cNvSpPr/>
+          <p:nvPr/>
+        </p:nvSpPr>
+        <p:spPr>
+          <a:xfrm>
+            <a:off x="6100000" y="1100000"/>
+            <a:ext cx="5700000" cy="2000000"/>
+          </a:xfrm>
+          <a:prstGeom prst="roundRect">
+            <a:avLst/>
+          </a:prstGeom>
+          <a:solidFill>
+            <a:srgbClr val="FFF3E0"/>
+          </a:solidFill>
+          <a:ln>
+            <a:noFill/>
+          </a:ln>
+        </p:spPr>
+        <p:style>
+          <a:lnRef idx="1">
+            <a:schemeClr val="accent1"/>
+          </a:lnRef>
+          <a:fillRef idx="3">
+            <a:schemeClr val="accent1"/>
+          </a:fillRef>
+          <a:effectRef idx="2">
+            <a:schemeClr val="accent1"/>
+          </a:effectRef>
+          <a:fontRef idx="minor">
+            <a:schemeClr val="lt1"/>
+          </a:fontRef>
+        </p:style>
+        <p:txBody>
+          <a:bodyPr rtlCol="0" anchor="ctr" wrap="square" tIns="127000" bIns="127000" lIns="152400" rIns="152400"/>
+          <a:lstStyle/>
+          <a:p>
+            <a:pPr algn="ctr"/>
+            <a:r>
+              <a:rPr sz="1400" b="1">
+                <a:solidFill>
+                  <a:srgbClr val="333333"/>
+                </a:solidFill>
+              </a:rPr>
+              <a:t>4 Trip Segments Identified</a:t>
+            </a:r>
+          </a:p>
+          <a:p>
+            <a:r>
+              <a:rPr sz="1000" b="0">
+                <a:solidFill>
+                  <a:srgbClr val="333333"/>
+                </a:solidFill>
+              </a:rPr>
+              <a:t/>
+            </a:r>
+          </a:p>
+          <a:p>
+            <a:r>
+              <a:rPr sz="1200" b="0">
+                <a:solidFill>
+                  <a:srgbClr val="333333"/>
+                </a:solidFill>
+              </a:rPr>
+              <a:t>Cluster 1 - Standard Trips: 5 mi, 23 min, $32 avg</a:t>
+            </a:r>
+          </a:p>
+          <a:p>
+            <a:r>
+              <a:rPr sz="1200" b="0">
+                <a:solidFill>
+                  <a:srgbClr val="333333"/>
+                </a:solidFill>
+              </a:rPr>
+              <a:t>Cluster 2 - High-Value Long: 9 mi, 28 min, $72 avg</a:t>
+            </a:r>
+          </a:p>
+          <a:p>
+            <a:r>
+              <a:rPr sz="1200" b="0">
+                <a:solidFill>
+                  <a:srgbClr val="333333"/>
+                </a:solidFill>
+              </a:rPr>
+              <a:t>Cluster 3 - Short Everyday: 2.4 mi, 15 min, $25 avg</a:t>
+            </a:r>
+          </a:p>
+          <a:p>
+            <a:r>
+              <a:rPr sz="1200" b="0">
+                <a:solidFill>
+                  <a:srgbClr val="333333"/>
+                </a:solidFill>
+              </a:rPr>
+              <a:t>Cluster 4 - Slow/Congested: 7.6 mi, 36 min, $39 avg</a:t>
+            </a:r>
+          </a:p>
+          <a:p>
+            <a:r>
+              <a:rPr sz="1000" b="0">
+                <a:solidFill>
+                  <a:srgbClr val="333333"/>
+                </a:solidFill>
+              </a:rPr>
+              <a:t/>
+            </a:r>
+          </a:p>
+          <a:p>
+            <a:r>
+              <a:rPr sz="1200" b="1">
+                <a:solidFill>
+                  <a:srgbClr val="333333"/>
+                </a:solidFill>
+              </a:rPr>
+              <a:t>Short trips (Cluster 3) dominate: 375K of 470K sample</a:t>
+            </a:r>
+          </a:p>
+        </p:txBody>
+      </p:sp>
+      <p:sp>
+        <p:nvSpPr>
+          <p:cNvPr id="7" name="Rounded Rectangle 6"/>
+          <p:cNvSpPr/>
+          <p:nvPr/>
+        </p:nvSpPr>
+        <p:spPr>
+          <a:xfrm>
+            <a:off x="400000" y="3400000"/>
+            <a:ext cx="11400000" cy="900000"/>
+          </a:xfrm>
+          <a:prstGeom prst="roundRect">
+            <a:avLst/>
+          </a:prstGeom>
+          <a:solidFill>
+            <a:srgbClr val="E8F5E9"/>
+          </a:solidFill>
+          <a:ln>
+            <a:noFill/>
+          </a:ln>
+        </p:spPr>
+        <p:style>
+          <a:lnRef idx="1">
+            <a:schemeClr val="accent1"/>
+          </a:lnRef>
+          <a:fillRef idx="3">
+            <a:schemeClr val="accent1"/>
+          </a:fillRef>
+          <a:effectRef idx="2">
+            <a:schemeClr val="accent1"/>
+          </a:effectRef>
+          <a:fontRef idx="minor">
+            <a:schemeClr val="lt1"/>
+          </a:fontRef>
+        </p:style>
+        <p:txBody>
+          <a:bodyPr rtlCol="0" anchor="ctr" wrap="square" tIns="127000" bIns="127000" lIns="152400" rIns="152400"/>
+          <a:lstStyle/>
+          <a:p>
+            <a:pPr algn="ctr"/>
+            <a:r>
+              <a:rPr sz="1200" b="0">
+                <a:solidFill>
+                  <a:srgbClr val="333333"/>
+                </a:solidFill>
+              </a:rPr>
+              <a:t>Key Finding: Weather showed minimal variation across clusters (~10% adverse in all 4). This confirms weather impacts demand volume (fewer trips happen) rather than trip characteristics (distance, fare, duration stay the same). Independently validates the core Streamlit finding.</a:t>
+            </a:r>
+          </a:p>
+        </p:txBody>
+      </p:sp>
+    </p:spTree>
+  </p:cSld>
+  <p:clrMapOvr>
+    <a:masterClrMapping/>
+  </p:clrMapOvr>
+</p:sld>
+</file>
+
+<file path=ppt/slides/slide34.xml><?xml version="1.0" encoding="utf-8"?>
+<p:sld xmlns:a="http://schemas.openxmlformats.org/drawingml/2006/main" xmlns:p="http://schemas.openxmlformats.org/presentationml/2006/main" xmlns:r="http://schemas.openxmlformats.org/officeDocument/2006/relationships">
+  <p:cSld>
+    <p:spTree>
+      <p:nvGrpSpPr>
+        <p:cNvPr id="1" name=""/>
+        <p:cNvGrpSpPr/>
+        <p:nvPr/>
+      </p:nvGrpSpPr>
+      <p:grpSpPr/>
+      <p:sp>
+        <p:nvSpPr>
+          <p:cNvPr id="2" name="Title 1"/>
+          <p:cNvSpPr>
+            <a:spLocks noGrp="1"/>
+          </p:cNvSpPr>
+          <p:nvPr>
+            <p:ph type="title"/>
+          </p:nvPr>
+        </p:nvSpPr>
+        <p:spPr/>
+        <p:txBody>
+          <a:bodyPr/>
+          <a:lstStyle/>
+          <a:p>
+            <a:r>
+              <a:t>Extension: Pipeline Orchestration</a:t>
+            </a:r>
+          </a:p>
+        </p:txBody>
+      </p:sp>
+      <p:sp>
+        <p:nvSpPr>
+          <p:cNvPr id="3" name="Content Placeholder 2"/>
+          <p:cNvSpPr>
+            <a:spLocks noGrp="1"/>
+          </p:cNvSpPr>
+          <p:nvPr>
+            <p:ph idx="1"/>
+          </p:nvPr>
+        </p:nvSpPr>
+        <p:spPr/>
+        <p:txBody>
+          <a:bodyPr/>
+          <a:lstStyle/>
+          <a:p/>
+        </p:txBody>
+      </p:sp>
+      <p:sp>
+        <p:nvSpPr>
+          <p:cNvPr id="4" name="Rectangle 3"/>
+          <p:cNvSpPr/>
+          <p:nvPr/>
+        </p:nvSpPr>
+        <p:spPr>
+          <a:xfrm>
+            <a:off x="0" y="800000"/>
+            <a:ext cx="12192000" cy="80000"/>
+          </a:xfrm>
+          <a:prstGeom prst="rect">
+            <a:avLst/>
+          </a:prstGeom>
+          <a:solidFill>
+            <a:srgbClr val="FE3082"/>
+          </a:solidFill>
+          <a:ln>
+            <a:noFill/>
+          </a:ln>
+        </p:spPr>
+        <p:style>
+          <a:lnRef idx="1">
+            <a:schemeClr val="accent1"/>
+          </a:lnRef>
+          <a:fillRef idx="3">
+            <a:schemeClr val="accent1"/>
+          </a:fillRef>
+          <a:effectRef idx="2">
+            <a:schemeClr val="accent1"/>
+          </a:effectRef>
+          <a:fontRef idx="minor">
+            <a:schemeClr val="lt1"/>
+          </a:fontRef>
+        </p:style>
+        <p:txBody>
+          <a:bodyPr rtlCol="0" anchor="ctr"/>
+          <a:lstStyle/>
+          <a:p>
+            <a:pPr algn="ctr"/>
+          </a:p>
+        </p:txBody>
+      </p:sp>
+      <p:sp>
+        <p:nvSpPr>
+          <p:cNvPr id="5" name="Rounded Rectangle 4"/>
+          <p:cNvSpPr/>
+          <p:nvPr/>
+        </p:nvSpPr>
+        <p:spPr>
+          <a:xfrm>
+            <a:off x="400000" y="1100000"/>
+            <a:ext cx="5400000" cy="2800000"/>
+          </a:xfrm>
+          <a:prstGeom prst="roundRect">
+            <a:avLst/>
+          </a:prstGeom>
+          <a:solidFill>
+            <a:srgbClr val="FFF3E0"/>
+          </a:solidFill>
+          <a:ln>
+            <a:noFill/>
+          </a:ln>
+        </p:spPr>
+        <p:style>
+          <a:lnRef idx="1">
+            <a:schemeClr val="accent1"/>
+          </a:lnRef>
+          <a:fillRef idx="3">
+            <a:schemeClr val="accent1"/>
+          </a:fillRef>
+          <a:effectRef idx="2">
+            <a:schemeClr val="accent1"/>
+          </a:effectRef>
+          <a:fontRef idx="minor">
+            <a:schemeClr val="lt1"/>
+          </a:fontRef>
+        </p:style>
+        <p:txBody>
+          <a:bodyPr rtlCol="0" anchor="ctr" wrap="square" tIns="127000" bIns="127000" lIns="152400" rIns="152400"/>
+          <a:lstStyle/>
+          <a:p>
+            <a:pPr algn="ctr"/>
+            <a:r>
+              <a:rPr sz="1400" b="1">
+                <a:solidFill>
+                  <a:srgbClr val="333333"/>
+                </a:solidFill>
+              </a:rPr>
+              <a:t>One Command, Full Pipeline</a:t>
+            </a:r>
+          </a:p>
+          <a:p>
+            <a:r>
+              <a:rPr sz="1000" b="0">
+                <a:solidFill>
+                  <a:srgbClr val="333333"/>
+                </a:solidFill>
+              </a:rPr>
+              <a:t/>
+            </a:r>
+          </a:p>
+          <a:p>
+            <a:r>
+              <a:rPr sz="1300" b="1">
+                <a:solidFill>
+                  <a:srgbClr val="333333"/>
+                </a:solidFill>
+              </a:rPr>
+              <a:t>python pipeline/orchestrate.py</a:t>
+            </a:r>
+          </a:p>
+          <a:p>
+            <a:r>
+              <a:rPr sz="1000" b="0">
+                <a:solidFill>
+                  <a:srgbClr val="333333"/>
+                </a:solidFill>
+              </a:rPr>
+              <a:t/>
+            </a:r>
+          </a:p>
+          <a:p>
+            <a:r>
+              <a:rPr sz="1200" b="0">
+                <a:solidFill>
+                  <a:srgbClr val="333333"/>
+                </a:solidFill>
+              </a:rPr>
+              <a:t>Step 1: Create Bronze infrastructure (stage, tables)</a:t>
+            </a:r>
+          </a:p>
+          <a:p>
+            <a:r>
+              <a:rPr sz="1200" b="0">
+                <a:solidFill>
+                  <a:srgbClr val="333333"/>
+                </a:solidFill>
+              </a:rPr>
+              <a:t>Step 2: Load taxi + zone data from S3 (39.2M rows)</a:t>
+            </a:r>
+          </a:p>
+          <a:p>
+            <a:r>
+              <a:rPr sz="1200" b="0">
+                <a:solidFill>
+                  <a:srgbClr val="333333"/>
+                </a:solidFill>
+              </a:rPr>
+              <a:t>Step 3: Fetch weather from Open-Meteo API (7,248 hrs)</a:t>
+            </a:r>
+          </a:p>
+          <a:p>
+            <a:r>
+              <a:rPr sz="1200" b="0">
+                <a:solidFill>
+                  <a:srgbClr val="333333"/>
+                </a:solidFill>
+              </a:rPr>
+              <a:t>Step 4: Verify Bronze row counts (reconciliation)</a:t>
+            </a:r>
+          </a:p>
+          <a:p>
+            <a:r>
+              <a:rPr sz="1200" b="0">
+                <a:solidFill>
+                  <a:srgbClr val="333333"/>
+                </a:solidFill>
+              </a:rPr>
+              <a:t>Step 5: dbt run (Silver + Gold transformations)</a:t>
+            </a:r>
+          </a:p>
+          <a:p>
+            <a:r>
+              <a:rPr sz="1200" b="0">
+                <a:solidFill>
+                  <a:srgbClr val="333333"/>
+                </a:solidFill>
+              </a:rPr>
+              <a:t>Step 6: dbt test (32 automated quality checks)</a:t>
+            </a:r>
+          </a:p>
+          <a:p>
+            <a:r>
+              <a:rPr sz="1200" b="0">
+                <a:solidFill>
+                  <a:srgbClr val="333333"/>
+                </a:solidFill>
+              </a:rPr>
+              <a:t>Step 7: Print summary with counts at every layer</a:t>
+            </a:r>
+          </a:p>
+        </p:txBody>
+      </p:sp>
+      <p:sp>
+        <p:nvSpPr>
+          <p:cNvPr id="6" name="Rounded Rectangle 5"/>
+          <p:cNvSpPr/>
+          <p:nvPr/>
+        </p:nvSpPr>
+        <p:spPr>
+          <a:xfrm>
+            <a:off x="6100000" y="1100000"/>
+            <a:ext cx="5700000" cy="2800000"/>
+          </a:xfrm>
+          <a:prstGeom prst="roundRect">
+            <a:avLst/>
+          </a:prstGeom>
+          <a:solidFill>
+            <a:srgbClr val="E8F5E9"/>
+          </a:solidFill>
+          <a:ln>
+            <a:noFill/>
+          </a:ln>
+        </p:spPr>
+        <p:style>
+          <a:lnRef idx="1">
+            <a:schemeClr val="accent1"/>
+          </a:lnRef>
+          <a:fillRef idx="3">
+            <a:schemeClr val="accent1"/>
+          </a:fillRef>
+          <a:effectRef idx="2">
+            <a:schemeClr val="accent1"/>
+          </a:effectRef>
+          <a:fontRef idx="minor">
+            <a:schemeClr val="lt1"/>
+          </a:fontRef>
+        </p:style>
+        <p:txBody>
+          <a:bodyPr rtlCol="0" anchor="ctr" wrap="square" tIns="127000" bIns="127000" lIns="152400" rIns="152400"/>
+          <a:lstStyle/>
+          <a:p>
+            <a:pPr algn="ctr"/>
+            <a:r>
+              <a:rPr sz="1400" b="1">
+                <a:solidFill>
+                  <a:srgbClr val="333333"/>
+                </a:solidFill>
+              </a:rPr>
+              <a:t>Design Properties</a:t>
+            </a:r>
+          </a:p>
+          <a:p>
+            <a:r>
+              <a:rPr sz="1000" b="0">
+                <a:solidFill>
+                  <a:srgbClr val="333333"/>
+                </a:solidFill>
+              </a:rPr>
+              <a:t/>
+            </a:r>
+          </a:p>
+          <a:p>
+            <a:r>
+              <a:rPr sz="1300" b="1">
+                <a:solidFill>
+                  <a:srgbClr val="333333"/>
+                </a:solidFill>
+              </a:rPr>
+              <a:t>Idempotent</a:t>
+            </a:r>
+          </a:p>
+          <a:p>
+            <a:r>
+              <a:rPr sz="1100" b="0">
+                <a:solidFill>
+                  <a:srgbClr val="333333"/>
+                </a:solidFill>
+              </a:rPr>
+              <a:t>  CREATE OR REPLACE + COPY INTO means</a:t>
+            </a:r>
+          </a:p>
+          <a:p>
+            <a:r>
+              <a:rPr sz="1100" b="0">
+                <a:solidFill>
+                  <a:srgbClr val="333333"/>
+                </a:solidFill>
+              </a:rPr>
+              <a:t>  re-running never duplicates data</a:t>
+            </a:r>
+          </a:p>
+          <a:p>
+            <a:r>
+              <a:rPr sz="1000" b="0">
+                <a:solidFill>
+                  <a:srgbClr val="333333"/>
+                </a:solidFill>
+              </a:rPr>
+              <a:t/>
+            </a:r>
+          </a:p>
+          <a:p>
+            <a:r>
+              <a:rPr sz="1300" b="1">
+                <a:solidFill>
+                  <a:srgbClr val="333333"/>
+                </a:solidFill>
+              </a:rPr>
+              <a:t>Fail-Fast</a:t>
+            </a:r>
+          </a:p>
+          <a:p>
+            <a:r>
+              <a:rPr sz="1100" b="0">
+                <a:solidFill>
+                  <a:srgbClr val="333333"/>
+                </a:solidFill>
+              </a:rPr>
+              <a:t>  Any step failure stops immediately</a:t>
+            </a:r>
+          </a:p>
+          <a:p>
+            <a:r>
+              <a:rPr sz="1100" b="0">
+                <a:solidFill>
+                  <a:srgbClr val="333333"/>
+                </a:solidFill>
+              </a:rPr>
+              <a:t>  with a clear error message</a:t>
+            </a:r>
+          </a:p>
+          <a:p>
+            <a:r>
+              <a:rPr sz="1000" b="0">
+                <a:solidFill>
+                  <a:srgbClr val="333333"/>
+                </a:solidFill>
+              </a:rPr>
+              <a:t/>
+            </a:r>
+          </a:p>
+          <a:p>
+            <a:r>
+              <a:rPr sz="1300" b="1">
+                <a:solidFill>
+                  <a:srgbClr val="333333"/>
+                </a:solidFill>
+              </a:rPr>
+              <a:t>Verified</a:t>
+            </a:r>
+          </a:p>
+          <a:p>
+            <a:r>
+              <a:rPr sz="1100" b="0">
+                <a:solidFill>
+                  <a:srgbClr val="333333"/>
+                </a:solidFill>
+              </a:rPr>
+              <a:t>  Row counts checked against expected</a:t>
+            </a:r>
+          </a:p>
+          <a:p>
+            <a:r>
+              <a:rPr sz="1100" b="0">
+                <a:solidFill>
+                  <a:srgbClr val="333333"/>
+                </a:solidFill>
+              </a:rPr>
+              <a:t>  minimums before proceeding to next step</a:t>
+            </a:r>
+          </a:p>
+        </p:txBody>
+      </p:sp>
+      <p:sp>
+        <p:nvSpPr>
+          <p:cNvPr id="7" name="Rounded Rectangle 6"/>
+          <p:cNvSpPr/>
+          <p:nvPr/>
+        </p:nvSpPr>
+        <p:spPr>
+          <a:xfrm>
+            <a:off x="400000" y="4200000"/>
+            <a:ext cx="11400000" cy="700000"/>
+          </a:xfrm>
+          <a:prstGeom prst="roundRect">
+            <a:avLst/>
+          </a:prstGeom>
+          <a:solidFill>
+            <a:srgbClr val="E3F2FD"/>
+          </a:solidFill>
+          <a:ln>
+            <a:noFill/>
+          </a:ln>
+        </p:spPr>
+        <p:style>
+          <a:lnRef idx="1">
+            <a:schemeClr val="accent1"/>
+          </a:lnRef>
+          <a:fillRef idx="3">
+            <a:schemeClr val="accent1"/>
+          </a:fillRef>
+          <a:effectRef idx="2">
+            <a:schemeClr val="accent1"/>
+          </a:effectRef>
+          <a:fontRef idx="minor">
+            <a:schemeClr val="lt1"/>
+          </a:fontRef>
+        </p:style>
+        <p:txBody>
+          <a:bodyPr rtlCol="0" anchor="ctr" wrap="square" tIns="127000" bIns="127000" lIns="152400" rIns="152400"/>
+          <a:lstStyle/>
+          <a:p>
+            <a:pPr algn="ctr"/>
+            <a:r>
+              <a:rPr sz="1200" b="0">
+                <a:solidFill>
+                  <a:srgbClr val="333333"/>
+                </a:solidFill>
+              </a:rPr>
+              <a:t>Any team member can rebuild the entire pipeline from scratch with one command (~6 min). This eliminates 'works on my machine' and proves results are fully reproducible.</a:t>
             </a:r>
           </a:p>
         </p:txBody>
@@ -17338,23 +19153,23 @@
           <a:p>
             <a:pPr algn="ctr"/>
             <a:r>
-              <a:rPr sz="1500" b="1">
-                <a:solidFill>
-                  <a:srgbClr val="333333"/>
-                </a:solidFill>
-              </a:rPr>
-              <a:t>In 2025, adverse weather boosted taxi demand as riders switched to cabs. By 2026, that pattern reversed: snow now suppresses demand across all boroughs.</a:t>
+              <a:rPr sz="2200" b="1">
+                <a:solidFill>
+                  <a:srgbClr val="2D2D2D"/>
+                </a:solidFill>
+              </a:rPr>
+              <a:t>[STATE THE YEAR-OVER-YEAR FINDING IN ONE SENTENCE]</a:t>
             </a:r>
           </a:p>
           <a:p>
             <a:pPr algn="ctr"/>
             <a:r>
-              <a:rPr sz="1200">
+              <a:rPr sz="1400" i="1">
                 <a:solidFill>
                   <a:srgbClr val="555555"/>
                 </a:solidFill>
               </a:rPr>
-              <a:t>Snow severity doubled (25.2 in vs. 11.6 in), driving a city-wide shift from taxi-switching to trip avoidance</a:t>
+              <a:t>e.g., During adverse weather, trips dropped X% in outer boroughs but only Y% in Manhattan</a:t>
             </a:r>
           </a:p>
         </p:txBody>
@@ -17586,12 +19401,12 @@
           <a:p>
             <a:pPr algn="ctr"/>
             <a:r>
-              <a:rPr sz="1300" b="1">
-                <a:solidFill>
-                  <a:srgbClr val="333333"/>
-                </a:solidFill>
-              </a:rPr>
-              <a:t>Key Insight: Rush-hour storm losses now exceed off-peak losses by 3-5x, making targeted pre-positioning the highest-value intervention</a:t>
+              <a:rPr sz="1600" b="1">
+                <a:solidFill>
+                  <a:srgbClr val="2E7D32"/>
+                </a:solidFill>
+              </a:rPr>
+              <a:t>Key Insight: [One sentence connecting the finding to a business recommendation]</a:t>
             </a:r>
           </a:p>
         </p:txBody>
